--- a/Seminario de Sistemas/Clases/Clase 11 - Avance del proyecto integrador/Presentacion.pptx
+++ b/Seminario de Sistemas/Clases/Clase 11 - Avance del proyecto integrador/Presentacion.pptx
@@ -19,6 +19,12 @@
     <p:sldId id="267" r:id="rId18"/>
     <p:sldId id="268" r:id="rId19"/>
     <p:sldId id="269" r:id="rId20"/>
+    <p:sldId id="270" r:id="rId21"/>
+    <p:sldId id="271" r:id="rId22"/>
+    <p:sldId id="272" r:id="rId23"/>
+    <p:sldId id="273" r:id="rId24"/>
+    <p:sldId id="274" r:id="rId25"/>
+    <p:sldId id="275" r:id="rId26"/>
   </p:sldIdLst>
   <p:sldSz cx="12191695" cy="6858000" type="screen4x3"/>
   <p:notesSz cx="6858000" cy="9144000"/>
@@ -3619,111 +3625,21 @@
                 </a:solidFill>
                 <a:latin typeface="Calibri"/>
               </a:rPr>
-              <a:t>Taller PI — pasos guiados</a:t>
-            </a:r>
-          </a:p>
-        </p:txBody>
-      </p:sp>
-      <p:sp>
-        <p:nvSpPr>
-          <p:cNvPr id="5" name="Rounded Rectangle 4"/>
-          <p:cNvSpPr/>
-          <p:nvPr/>
-        </p:nvSpPr>
-        <p:spPr>
-          <a:xfrm>
-            <a:off x="457200" y="1234440"/>
-            <a:ext cx="11277295" cy="950976"/>
-          </a:xfrm>
-          <a:prstGeom prst="roundRect">
-            <a:avLst>
-              <a:gd name="adj" fmla="val 12000"/>
-            </a:avLst>
-          </a:prstGeom>
-          <a:solidFill>
-            <a:srgbClr val="F2F2F2"/>
-          </a:solidFill>
-          <a:ln>
-            <a:noFill/>
-          </a:ln>
-        </p:spPr>
-        <p:style>
-          <a:lnRef idx="1">
-            <a:schemeClr val="accent1"/>
-          </a:lnRef>
-          <a:fillRef idx="3">
-            <a:schemeClr val="accent1"/>
-          </a:fillRef>
-          <a:effectRef idx="2">
-            <a:schemeClr val="accent1"/>
-          </a:effectRef>
-          <a:fontRef idx="minor">
-            <a:schemeClr val="lt1"/>
-          </a:fontRef>
-        </p:style>
-        <p:txBody>
-          <a:bodyPr rtlCol="0" anchor="ctr"/>
-          <a:lstStyle/>
-          <a:p>
-            <a:pPr algn="ctr"/>
-          </a:p>
-        </p:txBody>
-      </p:sp>
-      <p:sp>
-        <p:nvSpPr>
-          <p:cNvPr id="6" name="Rounded Rectangle 5"/>
-          <p:cNvSpPr/>
-          <p:nvPr/>
-        </p:nvSpPr>
-        <p:spPr>
-          <a:xfrm>
-            <a:off x="594360" y="1490472"/>
-            <a:ext cx="438912" cy="438912"/>
-          </a:xfrm>
-          <a:prstGeom prst="roundRect">
-            <a:avLst>
-              <a:gd name="adj" fmla="val 12000"/>
-            </a:avLst>
-          </a:prstGeom>
-          <a:solidFill>
-            <a:srgbClr val="095292"/>
-          </a:solidFill>
-          <a:ln>
-            <a:noFill/>
-          </a:ln>
-        </p:spPr>
-        <p:style>
-          <a:lnRef idx="1">
-            <a:schemeClr val="accent1"/>
-          </a:lnRef>
-          <a:fillRef idx="3">
-            <a:schemeClr val="accent1"/>
-          </a:fillRef>
-          <a:effectRef idx="2">
-            <a:schemeClr val="accent1"/>
-          </a:effectRef>
-          <a:fontRef idx="minor">
-            <a:schemeClr val="lt1"/>
-          </a:fontRef>
-        </p:style>
-        <p:txBody>
-          <a:bodyPr rtlCol="0" anchor="ctr"/>
-          <a:lstStyle/>
-          <a:p>
-            <a:pPr algn="ctr"/>
-          </a:p>
-        </p:txBody>
-      </p:sp>
-      <p:sp>
-        <p:nvSpPr>
-          <p:cNvPr id="7" name="TextBox 6"/>
+              <a:t>Todo lo que se encuentra se convierte en backlog de deuda de diseño, no...</a:t>
+            </a:r>
+          </a:p>
+        </p:txBody>
+      </p:sp>
+      <p:sp>
+        <p:nvSpPr>
+          <p:cNvPr id="5" name="TextBox 4"/>
           <p:cNvSpPr txBox="1"/>
           <p:nvPr/>
         </p:nvSpPr>
         <p:spPr>
           <a:xfrm>
-            <a:off x="594360" y="1490472"/>
-            <a:ext cx="438912" cy="438912"/>
+            <a:off x="457200" y="1170432"/>
+            <a:ext cx="11277295" cy="5230368"/>
           </a:xfrm>
           <a:prstGeom prst="rect">
             <a:avLst/>
@@ -3731,677 +3647,143 @@
           <a:noFill/>
         </p:spPr>
         <p:txBody>
-          <a:bodyPr wrap="square" anchor="ctr"/>
-          <a:lstStyle/>
-          <a:p>
-            <a:pPr algn="ctr"/>
-            <a:r>
-              <a:rPr sz="1600" b="1" i="0">
-                <a:solidFill>
-                  <a:srgbClr val="FFFFFF"/>
-                </a:solidFill>
-                <a:latin typeface="Calibri"/>
-              </a:rPr>
-              <a:t>1</a:t>
-            </a:r>
-          </a:p>
-        </p:txBody>
-      </p:sp>
-      <p:sp>
-        <p:nvSpPr>
-          <p:cNvPr id="8" name="TextBox 7"/>
-          <p:cNvSpPr txBox="1"/>
-          <p:nvPr/>
-        </p:nvSpPr>
-        <p:spPr>
-          <a:xfrm>
-            <a:off x="1188720" y="1325880"/>
-            <a:ext cx="10271455" cy="786384"/>
-          </a:xfrm>
-          <a:prstGeom prst="rect">
-            <a:avLst/>
-          </a:prstGeom>
-          <a:noFill/>
-        </p:spPr>
-        <p:txBody>
-          <a:bodyPr wrap="square" anchor="ctr"/>
-          <a:lstStyle/>
-          <a:p>
-            <a:r>
-              <a:rPr sz="1500" b="1" i="0">
-                <a:solidFill>
-                  <a:srgbClr val="095292"/>
-                </a:solidFill>
-                <a:latin typeface="Calibri"/>
-              </a:rPr>
-              <a:t>Construir en Google Docs la matriz de trazabilidad de VetCare con las columnas RF, Caso de uso, Clase o clases implicadas y Mockup, incluyendo todos los requisitos del catalogo, y marcar en rojo cada fila incompleta.</a:t>
-            </a:r>
-          </a:p>
-        </p:txBody>
-      </p:sp>
-      <p:sp>
-        <p:nvSpPr>
-          <p:cNvPr id="9" name="Rounded Rectangle 8"/>
-          <p:cNvSpPr/>
-          <p:nvPr/>
-        </p:nvSpPr>
-        <p:spPr>
-          <a:xfrm>
-            <a:off x="457200" y="2276856"/>
-            <a:ext cx="11277295" cy="950976"/>
-          </a:xfrm>
-          <a:prstGeom prst="roundRect">
-            <a:avLst>
-              <a:gd name="adj" fmla="val 12000"/>
-            </a:avLst>
-          </a:prstGeom>
-          <a:solidFill>
-            <a:srgbClr val="E8F4FA"/>
-          </a:solidFill>
-          <a:ln>
-            <a:noFill/>
-          </a:ln>
-        </p:spPr>
-        <p:style>
-          <a:lnRef idx="1">
-            <a:schemeClr val="accent1"/>
-          </a:lnRef>
-          <a:fillRef idx="3">
-            <a:schemeClr val="accent1"/>
-          </a:fillRef>
-          <a:effectRef idx="2">
-            <a:schemeClr val="accent1"/>
-          </a:effectRef>
-          <a:fontRef idx="minor">
-            <a:schemeClr val="lt1"/>
-          </a:fontRef>
-        </p:style>
-        <p:txBody>
-          <a:bodyPr rtlCol="0" anchor="ctr"/>
-          <a:lstStyle/>
-          <a:p>
-            <a:pPr algn="ctr"/>
-          </a:p>
-        </p:txBody>
-      </p:sp>
-      <p:sp>
-        <p:nvSpPr>
-          <p:cNvPr id="10" name="Rounded Rectangle 9"/>
-          <p:cNvSpPr/>
-          <p:nvPr/>
-        </p:nvSpPr>
-        <p:spPr>
-          <a:xfrm>
-            <a:off x="594360" y="2532888"/>
-            <a:ext cx="438912" cy="438912"/>
-          </a:xfrm>
-          <a:prstGeom prst="roundRect">
-            <a:avLst>
-              <a:gd name="adj" fmla="val 12000"/>
-            </a:avLst>
-          </a:prstGeom>
-          <a:solidFill>
-            <a:srgbClr val="095292"/>
-          </a:solidFill>
-          <a:ln>
-            <a:noFill/>
-          </a:ln>
-        </p:spPr>
-        <p:style>
-          <a:lnRef idx="1">
-            <a:schemeClr val="accent1"/>
-          </a:lnRef>
-          <a:fillRef idx="3">
-            <a:schemeClr val="accent1"/>
-          </a:fillRef>
-          <a:effectRef idx="2">
-            <a:schemeClr val="accent1"/>
-          </a:effectRef>
-          <a:fontRef idx="minor">
-            <a:schemeClr val="lt1"/>
-          </a:fontRef>
-        </p:style>
-        <p:txBody>
-          <a:bodyPr rtlCol="0" anchor="ctr"/>
-          <a:lstStyle/>
-          <a:p>
-            <a:pPr algn="ctr"/>
-          </a:p>
-        </p:txBody>
-      </p:sp>
-      <p:sp>
-        <p:nvSpPr>
-          <p:cNvPr id="11" name="TextBox 10"/>
-          <p:cNvSpPr txBox="1"/>
-          <p:nvPr/>
-        </p:nvSpPr>
-        <p:spPr>
-          <a:xfrm>
-            <a:off x="594360" y="2532888"/>
-            <a:ext cx="438912" cy="438912"/>
-          </a:xfrm>
-          <a:prstGeom prst="rect">
-            <a:avLst/>
-          </a:prstGeom>
-          <a:noFill/>
-        </p:spPr>
-        <p:txBody>
-          <a:bodyPr wrap="square" anchor="ctr"/>
-          <a:lstStyle/>
-          <a:p>
-            <a:pPr algn="ctr"/>
-            <a:r>
-              <a:rPr sz="1600" b="1" i="0">
-                <a:solidFill>
-                  <a:srgbClr val="FFFFFF"/>
-                </a:solidFill>
-                <a:latin typeface="Calibri"/>
-              </a:rPr>
-              <a:t>2</a:t>
-            </a:r>
-          </a:p>
-        </p:txBody>
-      </p:sp>
-      <p:sp>
-        <p:nvSpPr>
-          <p:cNvPr id="12" name="TextBox 11"/>
-          <p:cNvSpPr txBox="1"/>
-          <p:nvPr/>
-        </p:nvSpPr>
-        <p:spPr>
-          <a:xfrm>
-            <a:off x="1188720" y="2368296"/>
-            <a:ext cx="10271455" cy="786384"/>
-          </a:xfrm>
-          <a:prstGeom prst="rect">
-            <a:avLst/>
-          </a:prstGeom>
-          <a:noFill/>
-        </p:spPr>
-        <p:txBody>
-          <a:bodyPr wrap="square" anchor="ctr"/>
-          <a:lstStyle/>
-          <a:p>
-            <a:r>
-              <a:rPr sz="1400" b="1" i="0">
-                <a:solidFill>
-                  <a:srgbClr val="095292"/>
-                </a:solidFill>
-                <a:latin typeface="Calibri"/>
-              </a:rPr>
-              <a:t>Levantar el glosario de nombres canonicos con minimo ocho conceptos del dominio (Propietario, Mascota, Consulta, Cita, Veterinario, Vacuna, Expediente, Bitacora), cada uno con definicion de una linea y sinonimos prohibidos, y renombrar en los artefactos todo lo que no coincida.</a:t>
-            </a:r>
-          </a:p>
-        </p:txBody>
-      </p:sp>
-      <p:sp>
-        <p:nvSpPr>
-          <p:cNvPr id="13" name="Rounded Rectangle 12"/>
-          <p:cNvSpPr/>
-          <p:nvPr/>
-        </p:nvSpPr>
-        <p:spPr>
-          <a:xfrm>
-            <a:off x="457200" y="3319272"/>
-            <a:ext cx="11277295" cy="950976"/>
-          </a:xfrm>
-          <a:prstGeom prst="roundRect">
-            <a:avLst>
-              <a:gd name="adj" fmla="val 12000"/>
-            </a:avLst>
-          </a:prstGeom>
-          <a:solidFill>
-            <a:srgbClr val="F2F2F2"/>
-          </a:solidFill>
-          <a:ln>
-            <a:noFill/>
-          </a:ln>
-        </p:spPr>
-        <p:style>
-          <a:lnRef idx="1">
-            <a:schemeClr val="accent1"/>
-          </a:lnRef>
-          <a:fillRef idx="3">
-            <a:schemeClr val="accent1"/>
-          </a:fillRef>
-          <a:effectRef idx="2">
-            <a:schemeClr val="accent1"/>
-          </a:effectRef>
-          <a:fontRef idx="minor">
-            <a:schemeClr val="lt1"/>
-          </a:fontRef>
-        </p:style>
-        <p:txBody>
-          <a:bodyPr rtlCol="0" anchor="ctr"/>
-          <a:lstStyle/>
-          <a:p>
-            <a:pPr algn="ctr"/>
-          </a:p>
-        </p:txBody>
-      </p:sp>
-      <p:sp>
-        <p:nvSpPr>
-          <p:cNvPr id="14" name="Rounded Rectangle 13"/>
-          <p:cNvSpPr/>
-          <p:nvPr/>
-        </p:nvSpPr>
-        <p:spPr>
-          <a:xfrm>
-            <a:off x="594360" y="3575304"/>
-            <a:ext cx="438912" cy="438912"/>
-          </a:xfrm>
-          <a:prstGeom prst="roundRect">
-            <a:avLst>
-              <a:gd name="adj" fmla="val 12000"/>
-            </a:avLst>
-          </a:prstGeom>
-          <a:solidFill>
-            <a:srgbClr val="095292"/>
-          </a:solidFill>
-          <a:ln>
-            <a:noFill/>
-          </a:ln>
-        </p:spPr>
-        <p:style>
-          <a:lnRef idx="1">
-            <a:schemeClr val="accent1"/>
-          </a:lnRef>
-          <a:fillRef idx="3">
-            <a:schemeClr val="accent1"/>
-          </a:fillRef>
-          <a:effectRef idx="2">
-            <a:schemeClr val="accent1"/>
-          </a:effectRef>
-          <a:fontRef idx="minor">
-            <a:schemeClr val="lt1"/>
-          </a:fontRef>
-        </p:style>
-        <p:txBody>
-          <a:bodyPr rtlCol="0" anchor="ctr"/>
-          <a:lstStyle/>
-          <a:p>
-            <a:pPr algn="ctr"/>
-          </a:p>
-        </p:txBody>
-      </p:sp>
-      <p:sp>
-        <p:nvSpPr>
-          <p:cNvPr id="15" name="TextBox 14"/>
-          <p:cNvSpPr txBox="1"/>
-          <p:nvPr/>
-        </p:nvSpPr>
-        <p:spPr>
-          <a:xfrm>
-            <a:off x="594360" y="3575304"/>
-            <a:ext cx="438912" cy="438912"/>
-          </a:xfrm>
-          <a:prstGeom prst="rect">
-            <a:avLst/>
-          </a:prstGeom>
-          <a:noFill/>
-        </p:spPr>
-        <p:txBody>
-          <a:bodyPr wrap="square" anchor="ctr"/>
-          <a:lstStyle/>
-          <a:p>
-            <a:pPr algn="ctr"/>
-            <a:r>
-              <a:rPr sz="1600" b="1" i="0">
-                <a:solidFill>
-                  <a:srgbClr val="FFFFFF"/>
-                </a:solidFill>
-                <a:latin typeface="Calibri"/>
-              </a:rPr>
-              <a:t>3</a:t>
-            </a:r>
-          </a:p>
-        </p:txBody>
-      </p:sp>
-      <p:sp>
-        <p:nvSpPr>
-          <p:cNvPr id="16" name="TextBox 15"/>
-          <p:cNvSpPr txBox="1"/>
-          <p:nvPr/>
-        </p:nvSpPr>
-        <p:spPr>
-          <a:xfrm>
-            <a:off x="1188720" y="3410712"/>
-            <a:ext cx="10271455" cy="786384"/>
-          </a:xfrm>
-          <a:prstGeom prst="rect">
-            <a:avLst/>
-          </a:prstGeom>
-          <a:noFill/>
-        </p:spPr>
-        <p:txBody>
-          <a:bodyPr wrap="square" anchor="ctr"/>
-          <a:lstStyle/>
-          <a:p>
-            <a:r>
-              <a:rPr sz="1400" b="1" i="0">
-                <a:solidFill>
-                  <a:srgbClr val="095292"/>
-                </a:solidFill>
-                <a:latin typeface="Calibri"/>
-              </a:rPr>
-              <a:t>Intercambiar el paquete completo con otro estudiante (o con otro equipo, si el docente autorizo trabajo en equipo) y aplicar la rubrica de auditoria de seis puntos durante veinte minutos cronometrados, registrando cada hallazgo con ubicacion exacta, descripcion y severidad bloqueante, mayor o menor; queda prohibido proponer soluciones durante la revision.</a:t>
-            </a:r>
-          </a:p>
-        </p:txBody>
-      </p:sp>
-      <p:sp>
-        <p:nvSpPr>
-          <p:cNvPr id="17" name="Rounded Rectangle 16"/>
-          <p:cNvSpPr/>
-          <p:nvPr/>
-        </p:nvSpPr>
-        <p:spPr>
-          <a:xfrm>
-            <a:off x="457200" y="4361688"/>
-            <a:ext cx="11277295" cy="950976"/>
-          </a:xfrm>
-          <a:prstGeom prst="roundRect">
-            <a:avLst>
-              <a:gd name="adj" fmla="val 12000"/>
-            </a:avLst>
-          </a:prstGeom>
-          <a:solidFill>
-            <a:srgbClr val="E8F4FA"/>
-          </a:solidFill>
-          <a:ln>
-            <a:noFill/>
-          </a:ln>
-        </p:spPr>
-        <p:style>
-          <a:lnRef idx="1">
-            <a:schemeClr val="accent1"/>
-          </a:lnRef>
-          <a:fillRef idx="3">
-            <a:schemeClr val="accent1"/>
-          </a:fillRef>
-          <a:effectRef idx="2">
-            <a:schemeClr val="accent1"/>
-          </a:effectRef>
-          <a:fontRef idx="minor">
-            <a:schemeClr val="lt1"/>
-          </a:fontRef>
-        </p:style>
-        <p:txBody>
-          <a:bodyPr rtlCol="0" anchor="ctr"/>
-          <a:lstStyle/>
-          <a:p>
-            <a:pPr algn="ctr"/>
-          </a:p>
-        </p:txBody>
-      </p:sp>
-      <p:sp>
-        <p:nvSpPr>
-          <p:cNvPr id="18" name="Rounded Rectangle 17"/>
-          <p:cNvSpPr/>
-          <p:nvPr/>
-        </p:nvSpPr>
-        <p:spPr>
-          <a:xfrm>
-            <a:off x="594360" y="4617720"/>
-            <a:ext cx="438912" cy="438912"/>
-          </a:xfrm>
-          <a:prstGeom prst="roundRect">
-            <a:avLst>
-              <a:gd name="adj" fmla="val 12000"/>
-            </a:avLst>
-          </a:prstGeom>
-          <a:solidFill>
-            <a:srgbClr val="095292"/>
-          </a:solidFill>
-          <a:ln>
-            <a:noFill/>
-          </a:ln>
-        </p:spPr>
-        <p:style>
-          <a:lnRef idx="1">
-            <a:schemeClr val="accent1"/>
-          </a:lnRef>
-          <a:fillRef idx="3">
-            <a:schemeClr val="accent1"/>
-          </a:fillRef>
-          <a:effectRef idx="2">
-            <a:schemeClr val="accent1"/>
-          </a:effectRef>
-          <a:fontRef idx="minor">
-            <a:schemeClr val="lt1"/>
-          </a:fontRef>
-        </p:style>
-        <p:txBody>
-          <a:bodyPr rtlCol="0" anchor="ctr"/>
-          <a:lstStyle/>
-          <a:p>
-            <a:pPr algn="ctr"/>
-          </a:p>
-        </p:txBody>
-      </p:sp>
-      <p:sp>
-        <p:nvSpPr>
-          <p:cNvPr id="19" name="TextBox 18"/>
-          <p:cNvSpPr txBox="1"/>
-          <p:nvPr/>
-        </p:nvSpPr>
-        <p:spPr>
-          <a:xfrm>
-            <a:off x="594360" y="4617720"/>
-            <a:ext cx="438912" cy="438912"/>
-          </a:xfrm>
-          <a:prstGeom prst="rect">
-            <a:avLst/>
-          </a:prstGeom>
-          <a:noFill/>
-        </p:spPr>
-        <p:txBody>
-          <a:bodyPr wrap="square" anchor="ctr"/>
-          <a:lstStyle/>
-          <a:p>
-            <a:pPr algn="ctr"/>
-            <a:r>
-              <a:rPr sz="1600" b="1" i="0">
-                <a:solidFill>
-                  <a:srgbClr val="FFFFFF"/>
-                </a:solidFill>
-                <a:latin typeface="Calibri"/>
-              </a:rPr>
-              <a:t>4</a:t>
-            </a:r>
-          </a:p>
-        </p:txBody>
-      </p:sp>
-      <p:sp>
-        <p:nvSpPr>
-          <p:cNvPr id="20" name="TextBox 19"/>
-          <p:cNvSpPr txBox="1"/>
-          <p:nvPr/>
-        </p:nvSpPr>
-        <p:spPr>
-          <a:xfrm>
-            <a:off x="1188720" y="4453128"/>
-            <a:ext cx="10271455" cy="786384"/>
-          </a:xfrm>
-          <a:prstGeom prst="rect">
-            <a:avLst/>
-          </a:prstGeom>
-          <a:noFill/>
-        </p:spPr>
-        <p:txBody>
-          <a:bodyPr wrap="square" anchor="ctr"/>
-          <a:lstStyle/>
-          <a:p>
-            <a:r>
-              <a:rPr sz="1500" b="1" i="0">
-                <a:solidFill>
-                  <a:srgbClr val="095292"/>
-                </a:solidFill>
-                <a:latin typeface="Calibri"/>
-              </a:rPr>
-              <a:t>Recibir los hallazgos propios y clasificarlos en aceptado, rechazado con justificacion escrita o aplazado por acuerdo, sin borrar ninguno del acta, de modo que quede evidencia de la decision tomada.</a:t>
-            </a:r>
-          </a:p>
-        </p:txBody>
-      </p:sp>
-      <p:sp>
-        <p:nvSpPr>
-          <p:cNvPr id="21" name="Rounded Rectangle 20"/>
-          <p:cNvSpPr/>
-          <p:nvPr/>
-        </p:nvSpPr>
-        <p:spPr>
-          <a:xfrm>
-            <a:off x="457200" y="5404104"/>
-            <a:ext cx="11277295" cy="950976"/>
-          </a:xfrm>
-          <a:prstGeom prst="roundRect">
-            <a:avLst>
-              <a:gd name="adj" fmla="val 12000"/>
-            </a:avLst>
-          </a:prstGeom>
-          <a:solidFill>
-            <a:srgbClr val="F2F2F2"/>
-          </a:solidFill>
-          <a:ln>
-            <a:noFill/>
-          </a:ln>
-        </p:spPr>
-        <p:style>
-          <a:lnRef idx="1">
-            <a:schemeClr val="accent1"/>
-          </a:lnRef>
-          <a:fillRef idx="3">
-            <a:schemeClr val="accent1"/>
-          </a:fillRef>
-          <a:effectRef idx="2">
-            <a:schemeClr val="accent1"/>
-          </a:effectRef>
-          <a:fontRef idx="minor">
-            <a:schemeClr val="lt1"/>
-          </a:fontRef>
-        </p:style>
-        <p:txBody>
-          <a:bodyPr rtlCol="0" anchor="ctr"/>
-          <a:lstStyle/>
-          <a:p>
-            <a:pPr algn="ctr"/>
-          </a:p>
-        </p:txBody>
-      </p:sp>
-      <p:sp>
-        <p:nvSpPr>
-          <p:cNvPr id="22" name="Rounded Rectangle 21"/>
-          <p:cNvSpPr/>
-          <p:nvPr/>
-        </p:nvSpPr>
-        <p:spPr>
-          <a:xfrm>
-            <a:off x="594360" y="5660136"/>
-            <a:ext cx="438912" cy="438912"/>
-          </a:xfrm>
-          <a:prstGeom prst="roundRect">
-            <a:avLst>
-              <a:gd name="adj" fmla="val 12000"/>
-            </a:avLst>
-          </a:prstGeom>
-          <a:solidFill>
-            <a:srgbClr val="095292"/>
-          </a:solidFill>
-          <a:ln>
-            <a:noFill/>
-          </a:ln>
-        </p:spPr>
-        <p:style>
-          <a:lnRef idx="1">
-            <a:schemeClr val="accent1"/>
-          </a:lnRef>
-          <a:fillRef idx="3">
-            <a:schemeClr val="accent1"/>
-          </a:fillRef>
-          <a:effectRef idx="2">
-            <a:schemeClr val="accent1"/>
-          </a:effectRef>
-          <a:fontRef idx="minor">
-            <a:schemeClr val="lt1"/>
-          </a:fontRef>
-        </p:style>
-        <p:txBody>
-          <a:bodyPr rtlCol="0" anchor="ctr"/>
-          <a:lstStyle/>
-          <a:p>
-            <a:pPr algn="ctr"/>
-          </a:p>
-        </p:txBody>
-      </p:sp>
-      <p:sp>
-        <p:nvSpPr>
-          <p:cNvPr id="23" name="TextBox 22"/>
-          <p:cNvSpPr txBox="1"/>
-          <p:nvPr/>
-        </p:nvSpPr>
-        <p:spPr>
-          <a:xfrm>
-            <a:off x="594360" y="5660136"/>
-            <a:ext cx="438912" cy="438912"/>
-          </a:xfrm>
-          <a:prstGeom prst="rect">
-            <a:avLst/>
-          </a:prstGeom>
-          <a:noFill/>
-        </p:spPr>
-        <p:txBody>
-          <a:bodyPr wrap="square" anchor="ctr"/>
-          <a:lstStyle/>
-          <a:p>
-            <a:pPr algn="ctr"/>
-            <a:r>
-              <a:rPr sz="1600" b="1" i="0">
-                <a:solidFill>
-                  <a:srgbClr val="FFFFFF"/>
-                </a:solidFill>
-                <a:latin typeface="Calibri"/>
-              </a:rPr>
-              <a:t>5</a:t>
-            </a:r>
-          </a:p>
-        </p:txBody>
-      </p:sp>
-      <p:sp>
-        <p:nvSpPr>
-          <p:cNvPr id="24" name="TextBox 23"/>
-          <p:cNvSpPr txBox="1"/>
-          <p:nvPr/>
-        </p:nvSpPr>
-        <p:spPr>
-          <a:xfrm>
-            <a:off x="1188720" y="5495544"/>
-            <a:ext cx="10271455" cy="786384"/>
-          </a:xfrm>
-          <a:prstGeom prst="rect">
-            <a:avLst/>
-          </a:prstGeom>
-          <a:noFill/>
-        </p:spPr>
-        <p:txBody>
-          <a:bodyPr wrap="square" anchor="ctr"/>
-          <a:lstStyle/>
-          <a:p>
-            <a:r>
-              <a:rPr sz="1400" b="1" i="0">
-                <a:solidFill>
-                  <a:srgbClr val="095292"/>
-                </a:solidFill>
-                <a:latin typeface="Calibri"/>
-              </a:rPr>
-              <a:t>Armar el backlog priorizado de correcciones con responsable y criterio de cierre verificable para cada item, ordenado por severidad, y aplicar en clase al menos las dos correcciones bloqueantes antes de subir el paquete corregido a la plataforma del curso.</a:t>
-            </a:r>
-          </a:p>
-        </p:txBody>
-      </p:sp>
-      <p:sp>
-        <p:nvSpPr>
-          <p:cNvPr id="25" name="TextBox 24"/>
+          <a:bodyPr wrap="square">
+            <a:spAutoFit/>
+          </a:bodyPr>
+          <a:lstStyle/>
+          <a:p>
+            <a:pPr>
+              <a:spcAft>
+                <a:spcPts val="800"/>
+              </a:spcAft>
+            </a:pPr>
+            <a:r>
+              <a:rPr sz="2000" b="0" i="0">
+                <a:solidFill>
+                  <a:srgbClr val="333333"/>
+                </a:solidFill>
+                <a:latin typeface="Calibri"/>
+              </a:rPr>
+              <a:t>–   Todo lo que se encuentra se convierte en backlog de deuda de diseño, no en angustia.</a:t>
+            </a:r>
+          </a:p>
+          <a:p>
+            <a:pPr>
+              <a:spcAft>
+                <a:spcPts val="800"/>
+              </a:spcAft>
+            </a:pPr>
+            <a:r>
+              <a:rPr sz="2000" b="0" i="0">
+                <a:solidFill>
+                  <a:srgbClr val="333333"/>
+                </a:solidFill>
+                <a:latin typeface="Calibri"/>
+              </a:rPr>
+              <a:t>–   Cada hallazgo pasa a ser un item con responsable, severidad, criterio de cierre verificable y un estado que puede ser aceptado, rechazado con justificacion escrita o aplazado por acuerdo.</a:t>
+            </a:r>
+          </a:p>
+          <a:p>
+            <a:pPr>
+              <a:spcAft>
+                <a:spcPts val="800"/>
+              </a:spcAft>
+            </a:pPr>
+            <a:r>
+              <a:rPr sz="2000" b="0" i="0">
+                <a:solidFill>
+                  <a:srgbClr val="333333"/>
+                </a:solidFill>
+                <a:latin typeface="Calibri"/>
+              </a:rPr>
+              <a:t>–   Rechazar un hallazgo es legitimo si se argumenta, y aprender a hacerlo es parte del oficio del analista.</a:t>
+            </a:r>
+          </a:p>
+          <a:p>
+            <a:pPr>
+              <a:spcAft>
+                <a:spcPts val="800"/>
+              </a:spcAft>
+            </a:pPr>
+            <a:r>
+              <a:rPr sz="2000" b="0" i="0">
+                <a:solidFill>
+                  <a:srgbClr val="333333"/>
+                </a:solidFill>
+                <a:latin typeface="Calibri"/>
+              </a:rPr>
+              <a:t>–   Sobre ese backlog se define lo que en la industria se llama definicion de terminado del paquete de diseño de VetCare: catalogo de RF y RNF numerado y sin huerfanos</a:t>
+            </a:r>
+          </a:p>
+          <a:p>
+            <a:pPr>
+              <a:spcAft>
+                <a:spcPts val="800"/>
+              </a:spcAft>
+            </a:pPr>
+            <a:r>
+              <a:rPr sz="2000" b="0" i="0">
+                <a:solidFill>
+                  <a:srgbClr val="333333"/>
+                </a:solidFill>
+                <a:latin typeface="Calibri"/>
+              </a:rPr>
+              <a:t>–   Diagrama y especificaciones de casos de uso, diagrama de clases con multiplicidades, mockups de las pantallas criticas y diccionario de datos.</a:t>
+            </a:r>
+          </a:p>
+          <a:p>
+            <a:pPr>
+              <a:spcAft>
+                <a:spcPts val="800"/>
+              </a:spcAft>
+            </a:pPr>
+            <a:r>
+              <a:rPr sz="2000" b="0" i="0">
+                <a:solidFill>
+                  <a:srgbClr val="333333"/>
+                </a:solidFill>
+                <a:latin typeface="Calibri"/>
+              </a:rPr>
+              <a:t>–   Aqui es donde los tres casos de matricula se hacen visibles y conviene decirlo en voz alta en el aula: el que cursa las dos materias entrega estos planos aca y el codigo alla</a:t>
+            </a:r>
+          </a:p>
+          <a:p>
+            <a:pPr>
+              <a:spcAft>
+                <a:spcPts val="800"/>
+              </a:spcAft>
+            </a:pPr>
+            <a:r>
+              <a:rPr sz="2000" b="0" i="0">
+                <a:solidFill>
+                  <a:srgbClr val="333333"/>
+                </a:solidFill>
+                <a:latin typeface="Calibri"/>
+              </a:rPr>
+              <a:t>–   El que solo cursa Programacion II recibe este paquete y todo lo que hoy quede ambiguo lo va a pagar en horas de reproceso; y el que solo cursa Seminario cierra con este mismo documento mas el prototipo navegable</a:t>
+            </a:r>
+          </a:p>
+          <a:p>
+            <a:pPr>
+              <a:spcAft>
+                <a:spcPts val="800"/>
+              </a:spcAft>
+            </a:pPr>
+            <a:r>
+              <a:rPr sz="2000" b="0" i="0">
+                <a:solidFill>
+                  <a:srgbClr val="333333"/>
+                </a:solidFill>
+                <a:latin typeface="Calibri"/>
+              </a:rPr>
+              <a:t>–   Que es una ruta completa y valida, no una version reducida del curso.</a:t>
+            </a:r>
+          </a:p>
+        </p:txBody>
+      </p:sp>
+      <p:sp>
+        <p:nvSpPr>
+          <p:cNvPr id="6" name="TextBox 5"/>
           <p:cNvSpPr txBox="1"/>
           <p:nvPr/>
         </p:nvSpPr>
@@ -4575,7 +3957,7 @@
                 </a:solidFill>
                 <a:latin typeface="Calibri"/>
               </a:rPr>
-              <a:t>Antes de entregar — autochequeo</a:t>
+              <a:t>Auditoria cruzada de VetCare: la matriz que delata las contradicciones</a:t>
             </a:r>
           </a:p>
         </p:txBody>
@@ -4589,7 +3971,7 @@
         <p:spPr>
           <a:xfrm>
             <a:off x="457200" y="1261872"/>
-            <a:ext cx="11277295" cy="566928"/>
+            <a:ext cx="11277295" cy="4773168"/>
           </a:xfrm>
           <a:prstGeom prst="roundRect">
             <a:avLst>
@@ -4597,7 +3979,7 @@
             </a:avLst>
           </a:prstGeom>
           <a:solidFill>
-            <a:srgbClr val="F2F2F2"/>
+            <a:srgbClr val="1E2A38"/>
           </a:solidFill>
           <a:ln>
             <a:noFill/>
@@ -4633,19 +4015,17 @@
         </p:nvSpPr>
         <p:spPr>
           <a:xfrm>
-            <a:off x="640080" y="1408175"/>
-            <a:ext cx="274320" cy="274320"/>
+            <a:off x="457200" y="1261872"/>
+            <a:ext cx="11277295" cy="320040"/>
           </a:xfrm>
           <a:prstGeom prst="rect">
             <a:avLst/>
           </a:prstGeom>
           <a:solidFill>
-            <a:srgbClr val="FFFFFF"/>
+            <a:srgbClr val="095292"/>
           </a:solidFill>
           <a:ln>
-            <a:solidFill>
-              <a:srgbClr val="333333"/>
-            </a:solidFill>
+            <a:noFill/>
           </a:ln>
         </p:spPr>
         <p:style>
@@ -4672,44 +4052,33 @@
       </p:sp>
       <p:sp>
         <p:nvSpPr>
-          <p:cNvPr id="7" name="Rectangle 6"/>
-          <p:cNvSpPr/>
-          <p:nvPr/>
-        </p:nvSpPr>
-        <p:spPr>
-          <a:xfrm>
-            <a:off x="640080" y="1408175"/>
-            <a:ext cx="73152" cy="274320"/>
-          </a:xfrm>
-          <a:prstGeom prst="rect">
-            <a:avLst/>
-          </a:prstGeom>
-          <a:solidFill>
-            <a:srgbClr val="269CCB"/>
-          </a:solidFill>
-          <a:ln>
-            <a:noFill/>
-          </a:ln>
-        </p:spPr>
-        <p:style>
-          <a:lnRef idx="1">
-            <a:schemeClr val="accent1"/>
-          </a:lnRef>
-          <a:fillRef idx="3">
-            <a:schemeClr val="accent1"/>
-          </a:fillRef>
-          <a:effectRef idx="2">
-            <a:schemeClr val="accent1"/>
-          </a:effectRef>
-          <a:fontRef idx="minor">
-            <a:schemeClr val="lt1"/>
-          </a:fontRef>
-        </p:style>
-        <p:txBody>
-          <a:bodyPr rtlCol="0" anchor="ctr"/>
-          <a:lstStyle/>
-          <a:p>
-            <a:pPr algn="ctr"/>
+          <p:cNvPr id="7" name="TextBox 6"/>
+          <p:cNvSpPr txBox="1"/>
+          <p:nvPr/>
+        </p:nvSpPr>
+        <p:spPr>
+          <a:xfrm>
+            <a:off x="685800" y="1307592"/>
+            <a:ext cx="10820095" cy="256032"/>
+          </a:xfrm>
+          <a:prstGeom prst="rect">
+            <a:avLst/>
+          </a:prstGeom>
+          <a:noFill/>
+        </p:spPr>
+        <p:txBody>
+          <a:bodyPr wrap="square" anchor="ctr"/>
+          <a:lstStyle/>
+          <a:p>
+            <a:r>
+              <a:rPr sz="1000" b="1" i="0">
+                <a:solidFill>
+                  <a:srgbClr val="269CCB"/>
+                </a:solidFill>
+                <a:latin typeface="Calibri"/>
+              </a:rPr>
+              <a:t>● ● ●</a:t>
+            </a:r>
           </a:p>
         </p:txBody>
       </p:sp>
@@ -4721,8 +4090,8 @@
         </p:nvSpPr>
         <p:spPr>
           <a:xfrm>
-            <a:off x="1097280" y="1353312"/>
-            <a:ext cx="10362895" cy="402336"/>
+            <a:off x="777240" y="1719072"/>
+            <a:ext cx="10637215" cy="4133087"/>
           </a:xfrm>
           <a:prstGeom prst="rect">
             <a:avLst/>
@@ -4730,354 +4099,274 @@
           <a:noFill/>
         </p:spPr>
         <p:txBody>
-          <a:bodyPr wrap="square" anchor="ctr"/>
-          <a:lstStyle/>
-          <a:p>
-            <a:r>
-              <a:rPr sz="1500" b="0" i="0">
-                <a:solidFill>
-                  <a:srgbClr val="333333"/>
-                </a:solidFill>
-                <a:latin typeface="Calibri"/>
-              </a:rPr>
-              <a:t>Si toma el requisito mas ambicioso de su catalogo y lo persigue hasta el diagrama de clases, en que punto exacto se le pierde el rastro?</a:t>
-            </a:r>
-          </a:p>
-        </p:txBody>
-      </p:sp>
-      <p:sp>
-        <p:nvSpPr>
-          <p:cNvPr id="9" name="Rounded Rectangle 8"/>
-          <p:cNvSpPr/>
-          <p:nvPr/>
-        </p:nvSpPr>
-        <p:spPr>
-          <a:xfrm>
-            <a:off x="457200" y="1938528"/>
-            <a:ext cx="11277295" cy="566928"/>
-          </a:xfrm>
-          <a:prstGeom prst="roundRect">
-            <a:avLst>
-              <a:gd name="adj" fmla="val 12000"/>
-            </a:avLst>
-          </a:prstGeom>
-          <a:solidFill>
-            <a:srgbClr val="F2F2F2"/>
-          </a:solidFill>
-          <a:ln>
-            <a:noFill/>
-          </a:ln>
-        </p:spPr>
-        <p:style>
-          <a:lnRef idx="1">
-            <a:schemeClr val="accent1"/>
-          </a:lnRef>
-          <a:fillRef idx="3">
-            <a:schemeClr val="accent1"/>
-          </a:fillRef>
-          <a:effectRef idx="2">
-            <a:schemeClr val="accent1"/>
-          </a:effectRef>
-          <a:fontRef idx="minor">
-            <a:schemeClr val="lt1"/>
-          </a:fontRef>
-        </p:style>
-        <p:txBody>
-          <a:bodyPr rtlCol="0" anchor="ctr"/>
+          <a:bodyPr wrap="square">
+            <a:spAutoFit/>
+          </a:bodyPr>
+          <a:lstStyle/>
+          <a:p>
+            <a:pPr>
+              <a:spcAft>
+                <a:spcPts val="400"/>
+              </a:spcAft>
+            </a:pPr>
+            <a:r>
+              <a:rPr sz="1400" b="0" i="0">
+                <a:solidFill>
+                  <a:srgbClr val="FFFFFF"/>
+                </a:solidFill>
+                <a:latin typeface="Calibri"/>
+              </a:rPr>
+              <a:t>| RF     | Caso de uso                  | Clases implicadas      | Mockup | Estado      |</a:t>
+            </a:r>
+          </a:p>
+          <a:p>
+            <a:pPr>
+              <a:spcAft>
+                <a:spcPts val="400"/>
+              </a:spcAft>
+            </a:pPr>
+            <a:r>
+              <a:rPr sz="1400" b="0" i="0">
+                <a:solidFill>
+                  <a:srgbClr val="FFFFFF"/>
+                </a:solidFill>
+                <a:latin typeface="Calibri"/>
+              </a:rPr>
+              <a:t>|--------|------------------------------|------------------------|--------|-------------|</a:t>
+            </a:r>
+          </a:p>
+          <a:p>
+            <a:pPr>
+              <a:spcAft>
+                <a:spcPts val="400"/>
+              </a:spcAft>
+            </a:pPr>
+            <a:r>
+              <a:rPr sz="1400" b="0" i="0">
+                <a:solidFill>
+                  <a:srgbClr val="FFFFFF"/>
+                </a:solidFill>
+                <a:latin typeface="Calibri"/>
+              </a:rPr>
+              <a:t>| RF-02  | CU-00 Registrar propietario  | Propietario            | M-01   | OK          |</a:t>
+            </a:r>
+          </a:p>
+          <a:p>
+            <a:pPr>
+              <a:spcAft>
+                <a:spcPts val="400"/>
+              </a:spcAft>
+            </a:pPr>
+            <a:r>
+              <a:rPr sz="1400" b="0" i="0">
+                <a:solidFill>
+                  <a:srgbClr val="FFFFFF"/>
+                </a:solidFill>
+                <a:latin typeface="Calibri"/>
+              </a:rPr>
+              <a:t>| RF-03  | CU-01 Registrar mascota      | Mascota, Propietario   | M-02   | OK          |</a:t>
+            </a:r>
+          </a:p>
+          <a:p>
+            <a:pPr>
+              <a:spcAft>
+                <a:spcPts val="400"/>
+              </a:spcAft>
+            </a:pPr>
+            <a:r>
+              <a:rPr sz="1400" b="0" i="0">
+                <a:solidFill>
+                  <a:srgbClr val="FFFFFF"/>
+                </a:solidFill>
+                <a:latin typeface="Calibri"/>
+              </a:rPr>
+              <a:t>| RF-05  | CU-02 Buscar expediente      | Mascota, Consulta      | M-03   | OK          |</a:t>
+            </a:r>
+          </a:p>
+          <a:p>
+            <a:pPr>
+              <a:spcAft>
+                <a:spcPts val="400"/>
+              </a:spcAft>
+            </a:pPr>
+            <a:r>
+              <a:rPr sz="1400" b="0" i="0">
+                <a:solidFill>
+                  <a:srgbClr val="FFFFFF"/>
+                </a:solidFill>
+                <a:latin typeface="Calibri"/>
+              </a:rPr>
+              <a:t>| RF-06  | CU-03 Registrar consulta     | Consulta, ???          | M-05   | HALLAZGO    |</a:t>
+            </a:r>
+          </a:p>
+          <a:p>
+            <a:pPr>
+              <a:spcAft>
+                <a:spcPts val="400"/>
+              </a:spcAft>
+            </a:pPr>
+            <a:r>
+              <a:rPr sz="1400" b="0" i="0">
+                <a:solidFill>
+                  <a:srgbClr val="FFFFFF"/>
+                </a:solidFill>
+                <a:latin typeface="Calibri"/>
+              </a:rPr>
+              <a:t>| RF-07  | (no existe)                  | (no existe)            | --     | HUERFANO    |</a:t>
+            </a:r>
+          </a:p>
+          <a:p>
+            <a:pPr>
+              <a:spcAft>
+                <a:spcPts val="400"/>
+              </a:spcAft>
+            </a:pPr>
+            <a:r>
+              <a:rPr sz="1400" b="0" i="0">
+                <a:solidFill>
+                  <a:srgbClr val="FFFFFF"/>
+                </a:solidFill>
+                <a:latin typeface="Calibri"/>
+              </a:rPr>
+              <a:t>| (sin)  | CU-04 Agendar cita           | Cita, Veterinario      | M-04   | SIN ORIGEN  |</a:t>
+            </a:r>
+          </a:p>
+          <a:p>
+            <a:pPr>
+              <a:spcAft>
+                <a:spcPts val="400"/>
+              </a:spcAft>
+            </a:pPr>
+            <a:r>
+              <a:rPr sz="1400" b="0" i="0">
+                <a:solidFill>
+                  <a:srgbClr val="FFFFFF"/>
+                </a:solidFill>
+                <a:latin typeface="Calibri"/>
+              </a:rPr>
+              <a:t/>
+            </a:r>
+          </a:p>
+          <a:p>
+            <a:pPr>
+              <a:spcAft>
+                <a:spcPts val="400"/>
+              </a:spcAft>
+            </a:pPr>
+            <a:r>
+              <a:rPr sz="1400" b="0" i="0">
+                <a:solidFill>
+                  <a:srgbClr val="FFFFFF"/>
+                </a:solidFill>
+                <a:latin typeface="Calibri"/>
+              </a:rPr>
+              <a:t>H-01 (mayor): CU-03 exige registrar quien atendio, pero Consulta no se relaciona con Veterinario.</a:t>
+            </a:r>
+          </a:p>
+          <a:p>
+            <a:pPr>
+              <a:spcAft>
+                <a:spcPts val="400"/>
+              </a:spcAft>
+            </a:pPr>
+            <a:r>
+              <a:rPr sz="1400" b="0" i="0">
+                <a:solidFill>
+                  <a:srgbClr val="FFFFFF"/>
+                </a:solidFill>
+                <a:latin typeface="Calibri"/>
+              </a:rPr>
+              <a:t>H-02 (mayor): la fila de CU-04 quedo sin RF; debe ligarse a RF-08 Agendar cita o eliminarse el CU.</a:t>
+            </a:r>
+          </a:p>
+          <a:p>
+            <a:pPr>
+              <a:spcAft>
+                <a:spcPts val="400"/>
+              </a:spcAft>
+            </a:pPr>
+            <a:r>
+              <a:rPr sz="1400" b="0" i="0">
+                <a:solidFill>
+                  <a:srgbClr val="FFFFFF"/>
+                </a:solidFill>
+                <a:latin typeface="Calibri"/>
+              </a:rPr>
+              <a:t>H-03 (bloqueante): la clase Mascota guarda dueño como texto en lugar de asociarse a Propietario.</a:t>
+            </a:r>
+          </a:p>
+          <a:p>
+            <a:pPr>
+              <a:spcAft>
+                <a:spcPts val="400"/>
+              </a:spcAft>
+            </a:pPr>
+            <a:r>
+              <a:rPr sz="1400" b="0" i="0">
+                <a:solidFill>
+                  <a:srgbClr val="FFFFFF"/>
+                </a:solidFill>
+                <a:latin typeface="Calibri"/>
+              </a:rPr>
+              <a:t>H-04 (menor): el RNF-02 de 3 segundos no aparece en ninguna postcondicion de CU-02.</a:t>
+            </a:r>
+          </a:p>
+          <a:p>
+            <a:pPr>
+              <a:spcAft>
+                <a:spcPts val="400"/>
+              </a:spcAft>
+            </a:pPr>
+            <a:r>
+              <a:rPr sz="1400" b="0" i="0">
+                <a:solidFill>
+                  <a:srgbClr val="FFFFFF"/>
+                </a:solidFill>
+                <a:latin typeface="Calibri"/>
+              </a:rPr>
+              <a:t>Glosario canonico: Propietario (prohibido Dueño, Cliente, Responsable) | Cita != Consulta.</a:t>
+            </a:r>
+          </a:p>
+        </p:txBody>
+      </p:sp>
+      <p:sp>
+        <p:nvSpPr>
+          <p:cNvPr id="9" name="TextBox 8"/>
+          <p:cNvSpPr txBox="1"/>
+          <p:nvPr/>
+        </p:nvSpPr>
+        <p:spPr>
+          <a:xfrm>
+            <a:off x="457200" y="6080760"/>
+            <a:ext cx="11277295" cy="320040"/>
+          </a:xfrm>
+          <a:prstGeom prst="rect">
+            <a:avLst/>
+          </a:prstGeom>
+          <a:noFill/>
+        </p:spPr>
+        <p:txBody>
+          <a:bodyPr wrap="square">
+            <a:spAutoFit/>
+          </a:bodyPr>
           <a:lstStyle/>
           <a:p>
             <a:pPr algn="ctr"/>
-          </a:p>
-        </p:txBody>
-      </p:sp>
-      <p:sp>
-        <p:nvSpPr>
-          <p:cNvPr id="10" name="Rectangle 9"/>
-          <p:cNvSpPr/>
-          <p:nvPr/>
-        </p:nvSpPr>
-        <p:spPr>
-          <a:xfrm>
-            <a:off x="640080" y="2084832"/>
-            <a:ext cx="274320" cy="274320"/>
-          </a:xfrm>
-          <a:prstGeom prst="rect">
-            <a:avLst/>
-          </a:prstGeom>
-          <a:solidFill>
-            <a:srgbClr val="FFFFFF"/>
-          </a:solidFill>
-          <a:ln>
-            <a:solidFill>
-              <a:srgbClr val="333333"/>
-            </a:solidFill>
-          </a:ln>
-        </p:spPr>
-        <p:style>
-          <a:lnRef idx="1">
-            <a:schemeClr val="accent1"/>
-          </a:lnRef>
-          <a:fillRef idx="3">
-            <a:schemeClr val="accent1"/>
-          </a:fillRef>
-          <a:effectRef idx="2">
-            <a:schemeClr val="accent1"/>
-          </a:effectRef>
-          <a:fontRef idx="minor">
-            <a:schemeClr val="lt1"/>
-          </a:fontRef>
-        </p:style>
-        <p:txBody>
-          <a:bodyPr rtlCol="0" anchor="ctr"/>
-          <a:lstStyle/>
-          <a:p>
-            <a:pPr algn="ctr"/>
-          </a:p>
-        </p:txBody>
-      </p:sp>
-      <p:sp>
-        <p:nvSpPr>
-          <p:cNvPr id="11" name="Rectangle 10"/>
-          <p:cNvSpPr/>
-          <p:nvPr/>
-        </p:nvSpPr>
-        <p:spPr>
-          <a:xfrm>
-            <a:off x="640080" y="2084832"/>
-            <a:ext cx="73152" cy="274320"/>
-          </a:xfrm>
-          <a:prstGeom prst="rect">
-            <a:avLst/>
-          </a:prstGeom>
-          <a:solidFill>
-            <a:srgbClr val="269CCB"/>
-          </a:solidFill>
-          <a:ln>
-            <a:noFill/>
-          </a:ln>
-        </p:spPr>
-        <p:style>
-          <a:lnRef idx="1">
-            <a:schemeClr val="accent1"/>
-          </a:lnRef>
-          <a:fillRef idx="3">
-            <a:schemeClr val="accent1"/>
-          </a:fillRef>
-          <a:effectRef idx="2">
-            <a:schemeClr val="accent1"/>
-          </a:effectRef>
-          <a:fontRef idx="minor">
-            <a:schemeClr val="lt1"/>
-          </a:fontRef>
-        </p:style>
-        <p:txBody>
-          <a:bodyPr rtlCol="0" anchor="ctr"/>
-          <a:lstStyle/>
-          <a:p>
-            <a:pPr algn="ctr"/>
-          </a:p>
-        </p:txBody>
-      </p:sp>
-      <p:sp>
-        <p:nvSpPr>
-          <p:cNvPr id="12" name="TextBox 11"/>
-          <p:cNvSpPr txBox="1"/>
-          <p:nvPr/>
-        </p:nvSpPr>
-        <p:spPr>
-          <a:xfrm>
-            <a:off x="1097280" y="2029968"/>
-            <a:ext cx="10362895" cy="402336"/>
-          </a:xfrm>
-          <a:prstGeom prst="rect">
-            <a:avLst/>
-          </a:prstGeom>
-          <a:noFill/>
-        </p:spPr>
-        <p:txBody>
-          <a:bodyPr wrap="square" anchor="ctr"/>
-          <a:lstStyle/>
-          <a:p>
-            <a:r>
-              <a:rPr sz="1500" b="0" i="0">
-                <a:solidFill>
-                  <a:srgbClr val="333333"/>
-                </a:solidFill>
-                <a:latin typeface="Calibri"/>
-              </a:rPr>
-              <a:t>Cuantos nombres distintos esta usando su paquete para referirse a la misma persona que lleva la mascota a la clinica?</a:t>
-            </a:r>
-          </a:p>
-        </p:txBody>
-      </p:sp>
-      <p:sp>
-        <p:nvSpPr>
-          <p:cNvPr id="13" name="Rounded Rectangle 12"/>
-          <p:cNvSpPr/>
-          <p:nvPr/>
-        </p:nvSpPr>
-        <p:spPr>
-          <a:xfrm>
-            <a:off x="457200" y="2615184"/>
-            <a:ext cx="11277295" cy="566928"/>
-          </a:xfrm>
-          <a:prstGeom prst="roundRect">
-            <a:avLst>
-              <a:gd name="adj" fmla="val 12000"/>
-            </a:avLst>
-          </a:prstGeom>
-          <a:solidFill>
-            <a:srgbClr val="F2F2F2"/>
-          </a:solidFill>
-          <a:ln>
-            <a:noFill/>
-          </a:ln>
-        </p:spPr>
-        <p:style>
-          <a:lnRef idx="1">
-            <a:schemeClr val="accent1"/>
-          </a:lnRef>
-          <a:fillRef idx="3">
-            <a:schemeClr val="accent1"/>
-          </a:fillRef>
-          <a:effectRef idx="2">
-            <a:schemeClr val="accent1"/>
-          </a:effectRef>
-          <a:fontRef idx="minor">
-            <a:schemeClr val="lt1"/>
-          </a:fontRef>
-        </p:style>
-        <p:txBody>
-          <a:bodyPr rtlCol="0" anchor="ctr"/>
-          <a:lstStyle/>
-          <a:p>
-            <a:pPr algn="ctr"/>
-          </a:p>
-        </p:txBody>
-      </p:sp>
-      <p:sp>
-        <p:nvSpPr>
-          <p:cNvPr id="14" name="Rectangle 13"/>
-          <p:cNvSpPr/>
-          <p:nvPr/>
-        </p:nvSpPr>
-        <p:spPr>
-          <a:xfrm>
-            <a:off x="640080" y="2761488"/>
-            <a:ext cx="274320" cy="274320"/>
-          </a:xfrm>
-          <a:prstGeom prst="rect">
-            <a:avLst/>
-          </a:prstGeom>
-          <a:solidFill>
-            <a:srgbClr val="FFFFFF"/>
-          </a:solidFill>
-          <a:ln>
-            <a:solidFill>
-              <a:srgbClr val="333333"/>
-            </a:solidFill>
-          </a:ln>
-        </p:spPr>
-        <p:style>
-          <a:lnRef idx="1">
-            <a:schemeClr val="accent1"/>
-          </a:lnRef>
-          <a:fillRef idx="3">
-            <a:schemeClr val="accent1"/>
-          </a:fillRef>
-          <a:effectRef idx="2">
-            <a:schemeClr val="accent1"/>
-          </a:effectRef>
-          <a:fontRef idx="minor">
-            <a:schemeClr val="lt1"/>
-          </a:fontRef>
-        </p:style>
-        <p:txBody>
-          <a:bodyPr rtlCol="0" anchor="ctr"/>
-          <a:lstStyle/>
-          <a:p>
-            <a:pPr algn="ctr"/>
-          </a:p>
-        </p:txBody>
-      </p:sp>
-      <p:sp>
-        <p:nvSpPr>
-          <p:cNvPr id="15" name="Rectangle 14"/>
-          <p:cNvSpPr/>
-          <p:nvPr/>
-        </p:nvSpPr>
-        <p:spPr>
-          <a:xfrm>
-            <a:off x="640080" y="2761488"/>
-            <a:ext cx="73152" cy="274320"/>
-          </a:xfrm>
-          <a:prstGeom prst="rect">
-            <a:avLst/>
-          </a:prstGeom>
-          <a:solidFill>
-            <a:srgbClr val="269CCB"/>
-          </a:solidFill>
-          <a:ln>
-            <a:noFill/>
-          </a:ln>
-        </p:spPr>
-        <p:style>
-          <a:lnRef idx="1">
-            <a:schemeClr val="accent1"/>
-          </a:lnRef>
-          <a:fillRef idx="3">
-            <a:schemeClr val="accent1"/>
-          </a:fillRef>
-          <a:effectRef idx="2">
-            <a:schemeClr val="accent1"/>
-          </a:effectRef>
-          <a:fontRef idx="minor">
-            <a:schemeClr val="lt1"/>
-          </a:fontRef>
-        </p:style>
-        <p:txBody>
-          <a:bodyPr rtlCol="0" anchor="ctr"/>
-          <a:lstStyle/>
-          <a:p>
-            <a:pPr algn="ctr"/>
-          </a:p>
-        </p:txBody>
-      </p:sp>
-      <p:sp>
-        <p:nvSpPr>
-          <p:cNvPr id="16" name="TextBox 15"/>
-          <p:cNvSpPr txBox="1"/>
-          <p:nvPr/>
-        </p:nvSpPr>
-        <p:spPr>
-          <a:xfrm>
-            <a:off x="1097280" y="2706624"/>
-            <a:ext cx="10362895" cy="402336"/>
-          </a:xfrm>
-          <a:prstGeom prst="rect">
-            <a:avLst/>
-          </a:prstGeom>
-          <a:noFill/>
-        </p:spPr>
-        <p:txBody>
-          <a:bodyPr wrap="square" anchor="ctr"/>
-          <a:lstStyle/>
-          <a:p>
-            <a:r>
-              <a:rPr sz="1500" b="0" i="0">
-                <a:solidFill>
-                  <a:srgbClr val="333333"/>
-                </a:solidFill>
-                <a:latin typeface="Calibri"/>
-              </a:rPr>
-              <a:t>Si usted desapareciera y solo quedara el paquete escrito, alguien podria construir VetCare sin hacer una sola pregunta?</a:t>
-            </a:r>
-          </a:p>
-        </p:txBody>
-      </p:sp>
-      <p:sp>
-        <p:nvSpPr>
-          <p:cNvPr id="17" name="TextBox 16"/>
+            <a:r>
+              <a:rPr sz="1200" b="0" i="1">
+                <a:solidFill>
+                  <a:srgbClr val="666666"/>
+                </a:solidFill>
+                <a:latin typeface="Calibri"/>
+              </a:rPr>
+              <a:t>Una tabla de cuatro columnas encuentra en veinte minutos las contradicciones que un equipo no ve en tres semanas.</a:t>
+            </a:r>
+          </a:p>
+        </p:txBody>
+      </p:sp>
+      <p:sp>
+        <p:nvSpPr>
+          <p:cNvPr id="10" name="TextBox 9"/>
           <p:cNvSpPr txBox="1"/>
           <p:nvPr/>
         </p:nvSpPr>
@@ -5251,7 +4540,7 @@
                 </a:solidFill>
                 <a:latin typeface="Calibri"/>
               </a:rPr>
-              <a:t>Criterios de exito / entregable</a:t>
+              <a:t>Demo del dia</a:t>
             </a:r>
           </a:p>
         </p:txBody>
@@ -5299,7 +4588,7 @@
                 </a:solidFill>
                 <a:latin typeface="Calibri"/>
               </a:rPr>
-              <a:t>Entregable:</a:t>
+              <a:t>Herramienta:</a:t>
             </a:r>
             <a:r>
               <a:rPr sz="2000" b="0" i="0">
@@ -5308,7 +4597,7 @@
                 </a:solidFill>
                 <a:latin typeface="Calibri"/>
               </a:rPr>
-              <a:t> Un documento con la matriz de trazabilidad RF a CU a Clase, el glosario de nombres canonicos, el acta de revision entre pares con hallazgos clasificados por severidad y el backlog priorizado de correcciones, subido a la plataforma del curso.</a:t>
+              <a:t> Google Docs · draw.io</a:t>
             </a:r>
           </a:p>
           <a:p>
@@ -5333,7 +4622,7 @@
                 </a:solidFill>
                 <a:latin typeface="Calibri"/>
               </a:rPr>
-              <a:t>Exito:</a:t>
+              <a:t>Demo:</a:t>
             </a:r>
             <a:r>
               <a:rPr sz="2000" b="0" i="0">
@@ -5342,7 +4631,7 @@
                 </a:solidFill>
                 <a:latin typeface="Calibri"/>
               </a:rPr>
-              <a:t> La matriz de trazabilidad cubre el cien por ciento de los RF y no deja casos de uso ni clases sin origen en algun requisito.</a:t>
+              <a:t> El docente proyecta el paquete de un equipo ficticio de VetCare y encuentra en vivo tres inconsistencias: un RF sin caso de uso, una clase llamada Dueño que en el catalogo de requisitos se llama Propietario, y un caso de uso que ninguna clase puede soportar.</a:t>
             </a:r>
           </a:p>
           <a:p>
@@ -5358,127 +4647,7 @@
                 </a:solidFill>
                 <a:latin typeface="Calibri"/>
               </a:rPr>
-              <a:t>–   </a:t>
-            </a:r>
-            <a:r>
-              <a:rPr sz="2000" b="1" i="0">
-                <a:solidFill>
-                  <a:srgbClr val="333333"/>
-                </a:solidFill>
-                <a:latin typeface="Calibri"/>
-              </a:rPr>
-              <a:t>Exito:</a:t>
-            </a:r>
-            <a:r>
-              <a:rPr sz="2000" b="0" i="0">
-                <a:solidFill>
-                  <a:srgbClr val="333333"/>
-                </a:solidFill>
-                <a:latin typeface="Calibri"/>
-              </a:rPr>
-              <a:t> El glosario tiene minimo ocho conceptos con nombre canonico, definicion de una linea y sinonimos prohibidos, y los artefactos ya fueron renombrados en consecuencia.</a:t>
-            </a:r>
-          </a:p>
-          <a:p>
-            <a:pPr>
-              <a:spcAft>
-                <a:spcPts val="800"/>
-              </a:spcAft>
-            </a:pPr>
-            <a:r>
-              <a:rPr sz="2000" b="0" i="0">
-                <a:solidFill>
-                  <a:srgbClr val="333333"/>
-                </a:solidFill>
-                <a:latin typeface="Calibri"/>
-              </a:rPr>
-              <a:t>–   </a:t>
-            </a:r>
-            <a:r>
-              <a:rPr sz="2000" b="1" i="0">
-                <a:solidFill>
-                  <a:srgbClr val="333333"/>
-                </a:solidFill>
-                <a:latin typeface="Calibri"/>
-              </a:rPr>
-              <a:t>Exito:</a:t>
-            </a:r>
-            <a:r>
-              <a:rPr sz="2000" b="0" i="0">
-                <a:solidFill>
-                  <a:srgbClr val="333333"/>
-                </a:solidFill>
-                <a:latin typeface="Calibri"/>
-              </a:rPr>
-              <a:t> El acta de revision entre pares registra minimo seis hallazgos con ubicacion exacta, descripcion objetiva y severidad asignada.</a:t>
-            </a:r>
-          </a:p>
-          <a:p>
-            <a:pPr>
-              <a:spcAft>
-                <a:spcPts val="800"/>
-              </a:spcAft>
-            </a:pPr>
-            <a:r>
-              <a:rPr sz="2000" b="0" i="0">
-                <a:solidFill>
-                  <a:srgbClr val="333333"/>
-                </a:solidFill>
-                <a:latin typeface="Calibri"/>
-              </a:rPr>
-              <a:t>–   </a:t>
-            </a:r>
-            <a:r>
-              <a:rPr sz="2000" b="1" i="0">
-                <a:solidFill>
-                  <a:srgbClr val="333333"/>
-                </a:solidFill>
-                <a:latin typeface="Calibri"/>
-              </a:rPr>
-              <a:t>Exito:</a:t>
-            </a:r>
-            <a:r>
-              <a:rPr sz="2000" b="0" i="0">
-                <a:solidFill>
-                  <a:srgbClr val="333333"/>
-                </a:solidFill>
-                <a:latin typeface="Calibri"/>
-              </a:rPr>
-              <a:t> El backlog tiene responsable y criterio de cierre verificable por item, y las correcciones de severidad bloqueante quedaron aplicadas en el paquete entregado.</a:t>
-            </a:r>
-          </a:p>
-          <a:p>
-            <a:pPr>
-              <a:spcAft>
-                <a:spcPts val="800"/>
-              </a:spcAft>
-            </a:pPr>
-            <a:r>
-              <a:rPr sz="2000" b="0" i="0">
-                <a:solidFill>
-                  <a:srgbClr val="333333"/>
-                </a:solidFill>
-                <a:latin typeface="Calibri"/>
-              </a:rPr>
-              <a:t>–   </a:t>
-            </a:r>
-            <a:r>
-              <a:rPr sz="2000" b="1" i="0">
-                <a:solidFill>
-                  <a:srgbClr val="333333"/>
-                </a:solidFill>
-                <a:latin typeface="Calibri"/>
-              </a:rPr>
-              <a:t>Entrega en la plataforma del curso</a:t>
-            </a:r>
-            <a:r>
-              <a:rPr sz="2000" b="0" i="0">
-                <a:solidFill>
-                  <a:srgbClr val="333333"/>
-                </a:solidFill>
-                <a:latin typeface="Calibri"/>
-              </a:rPr>
-              <a:t> — en la fecha que indique el docente.</a:t>
+              <a:t>–   Mismo dominio VetCare — no otro ejemplo. Aqui se diseña, no se programa.</a:t>
             </a:r>
           </a:p>
         </p:txBody>
@@ -5553,7 +4722,7 @@
         <p:spPr>
           <a:xfrm>
             <a:off x="0" y="0"/>
-            <a:ext cx="12191695" cy="960120"/>
+            <a:ext cx="12191695" cy="1170432"/>
           </a:xfrm>
           <a:prstGeom prst="rect">
             <a:avLst/>
@@ -5595,7 +4764,7 @@
         </p:nvSpPr>
         <p:spPr>
           <a:xfrm>
-            <a:off x="0" y="960120"/>
+            <a:off x="0" y="1170432"/>
             <a:ext cx="12191695" cy="41148"/>
           </a:xfrm>
           <a:prstGeom prst="rect">
@@ -5639,7 +4808,7 @@
         <p:spPr>
           <a:xfrm>
             <a:off x="457200" y="164592"/>
-            <a:ext cx="11277295" cy="502920"/>
+            <a:ext cx="11277295" cy="384048"/>
           </a:xfrm>
           <a:prstGeom prst="rect">
             <a:avLst/>
@@ -5659,21 +4828,55 @@
                 </a:solidFill>
                 <a:latin typeface="Calibri"/>
               </a:rPr>
-              <a:t>Para el PI esta semana</a:t>
-            </a:r>
-          </a:p>
-        </p:txBody>
-      </p:sp>
-      <p:sp>
-        <p:nvSpPr>
-          <p:cNvPr id="5" name="Rounded Rectangle 4"/>
+              <a:t>Herramientas de hoy</a:t>
+            </a:r>
+          </a:p>
+        </p:txBody>
+      </p:sp>
+      <p:sp>
+        <p:nvSpPr>
+          <p:cNvPr id="5" name="TextBox 4"/>
+          <p:cNvSpPr txBox="1"/>
+          <p:nvPr/>
+        </p:nvSpPr>
+        <p:spPr>
+          <a:xfrm>
+            <a:off x="457200" y="566928"/>
+            <a:ext cx="11277295" cy="411480"/>
+          </a:xfrm>
+          <a:prstGeom prst="rect">
+            <a:avLst/>
+          </a:prstGeom>
+          <a:noFill/>
+        </p:spPr>
+        <p:txBody>
+          <a:bodyPr wrap="square">
+            <a:spAutoFit/>
+          </a:bodyPr>
+          <a:lstStyle/>
+          <a:p>
+            <a:r>
+              <a:rPr sz="1400" b="0" i="0">
+                <a:solidFill>
+                  <a:srgbClr val="B8D8EE"/>
+                </a:solidFill>
+                <a:latin typeface="Calibri"/>
+              </a:rPr>
+              <a:t>Gratis · funcionan en el navegador</a:t>
+            </a:r>
+          </a:p>
+        </p:txBody>
+      </p:sp>
+      <p:sp>
+        <p:nvSpPr>
+          <p:cNvPr id="6" name="Rounded Rectangle 5"/>
           <p:cNvSpPr/>
           <p:nvPr/>
         </p:nvSpPr>
         <p:spPr>
           <a:xfrm>
-            <a:off x="457200" y="1261872"/>
-            <a:ext cx="11277295" cy="1051560"/>
+            <a:off x="457200" y="1591056"/>
+            <a:ext cx="3624986" cy="2331720"/>
           </a:xfrm>
           <a:prstGeom prst="roundRect">
             <a:avLst>
@@ -5681,7 +4884,7 @@
             </a:avLst>
           </a:prstGeom>
           <a:solidFill>
-            <a:srgbClr val="E8F4FA"/>
+            <a:srgbClr val="F2F2F2"/>
           </a:solidFill>
           <a:ln>
             <a:noFill/>
@@ -5711,20 +4914,20 @@
       </p:sp>
       <p:sp>
         <p:nvSpPr>
-          <p:cNvPr id="6" name="Rectangle 5"/>
+          <p:cNvPr id="7" name="Rectangle 6"/>
           <p:cNvSpPr/>
           <p:nvPr/>
         </p:nvSpPr>
         <p:spPr>
           <a:xfrm>
-            <a:off x="457200" y="1261872"/>
-            <a:ext cx="128016" cy="1051560"/>
+            <a:off x="457200" y="1591056"/>
+            <a:ext cx="3624986" cy="64008"/>
           </a:xfrm>
           <a:prstGeom prst="rect">
             <a:avLst/>
           </a:prstGeom>
           <a:solidFill>
-            <a:srgbClr val="269CCB"/>
+            <a:srgbClr val="095292"/>
           </a:solidFill>
           <a:ln>
             <a:noFill/>
@@ -5754,109 +4957,14 @@
       </p:sp>
       <p:sp>
         <p:nvSpPr>
-          <p:cNvPr id="7" name="TextBox 6"/>
-          <p:cNvSpPr txBox="1"/>
-          <p:nvPr/>
-        </p:nvSpPr>
-        <p:spPr>
-          <a:xfrm>
-            <a:off x="777240" y="1399031"/>
-            <a:ext cx="10774375" cy="822959"/>
-          </a:xfrm>
-          <a:prstGeom prst="rect">
-            <a:avLst/>
-          </a:prstGeom>
-          <a:noFill/>
-        </p:spPr>
-        <p:txBody>
-          <a:bodyPr wrap="square">
-            <a:spAutoFit/>
-          </a:bodyPr>
-          <a:lstStyle/>
-          <a:p>
-            <a:r>
-              <a:rPr sz="1200" b="1" i="0">
-                <a:solidFill>
-                  <a:srgbClr val="269CCB"/>
-                </a:solidFill>
-                <a:latin typeface="Calibri"/>
-              </a:rPr>
-              <a:t>Info</a:t>
-            </a:r>
-          </a:p>
-          <a:p>
-            <a:pPr>
-              <a:spcBef>
-                <a:spcPts val="400"/>
-              </a:spcBef>
-            </a:pPr>
-            <a:r>
-              <a:rPr sz="1400" b="0" i="0">
-                <a:solidFill>
-                  <a:srgbClr val="333333"/>
-                </a:solidFill>
-                <a:latin typeface="Calibri"/>
-              </a:rPr>
-              <a:t>Hito: El paquete de diseño de VetCare queda auditado y consistente: requisitos, casos de uso y diagrama de clases usan los mismos nombres y no se contradicen entre si.</a:t>
-            </a:r>
-          </a:p>
-        </p:txBody>
-      </p:sp>
-      <p:sp>
-        <p:nvSpPr>
-          <p:cNvPr id="8" name="Rounded Rectangle 7"/>
+          <p:cNvPr id="8" name="Rectangle 7"/>
           <p:cNvSpPr/>
           <p:nvPr/>
         </p:nvSpPr>
         <p:spPr>
           <a:xfrm>
-            <a:off x="457200" y="2478024"/>
-            <a:ext cx="11277295" cy="1051560"/>
-          </a:xfrm>
-          <a:prstGeom prst="roundRect">
-            <a:avLst>
-              <a:gd name="adj" fmla="val 12000"/>
-            </a:avLst>
-          </a:prstGeom>
-          <a:solidFill>
-            <a:srgbClr val="FFF8E1"/>
-          </a:solidFill>
-          <a:ln>
-            <a:noFill/>
-          </a:ln>
-        </p:spPr>
-        <p:style>
-          <a:lnRef idx="1">
-            <a:schemeClr val="accent1"/>
-          </a:lnRef>
-          <a:fillRef idx="3">
-            <a:schemeClr val="accent1"/>
-          </a:fillRef>
-          <a:effectRef idx="2">
-            <a:schemeClr val="accent1"/>
-          </a:effectRef>
-          <a:fontRef idx="minor">
-            <a:schemeClr val="lt1"/>
-          </a:fontRef>
-        </p:style>
-        <p:txBody>
-          <a:bodyPr rtlCol="0" anchor="ctr"/>
-          <a:lstStyle/>
-          <a:p>
-            <a:pPr algn="ctr"/>
-          </a:p>
-        </p:txBody>
-      </p:sp>
-      <p:sp>
-        <p:nvSpPr>
-          <p:cNvPr id="9" name="Rectangle 8"/>
-          <p:cNvSpPr/>
-          <p:nvPr/>
-        </p:nvSpPr>
-        <p:spPr>
-          <a:xfrm>
-            <a:off x="457200" y="2478024"/>
-            <a:ext cx="128016" cy="1051560"/>
+            <a:off x="457200" y="1655064"/>
+            <a:ext cx="3624986" cy="27432"/>
           </a:xfrm>
           <a:prstGeom prst="rect">
             <a:avLst/>
@@ -5890,6 +4998,30 @@
           </a:p>
         </p:txBody>
       </p:sp>
+      <p:pic>
+        <p:nvPicPr>
+          <p:cNvPr id="9" name="Picture 8" descr="drawio.png"/>
+          <p:cNvPicPr>
+            <a:picLocks noChangeAspect="1"/>
+          </p:cNvPicPr>
+          <p:nvPr/>
+        </p:nvPicPr>
+        <p:blipFill>
+          <a:blip r:embed="rId2"/>
+          <a:stretch>
+            <a:fillRect/>
+          </a:stretch>
+        </p:blipFill>
+        <p:spPr>
+          <a:xfrm>
+            <a:off x="1643329" y="1847087"/>
+            <a:ext cx="1252728" cy="1252728"/>
+          </a:xfrm>
+          <a:prstGeom prst="rect">
+            <a:avLst/>
+          </a:prstGeom>
+        </p:spPr>
+      </p:pic>
       <p:sp>
         <p:nvSpPr>
           <p:cNvPr id="10" name="TextBox 9"/>
@@ -5898,8 +5030,8 @@
         </p:nvSpPr>
         <p:spPr>
           <a:xfrm>
-            <a:off x="777240" y="2615184"/>
-            <a:ext cx="10774375" cy="822959"/>
+            <a:off x="530352" y="3191256"/>
+            <a:ext cx="3478682" cy="621792"/>
           </a:xfrm>
           <a:prstGeom prst="rect">
             <a:avLst/>
@@ -5907,35 +5039,34 @@
           <a:noFill/>
         </p:spPr>
         <p:txBody>
-          <a:bodyPr wrap="square">
-            <a:spAutoFit/>
-          </a:bodyPr>
-          <a:lstStyle/>
-          <a:p>
-            <a:r>
-              <a:rPr sz="1200" b="1" i="0">
-                <a:solidFill>
-                  <a:srgbClr val="FFD000"/>
-                </a:solidFill>
-                <a:latin typeface="Calibri"/>
-              </a:rPr>
-              <a:t>Aclaración</a:t>
-            </a:r>
-          </a:p>
-          <a:p>
-            <a:pPr>
+          <a:bodyPr wrap="square" anchor="t"/>
+          <a:lstStyle/>
+          <a:p>
+            <a:pPr algn="ctr"/>
+            <a:r>
+              <a:rPr sz="1300" b="1" i="0">
+                <a:solidFill>
+                  <a:srgbClr val="095292"/>
+                </a:solidFill>
+                <a:latin typeface="Calibri"/>
+              </a:rPr>
+              <a:t>Draw.Io</a:t>
+            </a:r>
+          </a:p>
+          <a:p>
+            <a:pPr algn="ctr">
               <a:spcBef>
-                <a:spcPts val="400"/>
+                <a:spcPts val="200"/>
               </a:spcBef>
             </a:pPr>
             <a:r>
-              <a:rPr sz="1400" b="0" i="0">
-                <a:solidFill>
-                  <a:srgbClr val="333333"/>
-                </a:solidFill>
-                <a:latin typeface="Calibri"/>
-              </a:rPr>
-              <a:t>Enunciado completo: Clases/Proyecto Integrador/ (VetCare).</a:t>
+              <a:rPr sz="1000" b="0" i="0">
+                <a:solidFill>
+                  <a:srgbClr val="666666"/>
+                </a:solidFill>
+                <a:latin typeface="Calibri"/>
+              </a:rPr>
+              <a:t>Diagramas UML y de contexto</a:t>
             </a:r>
           </a:p>
         </p:txBody>
@@ -5948,8 +5079,8 @@
         </p:nvSpPr>
         <p:spPr>
           <a:xfrm>
-            <a:off x="457200" y="3694176"/>
-            <a:ext cx="11277295" cy="1051560"/>
+            <a:off x="4283354" y="1591056"/>
+            <a:ext cx="3624986" cy="2331720"/>
           </a:xfrm>
           <a:prstGeom prst="roundRect">
             <a:avLst>
@@ -5957,7 +5088,7 @@
             </a:avLst>
           </a:prstGeom>
           <a:solidFill>
-            <a:srgbClr val="FBE4E4"/>
+            <a:srgbClr val="F2F2F2"/>
           </a:solidFill>
           <a:ln>
             <a:noFill/>
@@ -5993,14 +5124,14 @@
         </p:nvSpPr>
         <p:spPr>
           <a:xfrm>
-            <a:off x="457200" y="3694176"/>
-            <a:ext cx="128016" cy="1051560"/>
+            <a:off x="4283354" y="1591056"/>
+            <a:ext cx="3624986" cy="64008"/>
           </a:xfrm>
           <a:prstGeom prst="rect">
             <a:avLst/>
           </a:prstGeom>
           <a:solidFill>
-            <a:srgbClr val="A02030"/>
+            <a:srgbClr val="095292"/>
           </a:solidFill>
           <a:ln>
             <a:noFill/>
@@ -6030,14 +5161,81 @@
       </p:sp>
       <p:sp>
         <p:nvSpPr>
-          <p:cNvPr id="13" name="TextBox 12"/>
+          <p:cNvPr id="13" name="Rectangle 12"/>
+          <p:cNvSpPr/>
+          <p:nvPr/>
+        </p:nvSpPr>
+        <p:spPr>
+          <a:xfrm>
+            <a:off x="4283354" y="1655064"/>
+            <a:ext cx="3624986" cy="27432"/>
+          </a:xfrm>
+          <a:prstGeom prst="rect">
+            <a:avLst/>
+          </a:prstGeom>
+          <a:solidFill>
+            <a:srgbClr val="FFD000"/>
+          </a:solidFill>
+          <a:ln>
+            <a:noFill/>
+          </a:ln>
+        </p:spPr>
+        <p:style>
+          <a:lnRef idx="1">
+            <a:schemeClr val="accent1"/>
+          </a:lnRef>
+          <a:fillRef idx="3">
+            <a:schemeClr val="accent1"/>
+          </a:fillRef>
+          <a:effectRef idx="2">
+            <a:schemeClr val="accent1"/>
+          </a:effectRef>
+          <a:fontRef idx="minor">
+            <a:schemeClr val="lt1"/>
+          </a:fontRef>
+        </p:style>
+        <p:txBody>
+          <a:bodyPr rtlCol="0" anchor="ctr"/>
+          <a:lstStyle/>
+          <a:p>
+            <a:pPr algn="ctr"/>
+          </a:p>
+        </p:txBody>
+      </p:sp>
+      <p:pic>
+        <p:nvPicPr>
+          <p:cNvPr id="14" name="Picture 13" descr="google_docs.png"/>
+          <p:cNvPicPr>
+            <a:picLocks noChangeAspect="1"/>
+          </p:cNvPicPr>
+          <p:nvPr/>
+        </p:nvPicPr>
+        <p:blipFill>
+          <a:blip r:embed="rId3"/>
+          <a:stretch>
+            <a:fillRect/>
+          </a:stretch>
+        </p:blipFill>
+        <p:spPr>
+          <a:xfrm>
+            <a:off x="5469483" y="1847087"/>
+            <a:ext cx="1252728" cy="1252728"/>
+          </a:xfrm>
+          <a:prstGeom prst="rect">
+            <a:avLst/>
+          </a:prstGeom>
+        </p:spPr>
+      </p:pic>
+      <p:sp>
+        <p:nvSpPr>
+          <p:cNvPr id="15" name="TextBox 14"/>
           <p:cNvSpPr txBox="1"/>
           <p:nvPr/>
         </p:nvSpPr>
         <p:spPr>
           <a:xfrm>
-            <a:off x="777240" y="3831336"/>
-            <a:ext cx="10774375" cy="822959"/>
+            <a:off x="4356506" y="3191256"/>
+            <a:ext cx="3478682" cy="621792"/>
           </a:xfrm>
           <a:prstGeom prst="rect">
             <a:avLst/>
@@ -6045,42 +5243,245 @@
           <a:noFill/>
         </p:spPr>
         <p:txBody>
-          <a:bodyPr wrap="square">
-            <a:spAutoFit/>
-          </a:bodyPr>
-          <a:lstStyle/>
-          <a:p>
-            <a:r>
-              <a:rPr sz="1200" b="1" i="0">
-                <a:solidFill>
-                  <a:srgbClr val="A02030"/>
-                </a:solidFill>
-                <a:latin typeface="Calibri"/>
-              </a:rPr>
-              <a:t>Atención</a:t>
-            </a:r>
-          </a:p>
-          <a:p>
-            <a:pPr>
+          <a:bodyPr wrap="square" anchor="t"/>
+          <a:lstStyle/>
+          <a:p>
+            <a:pPr algn="ctr"/>
+            <a:r>
+              <a:rPr sz="1300" b="1" i="0">
+                <a:solidFill>
+                  <a:srgbClr val="095292"/>
+                </a:solidFill>
+                <a:latin typeface="Calibri"/>
+              </a:rPr>
+              <a:t>google docs</a:t>
+            </a:r>
+          </a:p>
+          <a:p>
+            <a:pPr algn="ctr">
               <a:spcBef>
-                <a:spcPts val="400"/>
+                <a:spcPts val="200"/>
               </a:spcBef>
             </a:pPr>
             <a:r>
-              <a:rPr sz="1400" b="0" i="0">
-                <a:solidFill>
-                  <a:srgbClr val="333333"/>
-                </a:solidFill>
-                <a:latin typeface="Calibri"/>
-              </a:rPr>
-              <a:t>Entrega del taller, si el docente lo asigna · en la fecha que indique el docente.</a:t>
-            </a:r>
-          </a:p>
-        </p:txBody>
-      </p:sp>
-      <p:sp>
-        <p:nvSpPr>
-          <p:cNvPr id="14" name="TextBox 13"/>
+              <a:rPr sz="1000" b="0" i="0">
+                <a:solidFill>
+                  <a:srgbClr val="666666"/>
+                </a:solidFill>
+                <a:latin typeface="Calibri"/>
+              </a:rPr>
+              <a:t>Documentos del paquete de diseño</a:t>
+            </a:r>
+          </a:p>
+        </p:txBody>
+      </p:sp>
+      <p:sp>
+        <p:nvSpPr>
+          <p:cNvPr id="16" name="Rounded Rectangle 15"/>
+          <p:cNvSpPr/>
+          <p:nvPr/>
+        </p:nvSpPr>
+        <p:spPr>
+          <a:xfrm>
+            <a:off x="8109508" y="1591056"/>
+            <a:ext cx="3624986" cy="2331720"/>
+          </a:xfrm>
+          <a:prstGeom prst="roundRect">
+            <a:avLst>
+              <a:gd name="adj" fmla="val 12000"/>
+            </a:avLst>
+          </a:prstGeom>
+          <a:solidFill>
+            <a:srgbClr val="F2F2F2"/>
+          </a:solidFill>
+          <a:ln>
+            <a:noFill/>
+          </a:ln>
+        </p:spPr>
+        <p:style>
+          <a:lnRef idx="1">
+            <a:schemeClr val="accent1"/>
+          </a:lnRef>
+          <a:fillRef idx="3">
+            <a:schemeClr val="accent1"/>
+          </a:fillRef>
+          <a:effectRef idx="2">
+            <a:schemeClr val="accent1"/>
+          </a:effectRef>
+          <a:fontRef idx="minor">
+            <a:schemeClr val="lt1"/>
+          </a:fontRef>
+        </p:style>
+        <p:txBody>
+          <a:bodyPr rtlCol="0" anchor="ctr"/>
+          <a:lstStyle/>
+          <a:p>
+            <a:pPr algn="ctr"/>
+          </a:p>
+        </p:txBody>
+      </p:sp>
+      <p:sp>
+        <p:nvSpPr>
+          <p:cNvPr id="17" name="Rectangle 16"/>
+          <p:cNvSpPr/>
+          <p:nvPr/>
+        </p:nvSpPr>
+        <p:spPr>
+          <a:xfrm>
+            <a:off x="8109508" y="1591056"/>
+            <a:ext cx="3624986" cy="64008"/>
+          </a:xfrm>
+          <a:prstGeom prst="rect">
+            <a:avLst/>
+          </a:prstGeom>
+          <a:solidFill>
+            <a:srgbClr val="095292"/>
+          </a:solidFill>
+          <a:ln>
+            <a:noFill/>
+          </a:ln>
+        </p:spPr>
+        <p:style>
+          <a:lnRef idx="1">
+            <a:schemeClr val="accent1"/>
+          </a:lnRef>
+          <a:fillRef idx="3">
+            <a:schemeClr val="accent1"/>
+          </a:fillRef>
+          <a:effectRef idx="2">
+            <a:schemeClr val="accent1"/>
+          </a:effectRef>
+          <a:fontRef idx="minor">
+            <a:schemeClr val="lt1"/>
+          </a:fontRef>
+        </p:style>
+        <p:txBody>
+          <a:bodyPr rtlCol="0" anchor="ctr"/>
+          <a:lstStyle/>
+          <a:p>
+            <a:pPr algn="ctr"/>
+          </a:p>
+        </p:txBody>
+      </p:sp>
+      <p:sp>
+        <p:nvSpPr>
+          <p:cNvPr id="18" name="Rectangle 17"/>
+          <p:cNvSpPr/>
+          <p:nvPr/>
+        </p:nvSpPr>
+        <p:spPr>
+          <a:xfrm>
+            <a:off x="8109508" y="1655064"/>
+            <a:ext cx="3624986" cy="27432"/>
+          </a:xfrm>
+          <a:prstGeom prst="rect">
+            <a:avLst/>
+          </a:prstGeom>
+          <a:solidFill>
+            <a:srgbClr val="FFD000"/>
+          </a:solidFill>
+          <a:ln>
+            <a:noFill/>
+          </a:ln>
+        </p:spPr>
+        <p:style>
+          <a:lnRef idx="1">
+            <a:schemeClr val="accent1"/>
+          </a:lnRef>
+          <a:fillRef idx="3">
+            <a:schemeClr val="accent1"/>
+          </a:fillRef>
+          <a:effectRef idx="2">
+            <a:schemeClr val="accent1"/>
+          </a:effectRef>
+          <a:fontRef idx="minor">
+            <a:schemeClr val="lt1"/>
+          </a:fontRef>
+        </p:style>
+        <p:txBody>
+          <a:bodyPr rtlCol="0" anchor="ctr"/>
+          <a:lstStyle/>
+          <a:p>
+            <a:pPr algn="ctr"/>
+          </a:p>
+        </p:txBody>
+      </p:sp>
+      <p:pic>
+        <p:nvPicPr>
+          <p:cNvPr id="19" name="Picture 18" descr="examlab.png"/>
+          <p:cNvPicPr>
+            <a:picLocks noChangeAspect="1"/>
+          </p:cNvPicPr>
+          <p:nvPr/>
+        </p:nvPicPr>
+        <p:blipFill>
+          <a:blip r:embed="rId4"/>
+          <a:stretch>
+            <a:fillRect/>
+          </a:stretch>
+        </p:blipFill>
+        <p:spPr>
+          <a:xfrm>
+            <a:off x="9295638" y="1847087"/>
+            <a:ext cx="1252728" cy="1252728"/>
+          </a:xfrm>
+          <a:prstGeom prst="rect">
+            <a:avLst/>
+          </a:prstGeom>
+        </p:spPr>
+      </p:pic>
+      <p:sp>
+        <p:nvSpPr>
+          <p:cNvPr id="20" name="TextBox 19"/>
+          <p:cNvSpPr txBox="1"/>
+          <p:nvPr/>
+        </p:nvSpPr>
+        <p:spPr>
+          <a:xfrm>
+            <a:off x="8182660" y="3191256"/>
+            <a:ext cx="3478682" cy="621792"/>
+          </a:xfrm>
+          <a:prstGeom prst="rect">
+            <a:avLst/>
+          </a:prstGeom>
+          <a:noFill/>
+        </p:spPr>
+        <p:txBody>
+          <a:bodyPr wrap="square" anchor="t"/>
+          <a:lstStyle/>
+          <a:p>
+            <a:pPr algn="ctr"/>
+            <a:r>
+              <a:rPr sz="1300" b="1" i="0">
+                <a:solidFill>
+                  <a:srgbClr val="095292"/>
+                </a:solidFill>
+                <a:latin typeface="Calibri"/>
+              </a:rPr>
+              <a:t>la plataforma del curso</a:t>
+            </a:r>
+          </a:p>
+          <a:p>
+            <a:pPr algn="ctr">
+              <a:spcBef>
+                <a:spcPts val="200"/>
+              </a:spcBef>
+            </a:pPr>
+            <a:r>
+              <a:rPr sz="1000" b="0" i="0">
+                <a:solidFill>
+                  <a:srgbClr val="666666"/>
+                </a:solidFill>
+                <a:latin typeface="Calibri"/>
+              </a:rPr>
+              <a:t>Entrega del taller · en la fecha que indique el docente</a:t>
+            </a:r>
+          </a:p>
+        </p:txBody>
+      </p:sp>
+      <p:sp>
+        <p:nvSpPr>
+          <p:cNvPr id="21" name="TextBox 20"/>
           <p:cNvSpPr txBox="1"/>
           <p:nvPr/>
         </p:nvSpPr>
@@ -6148,7 +5549,1695 @@
         <p:spPr>
           <a:xfrm>
             <a:off x="0" y="0"/>
-            <a:ext cx="12191695" cy="164592"/>
+            <a:ext cx="12191695" cy="960120"/>
+          </a:xfrm>
+          <a:prstGeom prst="rect">
+            <a:avLst/>
+          </a:prstGeom>
+          <a:solidFill>
+            <a:srgbClr val="095292"/>
+          </a:solidFill>
+          <a:ln>
+            <a:noFill/>
+          </a:ln>
+        </p:spPr>
+        <p:style>
+          <a:lnRef idx="1">
+            <a:schemeClr val="accent1"/>
+          </a:lnRef>
+          <a:fillRef idx="3">
+            <a:schemeClr val="accent1"/>
+          </a:fillRef>
+          <a:effectRef idx="2">
+            <a:schemeClr val="accent1"/>
+          </a:effectRef>
+          <a:fontRef idx="minor">
+            <a:schemeClr val="lt1"/>
+          </a:fontRef>
+        </p:style>
+        <p:txBody>
+          <a:bodyPr rtlCol="0" anchor="ctr"/>
+          <a:lstStyle/>
+          <a:p>
+            <a:pPr algn="ctr"/>
+          </a:p>
+        </p:txBody>
+      </p:sp>
+      <p:sp>
+        <p:nvSpPr>
+          <p:cNvPr id="3" name="Rectangle 2"/>
+          <p:cNvSpPr/>
+          <p:nvPr/>
+        </p:nvSpPr>
+        <p:spPr>
+          <a:xfrm>
+            <a:off x="0" y="960120"/>
+            <a:ext cx="12191695" cy="41148"/>
+          </a:xfrm>
+          <a:prstGeom prst="rect">
+            <a:avLst/>
+          </a:prstGeom>
+          <a:solidFill>
+            <a:srgbClr val="FFD000"/>
+          </a:solidFill>
+          <a:ln>
+            <a:noFill/>
+          </a:ln>
+        </p:spPr>
+        <p:style>
+          <a:lnRef idx="1">
+            <a:schemeClr val="accent1"/>
+          </a:lnRef>
+          <a:fillRef idx="3">
+            <a:schemeClr val="accent1"/>
+          </a:fillRef>
+          <a:effectRef idx="2">
+            <a:schemeClr val="accent1"/>
+          </a:effectRef>
+          <a:fontRef idx="minor">
+            <a:schemeClr val="lt1"/>
+          </a:fontRef>
+        </p:style>
+        <p:txBody>
+          <a:bodyPr rtlCol="0" anchor="ctr"/>
+          <a:lstStyle/>
+          <a:p>
+            <a:pPr algn="ctr"/>
+          </a:p>
+        </p:txBody>
+      </p:sp>
+      <p:sp>
+        <p:nvSpPr>
+          <p:cNvPr id="4" name="TextBox 3"/>
+          <p:cNvSpPr txBox="1"/>
+          <p:nvPr/>
+        </p:nvSpPr>
+        <p:spPr>
+          <a:xfrm>
+            <a:off x="457200" y="164592"/>
+            <a:ext cx="11277295" cy="502920"/>
+          </a:xfrm>
+          <a:prstGeom prst="rect">
+            <a:avLst/>
+          </a:prstGeom>
+          <a:noFill/>
+        </p:spPr>
+        <p:txBody>
+          <a:bodyPr wrap="square">
+            <a:spAutoFit/>
+          </a:bodyPr>
+          <a:lstStyle/>
+          <a:p>
+            <a:r>
+              <a:rPr sz="2600" b="1" i="0">
+                <a:solidFill>
+                  <a:srgbClr val="FFFFFF"/>
+                </a:solidFill>
+                <a:latin typeface="Calibri"/>
+              </a:rPr>
+              <a:t>Taller PI — por que importa</a:t>
+            </a:r>
+          </a:p>
+        </p:txBody>
+      </p:sp>
+      <p:sp>
+        <p:nvSpPr>
+          <p:cNvPr id="5" name="TextBox 4"/>
+          <p:cNvSpPr txBox="1"/>
+          <p:nvPr/>
+        </p:nvSpPr>
+        <p:spPr>
+          <a:xfrm>
+            <a:off x="457200" y="1170432"/>
+            <a:ext cx="11277295" cy="5230368"/>
+          </a:xfrm>
+          <a:prstGeom prst="rect">
+            <a:avLst/>
+          </a:prstGeom>
+          <a:noFill/>
+        </p:spPr>
+        <p:txBody>
+          <a:bodyPr wrap="square">
+            <a:spAutoFit/>
+          </a:bodyPr>
+          <a:lstStyle/>
+          <a:p>
+            <a:pPr>
+              <a:spcAft>
+                <a:spcPts val="800"/>
+              </a:spcAft>
+            </a:pPr>
+            <a:r>
+              <a:rPr sz="2000" b="0" i="0">
+                <a:solidFill>
+                  <a:srgbClr val="333333"/>
+                </a:solidFill>
+                <a:latin typeface="Calibri"/>
+              </a:rPr>
+              <a:t>–   </a:t>
+            </a:r>
+            <a:r>
+              <a:rPr sz="2000" b="1" i="0">
+                <a:solidFill>
+                  <a:srgbClr val="333333"/>
+                </a:solidFill>
+                <a:latin typeface="Calibri"/>
+              </a:rPr>
+              <a:t>Por que importa al PI:</a:t>
+            </a:r>
+            <a:r>
+              <a:rPr sz="2000" b="0" i="0">
+                <a:solidFill>
+                  <a:srgbClr val="333333"/>
+                </a:solidFill>
+                <a:latin typeface="Calibri"/>
+              </a:rPr>
+              <a:t> el paquete de VetCare ya tiene requisitos, casos de uso y clases, pero nadie ha verificado que los tres describan el mismo sistema; sin esa verificacion los planos se contradicen y quien construya va a escoger al azar cual documento obedecer.</a:t>
+            </a:r>
+          </a:p>
+          <a:p>
+            <a:pPr>
+              <a:spcAft>
+                <a:spcPts val="800"/>
+              </a:spcAft>
+            </a:pPr>
+            <a:r>
+              <a:rPr sz="2000" b="0" i="0">
+                <a:solidFill>
+                  <a:srgbClr val="333333"/>
+                </a:solidFill>
+                <a:latin typeface="Calibri"/>
+              </a:rPr>
+              <a:t>–   Esta sesion produce evidencia propia: matriz, glosario, acta de revision y backlog, y por eso se califica igual que cualquier otra entrega.</a:t>
+            </a:r>
+          </a:p>
+          <a:p>
+            <a:pPr>
+              <a:spcAft>
+                <a:spcPts val="800"/>
+              </a:spcAft>
+            </a:pPr>
+            <a:r>
+              <a:rPr sz="2000" b="0" i="0">
+                <a:solidFill>
+                  <a:srgbClr val="333333"/>
+                </a:solidFill>
+                <a:latin typeface="Calibri"/>
+              </a:rPr>
+              <a:t>–   Lo que hoy quede ambiguo lo paga el compañero que solo cursa Programacion II, que recibira estos planos sin poder preguntarle nada a la clinica Huellitas.</a:t>
+            </a:r>
+          </a:p>
+        </p:txBody>
+      </p:sp>
+      <p:sp>
+        <p:nvSpPr>
+          <p:cNvPr id="6" name="TextBox 5"/>
+          <p:cNvSpPr txBox="1"/>
+          <p:nvPr/>
+        </p:nvSpPr>
+        <p:spPr>
+          <a:xfrm>
+            <a:off x="11185855" y="6473952"/>
+            <a:ext cx="640080" cy="274320"/>
+          </a:xfrm>
+          <a:prstGeom prst="rect">
+            <a:avLst/>
+          </a:prstGeom>
+          <a:noFill/>
+        </p:spPr>
+        <p:txBody>
+          <a:bodyPr wrap="square">
+            <a:spAutoFit/>
+          </a:bodyPr>
+          <a:lstStyle/>
+          <a:p>
+            <a:pPr algn="r"/>
+            <a:r>
+              <a:rPr sz="1100" b="0" i="0">
+                <a:solidFill>
+                  <a:srgbClr val="666666"/>
+                </a:solidFill>
+                <a:latin typeface="Calibri"/>
+              </a:rPr>
+              <a:t>14</a:t>
+            </a:r>
+          </a:p>
+        </p:txBody>
+      </p:sp>
+    </p:spTree>
+  </p:cSld>
+  <p:clrMapOvr>
+    <a:masterClrMapping/>
+  </p:clrMapOvr>
+</p:sld>
+</file>
+
+<file path=ppt/slides/slide15.xml><?xml version="1.0" encoding="utf-8"?>
+<p:sld xmlns:a="http://schemas.openxmlformats.org/drawingml/2006/main" xmlns:p="http://schemas.openxmlformats.org/presentationml/2006/main" xmlns:r="http://schemas.openxmlformats.org/officeDocument/2006/relationships">
+  <p:cSld>
+    <p:bg>
+      <p:bgPr>
+        <a:solidFill>
+          <a:srgbClr val="FFFFFF"/>
+        </a:solidFill>
+        <a:effectLst/>
+      </p:bgPr>
+    </p:bg>
+    <p:spTree>
+      <p:nvGrpSpPr>
+        <p:cNvPr id="1" name=""/>
+        <p:cNvGrpSpPr/>
+        <p:nvPr/>
+      </p:nvGrpSpPr>
+      <p:grpSpPr/>
+      <p:sp>
+        <p:nvSpPr>
+          <p:cNvPr id="2" name="Rectangle 1"/>
+          <p:cNvSpPr/>
+          <p:nvPr/>
+        </p:nvSpPr>
+        <p:spPr>
+          <a:xfrm>
+            <a:off x="0" y="0"/>
+            <a:ext cx="12191695" cy="960120"/>
+          </a:xfrm>
+          <a:prstGeom prst="rect">
+            <a:avLst/>
+          </a:prstGeom>
+          <a:solidFill>
+            <a:srgbClr val="095292"/>
+          </a:solidFill>
+          <a:ln>
+            <a:noFill/>
+          </a:ln>
+        </p:spPr>
+        <p:style>
+          <a:lnRef idx="1">
+            <a:schemeClr val="accent1"/>
+          </a:lnRef>
+          <a:fillRef idx="3">
+            <a:schemeClr val="accent1"/>
+          </a:fillRef>
+          <a:effectRef idx="2">
+            <a:schemeClr val="accent1"/>
+          </a:effectRef>
+          <a:fontRef idx="minor">
+            <a:schemeClr val="lt1"/>
+          </a:fontRef>
+        </p:style>
+        <p:txBody>
+          <a:bodyPr rtlCol="0" anchor="ctr"/>
+          <a:lstStyle/>
+          <a:p>
+            <a:pPr algn="ctr"/>
+          </a:p>
+        </p:txBody>
+      </p:sp>
+      <p:sp>
+        <p:nvSpPr>
+          <p:cNvPr id="3" name="Rectangle 2"/>
+          <p:cNvSpPr/>
+          <p:nvPr/>
+        </p:nvSpPr>
+        <p:spPr>
+          <a:xfrm>
+            <a:off x="0" y="960120"/>
+            <a:ext cx="12191695" cy="41148"/>
+          </a:xfrm>
+          <a:prstGeom prst="rect">
+            <a:avLst/>
+          </a:prstGeom>
+          <a:solidFill>
+            <a:srgbClr val="FFD000"/>
+          </a:solidFill>
+          <a:ln>
+            <a:noFill/>
+          </a:ln>
+        </p:spPr>
+        <p:style>
+          <a:lnRef idx="1">
+            <a:schemeClr val="accent1"/>
+          </a:lnRef>
+          <a:fillRef idx="3">
+            <a:schemeClr val="accent1"/>
+          </a:fillRef>
+          <a:effectRef idx="2">
+            <a:schemeClr val="accent1"/>
+          </a:effectRef>
+          <a:fontRef idx="minor">
+            <a:schemeClr val="lt1"/>
+          </a:fontRef>
+        </p:style>
+        <p:txBody>
+          <a:bodyPr rtlCol="0" anchor="ctr"/>
+          <a:lstStyle/>
+          <a:p>
+            <a:pPr algn="ctr"/>
+          </a:p>
+        </p:txBody>
+      </p:sp>
+      <p:sp>
+        <p:nvSpPr>
+          <p:cNvPr id="4" name="TextBox 3"/>
+          <p:cNvSpPr txBox="1"/>
+          <p:nvPr/>
+        </p:nvSpPr>
+        <p:spPr>
+          <a:xfrm>
+            <a:off x="457200" y="164592"/>
+            <a:ext cx="11277295" cy="502920"/>
+          </a:xfrm>
+          <a:prstGeom prst="rect">
+            <a:avLst/>
+          </a:prstGeom>
+          <a:noFill/>
+        </p:spPr>
+        <p:txBody>
+          <a:bodyPr wrap="square">
+            <a:spAutoFit/>
+          </a:bodyPr>
+          <a:lstStyle/>
+          <a:p>
+            <a:r>
+              <a:rPr sz="2600" b="1" i="0">
+                <a:solidFill>
+                  <a:srgbClr val="FFFFFF"/>
+                </a:solidFill>
+                <a:latin typeface="Calibri"/>
+              </a:rPr>
+              <a:t>Taller PI — punto de partida</a:t>
+            </a:r>
+          </a:p>
+        </p:txBody>
+      </p:sp>
+      <p:sp>
+        <p:nvSpPr>
+          <p:cNvPr id="5" name="TextBox 4"/>
+          <p:cNvSpPr txBox="1"/>
+          <p:nvPr/>
+        </p:nvSpPr>
+        <p:spPr>
+          <a:xfrm>
+            <a:off x="457200" y="1170432"/>
+            <a:ext cx="11277295" cy="5230368"/>
+          </a:xfrm>
+          <a:prstGeom prst="rect">
+            <a:avLst/>
+          </a:prstGeom>
+          <a:noFill/>
+        </p:spPr>
+        <p:txBody>
+          <a:bodyPr wrap="square">
+            <a:spAutoFit/>
+          </a:bodyPr>
+          <a:lstStyle/>
+          <a:p>
+            <a:pPr>
+              <a:spcAft>
+                <a:spcPts val="800"/>
+              </a:spcAft>
+            </a:pPr>
+            <a:r>
+              <a:rPr sz="2000" b="0" i="0">
+                <a:solidFill>
+                  <a:srgbClr val="333333"/>
+                </a:solidFill>
+                <a:latin typeface="Calibri"/>
+              </a:rPr>
+              <a:t>–   Cada estudiante llega con tres artefactos de VetCare escritos en semanas distintas: el catalogo de RF y RNF, el diagrama con las especificaciones de casos de uso y el diagrama de clases con sus multiplicidades.</a:t>
+            </a:r>
+          </a:p>
+          <a:p>
+            <a:pPr>
+              <a:spcAft>
+                <a:spcPts val="800"/>
+              </a:spcAft>
+            </a:pPr>
+            <a:r>
+              <a:rPr sz="2000" b="0" i="0">
+                <a:solidFill>
+                  <a:srgbClr val="333333"/>
+                </a:solidFill>
+                <a:latin typeface="Calibri"/>
+              </a:rPr>
+              <a:t>–   Nadie ha vuelto a abrir el catalogo de requisitos desde que se dibujaron las clases, y los nombres empezaron a moverse: donde el requisito dice Propietario, la clase dice Dueño y el mockup dice Cliente.</a:t>
+            </a:r>
+          </a:p>
+          <a:p>
+            <a:pPr>
+              <a:spcAft>
+                <a:spcPts val="800"/>
+              </a:spcAft>
+            </a:pPr>
+            <a:r>
+              <a:rPr sz="2000" b="0" i="0">
+                <a:solidFill>
+                  <a:srgbClr val="333333"/>
+                </a:solidFill>
+                <a:latin typeface="Calibri"/>
+              </a:rPr>
+              <a:t>–   Hay al menos un requisito que suena bonito en el papel, el RF-07 de recordatorio de cita, y no aparece en ningun caso de uso ni en ninguna clase del modelo.</a:t>
+            </a:r>
+          </a:p>
+        </p:txBody>
+      </p:sp>
+      <p:sp>
+        <p:nvSpPr>
+          <p:cNvPr id="6" name="TextBox 5"/>
+          <p:cNvSpPr txBox="1"/>
+          <p:nvPr/>
+        </p:nvSpPr>
+        <p:spPr>
+          <a:xfrm>
+            <a:off x="11185855" y="6473952"/>
+            <a:ext cx="640080" cy="274320"/>
+          </a:xfrm>
+          <a:prstGeom prst="rect">
+            <a:avLst/>
+          </a:prstGeom>
+          <a:noFill/>
+        </p:spPr>
+        <p:txBody>
+          <a:bodyPr wrap="square">
+            <a:spAutoFit/>
+          </a:bodyPr>
+          <a:lstStyle/>
+          <a:p>
+            <a:pPr algn="r"/>
+            <a:r>
+              <a:rPr sz="1100" b="0" i="0">
+                <a:solidFill>
+                  <a:srgbClr val="666666"/>
+                </a:solidFill>
+                <a:latin typeface="Calibri"/>
+              </a:rPr>
+              <a:t>15</a:t>
+            </a:r>
+          </a:p>
+        </p:txBody>
+      </p:sp>
+    </p:spTree>
+  </p:cSld>
+  <p:clrMapOvr>
+    <a:masterClrMapping/>
+  </p:clrMapOvr>
+</p:sld>
+</file>
+
+<file path=ppt/slides/slide16.xml><?xml version="1.0" encoding="utf-8"?>
+<p:sld xmlns:a="http://schemas.openxmlformats.org/drawingml/2006/main" xmlns:p="http://schemas.openxmlformats.org/presentationml/2006/main" xmlns:r="http://schemas.openxmlformats.org/officeDocument/2006/relationships">
+  <p:cSld>
+    <p:bg>
+      <p:bgPr>
+        <a:solidFill>
+          <a:srgbClr val="FFFFFF"/>
+        </a:solidFill>
+        <a:effectLst/>
+      </p:bgPr>
+    </p:bg>
+    <p:spTree>
+      <p:nvGrpSpPr>
+        <p:cNvPr id="1" name=""/>
+        <p:cNvGrpSpPr/>
+        <p:nvPr/>
+      </p:nvGrpSpPr>
+      <p:grpSpPr/>
+      <p:sp>
+        <p:nvSpPr>
+          <p:cNvPr id="2" name="Rectangle 1"/>
+          <p:cNvSpPr/>
+          <p:nvPr/>
+        </p:nvSpPr>
+        <p:spPr>
+          <a:xfrm>
+            <a:off x="0" y="0"/>
+            <a:ext cx="12191695" cy="960120"/>
+          </a:xfrm>
+          <a:prstGeom prst="rect">
+            <a:avLst/>
+          </a:prstGeom>
+          <a:solidFill>
+            <a:srgbClr val="095292"/>
+          </a:solidFill>
+          <a:ln>
+            <a:noFill/>
+          </a:ln>
+        </p:spPr>
+        <p:style>
+          <a:lnRef idx="1">
+            <a:schemeClr val="accent1"/>
+          </a:lnRef>
+          <a:fillRef idx="3">
+            <a:schemeClr val="accent1"/>
+          </a:fillRef>
+          <a:effectRef idx="2">
+            <a:schemeClr val="accent1"/>
+          </a:effectRef>
+          <a:fontRef idx="minor">
+            <a:schemeClr val="lt1"/>
+          </a:fontRef>
+        </p:style>
+        <p:txBody>
+          <a:bodyPr rtlCol="0" anchor="ctr"/>
+          <a:lstStyle/>
+          <a:p>
+            <a:pPr algn="ctr"/>
+          </a:p>
+        </p:txBody>
+      </p:sp>
+      <p:sp>
+        <p:nvSpPr>
+          <p:cNvPr id="3" name="Rectangle 2"/>
+          <p:cNvSpPr/>
+          <p:nvPr/>
+        </p:nvSpPr>
+        <p:spPr>
+          <a:xfrm>
+            <a:off x="0" y="960120"/>
+            <a:ext cx="12191695" cy="41148"/>
+          </a:xfrm>
+          <a:prstGeom prst="rect">
+            <a:avLst/>
+          </a:prstGeom>
+          <a:solidFill>
+            <a:srgbClr val="FFD000"/>
+          </a:solidFill>
+          <a:ln>
+            <a:noFill/>
+          </a:ln>
+        </p:spPr>
+        <p:style>
+          <a:lnRef idx="1">
+            <a:schemeClr val="accent1"/>
+          </a:lnRef>
+          <a:fillRef idx="3">
+            <a:schemeClr val="accent1"/>
+          </a:fillRef>
+          <a:effectRef idx="2">
+            <a:schemeClr val="accent1"/>
+          </a:effectRef>
+          <a:fontRef idx="minor">
+            <a:schemeClr val="lt1"/>
+          </a:fontRef>
+        </p:style>
+        <p:txBody>
+          <a:bodyPr rtlCol="0" anchor="ctr"/>
+          <a:lstStyle/>
+          <a:p>
+            <a:pPr algn="ctr"/>
+          </a:p>
+        </p:txBody>
+      </p:sp>
+      <p:sp>
+        <p:nvSpPr>
+          <p:cNvPr id="4" name="TextBox 3"/>
+          <p:cNvSpPr txBox="1"/>
+          <p:nvPr/>
+        </p:nvSpPr>
+        <p:spPr>
+          <a:xfrm>
+            <a:off x="457200" y="164592"/>
+            <a:ext cx="11277295" cy="502920"/>
+          </a:xfrm>
+          <a:prstGeom prst="rect">
+            <a:avLst/>
+          </a:prstGeom>
+          <a:noFill/>
+        </p:spPr>
+        <p:txBody>
+          <a:bodyPr wrap="square">
+            <a:spAutoFit/>
+          </a:bodyPr>
+          <a:lstStyle/>
+          <a:p>
+            <a:r>
+              <a:rPr sz="2600" b="1" i="0">
+                <a:solidFill>
+                  <a:srgbClr val="FFFFFF"/>
+                </a:solidFill>
+                <a:latin typeface="Calibri"/>
+              </a:rPr>
+              <a:t>Taller PI — pasos guiados</a:t>
+            </a:r>
+          </a:p>
+        </p:txBody>
+      </p:sp>
+      <p:sp>
+        <p:nvSpPr>
+          <p:cNvPr id="5" name="Rounded Rectangle 4"/>
+          <p:cNvSpPr/>
+          <p:nvPr/>
+        </p:nvSpPr>
+        <p:spPr>
+          <a:xfrm>
+            <a:off x="457200" y="1234440"/>
+            <a:ext cx="11277295" cy="950976"/>
+          </a:xfrm>
+          <a:prstGeom prst="roundRect">
+            <a:avLst>
+              <a:gd name="adj" fmla="val 12000"/>
+            </a:avLst>
+          </a:prstGeom>
+          <a:solidFill>
+            <a:srgbClr val="F2F2F2"/>
+          </a:solidFill>
+          <a:ln>
+            <a:noFill/>
+          </a:ln>
+        </p:spPr>
+        <p:style>
+          <a:lnRef idx="1">
+            <a:schemeClr val="accent1"/>
+          </a:lnRef>
+          <a:fillRef idx="3">
+            <a:schemeClr val="accent1"/>
+          </a:fillRef>
+          <a:effectRef idx="2">
+            <a:schemeClr val="accent1"/>
+          </a:effectRef>
+          <a:fontRef idx="minor">
+            <a:schemeClr val="lt1"/>
+          </a:fontRef>
+        </p:style>
+        <p:txBody>
+          <a:bodyPr rtlCol="0" anchor="ctr"/>
+          <a:lstStyle/>
+          <a:p>
+            <a:pPr algn="ctr"/>
+          </a:p>
+        </p:txBody>
+      </p:sp>
+      <p:sp>
+        <p:nvSpPr>
+          <p:cNvPr id="6" name="Rounded Rectangle 5"/>
+          <p:cNvSpPr/>
+          <p:nvPr/>
+        </p:nvSpPr>
+        <p:spPr>
+          <a:xfrm>
+            <a:off x="594360" y="1490472"/>
+            <a:ext cx="438912" cy="438912"/>
+          </a:xfrm>
+          <a:prstGeom prst="roundRect">
+            <a:avLst>
+              <a:gd name="adj" fmla="val 12000"/>
+            </a:avLst>
+          </a:prstGeom>
+          <a:solidFill>
+            <a:srgbClr val="095292"/>
+          </a:solidFill>
+          <a:ln>
+            <a:noFill/>
+          </a:ln>
+        </p:spPr>
+        <p:style>
+          <a:lnRef idx="1">
+            <a:schemeClr val="accent1"/>
+          </a:lnRef>
+          <a:fillRef idx="3">
+            <a:schemeClr val="accent1"/>
+          </a:fillRef>
+          <a:effectRef idx="2">
+            <a:schemeClr val="accent1"/>
+          </a:effectRef>
+          <a:fontRef idx="minor">
+            <a:schemeClr val="lt1"/>
+          </a:fontRef>
+        </p:style>
+        <p:txBody>
+          <a:bodyPr rtlCol="0" anchor="ctr"/>
+          <a:lstStyle/>
+          <a:p>
+            <a:pPr algn="ctr"/>
+          </a:p>
+        </p:txBody>
+      </p:sp>
+      <p:sp>
+        <p:nvSpPr>
+          <p:cNvPr id="7" name="TextBox 6"/>
+          <p:cNvSpPr txBox="1"/>
+          <p:nvPr/>
+        </p:nvSpPr>
+        <p:spPr>
+          <a:xfrm>
+            <a:off x="594360" y="1490472"/>
+            <a:ext cx="438912" cy="438912"/>
+          </a:xfrm>
+          <a:prstGeom prst="rect">
+            <a:avLst/>
+          </a:prstGeom>
+          <a:noFill/>
+        </p:spPr>
+        <p:txBody>
+          <a:bodyPr wrap="square" anchor="ctr"/>
+          <a:lstStyle/>
+          <a:p>
+            <a:pPr algn="ctr"/>
+            <a:r>
+              <a:rPr sz="1600" b="1" i="0">
+                <a:solidFill>
+                  <a:srgbClr val="FFFFFF"/>
+                </a:solidFill>
+                <a:latin typeface="Calibri"/>
+              </a:rPr>
+              <a:t>1</a:t>
+            </a:r>
+          </a:p>
+        </p:txBody>
+      </p:sp>
+      <p:sp>
+        <p:nvSpPr>
+          <p:cNvPr id="8" name="TextBox 7"/>
+          <p:cNvSpPr txBox="1"/>
+          <p:nvPr/>
+        </p:nvSpPr>
+        <p:spPr>
+          <a:xfrm>
+            <a:off x="1188720" y="1325880"/>
+            <a:ext cx="10271455" cy="786384"/>
+          </a:xfrm>
+          <a:prstGeom prst="rect">
+            <a:avLst/>
+          </a:prstGeom>
+          <a:noFill/>
+        </p:spPr>
+        <p:txBody>
+          <a:bodyPr wrap="square" anchor="ctr"/>
+          <a:lstStyle/>
+          <a:p>
+            <a:r>
+              <a:rPr sz="1500" b="1" i="0">
+                <a:solidFill>
+                  <a:srgbClr val="095292"/>
+                </a:solidFill>
+                <a:latin typeface="Calibri"/>
+              </a:rPr>
+              <a:t>Construir en Google Docs la matriz de trazabilidad de VetCare con las columnas RF, Caso de uso, Clase o clases implicadas y Mockup, incluyendo todos los requisitos del catalogo, y marcar en rojo cada fila incompleta.</a:t>
+            </a:r>
+          </a:p>
+        </p:txBody>
+      </p:sp>
+      <p:sp>
+        <p:nvSpPr>
+          <p:cNvPr id="9" name="Rounded Rectangle 8"/>
+          <p:cNvSpPr/>
+          <p:nvPr/>
+        </p:nvSpPr>
+        <p:spPr>
+          <a:xfrm>
+            <a:off x="457200" y="2276856"/>
+            <a:ext cx="11277295" cy="950976"/>
+          </a:xfrm>
+          <a:prstGeom prst="roundRect">
+            <a:avLst>
+              <a:gd name="adj" fmla="val 12000"/>
+            </a:avLst>
+          </a:prstGeom>
+          <a:solidFill>
+            <a:srgbClr val="E8F4FA"/>
+          </a:solidFill>
+          <a:ln>
+            <a:noFill/>
+          </a:ln>
+        </p:spPr>
+        <p:style>
+          <a:lnRef idx="1">
+            <a:schemeClr val="accent1"/>
+          </a:lnRef>
+          <a:fillRef idx="3">
+            <a:schemeClr val="accent1"/>
+          </a:fillRef>
+          <a:effectRef idx="2">
+            <a:schemeClr val="accent1"/>
+          </a:effectRef>
+          <a:fontRef idx="minor">
+            <a:schemeClr val="lt1"/>
+          </a:fontRef>
+        </p:style>
+        <p:txBody>
+          <a:bodyPr rtlCol="0" anchor="ctr"/>
+          <a:lstStyle/>
+          <a:p>
+            <a:pPr algn="ctr"/>
+          </a:p>
+        </p:txBody>
+      </p:sp>
+      <p:sp>
+        <p:nvSpPr>
+          <p:cNvPr id="10" name="Rounded Rectangle 9"/>
+          <p:cNvSpPr/>
+          <p:nvPr/>
+        </p:nvSpPr>
+        <p:spPr>
+          <a:xfrm>
+            <a:off x="594360" y="2532888"/>
+            <a:ext cx="438912" cy="438912"/>
+          </a:xfrm>
+          <a:prstGeom prst="roundRect">
+            <a:avLst>
+              <a:gd name="adj" fmla="val 12000"/>
+            </a:avLst>
+          </a:prstGeom>
+          <a:solidFill>
+            <a:srgbClr val="095292"/>
+          </a:solidFill>
+          <a:ln>
+            <a:noFill/>
+          </a:ln>
+        </p:spPr>
+        <p:style>
+          <a:lnRef idx="1">
+            <a:schemeClr val="accent1"/>
+          </a:lnRef>
+          <a:fillRef idx="3">
+            <a:schemeClr val="accent1"/>
+          </a:fillRef>
+          <a:effectRef idx="2">
+            <a:schemeClr val="accent1"/>
+          </a:effectRef>
+          <a:fontRef idx="minor">
+            <a:schemeClr val="lt1"/>
+          </a:fontRef>
+        </p:style>
+        <p:txBody>
+          <a:bodyPr rtlCol="0" anchor="ctr"/>
+          <a:lstStyle/>
+          <a:p>
+            <a:pPr algn="ctr"/>
+          </a:p>
+        </p:txBody>
+      </p:sp>
+      <p:sp>
+        <p:nvSpPr>
+          <p:cNvPr id="11" name="TextBox 10"/>
+          <p:cNvSpPr txBox="1"/>
+          <p:nvPr/>
+        </p:nvSpPr>
+        <p:spPr>
+          <a:xfrm>
+            <a:off x="594360" y="2532888"/>
+            <a:ext cx="438912" cy="438912"/>
+          </a:xfrm>
+          <a:prstGeom prst="rect">
+            <a:avLst/>
+          </a:prstGeom>
+          <a:noFill/>
+        </p:spPr>
+        <p:txBody>
+          <a:bodyPr wrap="square" anchor="ctr"/>
+          <a:lstStyle/>
+          <a:p>
+            <a:pPr algn="ctr"/>
+            <a:r>
+              <a:rPr sz="1600" b="1" i="0">
+                <a:solidFill>
+                  <a:srgbClr val="FFFFFF"/>
+                </a:solidFill>
+                <a:latin typeface="Calibri"/>
+              </a:rPr>
+              <a:t>2</a:t>
+            </a:r>
+          </a:p>
+        </p:txBody>
+      </p:sp>
+      <p:sp>
+        <p:nvSpPr>
+          <p:cNvPr id="12" name="TextBox 11"/>
+          <p:cNvSpPr txBox="1"/>
+          <p:nvPr/>
+        </p:nvSpPr>
+        <p:spPr>
+          <a:xfrm>
+            <a:off x="1188720" y="2368296"/>
+            <a:ext cx="10271455" cy="786384"/>
+          </a:xfrm>
+          <a:prstGeom prst="rect">
+            <a:avLst/>
+          </a:prstGeom>
+          <a:noFill/>
+        </p:spPr>
+        <p:txBody>
+          <a:bodyPr wrap="square" anchor="ctr"/>
+          <a:lstStyle/>
+          <a:p>
+            <a:r>
+              <a:rPr sz="1400" b="1" i="0">
+                <a:solidFill>
+                  <a:srgbClr val="095292"/>
+                </a:solidFill>
+                <a:latin typeface="Calibri"/>
+              </a:rPr>
+              <a:t>Levantar el glosario de nombres canonicos con minimo ocho conceptos del dominio (Propietario, Mascota, Consulta, Cita, Veterinario, Vacuna, Expediente, Bitacora), cada uno con definicion de una linea y sinonimos prohibidos, y renombrar en los artefactos todo lo que no coincida.</a:t>
+            </a:r>
+          </a:p>
+        </p:txBody>
+      </p:sp>
+      <p:sp>
+        <p:nvSpPr>
+          <p:cNvPr id="13" name="Rounded Rectangle 12"/>
+          <p:cNvSpPr/>
+          <p:nvPr/>
+        </p:nvSpPr>
+        <p:spPr>
+          <a:xfrm>
+            <a:off x="457200" y="3319272"/>
+            <a:ext cx="11277295" cy="950976"/>
+          </a:xfrm>
+          <a:prstGeom prst="roundRect">
+            <a:avLst>
+              <a:gd name="adj" fmla="val 12000"/>
+            </a:avLst>
+          </a:prstGeom>
+          <a:solidFill>
+            <a:srgbClr val="F2F2F2"/>
+          </a:solidFill>
+          <a:ln>
+            <a:noFill/>
+          </a:ln>
+        </p:spPr>
+        <p:style>
+          <a:lnRef idx="1">
+            <a:schemeClr val="accent1"/>
+          </a:lnRef>
+          <a:fillRef idx="3">
+            <a:schemeClr val="accent1"/>
+          </a:fillRef>
+          <a:effectRef idx="2">
+            <a:schemeClr val="accent1"/>
+          </a:effectRef>
+          <a:fontRef idx="minor">
+            <a:schemeClr val="lt1"/>
+          </a:fontRef>
+        </p:style>
+        <p:txBody>
+          <a:bodyPr rtlCol="0" anchor="ctr"/>
+          <a:lstStyle/>
+          <a:p>
+            <a:pPr algn="ctr"/>
+          </a:p>
+        </p:txBody>
+      </p:sp>
+      <p:sp>
+        <p:nvSpPr>
+          <p:cNvPr id="14" name="Rounded Rectangle 13"/>
+          <p:cNvSpPr/>
+          <p:nvPr/>
+        </p:nvSpPr>
+        <p:spPr>
+          <a:xfrm>
+            <a:off x="594360" y="3575304"/>
+            <a:ext cx="438912" cy="438912"/>
+          </a:xfrm>
+          <a:prstGeom prst="roundRect">
+            <a:avLst>
+              <a:gd name="adj" fmla="val 12000"/>
+            </a:avLst>
+          </a:prstGeom>
+          <a:solidFill>
+            <a:srgbClr val="095292"/>
+          </a:solidFill>
+          <a:ln>
+            <a:noFill/>
+          </a:ln>
+        </p:spPr>
+        <p:style>
+          <a:lnRef idx="1">
+            <a:schemeClr val="accent1"/>
+          </a:lnRef>
+          <a:fillRef idx="3">
+            <a:schemeClr val="accent1"/>
+          </a:fillRef>
+          <a:effectRef idx="2">
+            <a:schemeClr val="accent1"/>
+          </a:effectRef>
+          <a:fontRef idx="minor">
+            <a:schemeClr val="lt1"/>
+          </a:fontRef>
+        </p:style>
+        <p:txBody>
+          <a:bodyPr rtlCol="0" anchor="ctr"/>
+          <a:lstStyle/>
+          <a:p>
+            <a:pPr algn="ctr"/>
+          </a:p>
+        </p:txBody>
+      </p:sp>
+      <p:sp>
+        <p:nvSpPr>
+          <p:cNvPr id="15" name="TextBox 14"/>
+          <p:cNvSpPr txBox="1"/>
+          <p:nvPr/>
+        </p:nvSpPr>
+        <p:spPr>
+          <a:xfrm>
+            <a:off x="594360" y="3575304"/>
+            <a:ext cx="438912" cy="438912"/>
+          </a:xfrm>
+          <a:prstGeom prst="rect">
+            <a:avLst/>
+          </a:prstGeom>
+          <a:noFill/>
+        </p:spPr>
+        <p:txBody>
+          <a:bodyPr wrap="square" anchor="ctr"/>
+          <a:lstStyle/>
+          <a:p>
+            <a:pPr algn="ctr"/>
+            <a:r>
+              <a:rPr sz="1600" b="1" i="0">
+                <a:solidFill>
+                  <a:srgbClr val="FFFFFF"/>
+                </a:solidFill>
+                <a:latin typeface="Calibri"/>
+              </a:rPr>
+              <a:t>3</a:t>
+            </a:r>
+          </a:p>
+        </p:txBody>
+      </p:sp>
+      <p:sp>
+        <p:nvSpPr>
+          <p:cNvPr id="16" name="TextBox 15"/>
+          <p:cNvSpPr txBox="1"/>
+          <p:nvPr/>
+        </p:nvSpPr>
+        <p:spPr>
+          <a:xfrm>
+            <a:off x="1188720" y="3410712"/>
+            <a:ext cx="10271455" cy="786384"/>
+          </a:xfrm>
+          <a:prstGeom prst="rect">
+            <a:avLst/>
+          </a:prstGeom>
+          <a:noFill/>
+        </p:spPr>
+        <p:txBody>
+          <a:bodyPr wrap="square" anchor="ctr"/>
+          <a:lstStyle/>
+          <a:p>
+            <a:r>
+              <a:rPr sz="1400" b="1" i="0">
+                <a:solidFill>
+                  <a:srgbClr val="095292"/>
+                </a:solidFill>
+                <a:latin typeface="Calibri"/>
+              </a:rPr>
+              <a:t>Intercambiar el paquete completo con otro estudiante (o con otro equipo, si el docente autorizo trabajo en equipo) y aplicar la rubrica de auditoria de seis puntos durante veinte minutos cronometrados, registrando cada hallazgo con ubicacion exacta, descripcion y severidad bloqueante, mayor o menor; queda prohibido proponer soluciones durante la revision.</a:t>
+            </a:r>
+          </a:p>
+        </p:txBody>
+      </p:sp>
+      <p:sp>
+        <p:nvSpPr>
+          <p:cNvPr id="17" name="Rounded Rectangle 16"/>
+          <p:cNvSpPr/>
+          <p:nvPr/>
+        </p:nvSpPr>
+        <p:spPr>
+          <a:xfrm>
+            <a:off x="457200" y="4361688"/>
+            <a:ext cx="11277295" cy="950976"/>
+          </a:xfrm>
+          <a:prstGeom prst="roundRect">
+            <a:avLst>
+              <a:gd name="adj" fmla="val 12000"/>
+            </a:avLst>
+          </a:prstGeom>
+          <a:solidFill>
+            <a:srgbClr val="E8F4FA"/>
+          </a:solidFill>
+          <a:ln>
+            <a:noFill/>
+          </a:ln>
+        </p:spPr>
+        <p:style>
+          <a:lnRef idx="1">
+            <a:schemeClr val="accent1"/>
+          </a:lnRef>
+          <a:fillRef idx="3">
+            <a:schemeClr val="accent1"/>
+          </a:fillRef>
+          <a:effectRef idx="2">
+            <a:schemeClr val="accent1"/>
+          </a:effectRef>
+          <a:fontRef idx="minor">
+            <a:schemeClr val="lt1"/>
+          </a:fontRef>
+        </p:style>
+        <p:txBody>
+          <a:bodyPr rtlCol="0" anchor="ctr"/>
+          <a:lstStyle/>
+          <a:p>
+            <a:pPr algn="ctr"/>
+          </a:p>
+        </p:txBody>
+      </p:sp>
+      <p:sp>
+        <p:nvSpPr>
+          <p:cNvPr id="18" name="Rounded Rectangle 17"/>
+          <p:cNvSpPr/>
+          <p:nvPr/>
+        </p:nvSpPr>
+        <p:spPr>
+          <a:xfrm>
+            <a:off x="594360" y="4617720"/>
+            <a:ext cx="438912" cy="438912"/>
+          </a:xfrm>
+          <a:prstGeom prst="roundRect">
+            <a:avLst>
+              <a:gd name="adj" fmla="val 12000"/>
+            </a:avLst>
+          </a:prstGeom>
+          <a:solidFill>
+            <a:srgbClr val="095292"/>
+          </a:solidFill>
+          <a:ln>
+            <a:noFill/>
+          </a:ln>
+        </p:spPr>
+        <p:style>
+          <a:lnRef idx="1">
+            <a:schemeClr val="accent1"/>
+          </a:lnRef>
+          <a:fillRef idx="3">
+            <a:schemeClr val="accent1"/>
+          </a:fillRef>
+          <a:effectRef idx="2">
+            <a:schemeClr val="accent1"/>
+          </a:effectRef>
+          <a:fontRef idx="minor">
+            <a:schemeClr val="lt1"/>
+          </a:fontRef>
+        </p:style>
+        <p:txBody>
+          <a:bodyPr rtlCol="0" anchor="ctr"/>
+          <a:lstStyle/>
+          <a:p>
+            <a:pPr algn="ctr"/>
+          </a:p>
+        </p:txBody>
+      </p:sp>
+      <p:sp>
+        <p:nvSpPr>
+          <p:cNvPr id="19" name="TextBox 18"/>
+          <p:cNvSpPr txBox="1"/>
+          <p:nvPr/>
+        </p:nvSpPr>
+        <p:spPr>
+          <a:xfrm>
+            <a:off x="594360" y="4617720"/>
+            <a:ext cx="438912" cy="438912"/>
+          </a:xfrm>
+          <a:prstGeom prst="rect">
+            <a:avLst/>
+          </a:prstGeom>
+          <a:noFill/>
+        </p:spPr>
+        <p:txBody>
+          <a:bodyPr wrap="square" anchor="ctr"/>
+          <a:lstStyle/>
+          <a:p>
+            <a:pPr algn="ctr"/>
+            <a:r>
+              <a:rPr sz="1600" b="1" i="0">
+                <a:solidFill>
+                  <a:srgbClr val="FFFFFF"/>
+                </a:solidFill>
+                <a:latin typeface="Calibri"/>
+              </a:rPr>
+              <a:t>4</a:t>
+            </a:r>
+          </a:p>
+        </p:txBody>
+      </p:sp>
+      <p:sp>
+        <p:nvSpPr>
+          <p:cNvPr id="20" name="TextBox 19"/>
+          <p:cNvSpPr txBox="1"/>
+          <p:nvPr/>
+        </p:nvSpPr>
+        <p:spPr>
+          <a:xfrm>
+            <a:off x="1188720" y="4453128"/>
+            <a:ext cx="10271455" cy="786384"/>
+          </a:xfrm>
+          <a:prstGeom prst="rect">
+            <a:avLst/>
+          </a:prstGeom>
+          <a:noFill/>
+        </p:spPr>
+        <p:txBody>
+          <a:bodyPr wrap="square" anchor="ctr"/>
+          <a:lstStyle/>
+          <a:p>
+            <a:r>
+              <a:rPr sz="1500" b="1" i="0">
+                <a:solidFill>
+                  <a:srgbClr val="095292"/>
+                </a:solidFill>
+                <a:latin typeface="Calibri"/>
+              </a:rPr>
+              <a:t>Recibir los hallazgos propios y clasificarlos en aceptado, rechazado con justificacion escrita o aplazado por acuerdo, sin borrar ninguno del acta, de modo que quede evidencia de la decision tomada.</a:t>
+            </a:r>
+          </a:p>
+        </p:txBody>
+      </p:sp>
+      <p:sp>
+        <p:nvSpPr>
+          <p:cNvPr id="21" name="Rounded Rectangle 20"/>
+          <p:cNvSpPr/>
+          <p:nvPr/>
+        </p:nvSpPr>
+        <p:spPr>
+          <a:xfrm>
+            <a:off x="457200" y="5404104"/>
+            <a:ext cx="11277295" cy="950976"/>
+          </a:xfrm>
+          <a:prstGeom prst="roundRect">
+            <a:avLst>
+              <a:gd name="adj" fmla="val 12000"/>
+            </a:avLst>
+          </a:prstGeom>
+          <a:solidFill>
+            <a:srgbClr val="F2F2F2"/>
+          </a:solidFill>
+          <a:ln>
+            <a:noFill/>
+          </a:ln>
+        </p:spPr>
+        <p:style>
+          <a:lnRef idx="1">
+            <a:schemeClr val="accent1"/>
+          </a:lnRef>
+          <a:fillRef idx="3">
+            <a:schemeClr val="accent1"/>
+          </a:fillRef>
+          <a:effectRef idx="2">
+            <a:schemeClr val="accent1"/>
+          </a:effectRef>
+          <a:fontRef idx="minor">
+            <a:schemeClr val="lt1"/>
+          </a:fontRef>
+        </p:style>
+        <p:txBody>
+          <a:bodyPr rtlCol="0" anchor="ctr"/>
+          <a:lstStyle/>
+          <a:p>
+            <a:pPr algn="ctr"/>
+          </a:p>
+        </p:txBody>
+      </p:sp>
+      <p:sp>
+        <p:nvSpPr>
+          <p:cNvPr id="22" name="Rounded Rectangle 21"/>
+          <p:cNvSpPr/>
+          <p:nvPr/>
+        </p:nvSpPr>
+        <p:spPr>
+          <a:xfrm>
+            <a:off x="594360" y="5660136"/>
+            <a:ext cx="438912" cy="438912"/>
+          </a:xfrm>
+          <a:prstGeom prst="roundRect">
+            <a:avLst>
+              <a:gd name="adj" fmla="val 12000"/>
+            </a:avLst>
+          </a:prstGeom>
+          <a:solidFill>
+            <a:srgbClr val="095292"/>
+          </a:solidFill>
+          <a:ln>
+            <a:noFill/>
+          </a:ln>
+        </p:spPr>
+        <p:style>
+          <a:lnRef idx="1">
+            <a:schemeClr val="accent1"/>
+          </a:lnRef>
+          <a:fillRef idx="3">
+            <a:schemeClr val="accent1"/>
+          </a:fillRef>
+          <a:effectRef idx="2">
+            <a:schemeClr val="accent1"/>
+          </a:effectRef>
+          <a:fontRef idx="minor">
+            <a:schemeClr val="lt1"/>
+          </a:fontRef>
+        </p:style>
+        <p:txBody>
+          <a:bodyPr rtlCol="0" anchor="ctr"/>
+          <a:lstStyle/>
+          <a:p>
+            <a:pPr algn="ctr"/>
+          </a:p>
+        </p:txBody>
+      </p:sp>
+      <p:sp>
+        <p:nvSpPr>
+          <p:cNvPr id="23" name="TextBox 22"/>
+          <p:cNvSpPr txBox="1"/>
+          <p:nvPr/>
+        </p:nvSpPr>
+        <p:spPr>
+          <a:xfrm>
+            <a:off x="594360" y="5660136"/>
+            <a:ext cx="438912" cy="438912"/>
+          </a:xfrm>
+          <a:prstGeom prst="rect">
+            <a:avLst/>
+          </a:prstGeom>
+          <a:noFill/>
+        </p:spPr>
+        <p:txBody>
+          <a:bodyPr wrap="square" anchor="ctr"/>
+          <a:lstStyle/>
+          <a:p>
+            <a:pPr algn="ctr"/>
+            <a:r>
+              <a:rPr sz="1600" b="1" i="0">
+                <a:solidFill>
+                  <a:srgbClr val="FFFFFF"/>
+                </a:solidFill>
+                <a:latin typeface="Calibri"/>
+              </a:rPr>
+              <a:t>5</a:t>
+            </a:r>
+          </a:p>
+        </p:txBody>
+      </p:sp>
+      <p:sp>
+        <p:nvSpPr>
+          <p:cNvPr id="24" name="TextBox 23"/>
+          <p:cNvSpPr txBox="1"/>
+          <p:nvPr/>
+        </p:nvSpPr>
+        <p:spPr>
+          <a:xfrm>
+            <a:off x="1188720" y="5495544"/>
+            <a:ext cx="10271455" cy="786384"/>
+          </a:xfrm>
+          <a:prstGeom prst="rect">
+            <a:avLst/>
+          </a:prstGeom>
+          <a:noFill/>
+        </p:spPr>
+        <p:txBody>
+          <a:bodyPr wrap="square" anchor="ctr"/>
+          <a:lstStyle/>
+          <a:p>
+            <a:r>
+              <a:rPr sz="1400" b="1" i="0">
+                <a:solidFill>
+                  <a:srgbClr val="095292"/>
+                </a:solidFill>
+                <a:latin typeface="Calibri"/>
+              </a:rPr>
+              <a:t>Armar el backlog priorizado de correcciones con responsable y criterio de cierre verificable para cada item, ordenado por severidad, y aplicar en clase al menos las dos correcciones bloqueantes antes de subir el paquete corregido a la plataforma del curso.</a:t>
+            </a:r>
+          </a:p>
+        </p:txBody>
+      </p:sp>
+      <p:sp>
+        <p:nvSpPr>
+          <p:cNvPr id="25" name="TextBox 24"/>
+          <p:cNvSpPr txBox="1"/>
+          <p:nvPr/>
+        </p:nvSpPr>
+        <p:spPr>
+          <a:xfrm>
+            <a:off x="11185855" y="6473952"/>
+            <a:ext cx="640080" cy="274320"/>
+          </a:xfrm>
+          <a:prstGeom prst="rect">
+            <a:avLst/>
+          </a:prstGeom>
+          <a:noFill/>
+        </p:spPr>
+        <p:txBody>
+          <a:bodyPr wrap="square">
+            <a:spAutoFit/>
+          </a:bodyPr>
+          <a:lstStyle/>
+          <a:p>
+            <a:pPr algn="r"/>
+            <a:r>
+              <a:rPr sz="1100" b="0" i="0">
+                <a:solidFill>
+                  <a:srgbClr val="666666"/>
+                </a:solidFill>
+                <a:latin typeface="Calibri"/>
+              </a:rPr>
+              <a:t>16</a:t>
+            </a:r>
+          </a:p>
+        </p:txBody>
+      </p:sp>
+    </p:spTree>
+  </p:cSld>
+  <p:clrMapOvr>
+    <a:masterClrMapping/>
+  </p:clrMapOvr>
+</p:sld>
+</file>
+
+<file path=ppt/slides/slide17.xml><?xml version="1.0" encoding="utf-8"?>
+<p:sld xmlns:a="http://schemas.openxmlformats.org/drawingml/2006/main" xmlns:p="http://schemas.openxmlformats.org/presentationml/2006/main" xmlns:r="http://schemas.openxmlformats.org/officeDocument/2006/relationships">
+  <p:cSld>
+    <p:bg>
+      <p:bgPr>
+        <a:solidFill>
+          <a:srgbClr val="FFFFFF"/>
+        </a:solidFill>
+        <a:effectLst/>
+      </p:bgPr>
+    </p:bg>
+    <p:spTree>
+      <p:nvGrpSpPr>
+        <p:cNvPr id="1" name=""/>
+        <p:cNvGrpSpPr/>
+        <p:nvPr/>
+      </p:nvGrpSpPr>
+      <p:grpSpPr/>
+      <p:sp>
+        <p:nvSpPr>
+          <p:cNvPr id="2" name="Rectangle 1"/>
+          <p:cNvSpPr/>
+          <p:nvPr/>
+        </p:nvSpPr>
+        <p:spPr>
+          <a:xfrm>
+            <a:off x="0" y="0"/>
+            <a:ext cx="12191695" cy="960120"/>
+          </a:xfrm>
+          <a:prstGeom prst="rect">
+            <a:avLst/>
+          </a:prstGeom>
+          <a:solidFill>
+            <a:srgbClr val="095292"/>
+          </a:solidFill>
+          <a:ln>
+            <a:noFill/>
+          </a:ln>
+        </p:spPr>
+        <p:style>
+          <a:lnRef idx="1">
+            <a:schemeClr val="accent1"/>
+          </a:lnRef>
+          <a:fillRef idx="3">
+            <a:schemeClr val="accent1"/>
+          </a:fillRef>
+          <a:effectRef idx="2">
+            <a:schemeClr val="accent1"/>
+          </a:effectRef>
+          <a:fontRef idx="minor">
+            <a:schemeClr val="lt1"/>
+          </a:fontRef>
+        </p:style>
+        <p:txBody>
+          <a:bodyPr rtlCol="0" anchor="ctr"/>
+          <a:lstStyle/>
+          <a:p>
+            <a:pPr algn="ctr"/>
+          </a:p>
+        </p:txBody>
+      </p:sp>
+      <p:sp>
+        <p:nvSpPr>
+          <p:cNvPr id="3" name="Rectangle 2"/>
+          <p:cNvSpPr/>
+          <p:nvPr/>
+        </p:nvSpPr>
+        <p:spPr>
+          <a:xfrm>
+            <a:off x="0" y="960120"/>
+            <a:ext cx="12191695" cy="41148"/>
+          </a:xfrm>
+          <a:prstGeom prst="rect">
+            <a:avLst/>
+          </a:prstGeom>
+          <a:solidFill>
+            <a:srgbClr val="FFD000"/>
+          </a:solidFill>
+          <a:ln>
+            <a:noFill/>
+          </a:ln>
+        </p:spPr>
+        <p:style>
+          <a:lnRef idx="1">
+            <a:schemeClr val="accent1"/>
+          </a:lnRef>
+          <a:fillRef idx="3">
+            <a:schemeClr val="accent1"/>
+          </a:fillRef>
+          <a:effectRef idx="2">
+            <a:schemeClr val="accent1"/>
+          </a:effectRef>
+          <a:fontRef idx="minor">
+            <a:schemeClr val="lt1"/>
+          </a:fontRef>
+        </p:style>
+        <p:txBody>
+          <a:bodyPr rtlCol="0" anchor="ctr"/>
+          <a:lstStyle/>
+          <a:p>
+            <a:pPr algn="ctr"/>
+          </a:p>
+        </p:txBody>
+      </p:sp>
+      <p:sp>
+        <p:nvSpPr>
+          <p:cNvPr id="4" name="TextBox 3"/>
+          <p:cNvSpPr txBox="1"/>
+          <p:nvPr/>
+        </p:nvSpPr>
+        <p:spPr>
+          <a:xfrm>
+            <a:off x="457200" y="164592"/>
+            <a:ext cx="11277295" cy="502920"/>
+          </a:xfrm>
+          <a:prstGeom prst="rect">
+            <a:avLst/>
+          </a:prstGeom>
+          <a:noFill/>
+        </p:spPr>
+        <p:txBody>
+          <a:bodyPr wrap="square">
+            <a:spAutoFit/>
+          </a:bodyPr>
+          <a:lstStyle/>
+          <a:p>
+            <a:r>
+              <a:rPr sz="2600" b="1" i="0">
+                <a:solidFill>
+                  <a:srgbClr val="FFFFFF"/>
+                </a:solidFill>
+                <a:latin typeface="Calibri"/>
+              </a:rPr>
+              <a:t>Antes de entregar — autochequeo</a:t>
+            </a:r>
+          </a:p>
+        </p:txBody>
+      </p:sp>
+      <p:sp>
+        <p:nvSpPr>
+          <p:cNvPr id="5" name="Rounded Rectangle 4"/>
+          <p:cNvSpPr/>
+          <p:nvPr/>
+        </p:nvSpPr>
+        <p:spPr>
+          <a:xfrm>
+            <a:off x="457200" y="1261872"/>
+            <a:ext cx="11277295" cy="566928"/>
+          </a:xfrm>
+          <a:prstGeom prst="roundRect">
+            <a:avLst>
+              <a:gd name="adj" fmla="val 12000"/>
+            </a:avLst>
+          </a:prstGeom>
+          <a:solidFill>
+            <a:srgbClr val="F2F2F2"/>
+          </a:solidFill>
+          <a:ln>
+            <a:noFill/>
+          </a:ln>
+        </p:spPr>
+        <p:style>
+          <a:lnRef idx="1">
+            <a:schemeClr val="accent1"/>
+          </a:lnRef>
+          <a:fillRef idx="3">
+            <a:schemeClr val="accent1"/>
+          </a:fillRef>
+          <a:effectRef idx="2">
+            <a:schemeClr val="accent1"/>
+          </a:effectRef>
+          <a:fontRef idx="minor">
+            <a:schemeClr val="lt1"/>
+          </a:fontRef>
+        </p:style>
+        <p:txBody>
+          <a:bodyPr rtlCol="0" anchor="ctr"/>
+          <a:lstStyle/>
+          <a:p>
+            <a:pPr algn="ctr"/>
+          </a:p>
+        </p:txBody>
+      </p:sp>
+      <p:sp>
+        <p:nvSpPr>
+          <p:cNvPr id="6" name="Rectangle 5"/>
+          <p:cNvSpPr/>
+          <p:nvPr/>
+        </p:nvSpPr>
+        <p:spPr>
+          <a:xfrm>
+            <a:off x="640080" y="1408175"/>
+            <a:ext cx="274320" cy="274320"/>
+          </a:xfrm>
+          <a:prstGeom prst="rect">
+            <a:avLst/>
+          </a:prstGeom>
+          <a:solidFill>
+            <a:srgbClr val="FFFFFF"/>
+          </a:solidFill>
+          <a:ln>
+            <a:solidFill>
+              <a:srgbClr val="333333"/>
+            </a:solidFill>
+          </a:ln>
+        </p:spPr>
+        <p:style>
+          <a:lnRef idx="1">
+            <a:schemeClr val="accent1"/>
+          </a:lnRef>
+          <a:fillRef idx="3">
+            <a:schemeClr val="accent1"/>
+          </a:fillRef>
+          <a:effectRef idx="2">
+            <a:schemeClr val="accent1"/>
+          </a:effectRef>
+          <a:fontRef idx="minor">
+            <a:schemeClr val="lt1"/>
+          </a:fontRef>
+        </p:style>
+        <p:txBody>
+          <a:bodyPr rtlCol="0" anchor="ctr"/>
+          <a:lstStyle/>
+          <a:p>
+            <a:pPr algn="ctr"/>
+          </a:p>
+        </p:txBody>
+      </p:sp>
+      <p:sp>
+        <p:nvSpPr>
+          <p:cNvPr id="7" name="Rectangle 6"/>
+          <p:cNvSpPr/>
+          <p:nvPr/>
+        </p:nvSpPr>
+        <p:spPr>
+          <a:xfrm>
+            <a:off x="640080" y="1408175"/>
+            <a:ext cx="73152" cy="274320"/>
           </a:xfrm>
           <a:prstGeom prst="rect">
             <a:avLst/>
@@ -6182,40 +7271,16 @@
           </a:p>
         </p:txBody>
       </p:sp>
-      <p:pic>
-        <p:nvPicPr>
-          <p:cNvPr id="3" name="Picture 2" descr="logo_uniajc_color.png"/>
-          <p:cNvPicPr>
-            <a:picLocks noChangeAspect="1"/>
-          </p:cNvPicPr>
-          <p:nvPr/>
-        </p:nvPicPr>
-        <p:blipFill>
-          <a:blip r:embed="rId2"/>
-          <a:stretch>
-            <a:fillRect/>
-          </a:stretch>
-        </p:blipFill>
-        <p:spPr>
-          <a:xfrm>
-            <a:off x="10271455" y="5998464"/>
-            <a:ext cx="1463040" cy="643233"/>
-          </a:xfrm>
-          <a:prstGeom prst="rect">
-            <a:avLst/>
-          </a:prstGeom>
-        </p:spPr>
-      </p:pic>
-      <p:sp>
-        <p:nvSpPr>
-          <p:cNvPr id="4" name="TextBox 3"/>
+      <p:sp>
+        <p:nvSpPr>
+          <p:cNvPr id="8" name="TextBox 7"/>
           <p:cNvSpPr txBox="1"/>
           <p:nvPr/>
         </p:nvSpPr>
         <p:spPr>
           <a:xfrm>
-            <a:off x="457200" y="1737360"/>
-            <a:ext cx="11277295" cy="1097280"/>
+            <a:off x="1097280" y="1353312"/>
+            <a:ext cx="10362895" cy="402336"/>
           </a:xfrm>
           <a:prstGeom prst="rect">
             <a:avLst/>
@@ -6226,29 +7291,358 @@
           <a:bodyPr wrap="square" anchor="ctr"/>
           <a:lstStyle/>
           <a:p>
+            <a:r>
+              <a:rPr sz="1500" b="0" i="0">
+                <a:solidFill>
+                  <a:srgbClr val="333333"/>
+                </a:solidFill>
+                <a:latin typeface="Calibri"/>
+              </a:rPr>
+              <a:t>Si toma el requisito mas ambicioso de su catalogo y lo persigue hasta el diagrama de clases, en que punto exacto se le pierde el rastro?</a:t>
+            </a:r>
+          </a:p>
+        </p:txBody>
+      </p:sp>
+      <p:sp>
+        <p:nvSpPr>
+          <p:cNvPr id="9" name="Rounded Rectangle 8"/>
+          <p:cNvSpPr/>
+          <p:nvPr/>
+        </p:nvSpPr>
+        <p:spPr>
+          <a:xfrm>
+            <a:off x="457200" y="1938528"/>
+            <a:ext cx="11277295" cy="566928"/>
+          </a:xfrm>
+          <a:prstGeom prst="roundRect">
+            <a:avLst>
+              <a:gd name="adj" fmla="val 12000"/>
+            </a:avLst>
+          </a:prstGeom>
+          <a:solidFill>
+            <a:srgbClr val="F2F2F2"/>
+          </a:solidFill>
+          <a:ln>
+            <a:noFill/>
+          </a:ln>
+        </p:spPr>
+        <p:style>
+          <a:lnRef idx="1">
+            <a:schemeClr val="accent1"/>
+          </a:lnRef>
+          <a:fillRef idx="3">
+            <a:schemeClr val="accent1"/>
+          </a:fillRef>
+          <a:effectRef idx="2">
+            <a:schemeClr val="accent1"/>
+          </a:effectRef>
+          <a:fontRef idx="minor">
+            <a:schemeClr val="lt1"/>
+          </a:fontRef>
+        </p:style>
+        <p:txBody>
+          <a:bodyPr rtlCol="0" anchor="ctr"/>
+          <a:lstStyle/>
+          <a:p>
             <a:pPr algn="ctr"/>
-            <a:r>
-              <a:rPr sz="3400" b="1" i="0">
-                <a:solidFill>
-                  <a:srgbClr val="095292"/>
-                </a:solidFill>
-                <a:latin typeface="Calibri"/>
-              </a:rPr>
-              <a:t>Clase 11 · VetCare avanza</a:t>
-            </a:r>
-          </a:p>
-        </p:txBody>
-      </p:sp>
-      <p:sp>
-        <p:nvSpPr>
-          <p:cNvPr id="5" name="TextBox 4"/>
+          </a:p>
+        </p:txBody>
+      </p:sp>
+      <p:sp>
+        <p:nvSpPr>
+          <p:cNvPr id="10" name="Rectangle 9"/>
+          <p:cNvSpPr/>
+          <p:nvPr/>
+        </p:nvSpPr>
+        <p:spPr>
+          <a:xfrm>
+            <a:off x="640080" y="2084832"/>
+            <a:ext cx="274320" cy="274320"/>
+          </a:xfrm>
+          <a:prstGeom prst="rect">
+            <a:avLst/>
+          </a:prstGeom>
+          <a:solidFill>
+            <a:srgbClr val="FFFFFF"/>
+          </a:solidFill>
+          <a:ln>
+            <a:solidFill>
+              <a:srgbClr val="333333"/>
+            </a:solidFill>
+          </a:ln>
+        </p:spPr>
+        <p:style>
+          <a:lnRef idx="1">
+            <a:schemeClr val="accent1"/>
+          </a:lnRef>
+          <a:fillRef idx="3">
+            <a:schemeClr val="accent1"/>
+          </a:fillRef>
+          <a:effectRef idx="2">
+            <a:schemeClr val="accent1"/>
+          </a:effectRef>
+          <a:fontRef idx="minor">
+            <a:schemeClr val="lt1"/>
+          </a:fontRef>
+        </p:style>
+        <p:txBody>
+          <a:bodyPr rtlCol="0" anchor="ctr"/>
+          <a:lstStyle/>
+          <a:p>
+            <a:pPr algn="ctr"/>
+          </a:p>
+        </p:txBody>
+      </p:sp>
+      <p:sp>
+        <p:nvSpPr>
+          <p:cNvPr id="11" name="Rectangle 10"/>
+          <p:cNvSpPr/>
+          <p:nvPr/>
+        </p:nvSpPr>
+        <p:spPr>
+          <a:xfrm>
+            <a:off x="640080" y="2084832"/>
+            <a:ext cx="73152" cy="274320"/>
+          </a:xfrm>
+          <a:prstGeom prst="rect">
+            <a:avLst/>
+          </a:prstGeom>
+          <a:solidFill>
+            <a:srgbClr val="269CCB"/>
+          </a:solidFill>
+          <a:ln>
+            <a:noFill/>
+          </a:ln>
+        </p:spPr>
+        <p:style>
+          <a:lnRef idx="1">
+            <a:schemeClr val="accent1"/>
+          </a:lnRef>
+          <a:fillRef idx="3">
+            <a:schemeClr val="accent1"/>
+          </a:fillRef>
+          <a:effectRef idx="2">
+            <a:schemeClr val="accent1"/>
+          </a:effectRef>
+          <a:fontRef idx="minor">
+            <a:schemeClr val="lt1"/>
+          </a:fontRef>
+        </p:style>
+        <p:txBody>
+          <a:bodyPr rtlCol="0" anchor="ctr"/>
+          <a:lstStyle/>
+          <a:p>
+            <a:pPr algn="ctr"/>
+          </a:p>
+        </p:txBody>
+      </p:sp>
+      <p:sp>
+        <p:nvSpPr>
+          <p:cNvPr id="12" name="TextBox 11"/>
           <p:cNvSpPr txBox="1"/>
           <p:nvPr/>
         </p:nvSpPr>
         <p:spPr>
           <a:xfrm>
-            <a:off x="457200" y="3017520"/>
-            <a:ext cx="11277295" cy="1645920"/>
+            <a:off x="1097280" y="2029968"/>
+            <a:ext cx="10362895" cy="402336"/>
+          </a:xfrm>
+          <a:prstGeom prst="rect">
+            <a:avLst/>
+          </a:prstGeom>
+          <a:noFill/>
+        </p:spPr>
+        <p:txBody>
+          <a:bodyPr wrap="square" anchor="ctr"/>
+          <a:lstStyle/>
+          <a:p>
+            <a:r>
+              <a:rPr sz="1500" b="0" i="0">
+                <a:solidFill>
+                  <a:srgbClr val="333333"/>
+                </a:solidFill>
+                <a:latin typeface="Calibri"/>
+              </a:rPr>
+              <a:t>Cuantos nombres distintos esta usando su paquete para referirse a la misma persona que lleva la mascota a la clinica?</a:t>
+            </a:r>
+          </a:p>
+        </p:txBody>
+      </p:sp>
+      <p:sp>
+        <p:nvSpPr>
+          <p:cNvPr id="13" name="Rounded Rectangle 12"/>
+          <p:cNvSpPr/>
+          <p:nvPr/>
+        </p:nvSpPr>
+        <p:spPr>
+          <a:xfrm>
+            <a:off x="457200" y="2615184"/>
+            <a:ext cx="11277295" cy="566928"/>
+          </a:xfrm>
+          <a:prstGeom prst="roundRect">
+            <a:avLst>
+              <a:gd name="adj" fmla="val 12000"/>
+            </a:avLst>
+          </a:prstGeom>
+          <a:solidFill>
+            <a:srgbClr val="F2F2F2"/>
+          </a:solidFill>
+          <a:ln>
+            <a:noFill/>
+          </a:ln>
+        </p:spPr>
+        <p:style>
+          <a:lnRef idx="1">
+            <a:schemeClr val="accent1"/>
+          </a:lnRef>
+          <a:fillRef idx="3">
+            <a:schemeClr val="accent1"/>
+          </a:fillRef>
+          <a:effectRef idx="2">
+            <a:schemeClr val="accent1"/>
+          </a:effectRef>
+          <a:fontRef idx="minor">
+            <a:schemeClr val="lt1"/>
+          </a:fontRef>
+        </p:style>
+        <p:txBody>
+          <a:bodyPr rtlCol="0" anchor="ctr"/>
+          <a:lstStyle/>
+          <a:p>
+            <a:pPr algn="ctr"/>
+          </a:p>
+        </p:txBody>
+      </p:sp>
+      <p:sp>
+        <p:nvSpPr>
+          <p:cNvPr id="14" name="Rectangle 13"/>
+          <p:cNvSpPr/>
+          <p:nvPr/>
+        </p:nvSpPr>
+        <p:spPr>
+          <a:xfrm>
+            <a:off x="640080" y="2761488"/>
+            <a:ext cx="274320" cy="274320"/>
+          </a:xfrm>
+          <a:prstGeom prst="rect">
+            <a:avLst/>
+          </a:prstGeom>
+          <a:solidFill>
+            <a:srgbClr val="FFFFFF"/>
+          </a:solidFill>
+          <a:ln>
+            <a:solidFill>
+              <a:srgbClr val="333333"/>
+            </a:solidFill>
+          </a:ln>
+        </p:spPr>
+        <p:style>
+          <a:lnRef idx="1">
+            <a:schemeClr val="accent1"/>
+          </a:lnRef>
+          <a:fillRef idx="3">
+            <a:schemeClr val="accent1"/>
+          </a:fillRef>
+          <a:effectRef idx="2">
+            <a:schemeClr val="accent1"/>
+          </a:effectRef>
+          <a:fontRef idx="minor">
+            <a:schemeClr val="lt1"/>
+          </a:fontRef>
+        </p:style>
+        <p:txBody>
+          <a:bodyPr rtlCol="0" anchor="ctr"/>
+          <a:lstStyle/>
+          <a:p>
+            <a:pPr algn="ctr"/>
+          </a:p>
+        </p:txBody>
+      </p:sp>
+      <p:sp>
+        <p:nvSpPr>
+          <p:cNvPr id="15" name="Rectangle 14"/>
+          <p:cNvSpPr/>
+          <p:nvPr/>
+        </p:nvSpPr>
+        <p:spPr>
+          <a:xfrm>
+            <a:off x="640080" y="2761488"/>
+            <a:ext cx="73152" cy="274320"/>
+          </a:xfrm>
+          <a:prstGeom prst="rect">
+            <a:avLst/>
+          </a:prstGeom>
+          <a:solidFill>
+            <a:srgbClr val="269CCB"/>
+          </a:solidFill>
+          <a:ln>
+            <a:noFill/>
+          </a:ln>
+        </p:spPr>
+        <p:style>
+          <a:lnRef idx="1">
+            <a:schemeClr val="accent1"/>
+          </a:lnRef>
+          <a:fillRef idx="3">
+            <a:schemeClr val="accent1"/>
+          </a:fillRef>
+          <a:effectRef idx="2">
+            <a:schemeClr val="accent1"/>
+          </a:effectRef>
+          <a:fontRef idx="minor">
+            <a:schemeClr val="lt1"/>
+          </a:fontRef>
+        </p:style>
+        <p:txBody>
+          <a:bodyPr rtlCol="0" anchor="ctr"/>
+          <a:lstStyle/>
+          <a:p>
+            <a:pPr algn="ctr"/>
+          </a:p>
+        </p:txBody>
+      </p:sp>
+      <p:sp>
+        <p:nvSpPr>
+          <p:cNvPr id="16" name="TextBox 15"/>
+          <p:cNvSpPr txBox="1"/>
+          <p:nvPr/>
+        </p:nvSpPr>
+        <p:spPr>
+          <a:xfrm>
+            <a:off x="1097280" y="2706624"/>
+            <a:ext cx="10362895" cy="402336"/>
+          </a:xfrm>
+          <a:prstGeom prst="rect">
+            <a:avLst/>
+          </a:prstGeom>
+          <a:noFill/>
+        </p:spPr>
+        <p:txBody>
+          <a:bodyPr wrap="square" anchor="ctr"/>
+          <a:lstStyle/>
+          <a:p>
+            <a:r>
+              <a:rPr sz="1500" b="0" i="0">
+                <a:solidFill>
+                  <a:srgbClr val="333333"/>
+                </a:solidFill>
+                <a:latin typeface="Calibri"/>
+              </a:rPr>
+              <a:t>Si usted desapareciera y solo quedara el paquete escrito, alguien podria construir VetCare sin hacer una sola pregunta?</a:t>
+            </a:r>
+          </a:p>
+        </p:txBody>
+      </p:sp>
+      <p:sp>
+        <p:nvSpPr>
+          <p:cNvPr id="17" name="TextBox 16"/>
+          <p:cNvSpPr txBox="1"/>
+          <p:nvPr/>
+        </p:nvSpPr>
+        <p:spPr>
+          <a:xfrm>
+            <a:off x="11185855" y="6473952"/>
+            <a:ext cx="640080" cy="274320"/>
           </a:xfrm>
           <a:prstGeom prst="rect">
             <a:avLst/>
@@ -6261,65 +7655,141 @@
           </a:bodyPr>
           <a:lstStyle/>
           <a:p>
-            <a:pPr algn="ctr">
-              <a:spcAft>
-                <a:spcPts val="600"/>
-              </a:spcAft>
-            </a:pPr>
-            <a:r>
-              <a:rPr sz="1600" b="0" i="0">
-                <a:solidFill>
-                  <a:srgbClr val="333333"/>
-                </a:solidFill>
-                <a:latin typeface="Calibri"/>
-              </a:rPr>
-              <a:t>El paquete de diseño de VetCare queda auditado y consistente: requisitos, casos de uso y diagrama de clases usan los mismos nombres y no se contradicen entre si.</a:t>
-            </a:r>
-          </a:p>
-          <a:p>
-            <a:pPr algn="ctr">
-              <a:spcAft>
-                <a:spcPts val="600"/>
-              </a:spcAft>
-            </a:pPr>
-            <a:r>
-              <a:rPr sz="1600" b="0" i="0">
-                <a:solidFill>
-                  <a:srgbClr val="333333"/>
-                </a:solidFill>
-                <a:latin typeface="Calibri"/>
-              </a:rPr>
-              <a:t>Entregable: Un documento con la matriz de trazabilidad RF a CU a Clase, el glosario de nombres canonicos, el acta de revision entre pares con hallazgos clasificados por severidad y el backlog priorizado de correcciones, subido a la plataforma del curso.</a:t>
-            </a:r>
-          </a:p>
-          <a:p>
-            <a:pPr algn="ctr">
-              <a:spcAft>
-                <a:spcPts val="600"/>
-              </a:spcAft>
-            </a:pPr>
-            <a:r>
-              <a:rPr sz="1600" b="0" i="0">
-                <a:solidFill>
-                  <a:srgbClr val="333333"/>
-                </a:solidFill>
-                <a:latin typeface="Calibri"/>
-              </a:rPr>
-              <a:t>Siguiente clase: continuamos el hilo del PI</a:t>
-            </a:r>
-          </a:p>
-        </p:txBody>
-      </p:sp>
-      <p:sp>
-        <p:nvSpPr>
-          <p:cNvPr id="6" name="TextBox 5"/>
+            <a:pPr algn="r"/>
+            <a:r>
+              <a:rPr sz="1100" b="0" i="0">
+                <a:solidFill>
+                  <a:srgbClr val="666666"/>
+                </a:solidFill>
+                <a:latin typeface="Calibri"/>
+              </a:rPr>
+              <a:t>17</a:t>
+            </a:r>
+          </a:p>
+        </p:txBody>
+      </p:sp>
+    </p:spTree>
+  </p:cSld>
+  <p:clrMapOvr>
+    <a:masterClrMapping/>
+  </p:clrMapOvr>
+</p:sld>
+</file>
+
+<file path=ppt/slides/slide18.xml><?xml version="1.0" encoding="utf-8"?>
+<p:sld xmlns:a="http://schemas.openxmlformats.org/drawingml/2006/main" xmlns:p="http://schemas.openxmlformats.org/presentationml/2006/main" xmlns:r="http://schemas.openxmlformats.org/officeDocument/2006/relationships">
+  <p:cSld>
+    <p:bg>
+      <p:bgPr>
+        <a:solidFill>
+          <a:srgbClr val="FFFFFF"/>
+        </a:solidFill>
+        <a:effectLst/>
+      </p:bgPr>
+    </p:bg>
+    <p:spTree>
+      <p:nvGrpSpPr>
+        <p:cNvPr id="1" name=""/>
+        <p:cNvGrpSpPr/>
+        <p:nvPr/>
+      </p:nvGrpSpPr>
+      <p:grpSpPr/>
+      <p:sp>
+        <p:nvSpPr>
+          <p:cNvPr id="2" name="Rectangle 1"/>
+          <p:cNvSpPr/>
+          <p:nvPr/>
+        </p:nvSpPr>
+        <p:spPr>
+          <a:xfrm>
+            <a:off x="0" y="0"/>
+            <a:ext cx="12191695" cy="960120"/>
+          </a:xfrm>
+          <a:prstGeom prst="rect">
+            <a:avLst/>
+          </a:prstGeom>
+          <a:solidFill>
+            <a:srgbClr val="095292"/>
+          </a:solidFill>
+          <a:ln>
+            <a:noFill/>
+          </a:ln>
+        </p:spPr>
+        <p:style>
+          <a:lnRef idx="1">
+            <a:schemeClr val="accent1"/>
+          </a:lnRef>
+          <a:fillRef idx="3">
+            <a:schemeClr val="accent1"/>
+          </a:fillRef>
+          <a:effectRef idx="2">
+            <a:schemeClr val="accent1"/>
+          </a:effectRef>
+          <a:fontRef idx="minor">
+            <a:schemeClr val="lt1"/>
+          </a:fontRef>
+        </p:style>
+        <p:txBody>
+          <a:bodyPr rtlCol="0" anchor="ctr"/>
+          <a:lstStyle/>
+          <a:p>
+            <a:pPr algn="ctr"/>
+          </a:p>
+        </p:txBody>
+      </p:sp>
+      <p:sp>
+        <p:nvSpPr>
+          <p:cNvPr id="3" name="Rectangle 2"/>
+          <p:cNvSpPr/>
+          <p:nvPr/>
+        </p:nvSpPr>
+        <p:spPr>
+          <a:xfrm>
+            <a:off x="0" y="960120"/>
+            <a:ext cx="12191695" cy="41148"/>
+          </a:xfrm>
+          <a:prstGeom prst="rect">
+            <a:avLst/>
+          </a:prstGeom>
+          <a:solidFill>
+            <a:srgbClr val="FFD000"/>
+          </a:solidFill>
+          <a:ln>
+            <a:noFill/>
+          </a:ln>
+        </p:spPr>
+        <p:style>
+          <a:lnRef idx="1">
+            <a:schemeClr val="accent1"/>
+          </a:lnRef>
+          <a:fillRef idx="3">
+            <a:schemeClr val="accent1"/>
+          </a:fillRef>
+          <a:effectRef idx="2">
+            <a:schemeClr val="accent1"/>
+          </a:effectRef>
+          <a:fontRef idx="minor">
+            <a:schemeClr val="lt1"/>
+          </a:fontRef>
+        </p:style>
+        <p:txBody>
+          <a:bodyPr rtlCol="0" anchor="ctr"/>
+          <a:lstStyle/>
+          <a:p>
+            <a:pPr algn="ctr"/>
+          </a:p>
+        </p:txBody>
+      </p:sp>
+      <p:sp>
+        <p:nvSpPr>
+          <p:cNvPr id="4" name="TextBox 3"/>
           <p:cNvSpPr txBox="1"/>
           <p:nvPr/>
         </p:nvSpPr>
         <p:spPr>
           <a:xfrm>
-            <a:off x="457200" y="4754880"/>
-            <a:ext cx="11277295" cy="640080"/>
+            <a:off x="457200" y="164592"/>
+            <a:ext cx="11277295" cy="502920"/>
           </a:xfrm>
           <a:prstGeom prst="rect">
             <a:avLst/>
@@ -6332,15 +7802,871 @@
           </a:bodyPr>
           <a:lstStyle/>
           <a:p>
+            <a:r>
+              <a:rPr sz="2600" b="1" i="0">
+                <a:solidFill>
+                  <a:srgbClr val="FFFFFF"/>
+                </a:solidFill>
+                <a:latin typeface="Calibri"/>
+              </a:rPr>
+              <a:t>Criterios de exito / entregable</a:t>
+            </a:r>
+          </a:p>
+        </p:txBody>
+      </p:sp>
+      <p:sp>
+        <p:nvSpPr>
+          <p:cNvPr id="5" name="TextBox 4"/>
+          <p:cNvSpPr txBox="1"/>
+          <p:nvPr/>
+        </p:nvSpPr>
+        <p:spPr>
+          <a:xfrm>
+            <a:off x="457200" y="1170432"/>
+            <a:ext cx="11277295" cy="5230368"/>
+          </a:xfrm>
+          <a:prstGeom prst="rect">
+            <a:avLst/>
+          </a:prstGeom>
+          <a:noFill/>
+        </p:spPr>
+        <p:txBody>
+          <a:bodyPr wrap="square">
+            <a:spAutoFit/>
+          </a:bodyPr>
+          <a:lstStyle/>
+          <a:p>
+            <a:pPr>
+              <a:spcAft>
+                <a:spcPts val="800"/>
+              </a:spcAft>
+            </a:pPr>
+            <a:r>
+              <a:rPr sz="2000" b="0" i="0">
+                <a:solidFill>
+                  <a:srgbClr val="333333"/>
+                </a:solidFill>
+                <a:latin typeface="Calibri"/>
+              </a:rPr>
+              <a:t>–   </a:t>
+            </a:r>
+            <a:r>
+              <a:rPr sz="2000" b="1" i="0">
+                <a:solidFill>
+                  <a:srgbClr val="333333"/>
+                </a:solidFill>
+                <a:latin typeface="Calibri"/>
+              </a:rPr>
+              <a:t>Entregable:</a:t>
+            </a:r>
+            <a:r>
+              <a:rPr sz="2000" b="0" i="0">
+                <a:solidFill>
+                  <a:srgbClr val="333333"/>
+                </a:solidFill>
+                <a:latin typeface="Calibri"/>
+              </a:rPr>
+              <a:t> Un documento con la matriz de trazabilidad RF a CU a Clase, el glosario de nombres canonicos, el acta de revision entre pares con hallazgos clasificados por severidad y el backlog priorizado de correcciones, subido a la plataforma del curso.</a:t>
+            </a:r>
+          </a:p>
+          <a:p>
+            <a:pPr>
+              <a:spcAft>
+                <a:spcPts val="800"/>
+              </a:spcAft>
+            </a:pPr>
+            <a:r>
+              <a:rPr sz="2000" b="0" i="0">
+                <a:solidFill>
+                  <a:srgbClr val="333333"/>
+                </a:solidFill>
+                <a:latin typeface="Calibri"/>
+              </a:rPr>
+              <a:t>–   </a:t>
+            </a:r>
+            <a:r>
+              <a:rPr sz="2000" b="1" i="0">
+                <a:solidFill>
+                  <a:srgbClr val="333333"/>
+                </a:solidFill>
+                <a:latin typeface="Calibri"/>
+              </a:rPr>
+              <a:t>Exito:</a:t>
+            </a:r>
+            <a:r>
+              <a:rPr sz="2000" b="0" i="0">
+                <a:solidFill>
+                  <a:srgbClr val="333333"/>
+                </a:solidFill>
+                <a:latin typeface="Calibri"/>
+              </a:rPr>
+              <a:t> La matriz de trazabilidad cubre el cien por ciento de los RF y no deja casos de uso ni clases sin origen en algun requisito.</a:t>
+            </a:r>
+          </a:p>
+          <a:p>
+            <a:pPr>
+              <a:spcAft>
+                <a:spcPts val="800"/>
+              </a:spcAft>
+            </a:pPr>
+            <a:r>
+              <a:rPr sz="2000" b="0" i="0">
+                <a:solidFill>
+                  <a:srgbClr val="333333"/>
+                </a:solidFill>
+                <a:latin typeface="Calibri"/>
+              </a:rPr>
+              <a:t>–   </a:t>
+            </a:r>
+            <a:r>
+              <a:rPr sz="2000" b="1" i="0">
+                <a:solidFill>
+                  <a:srgbClr val="333333"/>
+                </a:solidFill>
+                <a:latin typeface="Calibri"/>
+              </a:rPr>
+              <a:t>Exito:</a:t>
+            </a:r>
+            <a:r>
+              <a:rPr sz="2000" b="0" i="0">
+                <a:solidFill>
+                  <a:srgbClr val="333333"/>
+                </a:solidFill>
+                <a:latin typeface="Calibri"/>
+              </a:rPr>
+              <a:t> El glosario tiene minimo ocho conceptos con nombre canonico, definicion de una linea y sinonimos prohibidos, y los artefactos ya fueron renombrados en consecuencia.</a:t>
+            </a:r>
+          </a:p>
+          <a:p>
+            <a:pPr>
+              <a:spcAft>
+                <a:spcPts val="800"/>
+              </a:spcAft>
+            </a:pPr>
+            <a:r>
+              <a:rPr sz="2000" b="0" i="0">
+                <a:solidFill>
+                  <a:srgbClr val="333333"/>
+                </a:solidFill>
+                <a:latin typeface="Calibri"/>
+              </a:rPr>
+              <a:t>–   </a:t>
+            </a:r>
+            <a:r>
+              <a:rPr sz="2000" b="1" i="0">
+                <a:solidFill>
+                  <a:srgbClr val="333333"/>
+                </a:solidFill>
+                <a:latin typeface="Calibri"/>
+              </a:rPr>
+              <a:t>Exito:</a:t>
+            </a:r>
+            <a:r>
+              <a:rPr sz="2000" b="0" i="0">
+                <a:solidFill>
+                  <a:srgbClr val="333333"/>
+                </a:solidFill>
+                <a:latin typeface="Calibri"/>
+              </a:rPr>
+              <a:t> El acta de revision entre pares registra minimo seis hallazgos con ubicacion exacta, descripcion objetiva y severidad asignada.</a:t>
+            </a:r>
+          </a:p>
+          <a:p>
+            <a:pPr>
+              <a:spcAft>
+                <a:spcPts val="800"/>
+              </a:spcAft>
+            </a:pPr>
+            <a:r>
+              <a:rPr sz="2000" b="0" i="0">
+                <a:solidFill>
+                  <a:srgbClr val="333333"/>
+                </a:solidFill>
+                <a:latin typeface="Calibri"/>
+              </a:rPr>
+              <a:t>–   </a:t>
+            </a:r>
+            <a:r>
+              <a:rPr sz="2000" b="1" i="0">
+                <a:solidFill>
+                  <a:srgbClr val="333333"/>
+                </a:solidFill>
+                <a:latin typeface="Calibri"/>
+              </a:rPr>
+              <a:t>Exito:</a:t>
+            </a:r>
+            <a:r>
+              <a:rPr sz="2000" b="0" i="0">
+                <a:solidFill>
+                  <a:srgbClr val="333333"/>
+                </a:solidFill>
+                <a:latin typeface="Calibri"/>
+              </a:rPr>
+              <a:t> El backlog tiene responsable y criterio de cierre verificable por item, y las correcciones de severidad bloqueante quedaron aplicadas en el paquete entregado.</a:t>
+            </a:r>
+          </a:p>
+          <a:p>
+            <a:pPr>
+              <a:spcAft>
+                <a:spcPts val="800"/>
+              </a:spcAft>
+            </a:pPr>
+            <a:r>
+              <a:rPr sz="2000" b="0" i="0">
+                <a:solidFill>
+                  <a:srgbClr val="333333"/>
+                </a:solidFill>
+                <a:latin typeface="Calibri"/>
+              </a:rPr>
+              <a:t>–   </a:t>
+            </a:r>
+            <a:r>
+              <a:rPr sz="2000" b="1" i="0">
+                <a:solidFill>
+                  <a:srgbClr val="333333"/>
+                </a:solidFill>
+                <a:latin typeface="Calibri"/>
+              </a:rPr>
+              <a:t>Entrega en la plataforma del curso</a:t>
+            </a:r>
+            <a:r>
+              <a:rPr sz="2000" b="0" i="0">
+                <a:solidFill>
+                  <a:srgbClr val="333333"/>
+                </a:solidFill>
+                <a:latin typeface="Calibri"/>
+              </a:rPr>
+              <a:t> — en la fecha que indique el docente.</a:t>
+            </a:r>
+          </a:p>
+        </p:txBody>
+      </p:sp>
+      <p:sp>
+        <p:nvSpPr>
+          <p:cNvPr id="6" name="TextBox 5"/>
+          <p:cNvSpPr txBox="1"/>
+          <p:nvPr/>
+        </p:nvSpPr>
+        <p:spPr>
+          <a:xfrm>
+            <a:off x="11185855" y="6473952"/>
+            <a:ext cx="640080" cy="274320"/>
+          </a:xfrm>
+          <a:prstGeom prst="rect">
+            <a:avLst/>
+          </a:prstGeom>
+          <a:noFill/>
+        </p:spPr>
+        <p:txBody>
+          <a:bodyPr wrap="square">
+            <a:spAutoFit/>
+          </a:bodyPr>
+          <a:lstStyle/>
+          <a:p>
+            <a:pPr algn="r"/>
+            <a:r>
+              <a:rPr sz="1100" b="0" i="0">
+                <a:solidFill>
+                  <a:srgbClr val="666666"/>
+                </a:solidFill>
+                <a:latin typeface="Calibri"/>
+              </a:rPr>
+              <a:t>18</a:t>
+            </a:r>
+          </a:p>
+        </p:txBody>
+      </p:sp>
+    </p:spTree>
+  </p:cSld>
+  <p:clrMapOvr>
+    <a:masterClrMapping/>
+  </p:clrMapOvr>
+</p:sld>
+</file>
+
+<file path=ppt/slides/slide19.xml><?xml version="1.0" encoding="utf-8"?>
+<p:sld xmlns:a="http://schemas.openxmlformats.org/drawingml/2006/main" xmlns:p="http://schemas.openxmlformats.org/presentationml/2006/main" xmlns:r="http://schemas.openxmlformats.org/officeDocument/2006/relationships">
+  <p:cSld>
+    <p:bg>
+      <p:bgPr>
+        <a:solidFill>
+          <a:srgbClr val="FFFFFF"/>
+        </a:solidFill>
+        <a:effectLst/>
+      </p:bgPr>
+    </p:bg>
+    <p:spTree>
+      <p:nvGrpSpPr>
+        <p:cNvPr id="1" name=""/>
+        <p:cNvGrpSpPr/>
+        <p:nvPr/>
+      </p:nvGrpSpPr>
+      <p:grpSpPr/>
+      <p:sp>
+        <p:nvSpPr>
+          <p:cNvPr id="2" name="Rectangle 1"/>
+          <p:cNvSpPr/>
+          <p:nvPr/>
+        </p:nvSpPr>
+        <p:spPr>
+          <a:xfrm>
+            <a:off x="0" y="0"/>
+            <a:ext cx="12191695" cy="960120"/>
+          </a:xfrm>
+          <a:prstGeom prst="rect">
+            <a:avLst/>
+          </a:prstGeom>
+          <a:solidFill>
+            <a:srgbClr val="095292"/>
+          </a:solidFill>
+          <a:ln>
+            <a:noFill/>
+          </a:ln>
+        </p:spPr>
+        <p:style>
+          <a:lnRef idx="1">
+            <a:schemeClr val="accent1"/>
+          </a:lnRef>
+          <a:fillRef idx="3">
+            <a:schemeClr val="accent1"/>
+          </a:fillRef>
+          <a:effectRef idx="2">
+            <a:schemeClr val="accent1"/>
+          </a:effectRef>
+          <a:fontRef idx="minor">
+            <a:schemeClr val="lt1"/>
+          </a:fontRef>
+        </p:style>
+        <p:txBody>
+          <a:bodyPr rtlCol="0" anchor="ctr"/>
+          <a:lstStyle/>
+          <a:p>
             <a:pPr algn="ctr"/>
-            <a:r>
-              <a:rPr sz="2000" b="1" i="0">
+          </a:p>
+        </p:txBody>
+      </p:sp>
+      <p:sp>
+        <p:nvSpPr>
+          <p:cNvPr id="3" name="Rectangle 2"/>
+          <p:cNvSpPr/>
+          <p:nvPr/>
+        </p:nvSpPr>
+        <p:spPr>
+          <a:xfrm>
+            <a:off x="0" y="960120"/>
+            <a:ext cx="12191695" cy="41148"/>
+          </a:xfrm>
+          <a:prstGeom prst="rect">
+            <a:avLst/>
+          </a:prstGeom>
+          <a:solidFill>
+            <a:srgbClr val="FFD000"/>
+          </a:solidFill>
+          <a:ln>
+            <a:noFill/>
+          </a:ln>
+        </p:spPr>
+        <p:style>
+          <a:lnRef idx="1">
+            <a:schemeClr val="accent1"/>
+          </a:lnRef>
+          <a:fillRef idx="3">
+            <a:schemeClr val="accent1"/>
+          </a:fillRef>
+          <a:effectRef idx="2">
+            <a:schemeClr val="accent1"/>
+          </a:effectRef>
+          <a:fontRef idx="minor">
+            <a:schemeClr val="lt1"/>
+          </a:fontRef>
+        </p:style>
+        <p:txBody>
+          <a:bodyPr rtlCol="0" anchor="ctr"/>
+          <a:lstStyle/>
+          <a:p>
+            <a:pPr algn="ctr"/>
+          </a:p>
+        </p:txBody>
+      </p:sp>
+      <p:sp>
+        <p:nvSpPr>
+          <p:cNvPr id="4" name="TextBox 3"/>
+          <p:cNvSpPr txBox="1"/>
+          <p:nvPr/>
+        </p:nvSpPr>
+        <p:spPr>
+          <a:xfrm>
+            <a:off x="457200" y="164592"/>
+            <a:ext cx="11277295" cy="502920"/>
+          </a:xfrm>
+          <a:prstGeom prst="rect">
+            <a:avLst/>
+          </a:prstGeom>
+          <a:noFill/>
+        </p:spPr>
+        <p:txBody>
+          <a:bodyPr wrap="square">
+            <a:spAutoFit/>
+          </a:bodyPr>
+          <a:lstStyle/>
+          <a:p>
+            <a:r>
+              <a:rPr sz="2600" b="1" i="0">
+                <a:solidFill>
+                  <a:srgbClr val="FFFFFF"/>
+                </a:solidFill>
+                <a:latin typeface="Calibri"/>
+              </a:rPr>
+              <a:t>Para el PI esta semana</a:t>
+            </a:r>
+          </a:p>
+        </p:txBody>
+      </p:sp>
+      <p:sp>
+        <p:nvSpPr>
+          <p:cNvPr id="5" name="Rounded Rectangle 4"/>
+          <p:cNvSpPr/>
+          <p:nvPr/>
+        </p:nvSpPr>
+        <p:spPr>
+          <a:xfrm>
+            <a:off x="457200" y="1261872"/>
+            <a:ext cx="11277295" cy="1051560"/>
+          </a:xfrm>
+          <a:prstGeom prst="roundRect">
+            <a:avLst>
+              <a:gd name="adj" fmla="val 12000"/>
+            </a:avLst>
+          </a:prstGeom>
+          <a:solidFill>
+            <a:srgbClr val="E8F4FA"/>
+          </a:solidFill>
+          <a:ln>
+            <a:noFill/>
+          </a:ln>
+        </p:spPr>
+        <p:style>
+          <a:lnRef idx="1">
+            <a:schemeClr val="accent1"/>
+          </a:lnRef>
+          <a:fillRef idx="3">
+            <a:schemeClr val="accent1"/>
+          </a:fillRef>
+          <a:effectRef idx="2">
+            <a:schemeClr val="accent1"/>
+          </a:effectRef>
+          <a:fontRef idx="minor">
+            <a:schemeClr val="lt1"/>
+          </a:fontRef>
+        </p:style>
+        <p:txBody>
+          <a:bodyPr rtlCol="0" anchor="ctr"/>
+          <a:lstStyle/>
+          <a:p>
+            <a:pPr algn="ctr"/>
+          </a:p>
+        </p:txBody>
+      </p:sp>
+      <p:sp>
+        <p:nvSpPr>
+          <p:cNvPr id="6" name="Rectangle 5"/>
+          <p:cNvSpPr/>
+          <p:nvPr/>
+        </p:nvSpPr>
+        <p:spPr>
+          <a:xfrm>
+            <a:off x="457200" y="1261872"/>
+            <a:ext cx="128016" cy="1051560"/>
+          </a:xfrm>
+          <a:prstGeom prst="rect">
+            <a:avLst/>
+          </a:prstGeom>
+          <a:solidFill>
+            <a:srgbClr val="269CCB"/>
+          </a:solidFill>
+          <a:ln>
+            <a:noFill/>
+          </a:ln>
+        </p:spPr>
+        <p:style>
+          <a:lnRef idx="1">
+            <a:schemeClr val="accent1"/>
+          </a:lnRef>
+          <a:fillRef idx="3">
+            <a:schemeClr val="accent1"/>
+          </a:fillRef>
+          <a:effectRef idx="2">
+            <a:schemeClr val="accent1"/>
+          </a:effectRef>
+          <a:fontRef idx="minor">
+            <a:schemeClr val="lt1"/>
+          </a:fontRef>
+        </p:style>
+        <p:txBody>
+          <a:bodyPr rtlCol="0" anchor="ctr"/>
+          <a:lstStyle/>
+          <a:p>
+            <a:pPr algn="ctr"/>
+          </a:p>
+        </p:txBody>
+      </p:sp>
+      <p:sp>
+        <p:nvSpPr>
+          <p:cNvPr id="7" name="TextBox 6"/>
+          <p:cNvSpPr txBox="1"/>
+          <p:nvPr/>
+        </p:nvSpPr>
+        <p:spPr>
+          <a:xfrm>
+            <a:off x="777240" y="1399031"/>
+            <a:ext cx="10774375" cy="822959"/>
+          </a:xfrm>
+          <a:prstGeom prst="rect">
+            <a:avLst/>
+          </a:prstGeom>
+          <a:noFill/>
+        </p:spPr>
+        <p:txBody>
+          <a:bodyPr wrap="square">
+            <a:spAutoFit/>
+          </a:bodyPr>
+          <a:lstStyle/>
+          <a:p>
+            <a:r>
+              <a:rPr sz="1200" b="1" i="0">
                 <a:solidFill>
                   <a:srgbClr val="269CCB"/>
                 </a:solidFill>
                 <a:latin typeface="Calibri"/>
               </a:rPr>
-              <a:t>Teoria al servicio del proyecto</a:t>
+              <a:t>Info</a:t>
+            </a:r>
+          </a:p>
+          <a:p>
+            <a:pPr>
+              <a:spcBef>
+                <a:spcPts val="400"/>
+              </a:spcBef>
+            </a:pPr>
+            <a:r>
+              <a:rPr sz="1400" b="0" i="0">
+                <a:solidFill>
+                  <a:srgbClr val="333333"/>
+                </a:solidFill>
+                <a:latin typeface="Calibri"/>
+              </a:rPr>
+              <a:t>Hito: El paquete de diseño de VetCare queda auditado y consistente: requisitos, casos de uso y diagrama de clases usan los mismos nombres y no se contradicen entre si.</a:t>
+            </a:r>
+          </a:p>
+        </p:txBody>
+      </p:sp>
+      <p:sp>
+        <p:nvSpPr>
+          <p:cNvPr id="8" name="Rounded Rectangle 7"/>
+          <p:cNvSpPr/>
+          <p:nvPr/>
+        </p:nvSpPr>
+        <p:spPr>
+          <a:xfrm>
+            <a:off x="457200" y="2478024"/>
+            <a:ext cx="11277295" cy="1051560"/>
+          </a:xfrm>
+          <a:prstGeom prst="roundRect">
+            <a:avLst>
+              <a:gd name="adj" fmla="val 12000"/>
+            </a:avLst>
+          </a:prstGeom>
+          <a:solidFill>
+            <a:srgbClr val="FFF8E1"/>
+          </a:solidFill>
+          <a:ln>
+            <a:noFill/>
+          </a:ln>
+        </p:spPr>
+        <p:style>
+          <a:lnRef idx="1">
+            <a:schemeClr val="accent1"/>
+          </a:lnRef>
+          <a:fillRef idx="3">
+            <a:schemeClr val="accent1"/>
+          </a:fillRef>
+          <a:effectRef idx="2">
+            <a:schemeClr val="accent1"/>
+          </a:effectRef>
+          <a:fontRef idx="minor">
+            <a:schemeClr val="lt1"/>
+          </a:fontRef>
+        </p:style>
+        <p:txBody>
+          <a:bodyPr rtlCol="0" anchor="ctr"/>
+          <a:lstStyle/>
+          <a:p>
+            <a:pPr algn="ctr"/>
+          </a:p>
+        </p:txBody>
+      </p:sp>
+      <p:sp>
+        <p:nvSpPr>
+          <p:cNvPr id="9" name="Rectangle 8"/>
+          <p:cNvSpPr/>
+          <p:nvPr/>
+        </p:nvSpPr>
+        <p:spPr>
+          <a:xfrm>
+            <a:off x="457200" y="2478024"/>
+            <a:ext cx="128016" cy="1051560"/>
+          </a:xfrm>
+          <a:prstGeom prst="rect">
+            <a:avLst/>
+          </a:prstGeom>
+          <a:solidFill>
+            <a:srgbClr val="FFD000"/>
+          </a:solidFill>
+          <a:ln>
+            <a:noFill/>
+          </a:ln>
+        </p:spPr>
+        <p:style>
+          <a:lnRef idx="1">
+            <a:schemeClr val="accent1"/>
+          </a:lnRef>
+          <a:fillRef idx="3">
+            <a:schemeClr val="accent1"/>
+          </a:fillRef>
+          <a:effectRef idx="2">
+            <a:schemeClr val="accent1"/>
+          </a:effectRef>
+          <a:fontRef idx="minor">
+            <a:schemeClr val="lt1"/>
+          </a:fontRef>
+        </p:style>
+        <p:txBody>
+          <a:bodyPr rtlCol="0" anchor="ctr"/>
+          <a:lstStyle/>
+          <a:p>
+            <a:pPr algn="ctr"/>
+          </a:p>
+        </p:txBody>
+      </p:sp>
+      <p:sp>
+        <p:nvSpPr>
+          <p:cNvPr id="10" name="TextBox 9"/>
+          <p:cNvSpPr txBox="1"/>
+          <p:nvPr/>
+        </p:nvSpPr>
+        <p:spPr>
+          <a:xfrm>
+            <a:off x="777240" y="2615184"/>
+            <a:ext cx="10774375" cy="822959"/>
+          </a:xfrm>
+          <a:prstGeom prst="rect">
+            <a:avLst/>
+          </a:prstGeom>
+          <a:noFill/>
+        </p:spPr>
+        <p:txBody>
+          <a:bodyPr wrap="square">
+            <a:spAutoFit/>
+          </a:bodyPr>
+          <a:lstStyle/>
+          <a:p>
+            <a:r>
+              <a:rPr sz="1200" b="1" i="0">
+                <a:solidFill>
+                  <a:srgbClr val="FFD000"/>
+                </a:solidFill>
+                <a:latin typeface="Calibri"/>
+              </a:rPr>
+              <a:t>Aclaración</a:t>
+            </a:r>
+          </a:p>
+          <a:p>
+            <a:pPr>
+              <a:spcBef>
+                <a:spcPts val="400"/>
+              </a:spcBef>
+            </a:pPr>
+            <a:r>
+              <a:rPr sz="1400" b="0" i="0">
+                <a:solidFill>
+                  <a:srgbClr val="333333"/>
+                </a:solidFill>
+                <a:latin typeface="Calibri"/>
+              </a:rPr>
+              <a:t>Enunciado completo: Clases/Proyecto Integrador/ (VetCare).</a:t>
+            </a:r>
+          </a:p>
+        </p:txBody>
+      </p:sp>
+      <p:sp>
+        <p:nvSpPr>
+          <p:cNvPr id="11" name="Rounded Rectangle 10"/>
+          <p:cNvSpPr/>
+          <p:nvPr/>
+        </p:nvSpPr>
+        <p:spPr>
+          <a:xfrm>
+            <a:off x="457200" y="3694176"/>
+            <a:ext cx="11277295" cy="1051560"/>
+          </a:xfrm>
+          <a:prstGeom prst="roundRect">
+            <a:avLst>
+              <a:gd name="adj" fmla="val 12000"/>
+            </a:avLst>
+          </a:prstGeom>
+          <a:solidFill>
+            <a:srgbClr val="FBE4E4"/>
+          </a:solidFill>
+          <a:ln>
+            <a:noFill/>
+          </a:ln>
+        </p:spPr>
+        <p:style>
+          <a:lnRef idx="1">
+            <a:schemeClr val="accent1"/>
+          </a:lnRef>
+          <a:fillRef idx="3">
+            <a:schemeClr val="accent1"/>
+          </a:fillRef>
+          <a:effectRef idx="2">
+            <a:schemeClr val="accent1"/>
+          </a:effectRef>
+          <a:fontRef idx="minor">
+            <a:schemeClr val="lt1"/>
+          </a:fontRef>
+        </p:style>
+        <p:txBody>
+          <a:bodyPr rtlCol="0" anchor="ctr"/>
+          <a:lstStyle/>
+          <a:p>
+            <a:pPr algn="ctr"/>
+          </a:p>
+        </p:txBody>
+      </p:sp>
+      <p:sp>
+        <p:nvSpPr>
+          <p:cNvPr id="12" name="Rectangle 11"/>
+          <p:cNvSpPr/>
+          <p:nvPr/>
+        </p:nvSpPr>
+        <p:spPr>
+          <a:xfrm>
+            <a:off x="457200" y="3694176"/>
+            <a:ext cx="128016" cy="1051560"/>
+          </a:xfrm>
+          <a:prstGeom prst="rect">
+            <a:avLst/>
+          </a:prstGeom>
+          <a:solidFill>
+            <a:srgbClr val="A02030"/>
+          </a:solidFill>
+          <a:ln>
+            <a:noFill/>
+          </a:ln>
+        </p:spPr>
+        <p:style>
+          <a:lnRef idx="1">
+            <a:schemeClr val="accent1"/>
+          </a:lnRef>
+          <a:fillRef idx="3">
+            <a:schemeClr val="accent1"/>
+          </a:fillRef>
+          <a:effectRef idx="2">
+            <a:schemeClr val="accent1"/>
+          </a:effectRef>
+          <a:fontRef idx="minor">
+            <a:schemeClr val="lt1"/>
+          </a:fontRef>
+        </p:style>
+        <p:txBody>
+          <a:bodyPr rtlCol="0" anchor="ctr"/>
+          <a:lstStyle/>
+          <a:p>
+            <a:pPr algn="ctr"/>
+          </a:p>
+        </p:txBody>
+      </p:sp>
+      <p:sp>
+        <p:nvSpPr>
+          <p:cNvPr id="13" name="TextBox 12"/>
+          <p:cNvSpPr txBox="1"/>
+          <p:nvPr/>
+        </p:nvSpPr>
+        <p:spPr>
+          <a:xfrm>
+            <a:off x="777240" y="3831336"/>
+            <a:ext cx="10774375" cy="822959"/>
+          </a:xfrm>
+          <a:prstGeom prst="rect">
+            <a:avLst/>
+          </a:prstGeom>
+          <a:noFill/>
+        </p:spPr>
+        <p:txBody>
+          <a:bodyPr wrap="square">
+            <a:spAutoFit/>
+          </a:bodyPr>
+          <a:lstStyle/>
+          <a:p>
+            <a:r>
+              <a:rPr sz="1200" b="1" i="0">
+                <a:solidFill>
+                  <a:srgbClr val="A02030"/>
+                </a:solidFill>
+                <a:latin typeface="Calibri"/>
+              </a:rPr>
+              <a:t>Atención</a:t>
+            </a:r>
+          </a:p>
+          <a:p>
+            <a:pPr>
+              <a:spcBef>
+                <a:spcPts val="400"/>
+              </a:spcBef>
+            </a:pPr>
+            <a:r>
+              <a:rPr sz="1400" b="0" i="0">
+                <a:solidFill>
+                  <a:srgbClr val="333333"/>
+                </a:solidFill>
+                <a:latin typeface="Calibri"/>
+              </a:rPr>
+              <a:t>Entrega del taller, si el docente lo asigna · en la fecha que indique el docente.</a:t>
+            </a:r>
+          </a:p>
+        </p:txBody>
+      </p:sp>
+      <p:sp>
+        <p:nvSpPr>
+          <p:cNvPr id="14" name="TextBox 13"/>
+          <p:cNvSpPr txBox="1"/>
+          <p:nvPr/>
+        </p:nvSpPr>
+        <p:spPr>
+          <a:xfrm>
+            <a:off x="11185855" y="6473952"/>
+            <a:ext cx="640080" cy="274320"/>
+          </a:xfrm>
+          <a:prstGeom prst="rect">
+            <a:avLst/>
+          </a:prstGeom>
+          <a:noFill/>
+        </p:spPr>
+        <p:txBody>
+          <a:bodyPr wrap="square">
+            <a:spAutoFit/>
+          </a:bodyPr>
+          <a:lstStyle/>
+          <a:p>
+            <a:pPr algn="r"/>
+            <a:r>
+              <a:rPr sz="1100" b="0" i="0">
+                <a:solidFill>
+                  <a:srgbClr val="666666"/>
+                </a:solidFill>
+                <a:latin typeface="Calibri"/>
+              </a:rPr>
+              <a:t>19</a:t>
             </a:r>
           </a:p>
         </p:txBody>
@@ -6684,6 +9010,238 @@
 </p:sld>
 </file>
 
+<file path=ppt/slides/slide20.xml><?xml version="1.0" encoding="utf-8"?>
+<p:sld xmlns:a="http://schemas.openxmlformats.org/drawingml/2006/main" xmlns:p="http://schemas.openxmlformats.org/presentationml/2006/main" xmlns:r="http://schemas.openxmlformats.org/officeDocument/2006/relationships">
+  <p:cSld>
+    <p:bg>
+      <p:bgPr>
+        <a:solidFill>
+          <a:srgbClr val="FFFFFF"/>
+        </a:solidFill>
+        <a:effectLst/>
+      </p:bgPr>
+    </p:bg>
+    <p:spTree>
+      <p:nvGrpSpPr>
+        <p:cNvPr id="1" name=""/>
+        <p:cNvGrpSpPr/>
+        <p:nvPr/>
+      </p:nvGrpSpPr>
+      <p:grpSpPr/>
+      <p:sp>
+        <p:nvSpPr>
+          <p:cNvPr id="2" name="Rectangle 1"/>
+          <p:cNvSpPr/>
+          <p:nvPr/>
+        </p:nvSpPr>
+        <p:spPr>
+          <a:xfrm>
+            <a:off x="0" y="0"/>
+            <a:ext cx="12191695" cy="164592"/>
+          </a:xfrm>
+          <a:prstGeom prst="rect">
+            <a:avLst/>
+          </a:prstGeom>
+          <a:solidFill>
+            <a:srgbClr val="269CCB"/>
+          </a:solidFill>
+          <a:ln>
+            <a:noFill/>
+          </a:ln>
+        </p:spPr>
+        <p:style>
+          <a:lnRef idx="1">
+            <a:schemeClr val="accent1"/>
+          </a:lnRef>
+          <a:fillRef idx="3">
+            <a:schemeClr val="accent1"/>
+          </a:fillRef>
+          <a:effectRef idx="2">
+            <a:schemeClr val="accent1"/>
+          </a:effectRef>
+          <a:fontRef idx="minor">
+            <a:schemeClr val="lt1"/>
+          </a:fontRef>
+        </p:style>
+        <p:txBody>
+          <a:bodyPr rtlCol="0" anchor="ctr"/>
+          <a:lstStyle/>
+          <a:p>
+            <a:pPr algn="ctr"/>
+          </a:p>
+        </p:txBody>
+      </p:sp>
+      <p:pic>
+        <p:nvPicPr>
+          <p:cNvPr id="3" name="Picture 2" descr="logo_uniajc_color.png"/>
+          <p:cNvPicPr>
+            <a:picLocks noChangeAspect="1"/>
+          </p:cNvPicPr>
+          <p:nvPr/>
+        </p:nvPicPr>
+        <p:blipFill>
+          <a:blip r:embed="rId2"/>
+          <a:stretch>
+            <a:fillRect/>
+          </a:stretch>
+        </p:blipFill>
+        <p:spPr>
+          <a:xfrm>
+            <a:off x="10271455" y="5998464"/>
+            <a:ext cx="1463040" cy="643233"/>
+          </a:xfrm>
+          <a:prstGeom prst="rect">
+            <a:avLst/>
+          </a:prstGeom>
+        </p:spPr>
+      </p:pic>
+      <p:sp>
+        <p:nvSpPr>
+          <p:cNvPr id="4" name="TextBox 3"/>
+          <p:cNvSpPr txBox="1"/>
+          <p:nvPr/>
+        </p:nvSpPr>
+        <p:spPr>
+          <a:xfrm>
+            <a:off x="457200" y="1737360"/>
+            <a:ext cx="11277295" cy="1097280"/>
+          </a:xfrm>
+          <a:prstGeom prst="rect">
+            <a:avLst/>
+          </a:prstGeom>
+          <a:noFill/>
+        </p:spPr>
+        <p:txBody>
+          <a:bodyPr wrap="square" anchor="ctr"/>
+          <a:lstStyle/>
+          <a:p>
+            <a:pPr algn="ctr"/>
+            <a:r>
+              <a:rPr sz="3400" b="1" i="0">
+                <a:solidFill>
+                  <a:srgbClr val="095292"/>
+                </a:solidFill>
+                <a:latin typeface="Calibri"/>
+              </a:rPr>
+              <a:t>Clase 11 · VetCare avanza</a:t>
+            </a:r>
+          </a:p>
+        </p:txBody>
+      </p:sp>
+      <p:sp>
+        <p:nvSpPr>
+          <p:cNvPr id="5" name="TextBox 4"/>
+          <p:cNvSpPr txBox="1"/>
+          <p:nvPr/>
+        </p:nvSpPr>
+        <p:spPr>
+          <a:xfrm>
+            <a:off x="457200" y="3017520"/>
+            <a:ext cx="11277295" cy="1645920"/>
+          </a:xfrm>
+          <a:prstGeom prst="rect">
+            <a:avLst/>
+          </a:prstGeom>
+          <a:noFill/>
+        </p:spPr>
+        <p:txBody>
+          <a:bodyPr wrap="square">
+            <a:spAutoFit/>
+          </a:bodyPr>
+          <a:lstStyle/>
+          <a:p>
+            <a:pPr algn="ctr">
+              <a:spcAft>
+                <a:spcPts val="600"/>
+              </a:spcAft>
+            </a:pPr>
+            <a:r>
+              <a:rPr sz="1600" b="0" i="0">
+                <a:solidFill>
+                  <a:srgbClr val="333333"/>
+                </a:solidFill>
+                <a:latin typeface="Calibri"/>
+              </a:rPr>
+              <a:t>El paquete de diseño de VetCare queda auditado y consistente: requisitos, casos de uso y diagrama de clases usan los mismos nombres y no se contradicen entre si.</a:t>
+            </a:r>
+          </a:p>
+          <a:p>
+            <a:pPr algn="ctr">
+              <a:spcAft>
+                <a:spcPts val="600"/>
+              </a:spcAft>
+            </a:pPr>
+            <a:r>
+              <a:rPr sz="1600" b="0" i="0">
+                <a:solidFill>
+                  <a:srgbClr val="333333"/>
+                </a:solidFill>
+                <a:latin typeface="Calibri"/>
+              </a:rPr>
+              <a:t>Entregable: Un documento con la matriz de trazabilidad RF a CU a Clase, el glosario de nombres canonicos, el acta de revision entre pares con hallazgos clasificados por severidad y el backlog priorizado de correcciones, subido a la plataforma del curso.</a:t>
+            </a:r>
+          </a:p>
+          <a:p>
+            <a:pPr algn="ctr">
+              <a:spcAft>
+                <a:spcPts val="600"/>
+              </a:spcAft>
+            </a:pPr>
+            <a:r>
+              <a:rPr sz="1600" b="0" i="0">
+                <a:solidFill>
+                  <a:srgbClr val="333333"/>
+                </a:solidFill>
+                <a:latin typeface="Calibri"/>
+              </a:rPr>
+              <a:t>Siguiente clase: continuamos el hilo del PI</a:t>
+            </a:r>
+          </a:p>
+        </p:txBody>
+      </p:sp>
+      <p:sp>
+        <p:nvSpPr>
+          <p:cNvPr id="6" name="TextBox 5"/>
+          <p:cNvSpPr txBox="1"/>
+          <p:nvPr/>
+        </p:nvSpPr>
+        <p:spPr>
+          <a:xfrm>
+            <a:off x="457200" y="4754880"/>
+            <a:ext cx="11277295" cy="640080"/>
+          </a:xfrm>
+          <a:prstGeom prst="rect">
+            <a:avLst/>
+          </a:prstGeom>
+          <a:noFill/>
+        </p:spPr>
+        <p:txBody>
+          <a:bodyPr wrap="square">
+            <a:spAutoFit/>
+          </a:bodyPr>
+          <a:lstStyle/>
+          <a:p>
+            <a:pPr algn="ctr"/>
+            <a:r>
+              <a:rPr sz="2000" b="1" i="0">
+                <a:solidFill>
+                  <a:srgbClr val="269CCB"/>
+                </a:solidFill>
+                <a:latin typeface="Calibri"/>
+              </a:rPr>
+              <a:t>Teoria al servicio del proyecto</a:t>
+            </a:r>
+          </a:p>
+        </p:txBody>
+      </p:sp>
+    </p:spTree>
+  </p:cSld>
+  <p:clrMapOvr>
+    <a:masterClrMapping/>
+  </p:clrMapOvr>
+</p:sld>
+</file>
+
 <file path=ppt/slides/slide3.xml><?xml version="1.0" encoding="utf-8"?>
 <p:sld xmlns:a="http://schemas.openxmlformats.org/drawingml/2006/main" xmlns:p="http://schemas.openxmlformats.org/presentationml/2006/main" xmlns:r="http://schemas.openxmlformats.org/officeDocument/2006/relationships">
   <p:cSld>
@@ -7669,7 +10227,7 @@
                 </a:solidFill>
                 <a:latin typeface="Calibri"/>
               </a:rPr>
-              <a:t>Teoria Core</a:t>
+              <a:t>Un paquete de diseño no es una carpeta de archivos sueltos: es un...</a:t>
             </a:r>
           </a:p>
         </p:txBody>
@@ -7708,7 +10266,7 @@
                 </a:solidFill>
                 <a:latin typeface="Calibri"/>
               </a:rPr>
-              <a:t>–   Un paquete de diseño no es una carpeta de archivos sueltos: es un sistema de documentos que deben decir lo mismo…</a:t>
+              <a:t>–   Un paquete de diseño no es una carpeta de archivos sueltos: es un sistema de documentos que deben decir lo mismo con las mismas palabras.</a:t>
             </a:r>
           </a:p>
           <a:p>
@@ -7724,7 +10282,7 @@
                 </a:solidFill>
                 <a:latin typeface="Calibri"/>
               </a:rPr>
-              <a:t>–   La herramienta central para eso es la trazabilidad, y se verifica en dos direcciones</a:t>
+              <a:t>–   El problema es que esos documentos se escribieron en semanas distintas, muchas veces por personas distintas del equipo, y cada semana el entendimiento del dominio cambio un poquito.</a:t>
             </a:r>
           </a:p>
           <a:p>
@@ -7740,7 +10298,7 @@
                 </a:solidFill>
                 <a:latin typeface="Calibri"/>
               </a:rPr>
-              <a:t>–   El segundo eje de la auditoria es el lenguaje</a:t>
+              <a:t>–   Asi es como en VetCare aparece un requisito RF-07 que promete recordatorio de cita por mensajeria, un diagrama de casos de uso donde no existe ningun caso de uso de recordatorio, y un diagrama de clases donde no hay nada parecido a una clase Notificacion.</a:t>
             </a:r>
           </a:p>
           <a:p>
@@ -7756,7 +10314,7 @@
                 </a:solidFill>
                 <a:latin typeface="Calibri"/>
               </a:rPr>
-              <a:t>–   La revision entre pares se hace con reglas o no sirve</a:t>
+              <a:t>–   Ninguno de los tres documentos esta mal por si solo; lo que esta mal es el conjunto.</a:t>
             </a:r>
           </a:p>
           <a:p>
@@ -7772,7 +10330,23 @@
                 </a:solidFill>
                 <a:latin typeface="Calibri"/>
               </a:rPr>
-              <a:t>–   Todo lo que se encuentra se convierte en backlog de deuda de diseño, no en angustia</a:t>
+              <a:t>–   Un defecto de consistencia cuesta poco corregirlo hoy, en una hoja, y cuesta carisimo corregirlo cuando ya se construyo sobre el, porque para entonces hay pantallas, tablas y codigo apoyados en la contradiccion.</a:t>
+            </a:r>
+          </a:p>
+          <a:p>
+            <a:pPr>
+              <a:spcAft>
+                <a:spcPts val="800"/>
+              </a:spcAft>
+            </a:pPr>
+            <a:r>
+              <a:rPr sz="2000" b="0" i="0">
+                <a:solidFill>
+                  <a:srgbClr val="333333"/>
+                </a:solidFill>
+                <a:latin typeface="Calibri"/>
+              </a:rPr>
+              <a:t>–   Por eso esta sesion no agrega tema nuevo: agrega confianza en lo que ya existe, que es un trabajo de arquitecto tan legitimo como dibujar.</a:t>
             </a:r>
           </a:p>
         </p:txBody>
@@ -7953,141 +10527,21 @@
                 </a:solidFill>
                 <a:latin typeface="Calibri"/>
               </a:rPr>
-              <a:t>Auditoria cruzada de VetCare: la matriz que delata las contradicciones</a:t>
-            </a:r>
-          </a:p>
-        </p:txBody>
-      </p:sp>
-      <p:sp>
-        <p:nvSpPr>
-          <p:cNvPr id="5" name="Rounded Rectangle 4"/>
-          <p:cNvSpPr/>
-          <p:nvPr/>
-        </p:nvSpPr>
-        <p:spPr>
-          <a:xfrm>
-            <a:off x="457200" y="1261872"/>
-            <a:ext cx="11277295" cy="4773168"/>
-          </a:xfrm>
-          <a:prstGeom prst="roundRect">
-            <a:avLst>
-              <a:gd name="adj" fmla="val 12000"/>
-            </a:avLst>
-          </a:prstGeom>
-          <a:solidFill>
-            <a:srgbClr val="1E2A38"/>
-          </a:solidFill>
-          <a:ln>
-            <a:noFill/>
-          </a:ln>
-        </p:spPr>
-        <p:style>
-          <a:lnRef idx="1">
-            <a:schemeClr val="accent1"/>
-          </a:lnRef>
-          <a:fillRef idx="3">
-            <a:schemeClr val="accent1"/>
-          </a:fillRef>
-          <a:effectRef idx="2">
-            <a:schemeClr val="accent1"/>
-          </a:effectRef>
-          <a:fontRef idx="minor">
-            <a:schemeClr val="lt1"/>
-          </a:fontRef>
-        </p:style>
-        <p:txBody>
-          <a:bodyPr rtlCol="0" anchor="ctr"/>
-          <a:lstStyle/>
-          <a:p>
-            <a:pPr algn="ctr"/>
-          </a:p>
-        </p:txBody>
-      </p:sp>
-      <p:sp>
-        <p:nvSpPr>
-          <p:cNvPr id="6" name="Rectangle 5"/>
-          <p:cNvSpPr/>
-          <p:nvPr/>
-        </p:nvSpPr>
-        <p:spPr>
-          <a:xfrm>
-            <a:off x="457200" y="1261872"/>
-            <a:ext cx="11277295" cy="320040"/>
-          </a:xfrm>
-          <a:prstGeom prst="rect">
-            <a:avLst/>
-          </a:prstGeom>
-          <a:solidFill>
-            <a:srgbClr val="095292"/>
-          </a:solidFill>
-          <a:ln>
-            <a:noFill/>
-          </a:ln>
-        </p:spPr>
-        <p:style>
-          <a:lnRef idx="1">
-            <a:schemeClr val="accent1"/>
-          </a:lnRef>
-          <a:fillRef idx="3">
-            <a:schemeClr val="accent1"/>
-          </a:fillRef>
-          <a:effectRef idx="2">
-            <a:schemeClr val="accent1"/>
-          </a:effectRef>
-          <a:fontRef idx="minor">
-            <a:schemeClr val="lt1"/>
-          </a:fontRef>
-        </p:style>
-        <p:txBody>
-          <a:bodyPr rtlCol="0" anchor="ctr"/>
-          <a:lstStyle/>
-          <a:p>
-            <a:pPr algn="ctr"/>
-          </a:p>
-        </p:txBody>
-      </p:sp>
-      <p:sp>
-        <p:nvSpPr>
-          <p:cNvPr id="7" name="TextBox 6"/>
+              <a:t>La herramienta central para eso es la trazabilidad, y se verifica en... (1/2)</a:t>
+            </a:r>
+          </a:p>
+        </p:txBody>
+      </p:sp>
+      <p:sp>
+        <p:nvSpPr>
+          <p:cNvPr id="5" name="TextBox 4"/>
           <p:cNvSpPr txBox="1"/>
           <p:nvPr/>
         </p:nvSpPr>
         <p:spPr>
           <a:xfrm>
-            <a:off x="685800" y="1307592"/>
-            <a:ext cx="10820095" cy="256032"/>
-          </a:xfrm>
-          <a:prstGeom prst="rect">
-            <a:avLst/>
-          </a:prstGeom>
-          <a:noFill/>
-        </p:spPr>
-        <p:txBody>
-          <a:bodyPr wrap="square" anchor="ctr"/>
-          <a:lstStyle/>
-          <a:p>
-            <a:r>
-              <a:rPr sz="1000" b="1" i="0">
-                <a:solidFill>
-                  <a:srgbClr val="269CCB"/>
-                </a:solidFill>
-                <a:latin typeface="Calibri"/>
-              </a:rPr>
-              <a:t>● ● ●</a:t>
-            </a:r>
-          </a:p>
-        </p:txBody>
-      </p:sp>
-      <p:sp>
-        <p:nvSpPr>
-          <p:cNvPr id="8" name="TextBox 7"/>
-          <p:cNvSpPr txBox="1"/>
-          <p:nvPr/>
-        </p:nvSpPr>
-        <p:spPr>
-          <a:xfrm>
-            <a:off x="777240" y="1719072"/>
-            <a:ext cx="10637215" cy="4133087"/>
+            <a:off x="457200" y="1170432"/>
+            <a:ext cx="11277295" cy="5230368"/>
           </a:xfrm>
           <a:prstGeom prst="rect">
             <a:avLst/>
@@ -8102,267 +10556,88 @@
           <a:p>
             <a:pPr>
               <a:spcAft>
-                <a:spcPts val="400"/>
+                <a:spcPts val="800"/>
               </a:spcAft>
             </a:pPr>
             <a:r>
-              <a:rPr sz="1400" b="0" i="0">
-                <a:solidFill>
-                  <a:srgbClr val="FFFFFF"/>
-                </a:solidFill>
-                <a:latin typeface="Calibri"/>
-              </a:rPr>
-              <a:t>| RF     | Caso de uso                  | Clases implicadas      | Mockup | Estado      |</a:t>
+              <a:rPr sz="2000" b="0" i="0">
+                <a:solidFill>
+                  <a:srgbClr val="333333"/>
+                </a:solidFill>
+                <a:latin typeface="Calibri"/>
+              </a:rPr>
+              <a:t>–   La herramienta central para eso es la trazabilidad, y se verifica en dos direcciones.</a:t>
             </a:r>
           </a:p>
           <a:p>
             <a:pPr>
               <a:spcAft>
-                <a:spcPts val="400"/>
+                <a:spcPts val="800"/>
               </a:spcAft>
             </a:pPr>
             <a:r>
-              <a:rPr sz="1400" b="0" i="0">
-                <a:solidFill>
-                  <a:srgbClr val="FFFFFF"/>
-                </a:solidFill>
-                <a:latin typeface="Calibri"/>
-              </a:rPr>
-              <a:t>|--------|------------------------------|------------------------|--------|-------------|</a:t>
+              <a:rPr sz="2000" b="0" i="0">
+                <a:solidFill>
+                  <a:srgbClr val="333333"/>
+                </a:solidFill>
+                <a:latin typeface="Calibri"/>
+              </a:rPr>
+              <a:t>–   Hacia adelante se pregunta si todo requisito funcional llega a algun caso de uso y si ese caso de uso llega a alguna clase, atributo u operacion que lo soporte</a:t>
             </a:r>
           </a:p>
           <a:p>
             <a:pPr>
               <a:spcAft>
-                <a:spcPts val="400"/>
+                <a:spcPts val="800"/>
               </a:spcAft>
             </a:pPr>
             <a:r>
-              <a:rPr sz="1400" b="0" i="0">
-                <a:solidFill>
-                  <a:srgbClr val="FFFFFF"/>
-                </a:solidFill>
-                <a:latin typeface="Calibri"/>
-              </a:rPr>
-              <a:t>| RF-02  | CU-00 Registrar propietario  | Propietario            | M-01   | OK          |</a:t>
+              <a:rPr sz="2000" b="0" i="0">
+                <a:solidFill>
+                  <a:srgbClr val="333333"/>
+                </a:solidFill>
+                <a:latin typeface="Calibri"/>
+              </a:rPr>
+              <a:t>–   Si un RF no llega a nada, es un requisito huerfano y significa que el equipo prometio algo que el diseño no cumple.</a:t>
             </a:r>
           </a:p>
           <a:p>
             <a:pPr>
               <a:spcAft>
-                <a:spcPts val="400"/>
+                <a:spcPts val="800"/>
               </a:spcAft>
             </a:pPr>
             <a:r>
-              <a:rPr sz="1400" b="0" i="0">
-                <a:solidFill>
-                  <a:srgbClr val="FFFFFF"/>
-                </a:solidFill>
-                <a:latin typeface="Calibri"/>
-              </a:rPr>
-              <a:t>| RF-03  | CU-01 Registrar mascota      | Mascota, Propietario   | M-02   | OK          |</a:t>
+              <a:rPr sz="2000" b="0" i="0">
+                <a:solidFill>
+                  <a:srgbClr val="333333"/>
+                </a:solidFill>
+                <a:latin typeface="Calibri"/>
+              </a:rPr>
+              <a:t>–   Hacia atras se pregunta si todo elemento del diseño nace de algun requisito</a:t>
             </a:r>
           </a:p>
           <a:p>
             <a:pPr>
               <a:spcAft>
-                <a:spcPts val="400"/>
+                <a:spcPts val="800"/>
               </a:spcAft>
             </a:pPr>
             <a:r>
-              <a:rPr sz="1400" b="0" i="0">
-                <a:solidFill>
-                  <a:srgbClr val="FFFFFF"/>
-                </a:solidFill>
-                <a:latin typeface="Calibri"/>
-              </a:rPr>
-              <a:t>| RF-05  | CU-02 Buscar expediente      | Mascota, Consulta      | M-03   | OK          |</a:t>
-            </a:r>
-          </a:p>
-          <a:p>
-            <a:pPr>
-              <a:spcAft>
-                <a:spcPts val="400"/>
-              </a:spcAft>
-            </a:pPr>
-            <a:r>
-              <a:rPr sz="1400" b="0" i="0">
-                <a:solidFill>
-                  <a:srgbClr val="FFFFFF"/>
-                </a:solidFill>
-                <a:latin typeface="Calibri"/>
-              </a:rPr>
-              <a:t>| RF-06  | CU-03 Registrar consulta     | Consulta, ???          | M-05   | HALLAZGO    |</a:t>
-            </a:r>
-          </a:p>
-          <a:p>
-            <a:pPr>
-              <a:spcAft>
-                <a:spcPts val="400"/>
-              </a:spcAft>
-            </a:pPr>
-            <a:r>
-              <a:rPr sz="1400" b="0" i="0">
-                <a:solidFill>
-                  <a:srgbClr val="FFFFFF"/>
-                </a:solidFill>
-                <a:latin typeface="Calibri"/>
-              </a:rPr>
-              <a:t>| RF-07  | (no existe)                  | (no existe)            | --     | HUERFANO    |</a:t>
-            </a:r>
-          </a:p>
-          <a:p>
-            <a:pPr>
-              <a:spcAft>
-                <a:spcPts val="400"/>
-              </a:spcAft>
-            </a:pPr>
-            <a:r>
-              <a:rPr sz="1400" b="0" i="0">
-                <a:solidFill>
-                  <a:srgbClr val="FFFFFF"/>
-                </a:solidFill>
-                <a:latin typeface="Calibri"/>
-              </a:rPr>
-              <a:t>| (sin)  | CU-04 Agendar cita           | Cita, Veterinario      | M-04   | SIN ORIGEN  |</a:t>
-            </a:r>
-          </a:p>
-          <a:p>
-            <a:pPr>
-              <a:spcAft>
-                <a:spcPts val="400"/>
-              </a:spcAft>
-            </a:pPr>
-            <a:r>
-              <a:rPr sz="1400" b="0" i="0">
-                <a:solidFill>
-                  <a:srgbClr val="FFFFFF"/>
-                </a:solidFill>
-                <a:latin typeface="Calibri"/>
-              </a:rPr>
-              <a:t/>
-            </a:r>
-          </a:p>
-          <a:p>
-            <a:pPr>
-              <a:spcAft>
-                <a:spcPts val="400"/>
-              </a:spcAft>
-            </a:pPr>
-            <a:r>
-              <a:rPr sz="1400" b="0" i="0">
-                <a:solidFill>
-                  <a:srgbClr val="FFFFFF"/>
-                </a:solidFill>
-                <a:latin typeface="Calibri"/>
-              </a:rPr>
-              <a:t>H-01 (mayor): CU-03 exige registrar quien atendio, pero Consulta no se relaciona con Veterinario.</a:t>
-            </a:r>
-          </a:p>
-          <a:p>
-            <a:pPr>
-              <a:spcAft>
-                <a:spcPts val="400"/>
-              </a:spcAft>
-            </a:pPr>
-            <a:r>
-              <a:rPr sz="1400" b="0" i="0">
-                <a:solidFill>
-                  <a:srgbClr val="FFFFFF"/>
-                </a:solidFill>
-                <a:latin typeface="Calibri"/>
-              </a:rPr>
-              <a:t>H-02 (mayor): la fila de CU-04 quedo sin RF; debe ligarse a RF-08 Agendar cita o eliminarse el CU.</a:t>
-            </a:r>
-          </a:p>
-          <a:p>
-            <a:pPr>
-              <a:spcAft>
-                <a:spcPts val="400"/>
-              </a:spcAft>
-            </a:pPr>
-            <a:r>
-              <a:rPr sz="1400" b="0" i="0">
-                <a:solidFill>
-                  <a:srgbClr val="FFFFFF"/>
-                </a:solidFill>
-                <a:latin typeface="Calibri"/>
-              </a:rPr>
-              <a:t>H-03 (bloqueante): la clase Mascota guarda dueño como texto en lugar de asociarse a Propietario.</a:t>
-            </a:r>
-          </a:p>
-          <a:p>
-            <a:pPr>
-              <a:spcAft>
-                <a:spcPts val="400"/>
-              </a:spcAft>
-            </a:pPr>
-            <a:r>
-              <a:rPr sz="1400" b="0" i="0">
-                <a:solidFill>
-                  <a:srgbClr val="FFFFFF"/>
-                </a:solidFill>
-                <a:latin typeface="Calibri"/>
-              </a:rPr>
-              <a:t>H-04 (menor): el RNF-02 de 3 segundos no aparece en ninguna postcondicion de CU-02.</a:t>
-            </a:r>
-          </a:p>
-          <a:p>
-            <a:pPr>
-              <a:spcAft>
-                <a:spcPts val="400"/>
-              </a:spcAft>
-            </a:pPr>
-            <a:r>
-              <a:rPr sz="1400" b="0" i="0">
-                <a:solidFill>
-                  <a:srgbClr val="FFFFFF"/>
-                </a:solidFill>
-                <a:latin typeface="Calibri"/>
-              </a:rPr>
-              <a:t>Glosario canonico: Propietario (prohibido Dueño, Cliente, Responsable) | Cita != Consulta.</a:t>
-            </a:r>
-          </a:p>
-        </p:txBody>
-      </p:sp>
-      <p:sp>
-        <p:nvSpPr>
-          <p:cNvPr id="9" name="TextBox 8"/>
-          <p:cNvSpPr txBox="1"/>
-          <p:nvPr/>
-        </p:nvSpPr>
-        <p:spPr>
-          <a:xfrm>
-            <a:off x="457200" y="6080760"/>
-            <a:ext cx="11277295" cy="320040"/>
-          </a:xfrm>
-          <a:prstGeom prst="rect">
-            <a:avLst/>
-          </a:prstGeom>
-          <a:noFill/>
-        </p:spPr>
-        <p:txBody>
-          <a:bodyPr wrap="square">
-            <a:spAutoFit/>
-          </a:bodyPr>
-          <a:lstStyle/>
-          <a:p>
-            <a:pPr algn="ctr"/>
-            <a:r>
-              <a:rPr sz="1200" b="0" i="1">
-                <a:solidFill>
-                  <a:srgbClr val="666666"/>
-                </a:solidFill>
-                <a:latin typeface="Calibri"/>
-              </a:rPr>
-              <a:t>Una tabla de cuatro columnas encuentra en veinte minutos las contradicciones que un equipo no ve en tres semanas.</a:t>
-            </a:r>
-          </a:p>
-        </p:txBody>
-      </p:sp>
-      <p:sp>
-        <p:nvSpPr>
-          <p:cNvPr id="10" name="TextBox 9"/>
+              <a:rPr sz="2000" b="0" i="0">
+                <a:solidFill>
+                  <a:srgbClr val="333333"/>
+                </a:solidFill>
+                <a:latin typeface="Calibri"/>
+              </a:rPr>
+              <a:t>–   Si un caso de uso o una clase no viene de ningun RF, es un elemento viudo y casi siempre significa que alguien agrego funcionalidad por gusto propio o que la fila de la matriz quedo sin diligenciar.</a:t>
+            </a:r>
+          </a:p>
+        </p:txBody>
+      </p:sp>
+      <p:sp>
+        <p:nvSpPr>
+          <p:cNvPr id="6" name="TextBox 5"/>
           <p:cNvSpPr txBox="1"/>
           <p:nvPr/>
         </p:nvSpPr>
@@ -8536,7 +10811,7 @@
                 </a:solidFill>
                 <a:latin typeface="Calibri"/>
               </a:rPr>
-              <a:t>Demo del dia</a:t>
+              <a:t>La herramienta central para eso es la trazabilidad, y se verifica en... (2/2)</a:t>
             </a:r>
           </a:p>
         </p:txBody>
@@ -8575,25 +10850,7 @@
                 </a:solidFill>
                 <a:latin typeface="Calibri"/>
               </a:rPr>
-              <a:t>–   </a:t>
-            </a:r>
-            <a:r>
-              <a:rPr sz="2000" b="1" i="0">
-                <a:solidFill>
-                  <a:srgbClr val="333333"/>
-                </a:solidFill>
-                <a:latin typeface="Calibri"/>
-              </a:rPr>
-              <a:t>Herramienta:</a:t>
-            </a:r>
-            <a:r>
-              <a:rPr sz="2000" b="0" i="0">
-                <a:solidFill>
-                  <a:srgbClr val="333333"/>
-                </a:solidFill>
-                <a:latin typeface="Calibri"/>
-              </a:rPr>
-              <a:t> Google Docs · draw.io</a:t>
+              <a:t>–   En VetCare esto se vuelve concreto rapidisimo: RF-05, consultar el expediente de una mascota, junto con el RNF-02 que exige que el resultado aparezca en menos de tres segundos</a:t>
             </a:r>
           </a:p>
           <a:p>
@@ -8609,25 +10866,7 @@
                 </a:solidFill>
                 <a:latin typeface="Calibri"/>
               </a:rPr>
-              <a:t>–   </a:t>
-            </a:r>
-            <a:r>
-              <a:rPr sz="2000" b="1" i="0">
-                <a:solidFill>
-                  <a:srgbClr val="333333"/>
-                </a:solidFill>
-                <a:latin typeface="Calibri"/>
-              </a:rPr>
-              <a:t>Demo:</a:t>
-            </a:r>
-            <a:r>
-              <a:rPr sz="2000" b="0" i="0">
-                <a:solidFill>
-                  <a:srgbClr val="333333"/>
-                </a:solidFill>
-                <a:latin typeface="Calibri"/>
-              </a:rPr>
-              <a:t> El docente proyecta el paquete de un equipo ficticio de VetCare y encuentra en vivo tres inconsistencias: un RF sin caso de uso, una clase llamada Dueño que en el catalogo de requisitos se llama Propietario, y un caso de uso que ninguna clase puede soportar.</a:t>
+              <a:t>–   Debe llegar a CU-02 Buscar expediente y de ahi a las clases Mascota y Consulta, con una operacion de busqueda por codigo o por nombre</a:t>
             </a:r>
           </a:p>
           <a:p>
@@ -8643,7 +10882,23 @@
                 </a:solidFill>
                 <a:latin typeface="Calibri"/>
               </a:rPr>
-              <a:t>–   Mismo dominio VetCare — no otro ejemplo. Aqui se diseña, no se programa.</a:t>
+              <a:t>–   Si ese camino se rompe en cualquier punto, el problema numero dos de la clinica Huellitas sigue sin resolverse aunque el equipo tenga veinte paginas escritas.</a:t>
+            </a:r>
+          </a:p>
+          <a:p>
+            <a:pPr>
+              <a:spcAft>
+                <a:spcPts val="800"/>
+              </a:spcAft>
+            </a:pPr>
+            <a:r>
+              <a:rPr sz="2000" b="0" i="0">
+                <a:solidFill>
+                  <a:srgbClr val="333333"/>
+                </a:solidFill>
+                <a:latin typeface="Calibri"/>
+              </a:rPr>
+              <a:t>–   La matriz de trazabilidad es apenas una tabla de cuatro columnas, pero es la unica prueba objetiva de que el paquete es coherente.</a:t>
             </a:r>
           </a:p>
         </p:txBody>
@@ -8718,7 +10973,7 @@
         <p:spPr>
           <a:xfrm>
             <a:off x="0" y="0"/>
-            <a:ext cx="12191695" cy="1170432"/>
+            <a:ext cx="12191695" cy="960120"/>
           </a:xfrm>
           <a:prstGeom prst="rect">
             <a:avLst/>
@@ -8760,7 +11015,7 @@
         </p:nvSpPr>
         <p:spPr>
           <a:xfrm>
-            <a:off x="0" y="1170432"/>
+            <a:off x="0" y="960120"/>
             <a:ext cx="12191695" cy="41148"/>
           </a:xfrm>
           <a:prstGeom prst="rect">
@@ -8804,7 +11059,7 @@
         <p:spPr>
           <a:xfrm>
             <a:off x="457200" y="164592"/>
-            <a:ext cx="11277295" cy="384048"/>
+            <a:ext cx="11277295" cy="502920"/>
           </a:xfrm>
           <a:prstGeom prst="rect">
             <a:avLst/>
@@ -8824,7 +11079,7 @@
                 </a:solidFill>
                 <a:latin typeface="Calibri"/>
               </a:rPr>
-              <a:t>Herramientas de hoy</a:t>
+              <a:t>El segundo eje de la auditoria es el lenguaje (1/2)</a:t>
             </a:r>
           </a:p>
         </p:txBody>
@@ -8837,8 +11092,8 @@
         </p:nvSpPr>
         <p:spPr>
           <a:xfrm>
-            <a:off x="457200" y="566928"/>
-            <a:ext cx="11277295" cy="411480"/>
+            <a:off x="457200" y="1170432"/>
+            <a:ext cx="11277295" cy="5230368"/>
           </a:xfrm>
           <a:prstGeom prst="rect">
             <a:avLst/>
@@ -8851,633 +11106,90 @@
           </a:bodyPr>
           <a:lstStyle/>
           <a:p>
-            <a:r>
-              <a:rPr sz="1400" b="0" i="0">
-                <a:solidFill>
-                  <a:srgbClr val="B8D8EE"/>
-                </a:solidFill>
-                <a:latin typeface="Calibri"/>
-              </a:rPr>
-              <a:t>Gratis · funcionan en el navegador</a:t>
-            </a:r>
-          </a:p>
-        </p:txBody>
-      </p:sp>
-      <p:sp>
-        <p:nvSpPr>
-          <p:cNvPr id="6" name="Rounded Rectangle 5"/>
-          <p:cNvSpPr/>
-          <p:nvPr/>
-        </p:nvSpPr>
-        <p:spPr>
-          <a:xfrm>
-            <a:off x="457200" y="1591056"/>
-            <a:ext cx="3624986" cy="2331720"/>
-          </a:xfrm>
-          <a:prstGeom prst="roundRect">
-            <a:avLst>
-              <a:gd name="adj" fmla="val 12000"/>
-            </a:avLst>
-          </a:prstGeom>
-          <a:solidFill>
-            <a:srgbClr val="F2F2F2"/>
-          </a:solidFill>
-          <a:ln>
-            <a:noFill/>
-          </a:ln>
-        </p:spPr>
-        <p:style>
-          <a:lnRef idx="1">
-            <a:schemeClr val="accent1"/>
-          </a:lnRef>
-          <a:fillRef idx="3">
-            <a:schemeClr val="accent1"/>
-          </a:fillRef>
-          <a:effectRef idx="2">
-            <a:schemeClr val="accent1"/>
-          </a:effectRef>
-          <a:fontRef idx="minor">
-            <a:schemeClr val="lt1"/>
-          </a:fontRef>
-        </p:style>
-        <p:txBody>
-          <a:bodyPr rtlCol="0" anchor="ctr"/>
-          <a:lstStyle/>
-          <a:p>
-            <a:pPr algn="ctr"/>
-          </a:p>
-        </p:txBody>
-      </p:sp>
-      <p:sp>
-        <p:nvSpPr>
-          <p:cNvPr id="7" name="Rectangle 6"/>
-          <p:cNvSpPr/>
-          <p:nvPr/>
-        </p:nvSpPr>
-        <p:spPr>
-          <a:xfrm>
-            <a:off x="457200" y="1591056"/>
-            <a:ext cx="3624986" cy="64008"/>
-          </a:xfrm>
-          <a:prstGeom prst="rect">
-            <a:avLst/>
-          </a:prstGeom>
-          <a:solidFill>
-            <a:srgbClr val="095292"/>
-          </a:solidFill>
-          <a:ln>
-            <a:noFill/>
-          </a:ln>
-        </p:spPr>
-        <p:style>
-          <a:lnRef idx="1">
-            <a:schemeClr val="accent1"/>
-          </a:lnRef>
-          <a:fillRef idx="3">
-            <a:schemeClr val="accent1"/>
-          </a:fillRef>
-          <a:effectRef idx="2">
-            <a:schemeClr val="accent1"/>
-          </a:effectRef>
-          <a:fontRef idx="minor">
-            <a:schemeClr val="lt1"/>
-          </a:fontRef>
-        </p:style>
-        <p:txBody>
-          <a:bodyPr rtlCol="0" anchor="ctr"/>
-          <a:lstStyle/>
-          <a:p>
-            <a:pPr algn="ctr"/>
-          </a:p>
-        </p:txBody>
-      </p:sp>
-      <p:sp>
-        <p:nvSpPr>
-          <p:cNvPr id="8" name="Rectangle 7"/>
-          <p:cNvSpPr/>
-          <p:nvPr/>
-        </p:nvSpPr>
-        <p:spPr>
-          <a:xfrm>
-            <a:off x="457200" y="1655064"/>
-            <a:ext cx="3624986" cy="27432"/>
-          </a:xfrm>
-          <a:prstGeom prst="rect">
-            <a:avLst/>
-          </a:prstGeom>
-          <a:solidFill>
-            <a:srgbClr val="FFD000"/>
-          </a:solidFill>
-          <a:ln>
-            <a:noFill/>
-          </a:ln>
-        </p:spPr>
-        <p:style>
-          <a:lnRef idx="1">
-            <a:schemeClr val="accent1"/>
-          </a:lnRef>
-          <a:fillRef idx="3">
-            <a:schemeClr val="accent1"/>
-          </a:fillRef>
-          <a:effectRef idx="2">
-            <a:schemeClr val="accent1"/>
-          </a:effectRef>
-          <a:fontRef idx="minor">
-            <a:schemeClr val="lt1"/>
-          </a:fontRef>
-        </p:style>
-        <p:txBody>
-          <a:bodyPr rtlCol="0" anchor="ctr"/>
-          <a:lstStyle/>
-          <a:p>
-            <a:pPr algn="ctr"/>
-          </a:p>
-        </p:txBody>
-      </p:sp>
-      <p:pic>
-        <p:nvPicPr>
-          <p:cNvPr id="9" name="Picture 8" descr="drawio.png"/>
-          <p:cNvPicPr>
-            <a:picLocks noChangeAspect="1"/>
-          </p:cNvPicPr>
-          <p:nvPr/>
-        </p:nvPicPr>
-        <p:blipFill>
-          <a:blip r:embed="rId2"/>
-          <a:stretch>
-            <a:fillRect/>
-          </a:stretch>
-        </p:blipFill>
-        <p:spPr>
-          <a:xfrm>
-            <a:off x="1643329" y="1847087"/>
-            <a:ext cx="1252728" cy="1252728"/>
-          </a:xfrm>
-          <a:prstGeom prst="rect">
-            <a:avLst/>
-          </a:prstGeom>
-        </p:spPr>
-      </p:pic>
-      <p:sp>
-        <p:nvSpPr>
-          <p:cNvPr id="10" name="TextBox 9"/>
-          <p:cNvSpPr txBox="1"/>
-          <p:nvPr/>
-        </p:nvSpPr>
-        <p:spPr>
-          <a:xfrm>
-            <a:off x="530352" y="3191256"/>
-            <a:ext cx="3478682" cy="621792"/>
-          </a:xfrm>
-          <a:prstGeom prst="rect">
-            <a:avLst/>
-          </a:prstGeom>
-          <a:noFill/>
-        </p:spPr>
-        <p:txBody>
-          <a:bodyPr wrap="square" anchor="t"/>
-          <a:lstStyle/>
-          <a:p>
-            <a:pPr algn="ctr"/>
-            <a:r>
-              <a:rPr sz="1300" b="1" i="0">
-                <a:solidFill>
-                  <a:srgbClr val="095292"/>
-                </a:solidFill>
-                <a:latin typeface="Calibri"/>
-              </a:rPr>
-              <a:t>Draw.Io</a:t>
-            </a:r>
-          </a:p>
-          <a:p>
-            <a:pPr algn="ctr">
-              <a:spcBef>
-                <a:spcPts val="200"/>
-              </a:spcBef>
+            <a:pPr>
+              <a:spcAft>
+                <a:spcPts val="800"/>
+              </a:spcAft>
             </a:pPr>
             <a:r>
-              <a:rPr sz="1000" b="0" i="0">
-                <a:solidFill>
-                  <a:srgbClr val="666666"/>
-                </a:solidFill>
-                <a:latin typeface="Calibri"/>
-              </a:rPr>
-              <a:t>Diagramas UML y de contexto</a:t>
-            </a:r>
-          </a:p>
-        </p:txBody>
-      </p:sp>
-      <p:sp>
-        <p:nvSpPr>
-          <p:cNvPr id="11" name="Rounded Rectangle 10"/>
-          <p:cNvSpPr/>
-          <p:nvPr/>
-        </p:nvSpPr>
-        <p:spPr>
-          <a:xfrm>
-            <a:off x="4283354" y="1591056"/>
-            <a:ext cx="3624986" cy="2331720"/>
-          </a:xfrm>
-          <a:prstGeom prst="roundRect">
-            <a:avLst>
-              <a:gd name="adj" fmla="val 12000"/>
-            </a:avLst>
-          </a:prstGeom>
-          <a:solidFill>
-            <a:srgbClr val="F2F2F2"/>
-          </a:solidFill>
-          <a:ln>
-            <a:noFill/>
-          </a:ln>
-        </p:spPr>
-        <p:style>
-          <a:lnRef idx="1">
-            <a:schemeClr val="accent1"/>
-          </a:lnRef>
-          <a:fillRef idx="3">
-            <a:schemeClr val="accent1"/>
-          </a:fillRef>
-          <a:effectRef idx="2">
-            <a:schemeClr val="accent1"/>
-          </a:effectRef>
-          <a:fontRef idx="minor">
-            <a:schemeClr val="lt1"/>
-          </a:fontRef>
-        </p:style>
-        <p:txBody>
-          <a:bodyPr rtlCol="0" anchor="ctr"/>
-          <a:lstStyle/>
-          <a:p>
-            <a:pPr algn="ctr"/>
-          </a:p>
-        </p:txBody>
-      </p:sp>
-      <p:sp>
-        <p:nvSpPr>
-          <p:cNvPr id="12" name="Rectangle 11"/>
-          <p:cNvSpPr/>
-          <p:nvPr/>
-        </p:nvSpPr>
-        <p:spPr>
-          <a:xfrm>
-            <a:off x="4283354" y="1591056"/>
-            <a:ext cx="3624986" cy="64008"/>
-          </a:xfrm>
-          <a:prstGeom prst="rect">
-            <a:avLst/>
-          </a:prstGeom>
-          <a:solidFill>
-            <a:srgbClr val="095292"/>
-          </a:solidFill>
-          <a:ln>
-            <a:noFill/>
-          </a:ln>
-        </p:spPr>
-        <p:style>
-          <a:lnRef idx="1">
-            <a:schemeClr val="accent1"/>
-          </a:lnRef>
-          <a:fillRef idx="3">
-            <a:schemeClr val="accent1"/>
-          </a:fillRef>
-          <a:effectRef idx="2">
-            <a:schemeClr val="accent1"/>
-          </a:effectRef>
-          <a:fontRef idx="minor">
-            <a:schemeClr val="lt1"/>
-          </a:fontRef>
-        </p:style>
-        <p:txBody>
-          <a:bodyPr rtlCol="0" anchor="ctr"/>
-          <a:lstStyle/>
-          <a:p>
-            <a:pPr algn="ctr"/>
-          </a:p>
-        </p:txBody>
-      </p:sp>
-      <p:sp>
-        <p:nvSpPr>
-          <p:cNvPr id="13" name="Rectangle 12"/>
-          <p:cNvSpPr/>
-          <p:nvPr/>
-        </p:nvSpPr>
-        <p:spPr>
-          <a:xfrm>
-            <a:off x="4283354" y="1655064"/>
-            <a:ext cx="3624986" cy="27432"/>
-          </a:xfrm>
-          <a:prstGeom prst="rect">
-            <a:avLst/>
-          </a:prstGeom>
-          <a:solidFill>
-            <a:srgbClr val="FFD000"/>
-          </a:solidFill>
-          <a:ln>
-            <a:noFill/>
-          </a:ln>
-        </p:spPr>
-        <p:style>
-          <a:lnRef idx="1">
-            <a:schemeClr val="accent1"/>
-          </a:lnRef>
-          <a:fillRef idx="3">
-            <a:schemeClr val="accent1"/>
-          </a:fillRef>
-          <a:effectRef idx="2">
-            <a:schemeClr val="accent1"/>
-          </a:effectRef>
-          <a:fontRef idx="minor">
-            <a:schemeClr val="lt1"/>
-          </a:fontRef>
-        </p:style>
-        <p:txBody>
-          <a:bodyPr rtlCol="0" anchor="ctr"/>
-          <a:lstStyle/>
-          <a:p>
-            <a:pPr algn="ctr"/>
-          </a:p>
-        </p:txBody>
-      </p:sp>
-      <p:pic>
-        <p:nvPicPr>
-          <p:cNvPr id="14" name="Picture 13" descr="google_docs.png"/>
-          <p:cNvPicPr>
-            <a:picLocks noChangeAspect="1"/>
-          </p:cNvPicPr>
-          <p:nvPr/>
-        </p:nvPicPr>
-        <p:blipFill>
-          <a:blip r:embed="rId3"/>
-          <a:stretch>
-            <a:fillRect/>
-          </a:stretch>
-        </p:blipFill>
-        <p:spPr>
-          <a:xfrm>
-            <a:off x="5469483" y="1847087"/>
-            <a:ext cx="1252728" cy="1252728"/>
-          </a:xfrm>
-          <a:prstGeom prst="rect">
-            <a:avLst/>
-          </a:prstGeom>
-        </p:spPr>
-      </p:pic>
-      <p:sp>
-        <p:nvSpPr>
-          <p:cNvPr id="15" name="TextBox 14"/>
-          <p:cNvSpPr txBox="1"/>
-          <p:nvPr/>
-        </p:nvSpPr>
-        <p:spPr>
-          <a:xfrm>
-            <a:off x="4356506" y="3191256"/>
-            <a:ext cx="3478682" cy="621792"/>
-          </a:xfrm>
-          <a:prstGeom prst="rect">
-            <a:avLst/>
-          </a:prstGeom>
-          <a:noFill/>
-        </p:spPr>
-        <p:txBody>
-          <a:bodyPr wrap="square" anchor="t"/>
-          <a:lstStyle/>
-          <a:p>
-            <a:pPr algn="ctr"/>
-            <a:r>
-              <a:rPr sz="1300" b="1" i="0">
-                <a:solidFill>
-                  <a:srgbClr val="095292"/>
-                </a:solidFill>
-                <a:latin typeface="Calibri"/>
-              </a:rPr>
-              <a:t>google docs</a:t>
-            </a:r>
-          </a:p>
-          <a:p>
-            <a:pPr algn="ctr">
-              <a:spcBef>
-                <a:spcPts val="200"/>
-              </a:spcBef>
+              <a:rPr sz="2000" b="0" i="0">
+                <a:solidFill>
+                  <a:srgbClr val="333333"/>
+                </a:solidFill>
+                <a:latin typeface="Calibri"/>
+              </a:rPr>
+              <a:t>–   El segundo eje de la auditoria es el lenguaje.</a:t>
+            </a:r>
+          </a:p>
+          <a:p>
+            <a:pPr>
+              <a:spcAft>
+                <a:spcPts val="800"/>
+              </a:spcAft>
             </a:pPr>
             <a:r>
-              <a:rPr sz="1000" b="0" i="0">
-                <a:solidFill>
-                  <a:srgbClr val="666666"/>
-                </a:solidFill>
-                <a:latin typeface="Calibri"/>
-              </a:rPr>
-              <a:t>Documentos del paquete de diseño</a:t>
-            </a:r>
-          </a:p>
-        </p:txBody>
-      </p:sp>
-      <p:sp>
-        <p:nvSpPr>
-          <p:cNvPr id="16" name="Rounded Rectangle 15"/>
-          <p:cNvSpPr/>
-          <p:nvPr/>
-        </p:nvSpPr>
-        <p:spPr>
-          <a:xfrm>
-            <a:off x="8109508" y="1591056"/>
-            <a:ext cx="3624986" cy="2331720"/>
-          </a:xfrm>
-          <a:prstGeom prst="roundRect">
-            <a:avLst>
-              <a:gd name="adj" fmla="val 12000"/>
-            </a:avLst>
-          </a:prstGeom>
-          <a:solidFill>
-            <a:srgbClr val="F2F2F2"/>
-          </a:solidFill>
-          <a:ln>
-            <a:noFill/>
-          </a:ln>
-        </p:spPr>
-        <p:style>
-          <a:lnRef idx="1">
-            <a:schemeClr val="accent1"/>
-          </a:lnRef>
-          <a:fillRef idx="3">
-            <a:schemeClr val="accent1"/>
-          </a:fillRef>
-          <a:effectRef idx="2">
-            <a:schemeClr val="accent1"/>
-          </a:effectRef>
-          <a:fontRef idx="minor">
-            <a:schemeClr val="lt1"/>
-          </a:fontRef>
-        </p:style>
-        <p:txBody>
-          <a:bodyPr rtlCol="0" anchor="ctr"/>
-          <a:lstStyle/>
-          <a:p>
-            <a:pPr algn="ctr"/>
-          </a:p>
-        </p:txBody>
-      </p:sp>
-      <p:sp>
-        <p:nvSpPr>
-          <p:cNvPr id="17" name="Rectangle 16"/>
-          <p:cNvSpPr/>
-          <p:nvPr/>
-        </p:nvSpPr>
-        <p:spPr>
-          <a:xfrm>
-            <a:off x="8109508" y="1591056"/>
-            <a:ext cx="3624986" cy="64008"/>
-          </a:xfrm>
-          <a:prstGeom prst="rect">
-            <a:avLst/>
-          </a:prstGeom>
-          <a:solidFill>
-            <a:srgbClr val="095292"/>
-          </a:solidFill>
-          <a:ln>
-            <a:noFill/>
-          </a:ln>
-        </p:spPr>
-        <p:style>
-          <a:lnRef idx="1">
-            <a:schemeClr val="accent1"/>
-          </a:lnRef>
-          <a:fillRef idx="3">
-            <a:schemeClr val="accent1"/>
-          </a:fillRef>
-          <a:effectRef idx="2">
-            <a:schemeClr val="accent1"/>
-          </a:effectRef>
-          <a:fontRef idx="minor">
-            <a:schemeClr val="lt1"/>
-          </a:fontRef>
-        </p:style>
-        <p:txBody>
-          <a:bodyPr rtlCol="0" anchor="ctr"/>
-          <a:lstStyle/>
-          <a:p>
-            <a:pPr algn="ctr"/>
-          </a:p>
-        </p:txBody>
-      </p:sp>
-      <p:sp>
-        <p:nvSpPr>
-          <p:cNvPr id="18" name="Rectangle 17"/>
-          <p:cNvSpPr/>
-          <p:nvPr/>
-        </p:nvSpPr>
-        <p:spPr>
-          <a:xfrm>
-            <a:off x="8109508" y="1655064"/>
-            <a:ext cx="3624986" cy="27432"/>
-          </a:xfrm>
-          <a:prstGeom prst="rect">
-            <a:avLst/>
-          </a:prstGeom>
-          <a:solidFill>
-            <a:srgbClr val="FFD000"/>
-          </a:solidFill>
-          <a:ln>
-            <a:noFill/>
-          </a:ln>
-        </p:spPr>
-        <p:style>
-          <a:lnRef idx="1">
-            <a:schemeClr val="accent1"/>
-          </a:lnRef>
-          <a:fillRef idx="3">
-            <a:schemeClr val="accent1"/>
-          </a:fillRef>
-          <a:effectRef idx="2">
-            <a:schemeClr val="accent1"/>
-          </a:effectRef>
-          <a:fontRef idx="minor">
-            <a:schemeClr val="lt1"/>
-          </a:fontRef>
-        </p:style>
-        <p:txBody>
-          <a:bodyPr rtlCol="0" anchor="ctr"/>
-          <a:lstStyle/>
-          <a:p>
-            <a:pPr algn="ctr"/>
-          </a:p>
-        </p:txBody>
-      </p:sp>
-      <p:pic>
-        <p:nvPicPr>
-          <p:cNvPr id="19" name="Picture 18" descr="examlab.png"/>
-          <p:cNvPicPr>
-            <a:picLocks noChangeAspect="1"/>
-          </p:cNvPicPr>
-          <p:nvPr/>
-        </p:nvPicPr>
-        <p:blipFill>
-          <a:blip r:embed="rId4"/>
-          <a:stretch>
-            <a:fillRect/>
-          </a:stretch>
-        </p:blipFill>
-        <p:spPr>
-          <a:xfrm>
-            <a:off x="9295638" y="1847087"/>
-            <a:ext cx="1252728" cy="1252728"/>
-          </a:xfrm>
-          <a:prstGeom prst="rect">
-            <a:avLst/>
-          </a:prstGeom>
-        </p:spPr>
-      </p:pic>
-      <p:sp>
-        <p:nvSpPr>
-          <p:cNvPr id="20" name="TextBox 19"/>
-          <p:cNvSpPr txBox="1"/>
-          <p:nvPr/>
-        </p:nvSpPr>
-        <p:spPr>
-          <a:xfrm>
-            <a:off x="8182660" y="3191256"/>
-            <a:ext cx="3478682" cy="621792"/>
-          </a:xfrm>
-          <a:prstGeom prst="rect">
-            <a:avLst/>
-          </a:prstGeom>
-          <a:noFill/>
-        </p:spPr>
-        <p:txBody>
-          <a:bodyPr wrap="square" anchor="t"/>
-          <a:lstStyle/>
-          <a:p>
-            <a:pPr algn="ctr"/>
-            <a:r>
-              <a:rPr sz="1300" b="1" i="0">
-                <a:solidFill>
-                  <a:srgbClr val="095292"/>
-                </a:solidFill>
-                <a:latin typeface="Calibri"/>
-              </a:rPr>
-              <a:t>la plataforma del curso</a:t>
-            </a:r>
-          </a:p>
-          <a:p>
-            <a:pPr algn="ctr">
-              <a:spcBef>
-                <a:spcPts val="200"/>
-              </a:spcBef>
+              <a:rPr sz="2000" b="0" i="0">
+                <a:solidFill>
+                  <a:srgbClr val="333333"/>
+                </a:solidFill>
+                <a:latin typeface="Calibri"/>
+              </a:rPr>
+              <a:t>–   Un sistema se diseña bien cuando existe un solo nombre para cada concepto y todos lo usan, desde la entrevista con la clinica hasta el nombre de la clase.</a:t>
+            </a:r>
+          </a:p>
+          <a:p>
+            <a:pPr>
+              <a:spcAft>
+                <a:spcPts val="800"/>
+              </a:spcAft>
             </a:pPr>
             <a:r>
-              <a:rPr sz="1000" b="0" i="0">
-                <a:solidFill>
-                  <a:srgbClr val="666666"/>
-                </a:solidFill>
-                <a:latin typeface="Calibri"/>
-              </a:rPr>
-              <a:t>Entrega del taller · en la fecha que indique el docente</a:t>
-            </a:r>
-          </a:p>
-        </p:txBody>
-      </p:sp>
-      <p:sp>
-        <p:nvSpPr>
-          <p:cNvPr id="21" name="TextBox 20"/>
+              <a:rPr sz="2000" b="0" i="0">
+                <a:solidFill>
+                  <a:srgbClr val="333333"/>
+                </a:solidFill>
+                <a:latin typeface="Calibri"/>
+              </a:rPr>
+              <a:t>–   Cuando en un documento se lee Dueño, en otro Propietario, en otro Cliente y en el mockup Responsable, no hay cuatro sinonimos: hay cuatro oportunidades de que alguien crea que son cuatro cosas distintas y termine con cuatro tablas.</a:t>
+            </a:r>
+          </a:p>
+          <a:p>
+            <a:pPr>
+              <a:spcAft>
+                <a:spcPts val="800"/>
+              </a:spcAft>
+            </a:pPr>
+            <a:r>
+              <a:rPr sz="2000" b="0" i="0">
+                <a:solidFill>
+                  <a:srgbClr val="333333"/>
+                </a:solidFill>
+                <a:latin typeface="Calibri"/>
+              </a:rPr>
+              <a:t>–   La solucion es un glosario canonico donde cada concepto de VetCare tiene un nombre unico, una definicion de una linea y una lista explicita de sinonimos prohibidos.</a:t>
+            </a:r>
+          </a:p>
+          <a:p>
+            <a:pPr>
+              <a:spcAft>
+                <a:spcPts val="800"/>
+              </a:spcAft>
+            </a:pPr>
+            <a:r>
+              <a:rPr sz="2000" b="0" i="0">
+                <a:solidFill>
+                  <a:srgbClr val="333333"/>
+                </a:solidFill>
+                <a:latin typeface="Calibri"/>
+              </a:rPr>
+              <a:t>–   Ese glosario manda sobre todos los artefactos: si el nombre canonico es Propietario, entonces el requisito, el caso de uso, el mockup, el diccionario de datos y la clase se llaman Propietario, sin excepciones y sin diminutivos.</a:t>
+            </a:r>
+          </a:p>
+        </p:txBody>
+      </p:sp>
+      <p:sp>
+        <p:nvSpPr>
+          <p:cNvPr id="6" name="TextBox 5"/>
           <p:cNvSpPr txBox="1"/>
           <p:nvPr/>
         </p:nvSpPr>
@@ -9651,7 +11363,7 @@
                 </a:solidFill>
                 <a:latin typeface="Calibri"/>
               </a:rPr>
-              <a:t>Taller PI — por que importa</a:t>
+              <a:t>El segundo eje de la auditoria es el lenguaje (2/2)</a:t>
             </a:r>
           </a:p>
         </p:txBody>
@@ -9690,25 +11402,7 @@
                 </a:solidFill>
                 <a:latin typeface="Calibri"/>
               </a:rPr>
-              <a:t>–   </a:t>
-            </a:r>
-            <a:r>
-              <a:rPr sz="2000" b="1" i="0">
-                <a:solidFill>
-                  <a:srgbClr val="333333"/>
-                </a:solidFill>
-                <a:latin typeface="Calibri"/>
-              </a:rPr>
-              <a:t>Por que importa al PI:</a:t>
-            </a:r>
-            <a:r>
-              <a:rPr sz="2000" b="0" i="0">
-                <a:solidFill>
-                  <a:srgbClr val="333333"/>
-                </a:solidFill>
-                <a:latin typeface="Calibri"/>
-              </a:rPr>
-              <a:t> el paquete de VetCare ya tiene requisitos, casos de uso y clases, pero nadie ha verificado que los tres describan el mismo sistema; sin esa verificacion los planos se contradicen y quien construya va a escoger al azar cual documento obedecer.</a:t>
+              <a:t>–   El glosario tambien separa parejas peligrosas: en Huellitas, Cita es la reserva de un horario futuro y Consulta es el registro de una atencion ya realizada, y confundirlas produce un modelo donde nadie sabe si se esta agendando o atendiendo.</a:t>
             </a:r>
           </a:p>
           <a:p>
@@ -9724,7 +11418,7 @@
                 </a:solidFill>
                 <a:latin typeface="Calibri"/>
               </a:rPr>
-              <a:t>–   Esta sesion produce evidencia propia: matriz, glosario, acta de revision y backlog, y por eso se califica igual que cualquier otra entrega.</a:t>
+              <a:t>–   La ganancia es inmediata para el compañero que solo cursa Programacion II, porque puede buscar una palabra en el documento y encontrarla en todos lados; y tambien para el que solo cursa Seminario</a:t>
             </a:r>
           </a:p>
           <a:p>
@@ -9740,7 +11434,7 @@
                 </a:solidFill>
                 <a:latin typeface="Calibri"/>
               </a:rPr>
-              <a:t>–   Lo que hoy quede ambiguo lo paga el compañero que solo cursa Programacion II, que recibira estos planos sin poder preguntarle nada a la clinica Huellitas.</a:t>
+              <a:t>–   Porque su documento de diseño se lee como un texto y no como un rompecabezas.</a:t>
             </a:r>
           </a:p>
         </p:txBody>
@@ -9921,7 +11615,7 @@
                 </a:solidFill>
                 <a:latin typeface="Calibri"/>
               </a:rPr>
-              <a:t>Taller PI — punto de partida</a:t>
+              <a:t>La revision entre pares se hace con reglas o no sirve</a:t>
             </a:r>
           </a:p>
         </p:txBody>
@@ -9954,13 +11648,13 @@
               </a:spcAft>
             </a:pPr>
             <a:r>
-              <a:rPr sz="2000" b="0" i="0">
+              <a:rPr sz="1900" b="0" i="0">
                 <a:solidFill>
                   <a:srgbClr val="333333"/>
                 </a:solidFill>
                 <a:latin typeface="Calibri"/>
               </a:rPr>
-              <a:t>–   Cada estudiante llega con tres artefactos de VetCare escritos en semanas distintas: el catalogo de RF y RNF, el diagrama con las especificaciones de casos de uso y el diagrama de clases con sus multiplicidades.</a:t>
+              <a:t>–   La revision entre pares se hace con reglas o no sirve.</a:t>
             </a:r>
           </a:p>
           <a:p>
@@ -9970,13 +11664,13 @@
               </a:spcAft>
             </a:pPr>
             <a:r>
-              <a:rPr sz="2000" b="0" i="0">
+              <a:rPr sz="1900" b="0" i="0">
                 <a:solidFill>
                   <a:srgbClr val="333333"/>
                 </a:solidFill>
                 <a:latin typeface="Calibri"/>
               </a:rPr>
-              <a:t>–   Nadie ha vuelto a abrir el catalogo de requisitos desde que se dibujaron las clases, y los nombres empezaron a moverse: donde el requisito dice Propietario, la clase dice Dueño y el mockup dice Cliente.</a:t>
+              <a:t>–   Se revisa el artefacto, nunca a la persona, y para eso se asignan tres roles: el autor, que entrega su paquete y permanece en silencio mientras lo revisan; el revisor</a:t>
             </a:r>
           </a:p>
           <a:p>
@@ -9986,13 +11680,93 @@
               </a:spcAft>
             </a:pPr>
             <a:r>
-              <a:rPr sz="2000" b="0" i="0">
+              <a:rPr sz="1900" b="0" i="0">
                 <a:solidFill>
                   <a:srgbClr val="333333"/>
                 </a:solidFill>
                 <a:latin typeface="Calibri"/>
               </a:rPr>
-              <a:t>–   Hay al menos un requisito que suena bonito en el papel, el RF-07 de recordatorio de cita, y no aparece en ningun caso de uso ni en ninguna clase del modelo.</a:t>
+              <a:t>–   Que recorre la rubrica punto por punto y solo reporta hechos observables; y el moderador, que controla el tiempo y escribe los hallazgos.</a:t>
+            </a:r>
+          </a:p>
+          <a:p>
+            <a:pPr>
+              <a:spcAft>
+                <a:spcPts val="800"/>
+              </a:spcAft>
+            </a:pPr>
+            <a:r>
+              <a:rPr sz="1900" b="0" i="0">
+                <a:solidFill>
+                  <a:srgbClr val="333333"/>
+                </a:solidFill>
+                <a:latin typeface="Calibri"/>
+              </a:rPr>
+              <a:t>–   Cada hallazgo se anota con ubicacion exacta, descripcion de la inconsistencia y severidad: bloqueante cuando impide construir el sistema, mayor cuando obliga a rehacer un artefacto completo, menor cuando es cosmetico.</a:t>
+            </a:r>
+          </a:p>
+          <a:p>
+            <a:pPr>
+              <a:spcAft>
+                <a:spcPts val="800"/>
+              </a:spcAft>
+            </a:pPr>
+            <a:r>
+              <a:rPr sz="1900" b="0" i="0">
+                <a:solidFill>
+                  <a:srgbClr val="333333"/>
+                </a:solidFill>
+                <a:latin typeface="Calibri"/>
+              </a:rPr>
+              <a:t>–   Prohibido discutir la solucion durante la revision, porque ahi es donde se van los cuarenta minutos y no se revisa nada.</a:t>
+            </a:r>
+          </a:p>
+          <a:p>
+            <a:pPr>
+              <a:spcAft>
+                <a:spcPts val="800"/>
+              </a:spcAft>
+            </a:pPr>
+            <a:r>
+              <a:rPr sz="1900" b="0" i="0">
+                <a:solidFill>
+                  <a:srgbClr val="333333"/>
+                </a:solidFill>
+                <a:latin typeface="Calibri"/>
+              </a:rPr>
+              <a:t>–   En VetCare, un hallazgo bien escrito se ve asi: en el diagrama de clases, la clase Consulta no tiene relacion con Veterinario, pero el flujo principal de CU-03 dice que toda consulta queda a nombre del veterinario que atendio; severidad mayor.</a:t>
+            </a:r>
+          </a:p>
+          <a:p>
+            <a:pPr>
+              <a:spcAft>
+                <a:spcPts val="800"/>
+              </a:spcAft>
+            </a:pPr>
+            <a:r>
+              <a:rPr sz="1900" b="0" i="0">
+                <a:solidFill>
+                  <a:srgbClr val="333333"/>
+                </a:solidFill>
+                <a:latin typeface="Calibri"/>
+              </a:rPr>
+              <a:t>–   Eso es util.</a:t>
+            </a:r>
+          </a:p>
+          <a:p>
+            <a:pPr>
+              <a:spcAft>
+                <a:spcPts val="800"/>
+              </a:spcAft>
+            </a:pPr>
+            <a:r>
+              <a:rPr sz="1900" b="0" i="0">
+                <a:solidFill>
+                  <a:srgbClr val="333333"/>
+                </a:solidFill>
+                <a:latin typeface="Calibri"/>
+              </a:rPr>
+              <a:t>–   En cambio esta mal hecho, no me gusta o le falta orden no es un hallazgo, es una opinion.</a:t>
             </a:r>
           </a:p>
         </p:txBody>

--- a/Seminario de Sistemas/Clases/Clase 11 - Avance del proyecto integrador/Presentacion.pptx
+++ b/Seminario de Sistemas/Clases/Clase 11 - Avance del proyecto integrador/Presentacion.pptx
@@ -25,6 +25,8 @@
     <p:sldId id="273" r:id="rId24"/>
     <p:sldId id="274" r:id="rId25"/>
     <p:sldId id="275" r:id="rId26"/>
+    <p:sldId id="276" r:id="rId27"/>
+    <p:sldId id="277" r:id="rId28"/>
   </p:sldIdLst>
   <p:sldSz cx="12191695" cy="6858000" type="screen4x3"/>
   <p:notesSz cx="6858000" cy="9144000"/>
@@ -3625,7 +3627,7 @@
                 </a:solidFill>
                 <a:latin typeface="Calibri"/>
               </a:rPr>
-              <a:t>Todo lo que se encuentra se convierte en backlog de deuda de diseño, no...</a:t>
+              <a:t>La revision entre pares se hace con reglas o no sirve (2/2)</a:t>
             </a:r>
           </a:p>
         </p:txBody>
@@ -3664,7 +3666,7 @@
                 </a:solidFill>
                 <a:latin typeface="Calibri"/>
               </a:rPr>
-              <a:t>–   Todo lo que se encuentra se convierte en backlog de deuda de diseño, no en angustia.</a:t>
+              <a:t>–   Prohibido discutir la solucion durante la revision, porque ahi es donde se van los cuarenta minutos y no se revisa nada.</a:t>
             </a:r>
           </a:p>
           <a:p>
@@ -3680,7 +3682,7 @@
                 </a:solidFill>
                 <a:latin typeface="Calibri"/>
               </a:rPr>
-              <a:t>–   Cada hallazgo pasa a ser un item con responsable, severidad, criterio de cierre verificable y un estado que puede ser aceptado, rechazado con justificacion escrita o aplazado por acuerdo.</a:t>
+              <a:t>–   En VetCare, un hallazgo bien escrito se ve asi: en el diagrama de clases, la clase Consulta no tiene relacion con Veterinario, pero el flujo principal de CU-03 dice que toda consulta queda a nombre del veterinario que atendio; severidad mayor.</a:t>
             </a:r>
           </a:p>
           <a:p>
@@ -3696,87 +3698,7 @@
                 </a:solidFill>
                 <a:latin typeface="Calibri"/>
               </a:rPr>
-              <a:t>–   Rechazar un hallazgo es legitimo si se argumenta, y aprender a hacerlo es parte del oficio del analista.</a:t>
-            </a:r>
-          </a:p>
-          <a:p>
-            <a:pPr>
-              <a:spcAft>
-                <a:spcPts val="800"/>
-              </a:spcAft>
-            </a:pPr>
-            <a:r>
-              <a:rPr sz="2000" b="0" i="0">
-                <a:solidFill>
-                  <a:srgbClr val="333333"/>
-                </a:solidFill>
-                <a:latin typeface="Calibri"/>
-              </a:rPr>
-              <a:t>–   Sobre ese backlog se define lo que en la industria se llama definicion de terminado del paquete de diseño de VetCare: catalogo de RF y RNF numerado y sin huerfanos</a:t>
-            </a:r>
-          </a:p>
-          <a:p>
-            <a:pPr>
-              <a:spcAft>
-                <a:spcPts val="800"/>
-              </a:spcAft>
-            </a:pPr>
-            <a:r>
-              <a:rPr sz="2000" b="0" i="0">
-                <a:solidFill>
-                  <a:srgbClr val="333333"/>
-                </a:solidFill>
-                <a:latin typeface="Calibri"/>
-              </a:rPr>
-              <a:t>–   Diagrama y especificaciones de casos de uso, diagrama de clases con multiplicidades, mockups de las pantallas criticas y diccionario de datos.</a:t>
-            </a:r>
-          </a:p>
-          <a:p>
-            <a:pPr>
-              <a:spcAft>
-                <a:spcPts val="800"/>
-              </a:spcAft>
-            </a:pPr>
-            <a:r>
-              <a:rPr sz="2000" b="0" i="0">
-                <a:solidFill>
-                  <a:srgbClr val="333333"/>
-                </a:solidFill>
-                <a:latin typeface="Calibri"/>
-              </a:rPr>
-              <a:t>–   Aqui es donde los tres casos de matricula se hacen visibles y conviene decirlo en voz alta en el aula: el que cursa las dos materias entrega estos planos aca y el codigo alla</a:t>
-            </a:r>
-          </a:p>
-          <a:p>
-            <a:pPr>
-              <a:spcAft>
-                <a:spcPts val="800"/>
-              </a:spcAft>
-            </a:pPr>
-            <a:r>
-              <a:rPr sz="2000" b="0" i="0">
-                <a:solidFill>
-                  <a:srgbClr val="333333"/>
-                </a:solidFill>
-                <a:latin typeface="Calibri"/>
-              </a:rPr>
-              <a:t>–   El que solo cursa Programacion II recibe este paquete y todo lo que hoy quede ambiguo lo va a pagar en horas de reproceso; y el que solo cursa Seminario cierra con este mismo documento mas el prototipo navegable</a:t>
-            </a:r>
-          </a:p>
-          <a:p>
-            <a:pPr>
-              <a:spcAft>
-                <a:spcPts val="800"/>
-              </a:spcAft>
-            </a:pPr>
-            <a:r>
-              <a:rPr sz="2000" b="0" i="0">
-                <a:solidFill>
-                  <a:srgbClr val="333333"/>
-                </a:solidFill>
-                <a:latin typeface="Calibri"/>
-              </a:rPr>
-              <a:t>–   Que es una ruta completa y valida, no una version reducida del curso.</a:t>
+              <a:t>–   En cambio esta mal hecho, no me gusta o le falta orden no es un hallazgo, es una opinion.</a:t>
             </a:r>
           </a:p>
         </p:txBody>
@@ -3957,141 +3879,21 @@
                 </a:solidFill>
                 <a:latin typeface="Calibri"/>
               </a:rPr>
-              <a:t>Auditoria cruzada de VetCare: la matriz que delata las contradicciones</a:t>
-            </a:r>
-          </a:p>
-        </p:txBody>
-      </p:sp>
-      <p:sp>
-        <p:nvSpPr>
-          <p:cNvPr id="5" name="Rounded Rectangle 4"/>
-          <p:cNvSpPr/>
-          <p:nvPr/>
-        </p:nvSpPr>
-        <p:spPr>
-          <a:xfrm>
-            <a:off x="457200" y="1261872"/>
-            <a:ext cx="11277295" cy="4773168"/>
-          </a:xfrm>
-          <a:prstGeom prst="roundRect">
-            <a:avLst>
-              <a:gd name="adj" fmla="val 12000"/>
-            </a:avLst>
-          </a:prstGeom>
-          <a:solidFill>
-            <a:srgbClr val="1E2A38"/>
-          </a:solidFill>
-          <a:ln>
-            <a:noFill/>
-          </a:ln>
-        </p:spPr>
-        <p:style>
-          <a:lnRef idx="1">
-            <a:schemeClr val="accent1"/>
-          </a:lnRef>
-          <a:fillRef idx="3">
-            <a:schemeClr val="accent1"/>
-          </a:fillRef>
-          <a:effectRef idx="2">
-            <a:schemeClr val="accent1"/>
-          </a:effectRef>
-          <a:fontRef idx="minor">
-            <a:schemeClr val="lt1"/>
-          </a:fontRef>
-        </p:style>
-        <p:txBody>
-          <a:bodyPr rtlCol="0" anchor="ctr"/>
-          <a:lstStyle/>
-          <a:p>
-            <a:pPr algn="ctr"/>
-          </a:p>
-        </p:txBody>
-      </p:sp>
-      <p:sp>
-        <p:nvSpPr>
-          <p:cNvPr id="6" name="Rectangle 5"/>
-          <p:cNvSpPr/>
-          <p:nvPr/>
-        </p:nvSpPr>
-        <p:spPr>
-          <a:xfrm>
-            <a:off x="457200" y="1261872"/>
-            <a:ext cx="11277295" cy="320040"/>
-          </a:xfrm>
-          <a:prstGeom prst="rect">
-            <a:avLst/>
-          </a:prstGeom>
-          <a:solidFill>
-            <a:srgbClr val="095292"/>
-          </a:solidFill>
-          <a:ln>
-            <a:noFill/>
-          </a:ln>
-        </p:spPr>
-        <p:style>
-          <a:lnRef idx="1">
-            <a:schemeClr val="accent1"/>
-          </a:lnRef>
-          <a:fillRef idx="3">
-            <a:schemeClr val="accent1"/>
-          </a:fillRef>
-          <a:effectRef idx="2">
-            <a:schemeClr val="accent1"/>
-          </a:effectRef>
-          <a:fontRef idx="minor">
-            <a:schemeClr val="lt1"/>
-          </a:fontRef>
-        </p:style>
-        <p:txBody>
-          <a:bodyPr rtlCol="0" anchor="ctr"/>
-          <a:lstStyle/>
-          <a:p>
-            <a:pPr algn="ctr"/>
-          </a:p>
-        </p:txBody>
-      </p:sp>
-      <p:sp>
-        <p:nvSpPr>
-          <p:cNvPr id="7" name="TextBox 6"/>
+              <a:t>Todo lo que se encuentra se convierte en backlog de deuda de diseño, no... (1/2)</a:t>
+            </a:r>
+          </a:p>
+        </p:txBody>
+      </p:sp>
+      <p:sp>
+        <p:nvSpPr>
+          <p:cNvPr id="5" name="TextBox 4"/>
           <p:cNvSpPr txBox="1"/>
           <p:nvPr/>
         </p:nvSpPr>
         <p:spPr>
           <a:xfrm>
-            <a:off x="685800" y="1307592"/>
-            <a:ext cx="10820095" cy="256032"/>
-          </a:xfrm>
-          <a:prstGeom prst="rect">
-            <a:avLst/>
-          </a:prstGeom>
-          <a:noFill/>
-        </p:spPr>
-        <p:txBody>
-          <a:bodyPr wrap="square" anchor="ctr"/>
-          <a:lstStyle/>
-          <a:p>
-            <a:r>
-              <a:rPr sz="1000" b="1" i="0">
-                <a:solidFill>
-                  <a:srgbClr val="269CCB"/>
-                </a:solidFill>
-                <a:latin typeface="Calibri"/>
-              </a:rPr>
-              <a:t>● ● ●</a:t>
-            </a:r>
-          </a:p>
-        </p:txBody>
-      </p:sp>
-      <p:sp>
-        <p:nvSpPr>
-          <p:cNvPr id="8" name="TextBox 7"/>
-          <p:cNvSpPr txBox="1"/>
-          <p:nvPr/>
-        </p:nvSpPr>
-        <p:spPr>
-          <a:xfrm>
-            <a:off x="777240" y="1719072"/>
-            <a:ext cx="10637215" cy="4133087"/>
+            <a:off x="457200" y="1170432"/>
+            <a:ext cx="11277295" cy="5230368"/>
           </a:xfrm>
           <a:prstGeom prst="rect">
             <a:avLst/>
@@ -4106,267 +3908,72 @@
           <a:p>
             <a:pPr>
               <a:spcAft>
-                <a:spcPts val="400"/>
+                <a:spcPts val="800"/>
               </a:spcAft>
             </a:pPr>
             <a:r>
-              <a:rPr sz="1400" b="0" i="0">
-                <a:solidFill>
-                  <a:srgbClr val="FFFFFF"/>
-                </a:solidFill>
-                <a:latin typeface="Calibri"/>
-              </a:rPr>
-              <a:t>| RF     | Caso de uso                  | Clases implicadas      | Mockup | Estado      |</a:t>
+              <a:rPr sz="2000" b="0" i="0">
+                <a:solidFill>
+                  <a:srgbClr val="333333"/>
+                </a:solidFill>
+                <a:latin typeface="Calibri"/>
+              </a:rPr>
+              <a:t>–   Cada hallazgo pasa a ser un item con responsable, severidad, criterio de cierre verificable y un estado que puede ser aceptado, rechazado con justificacion escrita o aplazado por acuerdo.</a:t>
             </a:r>
           </a:p>
           <a:p>
             <a:pPr>
               <a:spcAft>
-                <a:spcPts val="400"/>
+                <a:spcPts val="800"/>
               </a:spcAft>
             </a:pPr>
             <a:r>
-              <a:rPr sz="1400" b="0" i="0">
-                <a:solidFill>
-                  <a:srgbClr val="FFFFFF"/>
-                </a:solidFill>
-                <a:latin typeface="Calibri"/>
-              </a:rPr>
-              <a:t>|--------|------------------------------|------------------------|--------|-------------|</a:t>
+              <a:rPr sz="2000" b="0" i="0">
+                <a:solidFill>
+                  <a:srgbClr val="333333"/>
+                </a:solidFill>
+                <a:latin typeface="Calibri"/>
+              </a:rPr>
+              <a:t>–   Rechazar un hallazgo es legitimo si se argumenta, y aprender a hacerlo es parte del oficio del analista.</a:t>
             </a:r>
           </a:p>
           <a:p>
             <a:pPr>
               <a:spcAft>
-                <a:spcPts val="400"/>
+                <a:spcPts val="800"/>
               </a:spcAft>
             </a:pPr>
             <a:r>
-              <a:rPr sz="1400" b="0" i="0">
-                <a:solidFill>
-                  <a:srgbClr val="FFFFFF"/>
-                </a:solidFill>
-                <a:latin typeface="Calibri"/>
-              </a:rPr>
-              <a:t>| RF-02  | CU-00 Registrar propietario  | Propietario            | M-01   | OK          |</a:t>
+              <a:rPr sz="2000" b="0" i="0">
+                <a:solidFill>
+                  <a:srgbClr val="333333"/>
+                </a:solidFill>
+                <a:latin typeface="Calibri"/>
+              </a:rPr>
+              <a:t>–   Sobre ese backlog se define lo que en la industria se llama definicion de terminado del paquete de diseño de VetCare: catalogo de RF y RNF numerado y sin huerfanos</a:t>
             </a:r>
           </a:p>
           <a:p>
             <a:pPr>
               <a:spcAft>
-                <a:spcPts val="400"/>
+                <a:spcPts val="800"/>
               </a:spcAft>
             </a:pPr>
             <a:r>
-              <a:rPr sz="1400" b="0" i="0">
-                <a:solidFill>
-                  <a:srgbClr val="FFFFFF"/>
-                </a:solidFill>
-                <a:latin typeface="Calibri"/>
-              </a:rPr>
-              <a:t>| RF-03  | CU-01 Registrar mascota      | Mascota, Propietario   | M-02   | OK          |</a:t>
-            </a:r>
-          </a:p>
-          <a:p>
-            <a:pPr>
-              <a:spcAft>
-                <a:spcPts val="400"/>
-              </a:spcAft>
-            </a:pPr>
-            <a:r>
-              <a:rPr sz="1400" b="0" i="0">
-                <a:solidFill>
-                  <a:srgbClr val="FFFFFF"/>
-                </a:solidFill>
-                <a:latin typeface="Calibri"/>
-              </a:rPr>
-              <a:t>| RF-05  | CU-02 Buscar expediente      | Mascota, Consulta      | M-03   | OK          |</a:t>
-            </a:r>
-          </a:p>
-          <a:p>
-            <a:pPr>
-              <a:spcAft>
-                <a:spcPts val="400"/>
-              </a:spcAft>
-            </a:pPr>
-            <a:r>
-              <a:rPr sz="1400" b="0" i="0">
-                <a:solidFill>
-                  <a:srgbClr val="FFFFFF"/>
-                </a:solidFill>
-                <a:latin typeface="Calibri"/>
-              </a:rPr>
-              <a:t>| RF-06  | CU-03 Registrar consulta     | Consulta, ???          | M-05   | HALLAZGO    |</a:t>
-            </a:r>
-          </a:p>
-          <a:p>
-            <a:pPr>
-              <a:spcAft>
-                <a:spcPts val="400"/>
-              </a:spcAft>
-            </a:pPr>
-            <a:r>
-              <a:rPr sz="1400" b="0" i="0">
-                <a:solidFill>
-                  <a:srgbClr val="FFFFFF"/>
-                </a:solidFill>
-                <a:latin typeface="Calibri"/>
-              </a:rPr>
-              <a:t>| RF-07  | (no existe)                  | (no existe)            | --     | HUERFANO    |</a:t>
-            </a:r>
-          </a:p>
-          <a:p>
-            <a:pPr>
-              <a:spcAft>
-                <a:spcPts val="400"/>
-              </a:spcAft>
-            </a:pPr>
-            <a:r>
-              <a:rPr sz="1400" b="0" i="0">
-                <a:solidFill>
-                  <a:srgbClr val="FFFFFF"/>
-                </a:solidFill>
-                <a:latin typeface="Calibri"/>
-              </a:rPr>
-              <a:t>| (sin)  | CU-04 Agendar cita           | Cita, Veterinario      | M-04   | SIN ORIGEN  |</a:t>
-            </a:r>
-          </a:p>
-          <a:p>
-            <a:pPr>
-              <a:spcAft>
-                <a:spcPts val="400"/>
-              </a:spcAft>
-            </a:pPr>
-            <a:r>
-              <a:rPr sz="1400" b="0" i="0">
-                <a:solidFill>
-                  <a:srgbClr val="FFFFFF"/>
-                </a:solidFill>
-                <a:latin typeface="Calibri"/>
-              </a:rPr>
-              <a:t/>
-            </a:r>
-          </a:p>
-          <a:p>
-            <a:pPr>
-              <a:spcAft>
-                <a:spcPts val="400"/>
-              </a:spcAft>
-            </a:pPr>
-            <a:r>
-              <a:rPr sz="1400" b="0" i="0">
-                <a:solidFill>
-                  <a:srgbClr val="FFFFFF"/>
-                </a:solidFill>
-                <a:latin typeface="Calibri"/>
-              </a:rPr>
-              <a:t>H-01 (mayor): CU-03 exige registrar quien atendio, pero Consulta no se relaciona con Veterinario.</a:t>
-            </a:r>
-          </a:p>
-          <a:p>
-            <a:pPr>
-              <a:spcAft>
-                <a:spcPts val="400"/>
-              </a:spcAft>
-            </a:pPr>
-            <a:r>
-              <a:rPr sz="1400" b="0" i="0">
-                <a:solidFill>
-                  <a:srgbClr val="FFFFFF"/>
-                </a:solidFill>
-                <a:latin typeface="Calibri"/>
-              </a:rPr>
-              <a:t>H-02 (mayor): la fila de CU-04 quedo sin RF; debe ligarse a RF-08 Agendar cita o eliminarse el CU.</a:t>
-            </a:r>
-          </a:p>
-          <a:p>
-            <a:pPr>
-              <a:spcAft>
-                <a:spcPts val="400"/>
-              </a:spcAft>
-            </a:pPr>
-            <a:r>
-              <a:rPr sz="1400" b="0" i="0">
-                <a:solidFill>
-                  <a:srgbClr val="FFFFFF"/>
-                </a:solidFill>
-                <a:latin typeface="Calibri"/>
-              </a:rPr>
-              <a:t>H-03 (bloqueante): la clase Mascota guarda dueño como texto en lugar de asociarse a Propietario.</a:t>
-            </a:r>
-          </a:p>
-          <a:p>
-            <a:pPr>
-              <a:spcAft>
-                <a:spcPts val="400"/>
-              </a:spcAft>
-            </a:pPr>
-            <a:r>
-              <a:rPr sz="1400" b="0" i="0">
-                <a:solidFill>
-                  <a:srgbClr val="FFFFFF"/>
-                </a:solidFill>
-                <a:latin typeface="Calibri"/>
-              </a:rPr>
-              <a:t>H-04 (menor): el RNF-02 de 3 segundos no aparece en ninguna postcondicion de CU-02.</a:t>
-            </a:r>
-          </a:p>
-          <a:p>
-            <a:pPr>
-              <a:spcAft>
-                <a:spcPts val="400"/>
-              </a:spcAft>
-            </a:pPr>
-            <a:r>
-              <a:rPr sz="1400" b="0" i="0">
-                <a:solidFill>
-                  <a:srgbClr val="FFFFFF"/>
-                </a:solidFill>
-                <a:latin typeface="Calibri"/>
-              </a:rPr>
-              <a:t>Glosario canonico: Propietario (prohibido Dueño, Cliente, Responsable) | Cita != Consulta.</a:t>
-            </a:r>
-          </a:p>
-        </p:txBody>
-      </p:sp>
-      <p:sp>
-        <p:nvSpPr>
-          <p:cNvPr id="9" name="TextBox 8"/>
-          <p:cNvSpPr txBox="1"/>
-          <p:nvPr/>
-        </p:nvSpPr>
-        <p:spPr>
-          <a:xfrm>
-            <a:off x="457200" y="6080760"/>
-            <a:ext cx="11277295" cy="320040"/>
-          </a:xfrm>
-          <a:prstGeom prst="rect">
-            <a:avLst/>
-          </a:prstGeom>
-          <a:noFill/>
-        </p:spPr>
-        <p:txBody>
-          <a:bodyPr wrap="square">
-            <a:spAutoFit/>
-          </a:bodyPr>
-          <a:lstStyle/>
-          <a:p>
-            <a:pPr algn="ctr"/>
-            <a:r>
-              <a:rPr sz="1200" b="0" i="1">
-                <a:solidFill>
-                  <a:srgbClr val="666666"/>
-                </a:solidFill>
-                <a:latin typeface="Calibri"/>
-              </a:rPr>
-              <a:t>Una tabla de cuatro columnas encuentra en veinte minutos las contradicciones que un equipo no ve en tres semanas.</a:t>
-            </a:r>
-          </a:p>
-        </p:txBody>
-      </p:sp>
-      <p:sp>
-        <p:nvSpPr>
-          <p:cNvPr id="10" name="TextBox 9"/>
+              <a:rPr sz="2000" b="0" i="0">
+                <a:solidFill>
+                  <a:srgbClr val="333333"/>
+                </a:solidFill>
+                <a:latin typeface="Calibri"/>
+              </a:rPr>
+              <a:t>–   Diagrama y especificaciones de casos de uso, diagrama de clases con multiplicidades, mockups de las pantallas criticas y diccionario de datos.</a:t>
+            </a:r>
+          </a:p>
+        </p:txBody>
+      </p:sp>
+      <p:sp>
+        <p:nvSpPr>
+          <p:cNvPr id="6" name="TextBox 5"/>
           <p:cNvSpPr txBox="1"/>
           <p:nvPr/>
         </p:nvSpPr>
@@ -4540,7 +4147,7 @@
                 </a:solidFill>
                 <a:latin typeface="Calibri"/>
               </a:rPr>
-              <a:t>Demo del dia</a:t>
+              <a:t>Todo lo que se encuentra se convierte en backlog de deuda de diseño, no... (2/2)</a:t>
             </a:r>
           </a:p>
         </p:txBody>
@@ -4579,25 +4186,7 @@
                 </a:solidFill>
                 <a:latin typeface="Calibri"/>
               </a:rPr>
-              <a:t>–   </a:t>
-            </a:r>
-            <a:r>
-              <a:rPr sz="2000" b="1" i="0">
-                <a:solidFill>
-                  <a:srgbClr val="333333"/>
-                </a:solidFill>
-                <a:latin typeface="Calibri"/>
-              </a:rPr>
-              <a:t>Herramienta:</a:t>
-            </a:r>
-            <a:r>
-              <a:rPr sz="2000" b="0" i="0">
-                <a:solidFill>
-                  <a:srgbClr val="333333"/>
-                </a:solidFill>
-                <a:latin typeface="Calibri"/>
-              </a:rPr>
-              <a:t> Google Docs · draw.io</a:t>
+              <a:t>–   Aqui es donde los tres casos de matricula se hacen visibles y conviene decirlo en voz alta en el aula: el que cursa las dos materias entrega estos planos aca y el codigo alla</a:t>
             </a:r>
           </a:p>
           <a:p>
@@ -4613,25 +4202,7 @@
                 </a:solidFill>
                 <a:latin typeface="Calibri"/>
               </a:rPr>
-              <a:t>–   </a:t>
-            </a:r>
-            <a:r>
-              <a:rPr sz="2000" b="1" i="0">
-                <a:solidFill>
-                  <a:srgbClr val="333333"/>
-                </a:solidFill>
-                <a:latin typeface="Calibri"/>
-              </a:rPr>
-              <a:t>Demo:</a:t>
-            </a:r>
-            <a:r>
-              <a:rPr sz="2000" b="0" i="0">
-                <a:solidFill>
-                  <a:srgbClr val="333333"/>
-                </a:solidFill>
-                <a:latin typeface="Calibri"/>
-              </a:rPr>
-              <a:t> El docente proyecta el paquete de un equipo ficticio de VetCare y encuentra en vivo tres inconsistencias: un RF sin caso de uso, una clase llamada Dueño que en el catalogo de requisitos se llama Propietario, y un caso de uso que ninguna clase puede soportar.</a:t>
+              <a:t>–   El que solo cursa Programacion II recibe este paquete y todo lo que hoy quede ambiguo lo va a pagar en horas de reproceso; y el que solo cursa Seminario cierra con este mismo documento mas el prototipo navegable</a:t>
             </a:r>
           </a:p>
           <a:p>
@@ -4647,7 +4218,7 @@
                 </a:solidFill>
                 <a:latin typeface="Calibri"/>
               </a:rPr>
-              <a:t>–   Mismo dominio VetCare — no otro ejemplo. Aqui se diseña, no se programa.</a:t>
+              <a:t>–   Que es una ruta completa y valida, no una version reducida del curso.</a:t>
             </a:r>
           </a:p>
         </p:txBody>
@@ -4722,7 +4293,7 @@
         <p:spPr>
           <a:xfrm>
             <a:off x="0" y="0"/>
-            <a:ext cx="12191695" cy="1170432"/>
+            <a:ext cx="12191695" cy="960120"/>
           </a:xfrm>
           <a:prstGeom prst="rect">
             <a:avLst/>
@@ -4764,7 +4335,7 @@
         </p:nvSpPr>
         <p:spPr>
           <a:xfrm>
-            <a:off x="0" y="1170432"/>
+            <a:off x="0" y="960120"/>
             <a:ext cx="12191695" cy="41148"/>
           </a:xfrm>
           <a:prstGeom prst="rect">
@@ -4808,7 +4379,7 @@
         <p:spPr>
           <a:xfrm>
             <a:off x="457200" y="164592"/>
-            <a:ext cx="11277295" cy="384048"/>
+            <a:ext cx="11277295" cy="502920"/>
           </a:xfrm>
           <a:prstGeom prst="rect">
             <a:avLst/>
@@ -4828,55 +4399,21 @@
                 </a:solidFill>
                 <a:latin typeface="Calibri"/>
               </a:rPr>
-              <a:t>Herramientas de hoy</a:t>
-            </a:r>
-          </a:p>
-        </p:txBody>
-      </p:sp>
-      <p:sp>
-        <p:nvSpPr>
-          <p:cNvPr id="5" name="TextBox 4"/>
-          <p:cNvSpPr txBox="1"/>
-          <p:nvPr/>
-        </p:nvSpPr>
-        <p:spPr>
-          <a:xfrm>
-            <a:off x="457200" y="566928"/>
-            <a:ext cx="11277295" cy="411480"/>
-          </a:xfrm>
-          <a:prstGeom prst="rect">
-            <a:avLst/>
-          </a:prstGeom>
-          <a:noFill/>
-        </p:spPr>
-        <p:txBody>
-          <a:bodyPr wrap="square">
-            <a:spAutoFit/>
-          </a:bodyPr>
-          <a:lstStyle/>
-          <a:p>
-            <a:r>
-              <a:rPr sz="1400" b="0" i="0">
-                <a:solidFill>
-                  <a:srgbClr val="B8D8EE"/>
-                </a:solidFill>
-                <a:latin typeface="Calibri"/>
-              </a:rPr>
-              <a:t>Gratis · funcionan en el navegador</a:t>
-            </a:r>
-          </a:p>
-        </p:txBody>
-      </p:sp>
-      <p:sp>
-        <p:nvSpPr>
-          <p:cNvPr id="6" name="Rounded Rectangle 5"/>
+              <a:t>Auditoria cruzada de VetCare: la matriz que delata las contradicciones</a:t>
+            </a:r>
+          </a:p>
+        </p:txBody>
+      </p:sp>
+      <p:sp>
+        <p:nvSpPr>
+          <p:cNvPr id="5" name="Rounded Rectangle 4"/>
           <p:cNvSpPr/>
           <p:nvPr/>
         </p:nvSpPr>
         <p:spPr>
           <a:xfrm>
-            <a:off x="457200" y="1591056"/>
-            <a:ext cx="3624986" cy="2331720"/>
+            <a:off x="457200" y="1261872"/>
+            <a:ext cx="11277295" cy="4773168"/>
           </a:xfrm>
           <a:prstGeom prst="roundRect">
             <a:avLst>
@@ -4884,7 +4421,7 @@
             </a:avLst>
           </a:prstGeom>
           <a:solidFill>
-            <a:srgbClr val="F2F2F2"/>
+            <a:srgbClr val="1E2A38"/>
           </a:solidFill>
           <a:ln>
             <a:noFill/>
@@ -4914,14 +4451,14 @@
       </p:sp>
       <p:sp>
         <p:nvSpPr>
-          <p:cNvPr id="7" name="Rectangle 6"/>
+          <p:cNvPr id="6" name="Rectangle 5"/>
           <p:cNvSpPr/>
           <p:nvPr/>
         </p:nvSpPr>
         <p:spPr>
           <a:xfrm>
-            <a:off x="457200" y="1591056"/>
-            <a:ext cx="3624986" cy="64008"/>
+            <a:off x="457200" y="1261872"/>
+            <a:ext cx="11277295" cy="320040"/>
           </a:xfrm>
           <a:prstGeom prst="rect">
             <a:avLst/>
@@ -4957,531 +4494,321 @@
       </p:sp>
       <p:sp>
         <p:nvSpPr>
-          <p:cNvPr id="8" name="Rectangle 7"/>
-          <p:cNvSpPr/>
-          <p:nvPr/>
-        </p:nvSpPr>
-        <p:spPr>
-          <a:xfrm>
-            <a:off x="457200" y="1655064"/>
-            <a:ext cx="3624986" cy="27432"/>
-          </a:xfrm>
-          <a:prstGeom prst="rect">
-            <a:avLst/>
-          </a:prstGeom>
-          <a:solidFill>
-            <a:srgbClr val="FFD000"/>
-          </a:solidFill>
-          <a:ln>
-            <a:noFill/>
-          </a:ln>
-        </p:spPr>
-        <p:style>
-          <a:lnRef idx="1">
-            <a:schemeClr val="accent1"/>
-          </a:lnRef>
-          <a:fillRef idx="3">
-            <a:schemeClr val="accent1"/>
-          </a:fillRef>
-          <a:effectRef idx="2">
-            <a:schemeClr val="accent1"/>
-          </a:effectRef>
-          <a:fontRef idx="minor">
-            <a:schemeClr val="lt1"/>
-          </a:fontRef>
-        </p:style>
-        <p:txBody>
-          <a:bodyPr rtlCol="0" anchor="ctr"/>
+          <p:cNvPr id="7" name="TextBox 6"/>
+          <p:cNvSpPr txBox="1"/>
+          <p:nvPr/>
+        </p:nvSpPr>
+        <p:spPr>
+          <a:xfrm>
+            <a:off x="685800" y="1307592"/>
+            <a:ext cx="10820095" cy="256032"/>
+          </a:xfrm>
+          <a:prstGeom prst="rect">
+            <a:avLst/>
+          </a:prstGeom>
+          <a:noFill/>
+        </p:spPr>
+        <p:txBody>
+          <a:bodyPr wrap="square" anchor="ctr"/>
+          <a:lstStyle/>
+          <a:p>
+            <a:r>
+              <a:rPr sz="1000" b="1" i="0">
+                <a:solidFill>
+                  <a:srgbClr val="269CCB"/>
+                </a:solidFill>
+                <a:latin typeface="Calibri"/>
+              </a:rPr>
+              <a:t>● ● ●</a:t>
+            </a:r>
+          </a:p>
+        </p:txBody>
+      </p:sp>
+      <p:sp>
+        <p:nvSpPr>
+          <p:cNvPr id="8" name="TextBox 7"/>
+          <p:cNvSpPr txBox="1"/>
+          <p:nvPr/>
+        </p:nvSpPr>
+        <p:spPr>
+          <a:xfrm>
+            <a:off x="777240" y="1719072"/>
+            <a:ext cx="10637215" cy="4133087"/>
+          </a:xfrm>
+          <a:prstGeom prst="rect">
+            <a:avLst/>
+          </a:prstGeom>
+          <a:noFill/>
+        </p:spPr>
+        <p:txBody>
+          <a:bodyPr wrap="square">
+            <a:spAutoFit/>
+          </a:bodyPr>
+          <a:lstStyle/>
+          <a:p>
+            <a:pPr>
+              <a:spcAft>
+                <a:spcPts val="400"/>
+              </a:spcAft>
+            </a:pPr>
+            <a:r>
+              <a:rPr sz="1400" b="0" i="0">
+                <a:solidFill>
+                  <a:srgbClr val="FFFFFF"/>
+                </a:solidFill>
+                <a:latin typeface="Calibri"/>
+              </a:rPr>
+              <a:t>| RF     | Caso de uso                  | Clases implicadas      | Mockup | Estado      |</a:t>
+            </a:r>
+          </a:p>
+          <a:p>
+            <a:pPr>
+              <a:spcAft>
+                <a:spcPts val="400"/>
+              </a:spcAft>
+            </a:pPr>
+            <a:r>
+              <a:rPr sz="1400" b="0" i="0">
+                <a:solidFill>
+                  <a:srgbClr val="FFFFFF"/>
+                </a:solidFill>
+                <a:latin typeface="Calibri"/>
+              </a:rPr>
+              <a:t>|--------|------------------------------|------------------------|--------|-------------|</a:t>
+            </a:r>
+          </a:p>
+          <a:p>
+            <a:pPr>
+              <a:spcAft>
+                <a:spcPts val="400"/>
+              </a:spcAft>
+            </a:pPr>
+            <a:r>
+              <a:rPr sz="1400" b="0" i="0">
+                <a:solidFill>
+                  <a:srgbClr val="FFFFFF"/>
+                </a:solidFill>
+                <a:latin typeface="Calibri"/>
+              </a:rPr>
+              <a:t>| RF-02  | CU-00 Registrar propietario  | Propietario            | M-01   | OK          |</a:t>
+            </a:r>
+          </a:p>
+          <a:p>
+            <a:pPr>
+              <a:spcAft>
+                <a:spcPts val="400"/>
+              </a:spcAft>
+            </a:pPr>
+            <a:r>
+              <a:rPr sz="1400" b="0" i="0">
+                <a:solidFill>
+                  <a:srgbClr val="FFFFFF"/>
+                </a:solidFill>
+                <a:latin typeface="Calibri"/>
+              </a:rPr>
+              <a:t>| RF-03  | CU-01 Registrar mascota      | Mascota, Propietario   | M-02   | OK          |</a:t>
+            </a:r>
+          </a:p>
+          <a:p>
+            <a:pPr>
+              <a:spcAft>
+                <a:spcPts val="400"/>
+              </a:spcAft>
+            </a:pPr>
+            <a:r>
+              <a:rPr sz="1400" b="0" i="0">
+                <a:solidFill>
+                  <a:srgbClr val="FFFFFF"/>
+                </a:solidFill>
+                <a:latin typeface="Calibri"/>
+              </a:rPr>
+              <a:t>| RF-05  | CU-02 Buscar expediente      | Mascota, Consulta      | M-03   | OK          |</a:t>
+            </a:r>
+          </a:p>
+          <a:p>
+            <a:pPr>
+              <a:spcAft>
+                <a:spcPts val="400"/>
+              </a:spcAft>
+            </a:pPr>
+            <a:r>
+              <a:rPr sz="1400" b="0" i="0">
+                <a:solidFill>
+                  <a:srgbClr val="FFFFFF"/>
+                </a:solidFill>
+                <a:latin typeface="Calibri"/>
+              </a:rPr>
+              <a:t>| RF-06  | CU-03 Registrar consulta     | Consulta, ???          | M-05   | HALLAZGO    |</a:t>
+            </a:r>
+          </a:p>
+          <a:p>
+            <a:pPr>
+              <a:spcAft>
+                <a:spcPts val="400"/>
+              </a:spcAft>
+            </a:pPr>
+            <a:r>
+              <a:rPr sz="1400" b="0" i="0">
+                <a:solidFill>
+                  <a:srgbClr val="FFFFFF"/>
+                </a:solidFill>
+                <a:latin typeface="Calibri"/>
+              </a:rPr>
+              <a:t>| RF-07  | (no existe)                  | (no existe)            | --     | HUERFANO    |</a:t>
+            </a:r>
+          </a:p>
+          <a:p>
+            <a:pPr>
+              <a:spcAft>
+                <a:spcPts val="400"/>
+              </a:spcAft>
+            </a:pPr>
+            <a:r>
+              <a:rPr sz="1400" b="0" i="0">
+                <a:solidFill>
+                  <a:srgbClr val="FFFFFF"/>
+                </a:solidFill>
+                <a:latin typeface="Calibri"/>
+              </a:rPr>
+              <a:t>| (sin)  | CU-04 Agendar cita           | Cita, Veterinario      | M-04   | SIN ORIGEN  |</a:t>
+            </a:r>
+          </a:p>
+          <a:p>
+            <a:pPr>
+              <a:spcAft>
+                <a:spcPts val="400"/>
+              </a:spcAft>
+            </a:pPr>
+            <a:r>
+              <a:rPr sz="1400" b="0" i="0">
+                <a:solidFill>
+                  <a:srgbClr val="FFFFFF"/>
+                </a:solidFill>
+                <a:latin typeface="Calibri"/>
+              </a:rPr>
+              <a:t/>
+            </a:r>
+          </a:p>
+          <a:p>
+            <a:pPr>
+              <a:spcAft>
+                <a:spcPts val="400"/>
+              </a:spcAft>
+            </a:pPr>
+            <a:r>
+              <a:rPr sz="1400" b="0" i="0">
+                <a:solidFill>
+                  <a:srgbClr val="FFFFFF"/>
+                </a:solidFill>
+                <a:latin typeface="Calibri"/>
+              </a:rPr>
+              <a:t>H-01 (mayor): CU-03 exige registrar quien atendio, pero Consulta no se relaciona con Veterinario.</a:t>
+            </a:r>
+          </a:p>
+          <a:p>
+            <a:pPr>
+              <a:spcAft>
+                <a:spcPts val="400"/>
+              </a:spcAft>
+            </a:pPr>
+            <a:r>
+              <a:rPr sz="1400" b="0" i="0">
+                <a:solidFill>
+                  <a:srgbClr val="FFFFFF"/>
+                </a:solidFill>
+                <a:latin typeface="Calibri"/>
+              </a:rPr>
+              <a:t>H-02 (mayor): la fila de CU-04 quedo sin RF; debe ligarse a RF-08 Agendar cita o eliminarse el CU.</a:t>
+            </a:r>
+          </a:p>
+          <a:p>
+            <a:pPr>
+              <a:spcAft>
+                <a:spcPts val="400"/>
+              </a:spcAft>
+            </a:pPr>
+            <a:r>
+              <a:rPr sz="1400" b="0" i="0">
+                <a:solidFill>
+                  <a:srgbClr val="FFFFFF"/>
+                </a:solidFill>
+                <a:latin typeface="Calibri"/>
+              </a:rPr>
+              <a:t>H-03 (bloqueante): la clase Mascota guarda dueño como texto en lugar de asociarse a Propietario.</a:t>
+            </a:r>
+          </a:p>
+          <a:p>
+            <a:pPr>
+              <a:spcAft>
+                <a:spcPts val="400"/>
+              </a:spcAft>
+            </a:pPr>
+            <a:r>
+              <a:rPr sz="1400" b="0" i="0">
+                <a:solidFill>
+                  <a:srgbClr val="FFFFFF"/>
+                </a:solidFill>
+                <a:latin typeface="Calibri"/>
+              </a:rPr>
+              <a:t>H-04 (menor): el RNF-02 de 3 segundos no aparece en ninguna postcondicion de CU-02.</a:t>
+            </a:r>
+          </a:p>
+          <a:p>
+            <a:pPr>
+              <a:spcAft>
+                <a:spcPts val="400"/>
+              </a:spcAft>
+            </a:pPr>
+            <a:r>
+              <a:rPr sz="1400" b="0" i="0">
+                <a:solidFill>
+                  <a:srgbClr val="FFFFFF"/>
+                </a:solidFill>
+                <a:latin typeface="Calibri"/>
+              </a:rPr>
+              <a:t>Glosario canonico: Propietario (prohibido Dueño, Cliente, Responsable) | Cita != Consulta.</a:t>
+            </a:r>
+          </a:p>
+        </p:txBody>
+      </p:sp>
+      <p:sp>
+        <p:nvSpPr>
+          <p:cNvPr id="9" name="TextBox 8"/>
+          <p:cNvSpPr txBox="1"/>
+          <p:nvPr/>
+        </p:nvSpPr>
+        <p:spPr>
+          <a:xfrm>
+            <a:off x="457200" y="6080760"/>
+            <a:ext cx="11277295" cy="320040"/>
+          </a:xfrm>
+          <a:prstGeom prst="rect">
+            <a:avLst/>
+          </a:prstGeom>
+          <a:noFill/>
+        </p:spPr>
+        <p:txBody>
+          <a:bodyPr wrap="square">
+            <a:spAutoFit/>
+          </a:bodyPr>
           <a:lstStyle/>
           <a:p>
             <a:pPr algn="ctr"/>
-          </a:p>
-        </p:txBody>
-      </p:sp>
-      <p:pic>
-        <p:nvPicPr>
-          <p:cNvPr id="9" name="Picture 8" descr="drawio.png"/>
-          <p:cNvPicPr>
-            <a:picLocks noChangeAspect="1"/>
-          </p:cNvPicPr>
-          <p:nvPr/>
-        </p:nvPicPr>
-        <p:blipFill>
-          <a:blip r:embed="rId2"/>
-          <a:stretch>
-            <a:fillRect/>
-          </a:stretch>
-        </p:blipFill>
-        <p:spPr>
-          <a:xfrm>
-            <a:off x="1643329" y="1847087"/>
-            <a:ext cx="1252728" cy="1252728"/>
-          </a:xfrm>
-          <a:prstGeom prst="rect">
-            <a:avLst/>
-          </a:prstGeom>
-        </p:spPr>
-      </p:pic>
+            <a:r>
+              <a:rPr sz="1200" b="0" i="1">
+                <a:solidFill>
+                  <a:srgbClr val="666666"/>
+                </a:solidFill>
+                <a:latin typeface="Calibri"/>
+              </a:rPr>
+              <a:t>Una tabla de cuatro columnas encuentra en veinte minutos las contradicciones que un equipo no ve en tres semanas.</a:t>
+            </a:r>
+          </a:p>
+        </p:txBody>
+      </p:sp>
       <p:sp>
         <p:nvSpPr>
           <p:cNvPr id="10" name="TextBox 9"/>
-          <p:cNvSpPr txBox="1"/>
-          <p:nvPr/>
-        </p:nvSpPr>
-        <p:spPr>
-          <a:xfrm>
-            <a:off x="530352" y="3191256"/>
-            <a:ext cx="3478682" cy="621792"/>
-          </a:xfrm>
-          <a:prstGeom prst="rect">
-            <a:avLst/>
-          </a:prstGeom>
-          <a:noFill/>
-        </p:spPr>
-        <p:txBody>
-          <a:bodyPr wrap="square" anchor="t"/>
-          <a:lstStyle/>
-          <a:p>
-            <a:pPr algn="ctr"/>
-            <a:r>
-              <a:rPr sz="1300" b="1" i="0">
-                <a:solidFill>
-                  <a:srgbClr val="095292"/>
-                </a:solidFill>
-                <a:latin typeface="Calibri"/>
-              </a:rPr>
-              <a:t>Draw.Io</a:t>
-            </a:r>
-          </a:p>
-          <a:p>
-            <a:pPr algn="ctr">
-              <a:spcBef>
-                <a:spcPts val="200"/>
-              </a:spcBef>
-            </a:pPr>
-            <a:r>
-              <a:rPr sz="1000" b="0" i="0">
-                <a:solidFill>
-                  <a:srgbClr val="666666"/>
-                </a:solidFill>
-                <a:latin typeface="Calibri"/>
-              </a:rPr>
-              <a:t>Diagramas UML y de contexto</a:t>
-            </a:r>
-          </a:p>
-        </p:txBody>
-      </p:sp>
-      <p:sp>
-        <p:nvSpPr>
-          <p:cNvPr id="11" name="Rounded Rectangle 10"/>
-          <p:cNvSpPr/>
-          <p:nvPr/>
-        </p:nvSpPr>
-        <p:spPr>
-          <a:xfrm>
-            <a:off x="4283354" y="1591056"/>
-            <a:ext cx="3624986" cy="2331720"/>
-          </a:xfrm>
-          <a:prstGeom prst="roundRect">
-            <a:avLst>
-              <a:gd name="adj" fmla="val 12000"/>
-            </a:avLst>
-          </a:prstGeom>
-          <a:solidFill>
-            <a:srgbClr val="F2F2F2"/>
-          </a:solidFill>
-          <a:ln>
-            <a:noFill/>
-          </a:ln>
-        </p:spPr>
-        <p:style>
-          <a:lnRef idx="1">
-            <a:schemeClr val="accent1"/>
-          </a:lnRef>
-          <a:fillRef idx="3">
-            <a:schemeClr val="accent1"/>
-          </a:fillRef>
-          <a:effectRef idx="2">
-            <a:schemeClr val="accent1"/>
-          </a:effectRef>
-          <a:fontRef idx="minor">
-            <a:schemeClr val="lt1"/>
-          </a:fontRef>
-        </p:style>
-        <p:txBody>
-          <a:bodyPr rtlCol="0" anchor="ctr"/>
-          <a:lstStyle/>
-          <a:p>
-            <a:pPr algn="ctr"/>
-          </a:p>
-        </p:txBody>
-      </p:sp>
-      <p:sp>
-        <p:nvSpPr>
-          <p:cNvPr id="12" name="Rectangle 11"/>
-          <p:cNvSpPr/>
-          <p:nvPr/>
-        </p:nvSpPr>
-        <p:spPr>
-          <a:xfrm>
-            <a:off x="4283354" y="1591056"/>
-            <a:ext cx="3624986" cy="64008"/>
-          </a:xfrm>
-          <a:prstGeom prst="rect">
-            <a:avLst/>
-          </a:prstGeom>
-          <a:solidFill>
-            <a:srgbClr val="095292"/>
-          </a:solidFill>
-          <a:ln>
-            <a:noFill/>
-          </a:ln>
-        </p:spPr>
-        <p:style>
-          <a:lnRef idx="1">
-            <a:schemeClr val="accent1"/>
-          </a:lnRef>
-          <a:fillRef idx="3">
-            <a:schemeClr val="accent1"/>
-          </a:fillRef>
-          <a:effectRef idx="2">
-            <a:schemeClr val="accent1"/>
-          </a:effectRef>
-          <a:fontRef idx="minor">
-            <a:schemeClr val="lt1"/>
-          </a:fontRef>
-        </p:style>
-        <p:txBody>
-          <a:bodyPr rtlCol="0" anchor="ctr"/>
-          <a:lstStyle/>
-          <a:p>
-            <a:pPr algn="ctr"/>
-          </a:p>
-        </p:txBody>
-      </p:sp>
-      <p:sp>
-        <p:nvSpPr>
-          <p:cNvPr id="13" name="Rectangle 12"/>
-          <p:cNvSpPr/>
-          <p:nvPr/>
-        </p:nvSpPr>
-        <p:spPr>
-          <a:xfrm>
-            <a:off x="4283354" y="1655064"/>
-            <a:ext cx="3624986" cy="27432"/>
-          </a:xfrm>
-          <a:prstGeom prst="rect">
-            <a:avLst/>
-          </a:prstGeom>
-          <a:solidFill>
-            <a:srgbClr val="FFD000"/>
-          </a:solidFill>
-          <a:ln>
-            <a:noFill/>
-          </a:ln>
-        </p:spPr>
-        <p:style>
-          <a:lnRef idx="1">
-            <a:schemeClr val="accent1"/>
-          </a:lnRef>
-          <a:fillRef idx="3">
-            <a:schemeClr val="accent1"/>
-          </a:fillRef>
-          <a:effectRef idx="2">
-            <a:schemeClr val="accent1"/>
-          </a:effectRef>
-          <a:fontRef idx="minor">
-            <a:schemeClr val="lt1"/>
-          </a:fontRef>
-        </p:style>
-        <p:txBody>
-          <a:bodyPr rtlCol="0" anchor="ctr"/>
-          <a:lstStyle/>
-          <a:p>
-            <a:pPr algn="ctr"/>
-          </a:p>
-        </p:txBody>
-      </p:sp>
-      <p:pic>
-        <p:nvPicPr>
-          <p:cNvPr id="14" name="Picture 13" descr="google_docs.png"/>
-          <p:cNvPicPr>
-            <a:picLocks noChangeAspect="1"/>
-          </p:cNvPicPr>
-          <p:nvPr/>
-        </p:nvPicPr>
-        <p:blipFill>
-          <a:blip r:embed="rId3"/>
-          <a:stretch>
-            <a:fillRect/>
-          </a:stretch>
-        </p:blipFill>
-        <p:spPr>
-          <a:xfrm>
-            <a:off x="5469483" y="1847087"/>
-            <a:ext cx="1252728" cy="1252728"/>
-          </a:xfrm>
-          <a:prstGeom prst="rect">
-            <a:avLst/>
-          </a:prstGeom>
-        </p:spPr>
-      </p:pic>
-      <p:sp>
-        <p:nvSpPr>
-          <p:cNvPr id="15" name="TextBox 14"/>
-          <p:cNvSpPr txBox="1"/>
-          <p:nvPr/>
-        </p:nvSpPr>
-        <p:spPr>
-          <a:xfrm>
-            <a:off x="4356506" y="3191256"/>
-            <a:ext cx="3478682" cy="621792"/>
-          </a:xfrm>
-          <a:prstGeom prst="rect">
-            <a:avLst/>
-          </a:prstGeom>
-          <a:noFill/>
-        </p:spPr>
-        <p:txBody>
-          <a:bodyPr wrap="square" anchor="t"/>
-          <a:lstStyle/>
-          <a:p>
-            <a:pPr algn="ctr"/>
-            <a:r>
-              <a:rPr sz="1300" b="1" i="0">
-                <a:solidFill>
-                  <a:srgbClr val="095292"/>
-                </a:solidFill>
-                <a:latin typeface="Calibri"/>
-              </a:rPr>
-              <a:t>google docs</a:t>
-            </a:r>
-          </a:p>
-          <a:p>
-            <a:pPr algn="ctr">
-              <a:spcBef>
-                <a:spcPts val="200"/>
-              </a:spcBef>
-            </a:pPr>
-            <a:r>
-              <a:rPr sz="1000" b="0" i="0">
-                <a:solidFill>
-                  <a:srgbClr val="666666"/>
-                </a:solidFill>
-                <a:latin typeface="Calibri"/>
-              </a:rPr>
-              <a:t>Documentos del paquete de diseño</a:t>
-            </a:r>
-          </a:p>
-        </p:txBody>
-      </p:sp>
-      <p:sp>
-        <p:nvSpPr>
-          <p:cNvPr id="16" name="Rounded Rectangle 15"/>
-          <p:cNvSpPr/>
-          <p:nvPr/>
-        </p:nvSpPr>
-        <p:spPr>
-          <a:xfrm>
-            <a:off x="8109508" y="1591056"/>
-            <a:ext cx="3624986" cy="2331720"/>
-          </a:xfrm>
-          <a:prstGeom prst="roundRect">
-            <a:avLst>
-              <a:gd name="adj" fmla="val 12000"/>
-            </a:avLst>
-          </a:prstGeom>
-          <a:solidFill>
-            <a:srgbClr val="F2F2F2"/>
-          </a:solidFill>
-          <a:ln>
-            <a:noFill/>
-          </a:ln>
-        </p:spPr>
-        <p:style>
-          <a:lnRef idx="1">
-            <a:schemeClr val="accent1"/>
-          </a:lnRef>
-          <a:fillRef idx="3">
-            <a:schemeClr val="accent1"/>
-          </a:fillRef>
-          <a:effectRef idx="2">
-            <a:schemeClr val="accent1"/>
-          </a:effectRef>
-          <a:fontRef idx="minor">
-            <a:schemeClr val="lt1"/>
-          </a:fontRef>
-        </p:style>
-        <p:txBody>
-          <a:bodyPr rtlCol="0" anchor="ctr"/>
-          <a:lstStyle/>
-          <a:p>
-            <a:pPr algn="ctr"/>
-          </a:p>
-        </p:txBody>
-      </p:sp>
-      <p:sp>
-        <p:nvSpPr>
-          <p:cNvPr id="17" name="Rectangle 16"/>
-          <p:cNvSpPr/>
-          <p:nvPr/>
-        </p:nvSpPr>
-        <p:spPr>
-          <a:xfrm>
-            <a:off x="8109508" y="1591056"/>
-            <a:ext cx="3624986" cy="64008"/>
-          </a:xfrm>
-          <a:prstGeom prst="rect">
-            <a:avLst/>
-          </a:prstGeom>
-          <a:solidFill>
-            <a:srgbClr val="095292"/>
-          </a:solidFill>
-          <a:ln>
-            <a:noFill/>
-          </a:ln>
-        </p:spPr>
-        <p:style>
-          <a:lnRef idx="1">
-            <a:schemeClr val="accent1"/>
-          </a:lnRef>
-          <a:fillRef idx="3">
-            <a:schemeClr val="accent1"/>
-          </a:fillRef>
-          <a:effectRef idx="2">
-            <a:schemeClr val="accent1"/>
-          </a:effectRef>
-          <a:fontRef idx="minor">
-            <a:schemeClr val="lt1"/>
-          </a:fontRef>
-        </p:style>
-        <p:txBody>
-          <a:bodyPr rtlCol="0" anchor="ctr"/>
-          <a:lstStyle/>
-          <a:p>
-            <a:pPr algn="ctr"/>
-          </a:p>
-        </p:txBody>
-      </p:sp>
-      <p:sp>
-        <p:nvSpPr>
-          <p:cNvPr id="18" name="Rectangle 17"/>
-          <p:cNvSpPr/>
-          <p:nvPr/>
-        </p:nvSpPr>
-        <p:spPr>
-          <a:xfrm>
-            <a:off x="8109508" y="1655064"/>
-            <a:ext cx="3624986" cy="27432"/>
-          </a:xfrm>
-          <a:prstGeom prst="rect">
-            <a:avLst/>
-          </a:prstGeom>
-          <a:solidFill>
-            <a:srgbClr val="FFD000"/>
-          </a:solidFill>
-          <a:ln>
-            <a:noFill/>
-          </a:ln>
-        </p:spPr>
-        <p:style>
-          <a:lnRef idx="1">
-            <a:schemeClr val="accent1"/>
-          </a:lnRef>
-          <a:fillRef idx="3">
-            <a:schemeClr val="accent1"/>
-          </a:fillRef>
-          <a:effectRef idx="2">
-            <a:schemeClr val="accent1"/>
-          </a:effectRef>
-          <a:fontRef idx="minor">
-            <a:schemeClr val="lt1"/>
-          </a:fontRef>
-        </p:style>
-        <p:txBody>
-          <a:bodyPr rtlCol="0" anchor="ctr"/>
-          <a:lstStyle/>
-          <a:p>
-            <a:pPr algn="ctr"/>
-          </a:p>
-        </p:txBody>
-      </p:sp>
-      <p:pic>
-        <p:nvPicPr>
-          <p:cNvPr id="19" name="Picture 18" descr="examlab.png"/>
-          <p:cNvPicPr>
-            <a:picLocks noChangeAspect="1"/>
-          </p:cNvPicPr>
-          <p:nvPr/>
-        </p:nvPicPr>
-        <p:blipFill>
-          <a:blip r:embed="rId4"/>
-          <a:stretch>
-            <a:fillRect/>
-          </a:stretch>
-        </p:blipFill>
-        <p:spPr>
-          <a:xfrm>
-            <a:off x="9295638" y="1847087"/>
-            <a:ext cx="1252728" cy="1252728"/>
-          </a:xfrm>
-          <a:prstGeom prst="rect">
-            <a:avLst/>
-          </a:prstGeom>
-        </p:spPr>
-      </p:pic>
-      <p:sp>
-        <p:nvSpPr>
-          <p:cNvPr id="20" name="TextBox 19"/>
-          <p:cNvSpPr txBox="1"/>
-          <p:nvPr/>
-        </p:nvSpPr>
-        <p:spPr>
-          <a:xfrm>
-            <a:off x="8182660" y="3191256"/>
-            <a:ext cx="3478682" cy="621792"/>
-          </a:xfrm>
-          <a:prstGeom prst="rect">
-            <a:avLst/>
-          </a:prstGeom>
-          <a:noFill/>
-        </p:spPr>
-        <p:txBody>
-          <a:bodyPr wrap="square" anchor="t"/>
-          <a:lstStyle/>
-          <a:p>
-            <a:pPr algn="ctr"/>
-            <a:r>
-              <a:rPr sz="1300" b="1" i="0">
-                <a:solidFill>
-                  <a:srgbClr val="095292"/>
-                </a:solidFill>
-                <a:latin typeface="Calibri"/>
-              </a:rPr>
-              <a:t>la plataforma del curso</a:t>
-            </a:r>
-          </a:p>
-          <a:p>
-            <a:pPr algn="ctr">
-              <a:spcBef>
-                <a:spcPts val="200"/>
-              </a:spcBef>
-            </a:pPr>
-            <a:r>
-              <a:rPr sz="1000" b="0" i="0">
-                <a:solidFill>
-                  <a:srgbClr val="666666"/>
-                </a:solidFill>
-                <a:latin typeface="Calibri"/>
-              </a:rPr>
-              <a:t>Entrega del taller · en la fecha que indique el docente</a:t>
-            </a:r>
-          </a:p>
-        </p:txBody>
-      </p:sp>
-      <p:sp>
-        <p:nvSpPr>
-          <p:cNvPr id="21" name="TextBox 20"/>
           <p:cNvSpPr txBox="1"/>
           <p:nvPr/>
         </p:nvSpPr>
@@ -5655,7 +4982,7 @@
                 </a:solidFill>
                 <a:latin typeface="Calibri"/>
               </a:rPr>
-              <a:t>Taller PI — por que importa</a:t>
+              <a:t>Demo del dia</a:t>
             </a:r>
           </a:p>
         </p:txBody>
@@ -5703,7 +5030,7 @@
                 </a:solidFill>
                 <a:latin typeface="Calibri"/>
               </a:rPr>
-              <a:t>Por que importa al PI:</a:t>
+              <a:t>Herramienta:</a:t>
             </a:r>
             <a:r>
               <a:rPr sz="2000" b="0" i="0">
@@ -5712,7 +5039,7 @@
                 </a:solidFill>
                 <a:latin typeface="Calibri"/>
               </a:rPr>
-              <a:t> el paquete de VetCare ya tiene requisitos, casos de uso y clases, pero nadie ha verificado que los tres describan el mismo sistema; sin esa verificacion los planos se contradicen y quien construya va a escoger al azar cual documento obedecer.</a:t>
+              <a:t> Google Docs · draw.io</a:t>
             </a:r>
           </a:p>
           <a:p>
@@ -5728,7 +5055,25 @@
                 </a:solidFill>
                 <a:latin typeface="Calibri"/>
               </a:rPr>
-              <a:t>–   Esta sesion produce evidencia propia: matriz, glosario, acta de revision y backlog, y por eso se califica igual que cualquier otra entrega.</a:t>
+              <a:t>–   </a:t>
+            </a:r>
+            <a:r>
+              <a:rPr sz="2000" b="1" i="0">
+                <a:solidFill>
+                  <a:srgbClr val="333333"/>
+                </a:solidFill>
+                <a:latin typeface="Calibri"/>
+              </a:rPr>
+              <a:t>Demo:</a:t>
+            </a:r>
+            <a:r>
+              <a:rPr sz="2000" b="0" i="0">
+                <a:solidFill>
+                  <a:srgbClr val="333333"/>
+                </a:solidFill>
+                <a:latin typeface="Calibri"/>
+              </a:rPr>
+              <a:t> El docente proyecta el paquete de un equipo ficticio de VetCare y encuentra en vivo tres inconsistencias: un RF sin caso de uso, una clase llamada Dueño que en el catalogo de requisitos se llama Propietario, y un caso de uso que ninguna clase puede soportar.</a:t>
             </a:r>
           </a:p>
           <a:p>
@@ -5744,7 +5089,7 @@
                 </a:solidFill>
                 <a:latin typeface="Calibri"/>
               </a:rPr>
-              <a:t>–   Lo que hoy quede ambiguo lo paga el compañero que solo cursa Programacion II, que recibira estos planos sin poder preguntarle nada a la clinica Huellitas.</a:t>
+              <a:t>–   Mismo dominio VetCare — no otro ejemplo. Aqui se diseña, no se programa.</a:t>
             </a:r>
           </a:p>
         </p:txBody>
@@ -5819,7 +5164,7 @@
         <p:spPr>
           <a:xfrm>
             <a:off x="0" y="0"/>
-            <a:ext cx="12191695" cy="960120"/>
+            <a:ext cx="12191695" cy="1170432"/>
           </a:xfrm>
           <a:prstGeom prst="rect">
             <a:avLst/>
@@ -5861,7 +5206,7 @@
         </p:nvSpPr>
         <p:spPr>
           <a:xfrm>
-            <a:off x="0" y="960120"/>
+            <a:off x="0" y="1170432"/>
             <a:ext cx="12191695" cy="41148"/>
           </a:xfrm>
           <a:prstGeom prst="rect">
@@ -5905,7 +5250,7 @@
         <p:spPr>
           <a:xfrm>
             <a:off x="457200" y="164592"/>
-            <a:ext cx="11277295" cy="502920"/>
+            <a:ext cx="11277295" cy="384048"/>
           </a:xfrm>
           <a:prstGeom prst="rect">
             <a:avLst/>
@@ -5925,7 +5270,7 @@
                 </a:solidFill>
                 <a:latin typeface="Calibri"/>
               </a:rPr>
-              <a:t>Taller PI — punto de partida</a:t>
+              <a:t>Herramientas de hoy</a:t>
             </a:r>
           </a:p>
         </p:txBody>
@@ -5938,8 +5283,8 @@
         </p:nvSpPr>
         <p:spPr>
           <a:xfrm>
-            <a:off x="457200" y="1170432"/>
-            <a:ext cx="11277295" cy="5230368"/>
+            <a:off x="457200" y="566928"/>
+            <a:ext cx="11277295" cy="411480"/>
           </a:xfrm>
           <a:prstGeom prst="rect">
             <a:avLst/>
@@ -5952,58 +5297,633 @@
           </a:bodyPr>
           <a:lstStyle/>
           <a:p>
-            <a:pPr>
-              <a:spcAft>
-                <a:spcPts val="800"/>
-              </a:spcAft>
+            <a:r>
+              <a:rPr sz="1400" b="0" i="0">
+                <a:solidFill>
+                  <a:srgbClr val="B8D8EE"/>
+                </a:solidFill>
+                <a:latin typeface="Calibri"/>
+              </a:rPr>
+              <a:t>Gratis · funcionan en el navegador</a:t>
+            </a:r>
+          </a:p>
+        </p:txBody>
+      </p:sp>
+      <p:sp>
+        <p:nvSpPr>
+          <p:cNvPr id="6" name="Rounded Rectangle 5"/>
+          <p:cNvSpPr/>
+          <p:nvPr/>
+        </p:nvSpPr>
+        <p:spPr>
+          <a:xfrm>
+            <a:off x="457200" y="1591056"/>
+            <a:ext cx="3624986" cy="2331720"/>
+          </a:xfrm>
+          <a:prstGeom prst="roundRect">
+            <a:avLst>
+              <a:gd name="adj" fmla="val 12000"/>
+            </a:avLst>
+          </a:prstGeom>
+          <a:solidFill>
+            <a:srgbClr val="F2F2F2"/>
+          </a:solidFill>
+          <a:ln>
+            <a:noFill/>
+          </a:ln>
+        </p:spPr>
+        <p:style>
+          <a:lnRef idx="1">
+            <a:schemeClr val="accent1"/>
+          </a:lnRef>
+          <a:fillRef idx="3">
+            <a:schemeClr val="accent1"/>
+          </a:fillRef>
+          <a:effectRef idx="2">
+            <a:schemeClr val="accent1"/>
+          </a:effectRef>
+          <a:fontRef idx="minor">
+            <a:schemeClr val="lt1"/>
+          </a:fontRef>
+        </p:style>
+        <p:txBody>
+          <a:bodyPr rtlCol="0" anchor="ctr"/>
+          <a:lstStyle/>
+          <a:p>
+            <a:pPr algn="ctr"/>
+          </a:p>
+        </p:txBody>
+      </p:sp>
+      <p:sp>
+        <p:nvSpPr>
+          <p:cNvPr id="7" name="Rectangle 6"/>
+          <p:cNvSpPr/>
+          <p:nvPr/>
+        </p:nvSpPr>
+        <p:spPr>
+          <a:xfrm>
+            <a:off x="457200" y="1591056"/>
+            <a:ext cx="3624986" cy="64008"/>
+          </a:xfrm>
+          <a:prstGeom prst="rect">
+            <a:avLst/>
+          </a:prstGeom>
+          <a:solidFill>
+            <a:srgbClr val="095292"/>
+          </a:solidFill>
+          <a:ln>
+            <a:noFill/>
+          </a:ln>
+        </p:spPr>
+        <p:style>
+          <a:lnRef idx="1">
+            <a:schemeClr val="accent1"/>
+          </a:lnRef>
+          <a:fillRef idx="3">
+            <a:schemeClr val="accent1"/>
+          </a:fillRef>
+          <a:effectRef idx="2">
+            <a:schemeClr val="accent1"/>
+          </a:effectRef>
+          <a:fontRef idx="minor">
+            <a:schemeClr val="lt1"/>
+          </a:fontRef>
+        </p:style>
+        <p:txBody>
+          <a:bodyPr rtlCol="0" anchor="ctr"/>
+          <a:lstStyle/>
+          <a:p>
+            <a:pPr algn="ctr"/>
+          </a:p>
+        </p:txBody>
+      </p:sp>
+      <p:sp>
+        <p:nvSpPr>
+          <p:cNvPr id="8" name="Rectangle 7"/>
+          <p:cNvSpPr/>
+          <p:nvPr/>
+        </p:nvSpPr>
+        <p:spPr>
+          <a:xfrm>
+            <a:off x="457200" y="1655064"/>
+            <a:ext cx="3624986" cy="27432"/>
+          </a:xfrm>
+          <a:prstGeom prst="rect">
+            <a:avLst/>
+          </a:prstGeom>
+          <a:solidFill>
+            <a:srgbClr val="FFD000"/>
+          </a:solidFill>
+          <a:ln>
+            <a:noFill/>
+          </a:ln>
+        </p:spPr>
+        <p:style>
+          <a:lnRef idx="1">
+            <a:schemeClr val="accent1"/>
+          </a:lnRef>
+          <a:fillRef idx="3">
+            <a:schemeClr val="accent1"/>
+          </a:fillRef>
+          <a:effectRef idx="2">
+            <a:schemeClr val="accent1"/>
+          </a:effectRef>
+          <a:fontRef idx="minor">
+            <a:schemeClr val="lt1"/>
+          </a:fontRef>
+        </p:style>
+        <p:txBody>
+          <a:bodyPr rtlCol="0" anchor="ctr"/>
+          <a:lstStyle/>
+          <a:p>
+            <a:pPr algn="ctr"/>
+          </a:p>
+        </p:txBody>
+      </p:sp>
+      <p:pic>
+        <p:nvPicPr>
+          <p:cNvPr id="9" name="Picture 8" descr="drawio.png"/>
+          <p:cNvPicPr>
+            <a:picLocks noChangeAspect="1"/>
+          </p:cNvPicPr>
+          <p:nvPr/>
+        </p:nvPicPr>
+        <p:blipFill>
+          <a:blip r:embed="rId2"/>
+          <a:stretch>
+            <a:fillRect/>
+          </a:stretch>
+        </p:blipFill>
+        <p:spPr>
+          <a:xfrm>
+            <a:off x="1643329" y="1847087"/>
+            <a:ext cx="1252728" cy="1252728"/>
+          </a:xfrm>
+          <a:prstGeom prst="rect">
+            <a:avLst/>
+          </a:prstGeom>
+        </p:spPr>
+      </p:pic>
+      <p:sp>
+        <p:nvSpPr>
+          <p:cNvPr id="10" name="TextBox 9"/>
+          <p:cNvSpPr txBox="1"/>
+          <p:nvPr/>
+        </p:nvSpPr>
+        <p:spPr>
+          <a:xfrm>
+            <a:off x="530352" y="3191256"/>
+            <a:ext cx="3478682" cy="621792"/>
+          </a:xfrm>
+          <a:prstGeom prst="rect">
+            <a:avLst/>
+          </a:prstGeom>
+          <a:noFill/>
+        </p:spPr>
+        <p:txBody>
+          <a:bodyPr wrap="square" anchor="t"/>
+          <a:lstStyle/>
+          <a:p>
+            <a:pPr algn="ctr"/>
+            <a:r>
+              <a:rPr sz="1300" b="1" i="0">
+                <a:solidFill>
+                  <a:srgbClr val="095292"/>
+                </a:solidFill>
+                <a:latin typeface="Calibri"/>
+              </a:rPr>
+              <a:t>Draw.Io</a:t>
+            </a:r>
+          </a:p>
+          <a:p>
+            <a:pPr algn="ctr">
+              <a:spcBef>
+                <a:spcPts val="200"/>
+              </a:spcBef>
             </a:pPr>
             <a:r>
-              <a:rPr sz="2000" b="0" i="0">
-                <a:solidFill>
-                  <a:srgbClr val="333333"/>
-                </a:solidFill>
-                <a:latin typeface="Calibri"/>
-              </a:rPr>
-              <a:t>–   Cada estudiante llega con tres artefactos de VetCare escritos en semanas distintas: el catalogo de RF y RNF, el diagrama con las especificaciones de casos de uso y el diagrama de clases con sus multiplicidades.</a:t>
-            </a:r>
-          </a:p>
-          <a:p>
-            <a:pPr>
-              <a:spcAft>
-                <a:spcPts val="800"/>
-              </a:spcAft>
+              <a:rPr sz="1000" b="0" i="0">
+                <a:solidFill>
+                  <a:srgbClr val="666666"/>
+                </a:solidFill>
+                <a:latin typeface="Calibri"/>
+              </a:rPr>
+              <a:t>Diagramas UML y de contexto</a:t>
+            </a:r>
+          </a:p>
+        </p:txBody>
+      </p:sp>
+      <p:sp>
+        <p:nvSpPr>
+          <p:cNvPr id="11" name="Rounded Rectangle 10"/>
+          <p:cNvSpPr/>
+          <p:nvPr/>
+        </p:nvSpPr>
+        <p:spPr>
+          <a:xfrm>
+            <a:off x="4283354" y="1591056"/>
+            <a:ext cx="3624986" cy="2331720"/>
+          </a:xfrm>
+          <a:prstGeom prst="roundRect">
+            <a:avLst>
+              <a:gd name="adj" fmla="val 12000"/>
+            </a:avLst>
+          </a:prstGeom>
+          <a:solidFill>
+            <a:srgbClr val="F2F2F2"/>
+          </a:solidFill>
+          <a:ln>
+            <a:noFill/>
+          </a:ln>
+        </p:spPr>
+        <p:style>
+          <a:lnRef idx="1">
+            <a:schemeClr val="accent1"/>
+          </a:lnRef>
+          <a:fillRef idx="3">
+            <a:schemeClr val="accent1"/>
+          </a:fillRef>
+          <a:effectRef idx="2">
+            <a:schemeClr val="accent1"/>
+          </a:effectRef>
+          <a:fontRef idx="minor">
+            <a:schemeClr val="lt1"/>
+          </a:fontRef>
+        </p:style>
+        <p:txBody>
+          <a:bodyPr rtlCol="0" anchor="ctr"/>
+          <a:lstStyle/>
+          <a:p>
+            <a:pPr algn="ctr"/>
+          </a:p>
+        </p:txBody>
+      </p:sp>
+      <p:sp>
+        <p:nvSpPr>
+          <p:cNvPr id="12" name="Rectangle 11"/>
+          <p:cNvSpPr/>
+          <p:nvPr/>
+        </p:nvSpPr>
+        <p:spPr>
+          <a:xfrm>
+            <a:off x="4283354" y="1591056"/>
+            <a:ext cx="3624986" cy="64008"/>
+          </a:xfrm>
+          <a:prstGeom prst="rect">
+            <a:avLst/>
+          </a:prstGeom>
+          <a:solidFill>
+            <a:srgbClr val="095292"/>
+          </a:solidFill>
+          <a:ln>
+            <a:noFill/>
+          </a:ln>
+        </p:spPr>
+        <p:style>
+          <a:lnRef idx="1">
+            <a:schemeClr val="accent1"/>
+          </a:lnRef>
+          <a:fillRef idx="3">
+            <a:schemeClr val="accent1"/>
+          </a:fillRef>
+          <a:effectRef idx="2">
+            <a:schemeClr val="accent1"/>
+          </a:effectRef>
+          <a:fontRef idx="minor">
+            <a:schemeClr val="lt1"/>
+          </a:fontRef>
+        </p:style>
+        <p:txBody>
+          <a:bodyPr rtlCol="0" anchor="ctr"/>
+          <a:lstStyle/>
+          <a:p>
+            <a:pPr algn="ctr"/>
+          </a:p>
+        </p:txBody>
+      </p:sp>
+      <p:sp>
+        <p:nvSpPr>
+          <p:cNvPr id="13" name="Rectangle 12"/>
+          <p:cNvSpPr/>
+          <p:nvPr/>
+        </p:nvSpPr>
+        <p:spPr>
+          <a:xfrm>
+            <a:off x="4283354" y="1655064"/>
+            <a:ext cx="3624986" cy="27432"/>
+          </a:xfrm>
+          <a:prstGeom prst="rect">
+            <a:avLst/>
+          </a:prstGeom>
+          <a:solidFill>
+            <a:srgbClr val="FFD000"/>
+          </a:solidFill>
+          <a:ln>
+            <a:noFill/>
+          </a:ln>
+        </p:spPr>
+        <p:style>
+          <a:lnRef idx="1">
+            <a:schemeClr val="accent1"/>
+          </a:lnRef>
+          <a:fillRef idx="3">
+            <a:schemeClr val="accent1"/>
+          </a:fillRef>
+          <a:effectRef idx="2">
+            <a:schemeClr val="accent1"/>
+          </a:effectRef>
+          <a:fontRef idx="minor">
+            <a:schemeClr val="lt1"/>
+          </a:fontRef>
+        </p:style>
+        <p:txBody>
+          <a:bodyPr rtlCol="0" anchor="ctr"/>
+          <a:lstStyle/>
+          <a:p>
+            <a:pPr algn="ctr"/>
+          </a:p>
+        </p:txBody>
+      </p:sp>
+      <p:pic>
+        <p:nvPicPr>
+          <p:cNvPr id="14" name="Picture 13" descr="google_docs.png"/>
+          <p:cNvPicPr>
+            <a:picLocks noChangeAspect="1"/>
+          </p:cNvPicPr>
+          <p:nvPr/>
+        </p:nvPicPr>
+        <p:blipFill>
+          <a:blip r:embed="rId3"/>
+          <a:stretch>
+            <a:fillRect/>
+          </a:stretch>
+        </p:blipFill>
+        <p:spPr>
+          <a:xfrm>
+            <a:off x="5469483" y="1847087"/>
+            <a:ext cx="1252728" cy="1252728"/>
+          </a:xfrm>
+          <a:prstGeom prst="rect">
+            <a:avLst/>
+          </a:prstGeom>
+        </p:spPr>
+      </p:pic>
+      <p:sp>
+        <p:nvSpPr>
+          <p:cNvPr id="15" name="TextBox 14"/>
+          <p:cNvSpPr txBox="1"/>
+          <p:nvPr/>
+        </p:nvSpPr>
+        <p:spPr>
+          <a:xfrm>
+            <a:off x="4356506" y="3191256"/>
+            <a:ext cx="3478682" cy="621792"/>
+          </a:xfrm>
+          <a:prstGeom prst="rect">
+            <a:avLst/>
+          </a:prstGeom>
+          <a:noFill/>
+        </p:spPr>
+        <p:txBody>
+          <a:bodyPr wrap="square" anchor="t"/>
+          <a:lstStyle/>
+          <a:p>
+            <a:pPr algn="ctr"/>
+            <a:r>
+              <a:rPr sz="1300" b="1" i="0">
+                <a:solidFill>
+                  <a:srgbClr val="095292"/>
+                </a:solidFill>
+                <a:latin typeface="Calibri"/>
+              </a:rPr>
+              <a:t>google docs</a:t>
+            </a:r>
+          </a:p>
+          <a:p>
+            <a:pPr algn="ctr">
+              <a:spcBef>
+                <a:spcPts val="200"/>
+              </a:spcBef>
             </a:pPr>
             <a:r>
-              <a:rPr sz="2000" b="0" i="0">
-                <a:solidFill>
-                  <a:srgbClr val="333333"/>
-                </a:solidFill>
-                <a:latin typeface="Calibri"/>
-              </a:rPr>
-              <a:t>–   Nadie ha vuelto a abrir el catalogo de requisitos desde que se dibujaron las clases, y los nombres empezaron a moverse: donde el requisito dice Propietario, la clase dice Dueño y el mockup dice Cliente.</a:t>
-            </a:r>
-          </a:p>
-          <a:p>
-            <a:pPr>
-              <a:spcAft>
-                <a:spcPts val="800"/>
-              </a:spcAft>
+              <a:rPr sz="1000" b="0" i="0">
+                <a:solidFill>
+                  <a:srgbClr val="666666"/>
+                </a:solidFill>
+                <a:latin typeface="Calibri"/>
+              </a:rPr>
+              <a:t>Documentos del paquete de diseño</a:t>
+            </a:r>
+          </a:p>
+        </p:txBody>
+      </p:sp>
+      <p:sp>
+        <p:nvSpPr>
+          <p:cNvPr id="16" name="Rounded Rectangle 15"/>
+          <p:cNvSpPr/>
+          <p:nvPr/>
+        </p:nvSpPr>
+        <p:spPr>
+          <a:xfrm>
+            <a:off x="8109508" y="1591056"/>
+            <a:ext cx="3624986" cy="2331720"/>
+          </a:xfrm>
+          <a:prstGeom prst="roundRect">
+            <a:avLst>
+              <a:gd name="adj" fmla="val 12000"/>
+            </a:avLst>
+          </a:prstGeom>
+          <a:solidFill>
+            <a:srgbClr val="F2F2F2"/>
+          </a:solidFill>
+          <a:ln>
+            <a:noFill/>
+          </a:ln>
+        </p:spPr>
+        <p:style>
+          <a:lnRef idx="1">
+            <a:schemeClr val="accent1"/>
+          </a:lnRef>
+          <a:fillRef idx="3">
+            <a:schemeClr val="accent1"/>
+          </a:fillRef>
+          <a:effectRef idx="2">
+            <a:schemeClr val="accent1"/>
+          </a:effectRef>
+          <a:fontRef idx="minor">
+            <a:schemeClr val="lt1"/>
+          </a:fontRef>
+        </p:style>
+        <p:txBody>
+          <a:bodyPr rtlCol="0" anchor="ctr"/>
+          <a:lstStyle/>
+          <a:p>
+            <a:pPr algn="ctr"/>
+          </a:p>
+        </p:txBody>
+      </p:sp>
+      <p:sp>
+        <p:nvSpPr>
+          <p:cNvPr id="17" name="Rectangle 16"/>
+          <p:cNvSpPr/>
+          <p:nvPr/>
+        </p:nvSpPr>
+        <p:spPr>
+          <a:xfrm>
+            <a:off x="8109508" y="1591056"/>
+            <a:ext cx="3624986" cy="64008"/>
+          </a:xfrm>
+          <a:prstGeom prst="rect">
+            <a:avLst/>
+          </a:prstGeom>
+          <a:solidFill>
+            <a:srgbClr val="095292"/>
+          </a:solidFill>
+          <a:ln>
+            <a:noFill/>
+          </a:ln>
+        </p:spPr>
+        <p:style>
+          <a:lnRef idx="1">
+            <a:schemeClr val="accent1"/>
+          </a:lnRef>
+          <a:fillRef idx="3">
+            <a:schemeClr val="accent1"/>
+          </a:fillRef>
+          <a:effectRef idx="2">
+            <a:schemeClr val="accent1"/>
+          </a:effectRef>
+          <a:fontRef idx="minor">
+            <a:schemeClr val="lt1"/>
+          </a:fontRef>
+        </p:style>
+        <p:txBody>
+          <a:bodyPr rtlCol="0" anchor="ctr"/>
+          <a:lstStyle/>
+          <a:p>
+            <a:pPr algn="ctr"/>
+          </a:p>
+        </p:txBody>
+      </p:sp>
+      <p:sp>
+        <p:nvSpPr>
+          <p:cNvPr id="18" name="Rectangle 17"/>
+          <p:cNvSpPr/>
+          <p:nvPr/>
+        </p:nvSpPr>
+        <p:spPr>
+          <a:xfrm>
+            <a:off x="8109508" y="1655064"/>
+            <a:ext cx="3624986" cy="27432"/>
+          </a:xfrm>
+          <a:prstGeom prst="rect">
+            <a:avLst/>
+          </a:prstGeom>
+          <a:solidFill>
+            <a:srgbClr val="FFD000"/>
+          </a:solidFill>
+          <a:ln>
+            <a:noFill/>
+          </a:ln>
+        </p:spPr>
+        <p:style>
+          <a:lnRef idx="1">
+            <a:schemeClr val="accent1"/>
+          </a:lnRef>
+          <a:fillRef idx="3">
+            <a:schemeClr val="accent1"/>
+          </a:fillRef>
+          <a:effectRef idx="2">
+            <a:schemeClr val="accent1"/>
+          </a:effectRef>
+          <a:fontRef idx="minor">
+            <a:schemeClr val="lt1"/>
+          </a:fontRef>
+        </p:style>
+        <p:txBody>
+          <a:bodyPr rtlCol="0" anchor="ctr"/>
+          <a:lstStyle/>
+          <a:p>
+            <a:pPr algn="ctr"/>
+          </a:p>
+        </p:txBody>
+      </p:sp>
+      <p:pic>
+        <p:nvPicPr>
+          <p:cNvPr id="19" name="Picture 18" descr="examlab.png"/>
+          <p:cNvPicPr>
+            <a:picLocks noChangeAspect="1"/>
+          </p:cNvPicPr>
+          <p:nvPr/>
+        </p:nvPicPr>
+        <p:blipFill>
+          <a:blip r:embed="rId4"/>
+          <a:stretch>
+            <a:fillRect/>
+          </a:stretch>
+        </p:blipFill>
+        <p:spPr>
+          <a:xfrm>
+            <a:off x="9295638" y="1847087"/>
+            <a:ext cx="1252728" cy="1252728"/>
+          </a:xfrm>
+          <a:prstGeom prst="rect">
+            <a:avLst/>
+          </a:prstGeom>
+        </p:spPr>
+      </p:pic>
+      <p:sp>
+        <p:nvSpPr>
+          <p:cNvPr id="20" name="TextBox 19"/>
+          <p:cNvSpPr txBox="1"/>
+          <p:nvPr/>
+        </p:nvSpPr>
+        <p:spPr>
+          <a:xfrm>
+            <a:off x="8182660" y="3191256"/>
+            <a:ext cx="3478682" cy="621792"/>
+          </a:xfrm>
+          <a:prstGeom prst="rect">
+            <a:avLst/>
+          </a:prstGeom>
+          <a:noFill/>
+        </p:spPr>
+        <p:txBody>
+          <a:bodyPr wrap="square" anchor="t"/>
+          <a:lstStyle/>
+          <a:p>
+            <a:pPr algn="ctr"/>
+            <a:r>
+              <a:rPr sz="1300" b="1" i="0">
+                <a:solidFill>
+                  <a:srgbClr val="095292"/>
+                </a:solidFill>
+                <a:latin typeface="Calibri"/>
+              </a:rPr>
+              <a:t>la plataforma del curso</a:t>
+            </a:r>
+          </a:p>
+          <a:p>
+            <a:pPr algn="ctr">
+              <a:spcBef>
+                <a:spcPts val="200"/>
+              </a:spcBef>
             </a:pPr>
             <a:r>
-              <a:rPr sz="2000" b="0" i="0">
-                <a:solidFill>
-                  <a:srgbClr val="333333"/>
-                </a:solidFill>
-                <a:latin typeface="Calibri"/>
-              </a:rPr>
-              <a:t>–   Hay al menos un requisito que suena bonito en el papel, el RF-07 de recordatorio de cita, y no aparece en ningun caso de uso ni en ninguna clase del modelo.</a:t>
-            </a:r>
-          </a:p>
-        </p:txBody>
-      </p:sp>
-      <p:sp>
-        <p:nvSpPr>
-          <p:cNvPr id="6" name="TextBox 5"/>
+              <a:rPr sz="1000" b="0" i="0">
+                <a:solidFill>
+                  <a:srgbClr val="666666"/>
+                </a:solidFill>
+                <a:latin typeface="Calibri"/>
+              </a:rPr>
+              <a:t>Entrega del taller · en la fecha que indique el docente</a:t>
+            </a:r>
+          </a:p>
+        </p:txBody>
+      </p:sp>
+      <p:sp>
+        <p:nvSpPr>
+          <p:cNvPr id="21" name="TextBox 20"/>
           <p:cNvSpPr txBox="1"/>
           <p:nvPr/>
         </p:nvSpPr>
@@ -6177,111 +6097,21 @@
                 </a:solidFill>
                 <a:latin typeface="Calibri"/>
               </a:rPr>
-              <a:t>Taller PI — pasos guiados</a:t>
-            </a:r>
-          </a:p>
-        </p:txBody>
-      </p:sp>
-      <p:sp>
-        <p:nvSpPr>
-          <p:cNvPr id="5" name="Rounded Rectangle 4"/>
-          <p:cNvSpPr/>
-          <p:nvPr/>
-        </p:nvSpPr>
-        <p:spPr>
-          <a:xfrm>
-            <a:off x="457200" y="1234440"/>
-            <a:ext cx="11277295" cy="950976"/>
-          </a:xfrm>
-          <a:prstGeom prst="roundRect">
-            <a:avLst>
-              <a:gd name="adj" fmla="val 12000"/>
-            </a:avLst>
-          </a:prstGeom>
-          <a:solidFill>
-            <a:srgbClr val="F2F2F2"/>
-          </a:solidFill>
-          <a:ln>
-            <a:noFill/>
-          </a:ln>
-        </p:spPr>
-        <p:style>
-          <a:lnRef idx="1">
-            <a:schemeClr val="accent1"/>
-          </a:lnRef>
-          <a:fillRef idx="3">
-            <a:schemeClr val="accent1"/>
-          </a:fillRef>
-          <a:effectRef idx="2">
-            <a:schemeClr val="accent1"/>
-          </a:effectRef>
-          <a:fontRef idx="minor">
-            <a:schemeClr val="lt1"/>
-          </a:fontRef>
-        </p:style>
-        <p:txBody>
-          <a:bodyPr rtlCol="0" anchor="ctr"/>
-          <a:lstStyle/>
-          <a:p>
-            <a:pPr algn="ctr"/>
-          </a:p>
-        </p:txBody>
-      </p:sp>
-      <p:sp>
-        <p:nvSpPr>
-          <p:cNvPr id="6" name="Rounded Rectangle 5"/>
-          <p:cNvSpPr/>
-          <p:nvPr/>
-        </p:nvSpPr>
-        <p:spPr>
-          <a:xfrm>
-            <a:off x="594360" y="1490472"/>
-            <a:ext cx="438912" cy="438912"/>
-          </a:xfrm>
-          <a:prstGeom prst="roundRect">
-            <a:avLst>
-              <a:gd name="adj" fmla="val 12000"/>
-            </a:avLst>
-          </a:prstGeom>
-          <a:solidFill>
-            <a:srgbClr val="095292"/>
-          </a:solidFill>
-          <a:ln>
-            <a:noFill/>
-          </a:ln>
-        </p:spPr>
-        <p:style>
-          <a:lnRef idx="1">
-            <a:schemeClr val="accent1"/>
-          </a:lnRef>
-          <a:fillRef idx="3">
-            <a:schemeClr val="accent1"/>
-          </a:fillRef>
-          <a:effectRef idx="2">
-            <a:schemeClr val="accent1"/>
-          </a:effectRef>
-          <a:fontRef idx="minor">
-            <a:schemeClr val="lt1"/>
-          </a:fontRef>
-        </p:style>
-        <p:txBody>
-          <a:bodyPr rtlCol="0" anchor="ctr"/>
-          <a:lstStyle/>
-          <a:p>
-            <a:pPr algn="ctr"/>
-          </a:p>
-        </p:txBody>
-      </p:sp>
-      <p:sp>
-        <p:nvSpPr>
-          <p:cNvPr id="7" name="TextBox 6"/>
+              <a:t>Taller PI — por que importa</a:t>
+            </a:r>
+          </a:p>
+        </p:txBody>
+      </p:sp>
+      <p:sp>
+        <p:nvSpPr>
+          <p:cNvPr id="5" name="TextBox 4"/>
           <p:cNvSpPr txBox="1"/>
           <p:nvPr/>
         </p:nvSpPr>
         <p:spPr>
           <a:xfrm>
-            <a:off x="594360" y="1490472"/>
-            <a:ext cx="438912" cy="438912"/>
+            <a:off x="457200" y="1170432"/>
+            <a:ext cx="11277295" cy="5230368"/>
           </a:xfrm>
           <a:prstGeom prst="rect">
             <a:avLst/>
@@ -6289,677 +6119,81 @@
           <a:noFill/>
         </p:spPr>
         <p:txBody>
-          <a:bodyPr wrap="square" anchor="ctr"/>
-          <a:lstStyle/>
-          <a:p>
-            <a:pPr algn="ctr"/>
-            <a:r>
-              <a:rPr sz="1600" b="1" i="0">
-                <a:solidFill>
-                  <a:srgbClr val="FFFFFF"/>
-                </a:solidFill>
-                <a:latin typeface="Calibri"/>
-              </a:rPr>
-              <a:t>1</a:t>
-            </a:r>
-          </a:p>
-        </p:txBody>
-      </p:sp>
-      <p:sp>
-        <p:nvSpPr>
-          <p:cNvPr id="8" name="TextBox 7"/>
-          <p:cNvSpPr txBox="1"/>
-          <p:nvPr/>
-        </p:nvSpPr>
-        <p:spPr>
-          <a:xfrm>
-            <a:off x="1188720" y="1325880"/>
-            <a:ext cx="10271455" cy="786384"/>
-          </a:xfrm>
-          <a:prstGeom prst="rect">
-            <a:avLst/>
-          </a:prstGeom>
-          <a:noFill/>
-        </p:spPr>
-        <p:txBody>
-          <a:bodyPr wrap="square" anchor="ctr"/>
-          <a:lstStyle/>
-          <a:p>
-            <a:r>
-              <a:rPr sz="1500" b="1" i="0">
-                <a:solidFill>
-                  <a:srgbClr val="095292"/>
-                </a:solidFill>
-                <a:latin typeface="Calibri"/>
-              </a:rPr>
-              <a:t>Construir en Google Docs la matriz de trazabilidad de VetCare con las columnas RF, Caso de uso, Clase o clases implicadas y Mockup, incluyendo todos los requisitos del catalogo, y marcar en rojo cada fila incompleta.</a:t>
-            </a:r>
-          </a:p>
-        </p:txBody>
-      </p:sp>
-      <p:sp>
-        <p:nvSpPr>
-          <p:cNvPr id="9" name="Rounded Rectangle 8"/>
-          <p:cNvSpPr/>
-          <p:nvPr/>
-        </p:nvSpPr>
-        <p:spPr>
-          <a:xfrm>
-            <a:off x="457200" y="2276856"/>
-            <a:ext cx="11277295" cy="950976"/>
-          </a:xfrm>
-          <a:prstGeom prst="roundRect">
-            <a:avLst>
-              <a:gd name="adj" fmla="val 12000"/>
-            </a:avLst>
-          </a:prstGeom>
-          <a:solidFill>
-            <a:srgbClr val="E8F4FA"/>
-          </a:solidFill>
-          <a:ln>
-            <a:noFill/>
-          </a:ln>
-        </p:spPr>
-        <p:style>
-          <a:lnRef idx="1">
-            <a:schemeClr val="accent1"/>
-          </a:lnRef>
-          <a:fillRef idx="3">
-            <a:schemeClr val="accent1"/>
-          </a:fillRef>
-          <a:effectRef idx="2">
-            <a:schemeClr val="accent1"/>
-          </a:effectRef>
-          <a:fontRef idx="minor">
-            <a:schemeClr val="lt1"/>
-          </a:fontRef>
-        </p:style>
-        <p:txBody>
-          <a:bodyPr rtlCol="0" anchor="ctr"/>
-          <a:lstStyle/>
-          <a:p>
-            <a:pPr algn="ctr"/>
-          </a:p>
-        </p:txBody>
-      </p:sp>
-      <p:sp>
-        <p:nvSpPr>
-          <p:cNvPr id="10" name="Rounded Rectangle 9"/>
-          <p:cNvSpPr/>
-          <p:nvPr/>
-        </p:nvSpPr>
-        <p:spPr>
-          <a:xfrm>
-            <a:off x="594360" y="2532888"/>
-            <a:ext cx="438912" cy="438912"/>
-          </a:xfrm>
-          <a:prstGeom prst="roundRect">
-            <a:avLst>
-              <a:gd name="adj" fmla="val 12000"/>
-            </a:avLst>
-          </a:prstGeom>
-          <a:solidFill>
-            <a:srgbClr val="095292"/>
-          </a:solidFill>
-          <a:ln>
-            <a:noFill/>
-          </a:ln>
-        </p:spPr>
-        <p:style>
-          <a:lnRef idx="1">
-            <a:schemeClr val="accent1"/>
-          </a:lnRef>
-          <a:fillRef idx="3">
-            <a:schemeClr val="accent1"/>
-          </a:fillRef>
-          <a:effectRef idx="2">
-            <a:schemeClr val="accent1"/>
-          </a:effectRef>
-          <a:fontRef idx="minor">
-            <a:schemeClr val="lt1"/>
-          </a:fontRef>
-        </p:style>
-        <p:txBody>
-          <a:bodyPr rtlCol="0" anchor="ctr"/>
-          <a:lstStyle/>
-          <a:p>
-            <a:pPr algn="ctr"/>
-          </a:p>
-        </p:txBody>
-      </p:sp>
-      <p:sp>
-        <p:nvSpPr>
-          <p:cNvPr id="11" name="TextBox 10"/>
-          <p:cNvSpPr txBox="1"/>
-          <p:nvPr/>
-        </p:nvSpPr>
-        <p:spPr>
-          <a:xfrm>
-            <a:off x="594360" y="2532888"/>
-            <a:ext cx="438912" cy="438912"/>
-          </a:xfrm>
-          <a:prstGeom prst="rect">
-            <a:avLst/>
-          </a:prstGeom>
-          <a:noFill/>
-        </p:spPr>
-        <p:txBody>
-          <a:bodyPr wrap="square" anchor="ctr"/>
-          <a:lstStyle/>
-          <a:p>
-            <a:pPr algn="ctr"/>
-            <a:r>
-              <a:rPr sz="1600" b="1" i="0">
-                <a:solidFill>
-                  <a:srgbClr val="FFFFFF"/>
-                </a:solidFill>
-                <a:latin typeface="Calibri"/>
-              </a:rPr>
-              <a:t>2</a:t>
-            </a:r>
-          </a:p>
-        </p:txBody>
-      </p:sp>
-      <p:sp>
-        <p:nvSpPr>
-          <p:cNvPr id="12" name="TextBox 11"/>
-          <p:cNvSpPr txBox="1"/>
-          <p:nvPr/>
-        </p:nvSpPr>
-        <p:spPr>
-          <a:xfrm>
-            <a:off x="1188720" y="2368296"/>
-            <a:ext cx="10271455" cy="786384"/>
-          </a:xfrm>
-          <a:prstGeom prst="rect">
-            <a:avLst/>
-          </a:prstGeom>
-          <a:noFill/>
-        </p:spPr>
-        <p:txBody>
-          <a:bodyPr wrap="square" anchor="ctr"/>
-          <a:lstStyle/>
-          <a:p>
-            <a:r>
-              <a:rPr sz="1400" b="1" i="0">
-                <a:solidFill>
-                  <a:srgbClr val="095292"/>
-                </a:solidFill>
-                <a:latin typeface="Calibri"/>
-              </a:rPr>
-              <a:t>Levantar el glosario de nombres canonicos con minimo ocho conceptos del dominio (Propietario, Mascota, Consulta, Cita, Veterinario, Vacuna, Expediente, Bitacora), cada uno con definicion de una linea y sinonimos prohibidos, y renombrar en los artefactos todo lo que no coincida.</a:t>
-            </a:r>
-          </a:p>
-        </p:txBody>
-      </p:sp>
-      <p:sp>
-        <p:nvSpPr>
-          <p:cNvPr id="13" name="Rounded Rectangle 12"/>
-          <p:cNvSpPr/>
-          <p:nvPr/>
-        </p:nvSpPr>
-        <p:spPr>
-          <a:xfrm>
-            <a:off x="457200" y="3319272"/>
-            <a:ext cx="11277295" cy="950976"/>
-          </a:xfrm>
-          <a:prstGeom prst="roundRect">
-            <a:avLst>
-              <a:gd name="adj" fmla="val 12000"/>
-            </a:avLst>
-          </a:prstGeom>
-          <a:solidFill>
-            <a:srgbClr val="F2F2F2"/>
-          </a:solidFill>
-          <a:ln>
-            <a:noFill/>
-          </a:ln>
-        </p:spPr>
-        <p:style>
-          <a:lnRef idx="1">
-            <a:schemeClr val="accent1"/>
-          </a:lnRef>
-          <a:fillRef idx="3">
-            <a:schemeClr val="accent1"/>
-          </a:fillRef>
-          <a:effectRef idx="2">
-            <a:schemeClr val="accent1"/>
-          </a:effectRef>
-          <a:fontRef idx="minor">
-            <a:schemeClr val="lt1"/>
-          </a:fontRef>
-        </p:style>
-        <p:txBody>
-          <a:bodyPr rtlCol="0" anchor="ctr"/>
-          <a:lstStyle/>
-          <a:p>
-            <a:pPr algn="ctr"/>
-          </a:p>
-        </p:txBody>
-      </p:sp>
-      <p:sp>
-        <p:nvSpPr>
-          <p:cNvPr id="14" name="Rounded Rectangle 13"/>
-          <p:cNvSpPr/>
-          <p:nvPr/>
-        </p:nvSpPr>
-        <p:spPr>
-          <a:xfrm>
-            <a:off x="594360" y="3575304"/>
-            <a:ext cx="438912" cy="438912"/>
-          </a:xfrm>
-          <a:prstGeom prst="roundRect">
-            <a:avLst>
-              <a:gd name="adj" fmla="val 12000"/>
-            </a:avLst>
-          </a:prstGeom>
-          <a:solidFill>
-            <a:srgbClr val="095292"/>
-          </a:solidFill>
-          <a:ln>
-            <a:noFill/>
-          </a:ln>
-        </p:spPr>
-        <p:style>
-          <a:lnRef idx="1">
-            <a:schemeClr val="accent1"/>
-          </a:lnRef>
-          <a:fillRef idx="3">
-            <a:schemeClr val="accent1"/>
-          </a:fillRef>
-          <a:effectRef idx="2">
-            <a:schemeClr val="accent1"/>
-          </a:effectRef>
-          <a:fontRef idx="minor">
-            <a:schemeClr val="lt1"/>
-          </a:fontRef>
-        </p:style>
-        <p:txBody>
-          <a:bodyPr rtlCol="0" anchor="ctr"/>
-          <a:lstStyle/>
-          <a:p>
-            <a:pPr algn="ctr"/>
-          </a:p>
-        </p:txBody>
-      </p:sp>
-      <p:sp>
-        <p:nvSpPr>
-          <p:cNvPr id="15" name="TextBox 14"/>
-          <p:cNvSpPr txBox="1"/>
-          <p:nvPr/>
-        </p:nvSpPr>
-        <p:spPr>
-          <a:xfrm>
-            <a:off x="594360" y="3575304"/>
-            <a:ext cx="438912" cy="438912"/>
-          </a:xfrm>
-          <a:prstGeom prst="rect">
-            <a:avLst/>
-          </a:prstGeom>
-          <a:noFill/>
-        </p:spPr>
-        <p:txBody>
-          <a:bodyPr wrap="square" anchor="ctr"/>
-          <a:lstStyle/>
-          <a:p>
-            <a:pPr algn="ctr"/>
-            <a:r>
-              <a:rPr sz="1600" b="1" i="0">
-                <a:solidFill>
-                  <a:srgbClr val="FFFFFF"/>
-                </a:solidFill>
-                <a:latin typeface="Calibri"/>
-              </a:rPr>
-              <a:t>3</a:t>
-            </a:r>
-          </a:p>
-        </p:txBody>
-      </p:sp>
-      <p:sp>
-        <p:nvSpPr>
-          <p:cNvPr id="16" name="TextBox 15"/>
-          <p:cNvSpPr txBox="1"/>
-          <p:nvPr/>
-        </p:nvSpPr>
-        <p:spPr>
-          <a:xfrm>
-            <a:off x="1188720" y="3410712"/>
-            <a:ext cx="10271455" cy="786384"/>
-          </a:xfrm>
-          <a:prstGeom prst="rect">
-            <a:avLst/>
-          </a:prstGeom>
-          <a:noFill/>
-        </p:spPr>
-        <p:txBody>
-          <a:bodyPr wrap="square" anchor="ctr"/>
-          <a:lstStyle/>
-          <a:p>
-            <a:r>
-              <a:rPr sz="1400" b="1" i="0">
-                <a:solidFill>
-                  <a:srgbClr val="095292"/>
-                </a:solidFill>
-                <a:latin typeface="Calibri"/>
-              </a:rPr>
-              <a:t>Intercambiar el paquete completo con otro estudiante (o con otro equipo, si el docente autorizo trabajo en equipo) y aplicar la rubrica de auditoria de seis puntos durante veinte minutos cronometrados, registrando cada hallazgo con ubicacion exacta, descripcion y severidad bloqueante, mayor o menor; queda prohibido proponer soluciones durante la revision.</a:t>
-            </a:r>
-          </a:p>
-        </p:txBody>
-      </p:sp>
-      <p:sp>
-        <p:nvSpPr>
-          <p:cNvPr id="17" name="Rounded Rectangle 16"/>
-          <p:cNvSpPr/>
-          <p:nvPr/>
-        </p:nvSpPr>
-        <p:spPr>
-          <a:xfrm>
-            <a:off x="457200" y="4361688"/>
-            <a:ext cx="11277295" cy="950976"/>
-          </a:xfrm>
-          <a:prstGeom prst="roundRect">
-            <a:avLst>
-              <a:gd name="adj" fmla="val 12000"/>
-            </a:avLst>
-          </a:prstGeom>
-          <a:solidFill>
-            <a:srgbClr val="E8F4FA"/>
-          </a:solidFill>
-          <a:ln>
-            <a:noFill/>
-          </a:ln>
-        </p:spPr>
-        <p:style>
-          <a:lnRef idx="1">
-            <a:schemeClr val="accent1"/>
-          </a:lnRef>
-          <a:fillRef idx="3">
-            <a:schemeClr val="accent1"/>
-          </a:fillRef>
-          <a:effectRef idx="2">
-            <a:schemeClr val="accent1"/>
-          </a:effectRef>
-          <a:fontRef idx="minor">
-            <a:schemeClr val="lt1"/>
-          </a:fontRef>
-        </p:style>
-        <p:txBody>
-          <a:bodyPr rtlCol="0" anchor="ctr"/>
-          <a:lstStyle/>
-          <a:p>
-            <a:pPr algn="ctr"/>
-          </a:p>
-        </p:txBody>
-      </p:sp>
-      <p:sp>
-        <p:nvSpPr>
-          <p:cNvPr id="18" name="Rounded Rectangle 17"/>
-          <p:cNvSpPr/>
-          <p:nvPr/>
-        </p:nvSpPr>
-        <p:spPr>
-          <a:xfrm>
-            <a:off x="594360" y="4617720"/>
-            <a:ext cx="438912" cy="438912"/>
-          </a:xfrm>
-          <a:prstGeom prst="roundRect">
-            <a:avLst>
-              <a:gd name="adj" fmla="val 12000"/>
-            </a:avLst>
-          </a:prstGeom>
-          <a:solidFill>
-            <a:srgbClr val="095292"/>
-          </a:solidFill>
-          <a:ln>
-            <a:noFill/>
-          </a:ln>
-        </p:spPr>
-        <p:style>
-          <a:lnRef idx="1">
-            <a:schemeClr val="accent1"/>
-          </a:lnRef>
-          <a:fillRef idx="3">
-            <a:schemeClr val="accent1"/>
-          </a:fillRef>
-          <a:effectRef idx="2">
-            <a:schemeClr val="accent1"/>
-          </a:effectRef>
-          <a:fontRef idx="minor">
-            <a:schemeClr val="lt1"/>
-          </a:fontRef>
-        </p:style>
-        <p:txBody>
-          <a:bodyPr rtlCol="0" anchor="ctr"/>
-          <a:lstStyle/>
-          <a:p>
-            <a:pPr algn="ctr"/>
-          </a:p>
-        </p:txBody>
-      </p:sp>
-      <p:sp>
-        <p:nvSpPr>
-          <p:cNvPr id="19" name="TextBox 18"/>
-          <p:cNvSpPr txBox="1"/>
-          <p:nvPr/>
-        </p:nvSpPr>
-        <p:spPr>
-          <a:xfrm>
-            <a:off x="594360" y="4617720"/>
-            <a:ext cx="438912" cy="438912"/>
-          </a:xfrm>
-          <a:prstGeom prst="rect">
-            <a:avLst/>
-          </a:prstGeom>
-          <a:noFill/>
-        </p:spPr>
-        <p:txBody>
-          <a:bodyPr wrap="square" anchor="ctr"/>
-          <a:lstStyle/>
-          <a:p>
-            <a:pPr algn="ctr"/>
-            <a:r>
-              <a:rPr sz="1600" b="1" i="0">
-                <a:solidFill>
-                  <a:srgbClr val="FFFFFF"/>
-                </a:solidFill>
-                <a:latin typeface="Calibri"/>
-              </a:rPr>
-              <a:t>4</a:t>
-            </a:r>
-          </a:p>
-        </p:txBody>
-      </p:sp>
-      <p:sp>
-        <p:nvSpPr>
-          <p:cNvPr id="20" name="TextBox 19"/>
-          <p:cNvSpPr txBox="1"/>
-          <p:nvPr/>
-        </p:nvSpPr>
-        <p:spPr>
-          <a:xfrm>
-            <a:off x="1188720" y="4453128"/>
-            <a:ext cx="10271455" cy="786384"/>
-          </a:xfrm>
-          <a:prstGeom prst="rect">
-            <a:avLst/>
-          </a:prstGeom>
-          <a:noFill/>
-        </p:spPr>
-        <p:txBody>
-          <a:bodyPr wrap="square" anchor="ctr"/>
-          <a:lstStyle/>
-          <a:p>
-            <a:r>
-              <a:rPr sz="1500" b="1" i="0">
-                <a:solidFill>
-                  <a:srgbClr val="095292"/>
-                </a:solidFill>
-                <a:latin typeface="Calibri"/>
-              </a:rPr>
-              <a:t>Recibir los hallazgos propios y clasificarlos en aceptado, rechazado con justificacion escrita o aplazado por acuerdo, sin borrar ninguno del acta, de modo que quede evidencia de la decision tomada.</a:t>
-            </a:r>
-          </a:p>
-        </p:txBody>
-      </p:sp>
-      <p:sp>
-        <p:nvSpPr>
-          <p:cNvPr id="21" name="Rounded Rectangle 20"/>
-          <p:cNvSpPr/>
-          <p:nvPr/>
-        </p:nvSpPr>
-        <p:spPr>
-          <a:xfrm>
-            <a:off x="457200" y="5404104"/>
-            <a:ext cx="11277295" cy="950976"/>
-          </a:xfrm>
-          <a:prstGeom prst="roundRect">
-            <a:avLst>
-              <a:gd name="adj" fmla="val 12000"/>
-            </a:avLst>
-          </a:prstGeom>
-          <a:solidFill>
-            <a:srgbClr val="F2F2F2"/>
-          </a:solidFill>
-          <a:ln>
-            <a:noFill/>
-          </a:ln>
-        </p:spPr>
-        <p:style>
-          <a:lnRef idx="1">
-            <a:schemeClr val="accent1"/>
-          </a:lnRef>
-          <a:fillRef idx="3">
-            <a:schemeClr val="accent1"/>
-          </a:fillRef>
-          <a:effectRef idx="2">
-            <a:schemeClr val="accent1"/>
-          </a:effectRef>
-          <a:fontRef idx="minor">
-            <a:schemeClr val="lt1"/>
-          </a:fontRef>
-        </p:style>
-        <p:txBody>
-          <a:bodyPr rtlCol="0" anchor="ctr"/>
-          <a:lstStyle/>
-          <a:p>
-            <a:pPr algn="ctr"/>
-          </a:p>
-        </p:txBody>
-      </p:sp>
-      <p:sp>
-        <p:nvSpPr>
-          <p:cNvPr id="22" name="Rounded Rectangle 21"/>
-          <p:cNvSpPr/>
-          <p:nvPr/>
-        </p:nvSpPr>
-        <p:spPr>
-          <a:xfrm>
-            <a:off x="594360" y="5660136"/>
-            <a:ext cx="438912" cy="438912"/>
-          </a:xfrm>
-          <a:prstGeom prst="roundRect">
-            <a:avLst>
-              <a:gd name="adj" fmla="val 12000"/>
-            </a:avLst>
-          </a:prstGeom>
-          <a:solidFill>
-            <a:srgbClr val="095292"/>
-          </a:solidFill>
-          <a:ln>
-            <a:noFill/>
-          </a:ln>
-        </p:spPr>
-        <p:style>
-          <a:lnRef idx="1">
-            <a:schemeClr val="accent1"/>
-          </a:lnRef>
-          <a:fillRef idx="3">
-            <a:schemeClr val="accent1"/>
-          </a:fillRef>
-          <a:effectRef idx="2">
-            <a:schemeClr val="accent1"/>
-          </a:effectRef>
-          <a:fontRef idx="minor">
-            <a:schemeClr val="lt1"/>
-          </a:fontRef>
-        </p:style>
-        <p:txBody>
-          <a:bodyPr rtlCol="0" anchor="ctr"/>
-          <a:lstStyle/>
-          <a:p>
-            <a:pPr algn="ctr"/>
-          </a:p>
-        </p:txBody>
-      </p:sp>
-      <p:sp>
-        <p:nvSpPr>
-          <p:cNvPr id="23" name="TextBox 22"/>
-          <p:cNvSpPr txBox="1"/>
-          <p:nvPr/>
-        </p:nvSpPr>
-        <p:spPr>
-          <a:xfrm>
-            <a:off x="594360" y="5660136"/>
-            <a:ext cx="438912" cy="438912"/>
-          </a:xfrm>
-          <a:prstGeom prst="rect">
-            <a:avLst/>
-          </a:prstGeom>
-          <a:noFill/>
-        </p:spPr>
-        <p:txBody>
-          <a:bodyPr wrap="square" anchor="ctr"/>
-          <a:lstStyle/>
-          <a:p>
-            <a:pPr algn="ctr"/>
-            <a:r>
-              <a:rPr sz="1600" b="1" i="0">
-                <a:solidFill>
-                  <a:srgbClr val="FFFFFF"/>
-                </a:solidFill>
-                <a:latin typeface="Calibri"/>
-              </a:rPr>
-              <a:t>5</a:t>
-            </a:r>
-          </a:p>
-        </p:txBody>
-      </p:sp>
-      <p:sp>
-        <p:nvSpPr>
-          <p:cNvPr id="24" name="TextBox 23"/>
-          <p:cNvSpPr txBox="1"/>
-          <p:nvPr/>
-        </p:nvSpPr>
-        <p:spPr>
-          <a:xfrm>
-            <a:off x="1188720" y="5495544"/>
-            <a:ext cx="10271455" cy="786384"/>
-          </a:xfrm>
-          <a:prstGeom prst="rect">
-            <a:avLst/>
-          </a:prstGeom>
-          <a:noFill/>
-        </p:spPr>
-        <p:txBody>
-          <a:bodyPr wrap="square" anchor="ctr"/>
-          <a:lstStyle/>
-          <a:p>
-            <a:r>
-              <a:rPr sz="1400" b="1" i="0">
-                <a:solidFill>
-                  <a:srgbClr val="095292"/>
-                </a:solidFill>
-                <a:latin typeface="Calibri"/>
-              </a:rPr>
-              <a:t>Armar el backlog priorizado de correcciones con responsable y criterio de cierre verificable para cada item, ordenado por severidad, y aplicar en clase al menos las dos correcciones bloqueantes antes de subir el paquete corregido a la plataforma del curso.</a:t>
-            </a:r>
-          </a:p>
-        </p:txBody>
-      </p:sp>
-      <p:sp>
-        <p:nvSpPr>
-          <p:cNvPr id="25" name="TextBox 24"/>
+          <a:bodyPr wrap="square">
+            <a:spAutoFit/>
+          </a:bodyPr>
+          <a:lstStyle/>
+          <a:p>
+            <a:pPr>
+              <a:spcAft>
+                <a:spcPts val="800"/>
+              </a:spcAft>
+            </a:pPr>
+            <a:r>
+              <a:rPr sz="2000" b="0" i="0">
+                <a:solidFill>
+                  <a:srgbClr val="333333"/>
+                </a:solidFill>
+                <a:latin typeface="Calibri"/>
+              </a:rPr>
+              <a:t>–   </a:t>
+            </a:r>
+            <a:r>
+              <a:rPr sz="2000" b="1" i="0">
+                <a:solidFill>
+                  <a:srgbClr val="333333"/>
+                </a:solidFill>
+                <a:latin typeface="Calibri"/>
+              </a:rPr>
+              <a:t>Por que importa al PI:</a:t>
+            </a:r>
+            <a:r>
+              <a:rPr sz="2000" b="0" i="0">
+                <a:solidFill>
+                  <a:srgbClr val="333333"/>
+                </a:solidFill>
+                <a:latin typeface="Calibri"/>
+              </a:rPr>
+              <a:t> el paquete de VetCare ya tiene requisitos, casos de uso y clases, pero nadie ha verificado que los tres describan el mismo sistema; sin esa verificacion los planos se contradicen y quien construya va a escoger al azar cual documento obedecer.</a:t>
+            </a:r>
+          </a:p>
+          <a:p>
+            <a:pPr>
+              <a:spcAft>
+                <a:spcPts val="800"/>
+              </a:spcAft>
+            </a:pPr>
+            <a:r>
+              <a:rPr sz="2000" b="0" i="0">
+                <a:solidFill>
+                  <a:srgbClr val="333333"/>
+                </a:solidFill>
+                <a:latin typeface="Calibri"/>
+              </a:rPr>
+              <a:t>–   Esta sesion produce evidencia propia: matriz, glosario, acta de revision y backlog, y por eso se califica igual que cualquier otra entrega.</a:t>
+            </a:r>
+          </a:p>
+          <a:p>
+            <a:pPr>
+              <a:spcAft>
+                <a:spcPts val="800"/>
+              </a:spcAft>
+            </a:pPr>
+            <a:r>
+              <a:rPr sz="2000" b="0" i="0">
+                <a:solidFill>
+                  <a:srgbClr val="333333"/>
+                </a:solidFill>
+                <a:latin typeface="Calibri"/>
+              </a:rPr>
+              <a:t>–   Lo que hoy quede ambiguo lo paga el compañero que solo cursa Programacion II, que recibira estos planos sin poder preguntarle nada a la clinica Huellitas.</a:t>
+            </a:r>
+          </a:p>
+        </p:txBody>
+      </p:sp>
+      <p:sp>
+        <p:nvSpPr>
+          <p:cNvPr id="6" name="TextBox 5"/>
           <p:cNvSpPr txBox="1"/>
           <p:nvPr/>
         </p:nvSpPr>
@@ -7133,154 +6367,21 @@
                 </a:solidFill>
                 <a:latin typeface="Calibri"/>
               </a:rPr>
-              <a:t>Antes de entregar — autochequeo</a:t>
-            </a:r>
-          </a:p>
-        </p:txBody>
-      </p:sp>
-      <p:sp>
-        <p:nvSpPr>
-          <p:cNvPr id="5" name="Rounded Rectangle 4"/>
-          <p:cNvSpPr/>
-          <p:nvPr/>
-        </p:nvSpPr>
-        <p:spPr>
-          <a:xfrm>
-            <a:off x="457200" y="1261872"/>
-            <a:ext cx="11277295" cy="566928"/>
-          </a:xfrm>
-          <a:prstGeom prst="roundRect">
-            <a:avLst>
-              <a:gd name="adj" fmla="val 12000"/>
-            </a:avLst>
-          </a:prstGeom>
-          <a:solidFill>
-            <a:srgbClr val="F2F2F2"/>
-          </a:solidFill>
-          <a:ln>
-            <a:noFill/>
-          </a:ln>
-        </p:spPr>
-        <p:style>
-          <a:lnRef idx="1">
-            <a:schemeClr val="accent1"/>
-          </a:lnRef>
-          <a:fillRef idx="3">
-            <a:schemeClr val="accent1"/>
-          </a:fillRef>
-          <a:effectRef idx="2">
-            <a:schemeClr val="accent1"/>
-          </a:effectRef>
-          <a:fontRef idx="minor">
-            <a:schemeClr val="lt1"/>
-          </a:fontRef>
-        </p:style>
-        <p:txBody>
-          <a:bodyPr rtlCol="0" anchor="ctr"/>
-          <a:lstStyle/>
-          <a:p>
-            <a:pPr algn="ctr"/>
-          </a:p>
-        </p:txBody>
-      </p:sp>
-      <p:sp>
-        <p:nvSpPr>
-          <p:cNvPr id="6" name="Rectangle 5"/>
-          <p:cNvSpPr/>
-          <p:nvPr/>
-        </p:nvSpPr>
-        <p:spPr>
-          <a:xfrm>
-            <a:off x="640080" y="1408175"/>
-            <a:ext cx="274320" cy="274320"/>
-          </a:xfrm>
-          <a:prstGeom prst="rect">
-            <a:avLst/>
-          </a:prstGeom>
-          <a:solidFill>
-            <a:srgbClr val="FFFFFF"/>
-          </a:solidFill>
-          <a:ln>
-            <a:solidFill>
-              <a:srgbClr val="333333"/>
-            </a:solidFill>
-          </a:ln>
-        </p:spPr>
-        <p:style>
-          <a:lnRef idx="1">
-            <a:schemeClr val="accent1"/>
-          </a:lnRef>
-          <a:fillRef idx="3">
-            <a:schemeClr val="accent1"/>
-          </a:fillRef>
-          <a:effectRef idx="2">
-            <a:schemeClr val="accent1"/>
-          </a:effectRef>
-          <a:fontRef idx="minor">
-            <a:schemeClr val="lt1"/>
-          </a:fontRef>
-        </p:style>
-        <p:txBody>
-          <a:bodyPr rtlCol="0" anchor="ctr"/>
-          <a:lstStyle/>
-          <a:p>
-            <a:pPr algn="ctr"/>
-          </a:p>
-        </p:txBody>
-      </p:sp>
-      <p:sp>
-        <p:nvSpPr>
-          <p:cNvPr id="7" name="Rectangle 6"/>
-          <p:cNvSpPr/>
-          <p:nvPr/>
-        </p:nvSpPr>
-        <p:spPr>
-          <a:xfrm>
-            <a:off x="640080" y="1408175"/>
-            <a:ext cx="73152" cy="274320"/>
-          </a:xfrm>
-          <a:prstGeom prst="rect">
-            <a:avLst/>
-          </a:prstGeom>
-          <a:solidFill>
-            <a:srgbClr val="269CCB"/>
-          </a:solidFill>
-          <a:ln>
-            <a:noFill/>
-          </a:ln>
-        </p:spPr>
-        <p:style>
-          <a:lnRef idx="1">
-            <a:schemeClr val="accent1"/>
-          </a:lnRef>
-          <a:fillRef idx="3">
-            <a:schemeClr val="accent1"/>
-          </a:fillRef>
-          <a:effectRef idx="2">
-            <a:schemeClr val="accent1"/>
-          </a:effectRef>
-          <a:fontRef idx="minor">
-            <a:schemeClr val="lt1"/>
-          </a:fontRef>
-        </p:style>
-        <p:txBody>
-          <a:bodyPr rtlCol="0" anchor="ctr"/>
-          <a:lstStyle/>
-          <a:p>
-            <a:pPr algn="ctr"/>
-          </a:p>
-        </p:txBody>
-      </p:sp>
-      <p:sp>
-        <p:nvSpPr>
-          <p:cNvPr id="8" name="TextBox 7"/>
+              <a:t>Taller PI — punto de partida</a:t>
+            </a:r>
+          </a:p>
+        </p:txBody>
+      </p:sp>
+      <p:sp>
+        <p:nvSpPr>
+          <p:cNvPr id="5" name="TextBox 4"/>
           <p:cNvSpPr txBox="1"/>
           <p:nvPr/>
         </p:nvSpPr>
         <p:spPr>
           <a:xfrm>
-            <a:off x="1097280" y="1353312"/>
-            <a:ext cx="10362895" cy="402336"/>
+            <a:off x="457200" y="1170432"/>
+            <a:ext cx="11277295" cy="5230368"/>
           </a:xfrm>
           <a:prstGeom prst="rect">
             <a:avLst/>
@@ -7288,354 +6389,63 @@
           <a:noFill/>
         </p:spPr>
         <p:txBody>
-          <a:bodyPr wrap="square" anchor="ctr"/>
-          <a:lstStyle/>
-          <a:p>
-            <a:r>
-              <a:rPr sz="1500" b="0" i="0">
+          <a:bodyPr wrap="square">
+            <a:spAutoFit/>
+          </a:bodyPr>
+          <a:lstStyle/>
+          <a:p>
+            <a:pPr>
+              <a:spcAft>
+                <a:spcPts val="800"/>
+              </a:spcAft>
+            </a:pPr>
+            <a:r>
+              <a:rPr sz="2000" b="0" i="0">
                 <a:solidFill>
                   <a:srgbClr val="333333"/>
                 </a:solidFill>
                 <a:latin typeface="Calibri"/>
               </a:rPr>
-              <a:t>Si toma el requisito mas ambicioso de su catalogo y lo persigue hasta el diagrama de clases, en que punto exacto se le pierde el rastro?</a:t>
-            </a:r>
-          </a:p>
-        </p:txBody>
-      </p:sp>
-      <p:sp>
-        <p:nvSpPr>
-          <p:cNvPr id="9" name="Rounded Rectangle 8"/>
-          <p:cNvSpPr/>
-          <p:nvPr/>
-        </p:nvSpPr>
-        <p:spPr>
-          <a:xfrm>
-            <a:off x="457200" y="1938528"/>
-            <a:ext cx="11277295" cy="566928"/>
-          </a:xfrm>
-          <a:prstGeom prst="roundRect">
-            <a:avLst>
-              <a:gd name="adj" fmla="val 12000"/>
-            </a:avLst>
-          </a:prstGeom>
-          <a:solidFill>
-            <a:srgbClr val="F2F2F2"/>
-          </a:solidFill>
-          <a:ln>
-            <a:noFill/>
-          </a:ln>
-        </p:spPr>
-        <p:style>
-          <a:lnRef idx="1">
-            <a:schemeClr val="accent1"/>
-          </a:lnRef>
-          <a:fillRef idx="3">
-            <a:schemeClr val="accent1"/>
-          </a:fillRef>
-          <a:effectRef idx="2">
-            <a:schemeClr val="accent1"/>
-          </a:effectRef>
-          <a:fontRef idx="minor">
-            <a:schemeClr val="lt1"/>
-          </a:fontRef>
-        </p:style>
-        <p:txBody>
-          <a:bodyPr rtlCol="0" anchor="ctr"/>
-          <a:lstStyle/>
-          <a:p>
-            <a:pPr algn="ctr"/>
-          </a:p>
-        </p:txBody>
-      </p:sp>
-      <p:sp>
-        <p:nvSpPr>
-          <p:cNvPr id="10" name="Rectangle 9"/>
-          <p:cNvSpPr/>
-          <p:nvPr/>
-        </p:nvSpPr>
-        <p:spPr>
-          <a:xfrm>
-            <a:off x="640080" y="2084832"/>
-            <a:ext cx="274320" cy="274320"/>
-          </a:xfrm>
-          <a:prstGeom prst="rect">
-            <a:avLst/>
-          </a:prstGeom>
-          <a:solidFill>
-            <a:srgbClr val="FFFFFF"/>
-          </a:solidFill>
-          <a:ln>
-            <a:solidFill>
-              <a:srgbClr val="333333"/>
-            </a:solidFill>
-          </a:ln>
-        </p:spPr>
-        <p:style>
-          <a:lnRef idx="1">
-            <a:schemeClr val="accent1"/>
-          </a:lnRef>
-          <a:fillRef idx="3">
-            <a:schemeClr val="accent1"/>
-          </a:fillRef>
-          <a:effectRef idx="2">
-            <a:schemeClr val="accent1"/>
-          </a:effectRef>
-          <a:fontRef idx="minor">
-            <a:schemeClr val="lt1"/>
-          </a:fontRef>
-        </p:style>
-        <p:txBody>
-          <a:bodyPr rtlCol="0" anchor="ctr"/>
-          <a:lstStyle/>
-          <a:p>
-            <a:pPr algn="ctr"/>
-          </a:p>
-        </p:txBody>
-      </p:sp>
-      <p:sp>
-        <p:nvSpPr>
-          <p:cNvPr id="11" name="Rectangle 10"/>
-          <p:cNvSpPr/>
-          <p:nvPr/>
-        </p:nvSpPr>
-        <p:spPr>
-          <a:xfrm>
-            <a:off x="640080" y="2084832"/>
-            <a:ext cx="73152" cy="274320"/>
-          </a:xfrm>
-          <a:prstGeom prst="rect">
-            <a:avLst/>
-          </a:prstGeom>
-          <a:solidFill>
-            <a:srgbClr val="269CCB"/>
-          </a:solidFill>
-          <a:ln>
-            <a:noFill/>
-          </a:ln>
-        </p:spPr>
-        <p:style>
-          <a:lnRef idx="1">
-            <a:schemeClr val="accent1"/>
-          </a:lnRef>
-          <a:fillRef idx="3">
-            <a:schemeClr val="accent1"/>
-          </a:fillRef>
-          <a:effectRef idx="2">
-            <a:schemeClr val="accent1"/>
-          </a:effectRef>
-          <a:fontRef idx="minor">
-            <a:schemeClr val="lt1"/>
-          </a:fontRef>
-        </p:style>
-        <p:txBody>
-          <a:bodyPr rtlCol="0" anchor="ctr"/>
-          <a:lstStyle/>
-          <a:p>
-            <a:pPr algn="ctr"/>
-          </a:p>
-        </p:txBody>
-      </p:sp>
-      <p:sp>
-        <p:nvSpPr>
-          <p:cNvPr id="12" name="TextBox 11"/>
-          <p:cNvSpPr txBox="1"/>
-          <p:nvPr/>
-        </p:nvSpPr>
-        <p:spPr>
-          <a:xfrm>
-            <a:off x="1097280" y="2029968"/>
-            <a:ext cx="10362895" cy="402336"/>
-          </a:xfrm>
-          <a:prstGeom prst="rect">
-            <a:avLst/>
-          </a:prstGeom>
-          <a:noFill/>
-        </p:spPr>
-        <p:txBody>
-          <a:bodyPr wrap="square" anchor="ctr"/>
-          <a:lstStyle/>
-          <a:p>
-            <a:r>
-              <a:rPr sz="1500" b="0" i="0">
+              <a:t>–   Cada estudiante llega con tres artefactos de VetCare escritos en semanas distintas: el catalogo de RF y RNF, el diagrama con las especificaciones de casos de uso y el diagrama de clases con sus multiplicidades.</a:t>
+            </a:r>
+          </a:p>
+          <a:p>
+            <a:pPr>
+              <a:spcAft>
+                <a:spcPts val="800"/>
+              </a:spcAft>
+            </a:pPr>
+            <a:r>
+              <a:rPr sz="2000" b="0" i="0">
                 <a:solidFill>
                   <a:srgbClr val="333333"/>
                 </a:solidFill>
                 <a:latin typeface="Calibri"/>
               </a:rPr>
-              <a:t>Cuantos nombres distintos esta usando su paquete para referirse a la misma persona que lleva la mascota a la clinica?</a:t>
-            </a:r>
-          </a:p>
-        </p:txBody>
-      </p:sp>
-      <p:sp>
-        <p:nvSpPr>
-          <p:cNvPr id="13" name="Rounded Rectangle 12"/>
-          <p:cNvSpPr/>
-          <p:nvPr/>
-        </p:nvSpPr>
-        <p:spPr>
-          <a:xfrm>
-            <a:off x="457200" y="2615184"/>
-            <a:ext cx="11277295" cy="566928"/>
-          </a:xfrm>
-          <a:prstGeom prst="roundRect">
-            <a:avLst>
-              <a:gd name="adj" fmla="val 12000"/>
-            </a:avLst>
-          </a:prstGeom>
-          <a:solidFill>
-            <a:srgbClr val="F2F2F2"/>
-          </a:solidFill>
-          <a:ln>
-            <a:noFill/>
-          </a:ln>
-        </p:spPr>
-        <p:style>
-          <a:lnRef idx="1">
-            <a:schemeClr val="accent1"/>
-          </a:lnRef>
-          <a:fillRef idx="3">
-            <a:schemeClr val="accent1"/>
-          </a:fillRef>
-          <a:effectRef idx="2">
-            <a:schemeClr val="accent1"/>
-          </a:effectRef>
-          <a:fontRef idx="minor">
-            <a:schemeClr val="lt1"/>
-          </a:fontRef>
-        </p:style>
-        <p:txBody>
-          <a:bodyPr rtlCol="0" anchor="ctr"/>
-          <a:lstStyle/>
-          <a:p>
-            <a:pPr algn="ctr"/>
-          </a:p>
-        </p:txBody>
-      </p:sp>
-      <p:sp>
-        <p:nvSpPr>
-          <p:cNvPr id="14" name="Rectangle 13"/>
-          <p:cNvSpPr/>
-          <p:nvPr/>
-        </p:nvSpPr>
-        <p:spPr>
-          <a:xfrm>
-            <a:off x="640080" y="2761488"/>
-            <a:ext cx="274320" cy="274320"/>
-          </a:xfrm>
-          <a:prstGeom prst="rect">
-            <a:avLst/>
-          </a:prstGeom>
-          <a:solidFill>
-            <a:srgbClr val="FFFFFF"/>
-          </a:solidFill>
-          <a:ln>
-            <a:solidFill>
-              <a:srgbClr val="333333"/>
-            </a:solidFill>
-          </a:ln>
-        </p:spPr>
-        <p:style>
-          <a:lnRef idx="1">
-            <a:schemeClr val="accent1"/>
-          </a:lnRef>
-          <a:fillRef idx="3">
-            <a:schemeClr val="accent1"/>
-          </a:fillRef>
-          <a:effectRef idx="2">
-            <a:schemeClr val="accent1"/>
-          </a:effectRef>
-          <a:fontRef idx="minor">
-            <a:schemeClr val="lt1"/>
-          </a:fontRef>
-        </p:style>
-        <p:txBody>
-          <a:bodyPr rtlCol="0" anchor="ctr"/>
-          <a:lstStyle/>
-          <a:p>
-            <a:pPr algn="ctr"/>
-          </a:p>
-        </p:txBody>
-      </p:sp>
-      <p:sp>
-        <p:nvSpPr>
-          <p:cNvPr id="15" name="Rectangle 14"/>
-          <p:cNvSpPr/>
-          <p:nvPr/>
-        </p:nvSpPr>
-        <p:spPr>
-          <a:xfrm>
-            <a:off x="640080" y="2761488"/>
-            <a:ext cx="73152" cy="274320"/>
-          </a:xfrm>
-          <a:prstGeom prst="rect">
-            <a:avLst/>
-          </a:prstGeom>
-          <a:solidFill>
-            <a:srgbClr val="269CCB"/>
-          </a:solidFill>
-          <a:ln>
-            <a:noFill/>
-          </a:ln>
-        </p:spPr>
-        <p:style>
-          <a:lnRef idx="1">
-            <a:schemeClr val="accent1"/>
-          </a:lnRef>
-          <a:fillRef idx="3">
-            <a:schemeClr val="accent1"/>
-          </a:fillRef>
-          <a:effectRef idx="2">
-            <a:schemeClr val="accent1"/>
-          </a:effectRef>
-          <a:fontRef idx="minor">
-            <a:schemeClr val="lt1"/>
-          </a:fontRef>
-        </p:style>
-        <p:txBody>
-          <a:bodyPr rtlCol="0" anchor="ctr"/>
-          <a:lstStyle/>
-          <a:p>
-            <a:pPr algn="ctr"/>
-          </a:p>
-        </p:txBody>
-      </p:sp>
-      <p:sp>
-        <p:nvSpPr>
-          <p:cNvPr id="16" name="TextBox 15"/>
-          <p:cNvSpPr txBox="1"/>
-          <p:nvPr/>
-        </p:nvSpPr>
-        <p:spPr>
-          <a:xfrm>
-            <a:off x="1097280" y="2706624"/>
-            <a:ext cx="10362895" cy="402336"/>
-          </a:xfrm>
-          <a:prstGeom prst="rect">
-            <a:avLst/>
-          </a:prstGeom>
-          <a:noFill/>
-        </p:spPr>
-        <p:txBody>
-          <a:bodyPr wrap="square" anchor="ctr"/>
-          <a:lstStyle/>
-          <a:p>
-            <a:r>
-              <a:rPr sz="1500" b="0" i="0">
+              <a:t>–   Nadie ha vuelto a abrir el catalogo de requisitos desde que se dibujaron las clases, y los nombres empezaron a moverse: donde el requisito dice Propietario, la clase dice Dueño y el mockup dice Cliente.</a:t>
+            </a:r>
+          </a:p>
+          <a:p>
+            <a:pPr>
+              <a:spcAft>
+                <a:spcPts val="800"/>
+              </a:spcAft>
+            </a:pPr>
+            <a:r>
+              <a:rPr sz="2000" b="0" i="0">
                 <a:solidFill>
                   <a:srgbClr val="333333"/>
                 </a:solidFill>
                 <a:latin typeface="Calibri"/>
               </a:rPr>
-              <a:t>Si usted desapareciera y solo quedara el paquete escrito, alguien podria construir VetCare sin hacer una sola pregunta?</a:t>
-            </a:r>
-          </a:p>
-        </p:txBody>
-      </p:sp>
-      <p:sp>
-        <p:nvSpPr>
-          <p:cNvPr id="17" name="TextBox 16"/>
+              <a:t>–   Hay al menos un requisito que suena bonito en el papel, el RF-07 de recordatorio de cita, y no aparece en ningun caso de uso ni en ninguna clase del modelo.</a:t>
+            </a:r>
+          </a:p>
+        </p:txBody>
+      </p:sp>
+      <p:sp>
+        <p:nvSpPr>
+          <p:cNvPr id="6" name="TextBox 5"/>
           <p:cNvSpPr txBox="1"/>
           <p:nvPr/>
         </p:nvSpPr>
@@ -7809,21 +6619,111 @@
                 </a:solidFill>
                 <a:latin typeface="Calibri"/>
               </a:rPr>
-              <a:t>Criterios de exito / entregable</a:t>
-            </a:r>
-          </a:p>
-        </p:txBody>
-      </p:sp>
-      <p:sp>
-        <p:nvSpPr>
-          <p:cNvPr id="5" name="TextBox 4"/>
+              <a:t>Taller PI — pasos guiados</a:t>
+            </a:r>
+          </a:p>
+        </p:txBody>
+      </p:sp>
+      <p:sp>
+        <p:nvSpPr>
+          <p:cNvPr id="5" name="Rounded Rectangle 4"/>
+          <p:cNvSpPr/>
+          <p:nvPr/>
+        </p:nvSpPr>
+        <p:spPr>
+          <a:xfrm>
+            <a:off x="457200" y="1234440"/>
+            <a:ext cx="11277295" cy="950976"/>
+          </a:xfrm>
+          <a:prstGeom prst="roundRect">
+            <a:avLst>
+              <a:gd name="adj" fmla="val 12000"/>
+            </a:avLst>
+          </a:prstGeom>
+          <a:solidFill>
+            <a:srgbClr val="F2F2F2"/>
+          </a:solidFill>
+          <a:ln>
+            <a:noFill/>
+          </a:ln>
+        </p:spPr>
+        <p:style>
+          <a:lnRef idx="1">
+            <a:schemeClr val="accent1"/>
+          </a:lnRef>
+          <a:fillRef idx="3">
+            <a:schemeClr val="accent1"/>
+          </a:fillRef>
+          <a:effectRef idx="2">
+            <a:schemeClr val="accent1"/>
+          </a:effectRef>
+          <a:fontRef idx="minor">
+            <a:schemeClr val="lt1"/>
+          </a:fontRef>
+        </p:style>
+        <p:txBody>
+          <a:bodyPr rtlCol="0" anchor="ctr"/>
+          <a:lstStyle/>
+          <a:p>
+            <a:pPr algn="ctr"/>
+          </a:p>
+        </p:txBody>
+      </p:sp>
+      <p:sp>
+        <p:nvSpPr>
+          <p:cNvPr id="6" name="Rounded Rectangle 5"/>
+          <p:cNvSpPr/>
+          <p:nvPr/>
+        </p:nvSpPr>
+        <p:spPr>
+          <a:xfrm>
+            <a:off x="594360" y="1490472"/>
+            <a:ext cx="438912" cy="438912"/>
+          </a:xfrm>
+          <a:prstGeom prst="roundRect">
+            <a:avLst>
+              <a:gd name="adj" fmla="val 12000"/>
+            </a:avLst>
+          </a:prstGeom>
+          <a:solidFill>
+            <a:srgbClr val="095292"/>
+          </a:solidFill>
+          <a:ln>
+            <a:noFill/>
+          </a:ln>
+        </p:spPr>
+        <p:style>
+          <a:lnRef idx="1">
+            <a:schemeClr val="accent1"/>
+          </a:lnRef>
+          <a:fillRef idx="3">
+            <a:schemeClr val="accent1"/>
+          </a:fillRef>
+          <a:effectRef idx="2">
+            <a:schemeClr val="accent1"/>
+          </a:effectRef>
+          <a:fontRef idx="minor">
+            <a:schemeClr val="lt1"/>
+          </a:fontRef>
+        </p:style>
+        <p:txBody>
+          <a:bodyPr rtlCol="0" anchor="ctr"/>
+          <a:lstStyle/>
+          <a:p>
+            <a:pPr algn="ctr"/>
+          </a:p>
+        </p:txBody>
+      </p:sp>
+      <p:sp>
+        <p:nvSpPr>
+          <p:cNvPr id="7" name="TextBox 6"/>
           <p:cNvSpPr txBox="1"/>
           <p:nvPr/>
         </p:nvSpPr>
         <p:spPr>
           <a:xfrm>
-            <a:off x="457200" y="1170432"/>
-            <a:ext cx="11277295" cy="5230368"/>
+            <a:off x="594360" y="1490472"/>
+            <a:ext cx="438912" cy="438912"/>
           </a:xfrm>
           <a:prstGeom prst="rect">
             <a:avLst/>
@@ -7831,219 +6731,677 @@
           <a:noFill/>
         </p:spPr>
         <p:txBody>
-          <a:bodyPr wrap="square">
-            <a:spAutoFit/>
-          </a:bodyPr>
-          <a:lstStyle/>
-          <a:p>
-            <a:pPr>
-              <a:spcAft>
-                <a:spcPts val="800"/>
-              </a:spcAft>
-            </a:pPr>
-            <a:r>
-              <a:rPr sz="2000" b="0" i="0">
-                <a:solidFill>
-                  <a:srgbClr val="333333"/>
-                </a:solidFill>
-                <a:latin typeface="Calibri"/>
-              </a:rPr>
-              <a:t>–   </a:t>
-            </a:r>
-            <a:r>
-              <a:rPr sz="2000" b="1" i="0">
-                <a:solidFill>
-                  <a:srgbClr val="333333"/>
-                </a:solidFill>
-                <a:latin typeface="Calibri"/>
-              </a:rPr>
-              <a:t>Entregable:</a:t>
-            </a:r>
-            <a:r>
-              <a:rPr sz="2000" b="0" i="0">
-                <a:solidFill>
-                  <a:srgbClr val="333333"/>
-                </a:solidFill>
-                <a:latin typeface="Calibri"/>
-              </a:rPr>
-              <a:t> Un documento con la matriz de trazabilidad RF a CU a Clase, el glosario de nombres canonicos, el acta de revision entre pares con hallazgos clasificados por severidad y el backlog priorizado de correcciones, subido a la plataforma del curso.</a:t>
-            </a:r>
-          </a:p>
-          <a:p>
-            <a:pPr>
-              <a:spcAft>
-                <a:spcPts val="800"/>
-              </a:spcAft>
-            </a:pPr>
-            <a:r>
-              <a:rPr sz="2000" b="0" i="0">
-                <a:solidFill>
-                  <a:srgbClr val="333333"/>
-                </a:solidFill>
-                <a:latin typeface="Calibri"/>
-              </a:rPr>
-              <a:t>–   </a:t>
-            </a:r>
-            <a:r>
-              <a:rPr sz="2000" b="1" i="0">
-                <a:solidFill>
-                  <a:srgbClr val="333333"/>
-                </a:solidFill>
-                <a:latin typeface="Calibri"/>
-              </a:rPr>
-              <a:t>Exito:</a:t>
-            </a:r>
-            <a:r>
-              <a:rPr sz="2000" b="0" i="0">
-                <a:solidFill>
-                  <a:srgbClr val="333333"/>
-                </a:solidFill>
-                <a:latin typeface="Calibri"/>
-              </a:rPr>
-              <a:t> La matriz de trazabilidad cubre el cien por ciento de los RF y no deja casos de uso ni clases sin origen en algun requisito.</a:t>
-            </a:r>
-          </a:p>
-          <a:p>
-            <a:pPr>
-              <a:spcAft>
-                <a:spcPts val="800"/>
-              </a:spcAft>
-            </a:pPr>
-            <a:r>
-              <a:rPr sz="2000" b="0" i="0">
-                <a:solidFill>
-                  <a:srgbClr val="333333"/>
-                </a:solidFill>
-                <a:latin typeface="Calibri"/>
-              </a:rPr>
-              <a:t>–   </a:t>
-            </a:r>
-            <a:r>
-              <a:rPr sz="2000" b="1" i="0">
-                <a:solidFill>
-                  <a:srgbClr val="333333"/>
-                </a:solidFill>
-                <a:latin typeface="Calibri"/>
-              </a:rPr>
-              <a:t>Exito:</a:t>
-            </a:r>
-            <a:r>
-              <a:rPr sz="2000" b="0" i="0">
-                <a:solidFill>
-                  <a:srgbClr val="333333"/>
-                </a:solidFill>
-                <a:latin typeface="Calibri"/>
-              </a:rPr>
-              <a:t> El glosario tiene minimo ocho conceptos con nombre canonico, definicion de una linea y sinonimos prohibidos, y los artefactos ya fueron renombrados en consecuencia.</a:t>
-            </a:r>
-          </a:p>
-          <a:p>
-            <a:pPr>
-              <a:spcAft>
-                <a:spcPts val="800"/>
-              </a:spcAft>
-            </a:pPr>
-            <a:r>
-              <a:rPr sz="2000" b="0" i="0">
-                <a:solidFill>
-                  <a:srgbClr val="333333"/>
-                </a:solidFill>
-                <a:latin typeface="Calibri"/>
-              </a:rPr>
-              <a:t>–   </a:t>
-            </a:r>
-            <a:r>
-              <a:rPr sz="2000" b="1" i="0">
-                <a:solidFill>
-                  <a:srgbClr val="333333"/>
-                </a:solidFill>
-                <a:latin typeface="Calibri"/>
-              </a:rPr>
-              <a:t>Exito:</a:t>
-            </a:r>
-            <a:r>
-              <a:rPr sz="2000" b="0" i="0">
-                <a:solidFill>
-                  <a:srgbClr val="333333"/>
-                </a:solidFill>
-                <a:latin typeface="Calibri"/>
-              </a:rPr>
-              <a:t> El acta de revision entre pares registra minimo seis hallazgos con ubicacion exacta, descripcion objetiva y severidad asignada.</a:t>
-            </a:r>
-          </a:p>
-          <a:p>
-            <a:pPr>
-              <a:spcAft>
-                <a:spcPts val="800"/>
-              </a:spcAft>
-            </a:pPr>
-            <a:r>
-              <a:rPr sz="2000" b="0" i="0">
-                <a:solidFill>
-                  <a:srgbClr val="333333"/>
-                </a:solidFill>
-                <a:latin typeface="Calibri"/>
-              </a:rPr>
-              <a:t>–   </a:t>
-            </a:r>
-            <a:r>
-              <a:rPr sz="2000" b="1" i="0">
-                <a:solidFill>
-                  <a:srgbClr val="333333"/>
-                </a:solidFill>
-                <a:latin typeface="Calibri"/>
-              </a:rPr>
-              <a:t>Exito:</a:t>
-            </a:r>
-            <a:r>
-              <a:rPr sz="2000" b="0" i="0">
-                <a:solidFill>
-                  <a:srgbClr val="333333"/>
-                </a:solidFill>
-                <a:latin typeface="Calibri"/>
-              </a:rPr>
-              <a:t> El backlog tiene responsable y criterio de cierre verificable por item, y las correcciones de severidad bloqueante quedaron aplicadas en el paquete entregado.</a:t>
-            </a:r>
-          </a:p>
-          <a:p>
-            <a:pPr>
-              <a:spcAft>
-                <a:spcPts val="800"/>
-              </a:spcAft>
-            </a:pPr>
-            <a:r>
-              <a:rPr sz="2000" b="0" i="0">
-                <a:solidFill>
-                  <a:srgbClr val="333333"/>
-                </a:solidFill>
-                <a:latin typeface="Calibri"/>
-              </a:rPr>
-              <a:t>–   </a:t>
-            </a:r>
-            <a:r>
-              <a:rPr sz="2000" b="1" i="0">
-                <a:solidFill>
-                  <a:srgbClr val="333333"/>
-                </a:solidFill>
-                <a:latin typeface="Calibri"/>
-              </a:rPr>
-              <a:t>Entrega en la plataforma del curso</a:t>
-            </a:r>
-            <a:r>
-              <a:rPr sz="2000" b="0" i="0">
-                <a:solidFill>
-                  <a:srgbClr val="333333"/>
-                </a:solidFill>
-                <a:latin typeface="Calibri"/>
-              </a:rPr>
-              <a:t> — en la fecha que indique el docente.</a:t>
-            </a:r>
-          </a:p>
-        </p:txBody>
-      </p:sp>
-      <p:sp>
-        <p:nvSpPr>
-          <p:cNvPr id="6" name="TextBox 5"/>
+          <a:bodyPr wrap="square" anchor="ctr"/>
+          <a:lstStyle/>
+          <a:p>
+            <a:pPr algn="ctr"/>
+            <a:r>
+              <a:rPr sz="1600" b="1" i="0">
+                <a:solidFill>
+                  <a:srgbClr val="FFFFFF"/>
+                </a:solidFill>
+                <a:latin typeface="Calibri"/>
+              </a:rPr>
+              <a:t>1</a:t>
+            </a:r>
+          </a:p>
+        </p:txBody>
+      </p:sp>
+      <p:sp>
+        <p:nvSpPr>
+          <p:cNvPr id="8" name="TextBox 7"/>
+          <p:cNvSpPr txBox="1"/>
+          <p:nvPr/>
+        </p:nvSpPr>
+        <p:spPr>
+          <a:xfrm>
+            <a:off x="1188720" y="1325880"/>
+            <a:ext cx="10271455" cy="786384"/>
+          </a:xfrm>
+          <a:prstGeom prst="rect">
+            <a:avLst/>
+          </a:prstGeom>
+          <a:noFill/>
+        </p:spPr>
+        <p:txBody>
+          <a:bodyPr wrap="square" anchor="ctr"/>
+          <a:lstStyle/>
+          <a:p>
+            <a:r>
+              <a:rPr sz="1500" b="1" i="0">
+                <a:solidFill>
+                  <a:srgbClr val="095292"/>
+                </a:solidFill>
+                <a:latin typeface="Calibri"/>
+              </a:rPr>
+              <a:t>Construir en Google Docs la matriz de trazabilidad de VetCare con las columnas RF, Caso de uso, Clase o clases implicadas y Mockup, incluyendo todos los requisitos del catalogo, y marcar en rojo cada fila incompleta.</a:t>
+            </a:r>
+          </a:p>
+        </p:txBody>
+      </p:sp>
+      <p:sp>
+        <p:nvSpPr>
+          <p:cNvPr id="9" name="Rounded Rectangle 8"/>
+          <p:cNvSpPr/>
+          <p:nvPr/>
+        </p:nvSpPr>
+        <p:spPr>
+          <a:xfrm>
+            <a:off x="457200" y="2276856"/>
+            <a:ext cx="11277295" cy="950976"/>
+          </a:xfrm>
+          <a:prstGeom prst="roundRect">
+            <a:avLst>
+              <a:gd name="adj" fmla="val 12000"/>
+            </a:avLst>
+          </a:prstGeom>
+          <a:solidFill>
+            <a:srgbClr val="E8F4FA"/>
+          </a:solidFill>
+          <a:ln>
+            <a:noFill/>
+          </a:ln>
+        </p:spPr>
+        <p:style>
+          <a:lnRef idx="1">
+            <a:schemeClr val="accent1"/>
+          </a:lnRef>
+          <a:fillRef idx="3">
+            <a:schemeClr val="accent1"/>
+          </a:fillRef>
+          <a:effectRef idx="2">
+            <a:schemeClr val="accent1"/>
+          </a:effectRef>
+          <a:fontRef idx="minor">
+            <a:schemeClr val="lt1"/>
+          </a:fontRef>
+        </p:style>
+        <p:txBody>
+          <a:bodyPr rtlCol="0" anchor="ctr"/>
+          <a:lstStyle/>
+          <a:p>
+            <a:pPr algn="ctr"/>
+          </a:p>
+        </p:txBody>
+      </p:sp>
+      <p:sp>
+        <p:nvSpPr>
+          <p:cNvPr id="10" name="Rounded Rectangle 9"/>
+          <p:cNvSpPr/>
+          <p:nvPr/>
+        </p:nvSpPr>
+        <p:spPr>
+          <a:xfrm>
+            <a:off x="594360" y="2532888"/>
+            <a:ext cx="438912" cy="438912"/>
+          </a:xfrm>
+          <a:prstGeom prst="roundRect">
+            <a:avLst>
+              <a:gd name="adj" fmla="val 12000"/>
+            </a:avLst>
+          </a:prstGeom>
+          <a:solidFill>
+            <a:srgbClr val="095292"/>
+          </a:solidFill>
+          <a:ln>
+            <a:noFill/>
+          </a:ln>
+        </p:spPr>
+        <p:style>
+          <a:lnRef idx="1">
+            <a:schemeClr val="accent1"/>
+          </a:lnRef>
+          <a:fillRef idx="3">
+            <a:schemeClr val="accent1"/>
+          </a:fillRef>
+          <a:effectRef idx="2">
+            <a:schemeClr val="accent1"/>
+          </a:effectRef>
+          <a:fontRef idx="minor">
+            <a:schemeClr val="lt1"/>
+          </a:fontRef>
+        </p:style>
+        <p:txBody>
+          <a:bodyPr rtlCol="0" anchor="ctr"/>
+          <a:lstStyle/>
+          <a:p>
+            <a:pPr algn="ctr"/>
+          </a:p>
+        </p:txBody>
+      </p:sp>
+      <p:sp>
+        <p:nvSpPr>
+          <p:cNvPr id="11" name="TextBox 10"/>
+          <p:cNvSpPr txBox="1"/>
+          <p:nvPr/>
+        </p:nvSpPr>
+        <p:spPr>
+          <a:xfrm>
+            <a:off x="594360" y="2532888"/>
+            <a:ext cx="438912" cy="438912"/>
+          </a:xfrm>
+          <a:prstGeom prst="rect">
+            <a:avLst/>
+          </a:prstGeom>
+          <a:noFill/>
+        </p:spPr>
+        <p:txBody>
+          <a:bodyPr wrap="square" anchor="ctr"/>
+          <a:lstStyle/>
+          <a:p>
+            <a:pPr algn="ctr"/>
+            <a:r>
+              <a:rPr sz="1600" b="1" i="0">
+                <a:solidFill>
+                  <a:srgbClr val="FFFFFF"/>
+                </a:solidFill>
+                <a:latin typeface="Calibri"/>
+              </a:rPr>
+              <a:t>2</a:t>
+            </a:r>
+          </a:p>
+        </p:txBody>
+      </p:sp>
+      <p:sp>
+        <p:nvSpPr>
+          <p:cNvPr id="12" name="TextBox 11"/>
+          <p:cNvSpPr txBox="1"/>
+          <p:nvPr/>
+        </p:nvSpPr>
+        <p:spPr>
+          <a:xfrm>
+            <a:off x="1188720" y="2368296"/>
+            <a:ext cx="10271455" cy="786384"/>
+          </a:xfrm>
+          <a:prstGeom prst="rect">
+            <a:avLst/>
+          </a:prstGeom>
+          <a:noFill/>
+        </p:spPr>
+        <p:txBody>
+          <a:bodyPr wrap="square" anchor="ctr"/>
+          <a:lstStyle/>
+          <a:p>
+            <a:r>
+              <a:rPr sz="1400" b="1" i="0">
+                <a:solidFill>
+                  <a:srgbClr val="095292"/>
+                </a:solidFill>
+                <a:latin typeface="Calibri"/>
+              </a:rPr>
+              <a:t>Levantar el glosario de nombres canonicos con minimo ocho conceptos del dominio (Propietario, Mascota, Consulta, Cita, Veterinario, Vacuna, Expediente, Bitacora), cada uno con definicion de una linea y sinonimos prohibidos, y renombrar en los artefactos todo lo que no coincida.</a:t>
+            </a:r>
+          </a:p>
+        </p:txBody>
+      </p:sp>
+      <p:sp>
+        <p:nvSpPr>
+          <p:cNvPr id="13" name="Rounded Rectangle 12"/>
+          <p:cNvSpPr/>
+          <p:nvPr/>
+        </p:nvSpPr>
+        <p:spPr>
+          <a:xfrm>
+            <a:off x="457200" y="3319272"/>
+            <a:ext cx="11277295" cy="950976"/>
+          </a:xfrm>
+          <a:prstGeom prst="roundRect">
+            <a:avLst>
+              <a:gd name="adj" fmla="val 12000"/>
+            </a:avLst>
+          </a:prstGeom>
+          <a:solidFill>
+            <a:srgbClr val="F2F2F2"/>
+          </a:solidFill>
+          <a:ln>
+            <a:noFill/>
+          </a:ln>
+        </p:spPr>
+        <p:style>
+          <a:lnRef idx="1">
+            <a:schemeClr val="accent1"/>
+          </a:lnRef>
+          <a:fillRef idx="3">
+            <a:schemeClr val="accent1"/>
+          </a:fillRef>
+          <a:effectRef idx="2">
+            <a:schemeClr val="accent1"/>
+          </a:effectRef>
+          <a:fontRef idx="minor">
+            <a:schemeClr val="lt1"/>
+          </a:fontRef>
+        </p:style>
+        <p:txBody>
+          <a:bodyPr rtlCol="0" anchor="ctr"/>
+          <a:lstStyle/>
+          <a:p>
+            <a:pPr algn="ctr"/>
+          </a:p>
+        </p:txBody>
+      </p:sp>
+      <p:sp>
+        <p:nvSpPr>
+          <p:cNvPr id="14" name="Rounded Rectangle 13"/>
+          <p:cNvSpPr/>
+          <p:nvPr/>
+        </p:nvSpPr>
+        <p:spPr>
+          <a:xfrm>
+            <a:off x="594360" y="3575304"/>
+            <a:ext cx="438912" cy="438912"/>
+          </a:xfrm>
+          <a:prstGeom prst="roundRect">
+            <a:avLst>
+              <a:gd name="adj" fmla="val 12000"/>
+            </a:avLst>
+          </a:prstGeom>
+          <a:solidFill>
+            <a:srgbClr val="095292"/>
+          </a:solidFill>
+          <a:ln>
+            <a:noFill/>
+          </a:ln>
+        </p:spPr>
+        <p:style>
+          <a:lnRef idx="1">
+            <a:schemeClr val="accent1"/>
+          </a:lnRef>
+          <a:fillRef idx="3">
+            <a:schemeClr val="accent1"/>
+          </a:fillRef>
+          <a:effectRef idx="2">
+            <a:schemeClr val="accent1"/>
+          </a:effectRef>
+          <a:fontRef idx="minor">
+            <a:schemeClr val="lt1"/>
+          </a:fontRef>
+        </p:style>
+        <p:txBody>
+          <a:bodyPr rtlCol="0" anchor="ctr"/>
+          <a:lstStyle/>
+          <a:p>
+            <a:pPr algn="ctr"/>
+          </a:p>
+        </p:txBody>
+      </p:sp>
+      <p:sp>
+        <p:nvSpPr>
+          <p:cNvPr id="15" name="TextBox 14"/>
+          <p:cNvSpPr txBox="1"/>
+          <p:nvPr/>
+        </p:nvSpPr>
+        <p:spPr>
+          <a:xfrm>
+            <a:off x="594360" y="3575304"/>
+            <a:ext cx="438912" cy="438912"/>
+          </a:xfrm>
+          <a:prstGeom prst="rect">
+            <a:avLst/>
+          </a:prstGeom>
+          <a:noFill/>
+        </p:spPr>
+        <p:txBody>
+          <a:bodyPr wrap="square" anchor="ctr"/>
+          <a:lstStyle/>
+          <a:p>
+            <a:pPr algn="ctr"/>
+            <a:r>
+              <a:rPr sz="1600" b="1" i="0">
+                <a:solidFill>
+                  <a:srgbClr val="FFFFFF"/>
+                </a:solidFill>
+                <a:latin typeface="Calibri"/>
+              </a:rPr>
+              <a:t>3</a:t>
+            </a:r>
+          </a:p>
+        </p:txBody>
+      </p:sp>
+      <p:sp>
+        <p:nvSpPr>
+          <p:cNvPr id="16" name="TextBox 15"/>
+          <p:cNvSpPr txBox="1"/>
+          <p:nvPr/>
+        </p:nvSpPr>
+        <p:spPr>
+          <a:xfrm>
+            <a:off x="1188720" y="3410712"/>
+            <a:ext cx="10271455" cy="786384"/>
+          </a:xfrm>
+          <a:prstGeom prst="rect">
+            <a:avLst/>
+          </a:prstGeom>
+          <a:noFill/>
+        </p:spPr>
+        <p:txBody>
+          <a:bodyPr wrap="square" anchor="ctr"/>
+          <a:lstStyle/>
+          <a:p>
+            <a:r>
+              <a:rPr sz="1400" b="1" i="0">
+                <a:solidFill>
+                  <a:srgbClr val="095292"/>
+                </a:solidFill>
+                <a:latin typeface="Calibri"/>
+              </a:rPr>
+              <a:t>Intercambiar el paquete completo con otro estudiante (o con otro equipo, si el docente autorizo trabajo en equipo) y aplicar la rubrica de auditoria de seis puntos durante veinte minutos cronometrados, registrando cada hallazgo con ubicacion exacta, descripcion y severidad bloqueante, mayor o menor; queda prohibido proponer soluciones durante la revision.</a:t>
+            </a:r>
+          </a:p>
+        </p:txBody>
+      </p:sp>
+      <p:sp>
+        <p:nvSpPr>
+          <p:cNvPr id="17" name="Rounded Rectangle 16"/>
+          <p:cNvSpPr/>
+          <p:nvPr/>
+        </p:nvSpPr>
+        <p:spPr>
+          <a:xfrm>
+            <a:off x="457200" y="4361688"/>
+            <a:ext cx="11277295" cy="950976"/>
+          </a:xfrm>
+          <a:prstGeom prst="roundRect">
+            <a:avLst>
+              <a:gd name="adj" fmla="val 12000"/>
+            </a:avLst>
+          </a:prstGeom>
+          <a:solidFill>
+            <a:srgbClr val="E8F4FA"/>
+          </a:solidFill>
+          <a:ln>
+            <a:noFill/>
+          </a:ln>
+        </p:spPr>
+        <p:style>
+          <a:lnRef idx="1">
+            <a:schemeClr val="accent1"/>
+          </a:lnRef>
+          <a:fillRef idx="3">
+            <a:schemeClr val="accent1"/>
+          </a:fillRef>
+          <a:effectRef idx="2">
+            <a:schemeClr val="accent1"/>
+          </a:effectRef>
+          <a:fontRef idx="minor">
+            <a:schemeClr val="lt1"/>
+          </a:fontRef>
+        </p:style>
+        <p:txBody>
+          <a:bodyPr rtlCol="0" anchor="ctr"/>
+          <a:lstStyle/>
+          <a:p>
+            <a:pPr algn="ctr"/>
+          </a:p>
+        </p:txBody>
+      </p:sp>
+      <p:sp>
+        <p:nvSpPr>
+          <p:cNvPr id="18" name="Rounded Rectangle 17"/>
+          <p:cNvSpPr/>
+          <p:nvPr/>
+        </p:nvSpPr>
+        <p:spPr>
+          <a:xfrm>
+            <a:off x="594360" y="4617720"/>
+            <a:ext cx="438912" cy="438912"/>
+          </a:xfrm>
+          <a:prstGeom prst="roundRect">
+            <a:avLst>
+              <a:gd name="adj" fmla="val 12000"/>
+            </a:avLst>
+          </a:prstGeom>
+          <a:solidFill>
+            <a:srgbClr val="095292"/>
+          </a:solidFill>
+          <a:ln>
+            <a:noFill/>
+          </a:ln>
+        </p:spPr>
+        <p:style>
+          <a:lnRef idx="1">
+            <a:schemeClr val="accent1"/>
+          </a:lnRef>
+          <a:fillRef idx="3">
+            <a:schemeClr val="accent1"/>
+          </a:fillRef>
+          <a:effectRef idx="2">
+            <a:schemeClr val="accent1"/>
+          </a:effectRef>
+          <a:fontRef idx="minor">
+            <a:schemeClr val="lt1"/>
+          </a:fontRef>
+        </p:style>
+        <p:txBody>
+          <a:bodyPr rtlCol="0" anchor="ctr"/>
+          <a:lstStyle/>
+          <a:p>
+            <a:pPr algn="ctr"/>
+          </a:p>
+        </p:txBody>
+      </p:sp>
+      <p:sp>
+        <p:nvSpPr>
+          <p:cNvPr id="19" name="TextBox 18"/>
+          <p:cNvSpPr txBox="1"/>
+          <p:nvPr/>
+        </p:nvSpPr>
+        <p:spPr>
+          <a:xfrm>
+            <a:off x="594360" y="4617720"/>
+            <a:ext cx="438912" cy="438912"/>
+          </a:xfrm>
+          <a:prstGeom prst="rect">
+            <a:avLst/>
+          </a:prstGeom>
+          <a:noFill/>
+        </p:spPr>
+        <p:txBody>
+          <a:bodyPr wrap="square" anchor="ctr"/>
+          <a:lstStyle/>
+          <a:p>
+            <a:pPr algn="ctr"/>
+            <a:r>
+              <a:rPr sz="1600" b="1" i="0">
+                <a:solidFill>
+                  <a:srgbClr val="FFFFFF"/>
+                </a:solidFill>
+                <a:latin typeface="Calibri"/>
+              </a:rPr>
+              <a:t>4</a:t>
+            </a:r>
+          </a:p>
+        </p:txBody>
+      </p:sp>
+      <p:sp>
+        <p:nvSpPr>
+          <p:cNvPr id="20" name="TextBox 19"/>
+          <p:cNvSpPr txBox="1"/>
+          <p:nvPr/>
+        </p:nvSpPr>
+        <p:spPr>
+          <a:xfrm>
+            <a:off x="1188720" y="4453128"/>
+            <a:ext cx="10271455" cy="786384"/>
+          </a:xfrm>
+          <a:prstGeom prst="rect">
+            <a:avLst/>
+          </a:prstGeom>
+          <a:noFill/>
+        </p:spPr>
+        <p:txBody>
+          <a:bodyPr wrap="square" anchor="ctr"/>
+          <a:lstStyle/>
+          <a:p>
+            <a:r>
+              <a:rPr sz="1500" b="1" i="0">
+                <a:solidFill>
+                  <a:srgbClr val="095292"/>
+                </a:solidFill>
+                <a:latin typeface="Calibri"/>
+              </a:rPr>
+              <a:t>Recibir los hallazgos propios y clasificarlos en aceptado, rechazado con justificacion escrita o aplazado por acuerdo, sin borrar ninguno del acta, de modo que quede evidencia de la decision tomada.</a:t>
+            </a:r>
+          </a:p>
+        </p:txBody>
+      </p:sp>
+      <p:sp>
+        <p:nvSpPr>
+          <p:cNvPr id="21" name="Rounded Rectangle 20"/>
+          <p:cNvSpPr/>
+          <p:nvPr/>
+        </p:nvSpPr>
+        <p:spPr>
+          <a:xfrm>
+            <a:off x="457200" y="5404104"/>
+            <a:ext cx="11277295" cy="950976"/>
+          </a:xfrm>
+          <a:prstGeom prst="roundRect">
+            <a:avLst>
+              <a:gd name="adj" fmla="val 12000"/>
+            </a:avLst>
+          </a:prstGeom>
+          <a:solidFill>
+            <a:srgbClr val="F2F2F2"/>
+          </a:solidFill>
+          <a:ln>
+            <a:noFill/>
+          </a:ln>
+        </p:spPr>
+        <p:style>
+          <a:lnRef idx="1">
+            <a:schemeClr val="accent1"/>
+          </a:lnRef>
+          <a:fillRef idx="3">
+            <a:schemeClr val="accent1"/>
+          </a:fillRef>
+          <a:effectRef idx="2">
+            <a:schemeClr val="accent1"/>
+          </a:effectRef>
+          <a:fontRef idx="minor">
+            <a:schemeClr val="lt1"/>
+          </a:fontRef>
+        </p:style>
+        <p:txBody>
+          <a:bodyPr rtlCol="0" anchor="ctr"/>
+          <a:lstStyle/>
+          <a:p>
+            <a:pPr algn="ctr"/>
+          </a:p>
+        </p:txBody>
+      </p:sp>
+      <p:sp>
+        <p:nvSpPr>
+          <p:cNvPr id="22" name="Rounded Rectangle 21"/>
+          <p:cNvSpPr/>
+          <p:nvPr/>
+        </p:nvSpPr>
+        <p:spPr>
+          <a:xfrm>
+            <a:off x="594360" y="5660136"/>
+            <a:ext cx="438912" cy="438912"/>
+          </a:xfrm>
+          <a:prstGeom prst="roundRect">
+            <a:avLst>
+              <a:gd name="adj" fmla="val 12000"/>
+            </a:avLst>
+          </a:prstGeom>
+          <a:solidFill>
+            <a:srgbClr val="095292"/>
+          </a:solidFill>
+          <a:ln>
+            <a:noFill/>
+          </a:ln>
+        </p:spPr>
+        <p:style>
+          <a:lnRef idx="1">
+            <a:schemeClr val="accent1"/>
+          </a:lnRef>
+          <a:fillRef idx="3">
+            <a:schemeClr val="accent1"/>
+          </a:fillRef>
+          <a:effectRef idx="2">
+            <a:schemeClr val="accent1"/>
+          </a:effectRef>
+          <a:fontRef idx="minor">
+            <a:schemeClr val="lt1"/>
+          </a:fontRef>
+        </p:style>
+        <p:txBody>
+          <a:bodyPr rtlCol="0" anchor="ctr"/>
+          <a:lstStyle/>
+          <a:p>
+            <a:pPr algn="ctr"/>
+          </a:p>
+        </p:txBody>
+      </p:sp>
+      <p:sp>
+        <p:nvSpPr>
+          <p:cNvPr id="23" name="TextBox 22"/>
+          <p:cNvSpPr txBox="1"/>
+          <p:nvPr/>
+        </p:nvSpPr>
+        <p:spPr>
+          <a:xfrm>
+            <a:off x="594360" y="5660136"/>
+            <a:ext cx="438912" cy="438912"/>
+          </a:xfrm>
+          <a:prstGeom prst="rect">
+            <a:avLst/>
+          </a:prstGeom>
+          <a:noFill/>
+        </p:spPr>
+        <p:txBody>
+          <a:bodyPr wrap="square" anchor="ctr"/>
+          <a:lstStyle/>
+          <a:p>
+            <a:pPr algn="ctr"/>
+            <a:r>
+              <a:rPr sz="1600" b="1" i="0">
+                <a:solidFill>
+                  <a:srgbClr val="FFFFFF"/>
+                </a:solidFill>
+                <a:latin typeface="Calibri"/>
+              </a:rPr>
+              <a:t>5</a:t>
+            </a:r>
+          </a:p>
+        </p:txBody>
+      </p:sp>
+      <p:sp>
+        <p:nvSpPr>
+          <p:cNvPr id="24" name="TextBox 23"/>
+          <p:cNvSpPr txBox="1"/>
+          <p:nvPr/>
+        </p:nvSpPr>
+        <p:spPr>
+          <a:xfrm>
+            <a:off x="1188720" y="5495544"/>
+            <a:ext cx="10271455" cy="786384"/>
+          </a:xfrm>
+          <a:prstGeom prst="rect">
+            <a:avLst/>
+          </a:prstGeom>
+          <a:noFill/>
+        </p:spPr>
+        <p:txBody>
+          <a:bodyPr wrap="square" anchor="ctr"/>
+          <a:lstStyle/>
+          <a:p>
+            <a:r>
+              <a:rPr sz="1400" b="1" i="0">
+                <a:solidFill>
+                  <a:srgbClr val="095292"/>
+                </a:solidFill>
+                <a:latin typeface="Calibri"/>
+              </a:rPr>
+              <a:t>Armar el backlog priorizado de correcciones con responsable y criterio de cierre verificable para cada item, ordenado por severidad, y aplicar en clase al menos las dos correcciones bloqueantes antes de subir el paquete corregido a la plataforma del curso.</a:t>
+            </a:r>
+          </a:p>
+        </p:txBody>
+      </p:sp>
+      <p:sp>
+        <p:nvSpPr>
+          <p:cNvPr id="25" name="TextBox 24"/>
           <p:cNvSpPr txBox="1"/>
           <p:nvPr/>
         </p:nvSpPr>
@@ -8217,7 +7575,7 @@
                 </a:solidFill>
                 <a:latin typeface="Calibri"/>
               </a:rPr>
-              <a:t>Para el PI esta semana</a:t>
+              <a:t>Antes de entregar — autochequeo</a:t>
             </a:r>
           </a:p>
         </p:txBody>
@@ -8231,7 +7589,7 @@
         <p:spPr>
           <a:xfrm>
             <a:off x="457200" y="1261872"/>
-            <a:ext cx="11277295" cy="1051560"/>
+            <a:ext cx="11277295" cy="566928"/>
           </a:xfrm>
           <a:prstGeom prst="roundRect">
             <a:avLst>
@@ -8239,7 +7597,7 @@
             </a:avLst>
           </a:prstGeom>
           <a:solidFill>
-            <a:srgbClr val="E8F4FA"/>
+            <a:srgbClr val="F2F2F2"/>
           </a:solidFill>
           <a:ln>
             <a:noFill/>
@@ -8275,8 +7633,53 @@
         </p:nvSpPr>
         <p:spPr>
           <a:xfrm>
-            <a:off x="457200" y="1261872"/>
-            <a:ext cx="128016" cy="1051560"/>
+            <a:off x="640080" y="1408175"/>
+            <a:ext cx="274320" cy="274320"/>
+          </a:xfrm>
+          <a:prstGeom prst="rect">
+            <a:avLst/>
+          </a:prstGeom>
+          <a:solidFill>
+            <a:srgbClr val="FFFFFF"/>
+          </a:solidFill>
+          <a:ln>
+            <a:solidFill>
+              <a:srgbClr val="333333"/>
+            </a:solidFill>
+          </a:ln>
+        </p:spPr>
+        <p:style>
+          <a:lnRef idx="1">
+            <a:schemeClr val="accent1"/>
+          </a:lnRef>
+          <a:fillRef idx="3">
+            <a:schemeClr val="accent1"/>
+          </a:fillRef>
+          <a:effectRef idx="2">
+            <a:schemeClr val="accent1"/>
+          </a:effectRef>
+          <a:fontRef idx="minor">
+            <a:schemeClr val="lt1"/>
+          </a:fontRef>
+        </p:style>
+        <p:txBody>
+          <a:bodyPr rtlCol="0" anchor="ctr"/>
+          <a:lstStyle/>
+          <a:p>
+            <a:pPr algn="ctr"/>
+          </a:p>
+        </p:txBody>
+      </p:sp>
+      <p:sp>
+        <p:nvSpPr>
+          <p:cNvPr id="7" name="Rectangle 6"/>
+          <p:cNvSpPr/>
+          <p:nvPr/>
+        </p:nvSpPr>
+        <p:spPr>
+          <a:xfrm>
+            <a:off x="640080" y="1408175"/>
+            <a:ext cx="73152" cy="274320"/>
           </a:xfrm>
           <a:prstGeom prst="rect">
             <a:avLst/>
@@ -8312,14 +7715,14 @@
       </p:sp>
       <p:sp>
         <p:nvSpPr>
-          <p:cNvPr id="7" name="TextBox 6"/>
+          <p:cNvPr id="8" name="TextBox 7"/>
           <p:cNvSpPr txBox="1"/>
           <p:nvPr/>
         </p:nvSpPr>
         <p:spPr>
           <a:xfrm>
-            <a:off x="777240" y="1399031"/>
-            <a:ext cx="10774375" cy="822959"/>
+            <a:off x="1097280" y="1353312"/>
+            <a:ext cx="10362895" cy="402336"/>
           </a:xfrm>
           <a:prstGeom prst="rect">
             <a:avLst/>
@@ -8327,49 +7730,31 @@
           <a:noFill/>
         </p:spPr>
         <p:txBody>
-          <a:bodyPr wrap="square">
-            <a:spAutoFit/>
-          </a:bodyPr>
-          <a:lstStyle/>
-          <a:p>
-            <a:r>
-              <a:rPr sz="1200" b="1" i="0">
-                <a:solidFill>
-                  <a:srgbClr val="269CCB"/>
-                </a:solidFill>
-                <a:latin typeface="Calibri"/>
-              </a:rPr>
-              <a:t>Info</a:t>
-            </a:r>
-          </a:p>
-          <a:p>
-            <a:pPr>
-              <a:spcBef>
-                <a:spcPts val="400"/>
-              </a:spcBef>
-            </a:pPr>
-            <a:r>
-              <a:rPr sz="1400" b="0" i="0">
+          <a:bodyPr wrap="square" anchor="ctr"/>
+          <a:lstStyle/>
+          <a:p>
+            <a:r>
+              <a:rPr sz="1500" b="0" i="0">
                 <a:solidFill>
                   <a:srgbClr val="333333"/>
                 </a:solidFill>
                 <a:latin typeface="Calibri"/>
               </a:rPr>
-              <a:t>Hito: El paquete de diseño de VetCare queda auditado y consistente: requisitos, casos de uso y diagrama de clases usan los mismos nombres y no se contradicen entre si.</a:t>
-            </a:r>
-          </a:p>
-        </p:txBody>
-      </p:sp>
-      <p:sp>
-        <p:nvSpPr>
-          <p:cNvPr id="8" name="Rounded Rectangle 7"/>
+              <a:t>Si toma el requisito mas ambicioso de su catalogo y lo persigue hasta el diagrama de clases, en que punto exacto se le pierde el rastro?</a:t>
+            </a:r>
+          </a:p>
+        </p:txBody>
+      </p:sp>
+      <p:sp>
+        <p:nvSpPr>
+          <p:cNvPr id="9" name="Rounded Rectangle 8"/>
           <p:cNvSpPr/>
           <p:nvPr/>
         </p:nvSpPr>
         <p:spPr>
           <a:xfrm>
-            <a:off x="457200" y="2478024"/>
-            <a:ext cx="11277295" cy="1051560"/>
+            <a:off x="457200" y="1938528"/>
+            <a:ext cx="11277295" cy="566928"/>
           </a:xfrm>
           <a:prstGeom prst="roundRect">
             <a:avLst>
@@ -8377,7 +7762,7 @@
             </a:avLst>
           </a:prstGeom>
           <a:solidFill>
-            <a:srgbClr val="FFF8E1"/>
+            <a:srgbClr val="F2F2F2"/>
           </a:solidFill>
           <a:ln>
             <a:noFill/>
@@ -8407,23 +7792,25 @@
       </p:sp>
       <p:sp>
         <p:nvSpPr>
-          <p:cNvPr id="9" name="Rectangle 8"/>
+          <p:cNvPr id="10" name="Rectangle 9"/>
           <p:cNvSpPr/>
           <p:nvPr/>
         </p:nvSpPr>
         <p:spPr>
           <a:xfrm>
-            <a:off x="457200" y="2478024"/>
-            <a:ext cx="128016" cy="1051560"/>
+            <a:off x="640080" y="2084832"/>
+            <a:ext cx="274320" cy="274320"/>
           </a:xfrm>
           <a:prstGeom prst="rect">
             <a:avLst/>
           </a:prstGeom>
           <a:solidFill>
-            <a:srgbClr val="FFD000"/>
+            <a:srgbClr val="FFFFFF"/>
           </a:solidFill>
           <a:ln>
-            <a:noFill/>
+            <a:solidFill>
+              <a:srgbClr val="333333"/>
+            </a:solidFill>
           </a:ln>
         </p:spPr>
         <p:style>
@@ -8450,72 +7837,20 @@
       </p:sp>
       <p:sp>
         <p:nvSpPr>
-          <p:cNvPr id="10" name="TextBox 9"/>
-          <p:cNvSpPr txBox="1"/>
-          <p:nvPr/>
-        </p:nvSpPr>
-        <p:spPr>
-          <a:xfrm>
-            <a:off x="777240" y="2615184"/>
-            <a:ext cx="10774375" cy="822959"/>
-          </a:xfrm>
-          <a:prstGeom prst="rect">
-            <a:avLst/>
-          </a:prstGeom>
-          <a:noFill/>
-        </p:spPr>
-        <p:txBody>
-          <a:bodyPr wrap="square">
-            <a:spAutoFit/>
-          </a:bodyPr>
-          <a:lstStyle/>
-          <a:p>
-            <a:r>
-              <a:rPr sz="1200" b="1" i="0">
-                <a:solidFill>
-                  <a:srgbClr val="FFD000"/>
-                </a:solidFill>
-                <a:latin typeface="Calibri"/>
-              </a:rPr>
-              <a:t>Aclaración</a:t>
-            </a:r>
-          </a:p>
-          <a:p>
-            <a:pPr>
-              <a:spcBef>
-                <a:spcPts val="400"/>
-              </a:spcBef>
-            </a:pPr>
-            <a:r>
-              <a:rPr sz="1400" b="0" i="0">
-                <a:solidFill>
-                  <a:srgbClr val="333333"/>
-                </a:solidFill>
-                <a:latin typeface="Calibri"/>
-              </a:rPr>
-              <a:t>Enunciado completo: Clases/Proyecto Integrador/ (VetCare).</a:t>
-            </a:r>
-          </a:p>
-        </p:txBody>
-      </p:sp>
-      <p:sp>
-        <p:nvSpPr>
-          <p:cNvPr id="11" name="Rounded Rectangle 10"/>
+          <p:cNvPr id="11" name="Rectangle 10"/>
           <p:cNvSpPr/>
           <p:nvPr/>
         </p:nvSpPr>
         <p:spPr>
           <a:xfrm>
-            <a:off x="457200" y="3694176"/>
-            <a:ext cx="11277295" cy="1051560"/>
-          </a:xfrm>
-          <a:prstGeom prst="roundRect">
-            <a:avLst>
-              <a:gd name="adj" fmla="val 12000"/>
-            </a:avLst>
+            <a:off x="640080" y="2084832"/>
+            <a:ext cx="73152" cy="274320"/>
+          </a:xfrm>
+          <a:prstGeom prst="rect">
+            <a:avLst/>
           </a:prstGeom>
           <a:solidFill>
-            <a:srgbClr val="FBE4E4"/>
+            <a:srgbClr val="269CCB"/>
           </a:solidFill>
           <a:ln>
             <a:noFill/>
@@ -8545,20 +7880,54 @@
       </p:sp>
       <p:sp>
         <p:nvSpPr>
-          <p:cNvPr id="12" name="Rectangle 11"/>
+          <p:cNvPr id="12" name="TextBox 11"/>
+          <p:cNvSpPr txBox="1"/>
+          <p:nvPr/>
+        </p:nvSpPr>
+        <p:spPr>
+          <a:xfrm>
+            <a:off x="1097280" y="2029968"/>
+            <a:ext cx="10362895" cy="402336"/>
+          </a:xfrm>
+          <a:prstGeom prst="rect">
+            <a:avLst/>
+          </a:prstGeom>
+          <a:noFill/>
+        </p:spPr>
+        <p:txBody>
+          <a:bodyPr wrap="square" anchor="ctr"/>
+          <a:lstStyle/>
+          <a:p>
+            <a:r>
+              <a:rPr sz="1500" b="0" i="0">
+                <a:solidFill>
+                  <a:srgbClr val="333333"/>
+                </a:solidFill>
+                <a:latin typeface="Calibri"/>
+              </a:rPr>
+              <a:t>Cuantos nombres distintos esta usando su paquete para referirse a la misma persona que lleva la mascota a la clinica?</a:t>
+            </a:r>
+          </a:p>
+        </p:txBody>
+      </p:sp>
+      <p:sp>
+        <p:nvSpPr>
+          <p:cNvPr id="13" name="Rounded Rectangle 12"/>
           <p:cNvSpPr/>
           <p:nvPr/>
         </p:nvSpPr>
         <p:spPr>
           <a:xfrm>
-            <a:off x="457200" y="3694176"/>
-            <a:ext cx="128016" cy="1051560"/>
-          </a:xfrm>
-          <a:prstGeom prst="rect">
-            <a:avLst/>
+            <a:off x="457200" y="2615184"/>
+            <a:ext cx="11277295" cy="566928"/>
+          </a:xfrm>
+          <a:prstGeom prst="roundRect">
+            <a:avLst>
+              <a:gd name="adj" fmla="val 12000"/>
+            </a:avLst>
           </a:prstGeom>
           <a:solidFill>
-            <a:srgbClr val="A02030"/>
+            <a:srgbClr val="F2F2F2"/>
           </a:solidFill>
           <a:ln>
             <a:noFill/>
@@ -8588,14 +7957,102 @@
       </p:sp>
       <p:sp>
         <p:nvSpPr>
-          <p:cNvPr id="13" name="TextBox 12"/>
+          <p:cNvPr id="14" name="Rectangle 13"/>
+          <p:cNvSpPr/>
+          <p:nvPr/>
+        </p:nvSpPr>
+        <p:spPr>
+          <a:xfrm>
+            <a:off x="640080" y="2761488"/>
+            <a:ext cx="274320" cy="274320"/>
+          </a:xfrm>
+          <a:prstGeom prst="rect">
+            <a:avLst/>
+          </a:prstGeom>
+          <a:solidFill>
+            <a:srgbClr val="FFFFFF"/>
+          </a:solidFill>
+          <a:ln>
+            <a:solidFill>
+              <a:srgbClr val="333333"/>
+            </a:solidFill>
+          </a:ln>
+        </p:spPr>
+        <p:style>
+          <a:lnRef idx="1">
+            <a:schemeClr val="accent1"/>
+          </a:lnRef>
+          <a:fillRef idx="3">
+            <a:schemeClr val="accent1"/>
+          </a:fillRef>
+          <a:effectRef idx="2">
+            <a:schemeClr val="accent1"/>
+          </a:effectRef>
+          <a:fontRef idx="minor">
+            <a:schemeClr val="lt1"/>
+          </a:fontRef>
+        </p:style>
+        <p:txBody>
+          <a:bodyPr rtlCol="0" anchor="ctr"/>
+          <a:lstStyle/>
+          <a:p>
+            <a:pPr algn="ctr"/>
+          </a:p>
+        </p:txBody>
+      </p:sp>
+      <p:sp>
+        <p:nvSpPr>
+          <p:cNvPr id="15" name="Rectangle 14"/>
+          <p:cNvSpPr/>
+          <p:nvPr/>
+        </p:nvSpPr>
+        <p:spPr>
+          <a:xfrm>
+            <a:off x="640080" y="2761488"/>
+            <a:ext cx="73152" cy="274320"/>
+          </a:xfrm>
+          <a:prstGeom prst="rect">
+            <a:avLst/>
+          </a:prstGeom>
+          <a:solidFill>
+            <a:srgbClr val="269CCB"/>
+          </a:solidFill>
+          <a:ln>
+            <a:noFill/>
+          </a:ln>
+        </p:spPr>
+        <p:style>
+          <a:lnRef idx="1">
+            <a:schemeClr val="accent1"/>
+          </a:lnRef>
+          <a:fillRef idx="3">
+            <a:schemeClr val="accent1"/>
+          </a:fillRef>
+          <a:effectRef idx="2">
+            <a:schemeClr val="accent1"/>
+          </a:effectRef>
+          <a:fontRef idx="minor">
+            <a:schemeClr val="lt1"/>
+          </a:fontRef>
+        </p:style>
+        <p:txBody>
+          <a:bodyPr rtlCol="0" anchor="ctr"/>
+          <a:lstStyle/>
+          <a:p>
+            <a:pPr algn="ctr"/>
+          </a:p>
+        </p:txBody>
+      </p:sp>
+      <p:sp>
+        <p:nvSpPr>
+          <p:cNvPr id="16" name="TextBox 15"/>
           <p:cNvSpPr txBox="1"/>
           <p:nvPr/>
         </p:nvSpPr>
         <p:spPr>
           <a:xfrm>
-            <a:off x="777240" y="3831336"/>
-            <a:ext cx="10774375" cy="822959"/>
+            <a:off x="1097280" y="2706624"/>
+            <a:ext cx="10362895" cy="402336"/>
           </a:xfrm>
           <a:prstGeom prst="rect">
             <a:avLst/>
@@ -8603,42 +8060,24 @@
           <a:noFill/>
         </p:spPr>
         <p:txBody>
-          <a:bodyPr wrap="square">
-            <a:spAutoFit/>
-          </a:bodyPr>
-          <a:lstStyle/>
-          <a:p>
-            <a:r>
-              <a:rPr sz="1200" b="1" i="0">
-                <a:solidFill>
-                  <a:srgbClr val="A02030"/>
-                </a:solidFill>
-                <a:latin typeface="Calibri"/>
-              </a:rPr>
-              <a:t>Atención</a:t>
-            </a:r>
-          </a:p>
-          <a:p>
-            <a:pPr>
-              <a:spcBef>
-                <a:spcPts val="400"/>
-              </a:spcBef>
-            </a:pPr>
-            <a:r>
-              <a:rPr sz="1400" b="0" i="0">
+          <a:bodyPr wrap="square" anchor="ctr"/>
+          <a:lstStyle/>
+          <a:p>
+            <a:r>
+              <a:rPr sz="1500" b="0" i="0">
                 <a:solidFill>
                   <a:srgbClr val="333333"/>
                 </a:solidFill>
                 <a:latin typeface="Calibri"/>
               </a:rPr>
-              <a:t>Entrega del taller, si el docente lo asigna · en la fecha que indique el docente.</a:t>
-            </a:r>
-          </a:p>
-        </p:txBody>
-      </p:sp>
-      <p:sp>
-        <p:nvSpPr>
-          <p:cNvPr id="14" name="TextBox 13"/>
+              <a:t>Si usted desapareciera y solo quedara el paquete escrito, alguien podria construir VetCare sin hacer una sola pregunta?</a:t>
+            </a:r>
+          </a:p>
+        </p:txBody>
+      </p:sp>
+      <p:sp>
+        <p:nvSpPr>
+          <p:cNvPr id="17" name="TextBox 16"/>
           <p:cNvSpPr txBox="1"/>
           <p:nvPr/>
         </p:nvSpPr>
@@ -9037,6 +8476,1009 @@
         <p:spPr>
           <a:xfrm>
             <a:off x="0" y="0"/>
+            <a:ext cx="12191695" cy="960120"/>
+          </a:xfrm>
+          <a:prstGeom prst="rect">
+            <a:avLst/>
+          </a:prstGeom>
+          <a:solidFill>
+            <a:srgbClr val="095292"/>
+          </a:solidFill>
+          <a:ln>
+            <a:noFill/>
+          </a:ln>
+        </p:spPr>
+        <p:style>
+          <a:lnRef idx="1">
+            <a:schemeClr val="accent1"/>
+          </a:lnRef>
+          <a:fillRef idx="3">
+            <a:schemeClr val="accent1"/>
+          </a:fillRef>
+          <a:effectRef idx="2">
+            <a:schemeClr val="accent1"/>
+          </a:effectRef>
+          <a:fontRef idx="minor">
+            <a:schemeClr val="lt1"/>
+          </a:fontRef>
+        </p:style>
+        <p:txBody>
+          <a:bodyPr rtlCol="0" anchor="ctr"/>
+          <a:lstStyle/>
+          <a:p>
+            <a:pPr algn="ctr"/>
+          </a:p>
+        </p:txBody>
+      </p:sp>
+      <p:sp>
+        <p:nvSpPr>
+          <p:cNvPr id="3" name="Rectangle 2"/>
+          <p:cNvSpPr/>
+          <p:nvPr/>
+        </p:nvSpPr>
+        <p:spPr>
+          <a:xfrm>
+            <a:off x="0" y="960120"/>
+            <a:ext cx="12191695" cy="41148"/>
+          </a:xfrm>
+          <a:prstGeom prst="rect">
+            <a:avLst/>
+          </a:prstGeom>
+          <a:solidFill>
+            <a:srgbClr val="FFD000"/>
+          </a:solidFill>
+          <a:ln>
+            <a:noFill/>
+          </a:ln>
+        </p:spPr>
+        <p:style>
+          <a:lnRef idx="1">
+            <a:schemeClr val="accent1"/>
+          </a:lnRef>
+          <a:fillRef idx="3">
+            <a:schemeClr val="accent1"/>
+          </a:fillRef>
+          <a:effectRef idx="2">
+            <a:schemeClr val="accent1"/>
+          </a:effectRef>
+          <a:fontRef idx="minor">
+            <a:schemeClr val="lt1"/>
+          </a:fontRef>
+        </p:style>
+        <p:txBody>
+          <a:bodyPr rtlCol="0" anchor="ctr"/>
+          <a:lstStyle/>
+          <a:p>
+            <a:pPr algn="ctr"/>
+          </a:p>
+        </p:txBody>
+      </p:sp>
+      <p:sp>
+        <p:nvSpPr>
+          <p:cNvPr id="4" name="TextBox 3"/>
+          <p:cNvSpPr txBox="1"/>
+          <p:nvPr/>
+        </p:nvSpPr>
+        <p:spPr>
+          <a:xfrm>
+            <a:off x="457200" y="164592"/>
+            <a:ext cx="11277295" cy="502920"/>
+          </a:xfrm>
+          <a:prstGeom prst="rect">
+            <a:avLst/>
+          </a:prstGeom>
+          <a:noFill/>
+        </p:spPr>
+        <p:txBody>
+          <a:bodyPr wrap="square">
+            <a:spAutoFit/>
+          </a:bodyPr>
+          <a:lstStyle/>
+          <a:p>
+            <a:r>
+              <a:rPr sz="2600" b="1" i="0">
+                <a:solidFill>
+                  <a:srgbClr val="FFFFFF"/>
+                </a:solidFill>
+                <a:latin typeface="Calibri"/>
+              </a:rPr>
+              <a:t>Criterios de exito / entregable</a:t>
+            </a:r>
+          </a:p>
+        </p:txBody>
+      </p:sp>
+      <p:sp>
+        <p:nvSpPr>
+          <p:cNvPr id="5" name="TextBox 4"/>
+          <p:cNvSpPr txBox="1"/>
+          <p:nvPr/>
+        </p:nvSpPr>
+        <p:spPr>
+          <a:xfrm>
+            <a:off x="457200" y="1170432"/>
+            <a:ext cx="11277295" cy="5230368"/>
+          </a:xfrm>
+          <a:prstGeom prst="rect">
+            <a:avLst/>
+          </a:prstGeom>
+          <a:noFill/>
+        </p:spPr>
+        <p:txBody>
+          <a:bodyPr wrap="square">
+            <a:spAutoFit/>
+          </a:bodyPr>
+          <a:lstStyle/>
+          <a:p>
+            <a:pPr>
+              <a:spcAft>
+                <a:spcPts val="800"/>
+              </a:spcAft>
+            </a:pPr>
+            <a:r>
+              <a:rPr sz="2000" b="0" i="0">
+                <a:solidFill>
+                  <a:srgbClr val="333333"/>
+                </a:solidFill>
+                <a:latin typeface="Calibri"/>
+              </a:rPr>
+              <a:t>–   </a:t>
+            </a:r>
+            <a:r>
+              <a:rPr sz="2000" b="1" i="0">
+                <a:solidFill>
+                  <a:srgbClr val="333333"/>
+                </a:solidFill>
+                <a:latin typeface="Calibri"/>
+              </a:rPr>
+              <a:t>Entregable:</a:t>
+            </a:r>
+            <a:r>
+              <a:rPr sz="2000" b="0" i="0">
+                <a:solidFill>
+                  <a:srgbClr val="333333"/>
+                </a:solidFill>
+                <a:latin typeface="Calibri"/>
+              </a:rPr>
+              <a:t> Un documento con la matriz de trazabilidad RF a CU a Clase, el glosario de nombres canonicos, el acta de revision entre pares con hallazgos clasificados por severidad y el backlog priorizado de correcciones, subido a la plataforma del curso.</a:t>
+            </a:r>
+          </a:p>
+          <a:p>
+            <a:pPr>
+              <a:spcAft>
+                <a:spcPts val="800"/>
+              </a:spcAft>
+            </a:pPr>
+            <a:r>
+              <a:rPr sz="2000" b="0" i="0">
+                <a:solidFill>
+                  <a:srgbClr val="333333"/>
+                </a:solidFill>
+                <a:latin typeface="Calibri"/>
+              </a:rPr>
+              <a:t>–   </a:t>
+            </a:r>
+            <a:r>
+              <a:rPr sz="2000" b="1" i="0">
+                <a:solidFill>
+                  <a:srgbClr val="333333"/>
+                </a:solidFill>
+                <a:latin typeface="Calibri"/>
+              </a:rPr>
+              <a:t>Exito:</a:t>
+            </a:r>
+            <a:r>
+              <a:rPr sz="2000" b="0" i="0">
+                <a:solidFill>
+                  <a:srgbClr val="333333"/>
+                </a:solidFill>
+                <a:latin typeface="Calibri"/>
+              </a:rPr>
+              <a:t> La matriz de trazabilidad cubre el cien por ciento de los RF y no deja casos de uso ni clases sin origen en algun requisito.</a:t>
+            </a:r>
+          </a:p>
+          <a:p>
+            <a:pPr>
+              <a:spcAft>
+                <a:spcPts val="800"/>
+              </a:spcAft>
+            </a:pPr>
+            <a:r>
+              <a:rPr sz="2000" b="0" i="0">
+                <a:solidFill>
+                  <a:srgbClr val="333333"/>
+                </a:solidFill>
+                <a:latin typeface="Calibri"/>
+              </a:rPr>
+              <a:t>–   </a:t>
+            </a:r>
+            <a:r>
+              <a:rPr sz="2000" b="1" i="0">
+                <a:solidFill>
+                  <a:srgbClr val="333333"/>
+                </a:solidFill>
+                <a:latin typeface="Calibri"/>
+              </a:rPr>
+              <a:t>Exito:</a:t>
+            </a:r>
+            <a:r>
+              <a:rPr sz="2000" b="0" i="0">
+                <a:solidFill>
+                  <a:srgbClr val="333333"/>
+                </a:solidFill>
+                <a:latin typeface="Calibri"/>
+              </a:rPr>
+              <a:t> El glosario tiene minimo ocho conceptos con nombre canonico, definicion de una linea y sinonimos prohibidos, y los artefactos ya fueron renombrados en consecuencia.</a:t>
+            </a:r>
+          </a:p>
+          <a:p>
+            <a:pPr>
+              <a:spcAft>
+                <a:spcPts val="800"/>
+              </a:spcAft>
+            </a:pPr>
+            <a:r>
+              <a:rPr sz="2000" b="0" i="0">
+                <a:solidFill>
+                  <a:srgbClr val="333333"/>
+                </a:solidFill>
+                <a:latin typeface="Calibri"/>
+              </a:rPr>
+              <a:t>–   </a:t>
+            </a:r>
+            <a:r>
+              <a:rPr sz="2000" b="1" i="0">
+                <a:solidFill>
+                  <a:srgbClr val="333333"/>
+                </a:solidFill>
+                <a:latin typeface="Calibri"/>
+              </a:rPr>
+              <a:t>Exito:</a:t>
+            </a:r>
+            <a:r>
+              <a:rPr sz="2000" b="0" i="0">
+                <a:solidFill>
+                  <a:srgbClr val="333333"/>
+                </a:solidFill>
+                <a:latin typeface="Calibri"/>
+              </a:rPr>
+              <a:t> El acta de revision entre pares registra minimo seis hallazgos con ubicacion exacta, descripcion objetiva y severidad asignada.</a:t>
+            </a:r>
+          </a:p>
+          <a:p>
+            <a:pPr>
+              <a:spcAft>
+                <a:spcPts val="800"/>
+              </a:spcAft>
+            </a:pPr>
+            <a:r>
+              <a:rPr sz="2000" b="0" i="0">
+                <a:solidFill>
+                  <a:srgbClr val="333333"/>
+                </a:solidFill>
+                <a:latin typeface="Calibri"/>
+              </a:rPr>
+              <a:t>–   </a:t>
+            </a:r>
+            <a:r>
+              <a:rPr sz="2000" b="1" i="0">
+                <a:solidFill>
+                  <a:srgbClr val="333333"/>
+                </a:solidFill>
+                <a:latin typeface="Calibri"/>
+              </a:rPr>
+              <a:t>Exito:</a:t>
+            </a:r>
+            <a:r>
+              <a:rPr sz="2000" b="0" i="0">
+                <a:solidFill>
+                  <a:srgbClr val="333333"/>
+                </a:solidFill>
+                <a:latin typeface="Calibri"/>
+              </a:rPr>
+              <a:t> El backlog tiene responsable y criterio de cierre verificable por item, y las correcciones de severidad bloqueante quedaron aplicadas en el paquete entregado.</a:t>
+            </a:r>
+          </a:p>
+          <a:p>
+            <a:pPr>
+              <a:spcAft>
+                <a:spcPts val="800"/>
+              </a:spcAft>
+            </a:pPr>
+            <a:r>
+              <a:rPr sz="2000" b="0" i="0">
+                <a:solidFill>
+                  <a:srgbClr val="333333"/>
+                </a:solidFill>
+                <a:latin typeface="Calibri"/>
+              </a:rPr>
+              <a:t>–   </a:t>
+            </a:r>
+            <a:r>
+              <a:rPr sz="2000" b="1" i="0">
+                <a:solidFill>
+                  <a:srgbClr val="333333"/>
+                </a:solidFill>
+                <a:latin typeface="Calibri"/>
+              </a:rPr>
+              <a:t>Entrega en la plataforma del curso</a:t>
+            </a:r>
+            <a:r>
+              <a:rPr sz="2000" b="0" i="0">
+                <a:solidFill>
+                  <a:srgbClr val="333333"/>
+                </a:solidFill>
+                <a:latin typeface="Calibri"/>
+              </a:rPr>
+              <a:t> — en la fecha que indique el docente.</a:t>
+            </a:r>
+          </a:p>
+        </p:txBody>
+      </p:sp>
+      <p:sp>
+        <p:nvSpPr>
+          <p:cNvPr id="6" name="TextBox 5"/>
+          <p:cNvSpPr txBox="1"/>
+          <p:nvPr/>
+        </p:nvSpPr>
+        <p:spPr>
+          <a:xfrm>
+            <a:off x="11185855" y="6473952"/>
+            <a:ext cx="640080" cy="274320"/>
+          </a:xfrm>
+          <a:prstGeom prst="rect">
+            <a:avLst/>
+          </a:prstGeom>
+          <a:noFill/>
+        </p:spPr>
+        <p:txBody>
+          <a:bodyPr wrap="square">
+            <a:spAutoFit/>
+          </a:bodyPr>
+          <a:lstStyle/>
+          <a:p>
+            <a:pPr algn="r"/>
+            <a:r>
+              <a:rPr sz="1100" b="0" i="0">
+                <a:solidFill>
+                  <a:srgbClr val="666666"/>
+                </a:solidFill>
+                <a:latin typeface="Calibri"/>
+              </a:rPr>
+              <a:t>20</a:t>
+            </a:r>
+          </a:p>
+        </p:txBody>
+      </p:sp>
+    </p:spTree>
+  </p:cSld>
+  <p:clrMapOvr>
+    <a:masterClrMapping/>
+  </p:clrMapOvr>
+</p:sld>
+</file>
+
+<file path=ppt/slides/slide21.xml><?xml version="1.0" encoding="utf-8"?>
+<p:sld xmlns:a="http://schemas.openxmlformats.org/drawingml/2006/main" xmlns:p="http://schemas.openxmlformats.org/presentationml/2006/main" xmlns:r="http://schemas.openxmlformats.org/officeDocument/2006/relationships">
+  <p:cSld>
+    <p:bg>
+      <p:bgPr>
+        <a:solidFill>
+          <a:srgbClr val="FFFFFF"/>
+        </a:solidFill>
+        <a:effectLst/>
+      </p:bgPr>
+    </p:bg>
+    <p:spTree>
+      <p:nvGrpSpPr>
+        <p:cNvPr id="1" name=""/>
+        <p:cNvGrpSpPr/>
+        <p:nvPr/>
+      </p:nvGrpSpPr>
+      <p:grpSpPr/>
+      <p:sp>
+        <p:nvSpPr>
+          <p:cNvPr id="2" name="Rectangle 1"/>
+          <p:cNvSpPr/>
+          <p:nvPr/>
+        </p:nvSpPr>
+        <p:spPr>
+          <a:xfrm>
+            <a:off x="0" y="0"/>
+            <a:ext cx="12191695" cy="960120"/>
+          </a:xfrm>
+          <a:prstGeom prst="rect">
+            <a:avLst/>
+          </a:prstGeom>
+          <a:solidFill>
+            <a:srgbClr val="095292"/>
+          </a:solidFill>
+          <a:ln>
+            <a:noFill/>
+          </a:ln>
+        </p:spPr>
+        <p:style>
+          <a:lnRef idx="1">
+            <a:schemeClr val="accent1"/>
+          </a:lnRef>
+          <a:fillRef idx="3">
+            <a:schemeClr val="accent1"/>
+          </a:fillRef>
+          <a:effectRef idx="2">
+            <a:schemeClr val="accent1"/>
+          </a:effectRef>
+          <a:fontRef idx="minor">
+            <a:schemeClr val="lt1"/>
+          </a:fontRef>
+        </p:style>
+        <p:txBody>
+          <a:bodyPr rtlCol="0" anchor="ctr"/>
+          <a:lstStyle/>
+          <a:p>
+            <a:pPr algn="ctr"/>
+          </a:p>
+        </p:txBody>
+      </p:sp>
+      <p:sp>
+        <p:nvSpPr>
+          <p:cNvPr id="3" name="Rectangle 2"/>
+          <p:cNvSpPr/>
+          <p:nvPr/>
+        </p:nvSpPr>
+        <p:spPr>
+          <a:xfrm>
+            <a:off x="0" y="960120"/>
+            <a:ext cx="12191695" cy="41148"/>
+          </a:xfrm>
+          <a:prstGeom prst="rect">
+            <a:avLst/>
+          </a:prstGeom>
+          <a:solidFill>
+            <a:srgbClr val="FFD000"/>
+          </a:solidFill>
+          <a:ln>
+            <a:noFill/>
+          </a:ln>
+        </p:spPr>
+        <p:style>
+          <a:lnRef idx="1">
+            <a:schemeClr val="accent1"/>
+          </a:lnRef>
+          <a:fillRef idx="3">
+            <a:schemeClr val="accent1"/>
+          </a:fillRef>
+          <a:effectRef idx="2">
+            <a:schemeClr val="accent1"/>
+          </a:effectRef>
+          <a:fontRef idx="minor">
+            <a:schemeClr val="lt1"/>
+          </a:fontRef>
+        </p:style>
+        <p:txBody>
+          <a:bodyPr rtlCol="0" anchor="ctr"/>
+          <a:lstStyle/>
+          <a:p>
+            <a:pPr algn="ctr"/>
+          </a:p>
+        </p:txBody>
+      </p:sp>
+      <p:sp>
+        <p:nvSpPr>
+          <p:cNvPr id="4" name="TextBox 3"/>
+          <p:cNvSpPr txBox="1"/>
+          <p:nvPr/>
+        </p:nvSpPr>
+        <p:spPr>
+          <a:xfrm>
+            <a:off x="457200" y="164592"/>
+            <a:ext cx="11277295" cy="502920"/>
+          </a:xfrm>
+          <a:prstGeom prst="rect">
+            <a:avLst/>
+          </a:prstGeom>
+          <a:noFill/>
+        </p:spPr>
+        <p:txBody>
+          <a:bodyPr wrap="square">
+            <a:spAutoFit/>
+          </a:bodyPr>
+          <a:lstStyle/>
+          <a:p>
+            <a:r>
+              <a:rPr sz="2600" b="1" i="0">
+                <a:solidFill>
+                  <a:srgbClr val="FFFFFF"/>
+                </a:solidFill>
+                <a:latin typeface="Calibri"/>
+              </a:rPr>
+              <a:t>Para el PI esta semana</a:t>
+            </a:r>
+          </a:p>
+        </p:txBody>
+      </p:sp>
+      <p:sp>
+        <p:nvSpPr>
+          <p:cNvPr id="5" name="Rounded Rectangle 4"/>
+          <p:cNvSpPr/>
+          <p:nvPr/>
+        </p:nvSpPr>
+        <p:spPr>
+          <a:xfrm>
+            <a:off x="457200" y="1261872"/>
+            <a:ext cx="11277295" cy="1051560"/>
+          </a:xfrm>
+          <a:prstGeom prst="roundRect">
+            <a:avLst>
+              <a:gd name="adj" fmla="val 12000"/>
+            </a:avLst>
+          </a:prstGeom>
+          <a:solidFill>
+            <a:srgbClr val="E8F4FA"/>
+          </a:solidFill>
+          <a:ln>
+            <a:noFill/>
+          </a:ln>
+        </p:spPr>
+        <p:style>
+          <a:lnRef idx="1">
+            <a:schemeClr val="accent1"/>
+          </a:lnRef>
+          <a:fillRef idx="3">
+            <a:schemeClr val="accent1"/>
+          </a:fillRef>
+          <a:effectRef idx="2">
+            <a:schemeClr val="accent1"/>
+          </a:effectRef>
+          <a:fontRef idx="minor">
+            <a:schemeClr val="lt1"/>
+          </a:fontRef>
+        </p:style>
+        <p:txBody>
+          <a:bodyPr rtlCol="0" anchor="ctr"/>
+          <a:lstStyle/>
+          <a:p>
+            <a:pPr algn="ctr"/>
+          </a:p>
+        </p:txBody>
+      </p:sp>
+      <p:sp>
+        <p:nvSpPr>
+          <p:cNvPr id="6" name="Rectangle 5"/>
+          <p:cNvSpPr/>
+          <p:nvPr/>
+        </p:nvSpPr>
+        <p:spPr>
+          <a:xfrm>
+            <a:off x="457200" y="1261872"/>
+            <a:ext cx="128016" cy="1051560"/>
+          </a:xfrm>
+          <a:prstGeom prst="rect">
+            <a:avLst/>
+          </a:prstGeom>
+          <a:solidFill>
+            <a:srgbClr val="269CCB"/>
+          </a:solidFill>
+          <a:ln>
+            <a:noFill/>
+          </a:ln>
+        </p:spPr>
+        <p:style>
+          <a:lnRef idx="1">
+            <a:schemeClr val="accent1"/>
+          </a:lnRef>
+          <a:fillRef idx="3">
+            <a:schemeClr val="accent1"/>
+          </a:fillRef>
+          <a:effectRef idx="2">
+            <a:schemeClr val="accent1"/>
+          </a:effectRef>
+          <a:fontRef idx="minor">
+            <a:schemeClr val="lt1"/>
+          </a:fontRef>
+        </p:style>
+        <p:txBody>
+          <a:bodyPr rtlCol="0" anchor="ctr"/>
+          <a:lstStyle/>
+          <a:p>
+            <a:pPr algn="ctr"/>
+          </a:p>
+        </p:txBody>
+      </p:sp>
+      <p:sp>
+        <p:nvSpPr>
+          <p:cNvPr id="7" name="TextBox 6"/>
+          <p:cNvSpPr txBox="1"/>
+          <p:nvPr/>
+        </p:nvSpPr>
+        <p:spPr>
+          <a:xfrm>
+            <a:off x="777240" y="1399031"/>
+            <a:ext cx="10774375" cy="822959"/>
+          </a:xfrm>
+          <a:prstGeom prst="rect">
+            <a:avLst/>
+          </a:prstGeom>
+          <a:noFill/>
+        </p:spPr>
+        <p:txBody>
+          <a:bodyPr wrap="square">
+            <a:spAutoFit/>
+          </a:bodyPr>
+          <a:lstStyle/>
+          <a:p>
+            <a:r>
+              <a:rPr sz="1200" b="1" i="0">
+                <a:solidFill>
+                  <a:srgbClr val="269CCB"/>
+                </a:solidFill>
+                <a:latin typeface="Calibri"/>
+              </a:rPr>
+              <a:t>Info</a:t>
+            </a:r>
+          </a:p>
+          <a:p>
+            <a:pPr>
+              <a:spcBef>
+                <a:spcPts val="400"/>
+              </a:spcBef>
+            </a:pPr>
+            <a:r>
+              <a:rPr sz="1400" b="0" i="0">
+                <a:solidFill>
+                  <a:srgbClr val="333333"/>
+                </a:solidFill>
+                <a:latin typeface="Calibri"/>
+              </a:rPr>
+              <a:t>Hito: El paquete de diseño de VetCare queda auditado y consistente: requisitos, casos de uso y diagrama de clases usan los mismos nombres y no se contradicen entre si.</a:t>
+            </a:r>
+          </a:p>
+        </p:txBody>
+      </p:sp>
+      <p:sp>
+        <p:nvSpPr>
+          <p:cNvPr id="8" name="Rounded Rectangle 7"/>
+          <p:cNvSpPr/>
+          <p:nvPr/>
+        </p:nvSpPr>
+        <p:spPr>
+          <a:xfrm>
+            <a:off x="457200" y="2478024"/>
+            <a:ext cx="11277295" cy="1051560"/>
+          </a:xfrm>
+          <a:prstGeom prst="roundRect">
+            <a:avLst>
+              <a:gd name="adj" fmla="val 12000"/>
+            </a:avLst>
+          </a:prstGeom>
+          <a:solidFill>
+            <a:srgbClr val="FFF8E1"/>
+          </a:solidFill>
+          <a:ln>
+            <a:noFill/>
+          </a:ln>
+        </p:spPr>
+        <p:style>
+          <a:lnRef idx="1">
+            <a:schemeClr val="accent1"/>
+          </a:lnRef>
+          <a:fillRef idx="3">
+            <a:schemeClr val="accent1"/>
+          </a:fillRef>
+          <a:effectRef idx="2">
+            <a:schemeClr val="accent1"/>
+          </a:effectRef>
+          <a:fontRef idx="minor">
+            <a:schemeClr val="lt1"/>
+          </a:fontRef>
+        </p:style>
+        <p:txBody>
+          <a:bodyPr rtlCol="0" anchor="ctr"/>
+          <a:lstStyle/>
+          <a:p>
+            <a:pPr algn="ctr"/>
+          </a:p>
+        </p:txBody>
+      </p:sp>
+      <p:sp>
+        <p:nvSpPr>
+          <p:cNvPr id="9" name="Rectangle 8"/>
+          <p:cNvSpPr/>
+          <p:nvPr/>
+        </p:nvSpPr>
+        <p:spPr>
+          <a:xfrm>
+            <a:off x="457200" y="2478024"/>
+            <a:ext cx="128016" cy="1051560"/>
+          </a:xfrm>
+          <a:prstGeom prst="rect">
+            <a:avLst/>
+          </a:prstGeom>
+          <a:solidFill>
+            <a:srgbClr val="FFD000"/>
+          </a:solidFill>
+          <a:ln>
+            <a:noFill/>
+          </a:ln>
+        </p:spPr>
+        <p:style>
+          <a:lnRef idx="1">
+            <a:schemeClr val="accent1"/>
+          </a:lnRef>
+          <a:fillRef idx="3">
+            <a:schemeClr val="accent1"/>
+          </a:fillRef>
+          <a:effectRef idx="2">
+            <a:schemeClr val="accent1"/>
+          </a:effectRef>
+          <a:fontRef idx="minor">
+            <a:schemeClr val="lt1"/>
+          </a:fontRef>
+        </p:style>
+        <p:txBody>
+          <a:bodyPr rtlCol="0" anchor="ctr"/>
+          <a:lstStyle/>
+          <a:p>
+            <a:pPr algn="ctr"/>
+          </a:p>
+        </p:txBody>
+      </p:sp>
+      <p:sp>
+        <p:nvSpPr>
+          <p:cNvPr id="10" name="TextBox 9"/>
+          <p:cNvSpPr txBox="1"/>
+          <p:nvPr/>
+        </p:nvSpPr>
+        <p:spPr>
+          <a:xfrm>
+            <a:off x="777240" y="2615184"/>
+            <a:ext cx="10774375" cy="822959"/>
+          </a:xfrm>
+          <a:prstGeom prst="rect">
+            <a:avLst/>
+          </a:prstGeom>
+          <a:noFill/>
+        </p:spPr>
+        <p:txBody>
+          <a:bodyPr wrap="square">
+            <a:spAutoFit/>
+          </a:bodyPr>
+          <a:lstStyle/>
+          <a:p>
+            <a:r>
+              <a:rPr sz="1200" b="1" i="0">
+                <a:solidFill>
+                  <a:srgbClr val="FFD000"/>
+                </a:solidFill>
+                <a:latin typeface="Calibri"/>
+              </a:rPr>
+              <a:t>Aclaración</a:t>
+            </a:r>
+          </a:p>
+          <a:p>
+            <a:pPr>
+              <a:spcBef>
+                <a:spcPts val="400"/>
+              </a:spcBef>
+            </a:pPr>
+            <a:r>
+              <a:rPr sz="1400" b="0" i="0">
+                <a:solidFill>
+                  <a:srgbClr val="333333"/>
+                </a:solidFill>
+                <a:latin typeface="Calibri"/>
+              </a:rPr>
+              <a:t>Enunciado completo: Clases/Proyecto Integrador/ (VetCare).</a:t>
+            </a:r>
+          </a:p>
+        </p:txBody>
+      </p:sp>
+      <p:sp>
+        <p:nvSpPr>
+          <p:cNvPr id="11" name="Rounded Rectangle 10"/>
+          <p:cNvSpPr/>
+          <p:nvPr/>
+        </p:nvSpPr>
+        <p:spPr>
+          <a:xfrm>
+            <a:off x="457200" y="3694176"/>
+            <a:ext cx="11277295" cy="1051560"/>
+          </a:xfrm>
+          <a:prstGeom prst="roundRect">
+            <a:avLst>
+              <a:gd name="adj" fmla="val 12000"/>
+            </a:avLst>
+          </a:prstGeom>
+          <a:solidFill>
+            <a:srgbClr val="FBE4E4"/>
+          </a:solidFill>
+          <a:ln>
+            <a:noFill/>
+          </a:ln>
+        </p:spPr>
+        <p:style>
+          <a:lnRef idx="1">
+            <a:schemeClr val="accent1"/>
+          </a:lnRef>
+          <a:fillRef idx="3">
+            <a:schemeClr val="accent1"/>
+          </a:fillRef>
+          <a:effectRef idx="2">
+            <a:schemeClr val="accent1"/>
+          </a:effectRef>
+          <a:fontRef idx="minor">
+            <a:schemeClr val="lt1"/>
+          </a:fontRef>
+        </p:style>
+        <p:txBody>
+          <a:bodyPr rtlCol="0" anchor="ctr"/>
+          <a:lstStyle/>
+          <a:p>
+            <a:pPr algn="ctr"/>
+          </a:p>
+        </p:txBody>
+      </p:sp>
+      <p:sp>
+        <p:nvSpPr>
+          <p:cNvPr id="12" name="Rectangle 11"/>
+          <p:cNvSpPr/>
+          <p:nvPr/>
+        </p:nvSpPr>
+        <p:spPr>
+          <a:xfrm>
+            <a:off x="457200" y="3694176"/>
+            <a:ext cx="128016" cy="1051560"/>
+          </a:xfrm>
+          <a:prstGeom prst="rect">
+            <a:avLst/>
+          </a:prstGeom>
+          <a:solidFill>
+            <a:srgbClr val="A02030"/>
+          </a:solidFill>
+          <a:ln>
+            <a:noFill/>
+          </a:ln>
+        </p:spPr>
+        <p:style>
+          <a:lnRef idx="1">
+            <a:schemeClr val="accent1"/>
+          </a:lnRef>
+          <a:fillRef idx="3">
+            <a:schemeClr val="accent1"/>
+          </a:fillRef>
+          <a:effectRef idx="2">
+            <a:schemeClr val="accent1"/>
+          </a:effectRef>
+          <a:fontRef idx="minor">
+            <a:schemeClr val="lt1"/>
+          </a:fontRef>
+        </p:style>
+        <p:txBody>
+          <a:bodyPr rtlCol="0" anchor="ctr"/>
+          <a:lstStyle/>
+          <a:p>
+            <a:pPr algn="ctr"/>
+          </a:p>
+        </p:txBody>
+      </p:sp>
+      <p:sp>
+        <p:nvSpPr>
+          <p:cNvPr id="13" name="TextBox 12"/>
+          <p:cNvSpPr txBox="1"/>
+          <p:nvPr/>
+        </p:nvSpPr>
+        <p:spPr>
+          <a:xfrm>
+            <a:off x="777240" y="3831336"/>
+            <a:ext cx="10774375" cy="822959"/>
+          </a:xfrm>
+          <a:prstGeom prst="rect">
+            <a:avLst/>
+          </a:prstGeom>
+          <a:noFill/>
+        </p:spPr>
+        <p:txBody>
+          <a:bodyPr wrap="square">
+            <a:spAutoFit/>
+          </a:bodyPr>
+          <a:lstStyle/>
+          <a:p>
+            <a:r>
+              <a:rPr sz="1200" b="1" i="0">
+                <a:solidFill>
+                  <a:srgbClr val="A02030"/>
+                </a:solidFill>
+                <a:latin typeface="Calibri"/>
+              </a:rPr>
+              <a:t>Atención</a:t>
+            </a:r>
+          </a:p>
+          <a:p>
+            <a:pPr>
+              <a:spcBef>
+                <a:spcPts val="400"/>
+              </a:spcBef>
+            </a:pPr>
+            <a:r>
+              <a:rPr sz="1400" b="0" i="0">
+                <a:solidFill>
+                  <a:srgbClr val="333333"/>
+                </a:solidFill>
+                <a:latin typeface="Calibri"/>
+              </a:rPr>
+              <a:t>Entrega del taller, si el docente lo asigna · en la fecha que indique el docente.</a:t>
+            </a:r>
+          </a:p>
+        </p:txBody>
+      </p:sp>
+      <p:sp>
+        <p:nvSpPr>
+          <p:cNvPr id="14" name="TextBox 13"/>
+          <p:cNvSpPr txBox="1"/>
+          <p:nvPr/>
+        </p:nvSpPr>
+        <p:spPr>
+          <a:xfrm>
+            <a:off x="11185855" y="6473952"/>
+            <a:ext cx="640080" cy="274320"/>
+          </a:xfrm>
+          <a:prstGeom prst="rect">
+            <a:avLst/>
+          </a:prstGeom>
+          <a:noFill/>
+        </p:spPr>
+        <p:txBody>
+          <a:bodyPr wrap="square">
+            <a:spAutoFit/>
+          </a:bodyPr>
+          <a:lstStyle/>
+          <a:p>
+            <a:pPr algn="r"/>
+            <a:r>
+              <a:rPr sz="1100" b="0" i="0">
+                <a:solidFill>
+                  <a:srgbClr val="666666"/>
+                </a:solidFill>
+                <a:latin typeface="Calibri"/>
+              </a:rPr>
+              <a:t>21</a:t>
+            </a:r>
+          </a:p>
+        </p:txBody>
+      </p:sp>
+    </p:spTree>
+  </p:cSld>
+  <p:clrMapOvr>
+    <a:masterClrMapping/>
+  </p:clrMapOvr>
+</p:sld>
+</file>
+
+<file path=ppt/slides/slide22.xml><?xml version="1.0" encoding="utf-8"?>
+<p:sld xmlns:a="http://schemas.openxmlformats.org/drawingml/2006/main" xmlns:p="http://schemas.openxmlformats.org/presentationml/2006/main" xmlns:r="http://schemas.openxmlformats.org/officeDocument/2006/relationships">
+  <p:cSld>
+    <p:bg>
+      <p:bgPr>
+        <a:solidFill>
+          <a:srgbClr val="FFFFFF"/>
+        </a:solidFill>
+        <a:effectLst/>
+      </p:bgPr>
+    </p:bg>
+    <p:spTree>
+      <p:nvGrpSpPr>
+        <p:cNvPr id="1" name=""/>
+        <p:cNvGrpSpPr/>
+        <p:nvPr/>
+      </p:nvGrpSpPr>
+      <p:grpSpPr/>
+      <p:sp>
+        <p:nvSpPr>
+          <p:cNvPr id="2" name="Rectangle 1"/>
+          <p:cNvSpPr/>
+          <p:nvPr/>
+        </p:nvSpPr>
+        <p:spPr>
+          <a:xfrm>
+            <a:off x="0" y="0"/>
             <a:ext cx="12191695" cy="164592"/>
           </a:xfrm>
           <a:prstGeom prst="rect">
@@ -10298,55 +10740,7 @@
                 </a:solidFill>
                 <a:latin typeface="Calibri"/>
               </a:rPr>
-              <a:t>–   Asi es como en VetCare aparece un requisito RF-07 que promete recordatorio de cita por mensajeria, un diagrama de casos de uso donde no existe ningun caso de uso de recordatorio, y un diagrama de clases donde no hay nada parecido a una clase Notificacion.</a:t>
-            </a:r>
-          </a:p>
-          <a:p>
-            <a:pPr>
-              <a:spcAft>
-                <a:spcPts val="800"/>
-              </a:spcAft>
-            </a:pPr>
-            <a:r>
-              <a:rPr sz="2000" b="0" i="0">
-                <a:solidFill>
-                  <a:srgbClr val="333333"/>
-                </a:solidFill>
-                <a:latin typeface="Calibri"/>
-              </a:rPr>
               <a:t>–   Ninguno de los tres documentos esta mal por si solo; lo que esta mal es el conjunto.</a:t>
-            </a:r>
-          </a:p>
-          <a:p>
-            <a:pPr>
-              <a:spcAft>
-                <a:spcPts val="800"/>
-              </a:spcAft>
-            </a:pPr>
-            <a:r>
-              <a:rPr sz="2000" b="0" i="0">
-                <a:solidFill>
-                  <a:srgbClr val="333333"/>
-                </a:solidFill>
-                <a:latin typeface="Calibri"/>
-              </a:rPr>
-              <a:t>–   Un defecto de consistencia cuesta poco corregirlo hoy, en una hoja, y cuesta carisimo corregirlo cuando ya se construyo sobre el, porque para entonces hay pantallas, tablas y codigo apoyados en la contradiccion.</a:t>
-            </a:r>
-          </a:p>
-          <a:p>
-            <a:pPr>
-              <a:spcAft>
-                <a:spcPts val="800"/>
-              </a:spcAft>
-            </a:pPr>
-            <a:r>
-              <a:rPr sz="2000" b="0" i="0">
-                <a:solidFill>
-                  <a:srgbClr val="333333"/>
-                </a:solidFill>
-                <a:latin typeface="Calibri"/>
-              </a:rPr>
-              <a:t>–   Por eso esta sesion no agrega tema nuevo: agrega confianza en lo que ya existe, que es un trabajo de arquitecto tan legitimo como dibujar.</a:t>
             </a:r>
           </a:p>
         </p:txBody>
@@ -11134,22 +11528,6 @@
                 </a:solidFill>
                 <a:latin typeface="Calibri"/>
               </a:rPr>
-              <a:t>–   Un sistema se diseña bien cuando existe un solo nombre para cada concepto y todos lo usan, desde la entrevista con la clinica hasta el nombre de la clase.</a:t>
-            </a:r>
-          </a:p>
-          <a:p>
-            <a:pPr>
-              <a:spcAft>
-                <a:spcPts val="800"/>
-              </a:spcAft>
-            </a:pPr>
-            <a:r>
-              <a:rPr sz="2000" b="0" i="0">
-                <a:solidFill>
-                  <a:srgbClr val="333333"/>
-                </a:solidFill>
-                <a:latin typeface="Calibri"/>
-              </a:rPr>
               <a:t>–   Cuando en un documento se lee Dueño, en otro Propietario, en otro Cliente y en el mockup Responsable, no hay cuatro sinonimos: hay cuatro oportunidades de que alguien crea que son cuatro cosas distintas y termine con cuatro tablas.</a:t>
             </a:r>
           </a:p>
@@ -11615,7 +11993,7 @@
                 </a:solidFill>
                 <a:latin typeface="Calibri"/>
               </a:rPr>
-              <a:t>La revision entre pares se hace con reglas o no sirve</a:t>
+              <a:t>La revision entre pares se hace con reglas o no sirve (1/2)</a:t>
             </a:r>
           </a:p>
         </p:txBody>
@@ -11648,7 +12026,7 @@
               </a:spcAft>
             </a:pPr>
             <a:r>
-              <a:rPr sz="1900" b="0" i="0">
+              <a:rPr sz="2000" b="0" i="0">
                 <a:solidFill>
                   <a:srgbClr val="333333"/>
                 </a:solidFill>
@@ -11664,7 +12042,7 @@
               </a:spcAft>
             </a:pPr>
             <a:r>
-              <a:rPr sz="1900" b="0" i="0">
+              <a:rPr sz="2000" b="0" i="0">
                 <a:solidFill>
                   <a:srgbClr val="333333"/>
                 </a:solidFill>
@@ -11680,7 +12058,7 @@
               </a:spcAft>
             </a:pPr>
             <a:r>
-              <a:rPr sz="1900" b="0" i="0">
+              <a:rPr sz="2000" b="0" i="0">
                 <a:solidFill>
                   <a:srgbClr val="333333"/>
                 </a:solidFill>
@@ -11696,77 +12074,13 @@
               </a:spcAft>
             </a:pPr>
             <a:r>
-              <a:rPr sz="1900" b="0" i="0">
+              <a:rPr sz="2000" b="0" i="0">
                 <a:solidFill>
                   <a:srgbClr val="333333"/>
                 </a:solidFill>
                 <a:latin typeface="Calibri"/>
               </a:rPr>
               <a:t>–   Cada hallazgo se anota con ubicacion exacta, descripcion de la inconsistencia y severidad: bloqueante cuando impide construir el sistema, mayor cuando obliga a rehacer un artefacto completo, menor cuando es cosmetico.</a:t>
-            </a:r>
-          </a:p>
-          <a:p>
-            <a:pPr>
-              <a:spcAft>
-                <a:spcPts val="800"/>
-              </a:spcAft>
-            </a:pPr>
-            <a:r>
-              <a:rPr sz="1900" b="0" i="0">
-                <a:solidFill>
-                  <a:srgbClr val="333333"/>
-                </a:solidFill>
-                <a:latin typeface="Calibri"/>
-              </a:rPr>
-              <a:t>–   Prohibido discutir la solucion durante la revision, porque ahi es donde se van los cuarenta minutos y no se revisa nada.</a:t>
-            </a:r>
-          </a:p>
-          <a:p>
-            <a:pPr>
-              <a:spcAft>
-                <a:spcPts val="800"/>
-              </a:spcAft>
-            </a:pPr>
-            <a:r>
-              <a:rPr sz="1900" b="0" i="0">
-                <a:solidFill>
-                  <a:srgbClr val="333333"/>
-                </a:solidFill>
-                <a:latin typeface="Calibri"/>
-              </a:rPr>
-              <a:t>–   En VetCare, un hallazgo bien escrito se ve asi: en el diagrama de clases, la clase Consulta no tiene relacion con Veterinario, pero el flujo principal de CU-03 dice que toda consulta queda a nombre del veterinario que atendio; severidad mayor.</a:t>
-            </a:r>
-          </a:p>
-          <a:p>
-            <a:pPr>
-              <a:spcAft>
-                <a:spcPts val="800"/>
-              </a:spcAft>
-            </a:pPr>
-            <a:r>
-              <a:rPr sz="1900" b="0" i="0">
-                <a:solidFill>
-                  <a:srgbClr val="333333"/>
-                </a:solidFill>
-                <a:latin typeface="Calibri"/>
-              </a:rPr>
-              <a:t>–   Eso es util.</a:t>
-            </a:r>
-          </a:p>
-          <a:p>
-            <a:pPr>
-              <a:spcAft>
-                <a:spcPts val="800"/>
-              </a:spcAft>
-            </a:pPr>
-            <a:r>
-              <a:rPr sz="1900" b="0" i="0">
-                <a:solidFill>
-                  <a:srgbClr val="333333"/>
-                </a:solidFill>
-                <a:latin typeface="Calibri"/>
-              </a:rPr>
-              <a:t>–   En cambio esta mal hecho, no me gusta o le falta orden no es un hallazgo, es una opinion.</a:t>
             </a:r>
           </a:p>
         </p:txBody>

--- a/Seminario de Sistemas/Clases/Clase 11 - Avance del proyecto integrador/Presentacion.pptx
+++ b/Seminario de Sistemas/Clases/Clase 11 - Avance del proyecto integrador/Presentacion.pptx
@@ -27,6 +27,7 @@
     <p:sldId id="275" r:id="rId26"/>
     <p:sldId id="276" r:id="rId27"/>
     <p:sldId id="277" r:id="rId28"/>
+    <p:sldId id="278" r:id="rId29"/>
   </p:sldIdLst>
   <p:sldSz cx="12191695" cy="6858000" type="screen4x3"/>
   <p:notesSz cx="6858000" cy="9144000"/>
@@ -4399,7 +4400,7 @@
                 </a:solidFill>
                 <a:latin typeface="Calibri"/>
               </a:rPr>
-              <a:t>Auditoria cruzada de VetCare: la matriz que delata las contradicciones</a:t>
+              <a:t>El glosario de nombres canonicos: el hueco mas comun</a:t>
             </a:r>
           </a:p>
         </p:txBody>
@@ -4413,7 +4414,7 @@
         <p:spPr>
           <a:xfrm>
             <a:off x="457200" y="1261872"/>
-            <a:ext cx="11277295" cy="4773168"/>
+            <a:ext cx="11277295" cy="5093208"/>
           </a:xfrm>
           <a:prstGeom prst="roundRect">
             <a:avLst>
@@ -4533,7 +4534,7 @@
         <p:spPr>
           <a:xfrm>
             <a:off x="777240" y="1719072"/>
-            <a:ext cx="10637215" cy="4133087"/>
+            <a:ext cx="10637215" cy="4453128"/>
           </a:xfrm>
           <a:prstGeom prst="rect">
             <a:avLst/>
@@ -4558,7 +4559,7 @@
                 </a:solidFill>
                 <a:latin typeface="Calibri"/>
               </a:rPr>
-              <a:t>| RF     | Caso de uso                  | Clases implicadas      | Mockup | Estado      |</a:t>
+              <a:t>| Concepto      | Nombre canonico | Como aparece mal en el paquete     |</a:t>
             </a:r>
           </a:p>
           <a:p>
@@ -4574,7 +4575,7 @@
                 </a:solidFill>
                 <a:latin typeface="Calibri"/>
               </a:rPr>
-              <a:t>|--------|------------------------------|------------------------|--------|-------------|</a:t>
+              <a:t>|---------------|-----------------|------------------------------------|</a:t>
             </a:r>
           </a:p>
           <a:p>
@@ -4590,7 +4591,7 @@
                 </a:solidFill>
                 <a:latin typeface="Calibri"/>
               </a:rPr>
-              <a:t>| RF-02  | CU-00 Registrar propietario  | Propietario            | M-01   | OK          |</a:t>
+              <a:t>| el animal     | Mascota         | Paciente, Animal, mascotas         |</a:t>
             </a:r>
           </a:p>
           <a:p>
@@ -4606,7 +4607,7 @@
                 </a:solidFill>
                 <a:latin typeface="Calibri"/>
               </a:rPr>
-              <a:t>| RF-03  | CU-01 Registrar mascota      | Mascota, Propietario   | M-02   | OK          |</a:t>
+              <a:t>| quien lo trae | Dueno           | Propietario, Cliente, Amo          |</a:t>
             </a:r>
           </a:p>
           <a:p>
@@ -4622,7 +4623,7 @@
                 </a:solidFill>
                 <a:latin typeface="Calibri"/>
               </a:rPr>
-              <a:t>| RF-05  | CU-02 Buscar expediente      | Mascota, Consulta      | M-03   | OK          |</a:t>
+              <a:t>| el encuentro  | Cita            | Turno, Agendamiento, Reserva       |</a:t>
             </a:r>
           </a:p>
           <a:p>
@@ -4638,7 +4639,7 @@
                 </a:solidFill>
                 <a:latin typeface="Calibri"/>
               </a:rPr>
-              <a:t>| RF-06  | CU-03 Registrar consulta     | Consulta, ???          | M-05   | HALLAZGO    |</a:t>
+              <a:t>| el registro   | Consulta        | Atencion, HistoriaClinica          |</a:t>
             </a:r>
           </a:p>
           <a:p>
@@ -4654,7 +4655,7 @@
                 </a:solidFill>
                 <a:latin typeface="Calibri"/>
               </a:rPr>
-              <a:t>| RF-07  | (no existe)                  | (no existe)            | --     | HUERFANO    |</a:t>
+              <a:t/>
             </a:r>
           </a:p>
           <a:p>
@@ -4670,7 +4671,7 @@
                 </a:solidFill>
                 <a:latin typeface="Calibri"/>
               </a:rPr>
-              <a:t>| (sin)  | CU-04 Agendar cita           | Cita, Veterinario      | M-04   | SIN ORIGEN  |</a:t>
+              <a:t>-- El diagrama de clases dice Mascota, el caso de uso dice Paciente y el</a:t>
             </a:r>
           </a:p>
           <a:p>
@@ -4686,7 +4687,7 @@
                 </a:solidFill>
                 <a:latin typeface="Calibri"/>
               </a:rPr>
-              <a:t/>
+              <a:t>-- wireframe dice Animal: son tres entregables que hablan de cosas</a:t>
             </a:r>
           </a:p>
           <a:p>
@@ -4702,7 +4703,7 @@
                 </a:solidFill>
                 <a:latin typeface="Calibri"/>
               </a:rPr>
-              <a:t>H-01 (mayor): CU-03 exige registrar quien atendio, pero Consulta no se relaciona con Veterinario.</a:t>
+              <a:t>-- distintas para quien los lee. Un solo nombre por concepto, y el mismo</a:t>
             </a:r>
           </a:p>
           <a:p>
@@ -4718,55 +4719,7 @@
                 </a:solidFill>
                 <a:latin typeface="Calibri"/>
               </a:rPr>
-              <a:t>H-02 (mayor): la fila de CU-04 quedo sin RF; debe ligarse a RF-08 Agendar cita o eliminarse el CU.</a:t>
-            </a:r>
-          </a:p>
-          <a:p>
-            <a:pPr>
-              <a:spcAft>
-                <a:spcPts val="400"/>
-              </a:spcAft>
-            </a:pPr>
-            <a:r>
-              <a:rPr sz="1400" b="0" i="0">
-                <a:solidFill>
-                  <a:srgbClr val="FFFFFF"/>
-                </a:solidFill>
-                <a:latin typeface="Calibri"/>
-              </a:rPr>
-              <a:t>H-03 (bloqueante): la clase Mascota guarda dueño como texto en lugar de asociarse a Propietario.</a:t>
-            </a:r>
-          </a:p>
-          <a:p>
-            <a:pPr>
-              <a:spcAft>
-                <a:spcPts val="400"/>
-              </a:spcAft>
-            </a:pPr>
-            <a:r>
-              <a:rPr sz="1400" b="0" i="0">
-                <a:solidFill>
-                  <a:srgbClr val="FFFFFF"/>
-                </a:solidFill>
-                <a:latin typeface="Calibri"/>
-              </a:rPr>
-              <a:t>H-04 (menor): el RNF-02 de 3 segundos no aparece en ninguna postcondicion de CU-02.</a:t>
-            </a:r>
-          </a:p>
-          <a:p>
-            <a:pPr>
-              <a:spcAft>
-                <a:spcPts val="400"/>
-              </a:spcAft>
-            </a:pPr>
-            <a:r>
-              <a:rPr sz="1400" b="0" i="0">
-                <a:solidFill>
-                  <a:srgbClr val="FFFFFF"/>
-                </a:solidFill>
-                <a:latin typeface="Calibri"/>
-              </a:rPr>
-              <a:t>Glosario canonico: Propietario (prohibido Dueño, Cliente, Responsable) | Cita != Consulta.</a:t>
+              <a:t>-- en TODOS los artefactos. Esto es la P2 del hito y vale puntos.</a:t>
             </a:r>
           </a:p>
         </p:txBody>
@@ -4774,41 +4727,6 @@
       <p:sp>
         <p:nvSpPr>
           <p:cNvPr id="9" name="TextBox 8"/>
-          <p:cNvSpPr txBox="1"/>
-          <p:nvPr/>
-        </p:nvSpPr>
-        <p:spPr>
-          <a:xfrm>
-            <a:off x="457200" y="6080760"/>
-            <a:ext cx="11277295" cy="320040"/>
-          </a:xfrm>
-          <a:prstGeom prst="rect">
-            <a:avLst/>
-          </a:prstGeom>
-          <a:noFill/>
-        </p:spPr>
-        <p:txBody>
-          <a:bodyPr wrap="square">
-            <a:spAutoFit/>
-          </a:bodyPr>
-          <a:lstStyle/>
-          <a:p>
-            <a:pPr algn="ctr"/>
-            <a:r>
-              <a:rPr sz="1200" b="0" i="1">
-                <a:solidFill>
-                  <a:srgbClr val="666666"/>
-                </a:solidFill>
-                <a:latin typeface="Calibri"/>
-              </a:rPr>
-              <a:t>Una tabla de cuatro columnas encuentra en veinte minutos las contradicciones que un equipo no ve en tres semanas.</a:t>
-            </a:r>
-          </a:p>
-        </p:txBody>
-      </p:sp>
-      <p:sp>
-        <p:nvSpPr>
-          <p:cNvPr id="10" name="TextBox 9"/>
           <p:cNvSpPr txBox="1"/>
           <p:nvPr/>
         </p:nvSpPr>
@@ -4982,21 +4900,141 @@
                 </a:solidFill>
                 <a:latin typeface="Calibri"/>
               </a:rPr>
-              <a:t>Demo del dia</a:t>
-            </a:r>
-          </a:p>
-        </p:txBody>
-      </p:sp>
-      <p:sp>
-        <p:nvSpPr>
-          <p:cNvPr id="5" name="TextBox 4"/>
+              <a:t>Auditoria cruzada de VetCare: la matriz que delata las contradicciones</a:t>
+            </a:r>
+          </a:p>
+        </p:txBody>
+      </p:sp>
+      <p:sp>
+        <p:nvSpPr>
+          <p:cNvPr id="5" name="Rounded Rectangle 4"/>
+          <p:cNvSpPr/>
+          <p:nvPr/>
+        </p:nvSpPr>
+        <p:spPr>
+          <a:xfrm>
+            <a:off x="457200" y="1261872"/>
+            <a:ext cx="11277295" cy="4773168"/>
+          </a:xfrm>
+          <a:prstGeom prst="roundRect">
+            <a:avLst>
+              <a:gd name="adj" fmla="val 12000"/>
+            </a:avLst>
+          </a:prstGeom>
+          <a:solidFill>
+            <a:srgbClr val="1E2A38"/>
+          </a:solidFill>
+          <a:ln>
+            <a:noFill/>
+          </a:ln>
+        </p:spPr>
+        <p:style>
+          <a:lnRef idx="1">
+            <a:schemeClr val="accent1"/>
+          </a:lnRef>
+          <a:fillRef idx="3">
+            <a:schemeClr val="accent1"/>
+          </a:fillRef>
+          <a:effectRef idx="2">
+            <a:schemeClr val="accent1"/>
+          </a:effectRef>
+          <a:fontRef idx="minor">
+            <a:schemeClr val="lt1"/>
+          </a:fontRef>
+        </p:style>
+        <p:txBody>
+          <a:bodyPr rtlCol="0" anchor="ctr"/>
+          <a:lstStyle/>
+          <a:p>
+            <a:pPr algn="ctr"/>
+          </a:p>
+        </p:txBody>
+      </p:sp>
+      <p:sp>
+        <p:nvSpPr>
+          <p:cNvPr id="6" name="Rectangle 5"/>
+          <p:cNvSpPr/>
+          <p:nvPr/>
+        </p:nvSpPr>
+        <p:spPr>
+          <a:xfrm>
+            <a:off x="457200" y="1261872"/>
+            <a:ext cx="11277295" cy="320040"/>
+          </a:xfrm>
+          <a:prstGeom prst="rect">
+            <a:avLst/>
+          </a:prstGeom>
+          <a:solidFill>
+            <a:srgbClr val="095292"/>
+          </a:solidFill>
+          <a:ln>
+            <a:noFill/>
+          </a:ln>
+        </p:spPr>
+        <p:style>
+          <a:lnRef idx="1">
+            <a:schemeClr val="accent1"/>
+          </a:lnRef>
+          <a:fillRef idx="3">
+            <a:schemeClr val="accent1"/>
+          </a:fillRef>
+          <a:effectRef idx="2">
+            <a:schemeClr val="accent1"/>
+          </a:effectRef>
+          <a:fontRef idx="minor">
+            <a:schemeClr val="lt1"/>
+          </a:fontRef>
+        </p:style>
+        <p:txBody>
+          <a:bodyPr rtlCol="0" anchor="ctr"/>
+          <a:lstStyle/>
+          <a:p>
+            <a:pPr algn="ctr"/>
+          </a:p>
+        </p:txBody>
+      </p:sp>
+      <p:sp>
+        <p:nvSpPr>
+          <p:cNvPr id="7" name="TextBox 6"/>
           <p:cNvSpPr txBox="1"/>
           <p:nvPr/>
         </p:nvSpPr>
         <p:spPr>
           <a:xfrm>
-            <a:off x="457200" y="1170432"/>
-            <a:ext cx="11277295" cy="5230368"/>
+            <a:off x="685800" y="1307592"/>
+            <a:ext cx="10820095" cy="256032"/>
+          </a:xfrm>
+          <a:prstGeom prst="rect">
+            <a:avLst/>
+          </a:prstGeom>
+          <a:noFill/>
+        </p:spPr>
+        <p:txBody>
+          <a:bodyPr wrap="square" anchor="ctr"/>
+          <a:lstStyle/>
+          <a:p>
+            <a:r>
+              <a:rPr sz="1000" b="1" i="0">
+                <a:solidFill>
+                  <a:srgbClr val="269CCB"/>
+                </a:solidFill>
+                <a:latin typeface="Calibri"/>
+              </a:rPr>
+              <a:t>● ● ●</a:t>
+            </a:r>
+          </a:p>
+        </p:txBody>
+      </p:sp>
+      <p:sp>
+        <p:nvSpPr>
+          <p:cNvPr id="8" name="TextBox 7"/>
+          <p:cNvSpPr txBox="1"/>
+          <p:nvPr/>
+        </p:nvSpPr>
+        <p:spPr>
+          <a:xfrm>
+            <a:off x="777240" y="1719072"/>
+            <a:ext cx="10637215" cy="4133087"/>
           </a:xfrm>
           <a:prstGeom prst="rect">
             <a:avLst/>
@@ -5011,92 +5049,267 @@
           <a:p>
             <a:pPr>
               <a:spcAft>
-                <a:spcPts val="800"/>
+                <a:spcPts val="400"/>
               </a:spcAft>
             </a:pPr>
             <a:r>
-              <a:rPr sz="2000" b="0" i="0">
-                <a:solidFill>
-                  <a:srgbClr val="333333"/>
-                </a:solidFill>
-                <a:latin typeface="Calibri"/>
-              </a:rPr>
-              <a:t>–   </a:t>
-            </a:r>
-            <a:r>
-              <a:rPr sz="2000" b="1" i="0">
-                <a:solidFill>
-                  <a:srgbClr val="333333"/>
-                </a:solidFill>
-                <a:latin typeface="Calibri"/>
-              </a:rPr>
-              <a:t>Herramienta:</a:t>
-            </a:r>
-            <a:r>
-              <a:rPr sz="2000" b="0" i="0">
-                <a:solidFill>
-                  <a:srgbClr val="333333"/>
-                </a:solidFill>
-                <a:latin typeface="Calibri"/>
-              </a:rPr>
-              <a:t> Google Docs · draw.io</a:t>
+              <a:rPr sz="1400" b="0" i="0">
+                <a:solidFill>
+                  <a:srgbClr val="FFFFFF"/>
+                </a:solidFill>
+                <a:latin typeface="Calibri"/>
+              </a:rPr>
+              <a:t>| RF     | Caso de uso                  | Clases implicadas      | Mockup | Estado      |</a:t>
             </a:r>
           </a:p>
           <a:p>
             <a:pPr>
               <a:spcAft>
-                <a:spcPts val="800"/>
+                <a:spcPts val="400"/>
               </a:spcAft>
             </a:pPr>
             <a:r>
-              <a:rPr sz="2000" b="0" i="0">
-                <a:solidFill>
-                  <a:srgbClr val="333333"/>
-                </a:solidFill>
-                <a:latin typeface="Calibri"/>
-              </a:rPr>
-              <a:t>–   </a:t>
-            </a:r>
-            <a:r>
-              <a:rPr sz="2000" b="1" i="0">
-                <a:solidFill>
-                  <a:srgbClr val="333333"/>
-                </a:solidFill>
-                <a:latin typeface="Calibri"/>
-              </a:rPr>
-              <a:t>Demo:</a:t>
-            </a:r>
-            <a:r>
-              <a:rPr sz="2000" b="0" i="0">
-                <a:solidFill>
-                  <a:srgbClr val="333333"/>
-                </a:solidFill>
-                <a:latin typeface="Calibri"/>
-              </a:rPr>
-              <a:t> El docente proyecta el paquete de un equipo ficticio de VetCare y encuentra en vivo tres inconsistencias: un RF sin caso de uso, una clase llamada Dueño que en el catalogo de requisitos se llama Propietario, y un caso de uso que ninguna clase puede soportar.</a:t>
+              <a:rPr sz="1400" b="0" i="0">
+                <a:solidFill>
+                  <a:srgbClr val="FFFFFF"/>
+                </a:solidFill>
+                <a:latin typeface="Calibri"/>
+              </a:rPr>
+              <a:t>|--------|------------------------------|------------------------|--------|-------------|</a:t>
             </a:r>
           </a:p>
           <a:p>
             <a:pPr>
               <a:spcAft>
-                <a:spcPts val="800"/>
+                <a:spcPts val="400"/>
               </a:spcAft>
             </a:pPr>
             <a:r>
-              <a:rPr sz="2000" b="0" i="0">
-                <a:solidFill>
-                  <a:srgbClr val="333333"/>
-                </a:solidFill>
-                <a:latin typeface="Calibri"/>
-              </a:rPr>
-              <a:t>–   Mismo dominio VetCare — no otro ejemplo. Aqui se diseña, no se programa.</a:t>
-            </a:r>
-          </a:p>
-        </p:txBody>
-      </p:sp>
-      <p:sp>
-        <p:nvSpPr>
-          <p:cNvPr id="6" name="TextBox 5"/>
+              <a:rPr sz="1400" b="0" i="0">
+                <a:solidFill>
+                  <a:srgbClr val="FFFFFF"/>
+                </a:solidFill>
+                <a:latin typeface="Calibri"/>
+              </a:rPr>
+              <a:t>| RF-02  | CU-00 Registrar propietario  | Propietario            | M-01   | OK          |</a:t>
+            </a:r>
+          </a:p>
+          <a:p>
+            <a:pPr>
+              <a:spcAft>
+                <a:spcPts val="400"/>
+              </a:spcAft>
+            </a:pPr>
+            <a:r>
+              <a:rPr sz="1400" b="0" i="0">
+                <a:solidFill>
+                  <a:srgbClr val="FFFFFF"/>
+                </a:solidFill>
+                <a:latin typeface="Calibri"/>
+              </a:rPr>
+              <a:t>| RF-03  | CU-01 Registrar mascota      | Mascota, Propietario   | M-02   | OK          |</a:t>
+            </a:r>
+          </a:p>
+          <a:p>
+            <a:pPr>
+              <a:spcAft>
+                <a:spcPts val="400"/>
+              </a:spcAft>
+            </a:pPr>
+            <a:r>
+              <a:rPr sz="1400" b="0" i="0">
+                <a:solidFill>
+                  <a:srgbClr val="FFFFFF"/>
+                </a:solidFill>
+                <a:latin typeface="Calibri"/>
+              </a:rPr>
+              <a:t>| RF-05  | CU-02 Buscar expediente      | Mascota, Consulta      | M-03   | OK          |</a:t>
+            </a:r>
+          </a:p>
+          <a:p>
+            <a:pPr>
+              <a:spcAft>
+                <a:spcPts val="400"/>
+              </a:spcAft>
+            </a:pPr>
+            <a:r>
+              <a:rPr sz="1400" b="0" i="0">
+                <a:solidFill>
+                  <a:srgbClr val="FFFFFF"/>
+                </a:solidFill>
+                <a:latin typeface="Calibri"/>
+              </a:rPr>
+              <a:t>| RF-06  | CU-03 Registrar consulta     | Consulta, ???          | M-05   | HALLAZGO    |</a:t>
+            </a:r>
+          </a:p>
+          <a:p>
+            <a:pPr>
+              <a:spcAft>
+                <a:spcPts val="400"/>
+              </a:spcAft>
+            </a:pPr>
+            <a:r>
+              <a:rPr sz="1400" b="0" i="0">
+                <a:solidFill>
+                  <a:srgbClr val="FFFFFF"/>
+                </a:solidFill>
+                <a:latin typeface="Calibri"/>
+              </a:rPr>
+              <a:t>| RF-07  | (no existe)                  | (no existe)            | --     | HUERFANO    |</a:t>
+            </a:r>
+          </a:p>
+          <a:p>
+            <a:pPr>
+              <a:spcAft>
+                <a:spcPts val="400"/>
+              </a:spcAft>
+            </a:pPr>
+            <a:r>
+              <a:rPr sz="1400" b="0" i="0">
+                <a:solidFill>
+                  <a:srgbClr val="FFFFFF"/>
+                </a:solidFill>
+                <a:latin typeface="Calibri"/>
+              </a:rPr>
+              <a:t>| (sin)  | CU-04 Agendar cita           | Cita, Veterinario      | M-04   | SIN ORIGEN  |</a:t>
+            </a:r>
+          </a:p>
+          <a:p>
+            <a:pPr>
+              <a:spcAft>
+                <a:spcPts val="400"/>
+              </a:spcAft>
+            </a:pPr>
+            <a:r>
+              <a:rPr sz="1400" b="0" i="0">
+                <a:solidFill>
+                  <a:srgbClr val="FFFFFF"/>
+                </a:solidFill>
+                <a:latin typeface="Calibri"/>
+              </a:rPr>
+              <a:t/>
+            </a:r>
+          </a:p>
+          <a:p>
+            <a:pPr>
+              <a:spcAft>
+                <a:spcPts val="400"/>
+              </a:spcAft>
+            </a:pPr>
+            <a:r>
+              <a:rPr sz="1400" b="0" i="0">
+                <a:solidFill>
+                  <a:srgbClr val="FFFFFF"/>
+                </a:solidFill>
+                <a:latin typeface="Calibri"/>
+              </a:rPr>
+              <a:t>H-01 (mayor): CU-03 exige registrar quien atendio, pero Consulta no se relaciona con Veterinario.</a:t>
+            </a:r>
+          </a:p>
+          <a:p>
+            <a:pPr>
+              <a:spcAft>
+                <a:spcPts val="400"/>
+              </a:spcAft>
+            </a:pPr>
+            <a:r>
+              <a:rPr sz="1400" b="0" i="0">
+                <a:solidFill>
+                  <a:srgbClr val="FFFFFF"/>
+                </a:solidFill>
+                <a:latin typeface="Calibri"/>
+              </a:rPr>
+              <a:t>H-02 (mayor): la fila de CU-04 quedo sin RF; debe ligarse a RF-08 Agendar cita o eliminarse el CU.</a:t>
+            </a:r>
+          </a:p>
+          <a:p>
+            <a:pPr>
+              <a:spcAft>
+                <a:spcPts val="400"/>
+              </a:spcAft>
+            </a:pPr>
+            <a:r>
+              <a:rPr sz="1400" b="0" i="0">
+                <a:solidFill>
+                  <a:srgbClr val="FFFFFF"/>
+                </a:solidFill>
+                <a:latin typeface="Calibri"/>
+              </a:rPr>
+              <a:t>H-03 (bloqueante): la clase Mascota guarda dueño como texto en lugar de asociarse a Propietario.</a:t>
+            </a:r>
+          </a:p>
+          <a:p>
+            <a:pPr>
+              <a:spcAft>
+                <a:spcPts val="400"/>
+              </a:spcAft>
+            </a:pPr>
+            <a:r>
+              <a:rPr sz="1400" b="0" i="0">
+                <a:solidFill>
+                  <a:srgbClr val="FFFFFF"/>
+                </a:solidFill>
+                <a:latin typeface="Calibri"/>
+              </a:rPr>
+              <a:t>H-04 (menor): el RNF-02 de 3 segundos no aparece en ninguna postcondicion de CU-02.</a:t>
+            </a:r>
+          </a:p>
+          <a:p>
+            <a:pPr>
+              <a:spcAft>
+                <a:spcPts val="400"/>
+              </a:spcAft>
+            </a:pPr>
+            <a:r>
+              <a:rPr sz="1400" b="0" i="0">
+                <a:solidFill>
+                  <a:srgbClr val="FFFFFF"/>
+                </a:solidFill>
+                <a:latin typeface="Calibri"/>
+              </a:rPr>
+              <a:t>Glosario canonico: Propietario (prohibido Dueño, Cliente, Responsable) | Cita != Consulta.</a:t>
+            </a:r>
+          </a:p>
+        </p:txBody>
+      </p:sp>
+      <p:sp>
+        <p:nvSpPr>
+          <p:cNvPr id="9" name="TextBox 8"/>
+          <p:cNvSpPr txBox="1"/>
+          <p:nvPr/>
+        </p:nvSpPr>
+        <p:spPr>
+          <a:xfrm>
+            <a:off x="457200" y="6080760"/>
+            <a:ext cx="11277295" cy="320040"/>
+          </a:xfrm>
+          <a:prstGeom prst="rect">
+            <a:avLst/>
+          </a:prstGeom>
+          <a:noFill/>
+        </p:spPr>
+        <p:txBody>
+          <a:bodyPr wrap="square">
+            <a:spAutoFit/>
+          </a:bodyPr>
+          <a:lstStyle/>
+          <a:p>
+            <a:pPr algn="ctr"/>
+            <a:r>
+              <a:rPr sz="1200" b="0" i="1">
+                <a:solidFill>
+                  <a:srgbClr val="666666"/>
+                </a:solidFill>
+                <a:latin typeface="Calibri"/>
+              </a:rPr>
+              <a:t>Una tabla de cuatro columnas encuentra en veinte minutos las contradicciones que un equipo no ve en tres semanas.</a:t>
+            </a:r>
+          </a:p>
+        </p:txBody>
+      </p:sp>
+      <p:sp>
+        <p:nvSpPr>
+          <p:cNvPr id="10" name="TextBox 9"/>
           <p:cNvSpPr txBox="1"/>
           <p:nvPr/>
         </p:nvSpPr>
@@ -5164,7 +5377,7 @@
         <p:spPr>
           <a:xfrm>
             <a:off x="0" y="0"/>
-            <a:ext cx="12191695" cy="1170432"/>
+            <a:ext cx="12191695" cy="960120"/>
           </a:xfrm>
           <a:prstGeom prst="rect">
             <a:avLst/>
@@ -5206,7 +5419,7 @@
         </p:nvSpPr>
         <p:spPr>
           <a:xfrm>
-            <a:off x="0" y="1170432"/>
+            <a:off x="0" y="960120"/>
             <a:ext cx="12191695" cy="41148"/>
           </a:xfrm>
           <a:prstGeom prst="rect">
@@ -5250,7 +5463,7 @@
         <p:spPr>
           <a:xfrm>
             <a:off x="457200" y="164592"/>
-            <a:ext cx="11277295" cy="384048"/>
+            <a:ext cx="11277295" cy="502920"/>
           </a:xfrm>
           <a:prstGeom prst="rect">
             <a:avLst/>
@@ -5270,7 +5483,7 @@
                 </a:solidFill>
                 <a:latin typeface="Calibri"/>
               </a:rPr>
-              <a:t>Herramientas de hoy</a:t>
+              <a:t>Demo del dia</a:t>
             </a:r>
           </a:p>
         </p:txBody>
@@ -5283,8 +5496,8 @@
         </p:nvSpPr>
         <p:spPr>
           <a:xfrm>
-            <a:off x="457200" y="566928"/>
-            <a:ext cx="11277295" cy="411480"/>
+            <a:off x="457200" y="1170432"/>
+            <a:ext cx="11277295" cy="5230368"/>
           </a:xfrm>
           <a:prstGeom prst="rect">
             <a:avLst/>
@@ -5297,633 +5510,94 @@
           </a:bodyPr>
           <a:lstStyle/>
           <a:p>
-            <a:r>
-              <a:rPr sz="1400" b="0" i="0">
-                <a:solidFill>
-                  <a:srgbClr val="B8D8EE"/>
-                </a:solidFill>
-                <a:latin typeface="Calibri"/>
-              </a:rPr>
-              <a:t>Gratis · funcionan en el navegador</a:t>
-            </a:r>
-          </a:p>
-        </p:txBody>
-      </p:sp>
-      <p:sp>
-        <p:nvSpPr>
-          <p:cNvPr id="6" name="Rounded Rectangle 5"/>
-          <p:cNvSpPr/>
-          <p:nvPr/>
-        </p:nvSpPr>
-        <p:spPr>
-          <a:xfrm>
-            <a:off x="457200" y="1591056"/>
-            <a:ext cx="3624986" cy="2331720"/>
-          </a:xfrm>
-          <a:prstGeom prst="roundRect">
-            <a:avLst>
-              <a:gd name="adj" fmla="val 12000"/>
-            </a:avLst>
-          </a:prstGeom>
-          <a:solidFill>
-            <a:srgbClr val="F2F2F2"/>
-          </a:solidFill>
-          <a:ln>
-            <a:noFill/>
-          </a:ln>
-        </p:spPr>
-        <p:style>
-          <a:lnRef idx="1">
-            <a:schemeClr val="accent1"/>
-          </a:lnRef>
-          <a:fillRef idx="3">
-            <a:schemeClr val="accent1"/>
-          </a:fillRef>
-          <a:effectRef idx="2">
-            <a:schemeClr val="accent1"/>
-          </a:effectRef>
-          <a:fontRef idx="minor">
-            <a:schemeClr val="lt1"/>
-          </a:fontRef>
-        </p:style>
-        <p:txBody>
-          <a:bodyPr rtlCol="0" anchor="ctr"/>
-          <a:lstStyle/>
-          <a:p>
-            <a:pPr algn="ctr"/>
-          </a:p>
-        </p:txBody>
-      </p:sp>
-      <p:sp>
-        <p:nvSpPr>
-          <p:cNvPr id="7" name="Rectangle 6"/>
-          <p:cNvSpPr/>
-          <p:nvPr/>
-        </p:nvSpPr>
-        <p:spPr>
-          <a:xfrm>
-            <a:off x="457200" y="1591056"/>
-            <a:ext cx="3624986" cy="64008"/>
-          </a:xfrm>
-          <a:prstGeom prst="rect">
-            <a:avLst/>
-          </a:prstGeom>
-          <a:solidFill>
-            <a:srgbClr val="095292"/>
-          </a:solidFill>
-          <a:ln>
-            <a:noFill/>
-          </a:ln>
-        </p:spPr>
-        <p:style>
-          <a:lnRef idx="1">
-            <a:schemeClr val="accent1"/>
-          </a:lnRef>
-          <a:fillRef idx="3">
-            <a:schemeClr val="accent1"/>
-          </a:fillRef>
-          <a:effectRef idx="2">
-            <a:schemeClr val="accent1"/>
-          </a:effectRef>
-          <a:fontRef idx="minor">
-            <a:schemeClr val="lt1"/>
-          </a:fontRef>
-        </p:style>
-        <p:txBody>
-          <a:bodyPr rtlCol="0" anchor="ctr"/>
-          <a:lstStyle/>
-          <a:p>
-            <a:pPr algn="ctr"/>
-          </a:p>
-        </p:txBody>
-      </p:sp>
-      <p:sp>
-        <p:nvSpPr>
-          <p:cNvPr id="8" name="Rectangle 7"/>
-          <p:cNvSpPr/>
-          <p:nvPr/>
-        </p:nvSpPr>
-        <p:spPr>
-          <a:xfrm>
-            <a:off x="457200" y="1655064"/>
-            <a:ext cx="3624986" cy="27432"/>
-          </a:xfrm>
-          <a:prstGeom prst="rect">
-            <a:avLst/>
-          </a:prstGeom>
-          <a:solidFill>
-            <a:srgbClr val="FFD000"/>
-          </a:solidFill>
-          <a:ln>
-            <a:noFill/>
-          </a:ln>
-        </p:spPr>
-        <p:style>
-          <a:lnRef idx="1">
-            <a:schemeClr val="accent1"/>
-          </a:lnRef>
-          <a:fillRef idx="3">
-            <a:schemeClr val="accent1"/>
-          </a:fillRef>
-          <a:effectRef idx="2">
-            <a:schemeClr val="accent1"/>
-          </a:effectRef>
-          <a:fontRef idx="minor">
-            <a:schemeClr val="lt1"/>
-          </a:fontRef>
-        </p:style>
-        <p:txBody>
-          <a:bodyPr rtlCol="0" anchor="ctr"/>
-          <a:lstStyle/>
-          <a:p>
-            <a:pPr algn="ctr"/>
-          </a:p>
-        </p:txBody>
-      </p:sp>
-      <p:pic>
-        <p:nvPicPr>
-          <p:cNvPr id="9" name="Picture 8" descr="drawio.png"/>
-          <p:cNvPicPr>
-            <a:picLocks noChangeAspect="1"/>
-          </p:cNvPicPr>
-          <p:nvPr/>
-        </p:nvPicPr>
-        <p:blipFill>
-          <a:blip r:embed="rId2"/>
-          <a:stretch>
-            <a:fillRect/>
-          </a:stretch>
-        </p:blipFill>
-        <p:spPr>
-          <a:xfrm>
-            <a:off x="1643329" y="1847087"/>
-            <a:ext cx="1252728" cy="1252728"/>
-          </a:xfrm>
-          <a:prstGeom prst="rect">
-            <a:avLst/>
-          </a:prstGeom>
-        </p:spPr>
-      </p:pic>
-      <p:sp>
-        <p:nvSpPr>
-          <p:cNvPr id="10" name="TextBox 9"/>
-          <p:cNvSpPr txBox="1"/>
-          <p:nvPr/>
-        </p:nvSpPr>
-        <p:spPr>
-          <a:xfrm>
-            <a:off x="530352" y="3191256"/>
-            <a:ext cx="3478682" cy="621792"/>
-          </a:xfrm>
-          <a:prstGeom prst="rect">
-            <a:avLst/>
-          </a:prstGeom>
-          <a:noFill/>
-        </p:spPr>
-        <p:txBody>
-          <a:bodyPr wrap="square" anchor="t"/>
-          <a:lstStyle/>
-          <a:p>
-            <a:pPr algn="ctr"/>
-            <a:r>
-              <a:rPr sz="1300" b="1" i="0">
-                <a:solidFill>
-                  <a:srgbClr val="095292"/>
-                </a:solidFill>
-                <a:latin typeface="Calibri"/>
-              </a:rPr>
-              <a:t>Draw.Io</a:t>
-            </a:r>
-          </a:p>
-          <a:p>
-            <a:pPr algn="ctr">
-              <a:spcBef>
-                <a:spcPts val="200"/>
-              </a:spcBef>
+            <a:pPr>
+              <a:spcAft>
+                <a:spcPts val="800"/>
+              </a:spcAft>
             </a:pPr>
             <a:r>
-              <a:rPr sz="1000" b="0" i="0">
-                <a:solidFill>
-                  <a:srgbClr val="666666"/>
-                </a:solidFill>
-                <a:latin typeface="Calibri"/>
-              </a:rPr>
-              <a:t>Diagramas UML y de contexto</a:t>
-            </a:r>
-          </a:p>
-        </p:txBody>
-      </p:sp>
-      <p:sp>
-        <p:nvSpPr>
-          <p:cNvPr id="11" name="Rounded Rectangle 10"/>
-          <p:cNvSpPr/>
-          <p:nvPr/>
-        </p:nvSpPr>
-        <p:spPr>
-          <a:xfrm>
-            <a:off x="4283354" y="1591056"/>
-            <a:ext cx="3624986" cy="2331720"/>
-          </a:xfrm>
-          <a:prstGeom prst="roundRect">
-            <a:avLst>
-              <a:gd name="adj" fmla="val 12000"/>
-            </a:avLst>
-          </a:prstGeom>
-          <a:solidFill>
-            <a:srgbClr val="F2F2F2"/>
-          </a:solidFill>
-          <a:ln>
-            <a:noFill/>
-          </a:ln>
-        </p:spPr>
-        <p:style>
-          <a:lnRef idx="1">
-            <a:schemeClr val="accent1"/>
-          </a:lnRef>
-          <a:fillRef idx="3">
-            <a:schemeClr val="accent1"/>
-          </a:fillRef>
-          <a:effectRef idx="2">
-            <a:schemeClr val="accent1"/>
-          </a:effectRef>
-          <a:fontRef idx="minor">
-            <a:schemeClr val="lt1"/>
-          </a:fontRef>
-        </p:style>
-        <p:txBody>
-          <a:bodyPr rtlCol="0" anchor="ctr"/>
-          <a:lstStyle/>
-          <a:p>
-            <a:pPr algn="ctr"/>
-          </a:p>
-        </p:txBody>
-      </p:sp>
-      <p:sp>
-        <p:nvSpPr>
-          <p:cNvPr id="12" name="Rectangle 11"/>
-          <p:cNvSpPr/>
-          <p:nvPr/>
-        </p:nvSpPr>
-        <p:spPr>
-          <a:xfrm>
-            <a:off x="4283354" y="1591056"/>
-            <a:ext cx="3624986" cy="64008"/>
-          </a:xfrm>
-          <a:prstGeom prst="rect">
-            <a:avLst/>
-          </a:prstGeom>
-          <a:solidFill>
-            <a:srgbClr val="095292"/>
-          </a:solidFill>
-          <a:ln>
-            <a:noFill/>
-          </a:ln>
-        </p:spPr>
-        <p:style>
-          <a:lnRef idx="1">
-            <a:schemeClr val="accent1"/>
-          </a:lnRef>
-          <a:fillRef idx="3">
-            <a:schemeClr val="accent1"/>
-          </a:fillRef>
-          <a:effectRef idx="2">
-            <a:schemeClr val="accent1"/>
-          </a:effectRef>
-          <a:fontRef idx="minor">
-            <a:schemeClr val="lt1"/>
-          </a:fontRef>
-        </p:style>
-        <p:txBody>
-          <a:bodyPr rtlCol="0" anchor="ctr"/>
-          <a:lstStyle/>
-          <a:p>
-            <a:pPr algn="ctr"/>
-          </a:p>
-        </p:txBody>
-      </p:sp>
-      <p:sp>
-        <p:nvSpPr>
-          <p:cNvPr id="13" name="Rectangle 12"/>
-          <p:cNvSpPr/>
-          <p:nvPr/>
-        </p:nvSpPr>
-        <p:spPr>
-          <a:xfrm>
-            <a:off x="4283354" y="1655064"/>
-            <a:ext cx="3624986" cy="27432"/>
-          </a:xfrm>
-          <a:prstGeom prst="rect">
-            <a:avLst/>
-          </a:prstGeom>
-          <a:solidFill>
-            <a:srgbClr val="FFD000"/>
-          </a:solidFill>
-          <a:ln>
-            <a:noFill/>
-          </a:ln>
-        </p:spPr>
-        <p:style>
-          <a:lnRef idx="1">
-            <a:schemeClr val="accent1"/>
-          </a:lnRef>
-          <a:fillRef idx="3">
-            <a:schemeClr val="accent1"/>
-          </a:fillRef>
-          <a:effectRef idx="2">
-            <a:schemeClr val="accent1"/>
-          </a:effectRef>
-          <a:fontRef idx="minor">
-            <a:schemeClr val="lt1"/>
-          </a:fontRef>
-        </p:style>
-        <p:txBody>
-          <a:bodyPr rtlCol="0" anchor="ctr"/>
-          <a:lstStyle/>
-          <a:p>
-            <a:pPr algn="ctr"/>
-          </a:p>
-        </p:txBody>
-      </p:sp>
-      <p:pic>
-        <p:nvPicPr>
-          <p:cNvPr id="14" name="Picture 13" descr="google_docs.png"/>
-          <p:cNvPicPr>
-            <a:picLocks noChangeAspect="1"/>
-          </p:cNvPicPr>
-          <p:nvPr/>
-        </p:nvPicPr>
-        <p:blipFill>
-          <a:blip r:embed="rId3"/>
-          <a:stretch>
-            <a:fillRect/>
-          </a:stretch>
-        </p:blipFill>
-        <p:spPr>
-          <a:xfrm>
-            <a:off x="5469483" y="1847087"/>
-            <a:ext cx="1252728" cy="1252728"/>
-          </a:xfrm>
-          <a:prstGeom prst="rect">
-            <a:avLst/>
-          </a:prstGeom>
-        </p:spPr>
-      </p:pic>
-      <p:sp>
-        <p:nvSpPr>
-          <p:cNvPr id="15" name="TextBox 14"/>
-          <p:cNvSpPr txBox="1"/>
-          <p:nvPr/>
-        </p:nvSpPr>
-        <p:spPr>
-          <a:xfrm>
-            <a:off x="4356506" y="3191256"/>
-            <a:ext cx="3478682" cy="621792"/>
-          </a:xfrm>
-          <a:prstGeom prst="rect">
-            <a:avLst/>
-          </a:prstGeom>
-          <a:noFill/>
-        </p:spPr>
-        <p:txBody>
-          <a:bodyPr wrap="square" anchor="t"/>
-          <a:lstStyle/>
-          <a:p>
-            <a:pPr algn="ctr"/>
-            <a:r>
-              <a:rPr sz="1300" b="1" i="0">
-                <a:solidFill>
-                  <a:srgbClr val="095292"/>
-                </a:solidFill>
-                <a:latin typeface="Calibri"/>
-              </a:rPr>
-              <a:t>google docs</a:t>
-            </a:r>
-          </a:p>
-          <a:p>
-            <a:pPr algn="ctr">
-              <a:spcBef>
-                <a:spcPts val="200"/>
-              </a:spcBef>
+              <a:rPr sz="2000" b="0" i="0">
+                <a:solidFill>
+                  <a:srgbClr val="333333"/>
+                </a:solidFill>
+                <a:latin typeface="Calibri"/>
+              </a:rPr>
+              <a:t>–   </a:t>
+            </a:r>
+            <a:r>
+              <a:rPr sz="2000" b="1" i="0">
+                <a:solidFill>
+                  <a:srgbClr val="333333"/>
+                </a:solidFill>
+                <a:latin typeface="Calibri"/>
+              </a:rPr>
+              <a:t>Herramienta:</a:t>
+            </a:r>
+            <a:r>
+              <a:rPr sz="2000" b="0" i="0">
+                <a:solidFill>
+                  <a:srgbClr val="333333"/>
+                </a:solidFill>
+                <a:latin typeface="Calibri"/>
+              </a:rPr>
+              <a:t> Google Docs · draw.io</a:t>
+            </a:r>
+          </a:p>
+          <a:p>
+            <a:pPr>
+              <a:spcAft>
+                <a:spcPts val="800"/>
+              </a:spcAft>
             </a:pPr>
             <a:r>
-              <a:rPr sz="1000" b="0" i="0">
-                <a:solidFill>
-                  <a:srgbClr val="666666"/>
-                </a:solidFill>
-                <a:latin typeface="Calibri"/>
-              </a:rPr>
-              <a:t>Documentos del paquete de diseño</a:t>
-            </a:r>
-          </a:p>
-        </p:txBody>
-      </p:sp>
-      <p:sp>
-        <p:nvSpPr>
-          <p:cNvPr id="16" name="Rounded Rectangle 15"/>
-          <p:cNvSpPr/>
-          <p:nvPr/>
-        </p:nvSpPr>
-        <p:spPr>
-          <a:xfrm>
-            <a:off x="8109508" y="1591056"/>
-            <a:ext cx="3624986" cy="2331720"/>
-          </a:xfrm>
-          <a:prstGeom prst="roundRect">
-            <a:avLst>
-              <a:gd name="adj" fmla="val 12000"/>
-            </a:avLst>
-          </a:prstGeom>
-          <a:solidFill>
-            <a:srgbClr val="F2F2F2"/>
-          </a:solidFill>
-          <a:ln>
-            <a:noFill/>
-          </a:ln>
-        </p:spPr>
-        <p:style>
-          <a:lnRef idx="1">
-            <a:schemeClr val="accent1"/>
-          </a:lnRef>
-          <a:fillRef idx="3">
-            <a:schemeClr val="accent1"/>
-          </a:fillRef>
-          <a:effectRef idx="2">
-            <a:schemeClr val="accent1"/>
-          </a:effectRef>
-          <a:fontRef idx="minor">
-            <a:schemeClr val="lt1"/>
-          </a:fontRef>
-        </p:style>
-        <p:txBody>
-          <a:bodyPr rtlCol="0" anchor="ctr"/>
-          <a:lstStyle/>
-          <a:p>
-            <a:pPr algn="ctr"/>
-          </a:p>
-        </p:txBody>
-      </p:sp>
-      <p:sp>
-        <p:nvSpPr>
-          <p:cNvPr id="17" name="Rectangle 16"/>
-          <p:cNvSpPr/>
-          <p:nvPr/>
-        </p:nvSpPr>
-        <p:spPr>
-          <a:xfrm>
-            <a:off x="8109508" y="1591056"/>
-            <a:ext cx="3624986" cy="64008"/>
-          </a:xfrm>
-          <a:prstGeom prst="rect">
-            <a:avLst/>
-          </a:prstGeom>
-          <a:solidFill>
-            <a:srgbClr val="095292"/>
-          </a:solidFill>
-          <a:ln>
-            <a:noFill/>
-          </a:ln>
-        </p:spPr>
-        <p:style>
-          <a:lnRef idx="1">
-            <a:schemeClr val="accent1"/>
-          </a:lnRef>
-          <a:fillRef idx="3">
-            <a:schemeClr val="accent1"/>
-          </a:fillRef>
-          <a:effectRef idx="2">
-            <a:schemeClr val="accent1"/>
-          </a:effectRef>
-          <a:fontRef idx="minor">
-            <a:schemeClr val="lt1"/>
-          </a:fontRef>
-        </p:style>
-        <p:txBody>
-          <a:bodyPr rtlCol="0" anchor="ctr"/>
-          <a:lstStyle/>
-          <a:p>
-            <a:pPr algn="ctr"/>
-          </a:p>
-        </p:txBody>
-      </p:sp>
-      <p:sp>
-        <p:nvSpPr>
-          <p:cNvPr id="18" name="Rectangle 17"/>
-          <p:cNvSpPr/>
-          <p:nvPr/>
-        </p:nvSpPr>
-        <p:spPr>
-          <a:xfrm>
-            <a:off x="8109508" y="1655064"/>
-            <a:ext cx="3624986" cy="27432"/>
-          </a:xfrm>
-          <a:prstGeom prst="rect">
-            <a:avLst/>
-          </a:prstGeom>
-          <a:solidFill>
-            <a:srgbClr val="FFD000"/>
-          </a:solidFill>
-          <a:ln>
-            <a:noFill/>
-          </a:ln>
-        </p:spPr>
-        <p:style>
-          <a:lnRef idx="1">
-            <a:schemeClr val="accent1"/>
-          </a:lnRef>
-          <a:fillRef idx="3">
-            <a:schemeClr val="accent1"/>
-          </a:fillRef>
-          <a:effectRef idx="2">
-            <a:schemeClr val="accent1"/>
-          </a:effectRef>
-          <a:fontRef idx="minor">
-            <a:schemeClr val="lt1"/>
-          </a:fontRef>
-        </p:style>
-        <p:txBody>
-          <a:bodyPr rtlCol="0" anchor="ctr"/>
-          <a:lstStyle/>
-          <a:p>
-            <a:pPr algn="ctr"/>
-          </a:p>
-        </p:txBody>
-      </p:sp>
-      <p:pic>
-        <p:nvPicPr>
-          <p:cNvPr id="19" name="Picture 18" descr="examlab.png"/>
-          <p:cNvPicPr>
-            <a:picLocks noChangeAspect="1"/>
-          </p:cNvPicPr>
-          <p:nvPr/>
-        </p:nvPicPr>
-        <p:blipFill>
-          <a:blip r:embed="rId4"/>
-          <a:stretch>
-            <a:fillRect/>
-          </a:stretch>
-        </p:blipFill>
-        <p:spPr>
-          <a:xfrm>
-            <a:off x="9295638" y="1847087"/>
-            <a:ext cx="1252728" cy="1252728"/>
-          </a:xfrm>
-          <a:prstGeom prst="rect">
-            <a:avLst/>
-          </a:prstGeom>
-        </p:spPr>
-      </p:pic>
-      <p:sp>
-        <p:nvSpPr>
-          <p:cNvPr id="20" name="TextBox 19"/>
-          <p:cNvSpPr txBox="1"/>
-          <p:nvPr/>
-        </p:nvSpPr>
-        <p:spPr>
-          <a:xfrm>
-            <a:off x="8182660" y="3191256"/>
-            <a:ext cx="3478682" cy="621792"/>
-          </a:xfrm>
-          <a:prstGeom prst="rect">
-            <a:avLst/>
-          </a:prstGeom>
-          <a:noFill/>
-        </p:spPr>
-        <p:txBody>
-          <a:bodyPr wrap="square" anchor="t"/>
-          <a:lstStyle/>
-          <a:p>
-            <a:pPr algn="ctr"/>
-            <a:r>
-              <a:rPr sz="1300" b="1" i="0">
-                <a:solidFill>
-                  <a:srgbClr val="095292"/>
-                </a:solidFill>
-                <a:latin typeface="Calibri"/>
-              </a:rPr>
-              <a:t>la plataforma del curso</a:t>
-            </a:r>
-          </a:p>
-          <a:p>
-            <a:pPr algn="ctr">
-              <a:spcBef>
-                <a:spcPts val="200"/>
-              </a:spcBef>
+              <a:rPr sz="2000" b="0" i="0">
+                <a:solidFill>
+                  <a:srgbClr val="333333"/>
+                </a:solidFill>
+                <a:latin typeface="Calibri"/>
+              </a:rPr>
+              <a:t>–   </a:t>
+            </a:r>
+            <a:r>
+              <a:rPr sz="2000" b="1" i="0">
+                <a:solidFill>
+                  <a:srgbClr val="333333"/>
+                </a:solidFill>
+                <a:latin typeface="Calibri"/>
+              </a:rPr>
+              <a:t>Demo:</a:t>
+            </a:r>
+            <a:r>
+              <a:rPr sz="2000" b="0" i="0">
+                <a:solidFill>
+                  <a:srgbClr val="333333"/>
+                </a:solidFill>
+                <a:latin typeface="Calibri"/>
+              </a:rPr>
+              <a:t> El docente proyecta el paquete de un equipo ficticio de VetCare y encuentra en vivo tres inconsistencias: un RF sin caso de uso, una clase llamada Dueño que en el catalogo de requisitos se llama Propietario, y un caso de uso que ninguna clase puede soportar.</a:t>
+            </a:r>
+          </a:p>
+          <a:p>
+            <a:pPr>
+              <a:spcAft>
+                <a:spcPts val="800"/>
+              </a:spcAft>
             </a:pPr>
             <a:r>
-              <a:rPr sz="1000" b="0" i="0">
-                <a:solidFill>
-                  <a:srgbClr val="666666"/>
-                </a:solidFill>
-                <a:latin typeface="Calibri"/>
-              </a:rPr>
-              <a:t>Entrega del taller · en la fecha que indique el docente</a:t>
-            </a:r>
-          </a:p>
-        </p:txBody>
-      </p:sp>
-      <p:sp>
-        <p:nvSpPr>
-          <p:cNvPr id="21" name="TextBox 20"/>
+              <a:rPr sz="2000" b="0" i="0">
+                <a:solidFill>
+                  <a:srgbClr val="333333"/>
+                </a:solidFill>
+                <a:latin typeface="Calibri"/>
+              </a:rPr>
+              <a:t>–   Mismo dominio VetCare — no otro ejemplo. Aqui se diseña, no se programa.</a:t>
+            </a:r>
+          </a:p>
+        </p:txBody>
+      </p:sp>
+      <p:sp>
+        <p:nvSpPr>
+          <p:cNvPr id="6" name="TextBox 5"/>
           <p:cNvSpPr txBox="1"/>
           <p:nvPr/>
         </p:nvSpPr>
@@ -5991,7 +5665,7 @@
         <p:spPr>
           <a:xfrm>
             <a:off x="0" y="0"/>
-            <a:ext cx="12191695" cy="960120"/>
+            <a:ext cx="12191695" cy="1170432"/>
           </a:xfrm>
           <a:prstGeom prst="rect">
             <a:avLst/>
@@ -6033,7 +5707,7 @@
         </p:nvSpPr>
         <p:spPr>
           <a:xfrm>
-            <a:off x="0" y="960120"/>
+            <a:off x="0" y="1170432"/>
             <a:ext cx="12191695" cy="41148"/>
           </a:xfrm>
           <a:prstGeom prst="rect">
@@ -6077,7 +5751,7 @@
         <p:spPr>
           <a:xfrm>
             <a:off x="457200" y="164592"/>
-            <a:ext cx="11277295" cy="502920"/>
+            <a:ext cx="11277295" cy="384048"/>
           </a:xfrm>
           <a:prstGeom prst="rect">
             <a:avLst/>
@@ -6097,7 +5771,7 @@
                 </a:solidFill>
                 <a:latin typeface="Calibri"/>
               </a:rPr>
-              <a:t>Taller PI — por que importa</a:t>
+              <a:t>Herramientas de hoy</a:t>
             </a:r>
           </a:p>
         </p:txBody>
@@ -6110,8 +5784,8 @@
         </p:nvSpPr>
         <p:spPr>
           <a:xfrm>
-            <a:off x="457200" y="1170432"/>
-            <a:ext cx="11277295" cy="5230368"/>
+            <a:off x="457200" y="566928"/>
+            <a:ext cx="11277295" cy="411480"/>
           </a:xfrm>
           <a:prstGeom prst="rect">
             <a:avLst/>
@@ -6124,76 +5798,633 @@
           </a:bodyPr>
           <a:lstStyle/>
           <a:p>
-            <a:pPr>
-              <a:spcAft>
-                <a:spcPts val="800"/>
-              </a:spcAft>
+            <a:r>
+              <a:rPr sz="1400" b="0" i="0">
+                <a:solidFill>
+                  <a:srgbClr val="B8D8EE"/>
+                </a:solidFill>
+                <a:latin typeface="Calibri"/>
+              </a:rPr>
+              <a:t>Gratis · funcionan en el navegador</a:t>
+            </a:r>
+          </a:p>
+        </p:txBody>
+      </p:sp>
+      <p:sp>
+        <p:nvSpPr>
+          <p:cNvPr id="6" name="Rounded Rectangle 5"/>
+          <p:cNvSpPr/>
+          <p:nvPr/>
+        </p:nvSpPr>
+        <p:spPr>
+          <a:xfrm>
+            <a:off x="457200" y="1591056"/>
+            <a:ext cx="3624986" cy="2331720"/>
+          </a:xfrm>
+          <a:prstGeom prst="roundRect">
+            <a:avLst>
+              <a:gd name="adj" fmla="val 12000"/>
+            </a:avLst>
+          </a:prstGeom>
+          <a:solidFill>
+            <a:srgbClr val="F2F2F2"/>
+          </a:solidFill>
+          <a:ln>
+            <a:noFill/>
+          </a:ln>
+        </p:spPr>
+        <p:style>
+          <a:lnRef idx="1">
+            <a:schemeClr val="accent1"/>
+          </a:lnRef>
+          <a:fillRef idx="3">
+            <a:schemeClr val="accent1"/>
+          </a:fillRef>
+          <a:effectRef idx="2">
+            <a:schemeClr val="accent1"/>
+          </a:effectRef>
+          <a:fontRef idx="minor">
+            <a:schemeClr val="lt1"/>
+          </a:fontRef>
+        </p:style>
+        <p:txBody>
+          <a:bodyPr rtlCol="0" anchor="ctr"/>
+          <a:lstStyle/>
+          <a:p>
+            <a:pPr algn="ctr"/>
+          </a:p>
+        </p:txBody>
+      </p:sp>
+      <p:sp>
+        <p:nvSpPr>
+          <p:cNvPr id="7" name="Rectangle 6"/>
+          <p:cNvSpPr/>
+          <p:nvPr/>
+        </p:nvSpPr>
+        <p:spPr>
+          <a:xfrm>
+            <a:off x="457200" y="1591056"/>
+            <a:ext cx="3624986" cy="64008"/>
+          </a:xfrm>
+          <a:prstGeom prst="rect">
+            <a:avLst/>
+          </a:prstGeom>
+          <a:solidFill>
+            <a:srgbClr val="095292"/>
+          </a:solidFill>
+          <a:ln>
+            <a:noFill/>
+          </a:ln>
+        </p:spPr>
+        <p:style>
+          <a:lnRef idx="1">
+            <a:schemeClr val="accent1"/>
+          </a:lnRef>
+          <a:fillRef idx="3">
+            <a:schemeClr val="accent1"/>
+          </a:fillRef>
+          <a:effectRef idx="2">
+            <a:schemeClr val="accent1"/>
+          </a:effectRef>
+          <a:fontRef idx="minor">
+            <a:schemeClr val="lt1"/>
+          </a:fontRef>
+        </p:style>
+        <p:txBody>
+          <a:bodyPr rtlCol="0" anchor="ctr"/>
+          <a:lstStyle/>
+          <a:p>
+            <a:pPr algn="ctr"/>
+          </a:p>
+        </p:txBody>
+      </p:sp>
+      <p:sp>
+        <p:nvSpPr>
+          <p:cNvPr id="8" name="Rectangle 7"/>
+          <p:cNvSpPr/>
+          <p:nvPr/>
+        </p:nvSpPr>
+        <p:spPr>
+          <a:xfrm>
+            <a:off x="457200" y="1655064"/>
+            <a:ext cx="3624986" cy="27432"/>
+          </a:xfrm>
+          <a:prstGeom prst="rect">
+            <a:avLst/>
+          </a:prstGeom>
+          <a:solidFill>
+            <a:srgbClr val="FFD000"/>
+          </a:solidFill>
+          <a:ln>
+            <a:noFill/>
+          </a:ln>
+        </p:spPr>
+        <p:style>
+          <a:lnRef idx="1">
+            <a:schemeClr val="accent1"/>
+          </a:lnRef>
+          <a:fillRef idx="3">
+            <a:schemeClr val="accent1"/>
+          </a:fillRef>
+          <a:effectRef idx="2">
+            <a:schemeClr val="accent1"/>
+          </a:effectRef>
+          <a:fontRef idx="minor">
+            <a:schemeClr val="lt1"/>
+          </a:fontRef>
+        </p:style>
+        <p:txBody>
+          <a:bodyPr rtlCol="0" anchor="ctr"/>
+          <a:lstStyle/>
+          <a:p>
+            <a:pPr algn="ctr"/>
+          </a:p>
+        </p:txBody>
+      </p:sp>
+      <p:pic>
+        <p:nvPicPr>
+          <p:cNvPr id="9" name="Picture 8" descr="drawio.png"/>
+          <p:cNvPicPr>
+            <a:picLocks noChangeAspect="1"/>
+          </p:cNvPicPr>
+          <p:nvPr/>
+        </p:nvPicPr>
+        <p:blipFill>
+          <a:blip r:embed="rId2"/>
+          <a:stretch>
+            <a:fillRect/>
+          </a:stretch>
+        </p:blipFill>
+        <p:spPr>
+          <a:xfrm>
+            <a:off x="1643329" y="1847087"/>
+            <a:ext cx="1252728" cy="1252728"/>
+          </a:xfrm>
+          <a:prstGeom prst="rect">
+            <a:avLst/>
+          </a:prstGeom>
+        </p:spPr>
+      </p:pic>
+      <p:sp>
+        <p:nvSpPr>
+          <p:cNvPr id="10" name="TextBox 9"/>
+          <p:cNvSpPr txBox="1"/>
+          <p:nvPr/>
+        </p:nvSpPr>
+        <p:spPr>
+          <a:xfrm>
+            <a:off x="530352" y="3191256"/>
+            <a:ext cx="3478682" cy="621792"/>
+          </a:xfrm>
+          <a:prstGeom prst="rect">
+            <a:avLst/>
+          </a:prstGeom>
+          <a:noFill/>
+        </p:spPr>
+        <p:txBody>
+          <a:bodyPr wrap="square" anchor="t"/>
+          <a:lstStyle/>
+          <a:p>
+            <a:pPr algn="ctr"/>
+            <a:r>
+              <a:rPr sz="1300" b="1" i="0">
+                <a:solidFill>
+                  <a:srgbClr val="095292"/>
+                </a:solidFill>
+                <a:latin typeface="Calibri"/>
+              </a:rPr>
+              <a:t>Draw.Io</a:t>
+            </a:r>
+          </a:p>
+          <a:p>
+            <a:pPr algn="ctr">
+              <a:spcBef>
+                <a:spcPts val="200"/>
+              </a:spcBef>
             </a:pPr>
             <a:r>
-              <a:rPr sz="2000" b="0" i="0">
-                <a:solidFill>
-                  <a:srgbClr val="333333"/>
-                </a:solidFill>
-                <a:latin typeface="Calibri"/>
-              </a:rPr>
-              <a:t>–   </a:t>
-            </a:r>
-            <a:r>
-              <a:rPr sz="2000" b="1" i="0">
-                <a:solidFill>
-                  <a:srgbClr val="333333"/>
-                </a:solidFill>
-                <a:latin typeface="Calibri"/>
-              </a:rPr>
-              <a:t>Por que importa al PI:</a:t>
-            </a:r>
-            <a:r>
-              <a:rPr sz="2000" b="0" i="0">
-                <a:solidFill>
-                  <a:srgbClr val="333333"/>
-                </a:solidFill>
-                <a:latin typeface="Calibri"/>
-              </a:rPr>
-              <a:t> el paquete de VetCare ya tiene requisitos, casos de uso y clases, pero nadie ha verificado que los tres describan el mismo sistema; sin esa verificacion los planos se contradicen y quien construya va a escoger al azar cual documento obedecer.</a:t>
-            </a:r>
-          </a:p>
-          <a:p>
-            <a:pPr>
-              <a:spcAft>
-                <a:spcPts val="800"/>
-              </a:spcAft>
+              <a:rPr sz="1000" b="0" i="0">
+                <a:solidFill>
+                  <a:srgbClr val="666666"/>
+                </a:solidFill>
+                <a:latin typeface="Calibri"/>
+              </a:rPr>
+              <a:t>Diagramas UML y de contexto</a:t>
+            </a:r>
+          </a:p>
+        </p:txBody>
+      </p:sp>
+      <p:sp>
+        <p:nvSpPr>
+          <p:cNvPr id="11" name="Rounded Rectangle 10"/>
+          <p:cNvSpPr/>
+          <p:nvPr/>
+        </p:nvSpPr>
+        <p:spPr>
+          <a:xfrm>
+            <a:off x="4283354" y="1591056"/>
+            <a:ext cx="3624986" cy="2331720"/>
+          </a:xfrm>
+          <a:prstGeom prst="roundRect">
+            <a:avLst>
+              <a:gd name="adj" fmla="val 12000"/>
+            </a:avLst>
+          </a:prstGeom>
+          <a:solidFill>
+            <a:srgbClr val="F2F2F2"/>
+          </a:solidFill>
+          <a:ln>
+            <a:noFill/>
+          </a:ln>
+        </p:spPr>
+        <p:style>
+          <a:lnRef idx="1">
+            <a:schemeClr val="accent1"/>
+          </a:lnRef>
+          <a:fillRef idx="3">
+            <a:schemeClr val="accent1"/>
+          </a:fillRef>
+          <a:effectRef idx="2">
+            <a:schemeClr val="accent1"/>
+          </a:effectRef>
+          <a:fontRef idx="minor">
+            <a:schemeClr val="lt1"/>
+          </a:fontRef>
+        </p:style>
+        <p:txBody>
+          <a:bodyPr rtlCol="0" anchor="ctr"/>
+          <a:lstStyle/>
+          <a:p>
+            <a:pPr algn="ctr"/>
+          </a:p>
+        </p:txBody>
+      </p:sp>
+      <p:sp>
+        <p:nvSpPr>
+          <p:cNvPr id="12" name="Rectangle 11"/>
+          <p:cNvSpPr/>
+          <p:nvPr/>
+        </p:nvSpPr>
+        <p:spPr>
+          <a:xfrm>
+            <a:off x="4283354" y="1591056"/>
+            <a:ext cx="3624986" cy="64008"/>
+          </a:xfrm>
+          <a:prstGeom prst="rect">
+            <a:avLst/>
+          </a:prstGeom>
+          <a:solidFill>
+            <a:srgbClr val="095292"/>
+          </a:solidFill>
+          <a:ln>
+            <a:noFill/>
+          </a:ln>
+        </p:spPr>
+        <p:style>
+          <a:lnRef idx="1">
+            <a:schemeClr val="accent1"/>
+          </a:lnRef>
+          <a:fillRef idx="3">
+            <a:schemeClr val="accent1"/>
+          </a:fillRef>
+          <a:effectRef idx="2">
+            <a:schemeClr val="accent1"/>
+          </a:effectRef>
+          <a:fontRef idx="minor">
+            <a:schemeClr val="lt1"/>
+          </a:fontRef>
+        </p:style>
+        <p:txBody>
+          <a:bodyPr rtlCol="0" anchor="ctr"/>
+          <a:lstStyle/>
+          <a:p>
+            <a:pPr algn="ctr"/>
+          </a:p>
+        </p:txBody>
+      </p:sp>
+      <p:sp>
+        <p:nvSpPr>
+          <p:cNvPr id="13" name="Rectangle 12"/>
+          <p:cNvSpPr/>
+          <p:nvPr/>
+        </p:nvSpPr>
+        <p:spPr>
+          <a:xfrm>
+            <a:off x="4283354" y="1655064"/>
+            <a:ext cx="3624986" cy="27432"/>
+          </a:xfrm>
+          <a:prstGeom prst="rect">
+            <a:avLst/>
+          </a:prstGeom>
+          <a:solidFill>
+            <a:srgbClr val="FFD000"/>
+          </a:solidFill>
+          <a:ln>
+            <a:noFill/>
+          </a:ln>
+        </p:spPr>
+        <p:style>
+          <a:lnRef idx="1">
+            <a:schemeClr val="accent1"/>
+          </a:lnRef>
+          <a:fillRef idx="3">
+            <a:schemeClr val="accent1"/>
+          </a:fillRef>
+          <a:effectRef idx="2">
+            <a:schemeClr val="accent1"/>
+          </a:effectRef>
+          <a:fontRef idx="minor">
+            <a:schemeClr val="lt1"/>
+          </a:fontRef>
+        </p:style>
+        <p:txBody>
+          <a:bodyPr rtlCol="0" anchor="ctr"/>
+          <a:lstStyle/>
+          <a:p>
+            <a:pPr algn="ctr"/>
+          </a:p>
+        </p:txBody>
+      </p:sp>
+      <p:pic>
+        <p:nvPicPr>
+          <p:cNvPr id="14" name="Picture 13" descr="google_docs.png"/>
+          <p:cNvPicPr>
+            <a:picLocks noChangeAspect="1"/>
+          </p:cNvPicPr>
+          <p:nvPr/>
+        </p:nvPicPr>
+        <p:blipFill>
+          <a:blip r:embed="rId3"/>
+          <a:stretch>
+            <a:fillRect/>
+          </a:stretch>
+        </p:blipFill>
+        <p:spPr>
+          <a:xfrm>
+            <a:off x="5469483" y="1847087"/>
+            <a:ext cx="1252728" cy="1252728"/>
+          </a:xfrm>
+          <a:prstGeom prst="rect">
+            <a:avLst/>
+          </a:prstGeom>
+        </p:spPr>
+      </p:pic>
+      <p:sp>
+        <p:nvSpPr>
+          <p:cNvPr id="15" name="TextBox 14"/>
+          <p:cNvSpPr txBox="1"/>
+          <p:nvPr/>
+        </p:nvSpPr>
+        <p:spPr>
+          <a:xfrm>
+            <a:off x="4356506" y="3191256"/>
+            <a:ext cx="3478682" cy="621792"/>
+          </a:xfrm>
+          <a:prstGeom prst="rect">
+            <a:avLst/>
+          </a:prstGeom>
+          <a:noFill/>
+        </p:spPr>
+        <p:txBody>
+          <a:bodyPr wrap="square" anchor="t"/>
+          <a:lstStyle/>
+          <a:p>
+            <a:pPr algn="ctr"/>
+            <a:r>
+              <a:rPr sz="1300" b="1" i="0">
+                <a:solidFill>
+                  <a:srgbClr val="095292"/>
+                </a:solidFill>
+                <a:latin typeface="Calibri"/>
+              </a:rPr>
+              <a:t>google docs</a:t>
+            </a:r>
+          </a:p>
+          <a:p>
+            <a:pPr algn="ctr">
+              <a:spcBef>
+                <a:spcPts val="200"/>
+              </a:spcBef>
             </a:pPr>
             <a:r>
-              <a:rPr sz="2000" b="0" i="0">
-                <a:solidFill>
-                  <a:srgbClr val="333333"/>
-                </a:solidFill>
-                <a:latin typeface="Calibri"/>
-              </a:rPr>
-              <a:t>–   Esta sesion produce evidencia propia: matriz, glosario, acta de revision y backlog, y por eso se califica igual que cualquier otra entrega.</a:t>
-            </a:r>
-          </a:p>
-          <a:p>
-            <a:pPr>
-              <a:spcAft>
-                <a:spcPts val="800"/>
-              </a:spcAft>
+              <a:rPr sz="1000" b="0" i="0">
+                <a:solidFill>
+                  <a:srgbClr val="666666"/>
+                </a:solidFill>
+                <a:latin typeface="Calibri"/>
+              </a:rPr>
+              <a:t>Documentos del paquete de diseño</a:t>
+            </a:r>
+          </a:p>
+        </p:txBody>
+      </p:sp>
+      <p:sp>
+        <p:nvSpPr>
+          <p:cNvPr id="16" name="Rounded Rectangle 15"/>
+          <p:cNvSpPr/>
+          <p:nvPr/>
+        </p:nvSpPr>
+        <p:spPr>
+          <a:xfrm>
+            <a:off x="8109508" y="1591056"/>
+            <a:ext cx="3624986" cy="2331720"/>
+          </a:xfrm>
+          <a:prstGeom prst="roundRect">
+            <a:avLst>
+              <a:gd name="adj" fmla="val 12000"/>
+            </a:avLst>
+          </a:prstGeom>
+          <a:solidFill>
+            <a:srgbClr val="F2F2F2"/>
+          </a:solidFill>
+          <a:ln>
+            <a:noFill/>
+          </a:ln>
+        </p:spPr>
+        <p:style>
+          <a:lnRef idx="1">
+            <a:schemeClr val="accent1"/>
+          </a:lnRef>
+          <a:fillRef idx="3">
+            <a:schemeClr val="accent1"/>
+          </a:fillRef>
+          <a:effectRef idx="2">
+            <a:schemeClr val="accent1"/>
+          </a:effectRef>
+          <a:fontRef idx="minor">
+            <a:schemeClr val="lt1"/>
+          </a:fontRef>
+        </p:style>
+        <p:txBody>
+          <a:bodyPr rtlCol="0" anchor="ctr"/>
+          <a:lstStyle/>
+          <a:p>
+            <a:pPr algn="ctr"/>
+          </a:p>
+        </p:txBody>
+      </p:sp>
+      <p:sp>
+        <p:nvSpPr>
+          <p:cNvPr id="17" name="Rectangle 16"/>
+          <p:cNvSpPr/>
+          <p:nvPr/>
+        </p:nvSpPr>
+        <p:spPr>
+          <a:xfrm>
+            <a:off x="8109508" y="1591056"/>
+            <a:ext cx="3624986" cy="64008"/>
+          </a:xfrm>
+          <a:prstGeom prst="rect">
+            <a:avLst/>
+          </a:prstGeom>
+          <a:solidFill>
+            <a:srgbClr val="095292"/>
+          </a:solidFill>
+          <a:ln>
+            <a:noFill/>
+          </a:ln>
+        </p:spPr>
+        <p:style>
+          <a:lnRef idx="1">
+            <a:schemeClr val="accent1"/>
+          </a:lnRef>
+          <a:fillRef idx="3">
+            <a:schemeClr val="accent1"/>
+          </a:fillRef>
+          <a:effectRef idx="2">
+            <a:schemeClr val="accent1"/>
+          </a:effectRef>
+          <a:fontRef idx="minor">
+            <a:schemeClr val="lt1"/>
+          </a:fontRef>
+        </p:style>
+        <p:txBody>
+          <a:bodyPr rtlCol="0" anchor="ctr"/>
+          <a:lstStyle/>
+          <a:p>
+            <a:pPr algn="ctr"/>
+          </a:p>
+        </p:txBody>
+      </p:sp>
+      <p:sp>
+        <p:nvSpPr>
+          <p:cNvPr id="18" name="Rectangle 17"/>
+          <p:cNvSpPr/>
+          <p:nvPr/>
+        </p:nvSpPr>
+        <p:spPr>
+          <a:xfrm>
+            <a:off x="8109508" y="1655064"/>
+            <a:ext cx="3624986" cy="27432"/>
+          </a:xfrm>
+          <a:prstGeom prst="rect">
+            <a:avLst/>
+          </a:prstGeom>
+          <a:solidFill>
+            <a:srgbClr val="FFD000"/>
+          </a:solidFill>
+          <a:ln>
+            <a:noFill/>
+          </a:ln>
+        </p:spPr>
+        <p:style>
+          <a:lnRef idx="1">
+            <a:schemeClr val="accent1"/>
+          </a:lnRef>
+          <a:fillRef idx="3">
+            <a:schemeClr val="accent1"/>
+          </a:fillRef>
+          <a:effectRef idx="2">
+            <a:schemeClr val="accent1"/>
+          </a:effectRef>
+          <a:fontRef idx="minor">
+            <a:schemeClr val="lt1"/>
+          </a:fontRef>
+        </p:style>
+        <p:txBody>
+          <a:bodyPr rtlCol="0" anchor="ctr"/>
+          <a:lstStyle/>
+          <a:p>
+            <a:pPr algn="ctr"/>
+          </a:p>
+        </p:txBody>
+      </p:sp>
+      <p:pic>
+        <p:nvPicPr>
+          <p:cNvPr id="19" name="Picture 18" descr="examlab.png"/>
+          <p:cNvPicPr>
+            <a:picLocks noChangeAspect="1"/>
+          </p:cNvPicPr>
+          <p:nvPr/>
+        </p:nvPicPr>
+        <p:blipFill>
+          <a:blip r:embed="rId4"/>
+          <a:stretch>
+            <a:fillRect/>
+          </a:stretch>
+        </p:blipFill>
+        <p:spPr>
+          <a:xfrm>
+            <a:off x="9295638" y="1847087"/>
+            <a:ext cx="1252728" cy="1252728"/>
+          </a:xfrm>
+          <a:prstGeom prst="rect">
+            <a:avLst/>
+          </a:prstGeom>
+        </p:spPr>
+      </p:pic>
+      <p:sp>
+        <p:nvSpPr>
+          <p:cNvPr id="20" name="TextBox 19"/>
+          <p:cNvSpPr txBox="1"/>
+          <p:nvPr/>
+        </p:nvSpPr>
+        <p:spPr>
+          <a:xfrm>
+            <a:off x="8182660" y="3191256"/>
+            <a:ext cx="3478682" cy="621792"/>
+          </a:xfrm>
+          <a:prstGeom prst="rect">
+            <a:avLst/>
+          </a:prstGeom>
+          <a:noFill/>
+        </p:spPr>
+        <p:txBody>
+          <a:bodyPr wrap="square" anchor="t"/>
+          <a:lstStyle/>
+          <a:p>
+            <a:pPr algn="ctr"/>
+            <a:r>
+              <a:rPr sz="1300" b="1" i="0">
+                <a:solidFill>
+                  <a:srgbClr val="095292"/>
+                </a:solidFill>
+                <a:latin typeface="Calibri"/>
+              </a:rPr>
+              <a:t>la plataforma del curso</a:t>
+            </a:r>
+          </a:p>
+          <a:p>
+            <a:pPr algn="ctr">
+              <a:spcBef>
+                <a:spcPts val="200"/>
+              </a:spcBef>
             </a:pPr>
             <a:r>
-              <a:rPr sz="2000" b="0" i="0">
-                <a:solidFill>
-                  <a:srgbClr val="333333"/>
-                </a:solidFill>
-                <a:latin typeface="Calibri"/>
-              </a:rPr>
-              <a:t>–   Lo que hoy quede ambiguo lo paga el compañero que solo cursa Programacion II, que recibira estos planos sin poder preguntarle nada a la clinica Huellitas.</a:t>
-            </a:r>
-          </a:p>
-        </p:txBody>
-      </p:sp>
-      <p:sp>
-        <p:nvSpPr>
-          <p:cNvPr id="6" name="TextBox 5"/>
+              <a:rPr sz="1000" b="0" i="0">
+                <a:solidFill>
+                  <a:srgbClr val="666666"/>
+                </a:solidFill>
+                <a:latin typeface="Calibri"/>
+              </a:rPr>
+              <a:t>Entrega del taller · en la fecha que indique el docente</a:t>
+            </a:r>
+          </a:p>
+        </p:txBody>
+      </p:sp>
+      <p:sp>
+        <p:nvSpPr>
+          <p:cNvPr id="21" name="TextBox 20"/>
           <p:cNvSpPr txBox="1"/>
           <p:nvPr/>
         </p:nvSpPr>
@@ -6367,7 +6598,7 @@
                 </a:solidFill>
                 <a:latin typeface="Calibri"/>
               </a:rPr>
-              <a:t>Taller PI — punto de partida</a:t>
+              <a:t>Taller PI — por que importa</a:t>
             </a:r>
           </a:p>
         </p:txBody>
@@ -6406,7 +6637,25 @@
                 </a:solidFill>
                 <a:latin typeface="Calibri"/>
               </a:rPr>
-              <a:t>–   Cada estudiante llega con tres artefactos de VetCare escritos en semanas distintas: el catalogo de RF y RNF, el diagrama con las especificaciones de casos de uso y el diagrama de clases con sus multiplicidades.</a:t>
+              <a:t>–   </a:t>
+            </a:r>
+            <a:r>
+              <a:rPr sz="2000" b="1" i="0">
+                <a:solidFill>
+                  <a:srgbClr val="333333"/>
+                </a:solidFill>
+                <a:latin typeface="Calibri"/>
+              </a:rPr>
+              <a:t>Por que importa al PI:</a:t>
+            </a:r>
+            <a:r>
+              <a:rPr sz="2000" b="0" i="0">
+                <a:solidFill>
+                  <a:srgbClr val="333333"/>
+                </a:solidFill>
+                <a:latin typeface="Calibri"/>
+              </a:rPr>
+              <a:t> el paquete de VetCare ya tiene requisitos, casos de uso y clases, pero nadie ha verificado que los tres describan el mismo sistema; sin esa verificacion los planos se contradicen y quien construya va a escoger al azar cual documento obedecer.</a:t>
             </a:r>
           </a:p>
           <a:p>
@@ -6422,7 +6671,7 @@
                 </a:solidFill>
                 <a:latin typeface="Calibri"/>
               </a:rPr>
-              <a:t>–   Nadie ha vuelto a abrir el catalogo de requisitos desde que se dibujaron las clases, y los nombres empezaron a moverse: donde el requisito dice Propietario, la clase dice Dueño y el mockup dice Cliente.</a:t>
+              <a:t>–   Esta sesion produce evidencia propia: matriz, glosario, acta de revision y backlog, y por eso se califica igual que cualquier otra entrega.</a:t>
             </a:r>
           </a:p>
           <a:p>
@@ -6438,7 +6687,7 @@
                 </a:solidFill>
                 <a:latin typeface="Calibri"/>
               </a:rPr>
-              <a:t>–   Hay al menos un requisito que suena bonito en el papel, el RF-07 de recordatorio de cita, y no aparece en ningun caso de uso ni en ninguna clase del modelo.</a:t>
+              <a:t>–   Lo que hoy quede ambiguo lo paga el compañero que solo cursa Programacion II, que recibira estos planos sin poder preguntarle nada a la clinica Huellitas.</a:t>
             </a:r>
           </a:p>
         </p:txBody>
@@ -6619,111 +6868,21 @@
                 </a:solidFill>
                 <a:latin typeface="Calibri"/>
               </a:rPr>
-              <a:t>Taller PI — pasos guiados</a:t>
-            </a:r>
-          </a:p>
-        </p:txBody>
-      </p:sp>
-      <p:sp>
-        <p:nvSpPr>
-          <p:cNvPr id="5" name="Rounded Rectangle 4"/>
-          <p:cNvSpPr/>
-          <p:nvPr/>
-        </p:nvSpPr>
-        <p:spPr>
-          <a:xfrm>
-            <a:off x="457200" y="1234440"/>
-            <a:ext cx="11277295" cy="950976"/>
-          </a:xfrm>
-          <a:prstGeom prst="roundRect">
-            <a:avLst>
-              <a:gd name="adj" fmla="val 12000"/>
-            </a:avLst>
-          </a:prstGeom>
-          <a:solidFill>
-            <a:srgbClr val="F2F2F2"/>
-          </a:solidFill>
-          <a:ln>
-            <a:noFill/>
-          </a:ln>
-        </p:spPr>
-        <p:style>
-          <a:lnRef idx="1">
-            <a:schemeClr val="accent1"/>
-          </a:lnRef>
-          <a:fillRef idx="3">
-            <a:schemeClr val="accent1"/>
-          </a:fillRef>
-          <a:effectRef idx="2">
-            <a:schemeClr val="accent1"/>
-          </a:effectRef>
-          <a:fontRef idx="minor">
-            <a:schemeClr val="lt1"/>
-          </a:fontRef>
-        </p:style>
-        <p:txBody>
-          <a:bodyPr rtlCol="0" anchor="ctr"/>
-          <a:lstStyle/>
-          <a:p>
-            <a:pPr algn="ctr"/>
-          </a:p>
-        </p:txBody>
-      </p:sp>
-      <p:sp>
-        <p:nvSpPr>
-          <p:cNvPr id="6" name="Rounded Rectangle 5"/>
-          <p:cNvSpPr/>
-          <p:nvPr/>
-        </p:nvSpPr>
-        <p:spPr>
-          <a:xfrm>
-            <a:off x="594360" y="1490472"/>
-            <a:ext cx="438912" cy="438912"/>
-          </a:xfrm>
-          <a:prstGeom prst="roundRect">
-            <a:avLst>
-              <a:gd name="adj" fmla="val 12000"/>
-            </a:avLst>
-          </a:prstGeom>
-          <a:solidFill>
-            <a:srgbClr val="095292"/>
-          </a:solidFill>
-          <a:ln>
-            <a:noFill/>
-          </a:ln>
-        </p:spPr>
-        <p:style>
-          <a:lnRef idx="1">
-            <a:schemeClr val="accent1"/>
-          </a:lnRef>
-          <a:fillRef idx="3">
-            <a:schemeClr val="accent1"/>
-          </a:fillRef>
-          <a:effectRef idx="2">
-            <a:schemeClr val="accent1"/>
-          </a:effectRef>
-          <a:fontRef idx="minor">
-            <a:schemeClr val="lt1"/>
-          </a:fontRef>
-        </p:style>
-        <p:txBody>
-          <a:bodyPr rtlCol="0" anchor="ctr"/>
-          <a:lstStyle/>
-          <a:p>
-            <a:pPr algn="ctr"/>
-          </a:p>
-        </p:txBody>
-      </p:sp>
-      <p:sp>
-        <p:nvSpPr>
-          <p:cNvPr id="7" name="TextBox 6"/>
+              <a:t>Taller PI — punto de partida</a:t>
+            </a:r>
+          </a:p>
+        </p:txBody>
+      </p:sp>
+      <p:sp>
+        <p:nvSpPr>
+          <p:cNvPr id="5" name="TextBox 4"/>
           <p:cNvSpPr txBox="1"/>
           <p:nvPr/>
         </p:nvSpPr>
         <p:spPr>
           <a:xfrm>
-            <a:off x="594360" y="1490472"/>
-            <a:ext cx="438912" cy="438912"/>
+            <a:off x="457200" y="1170432"/>
+            <a:ext cx="11277295" cy="5230368"/>
           </a:xfrm>
           <a:prstGeom prst="rect">
             <a:avLst/>
@@ -6731,677 +6890,63 @@
           <a:noFill/>
         </p:spPr>
         <p:txBody>
-          <a:bodyPr wrap="square" anchor="ctr"/>
-          <a:lstStyle/>
-          <a:p>
-            <a:pPr algn="ctr"/>
-            <a:r>
-              <a:rPr sz="1600" b="1" i="0">
-                <a:solidFill>
-                  <a:srgbClr val="FFFFFF"/>
-                </a:solidFill>
-                <a:latin typeface="Calibri"/>
-              </a:rPr>
-              <a:t>1</a:t>
-            </a:r>
-          </a:p>
-        </p:txBody>
-      </p:sp>
-      <p:sp>
-        <p:nvSpPr>
-          <p:cNvPr id="8" name="TextBox 7"/>
-          <p:cNvSpPr txBox="1"/>
-          <p:nvPr/>
-        </p:nvSpPr>
-        <p:spPr>
-          <a:xfrm>
-            <a:off x="1188720" y="1325880"/>
-            <a:ext cx="10271455" cy="786384"/>
-          </a:xfrm>
-          <a:prstGeom prst="rect">
-            <a:avLst/>
-          </a:prstGeom>
-          <a:noFill/>
-        </p:spPr>
-        <p:txBody>
-          <a:bodyPr wrap="square" anchor="ctr"/>
-          <a:lstStyle/>
-          <a:p>
-            <a:r>
-              <a:rPr sz="1500" b="1" i="0">
-                <a:solidFill>
-                  <a:srgbClr val="095292"/>
-                </a:solidFill>
-                <a:latin typeface="Calibri"/>
-              </a:rPr>
-              <a:t>Construir en Google Docs la matriz de trazabilidad de VetCare con las columnas RF, Caso de uso, Clase o clases implicadas y Mockup, incluyendo todos los requisitos del catalogo, y marcar en rojo cada fila incompleta.</a:t>
-            </a:r>
-          </a:p>
-        </p:txBody>
-      </p:sp>
-      <p:sp>
-        <p:nvSpPr>
-          <p:cNvPr id="9" name="Rounded Rectangle 8"/>
-          <p:cNvSpPr/>
-          <p:nvPr/>
-        </p:nvSpPr>
-        <p:spPr>
-          <a:xfrm>
-            <a:off x="457200" y="2276856"/>
-            <a:ext cx="11277295" cy="950976"/>
-          </a:xfrm>
-          <a:prstGeom prst="roundRect">
-            <a:avLst>
-              <a:gd name="adj" fmla="val 12000"/>
-            </a:avLst>
-          </a:prstGeom>
-          <a:solidFill>
-            <a:srgbClr val="E8F4FA"/>
-          </a:solidFill>
-          <a:ln>
-            <a:noFill/>
-          </a:ln>
-        </p:spPr>
-        <p:style>
-          <a:lnRef idx="1">
-            <a:schemeClr val="accent1"/>
-          </a:lnRef>
-          <a:fillRef idx="3">
-            <a:schemeClr val="accent1"/>
-          </a:fillRef>
-          <a:effectRef idx="2">
-            <a:schemeClr val="accent1"/>
-          </a:effectRef>
-          <a:fontRef idx="minor">
-            <a:schemeClr val="lt1"/>
-          </a:fontRef>
-        </p:style>
-        <p:txBody>
-          <a:bodyPr rtlCol="0" anchor="ctr"/>
-          <a:lstStyle/>
-          <a:p>
-            <a:pPr algn="ctr"/>
-          </a:p>
-        </p:txBody>
-      </p:sp>
-      <p:sp>
-        <p:nvSpPr>
-          <p:cNvPr id="10" name="Rounded Rectangle 9"/>
-          <p:cNvSpPr/>
-          <p:nvPr/>
-        </p:nvSpPr>
-        <p:spPr>
-          <a:xfrm>
-            <a:off x="594360" y="2532888"/>
-            <a:ext cx="438912" cy="438912"/>
-          </a:xfrm>
-          <a:prstGeom prst="roundRect">
-            <a:avLst>
-              <a:gd name="adj" fmla="val 12000"/>
-            </a:avLst>
-          </a:prstGeom>
-          <a:solidFill>
-            <a:srgbClr val="095292"/>
-          </a:solidFill>
-          <a:ln>
-            <a:noFill/>
-          </a:ln>
-        </p:spPr>
-        <p:style>
-          <a:lnRef idx="1">
-            <a:schemeClr val="accent1"/>
-          </a:lnRef>
-          <a:fillRef idx="3">
-            <a:schemeClr val="accent1"/>
-          </a:fillRef>
-          <a:effectRef idx="2">
-            <a:schemeClr val="accent1"/>
-          </a:effectRef>
-          <a:fontRef idx="minor">
-            <a:schemeClr val="lt1"/>
-          </a:fontRef>
-        </p:style>
-        <p:txBody>
-          <a:bodyPr rtlCol="0" anchor="ctr"/>
-          <a:lstStyle/>
-          <a:p>
-            <a:pPr algn="ctr"/>
-          </a:p>
-        </p:txBody>
-      </p:sp>
-      <p:sp>
-        <p:nvSpPr>
-          <p:cNvPr id="11" name="TextBox 10"/>
-          <p:cNvSpPr txBox="1"/>
-          <p:nvPr/>
-        </p:nvSpPr>
-        <p:spPr>
-          <a:xfrm>
-            <a:off x="594360" y="2532888"/>
-            <a:ext cx="438912" cy="438912"/>
-          </a:xfrm>
-          <a:prstGeom prst="rect">
-            <a:avLst/>
-          </a:prstGeom>
-          <a:noFill/>
-        </p:spPr>
-        <p:txBody>
-          <a:bodyPr wrap="square" anchor="ctr"/>
-          <a:lstStyle/>
-          <a:p>
-            <a:pPr algn="ctr"/>
-            <a:r>
-              <a:rPr sz="1600" b="1" i="0">
-                <a:solidFill>
-                  <a:srgbClr val="FFFFFF"/>
-                </a:solidFill>
-                <a:latin typeface="Calibri"/>
-              </a:rPr>
-              <a:t>2</a:t>
-            </a:r>
-          </a:p>
-        </p:txBody>
-      </p:sp>
-      <p:sp>
-        <p:nvSpPr>
-          <p:cNvPr id="12" name="TextBox 11"/>
-          <p:cNvSpPr txBox="1"/>
-          <p:nvPr/>
-        </p:nvSpPr>
-        <p:spPr>
-          <a:xfrm>
-            <a:off x="1188720" y="2368296"/>
-            <a:ext cx="10271455" cy="786384"/>
-          </a:xfrm>
-          <a:prstGeom prst="rect">
-            <a:avLst/>
-          </a:prstGeom>
-          <a:noFill/>
-        </p:spPr>
-        <p:txBody>
-          <a:bodyPr wrap="square" anchor="ctr"/>
-          <a:lstStyle/>
-          <a:p>
-            <a:r>
-              <a:rPr sz="1400" b="1" i="0">
-                <a:solidFill>
-                  <a:srgbClr val="095292"/>
-                </a:solidFill>
-                <a:latin typeface="Calibri"/>
-              </a:rPr>
-              <a:t>Levantar el glosario de nombres canonicos con minimo ocho conceptos del dominio (Propietario, Mascota, Consulta, Cita, Veterinario, Vacuna, Expediente, Bitacora), cada uno con definicion de una linea y sinonimos prohibidos, y renombrar en los artefactos todo lo que no coincida.</a:t>
-            </a:r>
-          </a:p>
-        </p:txBody>
-      </p:sp>
-      <p:sp>
-        <p:nvSpPr>
-          <p:cNvPr id="13" name="Rounded Rectangle 12"/>
-          <p:cNvSpPr/>
-          <p:nvPr/>
-        </p:nvSpPr>
-        <p:spPr>
-          <a:xfrm>
-            <a:off x="457200" y="3319272"/>
-            <a:ext cx="11277295" cy="950976"/>
-          </a:xfrm>
-          <a:prstGeom prst="roundRect">
-            <a:avLst>
-              <a:gd name="adj" fmla="val 12000"/>
-            </a:avLst>
-          </a:prstGeom>
-          <a:solidFill>
-            <a:srgbClr val="F2F2F2"/>
-          </a:solidFill>
-          <a:ln>
-            <a:noFill/>
-          </a:ln>
-        </p:spPr>
-        <p:style>
-          <a:lnRef idx="1">
-            <a:schemeClr val="accent1"/>
-          </a:lnRef>
-          <a:fillRef idx="3">
-            <a:schemeClr val="accent1"/>
-          </a:fillRef>
-          <a:effectRef idx="2">
-            <a:schemeClr val="accent1"/>
-          </a:effectRef>
-          <a:fontRef idx="minor">
-            <a:schemeClr val="lt1"/>
-          </a:fontRef>
-        </p:style>
-        <p:txBody>
-          <a:bodyPr rtlCol="0" anchor="ctr"/>
-          <a:lstStyle/>
-          <a:p>
-            <a:pPr algn="ctr"/>
-          </a:p>
-        </p:txBody>
-      </p:sp>
-      <p:sp>
-        <p:nvSpPr>
-          <p:cNvPr id="14" name="Rounded Rectangle 13"/>
-          <p:cNvSpPr/>
-          <p:nvPr/>
-        </p:nvSpPr>
-        <p:spPr>
-          <a:xfrm>
-            <a:off x="594360" y="3575304"/>
-            <a:ext cx="438912" cy="438912"/>
-          </a:xfrm>
-          <a:prstGeom prst="roundRect">
-            <a:avLst>
-              <a:gd name="adj" fmla="val 12000"/>
-            </a:avLst>
-          </a:prstGeom>
-          <a:solidFill>
-            <a:srgbClr val="095292"/>
-          </a:solidFill>
-          <a:ln>
-            <a:noFill/>
-          </a:ln>
-        </p:spPr>
-        <p:style>
-          <a:lnRef idx="1">
-            <a:schemeClr val="accent1"/>
-          </a:lnRef>
-          <a:fillRef idx="3">
-            <a:schemeClr val="accent1"/>
-          </a:fillRef>
-          <a:effectRef idx="2">
-            <a:schemeClr val="accent1"/>
-          </a:effectRef>
-          <a:fontRef idx="minor">
-            <a:schemeClr val="lt1"/>
-          </a:fontRef>
-        </p:style>
-        <p:txBody>
-          <a:bodyPr rtlCol="0" anchor="ctr"/>
-          <a:lstStyle/>
-          <a:p>
-            <a:pPr algn="ctr"/>
-          </a:p>
-        </p:txBody>
-      </p:sp>
-      <p:sp>
-        <p:nvSpPr>
-          <p:cNvPr id="15" name="TextBox 14"/>
-          <p:cNvSpPr txBox="1"/>
-          <p:nvPr/>
-        </p:nvSpPr>
-        <p:spPr>
-          <a:xfrm>
-            <a:off x="594360" y="3575304"/>
-            <a:ext cx="438912" cy="438912"/>
-          </a:xfrm>
-          <a:prstGeom prst="rect">
-            <a:avLst/>
-          </a:prstGeom>
-          <a:noFill/>
-        </p:spPr>
-        <p:txBody>
-          <a:bodyPr wrap="square" anchor="ctr"/>
-          <a:lstStyle/>
-          <a:p>
-            <a:pPr algn="ctr"/>
-            <a:r>
-              <a:rPr sz="1600" b="1" i="0">
-                <a:solidFill>
-                  <a:srgbClr val="FFFFFF"/>
-                </a:solidFill>
-                <a:latin typeface="Calibri"/>
-              </a:rPr>
-              <a:t>3</a:t>
-            </a:r>
-          </a:p>
-        </p:txBody>
-      </p:sp>
-      <p:sp>
-        <p:nvSpPr>
-          <p:cNvPr id="16" name="TextBox 15"/>
-          <p:cNvSpPr txBox="1"/>
-          <p:nvPr/>
-        </p:nvSpPr>
-        <p:spPr>
-          <a:xfrm>
-            <a:off x="1188720" y="3410712"/>
-            <a:ext cx="10271455" cy="786384"/>
-          </a:xfrm>
-          <a:prstGeom prst="rect">
-            <a:avLst/>
-          </a:prstGeom>
-          <a:noFill/>
-        </p:spPr>
-        <p:txBody>
-          <a:bodyPr wrap="square" anchor="ctr"/>
-          <a:lstStyle/>
-          <a:p>
-            <a:r>
-              <a:rPr sz="1400" b="1" i="0">
-                <a:solidFill>
-                  <a:srgbClr val="095292"/>
-                </a:solidFill>
-                <a:latin typeface="Calibri"/>
-              </a:rPr>
-              <a:t>Intercambiar el paquete completo con otro estudiante (o con otro equipo, si el docente autorizo trabajo en equipo) y aplicar la rubrica de auditoria de seis puntos durante veinte minutos cronometrados, registrando cada hallazgo con ubicacion exacta, descripcion y severidad bloqueante, mayor o menor; queda prohibido proponer soluciones durante la revision.</a:t>
-            </a:r>
-          </a:p>
-        </p:txBody>
-      </p:sp>
-      <p:sp>
-        <p:nvSpPr>
-          <p:cNvPr id="17" name="Rounded Rectangle 16"/>
-          <p:cNvSpPr/>
-          <p:nvPr/>
-        </p:nvSpPr>
-        <p:spPr>
-          <a:xfrm>
-            <a:off x="457200" y="4361688"/>
-            <a:ext cx="11277295" cy="950976"/>
-          </a:xfrm>
-          <a:prstGeom prst="roundRect">
-            <a:avLst>
-              <a:gd name="adj" fmla="val 12000"/>
-            </a:avLst>
-          </a:prstGeom>
-          <a:solidFill>
-            <a:srgbClr val="E8F4FA"/>
-          </a:solidFill>
-          <a:ln>
-            <a:noFill/>
-          </a:ln>
-        </p:spPr>
-        <p:style>
-          <a:lnRef idx="1">
-            <a:schemeClr val="accent1"/>
-          </a:lnRef>
-          <a:fillRef idx="3">
-            <a:schemeClr val="accent1"/>
-          </a:fillRef>
-          <a:effectRef idx="2">
-            <a:schemeClr val="accent1"/>
-          </a:effectRef>
-          <a:fontRef idx="minor">
-            <a:schemeClr val="lt1"/>
-          </a:fontRef>
-        </p:style>
-        <p:txBody>
-          <a:bodyPr rtlCol="0" anchor="ctr"/>
-          <a:lstStyle/>
-          <a:p>
-            <a:pPr algn="ctr"/>
-          </a:p>
-        </p:txBody>
-      </p:sp>
-      <p:sp>
-        <p:nvSpPr>
-          <p:cNvPr id="18" name="Rounded Rectangle 17"/>
-          <p:cNvSpPr/>
-          <p:nvPr/>
-        </p:nvSpPr>
-        <p:spPr>
-          <a:xfrm>
-            <a:off x="594360" y="4617720"/>
-            <a:ext cx="438912" cy="438912"/>
-          </a:xfrm>
-          <a:prstGeom prst="roundRect">
-            <a:avLst>
-              <a:gd name="adj" fmla="val 12000"/>
-            </a:avLst>
-          </a:prstGeom>
-          <a:solidFill>
-            <a:srgbClr val="095292"/>
-          </a:solidFill>
-          <a:ln>
-            <a:noFill/>
-          </a:ln>
-        </p:spPr>
-        <p:style>
-          <a:lnRef idx="1">
-            <a:schemeClr val="accent1"/>
-          </a:lnRef>
-          <a:fillRef idx="3">
-            <a:schemeClr val="accent1"/>
-          </a:fillRef>
-          <a:effectRef idx="2">
-            <a:schemeClr val="accent1"/>
-          </a:effectRef>
-          <a:fontRef idx="minor">
-            <a:schemeClr val="lt1"/>
-          </a:fontRef>
-        </p:style>
-        <p:txBody>
-          <a:bodyPr rtlCol="0" anchor="ctr"/>
-          <a:lstStyle/>
-          <a:p>
-            <a:pPr algn="ctr"/>
-          </a:p>
-        </p:txBody>
-      </p:sp>
-      <p:sp>
-        <p:nvSpPr>
-          <p:cNvPr id="19" name="TextBox 18"/>
-          <p:cNvSpPr txBox="1"/>
-          <p:nvPr/>
-        </p:nvSpPr>
-        <p:spPr>
-          <a:xfrm>
-            <a:off x="594360" y="4617720"/>
-            <a:ext cx="438912" cy="438912"/>
-          </a:xfrm>
-          <a:prstGeom prst="rect">
-            <a:avLst/>
-          </a:prstGeom>
-          <a:noFill/>
-        </p:spPr>
-        <p:txBody>
-          <a:bodyPr wrap="square" anchor="ctr"/>
-          <a:lstStyle/>
-          <a:p>
-            <a:pPr algn="ctr"/>
-            <a:r>
-              <a:rPr sz="1600" b="1" i="0">
-                <a:solidFill>
-                  <a:srgbClr val="FFFFFF"/>
-                </a:solidFill>
-                <a:latin typeface="Calibri"/>
-              </a:rPr>
-              <a:t>4</a:t>
-            </a:r>
-          </a:p>
-        </p:txBody>
-      </p:sp>
-      <p:sp>
-        <p:nvSpPr>
-          <p:cNvPr id="20" name="TextBox 19"/>
-          <p:cNvSpPr txBox="1"/>
-          <p:nvPr/>
-        </p:nvSpPr>
-        <p:spPr>
-          <a:xfrm>
-            <a:off x="1188720" y="4453128"/>
-            <a:ext cx="10271455" cy="786384"/>
-          </a:xfrm>
-          <a:prstGeom prst="rect">
-            <a:avLst/>
-          </a:prstGeom>
-          <a:noFill/>
-        </p:spPr>
-        <p:txBody>
-          <a:bodyPr wrap="square" anchor="ctr"/>
-          <a:lstStyle/>
-          <a:p>
-            <a:r>
-              <a:rPr sz="1500" b="1" i="0">
-                <a:solidFill>
-                  <a:srgbClr val="095292"/>
-                </a:solidFill>
-                <a:latin typeface="Calibri"/>
-              </a:rPr>
-              <a:t>Recibir los hallazgos propios y clasificarlos en aceptado, rechazado con justificacion escrita o aplazado por acuerdo, sin borrar ninguno del acta, de modo que quede evidencia de la decision tomada.</a:t>
-            </a:r>
-          </a:p>
-        </p:txBody>
-      </p:sp>
-      <p:sp>
-        <p:nvSpPr>
-          <p:cNvPr id="21" name="Rounded Rectangle 20"/>
-          <p:cNvSpPr/>
-          <p:nvPr/>
-        </p:nvSpPr>
-        <p:spPr>
-          <a:xfrm>
-            <a:off x="457200" y="5404104"/>
-            <a:ext cx="11277295" cy="950976"/>
-          </a:xfrm>
-          <a:prstGeom prst="roundRect">
-            <a:avLst>
-              <a:gd name="adj" fmla="val 12000"/>
-            </a:avLst>
-          </a:prstGeom>
-          <a:solidFill>
-            <a:srgbClr val="F2F2F2"/>
-          </a:solidFill>
-          <a:ln>
-            <a:noFill/>
-          </a:ln>
-        </p:spPr>
-        <p:style>
-          <a:lnRef idx="1">
-            <a:schemeClr val="accent1"/>
-          </a:lnRef>
-          <a:fillRef idx="3">
-            <a:schemeClr val="accent1"/>
-          </a:fillRef>
-          <a:effectRef idx="2">
-            <a:schemeClr val="accent1"/>
-          </a:effectRef>
-          <a:fontRef idx="minor">
-            <a:schemeClr val="lt1"/>
-          </a:fontRef>
-        </p:style>
-        <p:txBody>
-          <a:bodyPr rtlCol="0" anchor="ctr"/>
-          <a:lstStyle/>
-          <a:p>
-            <a:pPr algn="ctr"/>
-          </a:p>
-        </p:txBody>
-      </p:sp>
-      <p:sp>
-        <p:nvSpPr>
-          <p:cNvPr id="22" name="Rounded Rectangle 21"/>
-          <p:cNvSpPr/>
-          <p:nvPr/>
-        </p:nvSpPr>
-        <p:spPr>
-          <a:xfrm>
-            <a:off x="594360" y="5660136"/>
-            <a:ext cx="438912" cy="438912"/>
-          </a:xfrm>
-          <a:prstGeom prst="roundRect">
-            <a:avLst>
-              <a:gd name="adj" fmla="val 12000"/>
-            </a:avLst>
-          </a:prstGeom>
-          <a:solidFill>
-            <a:srgbClr val="095292"/>
-          </a:solidFill>
-          <a:ln>
-            <a:noFill/>
-          </a:ln>
-        </p:spPr>
-        <p:style>
-          <a:lnRef idx="1">
-            <a:schemeClr val="accent1"/>
-          </a:lnRef>
-          <a:fillRef idx="3">
-            <a:schemeClr val="accent1"/>
-          </a:fillRef>
-          <a:effectRef idx="2">
-            <a:schemeClr val="accent1"/>
-          </a:effectRef>
-          <a:fontRef idx="minor">
-            <a:schemeClr val="lt1"/>
-          </a:fontRef>
-        </p:style>
-        <p:txBody>
-          <a:bodyPr rtlCol="0" anchor="ctr"/>
-          <a:lstStyle/>
-          <a:p>
-            <a:pPr algn="ctr"/>
-          </a:p>
-        </p:txBody>
-      </p:sp>
-      <p:sp>
-        <p:nvSpPr>
-          <p:cNvPr id="23" name="TextBox 22"/>
-          <p:cNvSpPr txBox="1"/>
-          <p:nvPr/>
-        </p:nvSpPr>
-        <p:spPr>
-          <a:xfrm>
-            <a:off x="594360" y="5660136"/>
-            <a:ext cx="438912" cy="438912"/>
-          </a:xfrm>
-          <a:prstGeom prst="rect">
-            <a:avLst/>
-          </a:prstGeom>
-          <a:noFill/>
-        </p:spPr>
-        <p:txBody>
-          <a:bodyPr wrap="square" anchor="ctr"/>
-          <a:lstStyle/>
-          <a:p>
-            <a:pPr algn="ctr"/>
-            <a:r>
-              <a:rPr sz="1600" b="1" i="0">
-                <a:solidFill>
-                  <a:srgbClr val="FFFFFF"/>
-                </a:solidFill>
-                <a:latin typeface="Calibri"/>
-              </a:rPr>
-              <a:t>5</a:t>
-            </a:r>
-          </a:p>
-        </p:txBody>
-      </p:sp>
-      <p:sp>
-        <p:nvSpPr>
-          <p:cNvPr id="24" name="TextBox 23"/>
-          <p:cNvSpPr txBox="1"/>
-          <p:nvPr/>
-        </p:nvSpPr>
-        <p:spPr>
-          <a:xfrm>
-            <a:off x="1188720" y="5495544"/>
-            <a:ext cx="10271455" cy="786384"/>
-          </a:xfrm>
-          <a:prstGeom prst="rect">
-            <a:avLst/>
-          </a:prstGeom>
-          <a:noFill/>
-        </p:spPr>
-        <p:txBody>
-          <a:bodyPr wrap="square" anchor="ctr"/>
-          <a:lstStyle/>
-          <a:p>
-            <a:r>
-              <a:rPr sz="1400" b="1" i="0">
-                <a:solidFill>
-                  <a:srgbClr val="095292"/>
-                </a:solidFill>
-                <a:latin typeface="Calibri"/>
-              </a:rPr>
-              <a:t>Armar el backlog priorizado de correcciones con responsable y criterio de cierre verificable para cada item, ordenado por severidad, y aplicar en clase al menos las dos correcciones bloqueantes antes de subir el paquete corregido a la plataforma del curso.</a:t>
-            </a:r>
-          </a:p>
-        </p:txBody>
-      </p:sp>
-      <p:sp>
-        <p:nvSpPr>
-          <p:cNvPr id="25" name="TextBox 24"/>
+          <a:bodyPr wrap="square">
+            <a:spAutoFit/>
+          </a:bodyPr>
+          <a:lstStyle/>
+          <a:p>
+            <a:pPr>
+              <a:spcAft>
+                <a:spcPts val="800"/>
+              </a:spcAft>
+            </a:pPr>
+            <a:r>
+              <a:rPr sz="2000" b="0" i="0">
+                <a:solidFill>
+                  <a:srgbClr val="333333"/>
+                </a:solidFill>
+                <a:latin typeface="Calibri"/>
+              </a:rPr>
+              <a:t>–   Cada estudiante llega con tres artefactos de VetCare escritos en semanas distintas: el catalogo de RF y RNF, el diagrama con las especificaciones de casos de uso y el diagrama de clases con sus multiplicidades.</a:t>
+            </a:r>
+          </a:p>
+          <a:p>
+            <a:pPr>
+              <a:spcAft>
+                <a:spcPts val="800"/>
+              </a:spcAft>
+            </a:pPr>
+            <a:r>
+              <a:rPr sz="2000" b="0" i="0">
+                <a:solidFill>
+                  <a:srgbClr val="333333"/>
+                </a:solidFill>
+                <a:latin typeface="Calibri"/>
+              </a:rPr>
+              <a:t>–   Nadie ha vuelto a abrir el catalogo de requisitos desde que se dibujaron las clases, y los nombres empezaron a moverse: donde el requisito dice Propietario, la clase dice Dueño y el mockup dice Cliente.</a:t>
+            </a:r>
+          </a:p>
+          <a:p>
+            <a:pPr>
+              <a:spcAft>
+                <a:spcPts val="800"/>
+              </a:spcAft>
+            </a:pPr>
+            <a:r>
+              <a:rPr sz="2000" b="0" i="0">
+                <a:solidFill>
+                  <a:srgbClr val="333333"/>
+                </a:solidFill>
+                <a:latin typeface="Calibri"/>
+              </a:rPr>
+              <a:t>–   Hay al menos un requisito que suena bonito en el papel, el RF-07 de recordatorio de cita, y no aparece en ningun caso de uso ni en ninguna clase del modelo.</a:t>
+            </a:r>
+          </a:p>
+        </p:txBody>
+      </p:sp>
+      <p:sp>
+        <p:nvSpPr>
+          <p:cNvPr id="6" name="TextBox 5"/>
           <p:cNvSpPr txBox="1"/>
           <p:nvPr/>
         </p:nvSpPr>
@@ -7575,7 +7120,7 @@
                 </a:solidFill>
                 <a:latin typeface="Calibri"/>
               </a:rPr>
-              <a:t>Antes de entregar — autochequeo</a:t>
+              <a:t>Taller PI — pasos guiados</a:t>
             </a:r>
           </a:p>
         </p:txBody>
@@ -7588,8 +7133,8 @@
         </p:nvSpPr>
         <p:spPr>
           <a:xfrm>
-            <a:off x="457200" y="1261872"/>
-            <a:ext cx="11277295" cy="566928"/>
+            <a:off x="457200" y="1234440"/>
+            <a:ext cx="11277295" cy="950976"/>
           </a:xfrm>
           <a:prstGeom prst="roundRect">
             <a:avLst>
@@ -7627,25 +7172,25 @@
       </p:sp>
       <p:sp>
         <p:nvSpPr>
-          <p:cNvPr id="6" name="Rectangle 5"/>
+          <p:cNvPr id="6" name="Rounded Rectangle 5"/>
           <p:cNvSpPr/>
           <p:nvPr/>
         </p:nvSpPr>
         <p:spPr>
           <a:xfrm>
-            <a:off x="640080" y="1408175"/>
-            <a:ext cx="274320" cy="274320"/>
-          </a:xfrm>
-          <a:prstGeom prst="rect">
-            <a:avLst/>
+            <a:off x="594360" y="1490472"/>
+            <a:ext cx="438912" cy="438912"/>
+          </a:xfrm>
+          <a:prstGeom prst="roundRect">
+            <a:avLst>
+              <a:gd name="adj" fmla="val 12000"/>
+            </a:avLst>
           </a:prstGeom>
           <a:solidFill>
-            <a:srgbClr val="FFFFFF"/>
+            <a:srgbClr val="095292"/>
           </a:solidFill>
           <a:ln>
-            <a:solidFill>
-              <a:srgbClr val="333333"/>
-            </a:solidFill>
+            <a:noFill/>
           </a:ln>
         </p:spPr>
         <p:style>
@@ -7672,20 +7217,87 @@
       </p:sp>
       <p:sp>
         <p:nvSpPr>
-          <p:cNvPr id="7" name="Rectangle 6"/>
+          <p:cNvPr id="7" name="TextBox 6"/>
+          <p:cNvSpPr txBox="1"/>
+          <p:nvPr/>
+        </p:nvSpPr>
+        <p:spPr>
+          <a:xfrm>
+            <a:off x="594360" y="1490472"/>
+            <a:ext cx="438912" cy="438912"/>
+          </a:xfrm>
+          <a:prstGeom prst="rect">
+            <a:avLst/>
+          </a:prstGeom>
+          <a:noFill/>
+        </p:spPr>
+        <p:txBody>
+          <a:bodyPr wrap="square" anchor="ctr"/>
+          <a:lstStyle/>
+          <a:p>
+            <a:pPr algn="ctr"/>
+            <a:r>
+              <a:rPr sz="1600" b="1" i="0">
+                <a:solidFill>
+                  <a:srgbClr val="FFFFFF"/>
+                </a:solidFill>
+                <a:latin typeface="Calibri"/>
+              </a:rPr>
+              <a:t>1</a:t>
+            </a:r>
+          </a:p>
+        </p:txBody>
+      </p:sp>
+      <p:sp>
+        <p:nvSpPr>
+          <p:cNvPr id="8" name="TextBox 7"/>
+          <p:cNvSpPr txBox="1"/>
+          <p:nvPr/>
+        </p:nvSpPr>
+        <p:spPr>
+          <a:xfrm>
+            <a:off x="1188720" y="1325880"/>
+            <a:ext cx="10271455" cy="786384"/>
+          </a:xfrm>
+          <a:prstGeom prst="rect">
+            <a:avLst/>
+          </a:prstGeom>
+          <a:noFill/>
+        </p:spPr>
+        <p:txBody>
+          <a:bodyPr wrap="square" anchor="ctr"/>
+          <a:lstStyle/>
+          <a:p>
+            <a:r>
+              <a:rPr sz="1500" b="1" i="0">
+                <a:solidFill>
+                  <a:srgbClr val="095292"/>
+                </a:solidFill>
+                <a:latin typeface="Calibri"/>
+              </a:rPr>
+              <a:t>Construir en Google Docs la matriz de trazabilidad de VetCare con las columnas RF, Caso de uso, Clase o clases implicadas y Mockup, incluyendo todos los requisitos del catalogo, y marcar en rojo cada fila incompleta.</a:t>
+            </a:r>
+          </a:p>
+        </p:txBody>
+      </p:sp>
+      <p:sp>
+        <p:nvSpPr>
+          <p:cNvPr id="9" name="Rounded Rectangle 8"/>
           <p:cNvSpPr/>
           <p:nvPr/>
         </p:nvSpPr>
         <p:spPr>
           <a:xfrm>
-            <a:off x="640080" y="1408175"/>
-            <a:ext cx="73152" cy="274320"/>
-          </a:xfrm>
-          <a:prstGeom prst="rect">
-            <a:avLst/>
+            <a:off x="457200" y="2276856"/>
+            <a:ext cx="11277295" cy="950976"/>
+          </a:xfrm>
+          <a:prstGeom prst="roundRect">
+            <a:avLst>
+              <a:gd name="adj" fmla="val 12000"/>
+            </a:avLst>
           </a:prstGeom>
           <a:solidFill>
-            <a:srgbClr val="269CCB"/>
+            <a:srgbClr val="E8F4FA"/>
           </a:solidFill>
           <a:ln>
             <a:noFill/>
@@ -7715,14 +7327,59 @@
       </p:sp>
       <p:sp>
         <p:nvSpPr>
-          <p:cNvPr id="8" name="TextBox 7"/>
+          <p:cNvPr id="10" name="Rounded Rectangle 9"/>
+          <p:cNvSpPr/>
+          <p:nvPr/>
+        </p:nvSpPr>
+        <p:spPr>
+          <a:xfrm>
+            <a:off x="594360" y="2532888"/>
+            <a:ext cx="438912" cy="438912"/>
+          </a:xfrm>
+          <a:prstGeom prst="roundRect">
+            <a:avLst>
+              <a:gd name="adj" fmla="val 12000"/>
+            </a:avLst>
+          </a:prstGeom>
+          <a:solidFill>
+            <a:srgbClr val="095292"/>
+          </a:solidFill>
+          <a:ln>
+            <a:noFill/>
+          </a:ln>
+        </p:spPr>
+        <p:style>
+          <a:lnRef idx="1">
+            <a:schemeClr val="accent1"/>
+          </a:lnRef>
+          <a:fillRef idx="3">
+            <a:schemeClr val="accent1"/>
+          </a:fillRef>
+          <a:effectRef idx="2">
+            <a:schemeClr val="accent1"/>
+          </a:effectRef>
+          <a:fontRef idx="minor">
+            <a:schemeClr val="lt1"/>
+          </a:fontRef>
+        </p:style>
+        <p:txBody>
+          <a:bodyPr rtlCol="0" anchor="ctr"/>
+          <a:lstStyle/>
+          <a:p>
+            <a:pPr algn="ctr"/>
+          </a:p>
+        </p:txBody>
+      </p:sp>
+      <p:sp>
+        <p:nvSpPr>
+          <p:cNvPr id="11" name="TextBox 10"/>
           <p:cNvSpPr txBox="1"/>
           <p:nvPr/>
         </p:nvSpPr>
         <p:spPr>
           <a:xfrm>
-            <a:off x="1097280" y="1353312"/>
-            <a:ext cx="10362895" cy="402336"/>
+            <a:off x="594360" y="2532888"/>
+            <a:ext cx="438912" cy="438912"/>
           </a:xfrm>
           <a:prstGeom prst="rect">
             <a:avLst/>
@@ -7733,28 +7390,61 @@
           <a:bodyPr wrap="square" anchor="ctr"/>
           <a:lstStyle/>
           <a:p>
-            <a:r>
-              <a:rPr sz="1500" b="0" i="0">
-                <a:solidFill>
-                  <a:srgbClr val="333333"/>
-                </a:solidFill>
-                <a:latin typeface="Calibri"/>
-              </a:rPr>
-              <a:t>Si toma el requisito mas ambicioso de su catalogo y lo persigue hasta el diagrama de clases, en que punto exacto se le pierde el rastro?</a:t>
-            </a:r>
-          </a:p>
-        </p:txBody>
-      </p:sp>
-      <p:sp>
-        <p:nvSpPr>
-          <p:cNvPr id="9" name="Rounded Rectangle 8"/>
+            <a:pPr algn="ctr"/>
+            <a:r>
+              <a:rPr sz="1600" b="1" i="0">
+                <a:solidFill>
+                  <a:srgbClr val="FFFFFF"/>
+                </a:solidFill>
+                <a:latin typeface="Calibri"/>
+              </a:rPr>
+              <a:t>2</a:t>
+            </a:r>
+          </a:p>
+        </p:txBody>
+      </p:sp>
+      <p:sp>
+        <p:nvSpPr>
+          <p:cNvPr id="12" name="TextBox 11"/>
+          <p:cNvSpPr txBox="1"/>
+          <p:nvPr/>
+        </p:nvSpPr>
+        <p:spPr>
+          <a:xfrm>
+            <a:off x="1188720" y="2368296"/>
+            <a:ext cx="10271455" cy="786384"/>
+          </a:xfrm>
+          <a:prstGeom prst="rect">
+            <a:avLst/>
+          </a:prstGeom>
+          <a:noFill/>
+        </p:spPr>
+        <p:txBody>
+          <a:bodyPr wrap="square" anchor="ctr"/>
+          <a:lstStyle/>
+          <a:p>
+            <a:r>
+              <a:rPr sz="1400" b="1" i="0">
+                <a:solidFill>
+                  <a:srgbClr val="095292"/>
+                </a:solidFill>
+                <a:latin typeface="Calibri"/>
+              </a:rPr>
+              <a:t>Levantar el glosario de nombres canonicos con minimo ocho conceptos del dominio (Propietario, Mascota, Consulta, Cita, Veterinario, Vacuna, Expediente, Bitacora), cada uno con definicion de una linea y sinonimos prohibidos, y renombrar en los artefactos todo lo que no coincida.</a:t>
+            </a:r>
+          </a:p>
+        </p:txBody>
+      </p:sp>
+      <p:sp>
+        <p:nvSpPr>
+          <p:cNvPr id="13" name="Rounded Rectangle 12"/>
           <p:cNvSpPr/>
           <p:nvPr/>
         </p:nvSpPr>
         <p:spPr>
           <a:xfrm>
-            <a:off x="457200" y="1938528"/>
-            <a:ext cx="11277295" cy="566928"/>
+            <a:off x="457200" y="3319272"/>
+            <a:ext cx="11277295" cy="950976"/>
           </a:xfrm>
           <a:prstGeom prst="roundRect">
             <a:avLst>
@@ -7792,25 +7482,25 @@
       </p:sp>
       <p:sp>
         <p:nvSpPr>
-          <p:cNvPr id="10" name="Rectangle 9"/>
+          <p:cNvPr id="14" name="Rounded Rectangle 13"/>
           <p:cNvSpPr/>
           <p:nvPr/>
         </p:nvSpPr>
         <p:spPr>
           <a:xfrm>
-            <a:off x="640080" y="2084832"/>
-            <a:ext cx="274320" cy="274320"/>
-          </a:xfrm>
-          <a:prstGeom prst="rect">
-            <a:avLst/>
+            <a:off x="594360" y="3575304"/>
+            <a:ext cx="438912" cy="438912"/>
+          </a:xfrm>
+          <a:prstGeom prst="roundRect">
+            <a:avLst>
+              <a:gd name="adj" fmla="val 12000"/>
+            </a:avLst>
           </a:prstGeom>
           <a:solidFill>
-            <a:srgbClr val="FFFFFF"/>
+            <a:srgbClr val="095292"/>
           </a:solidFill>
           <a:ln>
-            <a:solidFill>
-              <a:srgbClr val="333333"/>
-            </a:solidFill>
+            <a:noFill/>
           </a:ln>
         </p:spPr>
         <p:style>
@@ -7837,20 +7527,87 @@
       </p:sp>
       <p:sp>
         <p:nvSpPr>
-          <p:cNvPr id="11" name="Rectangle 10"/>
+          <p:cNvPr id="15" name="TextBox 14"/>
+          <p:cNvSpPr txBox="1"/>
+          <p:nvPr/>
+        </p:nvSpPr>
+        <p:spPr>
+          <a:xfrm>
+            <a:off x="594360" y="3575304"/>
+            <a:ext cx="438912" cy="438912"/>
+          </a:xfrm>
+          <a:prstGeom prst="rect">
+            <a:avLst/>
+          </a:prstGeom>
+          <a:noFill/>
+        </p:spPr>
+        <p:txBody>
+          <a:bodyPr wrap="square" anchor="ctr"/>
+          <a:lstStyle/>
+          <a:p>
+            <a:pPr algn="ctr"/>
+            <a:r>
+              <a:rPr sz="1600" b="1" i="0">
+                <a:solidFill>
+                  <a:srgbClr val="FFFFFF"/>
+                </a:solidFill>
+                <a:latin typeface="Calibri"/>
+              </a:rPr>
+              <a:t>3</a:t>
+            </a:r>
+          </a:p>
+        </p:txBody>
+      </p:sp>
+      <p:sp>
+        <p:nvSpPr>
+          <p:cNvPr id="16" name="TextBox 15"/>
+          <p:cNvSpPr txBox="1"/>
+          <p:nvPr/>
+        </p:nvSpPr>
+        <p:spPr>
+          <a:xfrm>
+            <a:off x="1188720" y="3410712"/>
+            <a:ext cx="10271455" cy="786384"/>
+          </a:xfrm>
+          <a:prstGeom prst="rect">
+            <a:avLst/>
+          </a:prstGeom>
+          <a:noFill/>
+        </p:spPr>
+        <p:txBody>
+          <a:bodyPr wrap="square" anchor="ctr"/>
+          <a:lstStyle/>
+          <a:p>
+            <a:r>
+              <a:rPr sz="1400" b="1" i="0">
+                <a:solidFill>
+                  <a:srgbClr val="095292"/>
+                </a:solidFill>
+                <a:latin typeface="Calibri"/>
+              </a:rPr>
+              <a:t>Intercambiar el paquete completo con otro estudiante (o con otro equipo, si el docente autorizo trabajo en equipo) y aplicar la rubrica de auditoria de seis puntos durante veinte minutos cronometrados, registrando cada hallazgo con ubicacion exacta, descripcion y severidad bloqueante, mayor o menor; queda prohibido proponer soluciones durante la revision.</a:t>
+            </a:r>
+          </a:p>
+        </p:txBody>
+      </p:sp>
+      <p:sp>
+        <p:nvSpPr>
+          <p:cNvPr id="17" name="Rounded Rectangle 16"/>
           <p:cNvSpPr/>
           <p:nvPr/>
         </p:nvSpPr>
         <p:spPr>
           <a:xfrm>
-            <a:off x="640080" y="2084832"/>
-            <a:ext cx="73152" cy="274320"/>
-          </a:xfrm>
-          <a:prstGeom prst="rect">
-            <a:avLst/>
+            <a:off x="457200" y="4361688"/>
+            <a:ext cx="11277295" cy="950976"/>
+          </a:xfrm>
+          <a:prstGeom prst="roundRect">
+            <a:avLst>
+              <a:gd name="adj" fmla="val 12000"/>
+            </a:avLst>
           </a:prstGeom>
           <a:solidFill>
-            <a:srgbClr val="269CCB"/>
+            <a:srgbClr val="E8F4FA"/>
           </a:solidFill>
           <a:ln>
             <a:noFill/>
@@ -7880,14 +7637,59 @@
       </p:sp>
       <p:sp>
         <p:nvSpPr>
-          <p:cNvPr id="12" name="TextBox 11"/>
+          <p:cNvPr id="18" name="Rounded Rectangle 17"/>
+          <p:cNvSpPr/>
+          <p:nvPr/>
+        </p:nvSpPr>
+        <p:spPr>
+          <a:xfrm>
+            <a:off x="594360" y="4617720"/>
+            <a:ext cx="438912" cy="438912"/>
+          </a:xfrm>
+          <a:prstGeom prst="roundRect">
+            <a:avLst>
+              <a:gd name="adj" fmla="val 12000"/>
+            </a:avLst>
+          </a:prstGeom>
+          <a:solidFill>
+            <a:srgbClr val="095292"/>
+          </a:solidFill>
+          <a:ln>
+            <a:noFill/>
+          </a:ln>
+        </p:spPr>
+        <p:style>
+          <a:lnRef idx="1">
+            <a:schemeClr val="accent1"/>
+          </a:lnRef>
+          <a:fillRef idx="3">
+            <a:schemeClr val="accent1"/>
+          </a:fillRef>
+          <a:effectRef idx="2">
+            <a:schemeClr val="accent1"/>
+          </a:effectRef>
+          <a:fontRef idx="minor">
+            <a:schemeClr val="lt1"/>
+          </a:fontRef>
+        </p:style>
+        <p:txBody>
+          <a:bodyPr rtlCol="0" anchor="ctr"/>
+          <a:lstStyle/>
+          <a:p>
+            <a:pPr algn="ctr"/>
+          </a:p>
+        </p:txBody>
+      </p:sp>
+      <p:sp>
+        <p:nvSpPr>
+          <p:cNvPr id="19" name="TextBox 18"/>
           <p:cNvSpPr txBox="1"/>
           <p:nvPr/>
         </p:nvSpPr>
         <p:spPr>
           <a:xfrm>
-            <a:off x="1097280" y="2029968"/>
-            <a:ext cx="10362895" cy="402336"/>
+            <a:off x="594360" y="4617720"/>
+            <a:ext cx="438912" cy="438912"/>
           </a:xfrm>
           <a:prstGeom prst="rect">
             <a:avLst/>
@@ -7898,28 +7700,61 @@
           <a:bodyPr wrap="square" anchor="ctr"/>
           <a:lstStyle/>
           <a:p>
-            <a:r>
-              <a:rPr sz="1500" b="0" i="0">
-                <a:solidFill>
-                  <a:srgbClr val="333333"/>
-                </a:solidFill>
-                <a:latin typeface="Calibri"/>
-              </a:rPr>
-              <a:t>Cuantos nombres distintos esta usando su paquete para referirse a la misma persona que lleva la mascota a la clinica?</a:t>
-            </a:r>
-          </a:p>
-        </p:txBody>
-      </p:sp>
-      <p:sp>
-        <p:nvSpPr>
-          <p:cNvPr id="13" name="Rounded Rectangle 12"/>
+            <a:pPr algn="ctr"/>
+            <a:r>
+              <a:rPr sz="1600" b="1" i="0">
+                <a:solidFill>
+                  <a:srgbClr val="FFFFFF"/>
+                </a:solidFill>
+                <a:latin typeface="Calibri"/>
+              </a:rPr>
+              <a:t>4</a:t>
+            </a:r>
+          </a:p>
+        </p:txBody>
+      </p:sp>
+      <p:sp>
+        <p:nvSpPr>
+          <p:cNvPr id="20" name="TextBox 19"/>
+          <p:cNvSpPr txBox="1"/>
+          <p:nvPr/>
+        </p:nvSpPr>
+        <p:spPr>
+          <a:xfrm>
+            <a:off x="1188720" y="4453128"/>
+            <a:ext cx="10271455" cy="786384"/>
+          </a:xfrm>
+          <a:prstGeom prst="rect">
+            <a:avLst/>
+          </a:prstGeom>
+          <a:noFill/>
+        </p:spPr>
+        <p:txBody>
+          <a:bodyPr wrap="square" anchor="ctr"/>
+          <a:lstStyle/>
+          <a:p>
+            <a:r>
+              <a:rPr sz="1500" b="1" i="0">
+                <a:solidFill>
+                  <a:srgbClr val="095292"/>
+                </a:solidFill>
+                <a:latin typeface="Calibri"/>
+              </a:rPr>
+              <a:t>Recibir los hallazgos propios y clasificarlos en aceptado, rechazado con justificacion escrita o aplazado por acuerdo, sin borrar ninguno del acta, de modo que quede evidencia de la decision tomada.</a:t>
+            </a:r>
+          </a:p>
+        </p:txBody>
+      </p:sp>
+      <p:sp>
+        <p:nvSpPr>
+          <p:cNvPr id="21" name="Rounded Rectangle 20"/>
           <p:cNvSpPr/>
           <p:nvPr/>
         </p:nvSpPr>
         <p:spPr>
           <a:xfrm>
-            <a:off x="457200" y="2615184"/>
-            <a:ext cx="11277295" cy="566928"/>
+            <a:off x="457200" y="5404104"/>
+            <a:ext cx="11277295" cy="950976"/>
           </a:xfrm>
           <a:prstGeom prst="roundRect">
             <a:avLst>
@@ -7957,25 +7792,25 @@
       </p:sp>
       <p:sp>
         <p:nvSpPr>
-          <p:cNvPr id="14" name="Rectangle 13"/>
+          <p:cNvPr id="22" name="Rounded Rectangle 21"/>
           <p:cNvSpPr/>
           <p:nvPr/>
         </p:nvSpPr>
         <p:spPr>
           <a:xfrm>
-            <a:off x="640080" y="2761488"/>
-            <a:ext cx="274320" cy="274320"/>
-          </a:xfrm>
-          <a:prstGeom prst="rect">
-            <a:avLst/>
+            <a:off x="594360" y="5660136"/>
+            <a:ext cx="438912" cy="438912"/>
+          </a:xfrm>
+          <a:prstGeom prst="roundRect">
+            <a:avLst>
+              <a:gd name="adj" fmla="val 12000"/>
+            </a:avLst>
           </a:prstGeom>
           <a:solidFill>
-            <a:srgbClr val="FFFFFF"/>
+            <a:srgbClr val="095292"/>
           </a:solidFill>
           <a:ln>
-            <a:solidFill>
-              <a:srgbClr val="333333"/>
-            </a:solidFill>
+            <a:noFill/>
           </a:ln>
         </p:spPr>
         <p:style>
@@ -8002,57 +7837,47 @@
       </p:sp>
       <p:sp>
         <p:nvSpPr>
-          <p:cNvPr id="15" name="Rectangle 14"/>
-          <p:cNvSpPr/>
-          <p:nvPr/>
-        </p:nvSpPr>
-        <p:spPr>
-          <a:xfrm>
-            <a:off x="640080" y="2761488"/>
-            <a:ext cx="73152" cy="274320"/>
-          </a:xfrm>
-          <a:prstGeom prst="rect">
-            <a:avLst/>
-          </a:prstGeom>
-          <a:solidFill>
-            <a:srgbClr val="269CCB"/>
-          </a:solidFill>
-          <a:ln>
-            <a:noFill/>
-          </a:ln>
-        </p:spPr>
-        <p:style>
-          <a:lnRef idx="1">
-            <a:schemeClr val="accent1"/>
-          </a:lnRef>
-          <a:fillRef idx="3">
-            <a:schemeClr val="accent1"/>
-          </a:fillRef>
-          <a:effectRef idx="2">
-            <a:schemeClr val="accent1"/>
-          </a:effectRef>
-          <a:fontRef idx="minor">
-            <a:schemeClr val="lt1"/>
-          </a:fontRef>
-        </p:style>
-        <p:txBody>
-          <a:bodyPr rtlCol="0" anchor="ctr"/>
+          <p:cNvPr id="23" name="TextBox 22"/>
+          <p:cNvSpPr txBox="1"/>
+          <p:nvPr/>
+        </p:nvSpPr>
+        <p:spPr>
+          <a:xfrm>
+            <a:off x="594360" y="5660136"/>
+            <a:ext cx="438912" cy="438912"/>
+          </a:xfrm>
+          <a:prstGeom prst="rect">
+            <a:avLst/>
+          </a:prstGeom>
+          <a:noFill/>
+        </p:spPr>
+        <p:txBody>
+          <a:bodyPr wrap="square" anchor="ctr"/>
           <a:lstStyle/>
           <a:p>
             <a:pPr algn="ctr"/>
-          </a:p>
-        </p:txBody>
-      </p:sp>
-      <p:sp>
-        <p:nvSpPr>
-          <p:cNvPr id="16" name="TextBox 15"/>
+            <a:r>
+              <a:rPr sz="1600" b="1" i="0">
+                <a:solidFill>
+                  <a:srgbClr val="FFFFFF"/>
+                </a:solidFill>
+                <a:latin typeface="Calibri"/>
+              </a:rPr>
+              <a:t>5</a:t>
+            </a:r>
+          </a:p>
+        </p:txBody>
+      </p:sp>
+      <p:sp>
+        <p:nvSpPr>
+          <p:cNvPr id="24" name="TextBox 23"/>
           <p:cNvSpPr txBox="1"/>
           <p:nvPr/>
         </p:nvSpPr>
         <p:spPr>
           <a:xfrm>
-            <a:off x="1097280" y="2706624"/>
-            <a:ext cx="10362895" cy="402336"/>
+            <a:off x="1188720" y="5495544"/>
+            <a:ext cx="10271455" cy="786384"/>
           </a:xfrm>
           <a:prstGeom prst="rect">
             <a:avLst/>
@@ -8064,20 +7889,20 @@
           <a:lstStyle/>
           <a:p>
             <a:r>
-              <a:rPr sz="1500" b="0" i="0">
-                <a:solidFill>
-                  <a:srgbClr val="333333"/>
-                </a:solidFill>
-                <a:latin typeface="Calibri"/>
-              </a:rPr>
-              <a:t>Si usted desapareciera y solo quedara el paquete escrito, alguien podria construir VetCare sin hacer una sola pregunta?</a:t>
-            </a:r>
-          </a:p>
-        </p:txBody>
-      </p:sp>
-      <p:sp>
-        <p:nvSpPr>
-          <p:cNvPr id="17" name="TextBox 16"/>
+              <a:rPr sz="1400" b="1" i="0">
+                <a:solidFill>
+                  <a:srgbClr val="095292"/>
+                </a:solidFill>
+                <a:latin typeface="Calibri"/>
+              </a:rPr>
+              <a:t>Armar el backlog priorizado de correcciones con responsable y criterio de cierre verificable para cada item, ordenado por severidad, y aplicar en clase al menos las dos correcciones bloqueantes antes de subir el paquete corregido a la plataforma del curso.</a:t>
+            </a:r>
+          </a:p>
+        </p:txBody>
+      </p:sp>
+      <p:sp>
+        <p:nvSpPr>
+          <p:cNvPr id="25" name="TextBox 24"/>
           <p:cNvSpPr txBox="1"/>
           <p:nvPr/>
         </p:nvSpPr>
@@ -8582,21 +8407,154 @@
                 </a:solidFill>
                 <a:latin typeface="Calibri"/>
               </a:rPr>
-              <a:t>Criterios de exito / entregable</a:t>
-            </a:r>
-          </a:p>
-        </p:txBody>
-      </p:sp>
-      <p:sp>
-        <p:nvSpPr>
-          <p:cNvPr id="5" name="TextBox 4"/>
+              <a:t>Antes de entregar — autochequeo</a:t>
+            </a:r>
+          </a:p>
+        </p:txBody>
+      </p:sp>
+      <p:sp>
+        <p:nvSpPr>
+          <p:cNvPr id="5" name="Rounded Rectangle 4"/>
+          <p:cNvSpPr/>
+          <p:nvPr/>
+        </p:nvSpPr>
+        <p:spPr>
+          <a:xfrm>
+            <a:off x="457200" y="1261872"/>
+            <a:ext cx="11277295" cy="566928"/>
+          </a:xfrm>
+          <a:prstGeom prst="roundRect">
+            <a:avLst>
+              <a:gd name="adj" fmla="val 12000"/>
+            </a:avLst>
+          </a:prstGeom>
+          <a:solidFill>
+            <a:srgbClr val="F2F2F2"/>
+          </a:solidFill>
+          <a:ln>
+            <a:noFill/>
+          </a:ln>
+        </p:spPr>
+        <p:style>
+          <a:lnRef idx="1">
+            <a:schemeClr val="accent1"/>
+          </a:lnRef>
+          <a:fillRef idx="3">
+            <a:schemeClr val="accent1"/>
+          </a:fillRef>
+          <a:effectRef idx="2">
+            <a:schemeClr val="accent1"/>
+          </a:effectRef>
+          <a:fontRef idx="minor">
+            <a:schemeClr val="lt1"/>
+          </a:fontRef>
+        </p:style>
+        <p:txBody>
+          <a:bodyPr rtlCol="0" anchor="ctr"/>
+          <a:lstStyle/>
+          <a:p>
+            <a:pPr algn="ctr"/>
+          </a:p>
+        </p:txBody>
+      </p:sp>
+      <p:sp>
+        <p:nvSpPr>
+          <p:cNvPr id="6" name="Rectangle 5"/>
+          <p:cNvSpPr/>
+          <p:nvPr/>
+        </p:nvSpPr>
+        <p:spPr>
+          <a:xfrm>
+            <a:off x="640080" y="1408175"/>
+            <a:ext cx="274320" cy="274320"/>
+          </a:xfrm>
+          <a:prstGeom prst="rect">
+            <a:avLst/>
+          </a:prstGeom>
+          <a:solidFill>
+            <a:srgbClr val="FFFFFF"/>
+          </a:solidFill>
+          <a:ln>
+            <a:solidFill>
+              <a:srgbClr val="333333"/>
+            </a:solidFill>
+          </a:ln>
+        </p:spPr>
+        <p:style>
+          <a:lnRef idx="1">
+            <a:schemeClr val="accent1"/>
+          </a:lnRef>
+          <a:fillRef idx="3">
+            <a:schemeClr val="accent1"/>
+          </a:fillRef>
+          <a:effectRef idx="2">
+            <a:schemeClr val="accent1"/>
+          </a:effectRef>
+          <a:fontRef idx="minor">
+            <a:schemeClr val="lt1"/>
+          </a:fontRef>
+        </p:style>
+        <p:txBody>
+          <a:bodyPr rtlCol="0" anchor="ctr"/>
+          <a:lstStyle/>
+          <a:p>
+            <a:pPr algn="ctr"/>
+          </a:p>
+        </p:txBody>
+      </p:sp>
+      <p:sp>
+        <p:nvSpPr>
+          <p:cNvPr id="7" name="Rectangle 6"/>
+          <p:cNvSpPr/>
+          <p:nvPr/>
+        </p:nvSpPr>
+        <p:spPr>
+          <a:xfrm>
+            <a:off x="640080" y="1408175"/>
+            <a:ext cx="73152" cy="274320"/>
+          </a:xfrm>
+          <a:prstGeom prst="rect">
+            <a:avLst/>
+          </a:prstGeom>
+          <a:solidFill>
+            <a:srgbClr val="269CCB"/>
+          </a:solidFill>
+          <a:ln>
+            <a:noFill/>
+          </a:ln>
+        </p:spPr>
+        <p:style>
+          <a:lnRef idx="1">
+            <a:schemeClr val="accent1"/>
+          </a:lnRef>
+          <a:fillRef idx="3">
+            <a:schemeClr val="accent1"/>
+          </a:fillRef>
+          <a:effectRef idx="2">
+            <a:schemeClr val="accent1"/>
+          </a:effectRef>
+          <a:fontRef idx="minor">
+            <a:schemeClr val="lt1"/>
+          </a:fontRef>
+        </p:style>
+        <p:txBody>
+          <a:bodyPr rtlCol="0" anchor="ctr"/>
+          <a:lstStyle/>
+          <a:p>
+            <a:pPr algn="ctr"/>
+          </a:p>
+        </p:txBody>
+      </p:sp>
+      <p:sp>
+        <p:nvSpPr>
+          <p:cNvPr id="8" name="TextBox 7"/>
           <p:cNvSpPr txBox="1"/>
           <p:nvPr/>
         </p:nvSpPr>
         <p:spPr>
           <a:xfrm>
-            <a:off x="457200" y="1170432"/>
-            <a:ext cx="11277295" cy="5230368"/>
+            <a:off x="1097280" y="1353312"/>
+            <a:ext cx="10362895" cy="402336"/>
           </a:xfrm>
           <a:prstGeom prst="rect">
             <a:avLst/>
@@ -8604,219 +8562,354 @@
           <a:noFill/>
         </p:spPr>
         <p:txBody>
-          <a:bodyPr wrap="square">
-            <a:spAutoFit/>
-          </a:bodyPr>
-          <a:lstStyle/>
-          <a:p>
-            <a:pPr>
-              <a:spcAft>
-                <a:spcPts val="800"/>
-              </a:spcAft>
-            </a:pPr>
-            <a:r>
-              <a:rPr sz="2000" b="0" i="0">
+          <a:bodyPr wrap="square" anchor="ctr"/>
+          <a:lstStyle/>
+          <a:p>
+            <a:r>
+              <a:rPr sz="1500" b="0" i="0">
                 <a:solidFill>
                   <a:srgbClr val="333333"/>
                 </a:solidFill>
                 <a:latin typeface="Calibri"/>
               </a:rPr>
-              <a:t>–   </a:t>
-            </a:r>
-            <a:r>
-              <a:rPr sz="2000" b="1" i="0">
+              <a:t>Si toma el requisito mas ambicioso de su catalogo y lo persigue hasta el diagrama de clases, en que punto exacto se le pierde el rastro?</a:t>
+            </a:r>
+          </a:p>
+        </p:txBody>
+      </p:sp>
+      <p:sp>
+        <p:nvSpPr>
+          <p:cNvPr id="9" name="Rounded Rectangle 8"/>
+          <p:cNvSpPr/>
+          <p:nvPr/>
+        </p:nvSpPr>
+        <p:spPr>
+          <a:xfrm>
+            <a:off x="457200" y="1938528"/>
+            <a:ext cx="11277295" cy="566928"/>
+          </a:xfrm>
+          <a:prstGeom prst="roundRect">
+            <a:avLst>
+              <a:gd name="adj" fmla="val 12000"/>
+            </a:avLst>
+          </a:prstGeom>
+          <a:solidFill>
+            <a:srgbClr val="F2F2F2"/>
+          </a:solidFill>
+          <a:ln>
+            <a:noFill/>
+          </a:ln>
+        </p:spPr>
+        <p:style>
+          <a:lnRef idx="1">
+            <a:schemeClr val="accent1"/>
+          </a:lnRef>
+          <a:fillRef idx="3">
+            <a:schemeClr val="accent1"/>
+          </a:fillRef>
+          <a:effectRef idx="2">
+            <a:schemeClr val="accent1"/>
+          </a:effectRef>
+          <a:fontRef idx="minor">
+            <a:schemeClr val="lt1"/>
+          </a:fontRef>
+        </p:style>
+        <p:txBody>
+          <a:bodyPr rtlCol="0" anchor="ctr"/>
+          <a:lstStyle/>
+          <a:p>
+            <a:pPr algn="ctr"/>
+          </a:p>
+        </p:txBody>
+      </p:sp>
+      <p:sp>
+        <p:nvSpPr>
+          <p:cNvPr id="10" name="Rectangle 9"/>
+          <p:cNvSpPr/>
+          <p:nvPr/>
+        </p:nvSpPr>
+        <p:spPr>
+          <a:xfrm>
+            <a:off x="640080" y="2084832"/>
+            <a:ext cx="274320" cy="274320"/>
+          </a:xfrm>
+          <a:prstGeom prst="rect">
+            <a:avLst/>
+          </a:prstGeom>
+          <a:solidFill>
+            <a:srgbClr val="FFFFFF"/>
+          </a:solidFill>
+          <a:ln>
+            <a:solidFill>
+              <a:srgbClr val="333333"/>
+            </a:solidFill>
+          </a:ln>
+        </p:spPr>
+        <p:style>
+          <a:lnRef idx="1">
+            <a:schemeClr val="accent1"/>
+          </a:lnRef>
+          <a:fillRef idx="3">
+            <a:schemeClr val="accent1"/>
+          </a:fillRef>
+          <a:effectRef idx="2">
+            <a:schemeClr val="accent1"/>
+          </a:effectRef>
+          <a:fontRef idx="minor">
+            <a:schemeClr val="lt1"/>
+          </a:fontRef>
+        </p:style>
+        <p:txBody>
+          <a:bodyPr rtlCol="0" anchor="ctr"/>
+          <a:lstStyle/>
+          <a:p>
+            <a:pPr algn="ctr"/>
+          </a:p>
+        </p:txBody>
+      </p:sp>
+      <p:sp>
+        <p:nvSpPr>
+          <p:cNvPr id="11" name="Rectangle 10"/>
+          <p:cNvSpPr/>
+          <p:nvPr/>
+        </p:nvSpPr>
+        <p:spPr>
+          <a:xfrm>
+            <a:off x="640080" y="2084832"/>
+            <a:ext cx="73152" cy="274320"/>
+          </a:xfrm>
+          <a:prstGeom prst="rect">
+            <a:avLst/>
+          </a:prstGeom>
+          <a:solidFill>
+            <a:srgbClr val="269CCB"/>
+          </a:solidFill>
+          <a:ln>
+            <a:noFill/>
+          </a:ln>
+        </p:spPr>
+        <p:style>
+          <a:lnRef idx="1">
+            <a:schemeClr val="accent1"/>
+          </a:lnRef>
+          <a:fillRef idx="3">
+            <a:schemeClr val="accent1"/>
+          </a:fillRef>
+          <a:effectRef idx="2">
+            <a:schemeClr val="accent1"/>
+          </a:effectRef>
+          <a:fontRef idx="minor">
+            <a:schemeClr val="lt1"/>
+          </a:fontRef>
+        </p:style>
+        <p:txBody>
+          <a:bodyPr rtlCol="0" anchor="ctr"/>
+          <a:lstStyle/>
+          <a:p>
+            <a:pPr algn="ctr"/>
+          </a:p>
+        </p:txBody>
+      </p:sp>
+      <p:sp>
+        <p:nvSpPr>
+          <p:cNvPr id="12" name="TextBox 11"/>
+          <p:cNvSpPr txBox="1"/>
+          <p:nvPr/>
+        </p:nvSpPr>
+        <p:spPr>
+          <a:xfrm>
+            <a:off x="1097280" y="2029968"/>
+            <a:ext cx="10362895" cy="402336"/>
+          </a:xfrm>
+          <a:prstGeom prst="rect">
+            <a:avLst/>
+          </a:prstGeom>
+          <a:noFill/>
+        </p:spPr>
+        <p:txBody>
+          <a:bodyPr wrap="square" anchor="ctr"/>
+          <a:lstStyle/>
+          <a:p>
+            <a:r>
+              <a:rPr sz="1500" b="0" i="0">
                 <a:solidFill>
                   <a:srgbClr val="333333"/>
                 </a:solidFill>
                 <a:latin typeface="Calibri"/>
               </a:rPr>
-              <a:t>Entregable:</a:t>
-            </a:r>
-            <a:r>
-              <a:rPr sz="2000" b="0" i="0">
+              <a:t>Cuantos nombres distintos esta usando su paquete para referirse a la misma persona que lleva la mascota a la clinica?</a:t>
+            </a:r>
+          </a:p>
+        </p:txBody>
+      </p:sp>
+      <p:sp>
+        <p:nvSpPr>
+          <p:cNvPr id="13" name="Rounded Rectangle 12"/>
+          <p:cNvSpPr/>
+          <p:nvPr/>
+        </p:nvSpPr>
+        <p:spPr>
+          <a:xfrm>
+            <a:off x="457200" y="2615184"/>
+            <a:ext cx="11277295" cy="566928"/>
+          </a:xfrm>
+          <a:prstGeom prst="roundRect">
+            <a:avLst>
+              <a:gd name="adj" fmla="val 12000"/>
+            </a:avLst>
+          </a:prstGeom>
+          <a:solidFill>
+            <a:srgbClr val="F2F2F2"/>
+          </a:solidFill>
+          <a:ln>
+            <a:noFill/>
+          </a:ln>
+        </p:spPr>
+        <p:style>
+          <a:lnRef idx="1">
+            <a:schemeClr val="accent1"/>
+          </a:lnRef>
+          <a:fillRef idx="3">
+            <a:schemeClr val="accent1"/>
+          </a:fillRef>
+          <a:effectRef idx="2">
+            <a:schemeClr val="accent1"/>
+          </a:effectRef>
+          <a:fontRef idx="minor">
+            <a:schemeClr val="lt1"/>
+          </a:fontRef>
+        </p:style>
+        <p:txBody>
+          <a:bodyPr rtlCol="0" anchor="ctr"/>
+          <a:lstStyle/>
+          <a:p>
+            <a:pPr algn="ctr"/>
+          </a:p>
+        </p:txBody>
+      </p:sp>
+      <p:sp>
+        <p:nvSpPr>
+          <p:cNvPr id="14" name="Rectangle 13"/>
+          <p:cNvSpPr/>
+          <p:nvPr/>
+        </p:nvSpPr>
+        <p:spPr>
+          <a:xfrm>
+            <a:off x="640080" y="2761488"/>
+            <a:ext cx="274320" cy="274320"/>
+          </a:xfrm>
+          <a:prstGeom prst="rect">
+            <a:avLst/>
+          </a:prstGeom>
+          <a:solidFill>
+            <a:srgbClr val="FFFFFF"/>
+          </a:solidFill>
+          <a:ln>
+            <a:solidFill>
+              <a:srgbClr val="333333"/>
+            </a:solidFill>
+          </a:ln>
+        </p:spPr>
+        <p:style>
+          <a:lnRef idx="1">
+            <a:schemeClr val="accent1"/>
+          </a:lnRef>
+          <a:fillRef idx="3">
+            <a:schemeClr val="accent1"/>
+          </a:fillRef>
+          <a:effectRef idx="2">
+            <a:schemeClr val="accent1"/>
+          </a:effectRef>
+          <a:fontRef idx="minor">
+            <a:schemeClr val="lt1"/>
+          </a:fontRef>
+        </p:style>
+        <p:txBody>
+          <a:bodyPr rtlCol="0" anchor="ctr"/>
+          <a:lstStyle/>
+          <a:p>
+            <a:pPr algn="ctr"/>
+          </a:p>
+        </p:txBody>
+      </p:sp>
+      <p:sp>
+        <p:nvSpPr>
+          <p:cNvPr id="15" name="Rectangle 14"/>
+          <p:cNvSpPr/>
+          <p:nvPr/>
+        </p:nvSpPr>
+        <p:spPr>
+          <a:xfrm>
+            <a:off x="640080" y="2761488"/>
+            <a:ext cx="73152" cy="274320"/>
+          </a:xfrm>
+          <a:prstGeom prst="rect">
+            <a:avLst/>
+          </a:prstGeom>
+          <a:solidFill>
+            <a:srgbClr val="269CCB"/>
+          </a:solidFill>
+          <a:ln>
+            <a:noFill/>
+          </a:ln>
+        </p:spPr>
+        <p:style>
+          <a:lnRef idx="1">
+            <a:schemeClr val="accent1"/>
+          </a:lnRef>
+          <a:fillRef idx="3">
+            <a:schemeClr val="accent1"/>
+          </a:fillRef>
+          <a:effectRef idx="2">
+            <a:schemeClr val="accent1"/>
+          </a:effectRef>
+          <a:fontRef idx="minor">
+            <a:schemeClr val="lt1"/>
+          </a:fontRef>
+        </p:style>
+        <p:txBody>
+          <a:bodyPr rtlCol="0" anchor="ctr"/>
+          <a:lstStyle/>
+          <a:p>
+            <a:pPr algn="ctr"/>
+          </a:p>
+        </p:txBody>
+      </p:sp>
+      <p:sp>
+        <p:nvSpPr>
+          <p:cNvPr id="16" name="TextBox 15"/>
+          <p:cNvSpPr txBox="1"/>
+          <p:nvPr/>
+        </p:nvSpPr>
+        <p:spPr>
+          <a:xfrm>
+            <a:off x="1097280" y="2706624"/>
+            <a:ext cx="10362895" cy="402336"/>
+          </a:xfrm>
+          <a:prstGeom prst="rect">
+            <a:avLst/>
+          </a:prstGeom>
+          <a:noFill/>
+        </p:spPr>
+        <p:txBody>
+          <a:bodyPr wrap="square" anchor="ctr"/>
+          <a:lstStyle/>
+          <a:p>
+            <a:r>
+              <a:rPr sz="1500" b="0" i="0">
                 <a:solidFill>
                   <a:srgbClr val="333333"/>
                 </a:solidFill>
                 <a:latin typeface="Calibri"/>
               </a:rPr>
-              <a:t> Un documento con la matriz de trazabilidad RF a CU a Clase, el glosario de nombres canonicos, el acta de revision entre pares con hallazgos clasificados por severidad y el backlog priorizado de correcciones, subido a la plataforma del curso.</a:t>
-            </a:r>
-          </a:p>
-          <a:p>
-            <a:pPr>
-              <a:spcAft>
-                <a:spcPts val="800"/>
-              </a:spcAft>
-            </a:pPr>
-            <a:r>
-              <a:rPr sz="2000" b="0" i="0">
-                <a:solidFill>
-                  <a:srgbClr val="333333"/>
-                </a:solidFill>
-                <a:latin typeface="Calibri"/>
-              </a:rPr>
-              <a:t>–   </a:t>
-            </a:r>
-            <a:r>
-              <a:rPr sz="2000" b="1" i="0">
-                <a:solidFill>
-                  <a:srgbClr val="333333"/>
-                </a:solidFill>
-                <a:latin typeface="Calibri"/>
-              </a:rPr>
-              <a:t>Exito:</a:t>
-            </a:r>
-            <a:r>
-              <a:rPr sz="2000" b="0" i="0">
-                <a:solidFill>
-                  <a:srgbClr val="333333"/>
-                </a:solidFill>
-                <a:latin typeface="Calibri"/>
-              </a:rPr>
-              <a:t> La matriz de trazabilidad cubre el cien por ciento de los RF y no deja casos de uso ni clases sin origen en algun requisito.</a:t>
-            </a:r>
-          </a:p>
-          <a:p>
-            <a:pPr>
-              <a:spcAft>
-                <a:spcPts val="800"/>
-              </a:spcAft>
-            </a:pPr>
-            <a:r>
-              <a:rPr sz="2000" b="0" i="0">
-                <a:solidFill>
-                  <a:srgbClr val="333333"/>
-                </a:solidFill>
-                <a:latin typeface="Calibri"/>
-              </a:rPr>
-              <a:t>–   </a:t>
-            </a:r>
-            <a:r>
-              <a:rPr sz="2000" b="1" i="0">
-                <a:solidFill>
-                  <a:srgbClr val="333333"/>
-                </a:solidFill>
-                <a:latin typeface="Calibri"/>
-              </a:rPr>
-              <a:t>Exito:</a:t>
-            </a:r>
-            <a:r>
-              <a:rPr sz="2000" b="0" i="0">
-                <a:solidFill>
-                  <a:srgbClr val="333333"/>
-                </a:solidFill>
-                <a:latin typeface="Calibri"/>
-              </a:rPr>
-              <a:t> El glosario tiene minimo ocho conceptos con nombre canonico, definicion de una linea y sinonimos prohibidos, y los artefactos ya fueron renombrados en consecuencia.</a:t>
-            </a:r>
-          </a:p>
-          <a:p>
-            <a:pPr>
-              <a:spcAft>
-                <a:spcPts val="800"/>
-              </a:spcAft>
-            </a:pPr>
-            <a:r>
-              <a:rPr sz="2000" b="0" i="0">
-                <a:solidFill>
-                  <a:srgbClr val="333333"/>
-                </a:solidFill>
-                <a:latin typeface="Calibri"/>
-              </a:rPr>
-              <a:t>–   </a:t>
-            </a:r>
-            <a:r>
-              <a:rPr sz="2000" b="1" i="0">
-                <a:solidFill>
-                  <a:srgbClr val="333333"/>
-                </a:solidFill>
-                <a:latin typeface="Calibri"/>
-              </a:rPr>
-              <a:t>Exito:</a:t>
-            </a:r>
-            <a:r>
-              <a:rPr sz="2000" b="0" i="0">
-                <a:solidFill>
-                  <a:srgbClr val="333333"/>
-                </a:solidFill>
-                <a:latin typeface="Calibri"/>
-              </a:rPr>
-              <a:t> El acta de revision entre pares registra minimo seis hallazgos con ubicacion exacta, descripcion objetiva y severidad asignada.</a:t>
-            </a:r>
-          </a:p>
-          <a:p>
-            <a:pPr>
-              <a:spcAft>
-                <a:spcPts val="800"/>
-              </a:spcAft>
-            </a:pPr>
-            <a:r>
-              <a:rPr sz="2000" b="0" i="0">
-                <a:solidFill>
-                  <a:srgbClr val="333333"/>
-                </a:solidFill>
-                <a:latin typeface="Calibri"/>
-              </a:rPr>
-              <a:t>–   </a:t>
-            </a:r>
-            <a:r>
-              <a:rPr sz="2000" b="1" i="0">
-                <a:solidFill>
-                  <a:srgbClr val="333333"/>
-                </a:solidFill>
-                <a:latin typeface="Calibri"/>
-              </a:rPr>
-              <a:t>Exito:</a:t>
-            </a:r>
-            <a:r>
-              <a:rPr sz="2000" b="0" i="0">
-                <a:solidFill>
-                  <a:srgbClr val="333333"/>
-                </a:solidFill>
-                <a:latin typeface="Calibri"/>
-              </a:rPr>
-              <a:t> El backlog tiene responsable y criterio de cierre verificable por item, y las correcciones de severidad bloqueante quedaron aplicadas en el paquete entregado.</a:t>
-            </a:r>
-          </a:p>
-          <a:p>
-            <a:pPr>
-              <a:spcAft>
-                <a:spcPts val="800"/>
-              </a:spcAft>
-            </a:pPr>
-            <a:r>
-              <a:rPr sz="2000" b="0" i="0">
-                <a:solidFill>
-                  <a:srgbClr val="333333"/>
-                </a:solidFill>
-                <a:latin typeface="Calibri"/>
-              </a:rPr>
-              <a:t>–   </a:t>
-            </a:r>
-            <a:r>
-              <a:rPr sz="2000" b="1" i="0">
-                <a:solidFill>
-                  <a:srgbClr val="333333"/>
-                </a:solidFill>
-                <a:latin typeface="Calibri"/>
-              </a:rPr>
-              <a:t>Entrega en la plataforma del curso</a:t>
-            </a:r>
-            <a:r>
-              <a:rPr sz="2000" b="0" i="0">
-                <a:solidFill>
-                  <a:srgbClr val="333333"/>
-                </a:solidFill>
-                <a:latin typeface="Calibri"/>
-              </a:rPr>
-              <a:t> — en la fecha que indique el docente.</a:t>
-            </a:r>
-          </a:p>
-        </p:txBody>
-      </p:sp>
-      <p:sp>
-        <p:nvSpPr>
-          <p:cNvPr id="6" name="TextBox 5"/>
+              <a:t>Si usted desapareciera y solo quedara el paquete escrito, alguien podria construir VetCare sin hacer una sola pregunta?</a:t>
+            </a:r>
+          </a:p>
+        </p:txBody>
+      </p:sp>
+      <p:sp>
+        <p:nvSpPr>
+          <p:cNvPr id="17" name="TextBox 16"/>
           <p:cNvSpPr txBox="1"/>
           <p:nvPr/>
         </p:nvSpPr>
@@ -8990,109 +9083,21 @@
                 </a:solidFill>
                 <a:latin typeface="Calibri"/>
               </a:rPr>
-              <a:t>Para el PI esta semana</a:t>
-            </a:r>
-          </a:p>
-        </p:txBody>
-      </p:sp>
-      <p:sp>
-        <p:nvSpPr>
-          <p:cNvPr id="5" name="Rounded Rectangle 4"/>
-          <p:cNvSpPr/>
-          <p:nvPr/>
-        </p:nvSpPr>
-        <p:spPr>
-          <a:xfrm>
-            <a:off x="457200" y="1261872"/>
-            <a:ext cx="11277295" cy="1051560"/>
-          </a:xfrm>
-          <a:prstGeom prst="roundRect">
-            <a:avLst>
-              <a:gd name="adj" fmla="val 12000"/>
-            </a:avLst>
-          </a:prstGeom>
-          <a:solidFill>
-            <a:srgbClr val="E8F4FA"/>
-          </a:solidFill>
-          <a:ln>
-            <a:noFill/>
-          </a:ln>
-        </p:spPr>
-        <p:style>
-          <a:lnRef idx="1">
-            <a:schemeClr val="accent1"/>
-          </a:lnRef>
-          <a:fillRef idx="3">
-            <a:schemeClr val="accent1"/>
-          </a:fillRef>
-          <a:effectRef idx="2">
-            <a:schemeClr val="accent1"/>
-          </a:effectRef>
-          <a:fontRef idx="minor">
-            <a:schemeClr val="lt1"/>
-          </a:fontRef>
-        </p:style>
-        <p:txBody>
-          <a:bodyPr rtlCol="0" anchor="ctr"/>
-          <a:lstStyle/>
-          <a:p>
-            <a:pPr algn="ctr"/>
-          </a:p>
-        </p:txBody>
-      </p:sp>
-      <p:sp>
-        <p:nvSpPr>
-          <p:cNvPr id="6" name="Rectangle 5"/>
-          <p:cNvSpPr/>
-          <p:nvPr/>
-        </p:nvSpPr>
-        <p:spPr>
-          <a:xfrm>
-            <a:off x="457200" y="1261872"/>
-            <a:ext cx="128016" cy="1051560"/>
-          </a:xfrm>
-          <a:prstGeom prst="rect">
-            <a:avLst/>
-          </a:prstGeom>
-          <a:solidFill>
-            <a:srgbClr val="269CCB"/>
-          </a:solidFill>
-          <a:ln>
-            <a:noFill/>
-          </a:ln>
-        </p:spPr>
-        <p:style>
-          <a:lnRef idx="1">
-            <a:schemeClr val="accent1"/>
-          </a:lnRef>
-          <a:fillRef idx="3">
-            <a:schemeClr val="accent1"/>
-          </a:fillRef>
-          <a:effectRef idx="2">
-            <a:schemeClr val="accent1"/>
-          </a:effectRef>
-          <a:fontRef idx="minor">
-            <a:schemeClr val="lt1"/>
-          </a:fontRef>
-        </p:style>
-        <p:txBody>
-          <a:bodyPr rtlCol="0" anchor="ctr"/>
-          <a:lstStyle/>
-          <a:p>
-            <a:pPr algn="ctr"/>
-          </a:p>
-        </p:txBody>
-      </p:sp>
-      <p:sp>
-        <p:nvSpPr>
-          <p:cNvPr id="7" name="TextBox 6"/>
+              <a:t>Criterios de exito / entregable</a:t>
+            </a:r>
+          </a:p>
+        </p:txBody>
+      </p:sp>
+      <p:sp>
+        <p:nvSpPr>
+          <p:cNvPr id="5" name="TextBox 4"/>
           <p:cNvSpPr txBox="1"/>
           <p:nvPr/>
         </p:nvSpPr>
         <p:spPr>
           <a:xfrm>
-            <a:off x="777240" y="1399031"/>
-            <a:ext cx="10774375" cy="822959"/>
+            <a:off x="457200" y="1170432"/>
+            <a:ext cx="11277295" cy="5230368"/>
           </a:xfrm>
           <a:prstGeom prst="rect">
             <a:avLst/>
@@ -9105,313 +9110,214 @@
           </a:bodyPr>
           <a:lstStyle/>
           <a:p>
-            <a:r>
-              <a:rPr sz="1200" b="1" i="0">
-                <a:solidFill>
-                  <a:srgbClr val="269CCB"/>
-                </a:solidFill>
-                <a:latin typeface="Calibri"/>
-              </a:rPr>
-              <a:t>Info</a:t>
-            </a:r>
-          </a:p>
-          <a:p>
             <a:pPr>
-              <a:spcBef>
-                <a:spcPts val="400"/>
-              </a:spcBef>
+              <a:spcAft>
+                <a:spcPts val="800"/>
+              </a:spcAft>
             </a:pPr>
             <a:r>
-              <a:rPr sz="1400" b="0" i="0">
+              <a:rPr sz="2000" b="0" i="0">
                 <a:solidFill>
                   <a:srgbClr val="333333"/>
                 </a:solidFill>
                 <a:latin typeface="Calibri"/>
               </a:rPr>
-              <a:t>Hito: El paquete de diseño de VetCare queda auditado y consistente: requisitos, casos de uso y diagrama de clases usan los mismos nombres y no se contradicen entre si.</a:t>
-            </a:r>
-          </a:p>
-        </p:txBody>
-      </p:sp>
-      <p:sp>
-        <p:nvSpPr>
-          <p:cNvPr id="8" name="Rounded Rectangle 7"/>
-          <p:cNvSpPr/>
-          <p:nvPr/>
-        </p:nvSpPr>
-        <p:spPr>
-          <a:xfrm>
-            <a:off x="457200" y="2478024"/>
-            <a:ext cx="11277295" cy="1051560"/>
-          </a:xfrm>
-          <a:prstGeom prst="roundRect">
-            <a:avLst>
-              <a:gd name="adj" fmla="val 12000"/>
-            </a:avLst>
-          </a:prstGeom>
-          <a:solidFill>
-            <a:srgbClr val="FFF8E1"/>
-          </a:solidFill>
-          <a:ln>
-            <a:noFill/>
-          </a:ln>
-        </p:spPr>
-        <p:style>
-          <a:lnRef idx="1">
-            <a:schemeClr val="accent1"/>
-          </a:lnRef>
-          <a:fillRef idx="3">
-            <a:schemeClr val="accent1"/>
-          </a:fillRef>
-          <a:effectRef idx="2">
-            <a:schemeClr val="accent1"/>
-          </a:effectRef>
-          <a:fontRef idx="minor">
-            <a:schemeClr val="lt1"/>
-          </a:fontRef>
-        </p:style>
-        <p:txBody>
-          <a:bodyPr rtlCol="0" anchor="ctr"/>
-          <a:lstStyle/>
-          <a:p>
-            <a:pPr algn="ctr"/>
-          </a:p>
-        </p:txBody>
-      </p:sp>
-      <p:sp>
-        <p:nvSpPr>
-          <p:cNvPr id="9" name="Rectangle 8"/>
-          <p:cNvSpPr/>
-          <p:nvPr/>
-        </p:nvSpPr>
-        <p:spPr>
-          <a:xfrm>
-            <a:off x="457200" y="2478024"/>
-            <a:ext cx="128016" cy="1051560"/>
-          </a:xfrm>
-          <a:prstGeom prst="rect">
-            <a:avLst/>
-          </a:prstGeom>
-          <a:solidFill>
-            <a:srgbClr val="FFD000"/>
-          </a:solidFill>
-          <a:ln>
-            <a:noFill/>
-          </a:ln>
-        </p:spPr>
-        <p:style>
-          <a:lnRef idx="1">
-            <a:schemeClr val="accent1"/>
-          </a:lnRef>
-          <a:fillRef idx="3">
-            <a:schemeClr val="accent1"/>
-          </a:fillRef>
-          <a:effectRef idx="2">
-            <a:schemeClr val="accent1"/>
-          </a:effectRef>
-          <a:fontRef idx="minor">
-            <a:schemeClr val="lt1"/>
-          </a:fontRef>
-        </p:style>
-        <p:txBody>
-          <a:bodyPr rtlCol="0" anchor="ctr"/>
-          <a:lstStyle/>
-          <a:p>
-            <a:pPr algn="ctr"/>
-          </a:p>
-        </p:txBody>
-      </p:sp>
-      <p:sp>
-        <p:nvSpPr>
-          <p:cNvPr id="10" name="TextBox 9"/>
-          <p:cNvSpPr txBox="1"/>
-          <p:nvPr/>
-        </p:nvSpPr>
-        <p:spPr>
-          <a:xfrm>
-            <a:off x="777240" y="2615184"/>
-            <a:ext cx="10774375" cy="822959"/>
-          </a:xfrm>
-          <a:prstGeom prst="rect">
-            <a:avLst/>
-          </a:prstGeom>
-          <a:noFill/>
-        </p:spPr>
-        <p:txBody>
-          <a:bodyPr wrap="square">
-            <a:spAutoFit/>
-          </a:bodyPr>
-          <a:lstStyle/>
-          <a:p>
-            <a:r>
-              <a:rPr sz="1200" b="1" i="0">
-                <a:solidFill>
-                  <a:srgbClr val="FFD000"/>
-                </a:solidFill>
-                <a:latin typeface="Calibri"/>
-              </a:rPr>
-              <a:t>Aclaración</a:t>
+              <a:t>–   </a:t>
+            </a:r>
+            <a:r>
+              <a:rPr sz="2000" b="1" i="0">
+                <a:solidFill>
+                  <a:srgbClr val="333333"/>
+                </a:solidFill>
+                <a:latin typeface="Calibri"/>
+              </a:rPr>
+              <a:t>Entregable:</a:t>
+            </a:r>
+            <a:r>
+              <a:rPr sz="2000" b="0" i="0">
+                <a:solidFill>
+                  <a:srgbClr val="333333"/>
+                </a:solidFill>
+                <a:latin typeface="Calibri"/>
+              </a:rPr>
+              <a:t> Un documento con la matriz de trazabilidad RF a CU a Clase, el glosario de nombres canonicos, el acta de revision entre pares con hallazgos clasificados por severidad y el backlog priorizado de correcciones, subido a la plataforma del curso.</a:t>
             </a:r>
           </a:p>
           <a:p>
             <a:pPr>
-              <a:spcBef>
-                <a:spcPts val="400"/>
-              </a:spcBef>
+              <a:spcAft>
+                <a:spcPts val="800"/>
+              </a:spcAft>
             </a:pPr>
             <a:r>
-              <a:rPr sz="1400" b="0" i="0">
+              <a:rPr sz="2000" b="0" i="0">
                 <a:solidFill>
                   <a:srgbClr val="333333"/>
                 </a:solidFill>
                 <a:latin typeface="Calibri"/>
               </a:rPr>
-              <a:t>Enunciado completo: Clases/Proyecto Integrador/ (VetCare).</a:t>
-            </a:r>
-          </a:p>
-        </p:txBody>
-      </p:sp>
-      <p:sp>
-        <p:nvSpPr>
-          <p:cNvPr id="11" name="Rounded Rectangle 10"/>
-          <p:cNvSpPr/>
-          <p:nvPr/>
-        </p:nvSpPr>
-        <p:spPr>
-          <a:xfrm>
-            <a:off x="457200" y="3694176"/>
-            <a:ext cx="11277295" cy="1051560"/>
-          </a:xfrm>
-          <a:prstGeom prst="roundRect">
-            <a:avLst>
-              <a:gd name="adj" fmla="val 12000"/>
-            </a:avLst>
-          </a:prstGeom>
-          <a:solidFill>
-            <a:srgbClr val="FBE4E4"/>
-          </a:solidFill>
-          <a:ln>
-            <a:noFill/>
-          </a:ln>
-        </p:spPr>
-        <p:style>
-          <a:lnRef idx="1">
-            <a:schemeClr val="accent1"/>
-          </a:lnRef>
-          <a:fillRef idx="3">
-            <a:schemeClr val="accent1"/>
-          </a:fillRef>
-          <a:effectRef idx="2">
-            <a:schemeClr val="accent1"/>
-          </a:effectRef>
-          <a:fontRef idx="minor">
-            <a:schemeClr val="lt1"/>
-          </a:fontRef>
-        </p:style>
-        <p:txBody>
-          <a:bodyPr rtlCol="0" anchor="ctr"/>
-          <a:lstStyle/>
-          <a:p>
-            <a:pPr algn="ctr"/>
-          </a:p>
-        </p:txBody>
-      </p:sp>
-      <p:sp>
-        <p:nvSpPr>
-          <p:cNvPr id="12" name="Rectangle 11"/>
-          <p:cNvSpPr/>
-          <p:nvPr/>
-        </p:nvSpPr>
-        <p:spPr>
-          <a:xfrm>
-            <a:off x="457200" y="3694176"/>
-            <a:ext cx="128016" cy="1051560"/>
-          </a:xfrm>
-          <a:prstGeom prst="rect">
-            <a:avLst/>
-          </a:prstGeom>
-          <a:solidFill>
-            <a:srgbClr val="A02030"/>
-          </a:solidFill>
-          <a:ln>
-            <a:noFill/>
-          </a:ln>
-        </p:spPr>
-        <p:style>
-          <a:lnRef idx="1">
-            <a:schemeClr val="accent1"/>
-          </a:lnRef>
-          <a:fillRef idx="3">
-            <a:schemeClr val="accent1"/>
-          </a:fillRef>
-          <a:effectRef idx="2">
-            <a:schemeClr val="accent1"/>
-          </a:effectRef>
-          <a:fontRef idx="minor">
-            <a:schemeClr val="lt1"/>
-          </a:fontRef>
-        </p:style>
-        <p:txBody>
-          <a:bodyPr rtlCol="0" anchor="ctr"/>
-          <a:lstStyle/>
-          <a:p>
-            <a:pPr algn="ctr"/>
-          </a:p>
-        </p:txBody>
-      </p:sp>
-      <p:sp>
-        <p:nvSpPr>
-          <p:cNvPr id="13" name="TextBox 12"/>
-          <p:cNvSpPr txBox="1"/>
-          <p:nvPr/>
-        </p:nvSpPr>
-        <p:spPr>
-          <a:xfrm>
-            <a:off x="777240" y="3831336"/>
-            <a:ext cx="10774375" cy="822959"/>
-          </a:xfrm>
-          <a:prstGeom prst="rect">
-            <a:avLst/>
-          </a:prstGeom>
-          <a:noFill/>
-        </p:spPr>
-        <p:txBody>
-          <a:bodyPr wrap="square">
-            <a:spAutoFit/>
-          </a:bodyPr>
-          <a:lstStyle/>
-          <a:p>
-            <a:r>
-              <a:rPr sz="1200" b="1" i="0">
-                <a:solidFill>
-                  <a:srgbClr val="A02030"/>
-                </a:solidFill>
-                <a:latin typeface="Calibri"/>
-              </a:rPr>
-              <a:t>Atención</a:t>
+              <a:t>–   </a:t>
+            </a:r>
+            <a:r>
+              <a:rPr sz="2000" b="1" i="0">
+                <a:solidFill>
+                  <a:srgbClr val="333333"/>
+                </a:solidFill>
+                <a:latin typeface="Calibri"/>
+              </a:rPr>
+              <a:t>Exito:</a:t>
+            </a:r>
+            <a:r>
+              <a:rPr sz="2000" b="0" i="0">
+                <a:solidFill>
+                  <a:srgbClr val="333333"/>
+                </a:solidFill>
+                <a:latin typeface="Calibri"/>
+              </a:rPr>
+              <a:t> La matriz de trazabilidad cubre el cien por ciento de los RF y no deja casos de uso ni clases sin origen en algun requisito.</a:t>
             </a:r>
           </a:p>
           <a:p>
             <a:pPr>
-              <a:spcBef>
-                <a:spcPts val="400"/>
-              </a:spcBef>
+              <a:spcAft>
+                <a:spcPts val="800"/>
+              </a:spcAft>
             </a:pPr>
             <a:r>
-              <a:rPr sz="1400" b="0" i="0">
+              <a:rPr sz="2000" b="0" i="0">
                 <a:solidFill>
                   <a:srgbClr val="333333"/>
                 </a:solidFill>
                 <a:latin typeface="Calibri"/>
               </a:rPr>
-              <a:t>Entrega del taller, si el docente lo asigna · en la fecha que indique el docente.</a:t>
-            </a:r>
-          </a:p>
-        </p:txBody>
-      </p:sp>
-      <p:sp>
-        <p:nvSpPr>
-          <p:cNvPr id="14" name="TextBox 13"/>
+              <a:t>–   </a:t>
+            </a:r>
+            <a:r>
+              <a:rPr sz="2000" b="1" i="0">
+                <a:solidFill>
+                  <a:srgbClr val="333333"/>
+                </a:solidFill>
+                <a:latin typeface="Calibri"/>
+              </a:rPr>
+              <a:t>Exito:</a:t>
+            </a:r>
+            <a:r>
+              <a:rPr sz="2000" b="0" i="0">
+                <a:solidFill>
+                  <a:srgbClr val="333333"/>
+                </a:solidFill>
+                <a:latin typeface="Calibri"/>
+              </a:rPr>
+              <a:t> El glosario tiene minimo ocho conceptos con nombre canonico, definicion de una linea y sinonimos prohibidos, y los artefactos ya fueron renombrados en consecuencia.</a:t>
+            </a:r>
+          </a:p>
+          <a:p>
+            <a:pPr>
+              <a:spcAft>
+                <a:spcPts val="800"/>
+              </a:spcAft>
+            </a:pPr>
+            <a:r>
+              <a:rPr sz="2000" b="0" i="0">
+                <a:solidFill>
+                  <a:srgbClr val="333333"/>
+                </a:solidFill>
+                <a:latin typeface="Calibri"/>
+              </a:rPr>
+              <a:t>–   </a:t>
+            </a:r>
+            <a:r>
+              <a:rPr sz="2000" b="1" i="0">
+                <a:solidFill>
+                  <a:srgbClr val="333333"/>
+                </a:solidFill>
+                <a:latin typeface="Calibri"/>
+              </a:rPr>
+              <a:t>Exito:</a:t>
+            </a:r>
+            <a:r>
+              <a:rPr sz="2000" b="0" i="0">
+                <a:solidFill>
+                  <a:srgbClr val="333333"/>
+                </a:solidFill>
+                <a:latin typeface="Calibri"/>
+              </a:rPr>
+              <a:t> El acta de revision entre pares registra minimo seis hallazgos con ubicacion exacta, descripcion objetiva y severidad asignada.</a:t>
+            </a:r>
+          </a:p>
+          <a:p>
+            <a:pPr>
+              <a:spcAft>
+                <a:spcPts val="800"/>
+              </a:spcAft>
+            </a:pPr>
+            <a:r>
+              <a:rPr sz="2000" b="0" i="0">
+                <a:solidFill>
+                  <a:srgbClr val="333333"/>
+                </a:solidFill>
+                <a:latin typeface="Calibri"/>
+              </a:rPr>
+              <a:t>–   </a:t>
+            </a:r>
+            <a:r>
+              <a:rPr sz="2000" b="1" i="0">
+                <a:solidFill>
+                  <a:srgbClr val="333333"/>
+                </a:solidFill>
+                <a:latin typeface="Calibri"/>
+              </a:rPr>
+              <a:t>Exito:</a:t>
+            </a:r>
+            <a:r>
+              <a:rPr sz="2000" b="0" i="0">
+                <a:solidFill>
+                  <a:srgbClr val="333333"/>
+                </a:solidFill>
+                <a:latin typeface="Calibri"/>
+              </a:rPr>
+              <a:t> El backlog tiene responsable y criterio de cierre verificable por item, y las correcciones de severidad bloqueante quedaron aplicadas en el paquete entregado.</a:t>
+            </a:r>
+          </a:p>
+          <a:p>
+            <a:pPr>
+              <a:spcAft>
+                <a:spcPts val="800"/>
+              </a:spcAft>
+            </a:pPr>
+            <a:r>
+              <a:rPr sz="2000" b="0" i="0">
+                <a:solidFill>
+                  <a:srgbClr val="333333"/>
+                </a:solidFill>
+                <a:latin typeface="Calibri"/>
+              </a:rPr>
+              <a:t>–   </a:t>
+            </a:r>
+            <a:r>
+              <a:rPr sz="2000" b="1" i="0">
+                <a:solidFill>
+                  <a:srgbClr val="333333"/>
+                </a:solidFill>
+                <a:latin typeface="Calibri"/>
+              </a:rPr>
+              <a:t>Entrega en la plataforma del curso</a:t>
+            </a:r>
+            <a:r>
+              <a:rPr sz="2000" b="0" i="0">
+                <a:solidFill>
+                  <a:srgbClr val="333333"/>
+                </a:solidFill>
+                <a:latin typeface="Calibri"/>
+              </a:rPr>
+              <a:t> — en la fecha que indique el docente.</a:t>
+            </a:r>
+          </a:p>
+        </p:txBody>
+      </p:sp>
+      <p:sp>
+        <p:nvSpPr>
+          <p:cNvPr id="6" name="TextBox 5"/>
           <p:cNvSpPr txBox="1"/>
           <p:nvPr/>
         </p:nvSpPr>
@@ -9453,6 +9359,601 @@
 </file>
 
 <file path=ppt/slides/slide22.xml><?xml version="1.0" encoding="utf-8"?>
+<p:sld xmlns:a="http://schemas.openxmlformats.org/drawingml/2006/main" xmlns:p="http://schemas.openxmlformats.org/presentationml/2006/main" xmlns:r="http://schemas.openxmlformats.org/officeDocument/2006/relationships">
+  <p:cSld>
+    <p:bg>
+      <p:bgPr>
+        <a:solidFill>
+          <a:srgbClr val="FFFFFF"/>
+        </a:solidFill>
+        <a:effectLst/>
+      </p:bgPr>
+    </p:bg>
+    <p:spTree>
+      <p:nvGrpSpPr>
+        <p:cNvPr id="1" name=""/>
+        <p:cNvGrpSpPr/>
+        <p:nvPr/>
+      </p:nvGrpSpPr>
+      <p:grpSpPr/>
+      <p:sp>
+        <p:nvSpPr>
+          <p:cNvPr id="2" name="Rectangle 1"/>
+          <p:cNvSpPr/>
+          <p:nvPr/>
+        </p:nvSpPr>
+        <p:spPr>
+          <a:xfrm>
+            <a:off x="0" y="0"/>
+            <a:ext cx="12191695" cy="960120"/>
+          </a:xfrm>
+          <a:prstGeom prst="rect">
+            <a:avLst/>
+          </a:prstGeom>
+          <a:solidFill>
+            <a:srgbClr val="095292"/>
+          </a:solidFill>
+          <a:ln>
+            <a:noFill/>
+          </a:ln>
+        </p:spPr>
+        <p:style>
+          <a:lnRef idx="1">
+            <a:schemeClr val="accent1"/>
+          </a:lnRef>
+          <a:fillRef idx="3">
+            <a:schemeClr val="accent1"/>
+          </a:fillRef>
+          <a:effectRef idx="2">
+            <a:schemeClr val="accent1"/>
+          </a:effectRef>
+          <a:fontRef idx="minor">
+            <a:schemeClr val="lt1"/>
+          </a:fontRef>
+        </p:style>
+        <p:txBody>
+          <a:bodyPr rtlCol="0" anchor="ctr"/>
+          <a:lstStyle/>
+          <a:p>
+            <a:pPr algn="ctr"/>
+          </a:p>
+        </p:txBody>
+      </p:sp>
+      <p:sp>
+        <p:nvSpPr>
+          <p:cNvPr id="3" name="Rectangle 2"/>
+          <p:cNvSpPr/>
+          <p:nvPr/>
+        </p:nvSpPr>
+        <p:spPr>
+          <a:xfrm>
+            <a:off x="0" y="960120"/>
+            <a:ext cx="12191695" cy="41148"/>
+          </a:xfrm>
+          <a:prstGeom prst="rect">
+            <a:avLst/>
+          </a:prstGeom>
+          <a:solidFill>
+            <a:srgbClr val="FFD000"/>
+          </a:solidFill>
+          <a:ln>
+            <a:noFill/>
+          </a:ln>
+        </p:spPr>
+        <p:style>
+          <a:lnRef idx="1">
+            <a:schemeClr val="accent1"/>
+          </a:lnRef>
+          <a:fillRef idx="3">
+            <a:schemeClr val="accent1"/>
+          </a:fillRef>
+          <a:effectRef idx="2">
+            <a:schemeClr val="accent1"/>
+          </a:effectRef>
+          <a:fontRef idx="minor">
+            <a:schemeClr val="lt1"/>
+          </a:fontRef>
+        </p:style>
+        <p:txBody>
+          <a:bodyPr rtlCol="0" anchor="ctr"/>
+          <a:lstStyle/>
+          <a:p>
+            <a:pPr algn="ctr"/>
+          </a:p>
+        </p:txBody>
+      </p:sp>
+      <p:sp>
+        <p:nvSpPr>
+          <p:cNvPr id="4" name="TextBox 3"/>
+          <p:cNvSpPr txBox="1"/>
+          <p:nvPr/>
+        </p:nvSpPr>
+        <p:spPr>
+          <a:xfrm>
+            <a:off x="457200" y="164592"/>
+            <a:ext cx="11277295" cy="502920"/>
+          </a:xfrm>
+          <a:prstGeom prst="rect">
+            <a:avLst/>
+          </a:prstGeom>
+          <a:noFill/>
+        </p:spPr>
+        <p:txBody>
+          <a:bodyPr wrap="square">
+            <a:spAutoFit/>
+          </a:bodyPr>
+          <a:lstStyle/>
+          <a:p>
+            <a:r>
+              <a:rPr sz="2600" b="1" i="0">
+                <a:solidFill>
+                  <a:srgbClr val="FFFFFF"/>
+                </a:solidFill>
+                <a:latin typeface="Calibri"/>
+              </a:rPr>
+              <a:t>Para el PI esta semana</a:t>
+            </a:r>
+          </a:p>
+        </p:txBody>
+      </p:sp>
+      <p:sp>
+        <p:nvSpPr>
+          <p:cNvPr id="5" name="Rounded Rectangle 4"/>
+          <p:cNvSpPr/>
+          <p:nvPr/>
+        </p:nvSpPr>
+        <p:spPr>
+          <a:xfrm>
+            <a:off x="457200" y="1261872"/>
+            <a:ext cx="11277295" cy="1051560"/>
+          </a:xfrm>
+          <a:prstGeom prst="roundRect">
+            <a:avLst>
+              <a:gd name="adj" fmla="val 12000"/>
+            </a:avLst>
+          </a:prstGeom>
+          <a:solidFill>
+            <a:srgbClr val="E8F4FA"/>
+          </a:solidFill>
+          <a:ln>
+            <a:noFill/>
+          </a:ln>
+        </p:spPr>
+        <p:style>
+          <a:lnRef idx="1">
+            <a:schemeClr val="accent1"/>
+          </a:lnRef>
+          <a:fillRef idx="3">
+            <a:schemeClr val="accent1"/>
+          </a:fillRef>
+          <a:effectRef idx="2">
+            <a:schemeClr val="accent1"/>
+          </a:effectRef>
+          <a:fontRef idx="minor">
+            <a:schemeClr val="lt1"/>
+          </a:fontRef>
+        </p:style>
+        <p:txBody>
+          <a:bodyPr rtlCol="0" anchor="ctr"/>
+          <a:lstStyle/>
+          <a:p>
+            <a:pPr algn="ctr"/>
+          </a:p>
+        </p:txBody>
+      </p:sp>
+      <p:sp>
+        <p:nvSpPr>
+          <p:cNvPr id="6" name="Rectangle 5"/>
+          <p:cNvSpPr/>
+          <p:nvPr/>
+        </p:nvSpPr>
+        <p:spPr>
+          <a:xfrm>
+            <a:off x="457200" y="1261872"/>
+            <a:ext cx="128016" cy="1051560"/>
+          </a:xfrm>
+          <a:prstGeom prst="rect">
+            <a:avLst/>
+          </a:prstGeom>
+          <a:solidFill>
+            <a:srgbClr val="269CCB"/>
+          </a:solidFill>
+          <a:ln>
+            <a:noFill/>
+          </a:ln>
+        </p:spPr>
+        <p:style>
+          <a:lnRef idx="1">
+            <a:schemeClr val="accent1"/>
+          </a:lnRef>
+          <a:fillRef idx="3">
+            <a:schemeClr val="accent1"/>
+          </a:fillRef>
+          <a:effectRef idx="2">
+            <a:schemeClr val="accent1"/>
+          </a:effectRef>
+          <a:fontRef idx="minor">
+            <a:schemeClr val="lt1"/>
+          </a:fontRef>
+        </p:style>
+        <p:txBody>
+          <a:bodyPr rtlCol="0" anchor="ctr"/>
+          <a:lstStyle/>
+          <a:p>
+            <a:pPr algn="ctr"/>
+          </a:p>
+        </p:txBody>
+      </p:sp>
+      <p:sp>
+        <p:nvSpPr>
+          <p:cNvPr id="7" name="TextBox 6"/>
+          <p:cNvSpPr txBox="1"/>
+          <p:nvPr/>
+        </p:nvSpPr>
+        <p:spPr>
+          <a:xfrm>
+            <a:off x="777240" y="1399031"/>
+            <a:ext cx="10774375" cy="822959"/>
+          </a:xfrm>
+          <a:prstGeom prst="rect">
+            <a:avLst/>
+          </a:prstGeom>
+          <a:noFill/>
+        </p:spPr>
+        <p:txBody>
+          <a:bodyPr wrap="square">
+            <a:spAutoFit/>
+          </a:bodyPr>
+          <a:lstStyle/>
+          <a:p>
+            <a:r>
+              <a:rPr sz="1200" b="1" i="0">
+                <a:solidFill>
+                  <a:srgbClr val="269CCB"/>
+                </a:solidFill>
+                <a:latin typeface="Calibri"/>
+              </a:rPr>
+              <a:t>Info</a:t>
+            </a:r>
+          </a:p>
+          <a:p>
+            <a:pPr>
+              <a:spcBef>
+                <a:spcPts val="400"/>
+              </a:spcBef>
+            </a:pPr>
+            <a:r>
+              <a:rPr sz="1400" b="0" i="0">
+                <a:solidFill>
+                  <a:srgbClr val="333333"/>
+                </a:solidFill>
+                <a:latin typeface="Calibri"/>
+              </a:rPr>
+              <a:t>Hito: El paquete de diseño de VetCare queda auditado y consistente: requisitos, casos de uso y diagrama de clases usan los mismos nombres y no se contradicen entre si.</a:t>
+            </a:r>
+          </a:p>
+        </p:txBody>
+      </p:sp>
+      <p:sp>
+        <p:nvSpPr>
+          <p:cNvPr id="8" name="Rounded Rectangle 7"/>
+          <p:cNvSpPr/>
+          <p:nvPr/>
+        </p:nvSpPr>
+        <p:spPr>
+          <a:xfrm>
+            <a:off x="457200" y="2478024"/>
+            <a:ext cx="11277295" cy="1051560"/>
+          </a:xfrm>
+          <a:prstGeom prst="roundRect">
+            <a:avLst>
+              <a:gd name="adj" fmla="val 12000"/>
+            </a:avLst>
+          </a:prstGeom>
+          <a:solidFill>
+            <a:srgbClr val="FFF8E1"/>
+          </a:solidFill>
+          <a:ln>
+            <a:noFill/>
+          </a:ln>
+        </p:spPr>
+        <p:style>
+          <a:lnRef idx="1">
+            <a:schemeClr val="accent1"/>
+          </a:lnRef>
+          <a:fillRef idx="3">
+            <a:schemeClr val="accent1"/>
+          </a:fillRef>
+          <a:effectRef idx="2">
+            <a:schemeClr val="accent1"/>
+          </a:effectRef>
+          <a:fontRef idx="minor">
+            <a:schemeClr val="lt1"/>
+          </a:fontRef>
+        </p:style>
+        <p:txBody>
+          <a:bodyPr rtlCol="0" anchor="ctr"/>
+          <a:lstStyle/>
+          <a:p>
+            <a:pPr algn="ctr"/>
+          </a:p>
+        </p:txBody>
+      </p:sp>
+      <p:sp>
+        <p:nvSpPr>
+          <p:cNvPr id="9" name="Rectangle 8"/>
+          <p:cNvSpPr/>
+          <p:nvPr/>
+        </p:nvSpPr>
+        <p:spPr>
+          <a:xfrm>
+            <a:off x="457200" y="2478024"/>
+            <a:ext cx="128016" cy="1051560"/>
+          </a:xfrm>
+          <a:prstGeom prst="rect">
+            <a:avLst/>
+          </a:prstGeom>
+          <a:solidFill>
+            <a:srgbClr val="FFD000"/>
+          </a:solidFill>
+          <a:ln>
+            <a:noFill/>
+          </a:ln>
+        </p:spPr>
+        <p:style>
+          <a:lnRef idx="1">
+            <a:schemeClr val="accent1"/>
+          </a:lnRef>
+          <a:fillRef idx="3">
+            <a:schemeClr val="accent1"/>
+          </a:fillRef>
+          <a:effectRef idx="2">
+            <a:schemeClr val="accent1"/>
+          </a:effectRef>
+          <a:fontRef idx="minor">
+            <a:schemeClr val="lt1"/>
+          </a:fontRef>
+        </p:style>
+        <p:txBody>
+          <a:bodyPr rtlCol="0" anchor="ctr"/>
+          <a:lstStyle/>
+          <a:p>
+            <a:pPr algn="ctr"/>
+          </a:p>
+        </p:txBody>
+      </p:sp>
+      <p:sp>
+        <p:nvSpPr>
+          <p:cNvPr id="10" name="TextBox 9"/>
+          <p:cNvSpPr txBox="1"/>
+          <p:nvPr/>
+        </p:nvSpPr>
+        <p:spPr>
+          <a:xfrm>
+            <a:off x="777240" y="2615184"/>
+            <a:ext cx="10774375" cy="822959"/>
+          </a:xfrm>
+          <a:prstGeom prst="rect">
+            <a:avLst/>
+          </a:prstGeom>
+          <a:noFill/>
+        </p:spPr>
+        <p:txBody>
+          <a:bodyPr wrap="square">
+            <a:spAutoFit/>
+          </a:bodyPr>
+          <a:lstStyle/>
+          <a:p>
+            <a:r>
+              <a:rPr sz="1200" b="1" i="0">
+                <a:solidFill>
+                  <a:srgbClr val="FFD000"/>
+                </a:solidFill>
+                <a:latin typeface="Calibri"/>
+              </a:rPr>
+              <a:t>Aclaración</a:t>
+            </a:r>
+          </a:p>
+          <a:p>
+            <a:pPr>
+              <a:spcBef>
+                <a:spcPts val="400"/>
+              </a:spcBef>
+            </a:pPr>
+            <a:r>
+              <a:rPr sz="1400" b="0" i="0">
+                <a:solidFill>
+                  <a:srgbClr val="333333"/>
+                </a:solidFill>
+                <a:latin typeface="Calibri"/>
+              </a:rPr>
+              <a:t>Enunciado completo: Clases/Proyecto Integrador/ (VetCare).</a:t>
+            </a:r>
+          </a:p>
+        </p:txBody>
+      </p:sp>
+      <p:sp>
+        <p:nvSpPr>
+          <p:cNvPr id="11" name="Rounded Rectangle 10"/>
+          <p:cNvSpPr/>
+          <p:nvPr/>
+        </p:nvSpPr>
+        <p:spPr>
+          <a:xfrm>
+            <a:off x="457200" y="3694176"/>
+            <a:ext cx="11277295" cy="1051560"/>
+          </a:xfrm>
+          <a:prstGeom prst="roundRect">
+            <a:avLst>
+              <a:gd name="adj" fmla="val 12000"/>
+            </a:avLst>
+          </a:prstGeom>
+          <a:solidFill>
+            <a:srgbClr val="FBE4E4"/>
+          </a:solidFill>
+          <a:ln>
+            <a:noFill/>
+          </a:ln>
+        </p:spPr>
+        <p:style>
+          <a:lnRef idx="1">
+            <a:schemeClr val="accent1"/>
+          </a:lnRef>
+          <a:fillRef idx="3">
+            <a:schemeClr val="accent1"/>
+          </a:fillRef>
+          <a:effectRef idx="2">
+            <a:schemeClr val="accent1"/>
+          </a:effectRef>
+          <a:fontRef idx="minor">
+            <a:schemeClr val="lt1"/>
+          </a:fontRef>
+        </p:style>
+        <p:txBody>
+          <a:bodyPr rtlCol="0" anchor="ctr"/>
+          <a:lstStyle/>
+          <a:p>
+            <a:pPr algn="ctr"/>
+          </a:p>
+        </p:txBody>
+      </p:sp>
+      <p:sp>
+        <p:nvSpPr>
+          <p:cNvPr id="12" name="Rectangle 11"/>
+          <p:cNvSpPr/>
+          <p:nvPr/>
+        </p:nvSpPr>
+        <p:spPr>
+          <a:xfrm>
+            <a:off x="457200" y="3694176"/>
+            <a:ext cx="128016" cy="1051560"/>
+          </a:xfrm>
+          <a:prstGeom prst="rect">
+            <a:avLst/>
+          </a:prstGeom>
+          <a:solidFill>
+            <a:srgbClr val="A02030"/>
+          </a:solidFill>
+          <a:ln>
+            <a:noFill/>
+          </a:ln>
+        </p:spPr>
+        <p:style>
+          <a:lnRef idx="1">
+            <a:schemeClr val="accent1"/>
+          </a:lnRef>
+          <a:fillRef idx="3">
+            <a:schemeClr val="accent1"/>
+          </a:fillRef>
+          <a:effectRef idx="2">
+            <a:schemeClr val="accent1"/>
+          </a:effectRef>
+          <a:fontRef idx="minor">
+            <a:schemeClr val="lt1"/>
+          </a:fontRef>
+        </p:style>
+        <p:txBody>
+          <a:bodyPr rtlCol="0" anchor="ctr"/>
+          <a:lstStyle/>
+          <a:p>
+            <a:pPr algn="ctr"/>
+          </a:p>
+        </p:txBody>
+      </p:sp>
+      <p:sp>
+        <p:nvSpPr>
+          <p:cNvPr id="13" name="TextBox 12"/>
+          <p:cNvSpPr txBox="1"/>
+          <p:nvPr/>
+        </p:nvSpPr>
+        <p:spPr>
+          <a:xfrm>
+            <a:off x="777240" y="3831336"/>
+            <a:ext cx="10774375" cy="822959"/>
+          </a:xfrm>
+          <a:prstGeom prst="rect">
+            <a:avLst/>
+          </a:prstGeom>
+          <a:noFill/>
+        </p:spPr>
+        <p:txBody>
+          <a:bodyPr wrap="square">
+            <a:spAutoFit/>
+          </a:bodyPr>
+          <a:lstStyle/>
+          <a:p>
+            <a:r>
+              <a:rPr sz="1200" b="1" i="0">
+                <a:solidFill>
+                  <a:srgbClr val="A02030"/>
+                </a:solidFill>
+                <a:latin typeface="Calibri"/>
+              </a:rPr>
+              <a:t>Atención</a:t>
+            </a:r>
+          </a:p>
+          <a:p>
+            <a:pPr>
+              <a:spcBef>
+                <a:spcPts val="400"/>
+              </a:spcBef>
+            </a:pPr>
+            <a:r>
+              <a:rPr sz="1400" b="0" i="0">
+                <a:solidFill>
+                  <a:srgbClr val="333333"/>
+                </a:solidFill>
+                <a:latin typeface="Calibri"/>
+              </a:rPr>
+              <a:t>Entrega del taller, si el docente lo asigna · en la fecha que indique el docente.</a:t>
+            </a:r>
+          </a:p>
+        </p:txBody>
+      </p:sp>
+      <p:sp>
+        <p:nvSpPr>
+          <p:cNvPr id="14" name="TextBox 13"/>
+          <p:cNvSpPr txBox="1"/>
+          <p:nvPr/>
+        </p:nvSpPr>
+        <p:spPr>
+          <a:xfrm>
+            <a:off x="11185855" y="6473952"/>
+            <a:ext cx="640080" cy="274320"/>
+          </a:xfrm>
+          <a:prstGeom prst="rect">
+            <a:avLst/>
+          </a:prstGeom>
+          <a:noFill/>
+        </p:spPr>
+        <p:txBody>
+          <a:bodyPr wrap="square">
+            <a:spAutoFit/>
+          </a:bodyPr>
+          <a:lstStyle/>
+          <a:p>
+            <a:pPr algn="r"/>
+            <a:r>
+              <a:rPr sz="1100" b="0" i="0">
+                <a:solidFill>
+                  <a:srgbClr val="666666"/>
+                </a:solidFill>
+                <a:latin typeface="Calibri"/>
+              </a:rPr>
+              <a:t>22</a:t>
+            </a:r>
+          </a:p>
+        </p:txBody>
+      </p:sp>
+    </p:spTree>
+  </p:cSld>
+  <p:clrMapOvr>
+    <a:masterClrMapping/>
+  </p:clrMapOvr>
+</p:sld>
+</file>
+
+<file path=ppt/slides/slide23.xml><?xml version="1.0" encoding="utf-8"?>
 <p:sld xmlns:a="http://schemas.openxmlformats.org/drawingml/2006/main" xmlns:p="http://schemas.openxmlformats.org/presentationml/2006/main" xmlns:r="http://schemas.openxmlformats.org/officeDocument/2006/relationships">
   <p:cSld>
     <p:bg>

--- a/Seminario de Sistemas/Clases/Clase 11 - Avance del proyecto integrador/Presentacion.pptx
+++ b/Seminario de Sistemas/Clases/Clase 11 - Avance del proyecto integrador/Presentacion.pptx
@@ -9,25 +9,18 @@
     <p:sldId id="257" r:id="rId8"/>
     <p:sldId id="258" r:id="rId9"/>
     <p:sldId id="259" r:id="rId10"/>
-    <p:sldId id="260" r:id="rId11"/>
-    <p:sldId id="261" r:id="rId12"/>
-    <p:sldId id="262" r:id="rId13"/>
-    <p:sldId id="263" r:id="rId14"/>
-    <p:sldId id="264" r:id="rId15"/>
-    <p:sldId id="265" r:id="rId16"/>
-    <p:sldId id="266" r:id="rId17"/>
-    <p:sldId id="267" r:id="rId18"/>
-    <p:sldId id="268" r:id="rId19"/>
-    <p:sldId id="269" r:id="rId20"/>
-    <p:sldId id="270" r:id="rId21"/>
-    <p:sldId id="271" r:id="rId22"/>
-    <p:sldId id="272" r:id="rId23"/>
-    <p:sldId id="273" r:id="rId24"/>
-    <p:sldId id="274" r:id="rId25"/>
-    <p:sldId id="275" r:id="rId26"/>
-    <p:sldId id="276" r:id="rId27"/>
-    <p:sldId id="277" r:id="rId28"/>
-    <p:sldId id="278" r:id="rId29"/>
+    <p:sldId id="260" r:id="rId12"/>
+    <p:sldId id="261" r:id="rId13"/>
+    <p:sldId id="262" r:id="rId14"/>
+    <p:sldId id="263" r:id="rId15"/>
+    <p:sldId id="264" r:id="rId16"/>
+    <p:sldId id="265" r:id="rId17"/>
+    <p:sldId id="266" r:id="rId18"/>
+    <p:sldId id="267" r:id="rId19"/>
+    <p:sldId id="268" r:id="rId20"/>
+    <p:sldId id="269" r:id="rId21"/>
+    <p:sldId id="270" r:id="rId22"/>
+    <p:sldId id="271" r:id="rId23"/>
   </p:sldIdLst>
   <p:sldSz cx="12191695" cy="6858000" type="screen4x3"/>
   <p:notesSz cx="6858000" cy="9144000"/>
@@ -127,6 +120,648 @@
     </a:lvl9pPr>
   </p:defaultTextStyle>
 </p:presentation>
+</file>
+
+<file path=ppt/notesMasters/notesMaster1.xml><?xml version="1.0" encoding="utf-8"?>
+<p:notesMaster xmlns:a="http://schemas.openxmlformats.org/drawingml/2006/main" xmlns:p="http://schemas.openxmlformats.org/presentationml/2006/main" xmlns:r="http://schemas.openxmlformats.org/officeDocument/2006/relationships">
+  <p:cSld>
+    <p:bg>
+      <p:bgRef idx="1001">
+        <a:schemeClr val="bg1"/>
+      </p:bgRef>
+    </p:bg>
+    <p:spTree>
+      <p:nvGrpSpPr>
+        <p:cNvPr id="1" name=""/>
+        <p:cNvGrpSpPr/>
+        <p:nvPr/>
+      </p:nvGrpSpPr>
+      <p:grpSpPr>
+        <a:xfrm>
+          <a:off x="0" y="0"/>
+          <a:ext cx="0" cy="0"/>
+          <a:chOff x="0" y="0"/>
+          <a:chExt cx="0" cy="0"/>
+        </a:xfrm>
+      </p:grpSpPr>
+      <p:sp>
+        <p:nvSpPr>
+          <p:cNvPr id="2" name="Header Placeholder 1"/>
+          <p:cNvSpPr>
+            <a:spLocks noGrp="1"/>
+          </p:cNvSpPr>
+          <p:nvPr>
+            <p:ph type="hdr" sz="quarter"/>
+          </p:nvPr>
+        </p:nvSpPr>
+        <p:spPr>
+          <a:xfrm>
+            <a:off x="0" y="0"/>
+            <a:ext cx="2971800" cy="457200"/>
+          </a:xfrm>
+          <a:prstGeom prst="rect">
+            <a:avLst/>
+          </a:prstGeom>
+        </p:spPr>
+        <p:txBody>
+          <a:bodyPr vert="horz" lIns="91440" tIns="45720" rIns="91440" bIns="45720" rtlCol="0"/>
+          <a:lstStyle>
+            <a:lvl1pPr algn="l">
+              <a:defRPr sz="1200"/>
+            </a:lvl1pPr>
+          </a:lstStyle>
+          <a:p>
+            <a:endParaRPr lang="en-US"/>
+          </a:p>
+        </p:txBody>
+      </p:sp>
+      <p:sp>
+        <p:nvSpPr>
+          <p:cNvPr id="3" name="Date Placeholder 2"/>
+          <p:cNvSpPr>
+            <a:spLocks noGrp="1"/>
+          </p:cNvSpPr>
+          <p:nvPr>
+            <p:ph type="dt" idx="1"/>
+          </p:nvPr>
+        </p:nvSpPr>
+        <p:spPr>
+          <a:xfrm>
+            <a:off x="3884613" y="0"/>
+            <a:ext cx="2971800" cy="457200"/>
+          </a:xfrm>
+          <a:prstGeom prst="rect">
+            <a:avLst/>
+          </a:prstGeom>
+        </p:spPr>
+        <p:txBody>
+          <a:bodyPr vert="horz" lIns="91440" tIns="45720" rIns="91440" bIns="45720" rtlCol="0"/>
+          <a:lstStyle>
+            <a:lvl1pPr algn="r">
+              <a:defRPr sz="1200"/>
+            </a:lvl1pPr>
+          </a:lstStyle>
+          <a:p>
+            <a:fld id="{0F89C1C7-3DCD-1040-A9CF-14679D8B5DDD}" type="datetimeFigureOut">
+              <a:rPr lang="en-US" smtClean="0"/>
+              <a:t>10/17/16</a:t>
+            </a:fld>
+            <a:endParaRPr lang="en-US"/>
+          </a:p>
+        </p:txBody>
+      </p:sp>
+      <p:sp>
+        <p:nvSpPr>
+          <p:cNvPr id="4" name="Slide Image Placeholder 3"/>
+          <p:cNvSpPr>
+            <a:spLocks noGrp="1" noRot="1" noChangeAspect="1"/>
+          </p:cNvSpPr>
+          <p:nvPr>
+            <p:ph type="sldImg" idx="2"/>
+          </p:nvPr>
+        </p:nvSpPr>
+        <p:spPr>
+          <a:xfrm>
+            <a:off x="1143000" y="685800"/>
+            <a:ext cx="4572000" cy="3429000"/>
+          </a:xfrm>
+          <a:prstGeom prst="rect">
+            <a:avLst/>
+          </a:prstGeom>
+          <a:noFill/>
+          <a:ln w="12700">
+            <a:solidFill>
+              <a:prstClr val="black"/>
+            </a:solidFill>
+          </a:ln>
+        </p:spPr>
+        <p:txBody>
+          <a:bodyPr vert="horz" lIns="91440" tIns="45720" rIns="91440" bIns="45720" rtlCol="0" anchor="ctr"/>
+          <a:lstStyle/>
+          <a:p>
+            <a:endParaRPr lang="en-US"/>
+          </a:p>
+        </p:txBody>
+      </p:sp>
+      <p:sp>
+        <p:nvSpPr>
+          <p:cNvPr id="5" name="Notes Placeholder 4"/>
+          <p:cNvSpPr>
+            <a:spLocks noGrp="1"/>
+          </p:cNvSpPr>
+          <p:nvPr>
+            <p:ph type="body" sz="quarter" idx="3"/>
+          </p:nvPr>
+        </p:nvSpPr>
+        <p:spPr>
+          <a:xfrm>
+            <a:off x="685800" y="4343400"/>
+            <a:ext cx="5486400" cy="4114800"/>
+          </a:xfrm>
+          <a:prstGeom prst="rect">
+            <a:avLst/>
+          </a:prstGeom>
+        </p:spPr>
+        <p:txBody>
+          <a:bodyPr vert="horz" lIns="91440" tIns="45720" rIns="91440" bIns="45720" rtlCol="0"/>
+          <a:lstStyle/>
+          <a:p>
+            <a:pPr lvl="0"/>
+            <a:r>
+              <a:rPr lang="en-US" smtClean="0"/>
+              <a:t>Click to edit Master text styles</a:t>
+            </a:r>
+          </a:p>
+          <a:p>
+            <a:pPr lvl="1"/>
+            <a:r>
+              <a:rPr lang="en-US" smtClean="0"/>
+              <a:t>Second level</a:t>
+            </a:r>
+          </a:p>
+          <a:p>
+            <a:pPr lvl="2"/>
+            <a:r>
+              <a:rPr lang="en-US" smtClean="0"/>
+              <a:t>Third level</a:t>
+            </a:r>
+          </a:p>
+          <a:p>
+            <a:pPr lvl="3"/>
+            <a:r>
+              <a:rPr lang="en-US" smtClean="0"/>
+              <a:t>Fourth level</a:t>
+            </a:r>
+          </a:p>
+          <a:p>
+            <a:pPr lvl="4"/>
+            <a:r>
+              <a:rPr lang="en-US" smtClean="0"/>
+              <a:t>Fifth level</a:t>
+            </a:r>
+            <a:endParaRPr lang="en-US"/>
+          </a:p>
+        </p:txBody>
+      </p:sp>
+      <p:sp>
+        <p:nvSpPr>
+          <p:cNvPr id="6" name="Footer Placeholder 5"/>
+          <p:cNvSpPr>
+            <a:spLocks noGrp="1"/>
+          </p:cNvSpPr>
+          <p:nvPr>
+            <p:ph type="ftr" sz="quarter" idx="4"/>
+          </p:nvPr>
+        </p:nvSpPr>
+        <p:spPr>
+          <a:xfrm>
+            <a:off x="0" y="8685213"/>
+            <a:ext cx="2971800" cy="457200"/>
+          </a:xfrm>
+          <a:prstGeom prst="rect">
+            <a:avLst/>
+          </a:prstGeom>
+        </p:spPr>
+        <p:txBody>
+          <a:bodyPr vert="horz" lIns="91440" tIns="45720" rIns="91440" bIns="45720" rtlCol="0" anchor="b"/>
+          <a:lstStyle>
+            <a:lvl1pPr algn="l">
+              <a:defRPr sz="1200"/>
+            </a:lvl1pPr>
+          </a:lstStyle>
+          <a:p>
+            <a:endParaRPr lang="en-US"/>
+          </a:p>
+        </p:txBody>
+      </p:sp>
+      <p:sp>
+        <p:nvSpPr>
+          <p:cNvPr id="7" name="Slide Number Placeholder 6"/>
+          <p:cNvSpPr>
+            <a:spLocks noGrp="1"/>
+          </p:cNvSpPr>
+          <p:nvPr>
+            <p:ph type="sldNum" sz="quarter" idx="5"/>
+          </p:nvPr>
+        </p:nvSpPr>
+        <p:spPr>
+          <a:xfrm>
+            <a:off x="3884613" y="8685213"/>
+            <a:ext cx="2971800" cy="457200"/>
+          </a:xfrm>
+          <a:prstGeom prst="rect">
+            <a:avLst/>
+          </a:prstGeom>
+        </p:spPr>
+        <p:txBody>
+          <a:bodyPr vert="horz" lIns="91440" tIns="45720" rIns="91440" bIns="45720" rtlCol="0" anchor="b"/>
+          <a:lstStyle>
+            <a:lvl1pPr algn="r">
+              <a:defRPr sz="1200"/>
+            </a:lvl1pPr>
+          </a:lstStyle>
+          <a:p>
+            <a:fld id="{BB5E49A5-4136-284D-997B-48E1D791AD67}" type="slidenum">
+              <a:rPr lang="en-US" smtClean="0"/>
+              <a:t>‹#›</a:t>
+            </a:fld>
+            <a:endParaRPr lang="en-US"/>
+          </a:p>
+        </p:txBody>
+      </p:sp>
+    </p:spTree>
+    <p:extLst>
+      <p:ext uri="{BB962C8B-B14F-4D97-AF65-F5344CB8AC3E}">
+        <p14:creationId xmlns:p14="http://schemas.microsoft.com/office/powerpoint/2010/main" val="2623252185"/>
+      </p:ext>
+    </p:extLst>
+  </p:cSld>
+  <p:clrMap bg1="lt1" tx1="dk1" bg2="lt2" tx2="dk2" accent1="accent1" accent2="accent2" accent3="accent3" accent4="accent4" accent5="accent5" accent6="accent6" hlink="hlink" folHlink="folHlink"/>
+  <p:notesStyle>
+    <a:lvl1pPr marL="0" algn="l" defTabSz="457200" rtl="0" eaLnBrk="1" latinLnBrk="0" hangingPunct="1">
+      <a:defRPr sz="1200" kern="1200">
+        <a:solidFill>
+          <a:schemeClr val="tx1"/>
+        </a:solidFill>
+        <a:latin typeface="+mn-lt"/>
+        <a:ea typeface="+mn-ea"/>
+        <a:cs typeface="+mn-cs"/>
+      </a:defRPr>
+    </a:lvl1pPr>
+    <a:lvl2pPr marL="457200" algn="l" defTabSz="457200" rtl="0" eaLnBrk="1" latinLnBrk="0" hangingPunct="1">
+      <a:defRPr sz="1200" kern="1200">
+        <a:solidFill>
+          <a:schemeClr val="tx1"/>
+        </a:solidFill>
+        <a:latin typeface="+mn-lt"/>
+        <a:ea typeface="+mn-ea"/>
+        <a:cs typeface="+mn-cs"/>
+      </a:defRPr>
+    </a:lvl2pPr>
+    <a:lvl3pPr marL="914400" algn="l" defTabSz="457200" rtl="0" eaLnBrk="1" latinLnBrk="0" hangingPunct="1">
+      <a:defRPr sz="1200" kern="1200">
+        <a:solidFill>
+          <a:schemeClr val="tx1"/>
+        </a:solidFill>
+        <a:latin typeface="+mn-lt"/>
+        <a:ea typeface="+mn-ea"/>
+        <a:cs typeface="+mn-cs"/>
+      </a:defRPr>
+    </a:lvl3pPr>
+    <a:lvl4pPr marL="1371600" algn="l" defTabSz="457200" rtl="0" eaLnBrk="1" latinLnBrk="0" hangingPunct="1">
+      <a:defRPr sz="1200" kern="1200">
+        <a:solidFill>
+          <a:schemeClr val="tx1"/>
+        </a:solidFill>
+        <a:latin typeface="+mn-lt"/>
+        <a:ea typeface="+mn-ea"/>
+        <a:cs typeface="+mn-cs"/>
+      </a:defRPr>
+    </a:lvl4pPr>
+    <a:lvl5pPr marL="1828800" algn="l" defTabSz="457200" rtl="0" eaLnBrk="1" latinLnBrk="0" hangingPunct="1">
+      <a:defRPr sz="1200" kern="1200">
+        <a:solidFill>
+          <a:schemeClr val="tx1"/>
+        </a:solidFill>
+        <a:latin typeface="+mn-lt"/>
+        <a:ea typeface="+mn-ea"/>
+        <a:cs typeface="+mn-cs"/>
+      </a:defRPr>
+    </a:lvl5pPr>
+    <a:lvl6pPr marL="2286000" algn="l" defTabSz="457200" rtl="0" eaLnBrk="1" latinLnBrk="0" hangingPunct="1">
+      <a:defRPr sz="1200" kern="1200">
+        <a:solidFill>
+          <a:schemeClr val="tx1"/>
+        </a:solidFill>
+        <a:latin typeface="+mn-lt"/>
+        <a:ea typeface="+mn-ea"/>
+        <a:cs typeface="+mn-cs"/>
+      </a:defRPr>
+    </a:lvl6pPr>
+    <a:lvl7pPr marL="2743200" algn="l" defTabSz="457200" rtl="0" eaLnBrk="1" latinLnBrk="0" hangingPunct="1">
+      <a:defRPr sz="1200" kern="1200">
+        <a:solidFill>
+          <a:schemeClr val="tx1"/>
+        </a:solidFill>
+        <a:latin typeface="+mn-lt"/>
+        <a:ea typeface="+mn-ea"/>
+        <a:cs typeface="+mn-cs"/>
+      </a:defRPr>
+    </a:lvl7pPr>
+    <a:lvl8pPr marL="3200400" algn="l" defTabSz="457200" rtl="0" eaLnBrk="1" latinLnBrk="0" hangingPunct="1">
+      <a:defRPr sz="1200" kern="1200">
+        <a:solidFill>
+          <a:schemeClr val="tx1"/>
+        </a:solidFill>
+        <a:latin typeface="+mn-lt"/>
+        <a:ea typeface="+mn-ea"/>
+        <a:cs typeface="+mn-cs"/>
+      </a:defRPr>
+    </a:lvl8pPr>
+    <a:lvl9pPr marL="3657600" algn="l" defTabSz="457200" rtl="0" eaLnBrk="1" latinLnBrk="0" hangingPunct="1">
+      <a:defRPr sz="1200" kern="1200">
+        <a:solidFill>
+          <a:schemeClr val="tx1"/>
+        </a:solidFill>
+        <a:latin typeface="+mn-lt"/>
+        <a:ea typeface="+mn-ea"/>
+        <a:cs typeface="+mn-cs"/>
+      </a:defRPr>
+    </a:lvl9pPr>
+  </p:notesStyle>
+</p:notesMaster>
+</file>
+
+<file path=ppt/notesSlides/notesSlide1.xml><?xml version="1.0" encoding="utf-8"?>
+<p:notes xmlns:a="http://schemas.openxmlformats.org/drawingml/2006/main" xmlns:p="http://schemas.openxmlformats.org/presentationml/2006/main" xmlns:r="http://schemas.openxmlformats.org/officeDocument/2006/relationships">
+  <p:cSld>
+    <p:spTree>
+      <p:nvGrpSpPr>
+        <p:cNvPr id="1" name=""/>
+        <p:cNvGrpSpPr/>
+        <p:nvPr/>
+      </p:nvGrpSpPr>
+      <p:grpSpPr>
+        <a:xfrm>
+          <a:off x="0" y="0"/>
+          <a:ext cx="0" cy="0"/>
+          <a:chOff x="0" y="0"/>
+          <a:chExt cx="0" cy="0"/>
+        </a:xfrm>
+      </p:grpSpPr>
+      <p:sp>
+        <p:nvSpPr>
+          <p:cNvPr id="2" name="Slide Image Placeholder 1"/>
+          <p:cNvSpPr>
+            <a:spLocks noGrp="1"/>
+          </p:cNvSpPr>
+          <p:nvPr>
+            <p:ph type="sldImg" idx="2"/>
+          </p:nvPr>
+        </p:nvSpPr>
+        <p:spPr/>
+      </p:sp>
+      <p:sp>
+        <p:nvSpPr>
+          <p:cNvPr id="3" name="Notes Placeholder 2"/>
+          <p:cNvSpPr>
+            <a:spLocks noGrp="1"/>
+          </p:cNvSpPr>
+          <p:nvPr>
+            <p:ph type="body" idx="3" sz="quarter"/>
+          </p:nvPr>
+        </p:nvSpPr>
+        <p:spPr/>
+        <p:txBody>
+          <a:bodyPr/>
+          <a:lstStyle/>
+          <a:p>
+            <a:r>
+              <a:t>Asi es como en VetCare aparece un requisito RF-07 que promete recordatorio de cita por mensajeria, un diagrama de casos de uso donde no existe ningun caso de uso de recordatorio, y un diagrama de clases donde no hay nada parecido a una clase Notificacion.</a:t>
+            </a:r>
+          </a:p>
+          <a:p/>
+          <a:p>
+            <a:r>
+              <a:t>Un defecto de consistencia cuesta poco corregirlo hoy, en una hoja, y cuesta carisimo corregirlo cuando ya se construyo sobre el, porque para entonces hay pantallas, tablas y codigo apoyados en la contradiccion.</a:t>
+            </a:r>
+          </a:p>
+          <a:p/>
+          <a:p>
+            <a:r>
+              <a:t>Por eso esta sesion no agrega tema nuevo: agrega confianza en lo que ya existe, que es un trabajo de arquitecto tan legitimo como dibujar.</a:t>
+            </a:r>
+          </a:p>
+        </p:txBody>
+      </p:sp>
+      <p:sp>
+        <p:nvSpPr>
+          <p:cNvPr id="4" name="Slide Number Placeholder 3"/>
+          <p:cNvSpPr>
+            <a:spLocks noGrp="1"/>
+          </p:cNvSpPr>
+          <p:nvPr>
+            <p:ph type="sldNum" idx="5" sz="quarter"/>
+          </p:nvPr>
+        </p:nvSpPr>
+        <p:spPr/>
+      </p:sp>
+    </p:spTree>
+  </p:cSld>
+  <p:clrMapOvr>
+    <a:masterClrMapping/>
+  </p:clrMapOvr>
+</p:notes>
+</file>
+
+<file path=ppt/notesSlides/notesSlide2.xml><?xml version="1.0" encoding="utf-8"?>
+<p:notes xmlns:a="http://schemas.openxmlformats.org/drawingml/2006/main" xmlns:p="http://schemas.openxmlformats.org/presentationml/2006/main" xmlns:r="http://schemas.openxmlformats.org/officeDocument/2006/relationships">
+  <p:cSld>
+    <p:spTree>
+      <p:nvGrpSpPr>
+        <p:cNvPr id="1" name=""/>
+        <p:cNvGrpSpPr/>
+        <p:nvPr/>
+      </p:nvGrpSpPr>
+      <p:grpSpPr>
+        <a:xfrm>
+          <a:off x="0" y="0"/>
+          <a:ext cx="0" cy="0"/>
+          <a:chOff x="0" y="0"/>
+          <a:chExt cx="0" cy="0"/>
+        </a:xfrm>
+      </p:grpSpPr>
+      <p:sp>
+        <p:nvSpPr>
+          <p:cNvPr id="2" name="Slide Image Placeholder 1"/>
+          <p:cNvSpPr>
+            <a:spLocks noGrp="1"/>
+          </p:cNvSpPr>
+          <p:nvPr>
+            <p:ph type="sldImg" idx="2"/>
+          </p:nvPr>
+        </p:nvSpPr>
+        <p:spPr/>
+      </p:sp>
+      <p:sp>
+        <p:nvSpPr>
+          <p:cNvPr id="3" name="Notes Placeholder 2"/>
+          <p:cNvSpPr>
+            <a:spLocks noGrp="1"/>
+          </p:cNvSpPr>
+          <p:nvPr>
+            <p:ph type="body" idx="3" sz="quarter"/>
+          </p:nvPr>
+        </p:nvSpPr>
+        <p:spPr/>
+        <p:txBody>
+          <a:bodyPr/>
+          <a:lstStyle/>
+          <a:p>
+            <a:r>
+              <a:t>Un sistema se diseña bien cuando existe un solo nombre para cada concepto y todos lo usan, desde la entrevista con la clinica hasta el nombre de la clase.</a:t>
+            </a:r>
+          </a:p>
+        </p:txBody>
+      </p:sp>
+      <p:sp>
+        <p:nvSpPr>
+          <p:cNvPr id="4" name="Slide Number Placeholder 3"/>
+          <p:cNvSpPr>
+            <a:spLocks noGrp="1"/>
+          </p:cNvSpPr>
+          <p:nvPr>
+            <p:ph type="sldNum" idx="5" sz="quarter"/>
+          </p:nvPr>
+        </p:nvSpPr>
+        <p:spPr/>
+      </p:sp>
+    </p:spTree>
+  </p:cSld>
+  <p:clrMapOvr>
+    <a:masterClrMapping/>
+  </p:clrMapOvr>
+</p:notes>
+</file>
+
+<file path=ppt/notesSlides/notesSlide3.xml><?xml version="1.0" encoding="utf-8"?>
+<p:notes xmlns:a="http://schemas.openxmlformats.org/drawingml/2006/main" xmlns:p="http://schemas.openxmlformats.org/presentationml/2006/main" xmlns:r="http://schemas.openxmlformats.org/officeDocument/2006/relationships">
+  <p:cSld>
+    <p:spTree>
+      <p:nvGrpSpPr>
+        <p:cNvPr id="1" name=""/>
+        <p:cNvGrpSpPr/>
+        <p:nvPr/>
+      </p:nvGrpSpPr>
+      <p:grpSpPr>
+        <a:xfrm>
+          <a:off x="0" y="0"/>
+          <a:ext cx="0" cy="0"/>
+          <a:chOff x="0" y="0"/>
+          <a:chExt cx="0" cy="0"/>
+        </a:xfrm>
+      </p:grpSpPr>
+      <p:sp>
+        <p:nvSpPr>
+          <p:cNvPr id="2" name="Slide Image Placeholder 1"/>
+          <p:cNvSpPr>
+            <a:spLocks noGrp="1"/>
+          </p:cNvSpPr>
+          <p:nvPr>
+            <p:ph type="sldImg" idx="2"/>
+          </p:nvPr>
+        </p:nvSpPr>
+        <p:spPr/>
+      </p:sp>
+      <p:sp>
+        <p:nvSpPr>
+          <p:cNvPr id="3" name="Notes Placeholder 2"/>
+          <p:cNvSpPr>
+            <a:spLocks noGrp="1"/>
+          </p:cNvSpPr>
+          <p:nvPr>
+            <p:ph type="body" idx="3" sz="quarter"/>
+          </p:nvPr>
+        </p:nvSpPr>
+        <p:spPr/>
+        <p:txBody>
+          <a:bodyPr/>
+          <a:lstStyle/>
+          <a:p>
+            <a:r>
+              <a:t>Eso es util.</a:t>
+            </a:r>
+          </a:p>
+        </p:txBody>
+      </p:sp>
+      <p:sp>
+        <p:nvSpPr>
+          <p:cNvPr id="4" name="Slide Number Placeholder 3"/>
+          <p:cNvSpPr>
+            <a:spLocks noGrp="1"/>
+          </p:cNvSpPr>
+          <p:nvPr>
+            <p:ph type="sldNum" idx="5" sz="quarter"/>
+          </p:nvPr>
+        </p:nvSpPr>
+        <p:spPr/>
+      </p:sp>
+    </p:spTree>
+  </p:cSld>
+  <p:clrMapOvr>
+    <a:masterClrMapping/>
+  </p:clrMapOvr>
+</p:notes>
+</file>
+
+<file path=ppt/notesSlides/notesSlide4.xml><?xml version="1.0" encoding="utf-8"?>
+<p:notes xmlns:a="http://schemas.openxmlformats.org/drawingml/2006/main" xmlns:p="http://schemas.openxmlformats.org/presentationml/2006/main" xmlns:r="http://schemas.openxmlformats.org/officeDocument/2006/relationships">
+  <p:cSld>
+    <p:spTree>
+      <p:nvGrpSpPr>
+        <p:cNvPr id="1" name=""/>
+        <p:cNvGrpSpPr/>
+        <p:nvPr/>
+      </p:nvGrpSpPr>
+      <p:grpSpPr>
+        <a:xfrm>
+          <a:off x="0" y="0"/>
+          <a:ext cx="0" cy="0"/>
+          <a:chOff x="0" y="0"/>
+          <a:chExt cx="0" cy="0"/>
+        </a:xfrm>
+      </p:grpSpPr>
+      <p:sp>
+        <p:nvSpPr>
+          <p:cNvPr id="2" name="Slide Image Placeholder 1"/>
+          <p:cNvSpPr>
+            <a:spLocks noGrp="1"/>
+          </p:cNvSpPr>
+          <p:nvPr>
+            <p:ph type="sldImg" idx="2"/>
+          </p:nvPr>
+        </p:nvSpPr>
+        <p:spPr/>
+      </p:sp>
+      <p:sp>
+        <p:nvSpPr>
+          <p:cNvPr id="3" name="Notes Placeholder 2"/>
+          <p:cNvSpPr>
+            <a:spLocks noGrp="1"/>
+          </p:cNvSpPr>
+          <p:nvPr>
+            <p:ph type="body" idx="3" sz="quarter"/>
+          </p:nvPr>
+        </p:nvSpPr>
+        <p:spPr/>
+        <p:txBody>
+          <a:bodyPr/>
+          <a:lstStyle/>
+          <a:p>
+            <a:r>
+              <a:t>Todo lo que se encuentra se convierte en backlog de deuda de diseño, no en angustia.</a:t>
+            </a:r>
+          </a:p>
+        </p:txBody>
+      </p:sp>
+      <p:sp>
+        <p:nvSpPr>
+          <p:cNvPr id="4" name="Slide Number Placeholder 3"/>
+          <p:cNvSpPr>
+            <a:spLocks noGrp="1"/>
+          </p:cNvSpPr>
+          <p:nvPr>
+            <p:ph type="sldNum" idx="5" sz="quarter"/>
+          </p:nvPr>
+        </p:nvSpPr>
+        <p:spPr/>
+      </p:sp>
+    </p:spTree>
+  </p:cSld>
+  <p:clrMapOvr>
+    <a:masterClrMapping/>
+  </p:clrMapOvr>
+</p:notes>
 </file>
 
 <file path=ppt/slideLayouts/slideLayout1.xml><?xml version="1.0" encoding="utf-8"?>
@@ -5665,13 +6300,13 @@
         <p:spPr>
           <a:xfrm>
             <a:off x="0" y="0"/>
-            <a:ext cx="12191695" cy="1170432"/>
+            <a:ext cx="12191695" cy="164592"/>
           </a:xfrm>
           <a:prstGeom prst="rect">
             <a:avLst/>
           </a:prstGeom>
           <a:solidFill>
-            <a:srgbClr val="095292"/>
+            <a:srgbClr val="269CCB"/>
           </a:solidFill>
           <a:ln>
             <a:noFill/>
@@ -5699,251 +6334,9 @@
           </a:p>
         </p:txBody>
       </p:sp>
-      <p:sp>
-        <p:nvSpPr>
-          <p:cNvPr id="3" name="Rectangle 2"/>
-          <p:cNvSpPr/>
-          <p:nvPr/>
-        </p:nvSpPr>
-        <p:spPr>
-          <a:xfrm>
-            <a:off x="0" y="1170432"/>
-            <a:ext cx="12191695" cy="41148"/>
-          </a:xfrm>
-          <a:prstGeom prst="rect">
-            <a:avLst/>
-          </a:prstGeom>
-          <a:solidFill>
-            <a:srgbClr val="FFD000"/>
-          </a:solidFill>
-          <a:ln>
-            <a:noFill/>
-          </a:ln>
-        </p:spPr>
-        <p:style>
-          <a:lnRef idx="1">
-            <a:schemeClr val="accent1"/>
-          </a:lnRef>
-          <a:fillRef idx="3">
-            <a:schemeClr val="accent1"/>
-          </a:fillRef>
-          <a:effectRef idx="2">
-            <a:schemeClr val="accent1"/>
-          </a:effectRef>
-          <a:fontRef idx="minor">
-            <a:schemeClr val="lt1"/>
-          </a:fontRef>
-        </p:style>
-        <p:txBody>
-          <a:bodyPr rtlCol="0" anchor="ctr"/>
-          <a:lstStyle/>
-          <a:p>
-            <a:pPr algn="ctr"/>
-          </a:p>
-        </p:txBody>
-      </p:sp>
-      <p:sp>
-        <p:nvSpPr>
-          <p:cNvPr id="4" name="TextBox 3"/>
-          <p:cNvSpPr txBox="1"/>
-          <p:nvPr/>
-        </p:nvSpPr>
-        <p:spPr>
-          <a:xfrm>
-            <a:off x="457200" y="164592"/>
-            <a:ext cx="11277295" cy="384048"/>
-          </a:xfrm>
-          <a:prstGeom prst="rect">
-            <a:avLst/>
-          </a:prstGeom>
-          <a:noFill/>
-        </p:spPr>
-        <p:txBody>
-          <a:bodyPr wrap="square">
-            <a:spAutoFit/>
-          </a:bodyPr>
-          <a:lstStyle/>
-          <a:p>
-            <a:r>
-              <a:rPr sz="2600" b="1" i="0">
-                <a:solidFill>
-                  <a:srgbClr val="FFFFFF"/>
-                </a:solidFill>
-                <a:latin typeface="Calibri"/>
-              </a:rPr>
-              <a:t>Herramientas de hoy</a:t>
-            </a:r>
-          </a:p>
-        </p:txBody>
-      </p:sp>
-      <p:sp>
-        <p:nvSpPr>
-          <p:cNvPr id="5" name="TextBox 4"/>
-          <p:cNvSpPr txBox="1"/>
-          <p:nvPr/>
-        </p:nvSpPr>
-        <p:spPr>
-          <a:xfrm>
-            <a:off x="457200" y="566928"/>
-            <a:ext cx="11277295" cy="411480"/>
-          </a:xfrm>
-          <a:prstGeom prst="rect">
-            <a:avLst/>
-          </a:prstGeom>
-          <a:noFill/>
-        </p:spPr>
-        <p:txBody>
-          <a:bodyPr wrap="square">
-            <a:spAutoFit/>
-          </a:bodyPr>
-          <a:lstStyle/>
-          <a:p>
-            <a:r>
-              <a:rPr sz="1400" b="0" i="0">
-                <a:solidFill>
-                  <a:srgbClr val="B8D8EE"/>
-                </a:solidFill>
-                <a:latin typeface="Calibri"/>
-              </a:rPr>
-              <a:t>Gratis · funcionan en el navegador</a:t>
-            </a:r>
-          </a:p>
-        </p:txBody>
-      </p:sp>
-      <p:sp>
-        <p:nvSpPr>
-          <p:cNvPr id="6" name="Rounded Rectangle 5"/>
-          <p:cNvSpPr/>
-          <p:nvPr/>
-        </p:nvSpPr>
-        <p:spPr>
-          <a:xfrm>
-            <a:off x="457200" y="1591056"/>
-            <a:ext cx="3624986" cy="2331720"/>
-          </a:xfrm>
-          <a:prstGeom prst="roundRect">
-            <a:avLst>
-              <a:gd name="adj" fmla="val 12000"/>
-            </a:avLst>
-          </a:prstGeom>
-          <a:solidFill>
-            <a:srgbClr val="F2F2F2"/>
-          </a:solidFill>
-          <a:ln>
-            <a:noFill/>
-          </a:ln>
-        </p:spPr>
-        <p:style>
-          <a:lnRef idx="1">
-            <a:schemeClr val="accent1"/>
-          </a:lnRef>
-          <a:fillRef idx="3">
-            <a:schemeClr val="accent1"/>
-          </a:fillRef>
-          <a:effectRef idx="2">
-            <a:schemeClr val="accent1"/>
-          </a:effectRef>
-          <a:fontRef idx="minor">
-            <a:schemeClr val="lt1"/>
-          </a:fontRef>
-        </p:style>
-        <p:txBody>
-          <a:bodyPr rtlCol="0" anchor="ctr"/>
-          <a:lstStyle/>
-          <a:p>
-            <a:pPr algn="ctr"/>
-          </a:p>
-        </p:txBody>
-      </p:sp>
-      <p:sp>
-        <p:nvSpPr>
-          <p:cNvPr id="7" name="Rectangle 6"/>
-          <p:cNvSpPr/>
-          <p:nvPr/>
-        </p:nvSpPr>
-        <p:spPr>
-          <a:xfrm>
-            <a:off x="457200" y="1591056"/>
-            <a:ext cx="3624986" cy="64008"/>
-          </a:xfrm>
-          <a:prstGeom prst="rect">
-            <a:avLst/>
-          </a:prstGeom>
-          <a:solidFill>
-            <a:srgbClr val="095292"/>
-          </a:solidFill>
-          <a:ln>
-            <a:noFill/>
-          </a:ln>
-        </p:spPr>
-        <p:style>
-          <a:lnRef idx="1">
-            <a:schemeClr val="accent1"/>
-          </a:lnRef>
-          <a:fillRef idx="3">
-            <a:schemeClr val="accent1"/>
-          </a:fillRef>
-          <a:effectRef idx="2">
-            <a:schemeClr val="accent1"/>
-          </a:effectRef>
-          <a:fontRef idx="minor">
-            <a:schemeClr val="lt1"/>
-          </a:fontRef>
-        </p:style>
-        <p:txBody>
-          <a:bodyPr rtlCol="0" anchor="ctr"/>
-          <a:lstStyle/>
-          <a:p>
-            <a:pPr algn="ctr"/>
-          </a:p>
-        </p:txBody>
-      </p:sp>
-      <p:sp>
-        <p:nvSpPr>
-          <p:cNvPr id="8" name="Rectangle 7"/>
-          <p:cNvSpPr/>
-          <p:nvPr/>
-        </p:nvSpPr>
-        <p:spPr>
-          <a:xfrm>
-            <a:off x="457200" y="1655064"/>
-            <a:ext cx="3624986" cy="27432"/>
-          </a:xfrm>
-          <a:prstGeom prst="rect">
-            <a:avLst/>
-          </a:prstGeom>
-          <a:solidFill>
-            <a:srgbClr val="FFD000"/>
-          </a:solidFill>
-          <a:ln>
-            <a:noFill/>
-          </a:ln>
-        </p:spPr>
-        <p:style>
-          <a:lnRef idx="1">
-            <a:schemeClr val="accent1"/>
-          </a:lnRef>
-          <a:fillRef idx="3">
-            <a:schemeClr val="accent1"/>
-          </a:fillRef>
-          <a:effectRef idx="2">
-            <a:schemeClr val="accent1"/>
-          </a:effectRef>
-          <a:fontRef idx="minor">
-            <a:schemeClr val="lt1"/>
-          </a:fontRef>
-        </p:style>
-        <p:txBody>
-          <a:bodyPr rtlCol="0" anchor="ctr"/>
-          <a:lstStyle/>
-          <a:p>
-            <a:pPr algn="ctr"/>
-          </a:p>
-        </p:txBody>
-      </p:sp>
       <p:pic>
         <p:nvPicPr>
-          <p:cNvPr id="9" name="Picture 8" descr="drawio.png"/>
+          <p:cNvPr id="3" name="Picture 2" descr="logo_uniajc_color.png"/>
           <p:cNvPicPr>
             <a:picLocks noChangeAspect="1"/>
           </p:cNvPicPr>
@@ -5957,8 +6350,8 @@
         </p:blipFill>
         <p:spPr>
           <a:xfrm>
-            <a:off x="1643329" y="1847087"/>
-            <a:ext cx="1252728" cy="1252728"/>
+            <a:off x="10271455" y="5998464"/>
+            <a:ext cx="1463040" cy="643233"/>
           </a:xfrm>
           <a:prstGeom prst="rect">
             <a:avLst/>
@@ -5967,14 +6360,14 @@
       </p:pic>
       <p:sp>
         <p:nvSpPr>
-          <p:cNvPr id="10" name="TextBox 9"/>
+          <p:cNvPr id="4" name="TextBox 3"/>
           <p:cNvSpPr txBox="1"/>
           <p:nvPr/>
         </p:nvSpPr>
         <p:spPr>
           <a:xfrm>
-            <a:off x="530352" y="3191256"/>
-            <a:ext cx="3478682" cy="621792"/>
+            <a:off x="457200" y="1737360"/>
+            <a:ext cx="11277295" cy="1097280"/>
           </a:xfrm>
           <a:prstGeom prst="rect">
             <a:avLst/>
@@ -5982,456 +6375,32 @@
           <a:noFill/>
         </p:spPr>
         <p:txBody>
-          <a:bodyPr wrap="square" anchor="t"/>
+          <a:bodyPr wrap="square" anchor="ctr"/>
           <a:lstStyle/>
           <a:p>
             <a:pPr algn="ctr"/>
             <a:r>
-              <a:rPr sz="1300" b="1" i="0">
+              <a:rPr sz="3400" b="1" i="0">
                 <a:solidFill>
                   <a:srgbClr val="095292"/>
                 </a:solidFill>
                 <a:latin typeface="Calibri"/>
               </a:rPr>
-              <a:t>Draw.Io</a:t>
-            </a:r>
-          </a:p>
-          <a:p>
-            <a:pPr algn="ctr">
-              <a:spcBef>
-                <a:spcPts val="200"/>
-              </a:spcBef>
-            </a:pPr>
-            <a:r>
-              <a:rPr sz="1000" b="0" i="0">
-                <a:solidFill>
-                  <a:srgbClr val="666666"/>
-                </a:solidFill>
-                <a:latin typeface="Calibri"/>
-              </a:rPr>
-              <a:t>Diagramas UML y de contexto</a:t>
-            </a:r>
-          </a:p>
-        </p:txBody>
-      </p:sp>
-      <p:sp>
-        <p:nvSpPr>
-          <p:cNvPr id="11" name="Rounded Rectangle 10"/>
-          <p:cNvSpPr/>
-          <p:nvPr/>
-        </p:nvSpPr>
-        <p:spPr>
-          <a:xfrm>
-            <a:off x="4283354" y="1591056"/>
-            <a:ext cx="3624986" cy="2331720"/>
-          </a:xfrm>
-          <a:prstGeom prst="roundRect">
-            <a:avLst>
-              <a:gd name="adj" fmla="val 12000"/>
-            </a:avLst>
-          </a:prstGeom>
-          <a:solidFill>
-            <a:srgbClr val="F2F2F2"/>
-          </a:solidFill>
-          <a:ln>
-            <a:noFill/>
-          </a:ln>
-        </p:spPr>
-        <p:style>
-          <a:lnRef idx="1">
-            <a:schemeClr val="accent1"/>
-          </a:lnRef>
-          <a:fillRef idx="3">
-            <a:schemeClr val="accent1"/>
-          </a:fillRef>
-          <a:effectRef idx="2">
-            <a:schemeClr val="accent1"/>
-          </a:effectRef>
-          <a:fontRef idx="minor">
-            <a:schemeClr val="lt1"/>
-          </a:fontRef>
-        </p:style>
-        <p:txBody>
-          <a:bodyPr rtlCol="0" anchor="ctr"/>
-          <a:lstStyle/>
-          <a:p>
-            <a:pPr algn="ctr"/>
-          </a:p>
-        </p:txBody>
-      </p:sp>
-      <p:sp>
-        <p:nvSpPr>
-          <p:cNvPr id="12" name="Rectangle 11"/>
-          <p:cNvSpPr/>
-          <p:nvPr/>
-        </p:nvSpPr>
-        <p:spPr>
-          <a:xfrm>
-            <a:off x="4283354" y="1591056"/>
-            <a:ext cx="3624986" cy="64008"/>
-          </a:xfrm>
-          <a:prstGeom prst="rect">
-            <a:avLst/>
-          </a:prstGeom>
-          <a:solidFill>
-            <a:srgbClr val="095292"/>
-          </a:solidFill>
-          <a:ln>
-            <a:noFill/>
-          </a:ln>
-        </p:spPr>
-        <p:style>
-          <a:lnRef idx="1">
-            <a:schemeClr val="accent1"/>
-          </a:lnRef>
-          <a:fillRef idx="3">
-            <a:schemeClr val="accent1"/>
-          </a:fillRef>
-          <a:effectRef idx="2">
-            <a:schemeClr val="accent1"/>
-          </a:effectRef>
-          <a:fontRef idx="minor">
-            <a:schemeClr val="lt1"/>
-          </a:fontRef>
-        </p:style>
-        <p:txBody>
-          <a:bodyPr rtlCol="0" anchor="ctr"/>
-          <a:lstStyle/>
-          <a:p>
-            <a:pPr algn="ctr"/>
-          </a:p>
-        </p:txBody>
-      </p:sp>
-      <p:sp>
-        <p:nvSpPr>
-          <p:cNvPr id="13" name="Rectangle 12"/>
-          <p:cNvSpPr/>
-          <p:nvPr/>
-        </p:nvSpPr>
-        <p:spPr>
-          <a:xfrm>
-            <a:off x="4283354" y="1655064"/>
-            <a:ext cx="3624986" cy="27432"/>
-          </a:xfrm>
-          <a:prstGeom prst="rect">
-            <a:avLst/>
-          </a:prstGeom>
-          <a:solidFill>
-            <a:srgbClr val="FFD000"/>
-          </a:solidFill>
-          <a:ln>
-            <a:noFill/>
-          </a:ln>
-        </p:spPr>
-        <p:style>
-          <a:lnRef idx="1">
-            <a:schemeClr val="accent1"/>
-          </a:lnRef>
-          <a:fillRef idx="3">
-            <a:schemeClr val="accent1"/>
-          </a:fillRef>
-          <a:effectRef idx="2">
-            <a:schemeClr val="accent1"/>
-          </a:effectRef>
-          <a:fontRef idx="minor">
-            <a:schemeClr val="lt1"/>
-          </a:fontRef>
-        </p:style>
-        <p:txBody>
-          <a:bodyPr rtlCol="0" anchor="ctr"/>
-          <a:lstStyle/>
-          <a:p>
-            <a:pPr algn="ctr"/>
-          </a:p>
-        </p:txBody>
-      </p:sp>
-      <p:pic>
-        <p:nvPicPr>
-          <p:cNvPr id="14" name="Picture 13" descr="google_docs.png"/>
-          <p:cNvPicPr>
-            <a:picLocks noChangeAspect="1"/>
-          </p:cNvPicPr>
-          <p:nvPr/>
-        </p:nvPicPr>
-        <p:blipFill>
-          <a:blip r:embed="rId3"/>
-          <a:stretch>
-            <a:fillRect/>
-          </a:stretch>
-        </p:blipFill>
-        <p:spPr>
-          <a:xfrm>
-            <a:off x="5469483" y="1847087"/>
-            <a:ext cx="1252728" cy="1252728"/>
-          </a:xfrm>
-          <a:prstGeom prst="rect">
-            <a:avLst/>
-          </a:prstGeom>
-        </p:spPr>
-      </p:pic>
-      <p:sp>
-        <p:nvSpPr>
-          <p:cNvPr id="15" name="TextBox 14"/>
+              <a:t>Clase 11 · Avance del proyecto integrador</a:t>
+            </a:r>
+          </a:p>
+        </p:txBody>
+      </p:sp>
+      <p:sp>
+        <p:nvSpPr>
+          <p:cNvPr id="5" name="TextBox 4"/>
           <p:cNvSpPr txBox="1"/>
           <p:nvPr/>
         </p:nvSpPr>
         <p:spPr>
           <a:xfrm>
-            <a:off x="4356506" y="3191256"/>
-            <a:ext cx="3478682" cy="621792"/>
-          </a:xfrm>
-          <a:prstGeom prst="rect">
-            <a:avLst/>
-          </a:prstGeom>
-          <a:noFill/>
-        </p:spPr>
-        <p:txBody>
-          <a:bodyPr wrap="square" anchor="t"/>
-          <a:lstStyle/>
-          <a:p>
-            <a:pPr algn="ctr"/>
-            <a:r>
-              <a:rPr sz="1300" b="1" i="0">
-                <a:solidFill>
-                  <a:srgbClr val="095292"/>
-                </a:solidFill>
-                <a:latin typeface="Calibri"/>
-              </a:rPr>
-              <a:t>google docs</a:t>
-            </a:r>
-          </a:p>
-          <a:p>
-            <a:pPr algn="ctr">
-              <a:spcBef>
-                <a:spcPts val="200"/>
-              </a:spcBef>
-            </a:pPr>
-            <a:r>
-              <a:rPr sz="1000" b="0" i="0">
-                <a:solidFill>
-                  <a:srgbClr val="666666"/>
-                </a:solidFill>
-                <a:latin typeface="Calibri"/>
-              </a:rPr>
-              <a:t>Documentos del paquete de diseño</a:t>
-            </a:r>
-          </a:p>
-        </p:txBody>
-      </p:sp>
-      <p:sp>
-        <p:nvSpPr>
-          <p:cNvPr id="16" name="Rounded Rectangle 15"/>
-          <p:cNvSpPr/>
-          <p:nvPr/>
-        </p:nvSpPr>
-        <p:spPr>
-          <a:xfrm>
-            <a:off x="8109508" y="1591056"/>
-            <a:ext cx="3624986" cy="2331720"/>
-          </a:xfrm>
-          <a:prstGeom prst="roundRect">
-            <a:avLst>
-              <a:gd name="adj" fmla="val 12000"/>
-            </a:avLst>
-          </a:prstGeom>
-          <a:solidFill>
-            <a:srgbClr val="F2F2F2"/>
-          </a:solidFill>
-          <a:ln>
-            <a:noFill/>
-          </a:ln>
-        </p:spPr>
-        <p:style>
-          <a:lnRef idx="1">
-            <a:schemeClr val="accent1"/>
-          </a:lnRef>
-          <a:fillRef idx="3">
-            <a:schemeClr val="accent1"/>
-          </a:fillRef>
-          <a:effectRef idx="2">
-            <a:schemeClr val="accent1"/>
-          </a:effectRef>
-          <a:fontRef idx="minor">
-            <a:schemeClr val="lt1"/>
-          </a:fontRef>
-        </p:style>
-        <p:txBody>
-          <a:bodyPr rtlCol="0" anchor="ctr"/>
-          <a:lstStyle/>
-          <a:p>
-            <a:pPr algn="ctr"/>
-          </a:p>
-        </p:txBody>
-      </p:sp>
-      <p:sp>
-        <p:nvSpPr>
-          <p:cNvPr id="17" name="Rectangle 16"/>
-          <p:cNvSpPr/>
-          <p:nvPr/>
-        </p:nvSpPr>
-        <p:spPr>
-          <a:xfrm>
-            <a:off x="8109508" y="1591056"/>
-            <a:ext cx="3624986" cy="64008"/>
-          </a:xfrm>
-          <a:prstGeom prst="rect">
-            <a:avLst/>
-          </a:prstGeom>
-          <a:solidFill>
-            <a:srgbClr val="095292"/>
-          </a:solidFill>
-          <a:ln>
-            <a:noFill/>
-          </a:ln>
-        </p:spPr>
-        <p:style>
-          <a:lnRef idx="1">
-            <a:schemeClr val="accent1"/>
-          </a:lnRef>
-          <a:fillRef idx="3">
-            <a:schemeClr val="accent1"/>
-          </a:fillRef>
-          <a:effectRef idx="2">
-            <a:schemeClr val="accent1"/>
-          </a:effectRef>
-          <a:fontRef idx="minor">
-            <a:schemeClr val="lt1"/>
-          </a:fontRef>
-        </p:style>
-        <p:txBody>
-          <a:bodyPr rtlCol="0" anchor="ctr"/>
-          <a:lstStyle/>
-          <a:p>
-            <a:pPr algn="ctr"/>
-          </a:p>
-        </p:txBody>
-      </p:sp>
-      <p:sp>
-        <p:nvSpPr>
-          <p:cNvPr id="18" name="Rectangle 17"/>
-          <p:cNvSpPr/>
-          <p:nvPr/>
-        </p:nvSpPr>
-        <p:spPr>
-          <a:xfrm>
-            <a:off x="8109508" y="1655064"/>
-            <a:ext cx="3624986" cy="27432"/>
-          </a:xfrm>
-          <a:prstGeom prst="rect">
-            <a:avLst/>
-          </a:prstGeom>
-          <a:solidFill>
-            <a:srgbClr val="FFD000"/>
-          </a:solidFill>
-          <a:ln>
-            <a:noFill/>
-          </a:ln>
-        </p:spPr>
-        <p:style>
-          <a:lnRef idx="1">
-            <a:schemeClr val="accent1"/>
-          </a:lnRef>
-          <a:fillRef idx="3">
-            <a:schemeClr val="accent1"/>
-          </a:fillRef>
-          <a:effectRef idx="2">
-            <a:schemeClr val="accent1"/>
-          </a:effectRef>
-          <a:fontRef idx="minor">
-            <a:schemeClr val="lt1"/>
-          </a:fontRef>
-        </p:style>
-        <p:txBody>
-          <a:bodyPr rtlCol="0" anchor="ctr"/>
-          <a:lstStyle/>
-          <a:p>
-            <a:pPr algn="ctr"/>
-          </a:p>
-        </p:txBody>
-      </p:sp>
-      <p:pic>
-        <p:nvPicPr>
-          <p:cNvPr id="19" name="Picture 18" descr="examlab.png"/>
-          <p:cNvPicPr>
-            <a:picLocks noChangeAspect="1"/>
-          </p:cNvPicPr>
-          <p:nvPr/>
-        </p:nvPicPr>
-        <p:blipFill>
-          <a:blip r:embed="rId4"/>
-          <a:stretch>
-            <a:fillRect/>
-          </a:stretch>
-        </p:blipFill>
-        <p:spPr>
-          <a:xfrm>
-            <a:off x="9295638" y="1847087"/>
-            <a:ext cx="1252728" cy="1252728"/>
-          </a:xfrm>
-          <a:prstGeom prst="rect">
-            <a:avLst/>
-          </a:prstGeom>
-        </p:spPr>
-      </p:pic>
-      <p:sp>
-        <p:nvSpPr>
-          <p:cNvPr id="20" name="TextBox 19"/>
-          <p:cNvSpPr txBox="1"/>
-          <p:nvPr/>
-        </p:nvSpPr>
-        <p:spPr>
-          <a:xfrm>
-            <a:off x="8182660" y="3191256"/>
-            <a:ext cx="3478682" cy="621792"/>
-          </a:xfrm>
-          <a:prstGeom prst="rect">
-            <a:avLst/>
-          </a:prstGeom>
-          <a:noFill/>
-        </p:spPr>
-        <p:txBody>
-          <a:bodyPr wrap="square" anchor="t"/>
-          <a:lstStyle/>
-          <a:p>
-            <a:pPr algn="ctr"/>
-            <a:r>
-              <a:rPr sz="1300" b="1" i="0">
-                <a:solidFill>
-                  <a:srgbClr val="095292"/>
-                </a:solidFill>
-                <a:latin typeface="Calibri"/>
-              </a:rPr>
-              <a:t>la plataforma del curso</a:t>
-            </a:r>
-          </a:p>
-          <a:p>
-            <a:pPr algn="ctr">
-              <a:spcBef>
-                <a:spcPts val="200"/>
-              </a:spcBef>
-            </a:pPr>
-            <a:r>
-              <a:rPr sz="1000" b="0" i="0">
-                <a:solidFill>
-                  <a:srgbClr val="666666"/>
-                </a:solidFill>
-                <a:latin typeface="Calibri"/>
-              </a:rPr>
-              <a:t>Entrega del taller · en la fecha que indique el docente</a:t>
-            </a:r>
-          </a:p>
-        </p:txBody>
-      </p:sp>
-      <p:sp>
-        <p:nvSpPr>
-          <p:cNvPr id="21" name="TextBox 20"/>
-          <p:cNvSpPr txBox="1"/>
-          <p:nvPr/>
-        </p:nvSpPr>
-        <p:spPr>
-          <a:xfrm>
-            <a:off x="11185855" y="6473952"/>
-            <a:ext cx="640080" cy="274320"/>
+            <a:off x="457200" y="3017520"/>
+            <a:ext cx="11277295" cy="1645920"/>
           </a:xfrm>
           <a:prstGeom prst="rect">
             <a:avLst/>
@@ -6444,141 +6413,65 @@
           </a:bodyPr>
           <a:lstStyle/>
           <a:p>
-            <a:pPr algn="r"/>
-            <a:r>
-              <a:rPr sz="1100" b="0" i="0">
-                <a:solidFill>
-                  <a:srgbClr val="666666"/>
-                </a:solidFill>
-                <a:latin typeface="Calibri"/>
-              </a:rPr>
-              <a:t>16</a:t>
-            </a:r>
-          </a:p>
-        </p:txBody>
-      </p:sp>
-    </p:spTree>
-  </p:cSld>
-  <p:clrMapOvr>
-    <a:masterClrMapping/>
-  </p:clrMapOvr>
-</p:sld>
-</file>
-
-<file path=ppt/slides/slide17.xml><?xml version="1.0" encoding="utf-8"?>
-<p:sld xmlns:a="http://schemas.openxmlformats.org/drawingml/2006/main" xmlns:p="http://schemas.openxmlformats.org/presentationml/2006/main" xmlns:r="http://schemas.openxmlformats.org/officeDocument/2006/relationships">
-  <p:cSld>
-    <p:bg>
-      <p:bgPr>
-        <a:solidFill>
-          <a:srgbClr val="FFFFFF"/>
-        </a:solidFill>
-        <a:effectLst/>
-      </p:bgPr>
-    </p:bg>
-    <p:spTree>
-      <p:nvGrpSpPr>
-        <p:cNvPr id="1" name=""/>
-        <p:cNvGrpSpPr/>
-        <p:nvPr/>
-      </p:nvGrpSpPr>
-      <p:grpSpPr/>
-      <p:sp>
-        <p:nvSpPr>
-          <p:cNvPr id="2" name="Rectangle 1"/>
-          <p:cNvSpPr/>
-          <p:nvPr/>
-        </p:nvSpPr>
-        <p:spPr>
-          <a:xfrm>
-            <a:off x="0" y="0"/>
-            <a:ext cx="12191695" cy="960120"/>
-          </a:xfrm>
-          <a:prstGeom prst="rect">
-            <a:avLst/>
-          </a:prstGeom>
-          <a:solidFill>
-            <a:srgbClr val="095292"/>
-          </a:solidFill>
-          <a:ln>
-            <a:noFill/>
-          </a:ln>
-        </p:spPr>
-        <p:style>
-          <a:lnRef idx="1">
-            <a:schemeClr val="accent1"/>
-          </a:lnRef>
-          <a:fillRef idx="3">
-            <a:schemeClr val="accent1"/>
-          </a:fillRef>
-          <a:effectRef idx="2">
-            <a:schemeClr val="accent1"/>
-          </a:effectRef>
-          <a:fontRef idx="minor">
-            <a:schemeClr val="lt1"/>
-          </a:fontRef>
-        </p:style>
-        <p:txBody>
-          <a:bodyPr rtlCol="0" anchor="ctr"/>
-          <a:lstStyle/>
-          <a:p>
-            <a:pPr algn="ctr"/>
-          </a:p>
-        </p:txBody>
-      </p:sp>
-      <p:sp>
-        <p:nvSpPr>
-          <p:cNvPr id="3" name="Rectangle 2"/>
-          <p:cNvSpPr/>
-          <p:nvPr/>
-        </p:nvSpPr>
-        <p:spPr>
-          <a:xfrm>
-            <a:off x="0" y="960120"/>
-            <a:ext cx="12191695" cy="41148"/>
-          </a:xfrm>
-          <a:prstGeom prst="rect">
-            <a:avLst/>
-          </a:prstGeom>
-          <a:solidFill>
-            <a:srgbClr val="FFD000"/>
-          </a:solidFill>
-          <a:ln>
-            <a:noFill/>
-          </a:ln>
-        </p:spPr>
-        <p:style>
-          <a:lnRef idx="1">
-            <a:schemeClr val="accent1"/>
-          </a:lnRef>
-          <a:fillRef idx="3">
-            <a:schemeClr val="accent1"/>
-          </a:fillRef>
-          <a:effectRef idx="2">
-            <a:schemeClr val="accent1"/>
-          </a:effectRef>
-          <a:fontRef idx="minor">
-            <a:schemeClr val="lt1"/>
-          </a:fontRef>
-        </p:style>
-        <p:txBody>
-          <a:bodyPr rtlCol="0" anchor="ctr"/>
-          <a:lstStyle/>
-          <a:p>
-            <a:pPr algn="ctr"/>
-          </a:p>
-        </p:txBody>
-      </p:sp>
-      <p:sp>
-        <p:nvSpPr>
-          <p:cNvPr id="4" name="TextBox 3"/>
+            <a:pPr algn="ctr">
+              <a:spcAft>
+                <a:spcPts val="600"/>
+              </a:spcAft>
+            </a:pPr>
+            <a:r>
+              <a:rPr sz="1600" b="0" i="0">
+                <a:solidFill>
+                  <a:srgbClr val="333333"/>
+                </a:solidFill>
+                <a:latin typeface="Calibri"/>
+              </a:rPr>
+              <a:t>Hoy no se agrega nada nuevo: se verifica que todos los documentos hablen del mismo sistema</a:t>
+            </a:r>
+          </a:p>
+          <a:p>
+            <a:pPr algn="ctr">
+              <a:spcAft>
+                <a:spcPts val="600"/>
+              </a:spcAft>
+            </a:pPr>
+            <a:r>
+              <a:rPr sz="1600" b="0" i="0">
+                <a:solidFill>
+                  <a:srgbClr val="333333"/>
+                </a:solidFill>
+                <a:latin typeface="Calibri"/>
+              </a:rPr>
+              <a:t>Repasen las laminas de teoria: cada concepto esta completo</a:t>
+            </a:r>
+          </a:p>
+          <a:p>
+            <a:pPr algn="ctr">
+              <a:spcAft>
+                <a:spcPts val="600"/>
+              </a:spcAft>
+            </a:pPr>
+            <a:r>
+              <a:rPr sz="1600" b="0" i="0">
+                <a:solidFill>
+                  <a:srgbClr val="333333"/>
+                </a:solidFill>
+                <a:latin typeface="Calibri"/>
+              </a:rPr>
+              <a:t>Siguiente clase: continuamos con el siguiente tema</a:t>
+            </a:r>
+          </a:p>
+        </p:txBody>
+      </p:sp>
+      <p:sp>
+        <p:nvSpPr>
+          <p:cNvPr id="6" name="TextBox 5"/>
           <p:cNvSpPr txBox="1"/>
           <p:nvPr/>
         </p:nvSpPr>
         <p:spPr>
           <a:xfrm>
-            <a:off x="457200" y="164592"/>
-            <a:ext cx="11277295" cy="502920"/>
+            <a:off x="457200" y="4754880"/>
+            <a:ext cx="11277295" cy="640080"/>
           </a:xfrm>
           <a:prstGeom prst="rect">
             <a:avLst/>
@@ -6591,1346 +6484,15 @@
           </a:bodyPr>
           <a:lstStyle/>
           <a:p>
-            <a:r>
-              <a:rPr sz="2600" b="1" i="0">
-                <a:solidFill>
-                  <a:srgbClr val="FFFFFF"/>
-                </a:solidFill>
-                <a:latin typeface="Calibri"/>
-              </a:rPr>
-              <a:t>Taller PI — por que importa</a:t>
-            </a:r>
-          </a:p>
-        </p:txBody>
-      </p:sp>
-      <p:sp>
-        <p:nvSpPr>
-          <p:cNvPr id="5" name="TextBox 4"/>
-          <p:cNvSpPr txBox="1"/>
-          <p:nvPr/>
-        </p:nvSpPr>
-        <p:spPr>
-          <a:xfrm>
-            <a:off x="457200" y="1170432"/>
-            <a:ext cx="11277295" cy="5230368"/>
-          </a:xfrm>
-          <a:prstGeom prst="rect">
-            <a:avLst/>
-          </a:prstGeom>
-          <a:noFill/>
-        </p:spPr>
-        <p:txBody>
-          <a:bodyPr wrap="square">
-            <a:spAutoFit/>
-          </a:bodyPr>
-          <a:lstStyle/>
-          <a:p>
-            <a:pPr>
-              <a:spcAft>
-                <a:spcPts val="800"/>
-              </a:spcAft>
-            </a:pPr>
-            <a:r>
-              <a:rPr sz="2000" b="0" i="0">
-                <a:solidFill>
-                  <a:srgbClr val="333333"/>
-                </a:solidFill>
-                <a:latin typeface="Calibri"/>
-              </a:rPr>
-              <a:t>–   </a:t>
-            </a:r>
+            <a:pPr algn="ctr"/>
             <a:r>
               <a:rPr sz="2000" b="1" i="0">
                 <a:solidFill>
-                  <a:srgbClr val="333333"/>
-                </a:solidFill>
-                <a:latin typeface="Calibri"/>
-              </a:rPr>
-              <a:t>Por que importa al PI:</a:t>
-            </a:r>
-            <a:r>
-              <a:rPr sz="2000" b="0" i="0">
-                <a:solidFill>
-                  <a:srgbClr val="333333"/>
-                </a:solidFill>
-                <a:latin typeface="Calibri"/>
-              </a:rPr>
-              <a:t> el paquete de VetCare ya tiene requisitos, casos de uso y clases, pero nadie ha verificado que los tres describan el mismo sistema; sin esa verificacion los planos se contradicen y quien construya va a escoger al azar cual documento obedecer.</a:t>
-            </a:r>
-          </a:p>
-          <a:p>
-            <a:pPr>
-              <a:spcAft>
-                <a:spcPts val="800"/>
-              </a:spcAft>
-            </a:pPr>
-            <a:r>
-              <a:rPr sz="2000" b="0" i="0">
-                <a:solidFill>
-                  <a:srgbClr val="333333"/>
-                </a:solidFill>
-                <a:latin typeface="Calibri"/>
-              </a:rPr>
-              <a:t>–   Esta sesion produce evidencia propia: matriz, glosario, acta de revision y backlog, y por eso se califica igual que cualquier otra entrega.</a:t>
-            </a:r>
-          </a:p>
-          <a:p>
-            <a:pPr>
-              <a:spcAft>
-                <a:spcPts val="800"/>
-              </a:spcAft>
-            </a:pPr>
-            <a:r>
-              <a:rPr sz="2000" b="0" i="0">
-                <a:solidFill>
-                  <a:srgbClr val="333333"/>
-                </a:solidFill>
-                <a:latin typeface="Calibri"/>
-              </a:rPr>
-              <a:t>–   Lo que hoy quede ambiguo lo paga el compañero que solo cursa Programacion II, que recibira estos planos sin poder preguntarle nada a la clinica Huellitas.</a:t>
-            </a:r>
-          </a:p>
-        </p:txBody>
-      </p:sp>
-      <p:sp>
-        <p:nvSpPr>
-          <p:cNvPr id="6" name="TextBox 5"/>
-          <p:cNvSpPr txBox="1"/>
-          <p:nvPr/>
-        </p:nvSpPr>
-        <p:spPr>
-          <a:xfrm>
-            <a:off x="11185855" y="6473952"/>
-            <a:ext cx="640080" cy="274320"/>
-          </a:xfrm>
-          <a:prstGeom prst="rect">
-            <a:avLst/>
-          </a:prstGeom>
-          <a:noFill/>
-        </p:spPr>
-        <p:txBody>
-          <a:bodyPr wrap="square">
-            <a:spAutoFit/>
-          </a:bodyPr>
-          <a:lstStyle/>
-          <a:p>
-            <a:pPr algn="r"/>
-            <a:r>
-              <a:rPr sz="1100" b="0" i="0">
-                <a:solidFill>
-                  <a:srgbClr val="666666"/>
-                </a:solidFill>
-                <a:latin typeface="Calibri"/>
-              </a:rPr>
-              <a:t>17</a:t>
-            </a:r>
-          </a:p>
-        </p:txBody>
-      </p:sp>
-    </p:spTree>
-  </p:cSld>
-  <p:clrMapOvr>
-    <a:masterClrMapping/>
-  </p:clrMapOvr>
-</p:sld>
-</file>
-
-<file path=ppt/slides/slide18.xml><?xml version="1.0" encoding="utf-8"?>
-<p:sld xmlns:a="http://schemas.openxmlformats.org/drawingml/2006/main" xmlns:p="http://schemas.openxmlformats.org/presentationml/2006/main" xmlns:r="http://schemas.openxmlformats.org/officeDocument/2006/relationships">
-  <p:cSld>
-    <p:bg>
-      <p:bgPr>
-        <a:solidFill>
-          <a:srgbClr val="FFFFFF"/>
-        </a:solidFill>
-        <a:effectLst/>
-      </p:bgPr>
-    </p:bg>
-    <p:spTree>
-      <p:nvGrpSpPr>
-        <p:cNvPr id="1" name=""/>
-        <p:cNvGrpSpPr/>
-        <p:nvPr/>
-      </p:nvGrpSpPr>
-      <p:grpSpPr/>
-      <p:sp>
-        <p:nvSpPr>
-          <p:cNvPr id="2" name="Rectangle 1"/>
-          <p:cNvSpPr/>
-          <p:nvPr/>
-        </p:nvSpPr>
-        <p:spPr>
-          <a:xfrm>
-            <a:off x="0" y="0"/>
-            <a:ext cx="12191695" cy="960120"/>
-          </a:xfrm>
-          <a:prstGeom prst="rect">
-            <a:avLst/>
-          </a:prstGeom>
-          <a:solidFill>
-            <a:srgbClr val="095292"/>
-          </a:solidFill>
-          <a:ln>
-            <a:noFill/>
-          </a:ln>
-        </p:spPr>
-        <p:style>
-          <a:lnRef idx="1">
-            <a:schemeClr val="accent1"/>
-          </a:lnRef>
-          <a:fillRef idx="3">
-            <a:schemeClr val="accent1"/>
-          </a:fillRef>
-          <a:effectRef idx="2">
-            <a:schemeClr val="accent1"/>
-          </a:effectRef>
-          <a:fontRef idx="minor">
-            <a:schemeClr val="lt1"/>
-          </a:fontRef>
-        </p:style>
-        <p:txBody>
-          <a:bodyPr rtlCol="0" anchor="ctr"/>
-          <a:lstStyle/>
-          <a:p>
-            <a:pPr algn="ctr"/>
-          </a:p>
-        </p:txBody>
-      </p:sp>
-      <p:sp>
-        <p:nvSpPr>
-          <p:cNvPr id="3" name="Rectangle 2"/>
-          <p:cNvSpPr/>
-          <p:nvPr/>
-        </p:nvSpPr>
-        <p:spPr>
-          <a:xfrm>
-            <a:off x="0" y="960120"/>
-            <a:ext cx="12191695" cy="41148"/>
-          </a:xfrm>
-          <a:prstGeom prst="rect">
-            <a:avLst/>
-          </a:prstGeom>
-          <a:solidFill>
-            <a:srgbClr val="FFD000"/>
-          </a:solidFill>
-          <a:ln>
-            <a:noFill/>
-          </a:ln>
-        </p:spPr>
-        <p:style>
-          <a:lnRef idx="1">
-            <a:schemeClr val="accent1"/>
-          </a:lnRef>
-          <a:fillRef idx="3">
-            <a:schemeClr val="accent1"/>
-          </a:fillRef>
-          <a:effectRef idx="2">
-            <a:schemeClr val="accent1"/>
-          </a:effectRef>
-          <a:fontRef idx="minor">
-            <a:schemeClr val="lt1"/>
-          </a:fontRef>
-        </p:style>
-        <p:txBody>
-          <a:bodyPr rtlCol="0" anchor="ctr"/>
-          <a:lstStyle/>
-          <a:p>
-            <a:pPr algn="ctr"/>
-          </a:p>
-        </p:txBody>
-      </p:sp>
-      <p:sp>
-        <p:nvSpPr>
-          <p:cNvPr id="4" name="TextBox 3"/>
-          <p:cNvSpPr txBox="1"/>
-          <p:nvPr/>
-        </p:nvSpPr>
-        <p:spPr>
-          <a:xfrm>
-            <a:off x="457200" y="164592"/>
-            <a:ext cx="11277295" cy="502920"/>
-          </a:xfrm>
-          <a:prstGeom prst="rect">
-            <a:avLst/>
-          </a:prstGeom>
-          <a:noFill/>
-        </p:spPr>
-        <p:txBody>
-          <a:bodyPr wrap="square">
-            <a:spAutoFit/>
-          </a:bodyPr>
-          <a:lstStyle/>
-          <a:p>
-            <a:r>
-              <a:rPr sz="2600" b="1" i="0">
-                <a:solidFill>
-                  <a:srgbClr val="FFFFFF"/>
-                </a:solidFill>
-                <a:latin typeface="Calibri"/>
-              </a:rPr>
-              <a:t>Taller PI — punto de partida</a:t>
-            </a:r>
-          </a:p>
-        </p:txBody>
-      </p:sp>
-      <p:sp>
-        <p:nvSpPr>
-          <p:cNvPr id="5" name="TextBox 4"/>
-          <p:cNvSpPr txBox="1"/>
-          <p:nvPr/>
-        </p:nvSpPr>
-        <p:spPr>
-          <a:xfrm>
-            <a:off x="457200" y="1170432"/>
-            <a:ext cx="11277295" cy="5230368"/>
-          </a:xfrm>
-          <a:prstGeom prst="rect">
-            <a:avLst/>
-          </a:prstGeom>
-          <a:noFill/>
-        </p:spPr>
-        <p:txBody>
-          <a:bodyPr wrap="square">
-            <a:spAutoFit/>
-          </a:bodyPr>
-          <a:lstStyle/>
-          <a:p>
-            <a:pPr>
-              <a:spcAft>
-                <a:spcPts val="800"/>
-              </a:spcAft>
-            </a:pPr>
-            <a:r>
-              <a:rPr sz="2000" b="0" i="0">
-                <a:solidFill>
-                  <a:srgbClr val="333333"/>
-                </a:solidFill>
-                <a:latin typeface="Calibri"/>
-              </a:rPr>
-              <a:t>–   Cada estudiante llega con tres artefactos de VetCare escritos en semanas distintas: el catalogo de RF y RNF, el diagrama con las especificaciones de casos de uso y el diagrama de clases con sus multiplicidades.</a:t>
-            </a:r>
-          </a:p>
-          <a:p>
-            <a:pPr>
-              <a:spcAft>
-                <a:spcPts val="800"/>
-              </a:spcAft>
-            </a:pPr>
-            <a:r>
-              <a:rPr sz="2000" b="0" i="0">
-                <a:solidFill>
-                  <a:srgbClr val="333333"/>
-                </a:solidFill>
-                <a:latin typeface="Calibri"/>
-              </a:rPr>
-              <a:t>–   Nadie ha vuelto a abrir el catalogo de requisitos desde que se dibujaron las clases, y los nombres empezaron a moverse: donde el requisito dice Propietario, la clase dice Dueño y el mockup dice Cliente.</a:t>
-            </a:r>
-          </a:p>
-          <a:p>
-            <a:pPr>
-              <a:spcAft>
-                <a:spcPts val="800"/>
-              </a:spcAft>
-            </a:pPr>
-            <a:r>
-              <a:rPr sz="2000" b="0" i="0">
-                <a:solidFill>
-                  <a:srgbClr val="333333"/>
-                </a:solidFill>
-                <a:latin typeface="Calibri"/>
-              </a:rPr>
-              <a:t>–   Hay al menos un requisito que suena bonito en el papel, el RF-07 de recordatorio de cita, y no aparece en ningun caso de uso ni en ninguna clase del modelo.</a:t>
-            </a:r>
-          </a:p>
-        </p:txBody>
-      </p:sp>
-      <p:sp>
-        <p:nvSpPr>
-          <p:cNvPr id="6" name="TextBox 5"/>
-          <p:cNvSpPr txBox="1"/>
-          <p:nvPr/>
-        </p:nvSpPr>
-        <p:spPr>
-          <a:xfrm>
-            <a:off x="11185855" y="6473952"/>
-            <a:ext cx="640080" cy="274320"/>
-          </a:xfrm>
-          <a:prstGeom prst="rect">
-            <a:avLst/>
-          </a:prstGeom>
-          <a:noFill/>
-        </p:spPr>
-        <p:txBody>
-          <a:bodyPr wrap="square">
-            <a:spAutoFit/>
-          </a:bodyPr>
-          <a:lstStyle/>
-          <a:p>
-            <a:pPr algn="r"/>
-            <a:r>
-              <a:rPr sz="1100" b="0" i="0">
-                <a:solidFill>
-                  <a:srgbClr val="666666"/>
-                </a:solidFill>
-                <a:latin typeface="Calibri"/>
-              </a:rPr>
-              <a:t>18</a:t>
-            </a:r>
-          </a:p>
-        </p:txBody>
-      </p:sp>
-    </p:spTree>
-  </p:cSld>
-  <p:clrMapOvr>
-    <a:masterClrMapping/>
-  </p:clrMapOvr>
-</p:sld>
-</file>
-
-<file path=ppt/slides/slide19.xml><?xml version="1.0" encoding="utf-8"?>
-<p:sld xmlns:a="http://schemas.openxmlformats.org/drawingml/2006/main" xmlns:p="http://schemas.openxmlformats.org/presentationml/2006/main" xmlns:r="http://schemas.openxmlformats.org/officeDocument/2006/relationships">
-  <p:cSld>
-    <p:bg>
-      <p:bgPr>
-        <a:solidFill>
-          <a:srgbClr val="FFFFFF"/>
-        </a:solidFill>
-        <a:effectLst/>
-      </p:bgPr>
-    </p:bg>
-    <p:spTree>
-      <p:nvGrpSpPr>
-        <p:cNvPr id="1" name=""/>
-        <p:cNvGrpSpPr/>
-        <p:nvPr/>
-      </p:nvGrpSpPr>
-      <p:grpSpPr/>
-      <p:sp>
-        <p:nvSpPr>
-          <p:cNvPr id="2" name="Rectangle 1"/>
-          <p:cNvSpPr/>
-          <p:nvPr/>
-        </p:nvSpPr>
-        <p:spPr>
-          <a:xfrm>
-            <a:off x="0" y="0"/>
-            <a:ext cx="12191695" cy="960120"/>
-          </a:xfrm>
-          <a:prstGeom prst="rect">
-            <a:avLst/>
-          </a:prstGeom>
-          <a:solidFill>
-            <a:srgbClr val="095292"/>
-          </a:solidFill>
-          <a:ln>
-            <a:noFill/>
-          </a:ln>
-        </p:spPr>
-        <p:style>
-          <a:lnRef idx="1">
-            <a:schemeClr val="accent1"/>
-          </a:lnRef>
-          <a:fillRef idx="3">
-            <a:schemeClr val="accent1"/>
-          </a:fillRef>
-          <a:effectRef idx="2">
-            <a:schemeClr val="accent1"/>
-          </a:effectRef>
-          <a:fontRef idx="minor">
-            <a:schemeClr val="lt1"/>
-          </a:fontRef>
-        </p:style>
-        <p:txBody>
-          <a:bodyPr rtlCol="0" anchor="ctr"/>
-          <a:lstStyle/>
-          <a:p>
-            <a:pPr algn="ctr"/>
-          </a:p>
-        </p:txBody>
-      </p:sp>
-      <p:sp>
-        <p:nvSpPr>
-          <p:cNvPr id="3" name="Rectangle 2"/>
-          <p:cNvSpPr/>
-          <p:nvPr/>
-        </p:nvSpPr>
-        <p:spPr>
-          <a:xfrm>
-            <a:off x="0" y="960120"/>
-            <a:ext cx="12191695" cy="41148"/>
-          </a:xfrm>
-          <a:prstGeom prst="rect">
-            <a:avLst/>
-          </a:prstGeom>
-          <a:solidFill>
-            <a:srgbClr val="FFD000"/>
-          </a:solidFill>
-          <a:ln>
-            <a:noFill/>
-          </a:ln>
-        </p:spPr>
-        <p:style>
-          <a:lnRef idx="1">
-            <a:schemeClr val="accent1"/>
-          </a:lnRef>
-          <a:fillRef idx="3">
-            <a:schemeClr val="accent1"/>
-          </a:fillRef>
-          <a:effectRef idx="2">
-            <a:schemeClr val="accent1"/>
-          </a:effectRef>
-          <a:fontRef idx="minor">
-            <a:schemeClr val="lt1"/>
-          </a:fontRef>
-        </p:style>
-        <p:txBody>
-          <a:bodyPr rtlCol="0" anchor="ctr"/>
-          <a:lstStyle/>
-          <a:p>
-            <a:pPr algn="ctr"/>
-          </a:p>
-        </p:txBody>
-      </p:sp>
-      <p:sp>
-        <p:nvSpPr>
-          <p:cNvPr id="4" name="TextBox 3"/>
-          <p:cNvSpPr txBox="1"/>
-          <p:nvPr/>
-        </p:nvSpPr>
-        <p:spPr>
-          <a:xfrm>
-            <a:off x="457200" y="164592"/>
-            <a:ext cx="11277295" cy="502920"/>
-          </a:xfrm>
-          <a:prstGeom prst="rect">
-            <a:avLst/>
-          </a:prstGeom>
-          <a:noFill/>
-        </p:spPr>
-        <p:txBody>
-          <a:bodyPr wrap="square">
-            <a:spAutoFit/>
-          </a:bodyPr>
-          <a:lstStyle/>
-          <a:p>
-            <a:r>
-              <a:rPr sz="2600" b="1" i="0">
-                <a:solidFill>
-                  <a:srgbClr val="FFFFFF"/>
-                </a:solidFill>
-                <a:latin typeface="Calibri"/>
-              </a:rPr>
-              <a:t>Taller PI — pasos guiados</a:t>
-            </a:r>
-          </a:p>
-        </p:txBody>
-      </p:sp>
-      <p:sp>
-        <p:nvSpPr>
-          <p:cNvPr id="5" name="Rounded Rectangle 4"/>
-          <p:cNvSpPr/>
-          <p:nvPr/>
-        </p:nvSpPr>
-        <p:spPr>
-          <a:xfrm>
-            <a:off x="457200" y="1234440"/>
-            <a:ext cx="11277295" cy="950976"/>
-          </a:xfrm>
-          <a:prstGeom prst="roundRect">
-            <a:avLst>
-              <a:gd name="adj" fmla="val 12000"/>
-            </a:avLst>
-          </a:prstGeom>
-          <a:solidFill>
-            <a:srgbClr val="F2F2F2"/>
-          </a:solidFill>
-          <a:ln>
-            <a:noFill/>
-          </a:ln>
-        </p:spPr>
-        <p:style>
-          <a:lnRef idx="1">
-            <a:schemeClr val="accent1"/>
-          </a:lnRef>
-          <a:fillRef idx="3">
-            <a:schemeClr val="accent1"/>
-          </a:fillRef>
-          <a:effectRef idx="2">
-            <a:schemeClr val="accent1"/>
-          </a:effectRef>
-          <a:fontRef idx="minor">
-            <a:schemeClr val="lt1"/>
-          </a:fontRef>
-        </p:style>
-        <p:txBody>
-          <a:bodyPr rtlCol="0" anchor="ctr"/>
-          <a:lstStyle/>
-          <a:p>
-            <a:pPr algn="ctr"/>
-          </a:p>
-        </p:txBody>
-      </p:sp>
-      <p:sp>
-        <p:nvSpPr>
-          <p:cNvPr id="6" name="Rounded Rectangle 5"/>
-          <p:cNvSpPr/>
-          <p:nvPr/>
-        </p:nvSpPr>
-        <p:spPr>
-          <a:xfrm>
-            <a:off x="594360" y="1490472"/>
-            <a:ext cx="438912" cy="438912"/>
-          </a:xfrm>
-          <a:prstGeom prst="roundRect">
-            <a:avLst>
-              <a:gd name="adj" fmla="val 12000"/>
-            </a:avLst>
-          </a:prstGeom>
-          <a:solidFill>
-            <a:srgbClr val="095292"/>
-          </a:solidFill>
-          <a:ln>
-            <a:noFill/>
-          </a:ln>
-        </p:spPr>
-        <p:style>
-          <a:lnRef idx="1">
-            <a:schemeClr val="accent1"/>
-          </a:lnRef>
-          <a:fillRef idx="3">
-            <a:schemeClr val="accent1"/>
-          </a:fillRef>
-          <a:effectRef idx="2">
-            <a:schemeClr val="accent1"/>
-          </a:effectRef>
-          <a:fontRef idx="minor">
-            <a:schemeClr val="lt1"/>
-          </a:fontRef>
-        </p:style>
-        <p:txBody>
-          <a:bodyPr rtlCol="0" anchor="ctr"/>
-          <a:lstStyle/>
-          <a:p>
-            <a:pPr algn="ctr"/>
-          </a:p>
-        </p:txBody>
-      </p:sp>
-      <p:sp>
-        <p:nvSpPr>
-          <p:cNvPr id="7" name="TextBox 6"/>
-          <p:cNvSpPr txBox="1"/>
-          <p:nvPr/>
-        </p:nvSpPr>
-        <p:spPr>
-          <a:xfrm>
-            <a:off x="594360" y="1490472"/>
-            <a:ext cx="438912" cy="438912"/>
-          </a:xfrm>
-          <a:prstGeom prst="rect">
-            <a:avLst/>
-          </a:prstGeom>
-          <a:noFill/>
-        </p:spPr>
-        <p:txBody>
-          <a:bodyPr wrap="square" anchor="ctr"/>
-          <a:lstStyle/>
-          <a:p>
-            <a:pPr algn="ctr"/>
-            <a:r>
-              <a:rPr sz="1600" b="1" i="0">
-                <a:solidFill>
-                  <a:srgbClr val="FFFFFF"/>
-                </a:solidFill>
-                <a:latin typeface="Calibri"/>
-              </a:rPr>
-              <a:t>1</a:t>
-            </a:r>
-          </a:p>
-        </p:txBody>
-      </p:sp>
-      <p:sp>
-        <p:nvSpPr>
-          <p:cNvPr id="8" name="TextBox 7"/>
-          <p:cNvSpPr txBox="1"/>
-          <p:nvPr/>
-        </p:nvSpPr>
-        <p:spPr>
-          <a:xfrm>
-            <a:off x="1188720" y="1325880"/>
-            <a:ext cx="10271455" cy="786384"/>
-          </a:xfrm>
-          <a:prstGeom prst="rect">
-            <a:avLst/>
-          </a:prstGeom>
-          <a:noFill/>
-        </p:spPr>
-        <p:txBody>
-          <a:bodyPr wrap="square" anchor="ctr"/>
-          <a:lstStyle/>
-          <a:p>
-            <a:r>
-              <a:rPr sz="1500" b="1" i="0">
-                <a:solidFill>
-                  <a:srgbClr val="095292"/>
-                </a:solidFill>
-                <a:latin typeface="Calibri"/>
-              </a:rPr>
-              <a:t>Construir en Google Docs la matriz de trazabilidad de VetCare con las columnas RF, Caso de uso, Clase o clases implicadas y Mockup, incluyendo todos los requisitos del catalogo, y marcar en rojo cada fila incompleta.</a:t>
-            </a:r>
-          </a:p>
-        </p:txBody>
-      </p:sp>
-      <p:sp>
-        <p:nvSpPr>
-          <p:cNvPr id="9" name="Rounded Rectangle 8"/>
-          <p:cNvSpPr/>
-          <p:nvPr/>
-        </p:nvSpPr>
-        <p:spPr>
-          <a:xfrm>
-            <a:off x="457200" y="2276856"/>
-            <a:ext cx="11277295" cy="950976"/>
-          </a:xfrm>
-          <a:prstGeom prst="roundRect">
-            <a:avLst>
-              <a:gd name="adj" fmla="val 12000"/>
-            </a:avLst>
-          </a:prstGeom>
-          <a:solidFill>
-            <a:srgbClr val="E8F4FA"/>
-          </a:solidFill>
-          <a:ln>
-            <a:noFill/>
-          </a:ln>
-        </p:spPr>
-        <p:style>
-          <a:lnRef idx="1">
-            <a:schemeClr val="accent1"/>
-          </a:lnRef>
-          <a:fillRef idx="3">
-            <a:schemeClr val="accent1"/>
-          </a:fillRef>
-          <a:effectRef idx="2">
-            <a:schemeClr val="accent1"/>
-          </a:effectRef>
-          <a:fontRef idx="minor">
-            <a:schemeClr val="lt1"/>
-          </a:fontRef>
-        </p:style>
-        <p:txBody>
-          <a:bodyPr rtlCol="0" anchor="ctr"/>
-          <a:lstStyle/>
-          <a:p>
-            <a:pPr algn="ctr"/>
-          </a:p>
-        </p:txBody>
-      </p:sp>
-      <p:sp>
-        <p:nvSpPr>
-          <p:cNvPr id="10" name="Rounded Rectangle 9"/>
-          <p:cNvSpPr/>
-          <p:nvPr/>
-        </p:nvSpPr>
-        <p:spPr>
-          <a:xfrm>
-            <a:off x="594360" y="2532888"/>
-            <a:ext cx="438912" cy="438912"/>
-          </a:xfrm>
-          <a:prstGeom prst="roundRect">
-            <a:avLst>
-              <a:gd name="adj" fmla="val 12000"/>
-            </a:avLst>
-          </a:prstGeom>
-          <a:solidFill>
-            <a:srgbClr val="095292"/>
-          </a:solidFill>
-          <a:ln>
-            <a:noFill/>
-          </a:ln>
-        </p:spPr>
-        <p:style>
-          <a:lnRef idx="1">
-            <a:schemeClr val="accent1"/>
-          </a:lnRef>
-          <a:fillRef idx="3">
-            <a:schemeClr val="accent1"/>
-          </a:fillRef>
-          <a:effectRef idx="2">
-            <a:schemeClr val="accent1"/>
-          </a:effectRef>
-          <a:fontRef idx="minor">
-            <a:schemeClr val="lt1"/>
-          </a:fontRef>
-        </p:style>
-        <p:txBody>
-          <a:bodyPr rtlCol="0" anchor="ctr"/>
-          <a:lstStyle/>
-          <a:p>
-            <a:pPr algn="ctr"/>
-          </a:p>
-        </p:txBody>
-      </p:sp>
-      <p:sp>
-        <p:nvSpPr>
-          <p:cNvPr id="11" name="TextBox 10"/>
-          <p:cNvSpPr txBox="1"/>
-          <p:nvPr/>
-        </p:nvSpPr>
-        <p:spPr>
-          <a:xfrm>
-            <a:off x="594360" y="2532888"/>
-            <a:ext cx="438912" cy="438912"/>
-          </a:xfrm>
-          <a:prstGeom prst="rect">
-            <a:avLst/>
-          </a:prstGeom>
-          <a:noFill/>
-        </p:spPr>
-        <p:txBody>
-          <a:bodyPr wrap="square" anchor="ctr"/>
-          <a:lstStyle/>
-          <a:p>
-            <a:pPr algn="ctr"/>
-            <a:r>
-              <a:rPr sz="1600" b="1" i="0">
-                <a:solidFill>
-                  <a:srgbClr val="FFFFFF"/>
-                </a:solidFill>
-                <a:latin typeface="Calibri"/>
-              </a:rPr>
-              <a:t>2</a:t>
-            </a:r>
-          </a:p>
-        </p:txBody>
-      </p:sp>
-      <p:sp>
-        <p:nvSpPr>
-          <p:cNvPr id="12" name="TextBox 11"/>
-          <p:cNvSpPr txBox="1"/>
-          <p:nvPr/>
-        </p:nvSpPr>
-        <p:spPr>
-          <a:xfrm>
-            <a:off x="1188720" y="2368296"/>
-            <a:ext cx="10271455" cy="786384"/>
-          </a:xfrm>
-          <a:prstGeom prst="rect">
-            <a:avLst/>
-          </a:prstGeom>
-          <a:noFill/>
-        </p:spPr>
-        <p:txBody>
-          <a:bodyPr wrap="square" anchor="ctr"/>
-          <a:lstStyle/>
-          <a:p>
-            <a:r>
-              <a:rPr sz="1400" b="1" i="0">
-                <a:solidFill>
-                  <a:srgbClr val="095292"/>
-                </a:solidFill>
-                <a:latin typeface="Calibri"/>
-              </a:rPr>
-              <a:t>Levantar el glosario de nombres canonicos con minimo ocho conceptos del dominio (Propietario, Mascota, Consulta, Cita, Veterinario, Vacuna, Expediente, Bitacora), cada uno con definicion de una linea y sinonimos prohibidos, y renombrar en los artefactos todo lo que no coincida.</a:t>
-            </a:r>
-          </a:p>
-        </p:txBody>
-      </p:sp>
-      <p:sp>
-        <p:nvSpPr>
-          <p:cNvPr id="13" name="Rounded Rectangle 12"/>
-          <p:cNvSpPr/>
-          <p:nvPr/>
-        </p:nvSpPr>
-        <p:spPr>
-          <a:xfrm>
-            <a:off x="457200" y="3319272"/>
-            <a:ext cx="11277295" cy="950976"/>
-          </a:xfrm>
-          <a:prstGeom prst="roundRect">
-            <a:avLst>
-              <a:gd name="adj" fmla="val 12000"/>
-            </a:avLst>
-          </a:prstGeom>
-          <a:solidFill>
-            <a:srgbClr val="F2F2F2"/>
-          </a:solidFill>
-          <a:ln>
-            <a:noFill/>
-          </a:ln>
-        </p:spPr>
-        <p:style>
-          <a:lnRef idx="1">
-            <a:schemeClr val="accent1"/>
-          </a:lnRef>
-          <a:fillRef idx="3">
-            <a:schemeClr val="accent1"/>
-          </a:fillRef>
-          <a:effectRef idx="2">
-            <a:schemeClr val="accent1"/>
-          </a:effectRef>
-          <a:fontRef idx="minor">
-            <a:schemeClr val="lt1"/>
-          </a:fontRef>
-        </p:style>
-        <p:txBody>
-          <a:bodyPr rtlCol="0" anchor="ctr"/>
-          <a:lstStyle/>
-          <a:p>
-            <a:pPr algn="ctr"/>
-          </a:p>
-        </p:txBody>
-      </p:sp>
-      <p:sp>
-        <p:nvSpPr>
-          <p:cNvPr id="14" name="Rounded Rectangle 13"/>
-          <p:cNvSpPr/>
-          <p:nvPr/>
-        </p:nvSpPr>
-        <p:spPr>
-          <a:xfrm>
-            <a:off x="594360" y="3575304"/>
-            <a:ext cx="438912" cy="438912"/>
-          </a:xfrm>
-          <a:prstGeom prst="roundRect">
-            <a:avLst>
-              <a:gd name="adj" fmla="val 12000"/>
-            </a:avLst>
-          </a:prstGeom>
-          <a:solidFill>
-            <a:srgbClr val="095292"/>
-          </a:solidFill>
-          <a:ln>
-            <a:noFill/>
-          </a:ln>
-        </p:spPr>
-        <p:style>
-          <a:lnRef idx="1">
-            <a:schemeClr val="accent1"/>
-          </a:lnRef>
-          <a:fillRef idx="3">
-            <a:schemeClr val="accent1"/>
-          </a:fillRef>
-          <a:effectRef idx="2">
-            <a:schemeClr val="accent1"/>
-          </a:effectRef>
-          <a:fontRef idx="minor">
-            <a:schemeClr val="lt1"/>
-          </a:fontRef>
-        </p:style>
-        <p:txBody>
-          <a:bodyPr rtlCol="0" anchor="ctr"/>
-          <a:lstStyle/>
-          <a:p>
-            <a:pPr algn="ctr"/>
-          </a:p>
-        </p:txBody>
-      </p:sp>
-      <p:sp>
-        <p:nvSpPr>
-          <p:cNvPr id="15" name="TextBox 14"/>
-          <p:cNvSpPr txBox="1"/>
-          <p:nvPr/>
-        </p:nvSpPr>
-        <p:spPr>
-          <a:xfrm>
-            <a:off x="594360" y="3575304"/>
-            <a:ext cx="438912" cy="438912"/>
-          </a:xfrm>
-          <a:prstGeom prst="rect">
-            <a:avLst/>
-          </a:prstGeom>
-          <a:noFill/>
-        </p:spPr>
-        <p:txBody>
-          <a:bodyPr wrap="square" anchor="ctr"/>
-          <a:lstStyle/>
-          <a:p>
-            <a:pPr algn="ctr"/>
-            <a:r>
-              <a:rPr sz="1600" b="1" i="0">
-                <a:solidFill>
-                  <a:srgbClr val="FFFFFF"/>
-                </a:solidFill>
-                <a:latin typeface="Calibri"/>
-              </a:rPr>
-              <a:t>3</a:t>
-            </a:r>
-          </a:p>
-        </p:txBody>
-      </p:sp>
-      <p:sp>
-        <p:nvSpPr>
-          <p:cNvPr id="16" name="TextBox 15"/>
-          <p:cNvSpPr txBox="1"/>
-          <p:nvPr/>
-        </p:nvSpPr>
-        <p:spPr>
-          <a:xfrm>
-            <a:off x="1188720" y="3410712"/>
-            <a:ext cx="10271455" cy="786384"/>
-          </a:xfrm>
-          <a:prstGeom prst="rect">
-            <a:avLst/>
-          </a:prstGeom>
-          <a:noFill/>
-        </p:spPr>
-        <p:txBody>
-          <a:bodyPr wrap="square" anchor="ctr"/>
-          <a:lstStyle/>
-          <a:p>
-            <a:r>
-              <a:rPr sz="1400" b="1" i="0">
-                <a:solidFill>
-                  <a:srgbClr val="095292"/>
-                </a:solidFill>
-                <a:latin typeface="Calibri"/>
-              </a:rPr>
-              <a:t>Intercambiar el paquete completo con otro estudiante (o con otro equipo, si el docente autorizo trabajo en equipo) y aplicar la rubrica de auditoria de seis puntos durante veinte minutos cronometrados, registrando cada hallazgo con ubicacion exacta, descripcion y severidad bloqueante, mayor o menor; queda prohibido proponer soluciones durante la revision.</a:t>
-            </a:r>
-          </a:p>
-        </p:txBody>
-      </p:sp>
-      <p:sp>
-        <p:nvSpPr>
-          <p:cNvPr id="17" name="Rounded Rectangle 16"/>
-          <p:cNvSpPr/>
-          <p:nvPr/>
-        </p:nvSpPr>
-        <p:spPr>
-          <a:xfrm>
-            <a:off x="457200" y="4361688"/>
-            <a:ext cx="11277295" cy="950976"/>
-          </a:xfrm>
-          <a:prstGeom prst="roundRect">
-            <a:avLst>
-              <a:gd name="adj" fmla="val 12000"/>
-            </a:avLst>
-          </a:prstGeom>
-          <a:solidFill>
-            <a:srgbClr val="E8F4FA"/>
-          </a:solidFill>
-          <a:ln>
-            <a:noFill/>
-          </a:ln>
-        </p:spPr>
-        <p:style>
-          <a:lnRef idx="1">
-            <a:schemeClr val="accent1"/>
-          </a:lnRef>
-          <a:fillRef idx="3">
-            <a:schemeClr val="accent1"/>
-          </a:fillRef>
-          <a:effectRef idx="2">
-            <a:schemeClr val="accent1"/>
-          </a:effectRef>
-          <a:fontRef idx="minor">
-            <a:schemeClr val="lt1"/>
-          </a:fontRef>
-        </p:style>
-        <p:txBody>
-          <a:bodyPr rtlCol="0" anchor="ctr"/>
-          <a:lstStyle/>
-          <a:p>
-            <a:pPr algn="ctr"/>
-          </a:p>
-        </p:txBody>
-      </p:sp>
-      <p:sp>
-        <p:nvSpPr>
-          <p:cNvPr id="18" name="Rounded Rectangle 17"/>
-          <p:cNvSpPr/>
-          <p:nvPr/>
-        </p:nvSpPr>
-        <p:spPr>
-          <a:xfrm>
-            <a:off x="594360" y="4617720"/>
-            <a:ext cx="438912" cy="438912"/>
-          </a:xfrm>
-          <a:prstGeom prst="roundRect">
-            <a:avLst>
-              <a:gd name="adj" fmla="val 12000"/>
-            </a:avLst>
-          </a:prstGeom>
-          <a:solidFill>
-            <a:srgbClr val="095292"/>
-          </a:solidFill>
-          <a:ln>
-            <a:noFill/>
-          </a:ln>
-        </p:spPr>
-        <p:style>
-          <a:lnRef idx="1">
-            <a:schemeClr val="accent1"/>
-          </a:lnRef>
-          <a:fillRef idx="3">
-            <a:schemeClr val="accent1"/>
-          </a:fillRef>
-          <a:effectRef idx="2">
-            <a:schemeClr val="accent1"/>
-          </a:effectRef>
-          <a:fontRef idx="minor">
-            <a:schemeClr val="lt1"/>
-          </a:fontRef>
-        </p:style>
-        <p:txBody>
-          <a:bodyPr rtlCol="0" anchor="ctr"/>
-          <a:lstStyle/>
-          <a:p>
-            <a:pPr algn="ctr"/>
-          </a:p>
-        </p:txBody>
-      </p:sp>
-      <p:sp>
-        <p:nvSpPr>
-          <p:cNvPr id="19" name="TextBox 18"/>
-          <p:cNvSpPr txBox="1"/>
-          <p:nvPr/>
-        </p:nvSpPr>
-        <p:spPr>
-          <a:xfrm>
-            <a:off x="594360" y="4617720"/>
-            <a:ext cx="438912" cy="438912"/>
-          </a:xfrm>
-          <a:prstGeom prst="rect">
-            <a:avLst/>
-          </a:prstGeom>
-          <a:noFill/>
-        </p:spPr>
-        <p:txBody>
-          <a:bodyPr wrap="square" anchor="ctr"/>
-          <a:lstStyle/>
-          <a:p>
-            <a:pPr algn="ctr"/>
-            <a:r>
-              <a:rPr sz="1600" b="1" i="0">
-                <a:solidFill>
-                  <a:srgbClr val="FFFFFF"/>
-                </a:solidFill>
-                <a:latin typeface="Calibri"/>
-              </a:rPr>
-              <a:t>4</a:t>
-            </a:r>
-          </a:p>
-        </p:txBody>
-      </p:sp>
-      <p:sp>
-        <p:nvSpPr>
-          <p:cNvPr id="20" name="TextBox 19"/>
-          <p:cNvSpPr txBox="1"/>
-          <p:nvPr/>
-        </p:nvSpPr>
-        <p:spPr>
-          <a:xfrm>
-            <a:off x="1188720" y="4453128"/>
-            <a:ext cx="10271455" cy="786384"/>
-          </a:xfrm>
-          <a:prstGeom prst="rect">
-            <a:avLst/>
-          </a:prstGeom>
-          <a:noFill/>
-        </p:spPr>
-        <p:txBody>
-          <a:bodyPr wrap="square" anchor="ctr"/>
-          <a:lstStyle/>
-          <a:p>
-            <a:r>
-              <a:rPr sz="1500" b="1" i="0">
-                <a:solidFill>
-                  <a:srgbClr val="095292"/>
-                </a:solidFill>
-                <a:latin typeface="Calibri"/>
-              </a:rPr>
-              <a:t>Recibir los hallazgos propios y clasificarlos en aceptado, rechazado con justificacion escrita o aplazado por acuerdo, sin borrar ninguno del acta, de modo que quede evidencia de la decision tomada.</a:t>
-            </a:r>
-          </a:p>
-        </p:txBody>
-      </p:sp>
-      <p:sp>
-        <p:nvSpPr>
-          <p:cNvPr id="21" name="Rounded Rectangle 20"/>
-          <p:cNvSpPr/>
-          <p:nvPr/>
-        </p:nvSpPr>
-        <p:spPr>
-          <a:xfrm>
-            <a:off x="457200" y="5404104"/>
-            <a:ext cx="11277295" cy="950976"/>
-          </a:xfrm>
-          <a:prstGeom prst="roundRect">
-            <a:avLst>
-              <a:gd name="adj" fmla="val 12000"/>
-            </a:avLst>
-          </a:prstGeom>
-          <a:solidFill>
-            <a:srgbClr val="F2F2F2"/>
-          </a:solidFill>
-          <a:ln>
-            <a:noFill/>
-          </a:ln>
-        </p:spPr>
-        <p:style>
-          <a:lnRef idx="1">
-            <a:schemeClr val="accent1"/>
-          </a:lnRef>
-          <a:fillRef idx="3">
-            <a:schemeClr val="accent1"/>
-          </a:fillRef>
-          <a:effectRef idx="2">
-            <a:schemeClr val="accent1"/>
-          </a:effectRef>
-          <a:fontRef idx="minor">
-            <a:schemeClr val="lt1"/>
-          </a:fontRef>
-        </p:style>
-        <p:txBody>
-          <a:bodyPr rtlCol="0" anchor="ctr"/>
-          <a:lstStyle/>
-          <a:p>
-            <a:pPr algn="ctr"/>
-          </a:p>
-        </p:txBody>
-      </p:sp>
-      <p:sp>
-        <p:nvSpPr>
-          <p:cNvPr id="22" name="Rounded Rectangle 21"/>
-          <p:cNvSpPr/>
-          <p:nvPr/>
-        </p:nvSpPr>
-        <p:spPr>
-          <a:xfrm>
-            <a:off x="594360" y="5660136"/>
-            <a:ext cx="438912" cy="438912"/>
-          </a:xfrm>
-          <a:prstGeom prst="roundRect">
-            <a:avLst>
-              <a:gd name="adj" fmla="val 12000"/>
-            </a:avLst>
-          </a:prstGeom>
-          <a:solidFill>
-            <a:srgbClr val="095292"/>
-          </a:solidFill>
-          <a:ln>
-            <a:noFill/>
-          </a:ln>
-        </p:spPr>
-        <p:style>
-          <a:lnRef idx="1">
-            <a:schemeClr val="accent1"/>
-          </a:lnRef>
-          <a:fillRef idx="3">
-            <a:schemeClr val="accent1"/>
-          </a:fillRef>
-          <a:effectRef idx="2">
-            <a:schemeClr val="accent1"/>
-          </a:effectRef>
-          <a:fontRef idx="minor">
-            <a:schemeClr val="lt1"/>
-          </a:fontRef>
-        </p:style>
-        <p:txBody>
-          <a:bodyPr rtlCol="0" anchor="ctr"/>
-          <a:lstStyle/>
-          <a:p>
-            <a:pPr algn="ctr"/>
-          </a:p>
-        </p:txBody>
-      </p:sp>
-      <p:sp>
-        <p:nvSpPr>
-          <p:cNvPr id="23" name="TextBox 22"/>
-          <p:cNvSpPr txBox="1"/>
-          <p:nvPr/>
-        </p:nvSpPr>
-        <p:spPr>
-          <a:xfrm>
-            <a:off x="594360" y="5660136"/>
-            <a:ext cx="438912" cy="438912"/>
-          </a:xfrm>
-          <a:prstGeom prst="rect">
-            <a:avLst/>
-          </a:prstGeom>
-          <a:noFill/>
-        </p:spPr>
-        <p:txBody>
-          <a:bodyPr wrap="square" anchor="ctr"/>
-          <a:lstStyle/>
-          <a:p>
-            <a:pPr algn="ctr"/>
-            <a:r>
-              <a:rPr sz="1600" b="1" i="0">
-                <a:solidFill>
-                  <a:srgbClr val="FFFFFF"/>
-                </a:solidFill>
-                <a:latin typeface="Calibri"/>
-              </a:rPr>
-              <a:t>5</a:t>
-            </a:r>
-          </a:p>
-        </p:txBody>
-      </p:sp>
-      <p:sp>
-        <p:nvSpPr>
-          <p:cNvPr id="24" name="TextBox 23"/>
-          <p:cNvSpPr txBox="1"/>
-          <p:nvPr/>
-        </p:nvSpPr>
-        <p:spPr>
-          <a:xfrm>
-            <a:off x="1188720" y="5495544"/>
-            <a:ext cx="10271455" cy="786384"/>
-          </a:xfrm>
-          <a:prstGeom prst="rect">
-            <a:avLst/>
-          </a:prstGeom>
-          <a:noFill/>
-        </p:spPr>
-        <p:txBody>
-          <a:bodyPr wrap="square" anchor="ctr"/>
-          <a:lstStyle/>
-          <a:p>
-            <a:r>
-              <a:rPr sz="1400" b="1" i="0">
-                <a:solidFill>
-                  <a:srgbClr val="095292"/>
-                </a:solidFill>
-                <a:latin typeface="Calibri"/>
-              </a:rPr>
-              <a:t>Armar el backlog priorizado de correcciones con responsable y criterio de cierre verificable para cada item, ordenado por severidad, y aplicar en clase al menos las dos correcciones bloqueantes antes de subir el paquete corregido a la plataforma del curso.</a:t>
-            </a:r>
-          </a:p>
-        </p:txBody>
-      </p:sp>
-      <p:sp>
-        <p:nvSpPr>
-          <p:cNvPr id="25" name="TextBox 24"/>
-          <p:cNvSpPr txBox="1"/>
-          <p:nvPr/>
-        </p:nvSpPr>
-        <p:spPr>
-          <a:xfrm>
-            <a:off x="11185855" y="6473952"/>
-            <a:ext cx="640080" cy="274320"/>
-          </a:xfrm>
-          <a:prstGeom prst="rect">
-            <a:avLst/>
-          </a:prstGeom>
-          <a:noFill/>
-        </p:spPr>
-        <p:txBody>
-          <a:bodyPr wrap="square">
-            <a:spAutoFit/>
-          </a:bodyPr>
-          <a:lstStyle/>
-          <a:p>
-            <a:pPr algn="r"/>
-            <a:r>
-              <a:rPr sz="1100" b="0" i="0">
-                <a:solidFill>
-                  <a:srgbClr val="666666"/>
-                </a:solidFill>
-                <a:latin typeface="Calibri"/>
-              </a:rPr>
-              <a:t>19</a:t>
+                  <a:srgbClr val="269CCB"/>
+                </a:solidFill>
+                <a:latin typeface="Calibri"/>
+              </a:rPr>
+              <a:t>Teoria al servicio del diseño</a:t>
             </a:r>
           </a:p>
         </p:txBody>
@@ -8076,7 +6638,7 @@
                 </a:solidFill>
                 <a:latin typeface="Calibri"/>
               </a:rPr>
-              <a:t>Encuadre de hoy · Objetivo del PI</a:t>
+              <a:t>Encuadre de hoy</a:t>
             </a:r>
           </a:p>
         </p:txBody>
@@ -8124,7 +6686,7 @@
                 </a:solidFill>
                 <a:latin typeface="Calibri"/>
               </a:rPr>
-              <a:t>Hoy avanzamos VetCare en:</a:t>
+              <a:t>Tema:</a:t>
             </a:r>
             <a:r>
               <a:rPr sz="2000" b="0" i="0">
@@ -8133,7 +6695,7 @@
                 </a:solidFill>
                 <a:latin typeface="Calibri"/>
               </a:rPr>
-              <a:t> El paquete de diseño de VetCare queda auditado y consistente: requisitos, casos de uso y diagrama de clases usan los mismos nombres y no se contradicen entre si.</a:t>
+              <a:t> Avance del proyecto integrador</a:t>
             </a:r>
           </a:p>
           <a:p>
@@ -8149,34 +6711,7 @@
                 </a:solidFill>
                 <a:latin typeface="Calibri"/>
               </a:rPr>
-              <a:t>–   Herramienta: </a:t>
-            </a:r>
-            <a:r>
-              <a:rPr sz="2000" b="1" i="0">
-                <a:solidFill>
-                  <a:srgbClr val="333333"/>
-                </a:solidFill>
-                <a:latin typeface="Calibri"/>
-              </a:rPr>
-              <a:t>Google Docs · draw.io</a:t>
-            </a:r>
-            <a:r>
-              <a:rPr sz="2000" b="0" i="0">
-                <a:solidFill>
-                  <a:srgbClr val="333333"/>
-                </a:solidFill>
-                <a:latin typeface="Calibri"/>
-              </a:rPr>
-              <a:t> · Bloque </a:t>
-            </a:r>
-            <a:r>
-              <a:rPr sz="2000" b="1" i="0">
-                <a:solidFill>
-                  <a:srgbClr val="333333"/>
-                </a:solidFill>
-                <a:latin typeface="Calibri"/>
-              </a:rPr>
-              <a:t>120 min</a:t>
+              <a:t>–   Hoy no se agrega nada nuevo: se verifica que todos los documentos hablen del mismo sistema</a:t>
             </a:r>
           </a:p>
           <a:p>
@@ -8192,7 +6727,7 @@
                 </a:solidFill>
                 <a:latin typeface="Calibri"/>
               </a:rPr>
-              <a:t>–   </a:t>
+              <a:t>–   Herramienta del tema: </a:t>
             </a:r>
             <a:r>
               <a:rPr sz="2000" b="1" i="0">
@@ -8201,7 +6736,7 @@
                 </a:solidFill>
                 <a:latin typeface="Calibri"/>
               </a:rPr>
-              <a:t>Entregable de hoy:</a:t>
+              <a:t>Google Docs · draw.io</a:t>
             </a:r>
             <a:r>
               <a:rPr sz="2000" b="0" i="0">
@@ -8210,7 +6745,16 @@
                 </a:solidFill>
                 <a:latin typeface="Calibri"/>
               </a:rPr>
-              <a:t> Un documento con la matriz de trazabilidad RF a CU a Clase, el glosario de nombres canonicos, el acta de revision entre pares con hallazgos clasificados por severidad y el backlog priorizado de correcciones, subido a la plataforma del curso.</a:t>
+              <a:t> · Bloque </a:t>
+            </a:r>
+            <a:r>
+              <a:rPr sz="2000" b="1" i="0">
+                <a:solidFill>
+                  <a:srgbClr val="333333"/>
+                </a:solidFill>
+                <a:latin typeface="Calibri"/>
+              </a:rPr>
+              <a:t>120 min</a:t>
             </a:r>
           </a:p>
           <a:p>
@@ -8226,7 +6770,7 @@
                 </a:solidFill>
                 <a:latin typeface="Calibri"/>
               </a:rPr>
-              <a:t>–   La teoria esta al servicio del producto: al salir, VetCare avanzo.</a:t>
+              <a:t>–   Ejemplo de toda la clase: VetCare, el sistema de la clinica «Huellitas».</a:t>
             </a:r>
           </a:p>
         </p:txBody>
@@ -8262,1917 +6806,6 @@
                 <a:latin typeface="Calibri"/>
               </a:rPr>
               <a:t>2</a:t>
-            </a:r>
-          </a:p>
-        </p:txBody>
-      </p:sp>
-    </p:spTree>
-  </p:cSld>
-  <p:clrMapOvr>
-    <a:masterClrMapping/>
-  </p:clrMapOvr>
-</p:sld>
-</file>
-
-<file path=ppt/slides/slide20.xml><?xml version="1.0" encoding="utf-8"?>
-<p:sld xmlns:a="http://schemas.openxmlformats.org/drawingml/2006/main" xmlns:p="http://schemas.openxmlformats.org/presentationml/2006/main" xmlns:r="http://schemas.openxmlformats.org/officeDocument/2006/relationships">
-  <p:cSld>
-    <p:bg>
-      <p:bgPr>
-        <a:solidFill>
-          <a:srgbClr val="FFFFFF"/>
-        </a:solidFill>
-        <a:effectLst/>
-      </p:bgPr>
-    </p:bg>
-    <p:spTree>
-      <p:nvGrpSpPr>
-        <p:cNvPr id="1" name=""/>
-        <p:cNvGrpSpPr/>
-        <p:nvPr/>
-      </p:nvGrpSpPr>
-      <p:grpSpPr/>
-      <p:sp>
-        <p:nvSpPr>
-          <p:cNvPr id="2" name="Rectangle 1"/>
-          <p:cNvSpPr/>
-          <p:nvPr/>
-        </p:nvSpPr>
-        <p:spPr>
-          <a:xfrm>
-            <a:off x="0" y="0"/>
-            <a:ext cx="12191695" cy="960120"/>
-          </a:xfrm>
-          <a:prstGeom prst="rect">
-            <a:avLst/>
-          </a:prstGeom>
-          <a:solidFill>
-            <a:srgbClr val="095292"/>
-          </a:solidFill>
-          <a:ln>
-            <a:noFill/>
-          </a:ln>
-        </p:spPr>
-        <p:style>
-          <a:lnRef idx="1">
-            <a:schemeClr val="accent1"/>
-          </a:lnRef>
-          <a:fillRef idx="3">
-            <a:schemeClr val="accent1"/>
-          </a:fillRef>
-          <a:effectRef idx="2">
-            <a:schemeClr val="accent1"/>
-          </a:effectRef>
-          <a:fontRef idx="minor">
-            <a:schemeClr val="lt1"/>
-          </a:fontRef>
-        </p:style>
-        <p:txBody>
-          <a:bodyPr rtlCol="0" anchor="ctr"/>
-          <a:lstStyle/>
-          <a:p>
-            <a:pPr algn="ctr"/>
-          </a:p>
-        </p:txBody>
-      </p:sp>
-      <p:sp>
-        <p:nvSpPr>
-          <p:cNvPr id="3" name="Rectangle 2"/>
-          <p:cNvSpPr/>
-          <p:nvPr/>
-        </p:nvSpPr>
-        <p:spPr>
-          <a:xfrm>
-            <a:off x="0" y="960120"/>
-            <a:ext cx="12191695" cy="41148"/>
-          </a:xfrm>
-          <a:prstGeom prst="rect">
-            <a:avLst/>
-          </a:prstGeom>
-          <a:solidFill>
-            <a:srgbClr val="FFD000"/>
-          </a:solidFill>
-          <a:ln>
-            <a:noFill/>
-          </a:ln>
-        </p:spPr>
-        <p:style>
-          <a:lnRef idx="1">
-            <a:schemeClr val="accent1"/>
-          </a:lnRef>
-          <a:fillRef idx="3">
-            <a:schemeClr val="accent1"/>
-          </a:fillRef>
-          <a:effectRef idx="2">
-            <a:schemeClr val="accent1"/>
-          </a:effectRef>
-          <a:fontRef idx="minor">
-            <a:schemeClr val="lt1"/>
-          </a:fontRef>
-        </p:style>
-        <p:txBody>
-          <a:bodyPr rtlCol="0" anchor="ctr"/>
-          <a:lstStyle/>
-          <a:p>
-            <a:pPr algn="ctr"/>
-          </a:p>
-        </p:txBody>
-      </p:sp>
-      <p:sp>
-        <p:nvSpPr>
-          <p:cNvPr id="4" name="TextBox 3"/>
-          <p:cNvSpPr txBox="1"/>
-          <p:nvPr/>
-        </p:nvSpPr>
-        <p:spPr>
-          <a:xfrm>
-            <a:off x="457200" y="164592"/>
-            <a:ext cx="11277295" cy="502920"/>
-          </a:xfrm>
-          <a:prstGeom prst="rect">
-            <a:avLst/>
-          </a:prstGeom>
-          <a:noFill/>
-        </p:spPr>
-        <p:txBody>
-          <a:bodyPr wrap="square">
-            <a:spAutoFit/>
-          </a:bodyPr>
-          <a:lstStyle/>
-          <a:p>
-            <a:r>
-              <a:rPr sz="2600" b="1" i="0">
-                <a:solidFill>
-                  <a:srgbClr val="FFFFFF"/>
-                </a:solidFill>
-                <a:latin typeface="Calibri"/>
-              </a:rPr>
-              <a:t>Antes de entregar — autochequeo</a:t>
-            </a:r>
-          </a:p>
-        </p:txBody>
-      </p:sp>
-      <p:sp>
-        <p:nvSpPr>
-          <p:cNvPr id="5" name="Rounded Rectangle 4"/>
-          <p:cNvSpPr/>
-          <p:nvPr/>
-        </p:nvSpPr>
-        <p:spPr>
-          <a:xfrm>
-            <a:off x="457200" y="1261872"/>
-            <a:ext cx="11277295" cy="566928"/>
-          </a:xfrm>
-          <a:prstGeom prst="roundRect">
-            <a:avLst>
-              <a:gd name="adj" fmla="val 12000"/>
-            </a:avLst>
-          </a:prstGeom>
-          <a:solidFill>
-            <a:srgbClr val="F2F2F2"/>
-          </a:solidFill>
-          <a:ln>
-            <a:noFill/>
-          </a:ln>
-        </p:spPr>
-        <p:style>
-          <a:lnRef idx="1">
-            <a:schemeClr val="accent1"/>
-          </a:lnRef>
-          <a:fillRef idx="3">
-            <a:schemeClr val="accent1"/>
-          </a:fillRef>
-          <a:effectRef idx="2">
-            <a:schemeClr val="accent1"/>
-          </a:effectRef>
-          <a:fontRef idx="minor">
-            <a:schemeClr val="lt1"/>
-          </a:fontRef>
-        </p:style>
-        <p:txBody>
-          <a:bodyPr rtlCol="0" anchor="ctr"/>
-          <a:lstStyle/>
-          <a:p>
-            <a:pPr algn="ctr"/>
-          </a:p>
-        </p:txBody>
-      </p:sp>
-      <p:sp>
-        <p:nvSpPr>
-          <p:cNvPr id="6" name="Rectangle 5"/>
-          <p:cNvSpPr/>
-          <p:nvPr/>
-        </p:nvSpPr>
-        <p:spPr>
-          <a:xfrm>
-            <a:off x="640080" y="1408175"/>
-            <a:ext cx="274320" cy="274320"/>
-          </a:xfrm>
-          <a:prstGeom prst="rect">
-            <a:avLst/>
-          </a:prstGeom>
-          <a:solidFill>
-            <a:srgbClr val="FFFFFF"/>
-          </a:solidFill>
-          <a:ln>
-            <a:solidFill>
-              <a:srgbClr val="333333"/>
-            </a:solidFill>
-          </a:ln>
-        </p:spPr>
-        <p:style>
-          <a:lnRef idx="1">
-            <a:schemeClr val="accent1"/>
-          </a:lnRef>
-          <a:fillRef idx="3">
-            <a:schemeClr val="accent1"/>
-          </a:fillRef>
-          <a:effectRef idx="2">
-            <a:schemeClr val="accent1"/>
-          </a:effectRef>
-          <a:fontRef idx="minor">
-            <a:schemeClr val="lt1"/>
-          </a:fontRef>
-        </p:style>
-        <p:txBody>
-          <a:bodyPr rtlCol="0" anchor="ctr"/>
-          <a:lstStyle/>
-          <a:p>
-            <a:pPr algn="ctr"/>
-          </a:p>
-        </p:txBody>
-      </p:sp>
-      <p:sp>
-        <p:nvSpPr>
-          <p:cNvPr id="7" name="Rectangle 6"/>
-          <p:cNvSpPr/>
-          <p:nvPr/>
-        </p:nvSpPr>
-        <p:spPr>
-          <a:xfrm>
-            <a:off x="640080" y="1408175"/>
-            <a:ext cx="73152" cy="274320"/>
-          </a:xfrm>
-          <a:prstGeom prst="rect">
-            <a:avLst/>
-          </a:prstGeom>
-          <a:solidFill>
-            <a:srgbClr val="269CCB"/>
-          </a:solidFill>
-          <a:ln>
-            <a:noFill/>
-          </a:ln>
-        </p:spPr>
-        <p:style>
-          <a:lnRef idx="1">
-            <a:schemeClr val="accent1"/>
-          </a:lnRef>
-          <a:fillRef idx="3">
-            <a:schemeClr val="accent1"/>
-          </a:fillRef>
-          <a:effectRef idx="2">
-            <a:schemeClr val="accent1"/>
-          </a:effectRef>
-          <a:fontRef idx="minor">
-            <a:schemeClr val="lt1"/>
-          </a:fontRef>
-        </p:style>
-        <p:txBody>
-          <a:bodyPr rtlCol="0" anchor="ctr"/>
-          <a:lstStyle/>
-          <a:p>
-            <a:pPr algn="ctr"/>
-          </a:p>
-        </p:txBody>
-      </p:sp>
-      <p:sp>
-        <p:nvSpPr>
-          <p:cNvPr id="8" name="TextBox 7"/>
-          <p:cNvSpPr txBox="1"/>
-          <p:nvPr/>
-        </p:nvSpPr>
-        <p:spPr>
-          <a:xfrm>
-            <a:off x="1097280" y="1353312"/>
-            <a:ext cx="10362895" cy="402336"/>
-          </a:xfrm>
-          <a:prstGeom prst="rect">
-            <a:avLst/>
-          </a:prstGeom>
-          <a:noFill/>
-        </p:spPr>
-        <p:txBody>
-          <a:bodyPr wrap="square" anchor="ctr"/>
-          <a:lstStyle/>
-          <a:p>
-            <a:r>
-              <a:rPr sz="1500" b="0" i="0">
-                <a:solidFill>
-                  <a:srgbClr val="333333"/>
-                </a:solidFill>
-                <a:latin typeface="Calibri"/>
-              </a:rPr>
-              <a:t>Si toma el requisito mas ambicioso de su catalogo y lo persigue hasta el diagrama de clases, en que punto exacto se le pierde el rastro?</a:t>
-            </a:r>
-          </a:p>
-        </p:txBody>
-      </p:sp>
-      <p:sp>
-        <p:nvSpPr>
-          <p:cNvPr id="9" name="Rounded Rectangle 8"/>
-          <p:cNvSpPr/>
-          <p:nvPr/>
-        </p:nvSpPr>
-        <p:spPr>
-          <a:xfrm>
-            <a:off x="457200" y="1938528"/>
-            <a:ext cx="11277295" cy="566928"/>
-          </a:xfrm>
-          <a:prstGeom prst="roundRect">
-            <a:avLst>
-              <a:gd name="adj" fmla="val 12000"/>
-            </a:avLst>
-          </a:prstGeom>
-          <a:solidFill>
-            <a:srgbClr val="F2F2F2"/>
-          </a:solidFill>
-          <a:ln>
-            <a:noFill/>
-          </a:ln>
-        </p:spPr>
-        <p:style>
-          <a:lnRef idx="1">
-            <a:schemeClr val="accent1"/>
-          </a:lnRef>
-          <a:fillRef idx="3">
-            <a:schemeClr val="accent1"/>
-          </a:fillRef>
-          <a:effectRef idx="2">
-            <a:schemeClr val="accent1"/>
-          </a:effectRef>
-          <a:fontRef idx="minor">
-            <a:schemeClr val="lt1"/>
-          </a:fontRef>
-        </p:style>
-        <p:txBody>
-          <a:bodyPr rtlCol="0" anchor="ctr"/>
-          <a:lstStyle/>
-          <a:p>
-            <a:pPr algn="ctr"/>
-          </a:p>
-        </p:txBody>
-      </p:sp>
-      <p:sp>
-        <p:nvSpPr>
-          <p:cNvPr id="10" name="Rectangle 9"/>
-          <p:cNvSpPr/>
-          <p:nvPr/>
-        </p:nvSpPr>
-        <p:spPr>
-          <a:xfrm>
-            <a:off x="640080" y="2084832"/>
-            <a:ext cx="274320" cy="274320"/>
-          </a:xfrm>
-          <a:prstGeom prst="rect">
-            <a:avLst/>
-          </a:prstGeom>
-          <a:solidFill>
-            <a:srgbClr val="FFFFFF"/>
-          </a:solidFill>
-          <a:ln>
-            <a:solidFill>
-              <a:srgbClr val="333333"/>
-            </a:solidFill>
-          </a:ln>
-        </p:spPr>
-        <p:style>
-          <a:lnRef idx="1">
-            <a:schemeClr val="accent1"/>
-          </a:lnRef>
-          <a:fillRef idx="3">
-            <a:schemeClr val="accent1"/>
-          </a:fillRef>
-          <a:effectRef idx="2">
-            <a:schemeClr val="accent1"/>
-          </a:effectRef>
-          <a:fontRef idx="minor">
-            <a:schemeClr val="lt1"/>
-          </a:fontRef>
-        </p:style>
-        <p:txBody>
-          <a:bodyPr rtlCol="0" anchor="ctr"/>
-          <a:lstStyle/>
-          <a:p>
-            <a:pPr algn="ctr"/>
-          </a:p>
-        </p:txBody>
-      </p:sp>
-      <p:sp>
-        <p:nvSpPr>
-          <p:cNvPr id="11" name="Rectangle 10"/>
-          <p:cNvSpPr/>
-          <p:nvPr/>
-        </p:nvSpPr>
-        <p:spPr>
-          <a:xfrm>
-            <a:off x="640080" y="2084832"/>
-            <a:ext cx="73152" cy="274320"/>
-          </a:xfrm>
-          <a:prstGeom prst="rect">
-            <a:avLst/>
-          </a:prstGeom>
-          <a:solidFill>
-            <a:srgbClr val="269CCB"/>
-          </a:solidFill>
-          <a:ln>
-            <a:noFill/>
-          </a:ln>
-        </p:spPr>
-        <p:style>
-          <a:lnRef idx="1">
-            <a:schemeClr val="accent1"/>
-          </a:lnRef>
-          <a:fillRef idx="3">
-            <a:schemeClr val="accent1"/>
-          </a:fillRef>
-          <a:effectRef idx="2">
-            <a:schemeClr val="accent1"/>
-          </a:effectRef>
-          <a:fontRef idx="minor">
-            <a:schemeClr val="lt1"/>
-          </a:fontRef>
-        </p:style>
-        <p:txBody>
-          <a:bodyPr rtlCol="0" anchor="ctr"/>
-          <a:lstStyle/>
-          <a:p>
-            <a:pPr algn="ctr"/>
-          </a:p>
-        </p:txBody>
-      </p:sp>
-      <p:sp>
-        <p:nvSpPr>
-          <p:cNvPr id="12" name="TextBox 11"/>
-          <p:cNvSpPr txBox="1"/>
-          <p:nvPr/>
-        </p:nvSpPr>
-        <p:spPr>
-          <a:xfrm>
-            <a:off x="1097280" y="2029968"/>
-            <a:ext cx="10362895" cy="402336"/>
-          </a:xfrm>
-          <a:prstGeom prst="rect">
-            <a:avLst/>
-          </a:prstGeom>
-          <a:noFill/>
-        </p:spPr>
-        <p:txBody>
-          <a:bodyPr wrap="square" anchor="ctr"/>
-          <a:lstStyle/>
-          <a:p>
-            <a:r>
-              <a:rPr sz="1500" b="0" i="0">
-                <a:solidFill>
-                  <a:srgbClr val="333333"/>
-                </a:solidFill>
-                <a:latin typeface="Calibri"/>
-              </a:rPr>
-              <a:t>Cuantos nombres distintos esta usando su paquete para referirse a la misma persona que lleva la mascota a la clinica?</a:t>
-            </a:r>
-          </a:p>
-        </p:txBody>
-      </p:sp>
-      <p:sp>
-        <p:nvSpPr>
-          <p:cNvPr id="13" name="Rounded Rectangle 12"/>
-          <p:cNvSpPr/>
-          <p:nvPr/>
-        </p:nvSpPr>
-        <p:spPr>
-          <a:xfrm>
-            <a:off x="457200" y="2615184"/>
-            <a:ext cx="11277295" cy="566928"/>
-          </a:xfrm>
-          <a:prstGeom prst="roundRect">
-            <a:avLst>
-              <a:gd name="adj" fmla="val 12000"/>
-            </a:avLst>
-          </a:prstGeom>
-          <a:solidFill>
-            <a:srgbClr val="F2F2F2"/>
-          </a:solidFill>
-          <a:ln>
-            <a:noFill/>
-          </a:ln>
-        </p:spPr>
-        <p:style>
-          <a:lnRef idx="1">
-            <a:schemeClr val="accent1"/>
-          </a:lnRef>
-          <a:fillRef idx="3">
-            <a:schemeClr val="accent1"/>
-          </a:fillRef>
-          <a:effectRef idx="2">
-            <a:schemeClr val="accent1"/>
-          </a:effectRef>
-          <a:fontRef idx="minor">
-            <a:schemeClr val="lt1"/>
-          </a:fontRef>
-        </p:style>
-        <p:txBody>
-          <a:bodyPr rtlCol="0" anchor="ctr"/>
-          <a:lstStyle/>
-          <a:p>
-            <a:pPr algn="ctr"/>
-          </a:p>
-        </p:txBody>
-      </p:sp>
-      <p:sp>
-        <p:nvSpPr>
-          <p:cNvPr id="14" name="Rectangle 13"/>
-          <p:cNvSpPr/>
-          <p:nvPr/>
-        </p:nvSpPr>
-        <p:spPr>
-          <a:xfrm>
-            <a:off x="640080" y="2761488"/>
-            <a:ext cx="274320" cy="274320"/>
-          </a:xfrm>
-          <a:prstGeom prst="rect">
-            <a:avLst/>
-          </a:prstGeom>
-          <a:solidFill>
-            <a:srgbClr val="FFFFFF"/>
-          </a:solidFill>
-          <a:ln>
-            <a:solidFill>
-              <a:srgbClr val="333333"/>
-            </a:solidFill>
-          </a:ln>
-        </p:spPr>
-        <p:style>
-          <a:lnRef idx="1">
-            <a:schemeClr val="accent1"/>
-          </a:lnRef>
-          <a:fillRef idx="3">
-            <a:schemeClr val="accent1"/>
-          </a:fillRef>
-          <a:effectRef idx="2">
-            <a:schemeClr val="accent1"/>
-          </a:effectRef>
-          <a:fontRef idx="minor">
-            <a:schemeClr val="lt1"/>
-          </a:fontRef>
-        </p:style>
-        <p:txBody>
-          <a:bodyPr rtlCol="0" anchor="ctr"/>
-          <a:lstStyle/>
-          <a:p>
-            <a:pPr algn="ctr"/>
-          </a:p>
-        </p:txBody>
-      </p:sp>
-      <p:sp>
-        <p:nvSpPr>
-          <p:cNvPr id="15" name="Rectangle 14"/>
-          <p:cNvSpPr/>
-          <p:nvPr/>
-        </p:nvSpPr>
-        <p:spPr>
-          <a:xfrm>
-            <a:off x="640080" y="2761488"/>
-            <a:ext cx="73152" cy="274320"/>
-          </a:xfrm>
-          <a:prstGeom prst="rect">
-            <a:avLst/>
-          </a:prstGeom>
-          <a:solidFill>
-            <a:srgbClr val="269CCB"/>
-          </a:solidFill>
-          <a:ln>
-            <a:noFill/>
-          </a:ln>
-        </p:spPr>
-        <p:style>
-          <a:lnRef idx="1">
-            <a:schemeClr val="accent1"/>
-          </a:lnRef>
-          <a:fillRef idx="3">
-            <a:schemeClr val="accent1"/>
-          </a:fillRef>
-          <a:effectRef idx="2">
-            <a:schemeClr val="accent1"/>
-          </a:effectRef>
-          <a:fontRef idx="minor">
-            <a:schemeClr val="lt1"/>
-          </a:fontRef>
-        </p:style>
-        <p:txBody>
-          <a:bodyPr rtlCol="0" anchor="ctr"/>
-          <a:lstStyle/>
-          <a:p>
-            <a:pPr algn="ctr"/>
-          </a:p>
-        </p:txBody>
-      </p:sp>
-      <p:sp>
-        <p:nvSpPr>
-          <p:cNvPr id="16" name="TextBox 15"/>
-          <p:cNvSpPr txBox="1"/>
-          <p:nvPr/>
-        </p:nvSpPr>
-        <p:spPr>
-          <a:xfrm>
-            <a:off x="1097280" y="2706624"/>
-            <a:ext cx="10362895" cy="402336"/>
-          </a:xfrm>
-          <a:prstGeom prst="rect">
-            <a:avLst/>
-          </a:prstGeom>
-          <a:noFill/>
-        </p:spPr>
-        <p:txBody>
-          <a:bodyPr wrap="square" anchor="ctr"/>
-          <a:lstStyle/>
-          <a:p>
-            <a:r>
-              <a:rPr sz="1500" b="0" i="0">
-                <a:solidFill>
-                  <a:srgbClr val="333333"/>
-                </a:solidFill>
-                <a:latin typeface="Calibri"/>
-              </a:rPr>
-              <a:t>Si usted desapareciera y solo quedara el paquete escrito, alguien podria construir VetCare sin hacer una sola pregunta?</a:t>
-            </a:r>
-          </a:p>
-        </p:txBody>
-      </p:sp>
-      <p:sp>
-        <p:nvSpPr>
-          <p:cNvPr id="17" name="TextBox 16"/>
-          <p:cNvSpPr txBox="1"/>
-          <p:nvPr/>
-        </p:nvSpPr>
-        <p:spPr>
-          <a:xfrm>
-            <a:off x="11185855" y="6473952"/>
-            <a:ext cx="640080" cy="274320"/>
-          </a:xfrm>
-          <a:prstGeom prst="rect">
-            <a:avLst/>
-          </a:prstGeom>
-          <a:noFill/>
-        </p:spPr>
-        <p:txBody>
-          <a:bodyPr wrap="square">
-            <a:spAutoFit/>
-          </a:bodyPr>
-          <a:lstStyle/>
-          <a:p>
-            <a:pPr algn="r"/>
-            <a:r>
-              <a:rPr sz="1100" b="0" i="0">
-                <a:solidFill>
-                  <a:srgbClr val="666666"/>
-                </a:solidFill>
-                <a:latin typeface="Calibri"/>
-              </a:rPr>
-              <a:t>20</a:t>
-            </a:r>
-          </a:p>
-        </p:txBody>
-      </p:sp>
-    </p:spTree>
-  </p:cSld>
-  <p:clrMapOvr>
-    <a:masterClrMapping/>
-  </p:clrMapOvr>
-</p:sld>
-</file>
-
-<file path=ppt/slides/slide21.xml><?xml version="1.0" encoding="utf-8"?>
-<p:sld xmlns:a="http://schemas.openxmlformats.org/drawingml/2006/main" xmlns:p="http://schemas.openxmlformats.org/presentationml/2006/main" xmlns:r="http://schemas.openxmlformats.org/officeDocument/2006/relationships">
-  <p:cSld>
-    <p:bg>
-      <p:bgPr>
-        <a:solidFill>
-          <a:srgbClr val="FFFFFF"/>
-        </a:solidFill>
-        <a:effectLst/>
-      </p:bgPr>
-    </p:bg>
-    <p:spTree>
-      <p:nvGrpSpPr>
-        <p:cNvPr id="1" name=""/>
-        <p:cNvGrpSpPr/>
-        <p:nvPr/>
-      </p:nvGrpSpPr>
-      <p:grpSpPr/>
-      <p:sp>
-        <p:nvSpPr>
-          <p:cNvPr id="2" name="Rectangle 1"/>
-          <p:cNvSpPr/>
-          <p:nvPr/>
-        </p:nvSpPr>
-        <p:spPr>
-          <a:xfrm>
-            <a:off x="0" y="0"/>
-            <a:ext cx="12191695" cy="960120"/>
-          </a:xfrm>
-          <a:prstGeom prst="rect">
-            <a:avLst/>
-          </a:prstGeom>
-          <a:solidFill>
-            <a:srgbClr val="095292"/>
-          </a:solidFill>
-          <a:ln>
-            <a:noFill/>
-          </a:ln>
-        </p:spPr>
-        <p:style>
-          <a:lnRef idx="1">
-            <a:schemeClr val="accent1"/>
-          </a:lnRef>
-          <a:fillRef idx="3">
-            <a:schemeClr val="accent1"/>
-          </a:fillRef>
-          <a:effectRef idx="2">
-            <a:schemeClr val="accent1"/>
-          </a:effectRef>
-          <a:fontRef idx="minor">
-            <a:schemeClr val="lt1"/>
-          </a:fontRef>
-        </p:style>
-        <p:txBody>
-          <a:bodyPr rtlCol="0" anchor="ctr"/>
-          <a:lstStyle/>
-          <a:p>
-            <a:pPr algn="ctr"/>
-          </a:p>
-        </p:txBody>
-      </p:sp>
-      <p:sp>
-        <p:nvSpPr>
-          <p:cNvPr id="3" name="Rectangle 2"/>
-          <p:cNvSpPr/>
-          <p:nvPr/>
-        </p:nvSpPr>
-        <p:spPr>
-          <a:xfrm>
-            <a:off x="0" y="960120"/>
-            <a:ext cx="12191695" cy="41148"/>
-          </a:xfrm>
-          <a:prstGeom prst="rect">
-            <a:avLst/>
-          </a:prstGeom>
-          <a:solidFill>
-            <a:srgbClr val="FFD000"/>
-          </a:solidFill>
-          <a:ln>
-            <a:noFill/>
-          </a:ln>
-        </p:spPr>
-        <p:style>
-          <a:lnRef idx="1">
-            <a:schemeClr val="accent1"/>
-          </a:lnRef>
-          <a:fillRef idx="3">
-            <a:schemeClr val="accent1"/>
-          </a:fillRef>
-          <a:effectRef idx="2">
-            <a:schemeClr val="accent1"/>
-          </a:effectRef>
-          <a:fontRef idx="minor">
-            <a:schemeClr val="lt1"/>
-          </a:fontRef>
-        </p:style>
-        <p:txBody>
-          <a:bodyPr rtlCol="0" anchor="ctr"/>
-          <a:lstStyle/>
-          <a:p>
-            <a:pPr algn="ctr"/>
-          </a:p>
-        </p:txBody>
-      </p:sp>
-      <p:sp>
-        <p:nvSpPr>
-          <p:cNvPr id="4" name="TextBox 3"/>
-          <p:cNvSpPr txBox="1"/>
-          <p:nvPr/>
-        </p:nvSpPr>
-        <p:spPr>
-          <a:xfrm>
-            <a:off x="457200" y="164592"/>
-            <a:ext cx="11277295" cy="502920"/>
-          </a:xfrm>
-          <a:prstGeom prst="rect">
-            <a:avLst/>
-          </a:prstGeom>
-          <a:noFill/>
-        </p:spPr>
-        <p:txBody>
-          <a:bodyPr wrap="square">
-            <a:spAutoFit/>
-          </a:bodyPr>
-          <a:lstStyle/>
-          <a:p>
-            <a:r>
-              <a:rPr sz="2600" b="1" i="0">
-                <a:solidFill>
-                  <a:srgbClr val="FFFFFF"/>
-                </a:solidFill>
-                <a:latin typeface="Calibri"/>
-              </a:rPr>
-              <a:t>Criterios de exito / entregable</a:t>
-            </a:r>
-          </a:p>
-        </p:txBody>
-      </p:sp>
-      <p:sp>
-        <p:nvSpPr>
-          <p:cNvPr id="5" name="TextBox 4"/>
-          <p:cNvSpPr txBox="1"/>
-          <p:nvPr/>
-        </p:nvSpPr>
-        <p:spPr>
-          <a:xfrm>
-            <a:off x="457200" y="1170432"/>
-            <a:ext cx="11277295" cy="5230368"/>
-          </a:xfrm>
-          <a:prstGeom prst="rect">
-            <a:avLst/>
-          </a:prstGeom>
-          <a:noFill/>
-        </p:spPr>
-        <p:txBody>
-          <a:bodyPr wrap="square">
-            <a:spAutoFit/>
-          </a:bodyPr>
-          <a:lstStyle/>
-          <a:p>
-            <a:pPr>
-              <a:spcAft>
-                <a:spcPts val="800"/>
-              </a:spcAft>
-            </a:pPr>
-            <a:r>
-              <a:rPr sz="2000" b="0" i="0">
-                <a:solidFill>
-                  <a:srgbClr val="333333"/>
-                </a:solidFill>
-                <a:latin typeface="Calibri"/>
-              </a:rPr>
-              <a:t>–   </a:t>
-            </a:r>
-            <a:r>
-              <a:rPr sz="2000" b="1" i="0">
-                <a:solidFill>
-                  <a:srgbClr val="333333"/>
-                </a:solidFill>
-                <a:latin typeface="Calibri"/>
-              </a:rPr>
-              <a:t>Entregable:</a:t>
-            </a:r>
-            <a:r>
-              <a:rPr sz="2000" b="0" i="0">
-                <a:solidFill>
-                  <a:srgbClr val="333333"/>
-                </a:solidFill>
-                <a:latin typeface="Calibri"/>
-              </a:rPr>
-              <a:t> Un documento con la matriz de trazabilidad RF a CU a Clase, el glosario de nombres canonicos, el acta de revision entre pares con hallazgos clasificados por severidad y el backlog priorizado de correcciones, subido a la plataforma del curso.</a:t>
-            </a:r>
-          </a:p>
-          <a:p>
-            <a:pPr>
-              <a:spcAft>
-                <a:spcPts val="800"/>
-              </a:spcAft>
-            </a:pPr>
-            <a:r>
-              <a:rPr sz="2000" b="0" i="0">
-                <a:solidFill>
-                  <a:srgbClr val="333333"/>
-                </a:solidFill>
-                <a:latin typeface="Calibri"/>
-              </a:rPr>
-              <a:t>–   </a:t>
-            </a:r>
-            <a:r>
-              <a:rPr sz="2000" b="1" i="0">
-                <a:solidFill>
-                  <a:srgbClr val="333333"/>
-                </a:solidFill>
-                <a:latin typeface="Calibri"/>
-              </a:rPr>
-              <a:t>Exito:</a:t>
-            </a:r>
-            <a:r>
-              <a:rPr sz="2000" b="0" i="0">
-                <a:solidFill>
-                  <a:srgbClr val="333333"/>
-                </a:solidFill>
-                <a:latin typeface="Calibri"/>
-              </a:rPr>
-              <a:t> La matriz de trazabilidad cubre el cien por ciento de los RF y no deja casos de uso ni clases sin origen en algun requisito.</a:t>
-            </a:r>
-          </a:p>
-          <a:p>
-            <a:pPr>
-              <a:spcAft>
-                <a:spcPts val="800"/>
-              </a:spcAft>
-            </a:pPr>
-            <a:r>
-              <a:rPr sz="2000" b="0" i="0">
-                <a:solidFill>
-                  <a:srgbClr val="333333"/>
-                </a:solidFill>
-                <a:latin typeface="Calibri"/>
-              </a:rPr>
-              <a:t>–   </a:t>
-            </a:r>
-            <a:r>
-              <a:rPr sz="2000" b="1" i="0">
-                <a:solidFill>
-                  <a:srgbClr val="333333"/>
-                </a:solidFill>
-                <a:latin typeface="Calibri"/>
-              </a:rPr>
-              <a:t>Exito:</a:t>
-            </a:r>
-            <a:r>
-              <a:rPr sz="2000" b="0" i="0">
-                <a:solidFill>
-                  <a:srgbClr val="333333"/>
-                </a:solidFill>
-                <a:latin typeface="Calibri"/>
-              </a:rPr>
-              <a:t> El glosario tiene minimo ocho conceptos con nombre canonico, definicion de una linea y sinonimos prohibidos, y los artefactos ya fueron renombrados en consecuencia.</a:t>
-            </a:r>
-          </a:p>
-          <a:p>
-            <a:pPr>
-              <a:spcAft>
-                <a:spcPts val="800"/>
-              </a:spcAft>
-            </a:pPr>
-            <a:r>
-              <a:rPr sz="2000" b="0" i="0">
-                <a:solidFill>
-                  <a:srgbClr val="333333"/>
-                </a:solidFill>
-                <a:latin typeface="Calibri"/>
-              </a:rPr>
-              <a:t>–   </a:t>
-            </a:r>
-            <a:r>
-              <a:rPr sz="2000" b="1" i="0">
-                <a:solidFill>
-                  <a:srgbClr val="333333"/>
-                </a:solidFill>
-                <a:latin typeface="Calibri"/>
-              </a:rPr>
-              <a:t>Exito:</a:t>
-            </a:r>
-            <a:r>
-              <a:rPr sz="2000" b="0" i="0">
-                <a:solidFill>
-                  <a:srgbClr val="333333"/>
-                </a:solidFill>
-                <a:latin typeface="Calibri"/>
-              </a:rPr>
-              <a:t> El acta de revision entre pares registra minimo seis hallazgos con ubicacion exacta, descripcion objetiva y severidad asignada.</a:t>
-            </a:r>
-          </a:p>
-          <a:p>
-            <a:pPr>
-              <a:spcAft>
-                <a:spcPts val="800"/>
-              </a:spcAft>
-            </a:pPr>
-            <a:r>
-              <a:rPr sz="2000" b="0" i="0">
-                <a:solidFill>
-                  <a:srgbClr val="333333"/>
-                </a:solidFill>
-                <a:latin typeface="Calibri"/>
-              </a:rPr>
-              <a:t>–   </a:t>
-            </a:r>
-            <a:r>
-              <a:rPr sz="2000" b="1" i="0">
-                <a:solidFill>
-                  <a:srgbClr val="333333"/>
-                </a:solidFill>
-                <a:latin typeface="Calibri"/>
-              </a:rPr>
-              <a:t>Exito:</a:t>
-            </a:r>
-            <a:r>
-              <a:rPr sz="2000" b="0" i="0">
-                <a:solidFill>
-                  <a:srgbClr val="333333"/>
-                </a:solidFill>
-                <a:latin typeface="Calibri"/>
-              </a:rPr>
-              <a:t> El backlog tiene responsable y criterio de cierre verificable por item, y las correcciones de severidad bloqueante quedaron aplicadas en el paquete entregado.</a:t>
-            </a:r>
-          </a:p>
-          <a:p>
-            <a:pPr>
-              <a:spcAft>
-                <a:spcPts val="800"/>
-              </a:spcAft>
-            </a:pPr>
-            <a:r>
-              <a:rPr sz="2000" b="0" i="0">
-                <a:solidFill>
-                  <a:srgbClr val="333333"/>
-                </a:solidFill>
-                <a:latin typeface="Calibri"/>
-              </a:rPr>
-              <a:t>–   </a:t>
-            </a:r>
-            <a:r>
-              <a:rPr sz="2000" b="1" i="0">
-                <a:solidFill>
-                  <a:srgbClr val="333333"/>
-                </a:solidFill>
-                <a:latin typeface="Calibri"/>
-              </a:rPr>
-              <a:t>Entrega en la plataforma del curso</a:t>
-            </a:r>
-            <a:r>
-              <a:rPr sz="2000" b="0" i="0">
-                <a:solidFill>
-                  <a:srgbClr val="333333"/>
-                </a:solidFill>
-                <a:latin typeface="Calibri"/>
-              </a:rPr>
-              <a:t> — en la fecha que indique el docente.</a:t>
-            </a:r>
-          </a:p>
-        </p:txBody>
-      </p:sp>
-      <p:sp>
-        <p:nvSpPr>
-          <p:cNvPr id="6" name="TextBox 5"/>
-          <p:cNvSpPr txBox="1"/>
-          <p:nvPr/>
-        </p:nvSpPr>
-        <p:spPr>
-          <a:xfrm>
-            <a:off x="11185855" y="6473952"/>
-            <a:ext cx="640080" cy="274320"/>
-          </a:xfrm>
-          <a:prstGeom prst="rect">
-            <a:avLst/>
-          </a:prstGeom>
-          <a:noFill/>
-        </p:spPr>
-        <p:txBody>
-          <a:bodyPr wrap="square">
-            <a:spAutoFit/>
-          </a:bodyPr>
-          <a:lstStyle/>
-          <a:p>
-            <a:pPr algn="r"/>
-            <a:r>
-              <a:rPr sz="1100" b="0" i="0">
-                <a:solidFill>
-                  <a:srgbClr val="666666"/>
-                </a:solidFill>
-                <a:latin typeface="Calibri"/>
-              </a:rPr>
-              <a:t>21</a:t>
-            </a:r>
-          </a:p>
-        </p:txBody>
-      </p:sp>
-    </p:spTree>
-  </p:cSld>
-  <p:clrMapOvr>
-    <a:masterClrMapping/>
-  </p:clrMapOvr>
-</p:sld>
-</file>
-
-<file path=ppt/slides/slide22.xml><?xml version="1.0" encoding="utf-8"?>
-<p:sld xmlns:a="http://schemas.openxmlformats.org/drawingml/2006/main" xmlns:p="http://schemas.openxmlformats.org/presentationml/2006/main" xmlns:r="http://schemas.openxmlformats.org/officeDocument/2006/relationships">
-  <p:cSld>
-    <p:bg>
-      <p:bgPr>
-        <a:solidFill>
-          <a:srgbClr val="FFFFFF"/>
-        </a:solidFill>
-        <a:effectLst/>
-      </p:bgPr>
-    </p:bg>
-    <p:spTree>
-      <p:nvGrpSpPr>
-        <p:cNvPr id="1" name=""/>
-        <p:cNvGrpSpPr/>
-        <p:nvPr/>
-      </p:nvGrpSpPr>
-      <p:grpSpPr/>
-      <p:sp>
-        <p:nvSpPr>
-          <p:cNvPr id="2" name="Rectangle 1"/>
-          <p:cNvSpPr/>
-          <p:nvPr/>
-        </p:nvSpPr>
-        <p:spPr>
-          <a:xfrm>
-            <a:off x="0" y="0"/>
-            <a:ext cx="12191695" cy="960120"/>
-          </a:xfrm>
-          <a:prstGeom prst="rect">
-            <a:avLst/>
-          </a:prstGeom>
-          <a:solidFill>
-            <a:srgbClr val="095292"/>
-          </a:solidFill>
-          <a:ln>
-            <a:noFill/>
-          </a:ln>
-        </p:spPr>
-        <p:style>
-          <a:lnRef idx="1">
-            <a:schemeClr val="accent1"/>
-          </a:lnRef>
-          <a:fillRef idx="3">
-            <a:schemeClr val="accent1"/>
-          </a:fillRef>
-          <a:effectRef idx="2">
-            <a:schemeClr val="accent1"/>
-          </a:effectRef>
-          <a:fontRef idx="minor">
-            <a:schemeClr val="lt1"/>
-          </a:fontRef>
-        </p:style>
-        <p:txBody>
-          <a:bodyPr rtlCol="0" anchor="ctr"/>
-          <a:lstStyle/>
-          <a:p>
-            <a:pPr algn="ctr"/>
-          </a:p>
-        </p:txBody>
-      </p:sp>
-      <p:sp>
-        <p:nvSpPr>
-          <p:cNvPr id="3" name="Rectangle 2"/>
-          <p:cNvSpPr/>
-          <p:nvPr/>
-        </p:nvSpPr>
-        <p:spPr>
-          <a:xfrm>
-            <a:off x="0" y="960120"/>
-            <a:ext cx="12191695" cy="41148"/>
-          </a:xfrm>
-          <a:prstGeom prst="rect">
-            <a:avLst/>
-          </a:prstGeom>
-          <a:solidFill>
-            <a:srgbClr val="FFD000"/>
-          </a:solidFill>
-          <a:ln>
-            <a:noFill/>
-          </a:ln>
-        </p:spPr>
-        <p:style>
-          <a:lnRef idx="1">
-            <a:schemeClr val="accent1"/>
-          </a:lnRef>
-          <a:fillRef idx="3">
-            <a:schemeClr val="accent1"/>
-          </a:fillRef>
-          <a:effectRef idx="2">
-            <a:schemeClr val="accent1"/>
-          </a:effectRef>
-          <a:fontRef idx="minor">
-            <a:schemeClr val="lt1"/>
-          </a:fontRef>
-        </p:style>
-        <p:txBody>
-          <a:bodyPr rtlCol="0" anchor="ctr"/>
-          <a:lstStyle/>
-          <a:p>
-            <a:pPr algn="ctr"/>
-          </a:p>
-        </p:txBody>
-      </p:sp>
-      <p:sp>
-        <p:nvSpPr>
-          <p:cNvPr id="4" name="TextBox 3"/>
-          <p:cNvSpPr txBox="1"/>
-          <p:nvPr/>
-        </p:nvSpPr>
-        <p:spPr>
-          <a:xfrm>
-            <a:off x="457200" y="164592"/>
-            <a:ext cx="11277295" cy="502920"/>
-          </a:xfrm>
-          <a:prstGeom prst="rect">
-            <a:avLst/>
-          </a:prstGeom>
-          <a:noFill/>
-        </p:spPr>
-        <p:txBody>
-          <a:bodyPr wrap="square">
-            <a:spAutoFit/>
-          </a:bodyPr>
-          <a:lstStyle/>
-          <a:p>
-            <a:r>
-              <a:rPr sz="2600" b="1" i="0">
-                <a:solidFill>
-                  <a:srgbClr val="FFFFFF"/>
-                </a:solidFill>
-                <a:latin typeface="Calibri"/>
-              </a:rPr>
-              <a:t>Para el PI esta semana</a:t>
-            </a:r>
-          </a:p>
-        </p:txBody>
-      </p:sp>
-      <p:sp>
-        <p:nvSpPr>
-          <p:cNvPr id="5" name="Rounded Rectangle 4"/>
-          <p:cNvSpPr/>
-          <p:nvPr/>
-        </p:nvSpPr>
-        <p:spPr>
-          <a:xfrm>
-            <a:off x="457200" y="1261872"/>
-            <a:ext cx="11277295" cy="1051560"/>
-          </a:xfrm>
-          <a:prstGeom prst="roundRect">
-            <a:avLst>
-              <a:gd name="adj" fmla="val 12000"/>
-            </a:avLst>
-          </a:prstGeom>
-          <a:solidFill>
-            <a:srgbClr val="E8F4FA"/>
-          </a:solidFill>
-          <a:ln>
-            <a:noFill/>
-          </a:ln>
-        </p:spPr>
-        <p:style>
-          <a:lnRef idx="1">
-            <a:schemeClr val="accent1"/>
-          </a:lnRef>
-          <a:fillRef idx="3">
-            <a:schemeClr val="accent1"/>
-          </a:fillRef>
-          <a:effectRef idx="2">
-            <a:schemeClr val="accent1"/>
-          </a:effectRef>
-          <a:fontRef idx="minor">
-            <a:schemeClr val="lt1"/>
-          </a:fontRef>
-        </p:style>
-        <p:txBody>
-          <a:bodyPr rtlCol="0" anchor="ctr"/>
-          <a:lstStyle/>
-          <a:p>
-            <a:pPr algn="ctr"/>
-          </a:p>
-        </p:txBody>
-      </p:sp>
-      <p:sp>
-        <p:nvSpPr>
-          <p:cNvPr id="6" name="Rectangle 5"/>
-          <p:cNvSpPr/>
-          <p:nvPr/>
-        </p:nvSpPr>
-        <p:spPr>
-          <a:xfrm>
-            <a:off x="457200" y="1261872"/>
-            <a:ext cx="128016" cy="1051560"/>
-          </a:xfrm>
-          <a:prstGeom prst="rect">
-            <a:avLst/>
-          </a:prstGeom>
-          <a:solidFill>
-            <a:srgbClr val="269CCB"/>
-          </a:solidFill>
-          <a:ln>
-            <a:noFill/>
-          </a:ln>
-        </p:spPr>
-        <p:style>
-          <a:lnRef idx="1">
-            <a:schemeClr val="accent1"/>
-          </a:lnRef>
-          <a:fillRef idx="3">
-            <a:schemeClr val="accent1"/>
-          </a:fillRef>
-          <a:effectRef idx="2">
-            <a:schemeClr val="accent1"/>
-          </a:effectRef>
-          <a:fontRef idx="minor">
-            <a:schemeClr val="lt1"/>
-          </a:fontRef>
-        </p:style>
-        <p:txBody>
-          <a:bodyPr rtlCol="0" anchor="ctr"/>
-          <a:lstStyle/>
-          <a:p>
-            <a:pPr algn="ctr"/>
-          </a:p>
-        </p:txBody>
-      </p:sp>
-      <p:sp>
-        <p:nvSpPr>
-          <p:cNvPr id="7" name="TextBox 6"/>
-          <p:cNvSpPr txBox="1"/>
-          <p:nvPr/>
-        </p:nvSpPr>
-        <p:spPr>
-          <a:xfrm>
-            <a:off x="777240" y="1399031"/>
-            <a:ext cx="10774375" cy="822959"/>
-          </a:xfrm>
-          <a:prstGeom prst="rect">
-            <a:avLst/>
-          </a:prstGeom>
-          <a:noFill/>
-        </p:spPr>
-        <p:txBody>
-          <a:bodyPr wrap="square">
-            <a:spAutoFit/>
-          </a:bodyPr>
-          <a:lstStyle/>
-          <a:p>
-            <a:r>
-              <a:rPr sz="1200" b="1" i="0">
-                <a:solidFill>
-                  <a:srgbClr val="269CCB"/>
-                </a:solidFill>
-                <a:latin typeface="Calibri"/>
-              </a:rPr>
-              <a:t>Info</a:t>
-            </a:r>
-          </a:p>
-          <a:p>
-            <a:pPr>
-              <a:spcBef>
-                <a:spcPts val="400"/>
-              </a:spcBef>
-            </a:pPr>
-            <a:r>
-              <a:rPr sz="1400" b="0" i="0">
-                <a:solidFill>
-                  <a:srgbClr val="333333"/>
-                </a:solidFill>
-                <a:latin typeface="Calibri"/>
-              </a:rPr>
-              <a:t>Hito: El paquete de diseño de VetCare queda auditado y consistente: requisitos, casos de uso y diagrama de clases usan los mismos nombres y no se contradicen entre si.</a:t>
-            </a:r>
-          </a:p>
-        </p:txBody>
-      </p:sp>
-      <p:sp>
-        <p:nvSpPr>
-          <p:cNvPr id="8" name="Rounded Rectangle 7"/>
-          <p:cNvSpPr/>
-          <p:nvPr/>
-        </p:nvSpPr>
-        <p:spPr>
-          <a:xfrm>
-            <a:off x="457200" y="2478024"/>
-            <a:ext cx="11277295" cy="1051560"/>
-          </a:xfrm>
-          <a:prstGeom prst="roundRect">
-            <a:avLst>
-              <a:gd name="adj" fmla="val 12000"/>
-            </a:avLst>
-          </a:prstGeom>
-          <a:solidFill>
-            <a:srgbClr val="FFF8E1"/>
-          </a:solidFill>
-          <a:ln>
-            <a:noFill/>
-          </a:ln>
-        </p:spPr>
-        <p:style>
-          <a:lnRef idx="1">
-            <a:schemeClr val="accent1"/>
-          </a:lnRef>
-          <a:fillRef idx="3">
-            <a:schemeClr val="accent1"/>
-          </a:fillRef>
-          <a:effectRef idx="2">
-            <a:schemeClr val="accent1"/>
-          </a:effectRef>
-          <a:fontRef idx="minor">
-            <a:schemeClr val="lt1"/>
-          </a:fontRef>
-        </p:style>
-        <p:txBody>
-          <a:bodyPr rtlCol="0" anchor="ctr"/>
-          <a:lstStyle/>
-          <a:p>
-            <a:pPr algn="ctr"/>
-          </a:p>
-        </p:txBody>
-      </p:sp>
-      <p:sp>
-        <p:nvSpPr>
-          <p:cNvPr id="9" name="Rectangle 8"/>
-          <p:cNvSpPr/>
-          <p:nvPr/>
-        </p:nvSpPr>
-        <p:spPr>
-          <a:xfrm>
-            <a:off x="457200" y="2478024"/>
-            <a:ext cx="128016" cy="1051560"/>
-          </a:xfrm>
-          <a:prstGeom prst="rect">
-            <a:avLst/>
-          </a:prstGeom>
-          <a:solidFill>
-            <a:srgbClr val="FFD000"/>
-          </a:solidFill>
-          <a:ln>
-            <a:noFill/>
-          </a:ln>
-        </p:spPr>
-        <p:style>
-          <a:lnRef idx="1">
-            <a:schemeClr val="accent1"/>
-          </a:lnRef>
-          <a:fillRef idx="3">
-            <a:schemeClr val="accent1"/>
-          </a:fillRef>
-          <a:effectRef idx="2">
-            <a:schemeClr val="accent1"/>
-          </a:effectRef>
-          <a:fontRef idx="minor">
-            <a:schemeClr val="lt1"/>
-          </a:fontRef>
-        </p:style>
-        <p:txBody>
-          <a:bodyPr rtlCol="0" anchor="ctr"/>
-          <a:lstStyle/>
-          <a:p>
-            <a:pPr algn="ctr"/>
-          </a:p>
-        </p:txBody>
-      </p:sp>
-      <p:sp>
-        <p:nvSpPr>
-          <p:cNvPr id="10" name="TextBox 9"/>
-          <p:cNvSpPr txBox="1"/>
-          <p:nvPr/>
-        </p:nvSpPr>
-        <p:spPr>
-          <a:xfrm>
-            <a:off x="777240" y="2615184"/>
-            <a:ext cx="10774375" cy="822959"/>
-          </a:xfrm>
-          <a:prstGeom prst="rect">
-            <a:avLst/>
-          </a:prstGeom>
-          <a:noFill/>
-        </p:spPr>
-        <p:txBody>
-          <a:bodyPr wrap="square">
-            <a:spAutoFit/>
-          </a:bodyPr>
-          <a:lstStyle/>
-          <a:p>
-            <a:r>
-              <a:rPr sz="1200" b="1" i="0">
-                <a:solidFill>
-                  <a:srgbClr val="FFD000"/>
-                </a:solidFill>
-                <a:latin typeface="Calibri"/>
-              </a:rPr>
-              <a:t>Aclaración</a:t>
-            </a:r>
-          </a:p>
-          <a:p>
-            <a:pPr>
-              <a:spcBef>
-                <a:spcPts val="400"/>
-              </a:spcBef>
-            </a:pPr>
-            <a:r>
-              <a:rPr sz="1400" b="0" i="0">
-                <a:solidFill>
-                  <a:srgbClr val="333333"/>
-                </a:solidFill>
-                <a:latin typeface="Calibri"/>
-              </a:rPr>
-              <a:t>Enunciado completo: Clases/Proyecto Integrador/ (VetCare).</a:t>
-            </a:r>
-          </a:p>
-        </p:txBody>
-      </p:sp>
-      <p:sp>
-        <p:nvSpPr>
-          <p:cNvPr id="11" name="Rounded Rectangle 10"/>
-          <p:cNvSpPr/>
-          <p:nvPr/>
-        </p:nvSpPr>
-        <p:spPr>
-          <a:xfrm>
-            <a:off x="457200" y="3694176"/>
-            <a:ext cx="11277295" cy="1051560"/>
-          </a:xfrm>
-          <a:prstGeom prst="roundRect">
-            <a:avLst>
-              <a:gd name="adj" fmla="val 12000"/>
-            </a:avLst>
-          </a:prstGeom>
-          <a:solidFill>
-            <a:srgbClr val="FBE4E4"/>
-          </a:solidFill>
-          <a:ln>
-            <a:noFill/>
-          </a:ln>
-        </p:spPr>
-        <p:style>
-          <a:lnRef idx="1">
-            <a:schemeClr val="accent1"/>
-          </a:lnRef>
-          <a:fillRef idx="3">
-            <a:schemeClr val="accent1"/>
-          </a:fillRef>
-          <a:effectRef idx="2">
-            <a:schemeClr val="accent1"/>
-          </a:effectRef>
-          <a:fontRef idx="minor">
-            <a:schemeClr val="lt1"/>
-          </a:fontRef>
-        </p:style>
-        <p:txBody>
-          <a:bodyPr rtlCol="0" anchor="ctr"/>
-          <a:lstStyle/>
-          <a:p>
-            <a:pPr algn="ctr"/>
-          </a:p>
-        </p:txBody>
-      </p:sp>
-      <p:sp>
-        <p:nvSpPr>
-          <p:cNvPr id="12" name="Rectangle 11"/>
-          <p:cNvSpPr/>
-          <p:nvPr/>
-        </p:nvSpPr>
-        <p:spPr>
-          <a:xfrm>
-            <a:off x="457200" y="3694176"/>
-            <a:ext cx="128016" cy="1051560"/>
-          </a:xfrm>
-          <a:prstGeom prst="rect">
-            <a:avLst/>
-          </a:prstGeom>
-          <a:solidFill>
-            <a:srgbClr val="A02030"/>
-          </a:solidFill>
-          <a:ln>
-            <a:noFill/>
-          </a:ln>
-        </p:spPr>
-        <p:style>
-          <a:lnRef idx="1">
-            <a:schemeClr val="accent1"/>
-          </a:lnRef>
-          <a:fillRef idx="3">
-            <a:schemeClr val="accent1"/>
-          </a:fillRef>
-          <a:effectRef idx="2">
-            <a:schemeClr val="accent1"/>
-          </a:effectRef>
-          <a:fontRef idx="minor">
-            <a:schemeClr val="lt1"/>
-          </a:fontRef>
-        </p:style>
-        <p:txBody>
-          <a:bodyPr rtlCol="0" anchor="ctr"/>
-          <a:lstStyle/>
-          <a:p>
-            <a:pPr algn="ctr"/>
-          </a:p>
-        </p:txBody>
-      </p:sp>
-      <p:sp>
-        <p:nvSpPr>
-          <p:cNvPr id="13" name="TextBox 12"/>
-          <p:cNvSpPr txBox="1"/>
-          <p:nvPr/>
-        </p:nvSpPr>
-        <p:spPr>
-          <a:xfrm>
-            <a:off x="777240" y="3831336"/>
-            <a:ext cx="10774375" cy="822959"/>
-          </a:xfrm>
-          <a:prstGeom prst="rect">
-            <a:avLst/>
-          </a:prstGeom>
-          <a:noFill/>
-        </p:spPr>
-        <p:txBody>
-          <a:bodyPr wrap="square">
-            <a:spAutoFit/>
-          </a:bodyPr>
-          <a:lstStyle/>
-          <a:p>
-            <a:r>
-              <a:rPr sz="1200" b="1" i="0">
-                <a:solidFill>
-                  <a:srgbClr val="A02030"/>
-                </a:solidFill>
-                <a:latin typeface="Calibri"/>
-              </a:rPr>
-              <a:t>Atención</a:t>
-            </a:r>
-          </a:p>
-          <a:p>
-            <a:pPr>
-              <a:spcBef>
-                <a:spcPts val="400"/>
-              </a:spcBef>
-            </a:pPr>
-            <a:r>
-              <a:rPr sz="1400" b="0" i="0">
-                <a:solidFill>
-                  <a:srgbClr val="333333"/>
-                </a:solidFill>
-                <a:latin typeface="Calibri"/>
-              </a:rPr>
-              <a:t>Entrega del taller, si el docente lo asigna · en la fecha que indique el docente.</a:t>
-            </a:r>
-          </a:p>
-        </p:txBody>
-      </p:sp>
-      <p:sp>
-        <p:nvSpPr>
-          <p:cNvPr id="14" name="TextBox 13"/>
-          <p:cNvSpPr txBox="1"/>
-          <p:nvPr/>
-        </p:nvSpPr>
-        <p:spPr>
-          <a:xfrm>
-            <a:off x="11185855" y="6473952"/>
-            <a:ext cx="640080" cy="274320"/>
-          </a:xfrm>
-          <a:prstGeom prst="rect">
-            <a:avLst/>
-          </a:prstGeom>
-          <a:noFill/>
-        </p:spPr>
-        <p:txBody>
-          <a:bodyPr wrap="square">
-            <a:spAutoFit/>
-          </a:bodyPr>
-          <a:lstStyle/>
-          <a:p>
-            <a:pPr algn="r"/>
-            <a:r>
-              <a:rPr sz="1100" b="0" i="0">
-                <a:solidFill>
-                  <a:srgbClr val="666666"/>
-                </a:solidFill>
-                <a:latin typeface="Calibri"/>
-              </a:rPr>
-              <a:t>22</a:t>
-            </a:r>
-          </a:p>
-        </p:txBody>
-      </p:sp>
-    </p:spTree>
-  </p:cSld>
-  <p:clrMapOvr>
-    <a:masterClrMapping/>
-  </p:clrMapOvr>
-</p:sld>
-</file>
-
-<file path=ppt/slides/slide23.xml><?xml version="1.0" encoding="utf-8"?>
-<p:sld xmlns:a="http://schemas.openxmlformats.org/drawingml/2006/main" xmlns:p="http://schemas.openxmlformats.org/presentationml/2006/main" xmlns:r="http://schemas.openxmlformats.org/officeDocument/2006/relationships">
-  <p:cSld>
-    <p:bg>
-      <p:bgPr>
-        <a:solidFill>
-          <a:srgbClr val="FFFFFF"/>
-        </a:solidFill>
-        <a:effectLst/>
-      </p:bgPr>
-    </p:bg>
-    <p:spTree>
-      <p:nvGrpSpPr>
-        <p:cNvPr id="1" name=""/>
-        <p:cNvGrpSpPr/>
-        <p:nvPr/>
-      </p:nvGrpSpPr>
-      <p:grpSpPr/>
-      <p:sp>
-        <p:nvSpPr>
-          <p:cNvPr id="2" name="Rectangle 1"/>
-          <p:cNvSpPr/>
-          <p:nvPr/>
-        </p:nvSpPr>
-        <p:spPr>
-          <a:xfrm>
-            <a:off x="0" y="0"/>
-            <a:ext cx="12191695" cy="164592"/>
-          </a:xfrm>
-          <a:prstGeom prst="rect">
-            <a:avLst/>
-          </a:prstGeom>
-          <a:solidFill>
-            <a:srgbClr val="269CCB"/>
-          </a:solidFill>
-          <a:ln>
-            <a:noFill/>
-          </a:ln>
-        </p:spPr>
-        <p:style>
-          <a:lnRef idx="1">
-            <a:schemeClr val="accent1"/>
-          </a:lnRef>
-          <a:fillRef idx="3">
-            <a:schemeClr val="accent1"/>
-          </a:fillRef>
-          <a:effectRef idx="2">
-            <a:schemeClr val="accent1"/>
-          </a:effectRef>
-          <a:fontRef idx="minor">
-            <a:schemeClr val="lt1"/>
-          </a:fontRef>
-        </p:style>
-        <p:txBody>
-          <a:bodyPr rtlCol="0" anchor="ctr"/>
-          <a:lstStyle/>
-          <a:p>
-            <a:pPr algn="ctr"/>
-          </a:p>
-        </p:txBody>
-      </p:sp>
-      <p:pic>
-        <p:nvPicPr>
-          <p:cNvPr id="3" name="Picture 2" descr="logo_uniajc_color.png"/>
-          <p:cNvPicPr>
-            <a:picLocks noChangeAspect="1"/>
-          </p:cNvPicPr>
-          <p:nvPr/>
-        </p:nvPicPr>
-        <p:blipFill>
-          <a:blip r:embed="rId2"/>
-          <a:stretch>
-            <a:fillRect/>
-          </a:stretch>
-        </p:blipFill>
-        <p:spPr>
-          <a:xfrm>
-            <a:off x="10271455" y="5998464"/>
-            <a:ext cx="1463040" cy="643233"/>
-          </a:xfrm>
-          <a:prstGeom prst="rect">
-            <a:avLst/>
-          </a:prstGeom>
-        </p:spPr>
-      </p:pic>
-      <p:sp>
-        <p:nvSpPr>
-          <p:cNvPr id="4" name="TextBox 3"/>
-          <p:cNvSpPr txBox="1"/>
-          <p:nvPr/>
-        </p:nvSpPr>
-        <p:spPr>
-          <a:xfrm>
-            <a:off x="457200" y="1737360"/>
-            <a:ext cx="11277295" cy="1097280"/>
-          </a:xfrm>
-          <a:prstGeom prst="rect">
-            <a:avLst/>
-          </a:prstGeom>
-          <a:noFill/>
-        </p:spPr>
-        <p:txBody>
-          <a:bodyPr wrap="square" anchor="ctr"/>
-          <a:lstStyle/>
-          <a:p>
-            <a:pPr algn="ctr"/>
-            <a:r>
-              <a:rPr sz="3400" b="1" i="0">
-                <a:solidFill>
-                  <a:srgbClr val="095292"/>
-                </a:solidFill>
-                <a:latin typeface="Calibri"/>
-              </a:rPr>
-              <a:t>Clase 11 · VetCare avanza</a:t>
-            </a:r>
-          </a:p>
-        </p:txBody>
-      </p:sp>
-      <p:sp>
-        <p:nvSpPr>
-          <p:cNvPr id="5" name="TextBox 4"/>
-          <p:cNvSpPr txBox="1"/>
-          <p:nvPr/>
-        </p:nvSpPr>
-        <p:spPr>
-          <a:xfrm>
-            <a:off x="457200" y="3017520"/>
-            <a:ext cx="11277295" cy="1645920"/>
-          </a:xfrm>
-          <a:prstGeom prst="rect">
-            <a:avLst/>
-          </a:prstGeom>
-          <a:noFill/>
-        </p:spPr>
-        <p:txBody>
-          <a:bodyPr wrap="square">
-            <a:spAutoFit/>
-          </a:bodyPr>
-          <a:lstStyle/>
-          <a:p>
-            <a:pPr algn="ctr">
-              <a:spcAft>
-                <a:spcPts val="600"/>
-              </a:spcAft>
-            </a:pPr>
-            <a:r>
-              <a:rPr sz="1600" b="0" i="0">
-                <a:solidFill>
-                  <a:srgbClr val="333333"/>
-                </a:solidFill>
-                <a:latin typeface="Calibri"/>
-              </a:rPr>
-              <a:t>El paquete de diseño de VetCare queda auditado y consistente: requisitos, casos de uso y diagrama de clases usan los mismos nombres y no se contradicen entre si.</a:t>
-            </a:r>
-          </a:p>
-          <a:p>
-            <a:pPr algn="ctr">
-              <a:spcAft>
-                <a:spcPts val="600"/>
-              </a:spcAft>
-            </a:pPr>
-            <a:r>
-              <a:rPr sz="1600" b="0" i="0">
-                <a:solidFill>
-                  <a:srgbClr val="333333"/>
-                </a:solidFill>
-                <a:latin typeface="Calibri"/>
-              </a:rPr>
-              <a:t>Entregable: Un documento con la matriz de trazabilidad RF a CU a Clase, el glosario de nombres canonicos, el acta de revision entre pares con hallazgos clasificados por severidad y el backlog priorizado de correcciones, subido a la plataforma del curso.</a:t>
-            </a:r>
-          </a:p>
-          <a:p>
-            <a:pPr algn="ctr">
-              <a:spcAft>
-                <a:spcPts val="600"/>
-              </a:spcAft>
-            </a:pPr>
-            <a:r>
-              <a:rPr sz="1600" b="0" i="0">
-                <a:solidFill>
-                  <a:srgbClr val="333333"/>
-                </a:solidFill>
-                <a:latin typeface="Calibri"/>
-              </a:rPr>
-              <a:t>Siguiente clase: continuamos el hilo del PI</a:t>
-            </a:r>
-          </a:p>
-        </p:txBody>
-      </p:sp>
-      <p:sp>
-        <p:nvSpPr>
-          <p:cNvPr id="6" name="TextBox 5"/>
-          <p:cNvSpPr txBox="1"/>
-          <p:nvPr/>
-        </p:nvSpPr>
-        <p:spPr>
-          <a:xfrm>
-            <a:off x="457200" y="4754880"/>
-            <a:ext cx="11277295" cy="640080"/>
-          </a:xfrm>
-          <a:prstGeom prst="rect">
-            <a:avLst/>
-          </a:prstGeom>
-          <a:noFill/>
-        </p:spPr>
-        <p:txBody>
-          <a:bodyPr wrap="square">
-            <a:spAutoFit/>
-          </a:bodyPr>
-          <a:lstStyle/>
-          <a:p>
-            <a:pPr algn="ctr"/>
-            <a:r>
-              <a:rPr sz="2000" b="1" i="0">
-                <a:solidFill>
-                  <a:srgbClr val="269CCB"/>
-                </a:solidFill>
-                <a:latin typeface="Calibri"/>
-              </a:rPr>
-              <a:t>Teoria al servicio del proyecto</a:t>
             </a:r>
           </a:p>
         </p:txBody>
@@ -10476,7 +7109,7 @@
                 </a:solidFill>
                 <a:latin typeface="Calibri"/>
               </a:rPr>
-              <a:t>Encuadre y repaso del avance</a:t>
+              <a:t>Encuadre y repaso</a:t>
             </a:r>
           </a:p>
         </p:txBody>
@@ -10821,7 +7454,7 @@
                 </a:solidFill>
                 <a:latin typeface="Calibri"/>
               </a:rPr>
-              <a:t>Taller guiado = avance del PI</a:t>
+              <a:t>Practica (opcional, guia en la carpeta)</a:t>
             </a:r>
           </a:p>
         </p:txBody>
@@ -10936,7 +7569,7 @@
                 </a:solidFill>
                 <a:latin typeface="Calibri"/>
               </a:rPr>
-              <a:t>Criterios de exito y cierre</a:t>
+              <a:t>Sintesis y cierre</a:t>
             </a:r>
           </a:p>
         </p:txBody>
@@ -12947,4 +9580,324 @@
   </a:objectDefaults>
   <a:extraClrSchemeLst/>
 </a:theme>
+</file>
+
+<file path=ppt/theme/theme2.xml><?xml version="1.0" encoding="utf-8"?>
+<a:theme xmlns:a="http://schemas.openxmlformats.org/drawingml/2006/main" name="Office Theme">
+  <a:themeElements>
+    <a:clrScheme name="Office">
+      <a:dk1>
+        <a:sysClr val="windowText" lastClr="000000"/>
+      </a:dk1>
+      <a:lt1>
+        <a:sysClr val="window" lastClr="FFFFFF"/>
+      </a:lt1>
+      <a:dk2>
+        <a:srgbClr val="1F497D"/>
+      </a:dk2>
+      <a:lt2>
+        <a:srgbClr val="EEECE1"/>
+      </a:lt2>
+      <a:accent1>
+        <a:srgbClr val="4F81BD"/>
+      </a:accent1>
+      <a:accent2>
+        <a:srgbClr val="C0504D"/>
+      </a:accent2>
+      <a:accent3>
+        <a:srgbClr val="9BBB59"/>
+      </a:accent3>
+      <a:accent4>
+        <a:srgbClr val="8064A2"/>
+      </a:accent4>
+      <a:accent5>
+        <a:srgbClr val="4BACC6"/>
+      </a:accent5>
+      <a:accent6>
+        <a:srgbClr val="F79646"/>
+      </a:accent6>
+      <a:hlink>
+        <a:srgbClr val="0000FF"/>
+      </a:hlink>
+      <a:folHlink>
+        <a:srgbClr val="800080"/>
+      </a:folHlink>
+    </a:clrScheme>
+    <a:fontScheme name="Office">
+      <a:majorFont>
+        <a:latin typeface="Calibri"/>
+        <a:ea typeface=""/>
+        <a:cs typeface=""/>
+        <a:font script="Jpan" typeface="ＭＳ Ｐゴシック"/>
+        <a:font script="Hang" typeface="맑은 고딕"/>
+        <a:font script="Hans" typeface="宋体"/>
+        <a:font script="Hant" typeface="新細明體"/>
+        <a:font script="Arab" typeface="Times New Roman"/>
+        <a:font script="Hebr" typeface="Times New Roman"/>
+        <a:font script="Thai" typeface="Angsana New"/>
+        <a:font script="Ethi" typeface="Nyala"/>
+        <a:font script="Beng" typeface="Vrinda"/>
+        <a:font script="Gujr" typeface="Shruti"/>
+        <a:font script="Khmr" typeface="MoolBoran"/>
+        <a:font script="Knda" typeface="Tunga"/>
+        <a:font script="Guru" typeface="Raavi"/>
+        <a:font script="Cans" typeface="Euphemia"/>
+        <a:font script="Cher" typeface="Plantagenet Cherokee"/>
+        <a:font script="Yiii" typeface="Microsoft Yi Baiti"/>
+        <a:font script="Tibt" typeface="Microsoft Himalaya"/>
+        <a:font script="Thaa" typeface="MV Boli"/>
+        <a:font script="Deva" typeface="Mangal"/>
+        <a:font script="Telu" typeface="Gautami"/>
+        <a:font script="Taml" typeface="Latha"/>
+        <a:font script="Syrc" typeface="Estrangelo Edessa"/>
+        <a:font script="Orya" typeface="Kalinga"/>
+        <a:font script="Mlym" typeface="Kartika"/>
+        <a:font script="Laoo" typeface="DokChampa"/>
+        <a:font script="Sinh" typeface="Iskoola Pota"/>
+        <a:font script="Mong" typeface="Mongolian Baiti"/>
+        <a:font script="Viet" typeface="Times New Roman"/>
+        <a:font script="Uigh" typeface="Microsoft Uighur"/>
+        <a:font script="Geor" typeface="Sylfaen"/>
+      </a:majorFont>
+      <a:minorFont>
+        <a:latin typeface="Calibri"/>
+        <a:ea typeface=""/>
+        <a:cs typeface=""/>
+        <a:font script="Jpan" typeface="ＭＳ Ｐゴシック"/>
+        <a:font script="Hang" typeface="맑은 고딕"/>
+        <a:font script="Hans" typeface="宋体"/>
+        <a:font script="Hant" typeface="新細明體"/>
+        <a:font script="Arab" typeface="Arial"/>
+        <a:font script="Hebr" typeface="Arial"/>
+        <a:font script="Thai" typeface="Cordia New"/>
+        <a:font script="Ethi" typeface="Nyala"/>
+        <a:font script="Beng" typeface="Vrinda"/>
+        <a:font script="Gujr" typeface="Shruti"/>
+        <a:font script="Khmr" typeface="DaunPenh"/>
+        <a:font script="Knda" typeface="Tunga"/>
+        <a:font script="Guru" typeface="Raavi"/>
+        <a:font script="Cans" typeface="Euphemia"/>
+        <a:font script="Cher" typeface="Plantagenet Cherokee"/>
+        <a:font script="Yiii" typeface="Microsoft Yi Baiti"/>
+        <a:font script="Tibt" typeface="Microsoft Himalaya"/>
+        <a:font script="Thaa" typeface="MV Boli"/>
+        <a:font script="Deva" typeface="Mangal"/>
+        <a:font script="Telu" typeface="Gautami"/>
+        <a:font script="Taml" typeface="Latha"/>
+        <a:font script="Syrc" typeface="Estrangelo Edessa"/>
+        <a:font script="Orya" typeface="Kalinga"/>
+        <a:font script="Mlym" typeface="Kartika"/>
+        <a:font script="Laoo" typeface="DokChampa"/>
+        <a:font script="Sinh" typeface="Iskoola Pota"/>
+        <a:font script="Mong" typeface="Mongolian Baiti"/>
+        <a:font script="Viet" typeface="Arial"/>
+        <a:font script="Uigh" typeface="Microsoft Uighur"/>
+        <a:font script="Geor" typeface="Sylfaen"/>
+      </a:minorFont>
+    </a:fontScheme>
+    <a:fmtScheme name="Office">
+      <a:fillStyleLst>
+        <a:solidFill>
+          <a:schemeClr val="phClr"/>
+        </a:solidFill>
+        <a:gradFill rotWithShape="1">
+          <a:gsLst>
+            <a:gs pos="0">
+              <a:schemeClr val="phClr">
+                <a:tint val="50000"/>
+                <a:satMod val="300000"/>
+              </a:schemeClr>
+            </a:gs>
+            <a:gs pos="35000">
+              <a:schemeClr val="phClr">
+                <a:tint val="37000"/>
+                <a:satMod val="300000"/>
+              </a:schemeClr>
+            </a:gs>
+            <a:gs pos="100000">
+              <a:schemeClr val="phClr">
+                <a:tint val="15000"/>
+                <a:satMod val="350000"/>
+              </a:schemeClr>
+            </a:gs>
+          </a:gsLst>
+          <a:lin ang="16200000" scaled="1"/>
+        </a:gradFill>
+        <a:gradFill rotWithShape="1">
+          <a:gsLst>
+            <a:gs pos="0">
+              <a:schemeClr val="phClr">
+                <a:tint val="100000"/>
+                <a:shade val="100000"/>
+                <a:satMod val="130000"/>
+              </a:schemeClr>
+            </a:gs>
+            <a:gs pos="100000">
+              <a:schemeClr val="phClr">
+                <a:tint val="50000"/>
+                <a:shade val="100000"/>
+                <a:satMod val="350000"/>
+              </a:schemeClr>
+            </a:gs>
+          </a:gsLst>
+          <a:lin ang="16200000" scaled="0"/>
+        </a:gradFill>
+      </a:fillStyleLst>
+      <a:lnStyleLst>
+        <a:ln w="9525" cap="flat" cmpd="sng" algn="ctr">
+          <a:solidFill>
+            <a:schemeClr val="phClr">
+              <a:shade val="95000"/>
+              <a:satMod val="105000"/>
+            </a:schemeClr>
+          </a:solidFill>
+          <a:prstDash val="solid"/>
+        </a:ln>
+        <a:ln w="25400" cap="flat" cmpd="sng" algn="ctr">
+          <a:solidFill>
+            <a:schemeClr val="phClr"/>
+          </a:solidFill>
+          <a:prstDash val="solid"/>
+        </a:ln>
+        <a:ln w="38100" cap="flat" cmpd="sng" algn="ctr">
+          <a:solidFill>
+            <a:schemeClr val="phClr"/>
+          </a:solidFill>
+          <a:prstDash val="solid"/>
+        </a:ln>
+      </a:lnStyleLst>
+      <a:effectStyleLst>
+        <a:effectStyle>
+          <a:effectLst>
+            <a:outerShdw blurRad="40000" dist="20000" dir="5400000" rotWithShape="0">
+              <a:srgbClr val="000000">
+                <a:alpha val="38000"/>
+              </a:srgbClr>
+            </a:outerShdw>
+          </a:effectLst>
+        </a:effectStyle>
+        <a:effectStyle>
+          <a:effectLst>
+            <a:outerShdw blurRad="40000" dist="23000" dir="5400000" rotWithShape="0">
+              <a:srgbClr val="000000">
+                <a:alpha val="35000"/>
+              </a:srgbClr>
+            </a:outerShdw>
+          </a:effectLst>
+        </a:effectStyle>
+        <a:effectStyle>
+          <a:effectLst>
+            <a:outerShdw blurRad="40000" dist="23000" dir="5400000" rotWithShape="0">
+              <a:srgbClr val="000000">
+                <a:alpha val="35000"/>
+              </a:srgbClr>
+            </a:outerShdw>
+          </a:effectLst>
+          <a:scene3d>
+            <a:camera prst="orthographicFront">
+              <a:rot lat="0" lon="0" rev="0"/>
+            </a:camera>
+            <a:lightRig rig="threePt" dir="t">
+              <a:rot lat="0" lon="0" rev="1200000"/>
+            </a:lightRig>
+          </a:scene3d>
+          <a:sp3d>
+            <a:bevelT w="63500" h="25400"/>
+          </a:sp3d>
+        </a:effectStyle>
+      </a:effectStyleLst>
+      <a:bgFillStyleLst>
+        <a:solidFill>
+          <a:schemeClr val="phClr"/>
+        </a:solidFill>
+        <a:gradFill rotWithShape="1">
+          <a:gsLst>
+            <a:gs pos="0">
+              <a:schemeClr val="phClr">
+                <a:tint val="40000"/>
+                <a:satMod val="350000"/>
+              </a:schemeClr>
+            </a:gs>
+            <a:gs pos="40000">
+              <a:schemeClr val="phClr">
+                <a:tint val="45000"/>
+                <a:shade val="99000"/>
+                <a:satMod val="350000"/>
+              </a:schemeClr>
+            </a:gs>
+            <a:gs pos="100000">
+              <a:schemeClr val="phClr">
+                <a:shade val="20000"/>
+                <a:satMod val="255000"/>
+              </a:schemeClr>
+            </a:gs>
+          </a:gsLst>
+          <a:path path="circle">
+            <a:fillToRect l="50000" t="-80000" r="50000" b="180000"/>
+          </a:path>
+        </a:gradFill>
+        <a:gradFill rotWithShape="1">
+          <a:gsLst>
+            <a:gs pos="0">
+              <a:schemeClr val="phClr">
+                <a:tint val="80000"/>
+                <a:satMod val="300000"/>
+              </a:schemeClr>
+            </a:gs>
+            <a:gs pos="100000">
+              <a:schemeClr val="phClr">
+                <a:shade val="30000"/>
+                <a:satMod val="200000"/>
+              </a:schemeClr>
+            </a:gs>
+          </a:gsLst>
+          <a:path path="circle">
+            <a:fillToRect l="50000" t="50000" r="50000" b="50000"/>
+          </a:path>
+        </a:gradFill>
+      </a:bgFillStyleLst>
+    </a:fmtScheme>
+  </a:themeElements>
+  <a:objectDefaults>
+    <a:spDef>
+      <a:spPr/>
+      <a:bodyPr/>
+      <a:lstStyle/>
+      <a:style>
+        <a:lnRef idx="1">
+          <a:schemeClr val="accent1"/>
+        </a:lnRef>
+        <a:fillRef idx="3">
+          <a:schemeClr val="accent1"/>
+        </a:fillRef>
+        <a:effectRef idx="2">
+          <a:schemeClr val="accent1"/>
+        </a:effectRef>
+        <a:fontRef idx="minor">
+          <a:schemeClr val="lt1"/>
+        </a:fontRef>
+      </a:style>
+    </a:spDef>
+    <a:lnDef>
+      <a:spPr/>
+      <a:bodyPr/>
+      <a:lstStyle/>
+      <a:style>
+        <a:lnRef idx="2">
+          <a:schemeClr val="accent1"/>
+        </a:lnRef>
+        <a:fillRef idx="0">
+          <a:schemeClr val="accent1"/>
+        </a:fillRef>
+        <a:effectRef idx="1">
+          <a:schemeClr val="accent1"/>
+        </a:effectRef>
+        <a:fontRef idx="minor">
+          <a:schemeClr val="tx1"/>
+        </a:fontRef>
+      </a:style>
+    </a:lnDef>
+  </a:objectDefaults>
+  <a:extraClrSchemeLst/>
+</a:theme>
 </file>
--- a/Seminario de Sistemas/Clases/Clase 11 - Avance del proyecto integrador/Presentacion.pptx
+++ b/Seminario de Sistemas/Clases/Clase 11 - Avance del proyecto integrador/Presentacion.pptx
@@ -517,7 +517,7 @@
           <a:lstStyle/>
           <a:p>
             <a:r>
-              <a:t>Asi es como en VetCare aparece un requisito RF-07 que promete recordatorio de cita por mensajeria, un diagrama de casos de uso donde no existe ningun caso de uso de recordatorio, y un diagrama de clases donde no hay nada parecido a una clase Notificacion.</a:t>
+              <a:t>Asi es como en el sistema de la clinica aparece un requisito RF-07 que promete recordatorio de cita por mensajeria, un diagrama de casos de uso donde no existe ningun caso de uso de recordatorio, y un diagrama de clases donde no hay nada parecido a una clase Notificacion.</a:t>
             </a:r>
           </a:p>
           <a:p/>
@@ -4004,7 +4004,7 @@
                 </a:solidFill>
                 <a:latin typeface="Calibri"/>
               </a:rPr>
-              <a:t>Avance del proyecto integrador</a:t>
+              <a:t>Avance del proyecto de diseño</a:t>
             </a:r>
           </a:p>
         </p:txBody>
@@ -4318,7 +4318,7 @@
                 </a:solidFill>
                 <a:latin typeface="Calibri"/>
               </a:rPr>
-              <a:t>–   En VetCare, un hallazgo bien escrito se ve asi: en el diagrama de clases, la clase Consulta no tiene relacion con Veterinario, pero el flujo principal de CU-03 dice que toda consulta queda a nombre del veterinario que atendio; severidad mayor.</a:t>
+              <a:t>–   En el sistema de la clinica, un hallazgo bien escrito se ve asi: en el diagrama de clases, la clase Consulta no tiene relacion con Veterinario, pero el flujo principal de CU-03 dice que toda consulta queda a nombre del veterinario que atendio; severidad mayor.</a:t>
             </a:r>
           </a:p>
           <a:p>
@@ -4586,7 +4586,7 @@
                 </a:solidFill>
                 <a:latin typeface="Calibri"/>
               </a:rPr>
-              <a:t>–   Sobre ese backlog se define lo que en la industria se llama definicion de terminado del paquete de diseño de VetCare: catalogo de RF y RNF numerado y sin huerfanos</a:t>
+              <a:t>–   Sobre ese backlog se define lo que en la industria se llama definicion de terminado del paquete de diseño del sistema de la clinica: catalogo de RF y RNF numerado y sin huerfanos</a:t>
             </a:r>
           </a:p>
           <a:p>
@@ -5322,7 +5322,7 @@
                 </a:solidFill>
                 <a:latin typeface="Calibri"/>
               </a:rPr>
-              <a:t>-- wireframe dice Animal: son tres entregables que hablan de cosas</a:t>
+              <a:t>-- wireframe dice Animal: son tres artefactos que hablan de cosas</a:t>
             </a:r>
           </a:p>
           <a:p>
@@ -5354,7 +5354,7 @@
                 </a:solidFill>
                 <a:latin typeface="Calibri"/>
               </a:rPr>
-              <a:t>-- en TODOS los artefactos. Esto es la P2 del hito y vale puntos.</a:t>
+              <a:t>-- en TODOS los artefactos.</a:t>
             </a:r>
           </a:p>
         </p:txBody>
@@ -5535,7 +5535,7 @@
                 </a:solidFill>
                 <a:latin typeface="Calibri"/>
               </a:rPr>
-              <a:t>Auditoria cruzada de VetCare: la matriz que delata las contradicciones</a:t>
+              <a:t>Auditoria cruzada del sistema de la clinica: la matriz que delata las contradicciones</a:t>
             </a:r>
           </a:p>
         </p:txBody>
@@ -6209,7 +6209,7 @@
                 </a:solidFill>
                 <a:latin typeface="Calibri"/>
               </a:rPr>
-              <a:t> El docente proyecta el paquete de un equipo ficticio de VetCare y encuentra en vivo tres inconsistencias: un RF sin caso de uso, una clase llamada Dueño que en el catalogo de requisitos se llama Propietario, y un caso de uso que ninguna clase puede soportar.</a:t>
+              <a:t> El docente proyecta el paquete de un equipo ficticio del sistema de la clinica y encuentra en vivo tres inconsistencias: un RF sin caso de uso, una clase llamada Dueño que en el catalogo de requisitos se llama Propietario, y un caso de uso que ninguna clase puede soportar.</a:t>
             </a:r>
           </a:p>
           <a:p>
@@ -6225,7 +6225,7 @@
                 </a:solidFill>
                 <a:latin typeface="Calibri"/>
               </a:rPr>
-              <a:t>–   Mismo dominio VetCare — no otro ejemplo. Aqui se diseña, no se programa.</a:t>
+              <a:t>–   Mismo dominio: la clinica veterinaria — no otro ejemplo. Aqui se diseña, no se programa.</a:t>
             </a:r>
           </a:p>
         </p:txBody>
@@ -6386,7 +6386,7 @@
                 </a:solidFill>
                 <a:latin typeface="Calibri"/>
               </a:rPr>
-              <a:t>Clase 11 · Avance del proyecto integrador</a:t>
+              <a:t>Clase 11 · Avance del proyecto de diseño</a:t>
             </a:r>
           </a:p>
         </p:txBody>
@@ -6695,7 +6695,7 @@
                 </a:solidFill>
                 <a:latin typeface="Calibri"/>
               </a:rPr>
-              <a:t> Avance del proyecto integrador</a:t>
+              <a:t> Avance del proyecto de diseño</a:t>
             </a:r>
           </a:p>
           <a:p>
@@ -6770,7 +6770,7 @@
                 </a:solidFill>
                 <a:latin typeface="Calibri"/>
               </a:rPr>
-              <a:t>–   Ejemplo de toda la clase: VetCare, el sistema de la clinica «Huellitas».</a:t>
+              <a:t>–   Ejemplo de toda la clase: el sistema de una clinica veterinaria.</a:t>
             </a:r>
           </a:p>
         </p:txBody>
@@ -7339,7 +7339,7 @@
                 </a:solidFill>
                 <a:latin typeface="Calibri"/>
               </a:rPr>
-              <a:t>Demo en vivo sobre VetCare</a:t>
+              <a:t>Demo en vivo sobre la clinica</a:t>
             </a:r>
           </a:p>
         </p:txBody>
@@ -8378,7 +8378,7 @@
                 </a:solidFill>
                 <a:latin typeface="Calibri"/>
               </a:rPr>
-              <a:t>–   En VetCare esto se vuelve concreto rapidisimo: RF-05, consultar el expediente de una mascota, junto con el RNF-02 que exige que el resultado aparezca en menos de tres segundos</a:t>
+              <a:t>–   En el sistema de la clinica esto se vuelve concreto rapidisimo: RF-05, consultar el expediente de una mascota, junto con el RNF-02 que exige que el resultado aparezca en menos de tres segundos</a:t>
             </a:r>
           </a:p>
           <a:p>
@@ -8410,7 +8410,7 @@
                 </a:solidFill>
                 <a:latin typeface="Calibri"/>
               </a:rPr>
-              <a:t>–   Si ese camino se rompe en cualquier punto, el problema numero dos de la clinica Huellitas sigue sin resolverse aunque el equipo tenga veinte paginas escritas.</a:t>
+              <a:t>–   Si ese camino se rompe en cualquier punto, el problema numero dos de la clinica sigue sin resolverse aunque el equipo tenga veinte paginas escritas.</a:t>
             </a:r>
           </a:p>
           <a:p>
@@ -8678,7 +8678,7 @@
                 </a:solidFill>
                 <a:latin typeface="Calibri"/>
               </a:rPr>
-              <a:t>–   La solucion es un glosario canonico donde cada concepto de VetCare tiene un nombre unico, una definicion de una linea y una lista explicita de sinonimos prohibidos.</a:t>
+              <a:t>–   La solucion es un glosario canonico donde cada concepto del sistema de la clinica tiene un nombre unico, una definicion de una linea y una lista explicita de sinonimos prohibidos.</a:t>
             </a:r>
           </a:p>
           <a:p>
@@ -8914,7 +8914,7 @@
                 </a:solidFill>
                 <a:latin typeface="Calibri"/>
               </a:rPr>
-              <a:t>–   El glosario tambien separa parejas peligrosas: en Huellitas, Cita es la reserva de un horario futuro y Consulta es el registro de una atencion ya realizada, y confundirlas produce un modelo donde nadie sabe si se esta agendando o atendiendo.</a:t>
+              <a:t>–   El glosario tambien separa parejas peligrosas: en la clinica, Cita es la reserva de un horario futuro y Consulta es el registro de una atencion ya realizada, y confundirlas produce un modelo donde nadie sabe si se esta agendando o atendiendo.</a:t>
             </a:r>
           </a:p>
           <a:p>
@@ -9198,7 +9198,7 @@
                 </a:solidFill>
                 <a:latin typeface="Calibri"/>
               </a:rPr>
-              <a:t>–   Que recorre la rubrica punto por punto y solo reporta hechos observables; y el moderador, que controla el tiempo y escribe los hallazgos.</a:t>
+              <a:t>–   Que recorre la lista de verificacion punto por punto y solo reporta hechos observables; y el moderador, que controla el tiempo y escribe los hallazgos.</a:t>
             </a:r>
           </a:p>
           <a:p>

--- a/Seminario de Sistemas/Clases/Clase 11 - Avance del proyecto integrador/Presentacion.pptx
+++ b/Seminario de Sistemas/Clases/Clase 11 - Avance del proyecto integrador/Presentacion.pptx
@@ -517,7 +517,7 @@
           <a:lstStyle/>
           <a:p>
             <a:r>
-              <a:t>Asi es como en el sistema de la clinica aparece un requisito RF-07 que promete recordatorio de cita por mensajeria, un diagrama de casos de uso donde no existe ningun caso de uso de recordatorio, y un diagrama de clases donde no hay nada parecido a una clase Notificacion.</a:t>
+              <a:t>Asi es como en la clinica aparece un requisito RF-07 que promete recordatorio de cita por mensajeria, un diagrama de casos de uso donde no existe ningun caso de uso de recordatorio, y un diagrama de clases donde no hay nada parecido a una clase Notificacion.</a:t>
             </a:r>
           </a:p>
           <a:p/>
@@ -4318,7 +4318,7 @@
                 </a:solidFill>
                 <a:latin typeface="Calibri"/>
               </a:rPr>
-              <a:t>–   En el sistema de la clinica, un hallazgo bien escrito se ve asi: en el diagrama de clases, la clase Consulta no tiene relacion con Veterinario, pero el flujo principal de CU-03 dice que toda consulta queda a nombre del veterinario que atendio; severidad mayor.</a:t>
+              <a:t>–   En la clinica, un hallazgo bien escrito se ve asi: en el diagrama de clases, la clase Consulta no tiene relacion con Veterinario, pero el flujo principal de CU-03 dice que toda consulta queda a nombre del veterinario que atendio; severidad mayor.</a:t>
             </a:r>
           </a:p>
           <a:p>
@@ -4586,7 +4586,7 @@
                 </a:solidFill>
                 <a:latin typeface="Calibri"/>
               </a:rPr>
-              <a:t>–   Sobre ese backlog se define lo que en la industria se llama definicion de terminado del paquete de diseño del sistema de la clinica: catalogo de RF y RNF numerado y sin huerfanos</a:t>
+              <a:t>–   Sobre ese backlog se define lo que en la industria se llama definicion de terminado del paquete de diseño de la clinica: catalogo de RF y RNF numerado y sin huerfanos</a:t>
             </a:r>
           </a:p>
           <a:p>
@@ -4822,7 +4822,7 @@
                 </a:solidFill>
                 <a:latin typeface="Calibri"/>
               </a:rPr>
-              <a:t>–   Aqui es donde los tres casos de matricula se hacen visibles y conviene decirlo en voz alta en el aula: el que cursa las dos materias entrega estos planos aca y el codigo alla</a:t>
+              <a:t>–   Aqui se hacen visibles los tres casos de matricula: el que cursa las dos materias entrega estos planos aca y el codigo alla; el que solo cursa Programacion II recibe este paquete y todo lo que hoy quede ambiguo lo va a pagar en horas de reproceso</a:t>
             </a:r>
           </a:p>
           <a:p>
@@ -4838,23 +4838,7 @@
                 </a:solidFill>
                 <a:latin typeface="Calibri"/>
               </a:rPr>
-              <a:t>–   El que solo cursa Programacion II recibe este paquete y todo lo que hoy quede ambiguo lo va a pagar en horas de reproceso; y el que solo cursa Seminario cierra con este mismo documento mas el prototipo navegable</a:t>
-            </a:r>
-          </a:p>
-          <a:p>
-            <a:pPr>
-              <a:spcAft>
-                <a:spcPts val="800"/>
-              </a:spcAft>
-            </a:pPr>
-            <a:r>
-              <a:rPr sz="2000" b="0" i="0">
-                <a:solidFill>
-                  <a:srgbClr val="333333"/>
-                </a:solidFill>
-                <a:latin typeface="Calibri"/>
-              </a:rPr>
-              <a:t>–   Que es una ruta completa y valida, no una version reducida del curso.</a:t>
+              <a:t>–   Y el que solo cursa Seminario cierra con este mismo documento mas el prototipo navegable, que es una ruta completa y valida, no una version reducida del curso.</a:t>
             </a:r>
           </a:p>
         </p:txBody>
@@ -5535,7 +5519,7 @@
                 </a:solidFill>
                 <a:latin typeface="Calibri"/>
               </a:rPr>
-              <a:t>Auditoria cruzada del sistema de la clinica: la matriz que delata las contradicciones</a:t>
+              <a:t>Auditoria cruzada de la clinica: la matriz que delata las contradicciones</a:t>
             </a:r>
           </a:p>
         </p:txBody>
@@ -6209,7 +6193,7 @@
                 </a:solidFill>
                 <a:latin typeface="Calibri"/>
               </a:rPr>
-              <a:t> El docente proyecta el paquete de un equipo ficticio del sistema de la clinica y encuentra en vivo tres inconsistencias: un RF sin caso de uso, una clase llamada Dueño que en el catalogo de requisitos se llama Propietario, y un caso de uso que ninguna clase puede soportar.</a:t>
+              <a:t> Se proyecta el paquete de un equipo ficticio de la clinica y encuentra en vivo tres inconsistencias: un RF sin caso de uso, una clase llamada Dueño que en el catalogo de requisitos se llama Propietario, y un caso de uso que ninguna clase puede soportar.</a:t>
             </a:r>
           </a:p>
           <a:p>
@@ -8378,7 +8362,7 @@
                 </a:solidFill>
                 <a:latin typeface="Calibri"/>
               </a:rPr>
-              <a:t>–   En el sistema de la clinica esto se vuelve concreto rapidisimo: RF-05, consultar el expediente de una mascota, junto con el RNF-02 que exige que el resultado aparezca en menos de tres segundos</a:t>
+              <a:t>–   En la clinica esto se vuelve concreto rapidisimo: RF-05, consultar el expediente de una mascota, junto con el RNF-02 que exige que el resultado aparezca en menos de tres segundos</a:t>
             </a:r>
           </a:p>
           <a:p>
@@ -8678,7 +8662,7 @@
                 </a:solidFill>
                 <a:latin typeface="Calibri"/>
               </a:rPr>
-              <a:t>–   La solucion es un glosario canonico donde cada concepto del sistema de la clinica tiene un nombre unico, una definicion de una linea y una lista explicita de sinonimos prohibidos.</a:t>
+              <a:t>–   La solucion es un glosario canonico donde cada concepto del dominio tiene un nombre unico, una definicion de una linea y una lista explicita de sinonimos prohibidos.</a:t>
             </a:r>
           </a:p>
           <a:p>
